--- a/Seminario de Sistemas/Clases/Clase 2 - Ciclos de vida del software/Presentacion.pptx
+++ b/Seminario de Sistemas/Clases/Clase 2 - Ciclos de vida del software/Presentacion.pptx
@@ -19,6 +19,10 @@
     <p:sldId id="267" r:id="rId18"/>
     <p:sldId id="268" r:id="rId19"/>
     <p:sldId id="269" r:id="rId20"/>
+    <p:sldId id="270" r:id="rId21"/>
+    <p:sldId id="271" r:id="rId22"/>
+    <p:sldId id="272" r:id="rId23"/>
+    <p:sldId id="273" r:id="rId24"/>
   </p:sldIdLst>
   <p:sldSz cx="12191695" cy="6858000" type="screen4x3"/>
   <p:notesSz cx="6858000" cy="9144000"/>
@@ -3619,111 +3623,21 @@
                 </a:solidFill>
                 <a:latin typeface="Calibri"/>
               </a:rPr>
-              <a:t>Taller PI — pasos guiados</a:t>
-            </a:r>
-          </a:p>
-        </p:txBody>
-      </p:sp>
-      <p:sp>
-        <p:nvSpPr>
-          <p:cNvPr id="5" name="Rounded Rectangle 4"/>
-          <p:cNvSpPr/>
-          <p:nvPr/>
-        </p:nvSpPr>
-        <p:spPr>
-          <a:xfrm>
-            <a:off x="457200" y="1234440"/>
-            <a:ext cx="11277295" cy="950976"/>
-          </a:xfrm>
-          <a:prstGeom prst="roundRect">
-            <a:avLst>
-              <a:gd name="adj" fmla="val 12000"/>
-            </a:avLst>
-          </a:prstGeom>
-          <a:solidFill>
-            <a:srgbClr val="F2F2F2"/>
-          </a:solidFill>
-          <a:ln>
-            <a:noFill/>
-          </a:ln>
-        </p:spPr>
-        <p:style>
-          <a:lnRef idx="1">
-            <a:schemeClr val="accent1"/>
-          </a:lnRef>
-          <a:fillRef idx="3">
-            <a:schemeClr val="accent1"/>
-          </a:fillRef>
-          <a:effectRef idx="2">
-            <a:schemeClr val="accent1"/>
-          </a:effectRef>
-          <a:fontRef idx="minor">
-            <a:schemeClr val="lt1"/>
-          </a:fontRef>
-        </p:style>
-        <p:txBody>
-          <a:bodyPr rtlCol="0" anchor="ctr"/>
-          <a:lstStyle/>
-          <a:p>
-            <a:pPr algn="ctr"/>
-          </a:p>
-        </p:txBody>
-      </p:sp>
-      <p:sp>
-        <p:nvSpPr>
-          <p:cNvPr id="6" name="Rounded Rectangle 5"/>
-          <p:cNvSpPr/>
-          <p:nvPr/>
-        </p:nvSpPr>
-        <p:spPr>
-          <a:xfrm>
-            <a:off x="594360" y="1490472"/>
-            <a:ext cx="438912" cy="438912"/>
-          </a:xfrm>
-          <a:prstGeom prst="roundRect">
-            <a:avLst>
-              <a:gd name="adj" fmla="val 12000"/>
-            </a:avLst>
-          </a:prstGeom>
-          <a:solidFill>
-            <a:srgbClr val="095292"/>
-          </a:solidFill>
-          <a:ln>
-            <a:noFill/>
-          </a:ln>
-        </p:spPr>
-        <p:style>
-          <a:lnRef idx="1">
-            <a:schemeClr val="accent1"/>
-          </a:lnRef>
-          <a:fillRef idx="3">
-            <a:schemeClr val="accent1"/>
-          </a:fillRef>
-          <a:effectRef idx="2">
-            <a:schemeClr val="accent1"/>
-          </a:effectRef>
-          <a:fontRef idx="minor">
-            <a:schemeClr val="lt1"/>
-          </a:fontRef>
-        </p:style>
-        <p:txBody>
-          <a:bodyPr rtlCol="0" anchor="ctr"/>
-          <a:lstStyle/>
-          <a:p>
-            <a:pPr algn="ctr"/>
-          </a:p>
-        </p:txBody>
-      </p:sp>
-      <p:sp>
-        <p:nvSpPr>
-          <p:cNvPr id="7" name="TextBox 6"/>
+              <a:t>Demo del dia</a:t>
+            </a:r>
+          </a:p>
+        </p:txBody>
+      </p:sp>
+      <p:sp>
+        <p:nvSpPr>
+          <p:cNvPr id="5" name="TextBox 4"/>
           <p:cNvSpPr txBox="1"/>
           <p:nvPr/>
         </p:nvSpPr>
         <p:spPr>
           <a:xfrm>
-            <a:off x="594360" y="1490472"/>
-            <a:ext cx="438912" cy="438912"/>
+            <a:off x="457200" y="1170432"/>
+            <a:ext cx="11277295" cy="5230368"/>
           </a:xfrm>
           <a:prstGeom prst="rect">
             <a:avLst/>
@@ -3731,677 +3645,99 @@
           <a:noFill/>
         </p:spPr>
         <p:txBody>
-          <a:bodyPr wrap="square" anchor="ctr"/>
-          <a:lstStyle/>
-          <a:p>
-            <a:pPr algn="ctr"/>
-            <a:r>
-              <a:rPr sz="1600" b="1" i="0">
-                <a:solidFill>
-                  <a:srgbClr val="FFFFFF"/>
-                </a:solidFill>
-                <a:latin typeface="Calibri"/>
-              </a:rPr>
-              <a:t>1</a:t>
-            </a:r>
-          </a:p>
-        </p:txBody>
-      </p:sp>
-      <p:sp>
-        <p:nvSpPr>
-          <p:cNvPr id="8" name="TextBox 7"/>
-          <p:cNvSpPr txBox="1"/>
-          <p:nvPr/>
-        </p:nvSpPr>
-        <p:spPr>
-          <a:xfrm>
-            <a:off x="1188720" y="1325880"/>
-            <a:ext cx="10271455" cy="786384"/>
-          </a:xfrm>
-          <a:prstGeom prst="rect">
-            <a:avLst/>
-          </a:prstGeom>
-          <a:noFill/>
-        </p:spPr>
-        <p:txBody>
-          <a:bodyPr wrap="square" anchor="ctr"/>
-          <a:lstStyle/>
-          <a:p>
-            <a:r>
-              <a:rPr sz="1400" b="1" i="0">
-                <a:solidFill>
-                  <a:srgbClr val="095292"/>
-                </a:solidFill>
-                <a:latin typeface="Calibri"/>
-              </a:rPr>
-              <a:t>En Google Docs cree la tabla de cuatro columnas (Fase / Pregunta que responde / Artefacto concreto de VetCare / Quien lo aprueba) y llenela con las cinco fases; en la columna del artefacto esta prohibido escribir generalidades: debe decir cosas como 'Lista RF-01 a RF-12 de Huellitas' o 'Mockup de la ficha del paciente'.</a:t>
-            </a:r>
-          </a:p>
-        </p:txBody>
-      </p:sp>
-      <p:sp>
-        <p:nvSpPr>
-          <p:cNvPr id="9" name="Rounded Rectangle 8"/>
-          <p:cNvSpPr/>
-          <p:nvPr/>
-        </p:nvSpPr>
-        <p:spPr>
-          <a:xfrm>
-            <a:off x="457200" y="2276856"/>
-            <a:ext cx="11277295" cy="950976"/>
-          </a:xfrm>
-          <a:prstGeom prst="roundRect">
-            <a:avLst>
-              <a:gd name="adj" fmla="val 12000"/>
-            </a:avLst>
-          </a:prstGeom>
-          <a:solidFill>
-            <a:srgbClr val="E8F4FA"/>
-          </a:solidFill>
-          <a:ln>
-            <a:noFill/>
-          </a:ln>
-        </p:spPr>
-        <p:style>
-          <a:lnRef idx="1">
-            <a:schemeClr val="accent1"/>
-          </a:lnRef>
-          <a:fillRef idx="3">
-            <a:schemeClr val="accent1"/>
-          </a:fillRef>
-          <a:effectRef idx="2">
-            <a:schemeClr val="accent1"/>
-          </a:effectRef>
-          <a:fontRef idx="minor">
-            <a:schemeClr val="lt1"/>
-          </a:fontRef>
-        </p:style>
-        <p:txBody>
-          <a:bodyPr rtlCol="0" anchor="ctr"/>
-          <a:lstStyle/>
-          <a:p>
-            <a:pPr algn="ctr"/>
-          </a:p>
-        </p:txBody>
-      </p:sp>
-      <p:sp>
-        <p:nvSpPr>
-          <p:cNvPr id="10" name="Rounded Rectangle 9"/>
-          <p:cNvSpPr/>
-          <p:nvPr/>
-        </p:nvSpPr>
-        <p:spPr>
-          <a:xfrm>
-            <a:off x="594360" y="2532888"/>
-            <a:ext cx="438912" cy="438912"/>
-          </a:xfrm>
-          <a:prstGeom prst="roundRect">
-            <a:avLst>
-              <a:gd name="adj" fmla="val 12000"/>
-            </a:avLst>
-          </a:prstGeom>
-          <a:solidFill>
-            <a:srgbClr val="095292"/>
-          </a:solidFill>
-          <a:ln>
-            <a:noFill/>
-          </a:ln>
-        </p:spPr>
-        <p:style>
-          <a:lnRef idx="1">
-            <a:schemeClr val="accent1"/>
-          </a:lnRef>
-          <a:fillRef idx="3">
-            <a:schemeClr val="accent1"/>
-          </a:fillRef>
-          <a:effectRef idx="2">
-            <a:schemeClr val="accent1"/>
-          </a:effectRef>
-          <a:fontRef idx="minor">
-            <a:schemeClr val="lt1"/>
-          </a:fontRef>
-        </p:style>
-        <p:txBody>
-          <a:bodyPr rtlCol="0" anchor="ctr"/>
-          <a:lstStyle/>
-          <a:p>
-            <a:pPr algn="ctr"/>
-          </a:p>
-        </p:txBody>
-      </p:sp>
-      <p:sp>
-        <p:nvSpPr>
-          <p:cNvPr id="11" name="TextBox 10"/>
-          <p:cNvSpPr txBox="1"/>
-          <p:nvPr/>
-        </p:nvSpPr>
-        <p:spPr>
-          <a:xfrm>
-            <a:off x="594360" y="2532888"/>
-            <a:ext cx="438912" cy="438912"/>
-          </a:xfrm>
-          <a:prstGeom prst="rect">
-            <a:avLst/>
-          </a:prstGeom>
-          <a:noFill/>
-        </p:spPr>
-        <p:txBody>
-          <a:bodyPr wrap="square" anchor="ctr"/>
-          <a:lstStyle/>
-          <a:p>
-            <a:pPr algn="ctr"/>
-            <a:r>
-              <a:rPr sz="1600" b="1" i="0">
-                <a:solidFill>
-                  <a:srgbClr val="FFFFFF"/>
-                </a:solidFill>
-                <a:latin typeface="Calibri"/>
-              </a:rPr>
-              <a:t>2</a:t>
-            </a:r>
-          </a:p>
-        </p:txBody>
-      </p:sp>
-      <p:sp>
-        <p:nvSpPr>
-          <p:cNvPr id="12" name="TextBox 11"/>
-          <p:cNvSpPr txBox="1"/>
-          <p:nvPr/>
-        </p:nvSpPr>
-        <p:spPr>
-          <a:xfrm>
-            <a:off x="1188720" y="2368296"/>
-            <a:ext cx="10271455" cy="786384"/>
-          </a:xfrm>
-          <a:prstGeom prst="rect">
-            <a:avLst/>
-          </a:prstGeom>
-          <a:noFill/>
-        </p:spPr>
-        <p:txBody>
-          <a:bodyPr wrap="square" anchor="ctr"/>
-          <a:lstStyle/>
-          <a:p>
-            <a:r>
-              <a:rPr sz="1500" b="1" i="0">
-                <a:solidFill>
-                  <a:srgbClr val="095292"/>
-                </a:solidFill>
-                <a:latin typeface="Calibri"/>
-              </a:rPr>
-              <a:t>Marque con relleno amarillo la fila de la fase donde esta el equipo hoy y escriba debajo dos evidencias verificables que lo demuestren (por ejemplo: 'existe la entrevista transcrita' y 'no existe ningun diagrama aprobado').</a:t>
-            </a:r>
-          </a:p>
-        </p:txBody>
-      </p:sp>
-      <p:sp>
-        <p:nvSpPr>
-          <p:cNvPr id="13" name="Rounded Rectangle 12"/>
-          <p:cNvSpPr/>
-          <p:nvPr/>
-        </p:nvSpPr>
-        <p:spPr>
-          <a:xfrm>
-            <a:off x="457200" y="3319272"/>
-            <a:ext cx="11277295" cy="950976"/>
-          </a:xfrm>
-          <a:prstGeom prst="roundRect">
-            <a:avLst>
-              <a:gd name="adj" fmla="val 12000"/>
-            </a:avLst>
-          </a:prstGeom>
-          <a:solidFill>
-            <a:srgbClr val="F2F2F2"/>
-          </a:solidFill>
-          <a:ln>
-            <a:noFill/>
-          </a:ln>
-        </p:spPr>
-        <p:style>
-          <a:lnRef idx="1">
-            <a:schemeClr val="accent1"/>
-          </a:lnRef>
-          <a:fillRef idx="3">
-            <a:schemeClr val="accent1"/>
-          </a:fillRef>
-          <a:effectRef idx="2">
-            <a:schemeClr val="accent1"/>
-          </a:effectRef>
-          <a:fontRef idx="minor">
-            <a:schemeClr val="lt1"/>
-          </a:fontRef>
-        </p:style>
-        <p:txBody>
-          <a:bodyPr rtlCol="0" anchor="ctr"/>
-          <a:lstStyle/>
-          <a:p>
-            <a:pPr algn="ctr"/>
-          </a:p>
-        </p:txBody>
-      </p:sp>
-      <p:sp>
-        <p:nvSpPr>
-          <p:cNvPr id="14" name="Rounded Rectangle 13"/>
-          <p:cNvSpPr/>
-          <p:nvPr/>
-        </p:nvSpPr>
-        <p:spPr>
-          <a:xfrm>
-            <a:off x="594360" y="3575304"/>
-            <a:ext cx="438912" cy="438912"/>
-          </a:xfrm>
-          <a:prstGeom prst="roundRect">
-            <a:avLst>
-              <a:gd name="adj" fmla="val 12000"/>
-            </a:avLst>
-          </a:prstGeom>
-          <a:solidFill>
-            <a:srgbClr val="095292"/>
-          </a:solidFill>
-          <a:ln>
-            <a:noFill/>
-          </a:ln>
-        </p:spPr>
-        <p:style>
-          <a:lnRef idx="1">
-            <a:schemeClr val="accent1"/>
-          </a:lnRef>
-          <a:fillRef idx="3">
-            <a:schemeClr val="accent1"/>
-          </a:fillRef>
-          <a:effectRef idx="2">
-            <a:schemeClr val="accent1"/>
-          </a:effectRef>
-          <a:fontRef idx="minor">
-            <a:schemeClr val="lt1"/>
-          </a:fontRef>
-        </p:style>
-        <p:txBody>
-          <a:bodyPr rtlCol="0" anchor="ctr"/>
-          <a:lstStyle/>
-          <a:p>
-            <a:pPr algn="ctr"/>
-          </a:p>
-        </p:txBody>
-      </p:sp>
-      <p:sp>
-        <p:nvSpPr>
-          <p:cNvPr id="15" name="TextBox 14"/>
-          <p:cNvSpPr txBox="1"/>
-          <p:nvPr/>
-        </p:nvSpPr>
-        <p:spPr>
-          <a:xfrm>
-            <a:off x="594360" y="3575304"/>
-            <a:ext cx="438912" cy="438912"/>
-          </a:xfrm>
-          <a:prstGeom prst="rect">
-            <a:avLst/>
-          </a:prstGeom>
-          <a:noFill/>
-        </p:spPr>
-        <p:txBody>
-          <a:bodyPr wrap="square" anchor="ctr"/>
-          <a:lstStyle/>
-          <a:p>
-            <a:pPr algn="ctr"/>
-            <a:r>
-              <a:rPr sz="1600" b="1" i="0">
-                <a:solidFill>
-                  <a:srgbClr val="FFFFFF"/>
-                </a:solidFill>
-                <a:latin typeface="Calibri"/>
-              </a:rPr>
-              <a:t>3</a:t>
-            </a:r>
-          </a:p>
-        </p:txBody>
-      </p:sp>
-      <p:sp>
-        <p:nvSpPr>
-          <p:cNvPr id="16" name="TextBox 15"/>
-          <p:cNvSpPr txBox="1"/>
-          <p:nvPr/>
-        </p:nvSpPr>
-        <p:spPr>
-          <a:xfrm>
-            <a:off x="1188720" y="3410712"/>
-            <a:ext cx="10271455" cy="786384"/>
-          </a:xfrm>
-          <a:prstGeom prst="rect">
-            <a:avLst/>
-          </a:prstGeom>
-          <a:noFill/>
-        </p:spPr>
-        <p:txBody>
-          <a:bodyPr wrap="square" anchor="ctr"/>
-          <a:lstStyle/>
-          <a:p>
-            <a:r>
-              <a:rPr sz="1500" b="1" i="0">
-                <a:solidFill>
-                  <a:srgbClr val="095292"/>
-                </a:solidFill>
-                <a:latin typeface="Calibri"/>
-              </a:rPr>
-              <a:t>En draw.io dibuje el recorrido lineal de VetCare: cinco cajas en fila, y sobre cada flecha escriba el artefacto que se entrega para poder pasar a la siguiente fase.</a:t>
-            </a:r>
-          </a:p>
-        </p:txBody>
-      </p:sp>
-      <p:sp>
-        <p:nvSpPr>
-          <p:cNvPr id="17" name="Rounded Rectangle 16"/>
-          <p:cNvSpPr/>
-          <p:nvPr/>
-        </p:nvSpPr>
-        <p:spPr>
-          <a:xfrm>
-            <a:off x="457200" y="4361688"/>
-            <a:ext cx="11277295" cy="950976"/>
-          </a:xfrm>
-          <a:prstGeom prst="roundRect">
-            <a:avLst>
-              <a:gd name="adj" fmla="val 12000"/>
-            </a:avLst>
-          </a:prstGeom>
-          <a:solidFill>
-            <a:srgbClr val="E8F4FA"/>
-          </a:solidFill>
-          <a:ln>
-            <a:noFill/>
-          </a:ln>
-        </p:spPr>
-        <p:style>
-          <a:lnRef idx="1">
-            <a:schemeClr val="accent1"/>
-          </a:lnRef>
-          <a:fillRef idx="3">
-            <a:schemeClr val="accent1"/>
-          </a:fillRef>
-          <a:effectRef idx="2">
-            <a:schemeClr val="accent1"/>
-          </a:effectRef>
-          <a:fontRef idx="minor">
-            <a:schemeClr val="lt1"/>
-          </a:fontRef>
-        </p:style>
-        <p:txBody>
-          <a:bodyPr rtlCol="0" anchor="ctr"/>
-          <a:lstStyle/>
-          <a:p>
-            <a:pPr algn="ctr"/>
-          </a:p>
-        </p:txBody>
-      </p:sp>
-      <p:sp>
-        <p:nvSpPr>
-          <p:cNvPr id="18" name="Rounded Rectangle 17"/>
-          <p:cNvSpPr/>
-          <p:nvPr/>
-        </p:nvSpPr>
-        <p:spPr>
-          <a:xfrm>
-            <a:off x="594360" y="4617720"/>
-            <a:ext cx="438912" cy="438912"/>
-          </a:xfrm>
-          <a:prstGeom prst="roundRect">
-            <a:avLst>
-              <a:gd name="adj" fmla="val 12000"/>
-            </a:avLst>
-          </a:prstGeom>
-          <a:solidFill>
-            <a:srgbClr val="095292"/>
-          </a:solidFill>
-          <a:ln>
-            <a:noFill/>
-          </a:ln>
-        </p:spPr>
-        <p:style>
-          <a:lnRef idx="1">
-            <a:schemeClr val="accent1"/>
-          </a:lnRef>
-          <a:fillRef idx="3">
-            <a:schemeClr val="accent1"/>
-          </a:fillRef>
-          <a:effectRef idx="2">
-            <a:schemeClr val="accent1"/>
-          </a:effectRef>
-          <a:fontRef idx="minor">
-            <a:schemeClr val="lt1"/>
-          </a:fontRef>
-        </p:style>
-        <p:txBody>
-          <a:bodyPr rtlCol="0" anchor="ctr"/>
-          <a:lstStyle/>
-          <a:p>
-            <a:pPr algn="ctr"/>
-          </a:p>
-        </p:txBody>
-      </p:sp>
-      <p:sp>
-        <p:nvSpPr>
-          <p:cNvPr id="19" name="TextBox 18"/>
-          <p:cNvSpPr txBox="1"/>
-          <p:nvPr/>
-        </p:nvSpPr>
-        <p:spPr>
-          <a:xfrm>
-            <a:off x="594360" y="4617720"/>
-            <a:ext cx="438912" cy="438912"/>
-          </a:xfrm>
-          <a:prstGeom prst="rect">
-            <a:avLst/>
-          </a:prstGeom>
-          <a:noFill/>
-        </p:spPr>
-        <p:txBody>
-          <a:bodyPr wrap="square" anchor="ctr"/>
-          <a:lstStyle/>
-          <a:p>
-            <a:pPr algn="ctr"/>
-            <a:r>
-              <a:rPr sz="1600" b="1" i="0">
-                <a:solidFill>
-                  <a:srgbClr val="FFFFFF"/>
-                </a:solidFill>
-                <a:latin typeface="Calibri"/>
-              </a:rPr>
-              <a:t>4</a:t>
-            </a:r>
-          </a:p>
-        </p:txBody>
-      </p:sp>
-      <p:sp>
-        <p:nvSpPr>
-          <p:cNvPr id="20" name="TextBox 19"/>
-          <p:cNvSpPr txBox="1"/>
-          <p:nvPr/>
-        </p:nvSpPr>
-        <p:spPr>
-          <a:xfrm>
-            <a:off x="1188720" y="4453128"/>
-            <a:ext cx="10271455" cy="786384"/>
-          </a:xfrm>
-          <a:prstGeom prst="rect">
-            <a:avLst/>
-          </a:prstGeom>
-          <a:noFill/>
-        </p:spPr>
-        <p:txBody>
-          <a:bodyPr wrap="square" anchor="ctr"/>
-          <a:lstStyle/>
-          <a:p>
-            <a:r>
-              <a:rPr sz="1400" b="1" i="0">
-                <a:solidFill>
-                  <a:srgbClr val="095292"/>
-                </a:solidFill>
-                <a:latin typeface="Calibri"/>
-              </a:rPr>
-              <a:t>Duplique la pagina en draw.io y dibuje el recorrido en tres vueltas: las mismas cinco cajas, pero con las vueltas rotuladas Incremento 1 (ficha del paciente), Incremento 2 (historia clinica y busqueda) e Incremento 3 (reportes y metricas), y una flecha de retroalimentacion desde la clinica hacia requisitos.</a:t>
-            </a:r>
-          </a:p>
-        </p:txBody>
-      </p:sp>
-      <p:sp>
-        <p:nvSpPr>
-          <p:cNvPr id="21" name="Rounded Rectangle 20"/>
-          <p:cNvSpPr/>
-          <p:nvPr/>
-        </p:nvSpPr>
-        <p:spPr>
-          <a:xfrm>
-            <a:off x="457200" y="5404104"/>
-            <a:ext cx="11277295" cy="950976"/>
-          </a:xfrm>
-          <a:prstGeom prst="roundRect">
-            <a:avLst>
-              <a:gd name="adj" fmla="val 12000"/>
-            </a:avLst>
-          </a:prstGeom>
-          <a:solidFill>
-            <a:srgbClr val="F2F2F2"/>
-          </a:solidFill>
-          <a:ln>
-            <a:noFill/>
-          </a:ln>
-        </p:spPr>
-        <p:style>
-          <a:lnRef idx="1">
-            <a:schemeClr val="accent1"/>
-          </a:lnRef>
-          <a:fillRef idx="3">
-            <a:schemeClr val="accent1"/>
-          </a:fillRef>
-          <a:effectRef idx="2">
-            <a:schemeClr val="accent1"/>
-          </a:effectRef>
-          <a:fontRef idx="minor">
-            <a:schemeClr val="lt1"/>
-          </a:fontRef>
-        </p:style>
-        <p:txBody>
-          <a:bodyPr rtlCol="0" anchor="ctr"/>
-          <a:lstStyle/>
-          <a:p>
-            <a:pPr algn="ctr"/>
-          </a:p>
-        </p:txBody>
-      </p:sp>
-      <p:sp>
-        <p:nvSpPr>
-          <p:cNvPr id="22" name="Rounded Rectangle 21"/>
-          <p:cNvSpPr/>
-          <p:nvPr/>
-        </p:nvSpPr>
-        <p:spPr>
-          <a:xfrm>
-            <a:off x="594360" y="5660136"/>
-            <a:ext cx="438912" cy="438912"/>
-          </a:xfrm>
-          <a:prstGeom prst="roundRect">
-            <a:avLst>
-              <a:gd name="adj" fmla="val 12000"/>
-            </a:avLst>
-          </a:prstGeom>
-          <a:solidFill>
-            <a:srgbClr val="095292"/>
-          </a:solidFill>
-          <a:ln>
-            <a:noFill/>
-          </a:ln>
-        </p:spPr>
-        <p:style>
-          <a:lnRef idx="1">
-            <a:schemeClr val="accent1"/>
-          </a:lnRef>
-          <a:fillRef idx="3">
-            <a:schemeClr val="accent1"/>
-          </a:fillRef>
-          <a:effectRef idx="2">
-            <a:schemeClr val="accent1"/>
-          </a:effectRef>
-          <a:fontRef idx="minor">
-            <a:schemeClr val="lt1"/>
-          </a:fontRef>
-        </p:style>
-        <p:txBody>
-          <a:bodyPr rtlCol="0" anchor="ctr"/>
-          <a:lstStyle/>
-          <a:p>
-            <a:pPr algn="ctr"/>
-          </a:p>
-        </p:txBody>
-      </p:sp>
-      <p:sp>
-        <p:nvSpPr>
-          <p:cNvPr id="23" name="TextBox 22"/>
-          <p:cNvSpPr txBox="1"/>
-          <p:nvPr/>
-        </p:nvSpPr>
-        <p:spPr>
-          <a:xfrm>
-            <a:off x="594360" y="5660136"/>
-            <a:ext cx="438912" cy="438912"/>
-          </a:xfrm>
-          <a:prstGeom prst="rect">
-            <a:avLst/>
-          </a:prstGeom>
-          <a:noFill/>
-        </p:spPr>
-        <p:txBody>
-          <a:bodyPr wrap="square" anchor="ctr"/>
-          <a:lstStyle/>
-          <a:p>
-            <a:pPr algn="ctr"/>
-            <a:r>
-              <a:rPr sz="1600" b="1" i="0">
-                <a:solidFill>
-                  <a:srgbClr val="FFFFFF"/>
-                </a:solidFill>
-                <a:latin typeface="Calibri"/>
-              </a:rPr>
-              <a:t>5</a:t>
-            </a:r>
-          </a:p>
-        </p:txBody>
-      </p:sp>
-      <p:sp>
-        <p:nvSpPr>
-          <p:cNvPr id="24" name="TextBox 23"/>
-          <p:cNvSpPr txBox="1"/>
-          <p:nvPr/>
-        </p:nvSpPr>
-        <p:spPr>
-          <a:xfrm>
-            <a:off x="1188720" y="5495544"/>
-            <a:ext cx="10271455" cy="786384"/>
-          </a:xfrm>
-          <a:prstGeom prst="rect">
-            <a:avLst/>
-          </a:prstGeom>
-          <a:noFill/>
-        </p:spPr>
-        <p:txBody>
-          <a:bodyPr wrap="square" anchor="ctr"/>
-          <a:lstStyle/>
-          <a:p>
-            <a:r>
-              <a:rPr sz="1400" b="1" i="0">
-                <a:solidFill>
-                  <a:srgbClr val="095292"/>
-                </a:solidFill>
-                <a:latin typeface="Calibri"/>
-              </a:rPr>
-              <a:t>Escriba al final del documento un parrafo de tres renglones titulado 'Producto vs proyecto en VetCare' que responda: cuando termina el proyecto, cuando terminaria el producto y un ejemplo concreto de una solicitud de mantenimiento; exporte a PDF y suba el archivo a la plataforma del curso.</a:t>
-            </a:r>
-          </a:p>
-        </p:txBody>
-      </p:sp>
-      <p:sp>
-        <p:nvSpPr>
-          <p:cNvPr id="25" name="TextBox 24"/>
+          <a:bodyPr wrap="square">
+            <a:spAutoFit/>
+          </a:bodyPr>
+          <a:lstStyle/>
+          <a:p>
+            <a:pPr>
+              <a:spcAft>
+                <a:spcPts val="800"/>
+              </a:spcAft>
+            </a:pPr>
+            <a:r>
+              <a:rPr sz="2000" b="0" i="0">
+                <a:solidFill>
+                  <a:srgbClr val="333333"/>
+                </a:solidFill>
+                <a:latin typeface="Calibri"/>
+              </a:rPr>
+              <a:t>–   </a:t>
+            </a:r>
+            <a:r>
+              <a:rPr sz="2000" b="1" i="0">
+                <a:solidFill>
+                  <a:srgbClr val="333333"/>
+                </a:solidFill>
+                <a:latin typeface="Calibri"/>
+              </a:rPr>
+              <a:t>Herramienta:</a:t>
+            </a:r>
+            <a:r>
+              <a:rPr sz="2000" b="0" i="0">
+                <a:solidFill>
+                  <a:srgbClr val="333333"/>
+                </a:solidFill>
+                <a:latin typeface="Calibri"/>
+              </a:rPr>
+              <a:t> draw.io · Google Docs</a:t>
+            </a:r>
+          </a:p>
+          <a:p>
+            <a:pPr>
+              <a:spcAft>
+                <a:spcPts val="800"/>
+              </a:spcAft>
+            </a:pPr>
+            <a:r>
+              <a:rPr sz="2000" b="0" i="0">
+                <a:solidFill>
+                  <a:srgbClr val="333333"/>
+                </a:solidFill>
+                <a:latin typeface="Calibri"/>
+              </a:rPr>
+              <a:t>–   </a:t>
+            </a:r>
+            <a:r>
+              <a:rPr sz="2000" b="1" i="0">
+                <a:solidFill>
+                  <a:srgbClr val="333333"/>
+                </a:solidFill>
+                <a:latin typeface="Calibri"/>
+              </a:rPr>
+              <a:t>Demo:</a:t>
+            </a:r>
+            <a:r>
+              <a:rPr sz="2000" b="0" i="0">
+                <a:solidFill>
+                  <a:srgbClr val="333333"/>
+                </a:solidFill>
+                <a:latin typeface="Calibri"/>
+              </a:rPr>
+              <a:t> El docente arma en vivo en draw.io el ciclo de VetCare en dos versiones, una sola pasada y tres vueltas, y muestra que las cajas son identicas y lo unico que cambia es el recorrido.</a:t>
+            </a:r>
+          </a:p>
+          <a:p>
+            <a:pPr>
+              <a:spcAft>
+                <a:spcPts val="800"/>
+              </a:spcAft>
+            </a:pPr>
+            <a:r>
+              <a:rPr sz="2000" b="0" i="0">
+                <a:solidFill>
+                  <a:srgbClr val="333333"/>
+                </a:solidFill>
+                <a:latin typeface="Calibri"/>
+              </a:rPr>
+              <a:t>–   Mismo dominio VetCare — no otro ejemplo. Aqui se diseña, no se programa.</a:t>
+            </a:r>
+          </a:p>
+        </p:txBody>
+      </p:sp>
+      <p:sp>
+        <p:nvSpPr>
+          <p:cNvPr id="6" name="TextBox 5"/>
           <p:cNvSpPr txBox="1"/>
           <p:nvPr/>
         </p:nvSpPr>
@@ -4469,7 +3805,7 @@
         <p:spPr>
           <a:xfrm>
             <a:off x="0" y="0"/>
-            <a:ext cx="12191695" cy="960120"/>
+            <a:ext cx="12191695" cy="1170432"/>
           </a:xfrm>
           <a:prstGeom prst="rect">
             <a:avLst/>
@@ -4511,7 +3847,7 @@
         </p:nvSpPr>
         <p:spPr>
           <a:xfrm>
-            <a:off x="0" y="960120"/>
+            <a:off x="0" y="1170432"/>
             <a:ext cx="12191695" cy="41148"/>
           </a:xfrm>
           <a:prstGeom prst="rect">
@@ -4555,7 +3891,7 @@
         <p:spPr>
           <a:xfrm>
             <a:off x="457200" y="164592"/>
-            <a:ext cx="11277295" cy="502920"/>
+            <a:ext cx="11277295" cy="384048"/>
           </a:xfrm>
           <a:prstGeom prst="rect">
             <a:avLst/>
@@ -4575,21 +3911,55 @@
                 </a:solidFill>
                 <a:latin typeface="Calibri"/>
               </a:rPr>
-              <a:t>Antes de entregar — autochequeo</a:t>
-            </a:r>
-          </a:p>
-        </p:txBody>
-      </p:sp>
-      <p:sp>
-        <p:nvSpPr>
-          <p:cNvPr id="5" name="Rounded Rectangle 4"/>
+              <a:t>Herramientas de hoy</a:t>
+            </a:r>
+          </a:p>
+        </p:txBody>
+      </p:sp>
+      <p:sp>
+        <p:nvSpPr>
+          <p:cNvPr id="5" name="TextBox 4"/>
+          <p:cNvSpPr txBox="1"/>
+          <p:nvPr/>
+        </p:nvSpPr>
+        <p:spPr>
+          <a:xfrm>
+            <a:off x="457200" y="566928"/>
+            <a:ext cx="11277295" cy="411480"/>
+          </a:xfrm>
+          <a:prstGeom prst="rect">
+            <a:avLst/>
+          </a:prstGeom>
+          <a:noFill/>
+        </p:spPr>
+        <p:txBody>
+          <a:bodyPr wrap="square">
+            <a:spAutoFit/>
+          </a:bodyPr>
+          <a:lstStyle/>
+          <a:p>
+            <a:r>
+              <a:rPr sz="1400" b="0" i="0">
+                <a:solidFill>
+                  <a:srgbClr val="B8D8EE"/>
+                </a:solidFill>
+                <a:latin typeface="Calibri"/>
+              </a:rPr>
+              <a:t>Gratis · funcionan en el navegador</a:t>
+            </a:r>
+          </a:p>
+        </p:txBody>
+      </p:sp>
+      <p:sp>
+        <p:nvSpPr>
+          <p:cNvPr id="6" name="Rounded Rectangle 5"/>
           <p:cNvSpPr/>
           <p:nvPr/>
         </p:nvSpPr>
         <p:spPr>
           <a:xfrm>
-            <a:off x="457200" y="1261872"/>
-            <a:ext cx="11277295" cy="566928"/>
+            <a:off x="457200" y="1591056"/>
+            <a:ext cx="3624986" cy="2331720"/>
           </a:xfrm>
           <a:prstGeom prst="roundRect">
             <a:avLst>
@@ -4627,25 +3997,23 @@
       </p:sp>
       <p:sp>
         <p:nvSpPr>
-          <p:cNvPr id="6" name="Rectangle 5"/>
+          <p:cNvPr id="7" name="Rectangle 6"/>
           <p:cNvSpPr/>
           <p:nvPr/>
         </p:nvSpPr>
         <p:spPr>
           <a:xfrm>
-            <a:off x="640080" y="1408175"/>
-            <a:ext cx="274320" cy="274320"/>
+            <a:off x="457200" y="1591056"/>
+            <a:ext cx="3624986" cy="64008"/>
           </a:xfrm>
           <a:prstGeom prst="rect">
             <a:avLst/>
           </a:prstGeom>
           <a:solidFill>
-            <a:srgbClr val="FFFFFF"/>
+            <a:srgbClr val="095292"/>
           </a:solidFill>
           <a:ln>
-            <a:solidFill>
-              <a:srgbClr val="333333"/>
-            </a:solidFill>
+            <a:noFill/>
           </a:ln>
         </p:spPr>
         <p:style>
@@ -4672,20 +4040,20 @@
       </p:sp>
       <p:sp>
         <p:nvSpPr>
-          <p:cNvPr id="7" name="Rectangle 6"/>
+          <p:cNvPr id="8" name="Rectangle 7"/>
           <p:cNvSpPr/>
           <p:nvPr/>
         </p:nvSpPr>
         <p:spPr>
           <a:xfrm>
-            <a:off x="640080" y="1408175"/>
-            <a:ext cx="73152" cy="274320"/>
+            <a:off x="457200" y="1655064"/>
+            <a:ext cx="3624986" cy="27432"/>
           </a:xfrm>
           <a:prstGeom prst="rect">
             <a:avLst/>
           </a:prstGeom>
           <a:solidFill>
-            <a:srgbClr val="269CCB"/>
+            <a:srgbClr val="FFD000"/>
           </a:solidFill>
           <a:ln>
             <a:noFill/>
@@ -4713,16 +4081,40 @@
           </a:p>
         </p:txBody>
       </p:sp>
-      <p:sp>
-        <p:nvSpPr>
-          <p:cNvPr id="8" name="TextBox 7"/>
+      <p:pic>
+        <p:nvPicPr>
+          <p:cNvPr id="9" name="Picture 8" descr="drawio.png"/>
+          <p:cNvPicPr>
+            <a:picLocks noChangeAspect="1"/>
+          </p:cNvPicPr>
+          <p:nvPr/>
+        </p:nvPicPr>
+        <p:blipFill>
+          <a:blip r:embed="rId2"/>
+          <a:stretch>
+            <a:fillRect/>
+          </a:stretch>
+        </p:blipFill>
+        <p:spPr>
+          <a:xfrm>
+            <a:off x="1643329" y="1847087"/>
+            <a:ext cx="1252728" cy="1252728"/>
+          </a:xfrm>
+          <a:prstGeom prst="rect">
+            <a:avLst/>
+          </a:prstGeom>
+        </p:spPr>
+      </p:pic>
+      <p:sp>
+        <p:nvSpPr>
+          <p:cNvPr id="10" name="TextBox 9"/>
           <p:cNvSpPr txBox="1"/>
           <p:nvPr/>
         </p:nvSpPr>
         <p:spPr>
           <a:xfrm>
-            <a:off x="1097280" y="1353312"/>
-            <a:ext cx="10362895" cy="402336"/>
+            <a:off x="530352" y="3191256"/>
+            <a:ext cx="3478682" cy="621792"/>
           </a:xfrm>
           <a:prstGeom prst="rect">
             <a:avLst/>
@@ -4730,31 +4122,48 @@
           <a:noFill/>
         </p:spPr>
         <p:txBody>
-          <a:bodyPr wrap="square" anchor="ctr"/>
-          <a:lstStyle/>
-          <a:p>
-            <a:r>
-              <a:rPr sz="1500" b="0" i="0">
-                <a:solidFill>
-                  <a:srgbClr val="333333"/>
-                </a:solidFill>
-                <a:latin typeface="Calibri"/>
-              </a:rPr>
-              <a:t>Si borro la palabra VetCare de su tabla, esa tabla serviria igual para un cajero automatico o para una tienda de ropa? Si la respuesta es si, todavia no aterrizo nada.</a:t>
-            </a:r>
-          </a:p>
-        </p:txBody>
-      </p:sp>
-      <p:sp>
-        <p:nvSpPr>
-          <p:cNvPr id="9" name="Rounded Rectangle 8"/>
+          <a:bodyPr wrap="square" anchor="t"/>
+          <a:lstStyle/>
+          <a:p>
+            <a:pPr algn="ctr"/>
+            <a:r>
+              <a:rPr sz="1300" b="1" i="0">
+                <a:solidFill>
+                  <a:srgbClr val="095292"/>
+                </a:solidFill>
+                <a:latin typeface="Calibri"/>
+              </a:rPr>
+              <a:t>Draw.Io</a:t>
+            </a:r>
+          </a:p>
+          <a:p>
+            <a:pPr algn="ctr">
+              <a:spcBef>
+                <a:spcPts val="200"/>
+              </a:spcBef>
+            </a:pPr>
+            <a:r>
+              <a:rPr sz="1000" b="0" i="0">
+                <a:solidFill>
+                  <a:srgbClr val="666666"/>
+                </a:solidFill>
+                <a:latin typeface="Calibri"/>
+              </a:rPr>
+              <a:t>Diagramas UML y de contexto</a:t>
+            </a:r>
+          </a:p>
+        </p:txBody>
+      </p:sp>
+      <p:sp>
+        <p:nvSpPr>
+          <p:cNvPr id="11" name="Rounded Rectangle 10"/>
           <p:cNvSpPr/>
           <p:nvPr/>
         </p:nvSpPr>
         <p:spPr>
           <a:xfrm>
-            <a:off x="457200" y="1938528"/>
-            <a:ext cx="11277295" cy="566928"/>
+            <a:off x="4283354" y="1591056"/>
+            <a:ext cx="3624986" cy="2331720"/>
           </a:xfrm>
           <a:prstGeom prst="roundRect">
             <a:avLst>
@@ -4792,25 +4201,23 @@
       </p:sp>
       <p:sp>
         <p:nvSpPr>
-          <p:cNvPr id="10" name="Rectangle 9"/>
+          <p:cNvPr id="12" name="Rectangle 11"/>
           <p:cNvSpPr/>
           <p:nvPr/>
         </p:nvSpPr>
         <p:spPr>
           <a:xfrm>
-            <a:off x="640080" y="2084832"/>
-            <a:ext cx="274320" cy="274320"/>
+            <a:off x="4283354" y="1591056"/>
+            <a:ext cx="3624986" cy="64008"/>
           </a:xfrm>
           <a:prstGeom prst="rect">
             <a:avLst/>
           </a:prstGeom>
           <a:solidFill>
-            <a:srgbClr val="FFFFFF"/>
+            <a:srgbClr val="095292"/>
           </a:solidFill>
           <a:ln>
-            <a:solidFill>
-              <a:srgbClr val="333333"/>
-            </a:solidFill>
+            <a:noFill/>
           </a:ln>
         </p:spPr>
         <p:style>
@@ -4837,20 +4244,20 @@
       </p:sp>
       <p:sp>
         <p:nvSpPr>
-          <p:cNvPr id="11" name="Rectangle 10"/>
+          <p:cNvPr id="13" name="Rectangle 12"/>
           <p:cNvSpPr/>
           <p:nvPr/>
         </p:nvSpPr>
         <p:spPr>
           <a:xfrm>
-            <a:off x="640080" y="2084832"/>
-            <a:ext cx="73152" cy="274320"/>
+            <a:off x="4283354" y="1655064"/>
+            <a:ext cx="3624986" cy="27432"/>
           </a:xfrm>
           <a:prstGeom prst="rect">
             <a:avLst/>
           </a:prstGeom>
           <a:solidFill>
-            <a:srgbClr val="269CCB"/>
+            <a:srgbClr val="FFD000"/>
           </a:solidFill>
           <a:ln>
             <a:noFill/>
@@ -4878,16 +4285,40 @@
           </a:p>
         </p:txBody>
       </p:sp>
-      <p:sp>
-        <p:nvSpPr>
-          <p:cNvPr id="12" name="TextBox 11"/>
+      <p:pic>
+        <p:nvPicPr>
+          <p:cNvPr id="14" name="Picture 13" descr="google_docs.png"/>
+          <p:cNvPicPr>
+            <a:picLocks noChangeAspect="1"/>
+          </p:cNvPicPr>
+          <p:nvPr/>
+        </p:nvPicPr>
+        <p:blipFill>
+          <a:blip r:embed="rId3"/>
+          <a:stretch>
+            <a:fillRect/>
+          </a:stretch>
+        </p:blipFill>
+        <p:spPr>
+          <a:xfrm>
+            <a:off x="5469483" y="1847087"/>
+            <a:ext cx="1252728" cy="1252728"/>
+          </a:xfrm>
+          <a:prstGeom prst="rect">
+            <a:avLst/>
+          </a:prstGeom>
+        </p:spPr>
+      </p:pic>
+      <p:sp>
+        <p:nvSpPr>
+          <p:cNvPr id="15" name="TextBox 14"/>
           <p:cNvSpPr txBox="1"/>
           <p:nvPr/>
         </p:nvSpPr>
         <p:spPr>
           <a:xfrm>
-            <a:off x="1097280" y="2029968"/>
-            <a:ext cx="10362895" cy="402336"/>
+            <a:off x="4356506" y="3191256"/>
+            <a:ext cx="3478682" cy="621792"/>
           </a:xfrm>
           <a:prstGeom prst="rect">
             <a:avLst/>
@@ -4895,31 +4326,48 @@
           <a:noFill/>
         </p:spPr>
         <p:txBody>
-          <a:bodyPr wrap="square" anchor="ctr"/>
-          <a:lstStyle/>
-          <a:p>
-            <a:r>
-              <a:rPr sz="1500" b="0" i="0">
-                <a:solidFill>
-                  <a:srgbClr val="333333"/>
-                </a:solidFill>
-                <a:latin typeface="Calibri"/>
-              </a:rPr>
-              <a:t>En su diagrama de vueltas, cada vuelta termina en algo que la veterinaria podria mirar y opinar, o termina en trabajo interno que solo entiende el equipo?</a:t>
-            </a:r>
-          </a:p>
-        </p:txBody>
-      </p:sp>
-      <p:sp>
-        <p:nvSpPr>
-          <p:cNvPr id="13" name="Rounded Rectangle 12"/>
+          <a:bodyPr wrap="square" anchor="t"/>
+          <a:lstStyle/>
+          <a:p>
+            <a:pPr algn="ctr"/>
+            <a:r>
+              <a:rPr sz="1300" b="1" i="0">
+                <a:solidFill>
+                  <a:srgbClr val="095292"/>
+                </a:solidFill>
+                <a:latin typeface="Calibri"/>
+              </a:rPr>
+              <a:t>google docs</a:t>
+            </a:r>
+          </a:p>
+          <a:p>
+            <a:pPr algn="ctr">
+              <a:spcBef>
+                <a:spcPts val="200"/>
+              </a:spcBef>
+            </a:pPr>
+            <a:r>
+              <a:rPr sz="1000" b="0" i="0">
+                <a:solidFill>
+                  <a:srgbClr val="666666"/>
+                </a:solidFill>
+                <a:latin typeface="Calibri"/>
+              </a:rPr>
+              <a:t>Documentos del paquete de diseño</a:t>
+            </a:r>
+          </a:p>
+        </p:txBody>
+      </p:sp>
+      <p:sp>
+        <p:nvSpPr>
+          <p:cNvPr id="16" name="Rounded Rectangle 15"/>
           <p:cNvSpPr/>
           <p:nvPr/>
         </p:nvSpPr>
         <p:spPr>
           <a:xfrm>
-            <a:off x="457200" y="2615184"/>
-            <a:ext cx="11277295" cy="566928"/>
+            <a:off x="8109508" y="1591056"/>
+            <a:ext cx="3624986" cy="2331720"/>
           </a:xfrm>
           <a:prstGeom prst="roundRect">
             <a:avLst>
@@ -4957,25 +4405,23 @@
       </p:sp>
       <p:sp>
         <p:nvSpPr>
-          <p:cNvPr id="14" name="Rectangle 13"/>
+          <p:cNvPr id="17" name="Rectangle 16"/>
           <p:cNvSpPr/>
           <p:nvPr/>
         </p:nvSpPr>
         <p:spPr>
           <a:xfrm>
-            <a:off x="640080" y="2761488"/>
-            <a:ext cx="274320" cy="274320"/>
+            <a:off x="8109508" y="1591056"/>
+            <a:ext cx="3624986" cy="64008"/>
           </a:xfrm>
           <a:prstGeom prst="rect">
             <a:avLst/>
           </a:prstGeom>
           <a:solidFill>
-            <a:srgbClr val="FFFFFF"/>
+            <a:srgbClr val="095292"/>
           </a:solidFill>
           <a:ln>
-            <a:solidFill>
-              <a:srgbClr val="333333"/>
-            </a:solidFill>
+            <a:noFill/>
           </a:ln>
         </p:spPr>
         <p:style>
@@ -5002,20 +4448,20 @@
       </p:sp>
       <p:sp>
         <p:nvSpPr>
-          <p:cNvPr id="15" name="Rectangle 14"/>
+          <p:cNvPr id="18" name="Rectangle 17"/>
           <p:cNvSpPr/>
           <p:nvPr/>
         </p:nvSpPr>
         <p:spPr>
           <a:xfrm>
-            <a:off x="640080" y="2761488"/>
-            <a:ext cx="73152" cy="274320"/>
+            <a:off x="8109508" y="1655064"/>
+            <a:ext cx="3624986" cy="27432"/>
           </a:xfrm>
           <a:prstGeom prst="rect">
             <a:avLst/>
           </a:prstGeom>
           <a:solidFill>
-            <a:srgbClr val="269CCB"/>
+            <a:srgbClr val="FFD000"/>
           </a:solidFill>
           <a:ln>
             <a:noFill/>
@@ -5043,16 +4489,40 @@
           </a:p>
         </p:txBody>
       </p:sp>
-      <p:sp>
-        <p:nvSpPr>
-          <p:cNvPr id="16" name="TextBox 15"/>
+      <p:pic>
+        <p:nvPicPr>
+          <p:cNvPr id="19" name="Picture 18" descr="examlab.png"/>
+          <p:cNvPicPr>
+            <a:picLocks noChangeAspect="1"/>
+          </p:cNvPicPr>
+          <p:nvPr/>
+        </p:nvPicPr>
+        <p:blipFill>
+          <a:blip r:embed="rId4"/>
+          <a:stretch>
+            <a:fillRect/>
+          </a:stretch>
+        </p:blipFill>
+        <p:spPr>
+          <a:xfrm>
+            <a:off x="9295638" y="1847087"/>
+            <a:ext cx="1252728" cy="1252728"/>
+          </a:xfrm>
+          <a:prstGeom prst="rect">
+            <a:avLst/>
+          </a:prstGeom>
+        </p:spPr>
+      </p:pic>
+      <p:sp>
+        <p:nvSpPr>
+          <p:cNvPr id="20" name="TextBox 19"/>
           <p:cNvSpPr txBox="1"/>
           <p:nvPr/>
         </p:nvSpPr>
         <p:spPr>
           <a:xfrm>
-            <a:off x="1097280" y="2706624"/>
-            <a:ext cx="10362895" cy="402336"/>
+            <a:off x="8182660" y="3191256"/>
+            <a:ext cx="3478682" cy="621792"/>
           </a:xfrm>
           <a:prstGeom prst="rect">
             <a:avLst/>
@@ -5060,24 +4530,41 @@
           <a:noFill/>
         </p:spPr>
         <p:txBody>
-          <a:bodyPr wrap="square" anchor="ctr"/>
-          <a:lstStyle/>
-          <a:p>
-            <a:r>
-              <a:rPr sz="1500" b="0" i="0">
-                <a:solidFill>
-                  <a:srgbClr val="333333"/>
-                </a:solidFill>
-                <a:latin typeface="Calibri"/>
-              </a:rPr>
-              <a:t>Que documento exacto tendria que mostrar hoy, en pantalla, para demostrarle a la clinica que la fase de requisitos ya quedo cerrada?</a:t>
-            </a:r>
-          </a:p>
-        </p:txBody>
-      </p:sp>
-      <p:sp>
-        <p:nvSpPr>
-          <p:cNvPr id="17" name="TextBox 16"/>
+          <a:bodyPr wrap="square" anchor="t"/>
+          <a:lstStyle/>
+          <a:p>
+            <a:pPr algn="ctr"/>
+            <a:r>
+              <a:rPr sz="1300" b="1" i="0">
+                <a:solidFill>
+                  <a:srgbClr val="095292"/>
+                </a:solidFill>
+                <a:latin typeface="Calibri"/>
+              </a:rPr>
+              <a:t>la plataforma del curso</a:t>
+            </a:r>
+          </a:p>
+          <a:p>
+            <a:pPr algn="ctr">
+              <a:spcBef>
+                <a:spcPts val="200"/>
+              </a:spcBef>
+            </a:pPr>
+            <a:r>
+              <a:rPr sz="1000" b="0" i="0">
+                <a:solidFill>
+                  <a:srgbClr val="666666"/>
+                </a:solidFill>
+                <a:latin typeface="Calibri"/>
+              </a:rPr>
+              <a:t>Entrega del taller · en la fecha que indique el docente</a:t>
+            </a:r>
+          </a:p>
+        </p:txBody>
+      </p:sp>
+      <p:sp>
+        <p:nvSpPr>
+          <p:cNvPr id="21" name="TextBox 20"/>
           <p:cNvSpPr txBox="1"/>
           <p:nvPr/>
         </p:nvSpPr>
@@ -5251,7 +4738,7 @@
                 </a:solidFill>
                 <a:latin typeface="Calibri"/>
               </a:rPr>
-              <a:t>Criterios de exito / entregable</a:t>
+              <a:t>Taller PI — por que importa</a:t>
             </a:r>
           </a:p>
         </p:txBody>
@@ -5299,7 +4786,7 @@
                 </a:solidFill>
                 <a:latin typeface="Calibri"/>
               </a:rPr>
-              <a:t>Entregable:</a:t>
+              <a:t>Por que importa al PI:</a:t>
             </a:r>
             <a:r>
               <a:rPr sz="2000" b="0" i="0">
@@ -5308,7 +4795,7 @@
                 </a:solidFill>
                 <a:latin typeface="Calibri"/>
               </a:rPr>
-              <a:t> Un documento de una pagina en Google Docs con la tabla Fase / Pregunta que responde / Artefacto de VetCare / Quien lo aprueba, mas dos diagramas en draw.io (recorrido lineal y recorrido en tres vueltas) exportados a PDF y subidos a la plataforma del curso.</a:t>
+              <a:t> VetCare no se dibuja de una sola sentada, y hoy definimos el mapa de fases que vamos a recorrer todo el semestre y en cual de ellas se califica cada entrega.</a:t>
             </a:r>
           </a:p>
           <a:p>
@@ -5324,25 +4811,7 @@
                 </a:solidFill>
                 <a:latin typeface="Calibri"/>
               </a:rPr>
-              <a:t>–   </a:t>
-            </a:r>
-            <a:r>
-              <a:rPr sz="2000" b="1" i="0">
-                <a:solidFill>
-                  <a:srgbClr val="333333"/>
-                </a:solidFill>
-                <a:latin typeface="Calibri"/>
-              </a:rPr>
-              <a:t>Exito:</a:t>
-            </a:r>
-            <a:r>
-              <a:rPr sz="2000" b="0" i="0">
-                <a:solidFill>
-                  <a:srgbClr val="333333"/>
-                </a:solidFill>
-                <a:latin typeface="Calibri"/>
-              </a:rPr>
-              <a:t> La tabla tiene las cinco fases y en cada una un artefacto concreto de VetCare escrito con nombre propio, no una definicion generica de libro.</a:t>
+              <a:t>–   En la clase anterior quedo claro el dolor de Huellitas (fichas que se extravian, busquedas eternas y cero metricas); hoy ese dolor se ubica dentro de un ciclo de vida y se le pone nombre a lo que sale de cada etapa.</a:t>
             </a:r>
           </a:p>
           <a:p>
@@ -5358,127 +4827,7 @@
                 </a:solidFill>
                 <a:latin typeface="Calibri"/>
               </a:rPr>
-              <a:t>–   </a:t>
-            </a:r>
-            <a:r>
-              <a:rPr sz="2000" b="1" i="0">
-                <a:solidFill>
-                  <a:srgbClr val="333333"/>
-                </a:solidFill>
-                <a:latin typeface="Calibri"/>
-              </a:rPr>
-              <a:t>Exito:</a:t>
-            </a:r>
-            <a:r>
-              <a:rPr sz="2000" b="0" i="0">
-                <a:solidFill>
-                  <a:srgbClr val="333333"/>
-                </a:solidFill>
-                <a:latin typeface="Calibri"/>
-              </a:rPr>
-              <a:t> El diagrama lineal y el diagrama en vueltas usan exactamente las mismas cinco cajas; lo unico distinto entre ellos es el recorrido.</a:t>
-            </a:r>
-          </a:p>
-          <a:p>
-            <a:pPr>
-              <a:spcAft>
-                <a:spcPts val="800"/>
-              </a:spcAft>
-            </a:pPr>
-            <a:r>
-              <a:rPr sz="2000" b="0" i="0">
-                <a:solidFill>
-                  <a:srgbClr val="333333"/>
-                </a:solidFill>
-                <a:latin typeface="Calibri"/>
-              </a:rPr>
-              <a:t>–   </a:t>
-            </a:r>
-            <a:r>
-              <a:rPr sz="2000" b="1" i="0">
-                <a:solidFill>
-                  <a:srgbClr val="333333"/>
-                </a:solidFill>
-                <a:latin typeface="Calibri"/>
-              </a:rPr>
-              <a:t>Exito:</a:t>
-            </a:r>
-            <a:r>
-              <a:rPr sz="2000" b="0" i="0">
-                <a:solidFill>
-                  <a:srgbClr val="333333"/>
-                </a:solidFill>
-                <a:latin typeface="Calibri"/>
-              </a:rPr>
-              <a:t> La fase actual del equipo esta marcada y sustentada con dos evidencias verificables del estado real de VetCare.</a:t>
-            </a:r>
-          </a:p>
-          <a:p>
-            <a:pPr>
-              <a:spcAft>
-                <a:spcPts val="800"/>
-              </a:spcAft>
-            </a:pPr>
-            <a:r>
-              <a:rPr sz="2000" b="0" i="0">
-                <a:solidFill>
-                  <a:srgbClr val="333333"/>
-                </a:solidFill>
-                <a:latin typeface="Calibri"/>
-              </a:rPr>
-              <a:t>–   </a:t>
-            </a:r>
-            <a:r>
-              <a:rPr sz="2000" b="1" i="0">
-                <a:solidFill>
-                  <a:srgbClr val="333333"/>
-                </a:solidFill>
-                <a:latin typeface="Calibri"/>
-              </a:rPr>
-              <a:t>Exito:</a:t>
-            </a:r>
-            <a:r>
-              <a:rPr sz="2000" b="0" i="0">
-                <a:solidFill>
-                  <a:srgbClr val="333333"/>
-                </a:solidFill>
-                <a:latin typeface="Calibri"/>
-              </a:rPr>
-              <a:t> El parrafo final distingue con hechos concretos cuando termina el proyecto y cuando terminaria el producto, e incluye un ejemplo de mantenimiento.</a:t>
-            </a:r>
-          </a:p>
-          <a:p>
-            <a:pPr>
-              <a:spcAft>
-                <a:spcPts val="800"/>
-              </a:spcAft>
-            </a:pPr>
-            <a:r>
-              <a:rPr sz="2000" b="0" i="0">
-                <a:solidFill>
-                  <a:srgbClr val="333333"/>
-                </a:solidFill>
-                <a:latin typeface="Calibri"/>
-              </a:rPr>
-              <a:t>–   </a:t>
-            </a:r>
-            <a:r>
-              <a:rPr sz="2000" b="1" i="0">
-                <a:solidFill>
-                  <a:srgbClr val="333333"/>
-                </a:solidFill>
-                <a:latin typeface="Calibri"/>
-              </a:rPr>
-              <a:t>Entrega en la plataforma del curso</a:t>
-            </a:r>
-            <a:r>
-              <a:rPr sz="2000" b="0" i="0">
-                <a:solidFill>
-                  <a:srgbClr val="333333"/>
-                </a:solidFill>
-                <a:latin typeface="Calibri"/>
-              </a:rPr>
-              <a:t> — en la fecha que indique el docente.</a:t>
+              <a:t>–   Los tres casos de matricula se entienden mejor con el ciclo en la mano: aqui vivimos en requisitos y diseño, Programacion II vive en construccion y pruebas, y quien solo cursa Seminario cierra con documento de diseño y prototipo navegable.</a:t>
             </a:r>
           </a:p>
         </p:txBody>
@@ -5659,109 +5008,21 @@
                 </a:solidFill>
                 <a:latin typeface="Calibri"/>
               </a:rPr>
-              <a:t>Para el PI esta semana</a:t>
-            </a:r>
-          </a:p>
-        </p:txBody>
-      </p:sp>
-      <p:sp>
-        <p:nvSpPr>
-          <p:cNvPr id="5" name="Rounded Rectangle 4"/>
-          <p:cNvSpPr/>
-          <p:nvPr/>
-        </p:nvSpPr>
-        <p:spPr>
-          <a:xfrm>
-            <a:off x="457200" y="1261872"/>
-            <a:ext cx="11277295" cy="1051560"/>
-          </a:xfrm>
-          <a:prstGeom prst="roundRect">
-            <a:avLst>
-              <a:gd name="adj" fmla="val 12000"/>
-            </a:avLst>
-          </a:prstGeom>
-          <a:solidFill>
-            <a:srgbClr val="E8F4FA"/>
-          </a:solidFill>
-          <a:ln>
-            <a:noFill/>
-          </a:ln>
-        </p:spPr>
-        <p:style>
-          <a:lnRef idx="1">
-            <a:schemeClr val="accent1"/>
-          </a:lnRef>
-          <a:fillRef idx="3">
-            <a:schemeClr val="accent1"/>
-          </a:fillRef>
-          <a:effectRef idx="2">
-            <a:schemeClr val="accent1"/>
-          </a:effectRef>
-          <a:fontRef idx="minor">
-            <a:schemeClr val="lt1"/>
-          </a:fontRef>
-        </p:style>
-        <p:txBody>
-          <a:bodyPr rtlCol="0" anchor="ctr"/>
-          <a:lstStyle/>
-          <a:p>
-            <a:pPr algn="ctr"/>
-          </a:p>
-        </p:txBody>
-      </p:sp>
-      <p:sp>
-        <p:nvSpPr>
-          <p:cNvPr id="6" name="Rectangle 5"/>
-          <p:cNvSpPr/>
-          <p:nvPr/>
-        </p:nvSpPr>
-        <p:spPr>
-          <a:xfrm>
-            <a:off x="457200" y="1261872"/>
-            <a:ext cx="128016" cy="1051560"/>
-          </a:xfrm>
-          <a:prstGeom prst="rect">
-            <a:avLst/>
-          </a:prstGeom>
-          <a:solidFill>
-            <a:srgbClr val="269CCB"/>
-          </a:solidFill>
-          <a:ln>
-            <a:noFill/>
-          </a:ln>
-        </p:spPr>
-        <p:style>
-          <a:lnRef idx="1">
-            <a:schemeClr val="accent1"/>
-          </a:lnRef>
-          <a:fillRef idx="3">
-            <a:schemeClr val="accent1"/>
-          </a:fillRef>
-          <a:effectRef idx="2">
-            <a:schemeClr val="accent1"/>
-          </a:effectRef>
-          <a:fontRef idx="minor">
-            <a:schemeClr val="lt1"/>
-          </a:fontRef>
-        </p:style>
-        <p:txBody>
-          <a:bodyPr rtlCol="0" anchor="ctr"/>
-          <a:lstStyle/>
-          <a:p>
-            <a:pPr algn="ctr"/>
-          </a:p>
-        </p:txBody>
-      </p:sp>
-      <p:sp>
-        <p:nvSpPr>
-          <p:cNvPr id="7" name="TextBox 6"/>
+              <a:t>Taller PI — punto de partida</a:t>
+            </a:r>
+          </a:p>
+        </p:txBody>
+      </p:sp>
+      <p:sp>
+        <p:nvSpPr>
+          <p:cNvPr id="5" name="TextBox 4"/>
           <p:cNvSpPr txBox="1"/>
           <p:nvPr/>
         </p:nvSpPr>
         <p:spPr>
           <a:xfrm>
-            <a:off x="777240" y="1399031"/>
-            <a:ext cx="10774375" cy="822959"/>
+            <a:off x="457200" y="1170432"/>
+            <a:ext cx="11277295" cy="5230368"/>
           </a:xfrm>
           <a:prstGeom prst="rect">
             <a:avLst/>
@@ -5774,313 +5035,58 @@
           </a:bodyPr>
           <a:lstStyle/>
           <a:p>
-            <a:r>
-              <a:rPr sz="1200" b="1" i="0">
-                <a:solidFill>
-                  <a:srgbClr val="269CCB"/>
-                </a:solidFill>
-                <a:latin typeface="Calibri"/>
-              </a:rPr>
-              <a:t>Info</a:t>
-            </a:r>
-          </a:p>
-          <a:p>
             <a:pPr>
-              <a:spcBef>
-                <a:spcPts val="400"/>
-              </a:spcBef>
+              <a:spcAft>
+                <a:spcPts val="800"/>
+              </a:spcAft>
             </a:pPr>
             <a:r>
-              <a:rPr sz="1400" b="0" i="0">
+              <a:rPr sz="2000" b="0" i="0">
                 <a:solidFill>
                   <a:srgbClr val="333333"/>
                 </a:solidFill>
                 <a:latin typeface="Calibri"/>
               </a:rPr>
-              <a:t>Hito: Queda listo el mapa de fases de VetCare con el artefacto concreto que produce cada fase y la marca de en cual esta parado el equipo hoy.</a:t>
-            </a:r>
-          </a:p>
-        </p:txBody>
-      </p:sp>
-      <p:sp>
-        <p:nvSpPr>
-          <p:cNvPr id="8" name="Rounded Rectangle 7"/>
-          <p:cNvSpPr/>
-          <p:nvPr/>
-        </p:nvSpPr>
-        <p:spPr>
-          <a:xfrm>
-            <a:off x="457200" y="2478024"/>
-            <a:ext cx="11277295" cy="1051560"/>
-          </a:xfrm>
-          <a:prstGeom prst="roundRect">
-            <a:avLst>
-              <a:gd name="adj" fmla="val 12000"/>
-            </a:avLst>
-          </a:prstGeom>
-          <a:solidFill>
-            <a:srgbClr val="FFF8E1"/>
-          </a:solidFill>
-          <a:ln>
-            <a:noFill/>
-          </a:ln>
-        </p:spPr>
-        <p:style>
-          <a:lnRef idx="1">
-            <a:schemeClr val="accent1"/>
-          </a:lnRef>
-          <a:fillRef idx="3">
-            <a:schemeClr val="accent1"/>
-          </a:fillRef>
-          <a:effectRef idx="2">
-            <a:schemeClr val="accent1"/>
-          </a:effectRef>
-          <a:fontRef idx="minor">
-            <a:schemeClr val="lt1"/>
-          </a:fontRef>
-        </p:style>
-        <p:txBody>
-          <a:bodyPr rtlCol="0" anchor="ctr"/>
-          <a:lstStyle/>
-          <a:p>
-            <a:pPr algn="ctr"/>
-          </a:p>
-        </p:txBody>
-      </p:sp>
-      <p:sp>
-        <p:nvSpPr>
-          <p:cNvPr id="9" name="Rectangle 8"/>
-          <p:cNvSpPr/>
-          <p:nvPr/>
-        </p:nvSpPr>
-        <p:spPr>
-          <a:xfrm>
-            <a:off x="457200" y="2478024"/>
-            <a:ext cx="128016" cy="1051560"/>
-          </a:xfrm>
-          <a:prstGeom prst="rect">
-            <a:avLst/>
-          </a:prstGeom>
-          <a:solidFill>
-            <a:srgbClr val="FFD000"/>
-          </a:solidFill>
-          <a:ln>
-            <a:noFill/>
-          </a:ln>
-        </p:spPr>
-        <p:style>
-          <a:lnRef idx="1">
-            <a:schemeClr val="accent1"/>
-          </a:lnRef>
-          <a:fillRef idx="3">
-            <a:schemeClr val="accent1"/>
-          </a:fillRef>
-          <a:effectRef idx="2">
-            <a:schemeClr val="accent1"/>
-          </a:effectRef>
-          <a:fontRef idx="minor">
-            <a:schemeClr val="lt1"/>
-          </a:fontRef>
-        </p:style>
-        <p:txBody>
-          <a:bodyPr rtlCol="0" anchor="ctr"/>
-          <a:lstStyle/>
-          <a:p>
-            <a:pPr algn="ctr"/>
-          </a:p>
-        </p:txBody>
-      </p:sp>
-      <p:sp>
-        <p:nvSpPr>
-          <p:cNvPr id="10" name="TextBox 9"/>
-          <p:cNvSpPr txBox="1"/>
-          <p:nvPr/>
-        </p:nvSpPr>
-        <p:spPr>
-          <a:xfrm>
-            <a:off x="777240" y="2615184"/>
-            <a:ext cx="10774375" cy="822959"/>
-          </a:xfrm>
-          <a:prstGeom prst="rect">
-            <a:avLst/>
-          </a:prstGeom>
-          <a:noFill/>
-        </p:spPr>
-        <p:txBody>
-          <a:bodyPr wrap="square">
-            <a:spAutoFit/>
-          </a:bodyPr>
-          <a:lstStyle/>
-          <a:p>
-            <a:r>
-              <a:rPr sz="1200" b="1" i="0">
-                <a:solidFill>
-                  <a:srgbClr val="FFD000"/>
-                </a:solidFill>
-                <a:latin typeface="Calibri"/>
-              </a:rPr>
-              <a:t>Aclaración</a:t>
+              <a:t>–   Huellitas guarda hoy 5.000 fichas en carpetas de carton dentro de un archivador metalico, y las citas del dia se anotan a mano en una libreta que se lleva la auxiliar.</a:t>
             </a:r>
           </a:p>
           <a:p>
             <a:pPr>
-              <a:spcBef>
-                <a:spcPts val="400"/>
-              </a:spcBef>
+              <a:spcAft>
+                <a:spcPts val="800"/>
+              </a:spcAft>
             </a:pPr>
             <a:r>
-              <a:rPr sz="1400" b="0" i="0">
+              <a:rPr sz="2000" b="0" i="0">
                 <a:solidFill>
                   <a:srgbClr val="333333"/>
                 </a:solidFill>
                 <a:latin typeface="Calibri"/>
               </a:rPr>
-              <a:t>Enunciado completo: Clases/Proyecto Integrador/ (VetCare).</a:t>
-            </a:r>
-          </a:p>
-        </p:txBody>
-      </p:sp>
-      <p:sp>
-        <p:nvSpPr>
-          <p:cNvPr id="11" name="Rounded Rectangle 10"/>
-          <p:cNvSpPr/>
-          <p:nvPr/>
-        </p:nvSpPr>
-        <p:spPr>
-          <a:xfrm>
-            <a:off x="457200" y="3694176"/>
-            <a:ext cx="11277295" cy="1051560"/>
-          </a:xfrm>
-          <a:prstGeom prst="roundRect">
-            <a:avLst>
-              <a:gd name="adj" fmla="val 12000"/>
-            </a:avLst>
-          </a:prstGeom>
-          <a:solidFill>
-            <a:srgbClr val="FBE4E4"/>
-          </a:solidFill>
-          <a:ln>
-            <a:noFill/>
-          </a:ln>
-        </p:spPr>
-        <p:style>
-          <a:lnRef idx="1">
-            <a:schemeClr val="accent1"/>
-          </a:lnRef>
-          <a:fillRef idx="3">
-            <a:schemeClr val="accent1"/>
-          </a:fillRef>
-          <a:effectRef idx="2">
-            <a:schemeClr val="accent1"/>
-          </a:effectRef>
-          <a:fontRef idx="minor">
-            <a:schemeClr val="lt1"/>
-          </a:fontRef>
-        </p:style>
-        <p:txBody>
-          <a:bodyPr rtlCol="0" anchor="ctr"/>
-          <a:lstStyle/>
-          <a:p>
-            <a:pPr algn="ctr"/>
-          </a:p>
-        </p:txBody>
-      </p:sp>
-      <p:sp>
-        <p:nvSpPr>
-          <p:cNvPr id="12" name="Rectangle 11"/>
-          <p:cNvSpPr/>
-          <p:nvPr/>
-        </p:nvSpPr>
-        <p:spPr>
-          <a:xfrm>
-            <a:off x="457200" y="3694176"/>
-            <a:ext cx="128016" cy="1051560"/>
-          </a:xfrm>
-          <a:prstGeom prst="rect">
-            <a:avLst/>
-          </a:prstGeom>
-          <a:solidFill>
-            <a:srgbClr val="A02030"/>
-          </a:solidFill>
-          <a:ln>
-            <a:noFill/>
-          </a:ln>
-        </p:spPr>
-        <p:style>
-          <a:lnRef idx="1">
-            <a:schemeClr val="accent1"/>
-          </a:lnRef>
-          <a:fillRef idx="3">
-            <a:schemeClr val="accent1"/>
-          </a:fillRef>
-          <a:effectRef idx="2">
-            <a:schemeClr val="accent1"/>
-          </a:effectRef>
-          <a:fontRef idx="minor">
-            <a:schemeClr val="lt1"/>
-          </a:fontRef>
-        </p:style>
-        <p:txBody>
-          <a:bodyPr rtlCol="0" anchor="ctr"/>
-          <a:lstStyle/>
-          <a:p>
-            <a:pPr algn="ctr"/>
-          </a:p>
-        </p:txBody>
-      </p:sp>
-      <p:sp>
-        <p:nvSpPr>
-          <p:cNvPr id="13" name="TextBox 12"/>
-          <p:cNvSpPr txBox="1"/>
-          <p:nvPr/>
-        </p:nvSpPr>
-        <p:spPr>
-          <a:xfrm>
-            <a:off x="777240" y="3831336"/>
-            <a:ext cx="10774375" cy="822959"/>
-          </a:xfrm>
-          <a:prstGeom prst="rect">
-            <a:avLst/>
-          </a:prstGeom>
-          <a:noFill/>
-        </p:spPr>
-        <p:txBody>
-          <a:bodyPr wrap="square">
-            <a:spAutoFit/>
-          </a:bodyPr>
-          <a:lstStyle/>
-          <a:p>
-            <a:r>
-              <a:rPr sz="1200" b="1" i="0">
-                <a:solidFill>
-                  <a:srgbClr val="A02030"/>
-                </a:solidFill>
-                <a:latin typeface="Calibri"/>
-              </a:rPr>
-              <a:t>Atención</a:t>
+              <a:t>–   El equipo tiene una lista cruda de necesidades salida de la entrevista, pero nadie ha definido que documento sale de cada etapa ni quien lo firma como aprobado.</a:t>
             </a:r>
           </a:p>
           <a:p>
             <a:pPr>
-              <a:spcBef>
-                <a:spcPts val="400"/>
-              </a:spcBef>
+              <a:spcAft>
+                <a:spcPts val="800"/>
+              </a:spcAft>
             </a:pPr>
             <a:r>
-              <a:rPr sz="1400" b="0" i="0">
+              <a:rPr sz="2000" b="0" i="0">
                 <a:solidFill>
                   <a:srgbClr val="333333"/>
                 </a:solidFill>
                 <a:latin typeface="Calibri"/>
               </a:rPr>
-              <a:t>Entrega del taller, si el docente lo asigna · en la fecha que indique el docente.</a:t>
-            </a:r>
-          </a:p>
-        </p:txBody>
-      </p:sp>
-      <p:sp>
-        <p:nvSpPr>
-          <p:cNvPr id="14" name="TextBox 13"/>
+              <a:t>–   No existe ni una linea de codigo ni un diagrama formal: se parte de cero y el unico insumo real es lo que dijo la clinica.</a:t>
+            </a:r>
+          </a:p>
+        </p:txBody>
+      </p:sp>
+      <p:sp>
+        <p:nvSpPr>
+          <p:cNvPr id="6" name="TextBox 5"/>
           <p:cNvSpPr txBox="1"/>
           <p:nvPr/>
         </p:nvSpPr>
@@ -6148,6 +5154,2641 @@
         <p:spPr>
           <a:xfrm>
             <a:off x="0" y="0"/>
+            <a:ext cx="12191695" cy="960120"/>
+          </a:xfrm>
+          <a:prstGeom prst="rect">
+            <a:avLst/>
+          </a:prstGeom>
+          <a:solidFill>
+            <a:srgbClr val="095292"/>
+          </a:solidFill>
+          <a:ln>
+            <a:noFill/>
+          </a:ln>
+        </p:spPr>
+        <p:style>
+          <a:lnRef idx="1">
+            <a:schemeClr val="accent1"/>
+          </a:lnRef>
+          <a:fillRef idx="3">
+            <a:schemeClr val="accent1"/>
+          </a:fillRef>
+          <a:effectRef idx="2">
+            <a:schemeClr val="accent1"/>
+          </a:effectRef>
+          <a:fontRef idx="minor">
+            <a:schemeClr val="lt1"/>
+          </a:fontRef>
+        </p:style>
+        <p:txBody>
+          <a:bodyPr rtlCol="0" anchor="ctr"/>
+          <a:lstStyle/>
+          <a:p>
+            <a:pPr algn="ctr"/>
+          </a:p>
+        </p:txBody>
+      </p:sp>
+      <p:sp>
+        <p:nvSpPr>
+          <p:cNvPr id="3" name="Rectangle 2"/>
+          <p:cNvSpPr/>
+          <p:nvPr/>
+        </p:nvSpPr>
+        <p:spPr>
+          <a:xfrm>
+            <a:off x="0" y="960120"/>
+            <a:ext cx="12191695" cy="41148"/>
+          </a:xfrm>
+          <a:prstGeom prst="rect">
+            <a:avLst/>
+          </a:prstGeom>
+          <a:solidFill>
+            <a:srgbClr val="FFD000"/>
+          </a:solidFill>
+          <a:ln>
+            <a:noFill/>
+          </a:ln>
+        </p:spPr>
+        <p:style>
+          <a:lnRef idx="1">
+            <a:schemeClr val="accent1"/>
+          </a:lnRef>
+          <a:fillRef idx="3">
+            <a:schemeClr val="accent1"/>
+          </a:fillRef>
+          <a:effectRef idx="2">
+            <a:schemeClr val="accent1"/>
+          </a:effectRef>
+          <a:fontRef idx="minor">
+            <a:schemeClr val="lt1"/>
+          </a:fontRef>
+        </p:style>
+        <p:txBody>
+          <a:bodyPr rtlCol="0" anchor="ctr"/>
+          <a:lstStyle/>
+          <a:p>
+            <a:pPr algn="ctr"/>
+          </a:p>
+        </p:txBody>
+      </p:sp>
+      <p:sp>
+        <p:nvSpPr>
+          <p:cNvPr id="4" name="TextBox 3"/>
+          <p:cNvSpPr txBox="1"/>
+          <p:nvPr/>
+        </p:nvSpPr>
+        <p:spPr>
+          <a:xfrm>
+            <a:off x="457200" y="164592"/>
+            <a:ext cx="11277295" cy="502920"/>
+          </a:xfrm>
+          <a:prstGeom prst="rect">
+            <a:avLst/>
+          </a:prstGeom>
+          <a:noFill/>
+        </p:spPr>
+        <p:txBody>
+          <a:bodyPr wrap="square">
+            <a:spAutoFit/>
+          </a:bodyPr>
+          <a:lstStyle/>
+          <a:p>
+            <a:r>
+              <a:rPr sz="2600" b="1" i="0">
+                <a:solidFill>
+                  <a:srgbClr val="FFFFFF"/>
+                </a:solidFill>
+                <a:latin typeface="Calibri"/>
+              </a:rPr>
+              <a:t>Taller PI — pasos guiados</a:t>
+            </a:r>
+          </a:p>
+        </p:txBody>
+      </p:sp>
+      <p:sp>
+        <p:nvSpPr>
+          <p:cNvPr id="5" name="Rounded Rectangle 4"/>
+          <p:cNvSpPr/>
+          <p:nvPr/>
+        </p:nvSpPr>
+        <p:spPr>
+          <a:xfrm>
+            <a:off x="457200" y="1234440"/>
+            <a:ext cx="11277295" cy="950976"/>
+          </a:xfrm>
+          <a:prstGeom prst="roundRect">
+            <a:avLst>
+              <a:gd name="adj" fmla="val 12000"/>
+            </a:avLst>
+          </a:prstGeom>
+          <a:solidFill>
+            <a:srgbClr val="F2F2F2"/>
+          </a:solidFill>
+          <a:ln>
+            <a:noFill/>
+          </a:ln>
+        </p:spPr>
+        <p:style>
+          <a:lnRef idx="1">
+            <a:schemeClr val="accent1"/>
+          </a:lnRef>
+          <a:fillRef idx="3">
+            <a:schemeClr val="accent1"/>
+          </a:fillRef>
+          <a:effectRef idx="2">
+            <a:schemeClr val="accent1"/>
+          </a:effectRef>
+          <a:fontRef idx="minor">
+            <a:schemeClr val="lt1"/>
+          </a:fontRef>
+        </p:style>
+        <p:txBody>
+          <a:bodyPr rtlCol="0" anchor="ctr"/>
+          <a:lstStyle/>
+          <a:p>
+            <a:pPr algn="ctr"/>
+          </a:p>
+        </p:txBody>
+      </p:sp>
+      <p:sp>
+        <p:nvSpPr>
+          <p:cNvPr id="6" name="Rounded Rectangle 5"/>
+          <p:cNvSpPr/>
+          <p:nvPr/>
+        </p:nvSpPr>
+        <p:spPr>
+          <a:xfrm>
+            <a:off x="594360" y="1490472"/>
+            <a:ext cx="438912" cy="438912"/>
+          </a:xfrm>
+          <a:prstGeom prst="roundRect">
+            <a:avLst>
+              <a:gd name="adj" fmla="val 12000"/>
+            </a:avLst>
+          </a:prstGeom>
+          <a:solidFill>
+            <a:srgbClr val="095292"/>
+          </a:solidFill>
+          <a:ln>
+            <a:noFill/>
+          </a:ln>
+        </p:spPr>
+        <p:style>
+          <a:lnRef idx="1">
+            <a:schemeClr val="accent1"/>
+          </a:lnRef>
+          <a:fillRef idx="3">
+            <a:schemeClr val="accent1"/>
+          </a:fillRef>
+          <a:effectRef idx="2">
+            <a:schemeClr val="accent1"/>
+          </a:effectRef>
+          <a:fontRef idx="minor">
+            <a:schemeClr val="lt1"/>
+          </a:fontRef>
+        </p:style>
+        <p:txBody>
+          <a:bodyPr rtlCol="0" anchor="ctr"/>
+          <a:lstStyle/>
+          <a:p>
+            <a:pPr algn="ctr"/>
+          </a:p>
+        </p:txBody>
+      </p:sp>
+      <p:sp>
+        <p:nvSpPr>
+          <p:cNvPr id="7" name="TextBox 6"/>
+          <p:cNvSpPr txBox="1"/>
+          <p:nvPr/>
+        </p:nvSpPr>
+        <p:spPr>
+          <a:xfrm>
+            <a:off x="594360" y="1490472"/>
+            <a:ext cx="438912" cy="438912"/>
+          </a:xfrm>
+          <a:prstGeom prst="rect">
+            <a:avLst/>
+          </a:prstGeom>
+          <a:noFill/>
+        </p:spPr>
+        <p:txBody>
+          <a:bodyPr wrap="square" anchor="ctr"/>
+          <a:lstStyle/>
+          <a:p>
+            <a:pPr algn="ctr"/>
+            <a:r>
+              <a:rPr sz="1600" b="1" i="0">
+                <a:solidFill>
+                  <a:srgbClr val="FFFFFF"/>
+                </a:solidFill>
+                <a:latin typeface="Calibri"/>
+              </a:rPr>
+              <a:t>1</a:t>
+            </a:r>
+          </a:p>
+        </p:txBody>
+      </p:sp>
+      <p:sp>
+        <p:nvSpPr>
+          <p:cNvPr id="8" name="TextBox 7"/>
+          <p:cNvSpPr txBox="1"/>
+          <p:nvPr/>
+        </p:nvSpPr>
+        <p:spPr>
+          <a:xfrm>
+            <a:off x="1188720" y="1325880"/>
+            <a:ext cx="10271455" cy="786384"/>
+          </a:xfrm>
+          <a:prstGeom prst="rect">
+            <a:avLst/>
+          </a:prstGeom>
+          <a:noFill/>
+        </p:spPr>
+        <p:txBody>
+          <a:bodyPr wrap="square" anchor="ctr"/>
+          <a:lstStyle/>
+          <a:p>
+            <a:r>
+              <a:rPr sz="1400" b="1" i="0">
+                <a:solidFill>
+                  <a:srgbClr val="095292"/>
+                </a:solidFill>
+                <a:latin typeface="Calibri"/>
+              </a:rPr>
+              <a:t>En Google Docs cree la tabla de cuatro columnas (Fase / Pregunta que responde / Artefacto concreto de VetCare / Quien lo aprueba) y llenela con las cinco fases; en la columna del artefacto esta prohibido escribir generalidades: debe decir cosas como 'Lista RF-01 a RF-12 de Huellitas' o 'Mockup de la ficha del paciente'.</a:t>
+            </a:r>
+          </a:p>
+        </p:txBody>
+      </p:sp>
+      <p:sp>
+        <p:nvSpPr>
+          <p:cNvPr id="9" name="Rounded Rectangle 8"/>
+          <p:cNvSpPr/>
+          <p:nvPr/>
+        </p:nvSpPr>
+        <p:spPr>
+          <a:xfrm>
+            <a:off x="457200" y="2276856"/>
+            <a:ext cx="11277295" cy="950976"/>
+          </a:xfrm>
+          <a:prstGeom prst="roundRect">
+            <a:avLst>
+              <a:gd name="adj" fmla="val 12000"/>
+            </a:avLst>
+          </a:prstGeom>
+          <a:solidFill>
+            <a:srgbClr val="E8F4FA"/>
+          </a:solidFill>
+          <a:ln>
+            <a:noFill/>
+          </a:ln>
+        </p:spPr>
+        <p:style>
+          <a:lnRef idx="1">
+            <a:schemeClr val="accent1"/>
+          </a:lnRef>
+          <a:fillRef idx="3">
+            <a:schemeClr val="accent1"/>
+          </a:fillRef>
+          <a:effectRef idx="2">
+            <a:schemeClr val="accent1"/>
+          </a:effectRef>
+          <a:fontRef idx="minor">
+            <a:schemeClr val="lt1"/>
+          </a:fontRef>
+        </p:style>
+        <p:txBody>
+          <a:bodyPr rtlCol="0" anchor="ctr"/>
+          <a:lstStyle/>
+          <a:p>
+            <a:pPr algn="ctr"/>
+          </a:p>
+        </p:txBody>
+      </p:sp>
+      <p:sp>
+        <p:nvSpPr>
+          <p:cNvPr id="10" name="Rounded Rectangle 9"/>
+          <p:cNvSpPr/>
+          <p:nvPr/>
+        </p:nvSpPr>
+        <p:spPr>
+          <a:xfrm>
+            <a:off x="594360" y="2532888"/>
+            <a:ext cx="438912" cy="438912"/>
+          </a:xfrm>
+          <a:prstGeom prst="roundRect">
+            <a:avLst>
+              <a:gd name="adj" fmla="val 12000"/>
+            </a:avLst>
+          </a:prstGeom>
+          <a:solidFill>
+            <a:srgbClr val="095292"/>
+          </a:solidFill>
+          <a:ln>
+            <a:noFill/>
+          </a:ln>
+        </p:spPr>
+        <p:style>
+          <a:lnRef idx="1">
+            <a:schemeClr val="accent1"/>
+          </a:lnRef>
+          <a:fillRef idx="3">
+            <a:schemeClr val="accent1"/>
+          </a:fillRef>
+          <a:effectRef idx="2">
+            <a:schemeClr val="accent1"/>
+          </a:effectRef>
+          <a:fontRef idx="minor">
+            <a:schemeClr val="lt1"/>
+          </a:fontRef>
+        </p:style>
+        <p:txBody>
+          <a:bodyPr rtlCol="0" anchor="ctr"/>
+          <a:lstStyle/>
+          <a:p>
+            <a:pPr algn="ctr"/>
+          </a:p>
+        </p:txBody>
+      </p:sp>
+      <p:sp>
+        <p:nvSpPr>
+          <p:cNvPr id="11" name="TextBox 10"/>
+          <p:cNvSpPr txBox="1"/>
+          <p:nvPr/>
+        </p:nvSpPr>
+        <p:spPr>
+          <a:xfrm>
+            <a:off x="594360" y="2532888"/>
+            <a:ext cx="438912" cy="438912"/>
+          </a:xfrm>
+          <a:prstGeom prst="rect">
+            <a:avLst/>
+          </a:prstGeom>
+          <a:noFill/>
+        </p:spPr>
+        <p:txBody>
+          <a:bodyPr wrap="square" anchor="ctr"/>
+          <a:lstStyle/>
+          <a:p>
+            <a:pPr algn="ctr"/>
+            <a:r>
+              <a:rPr sz="1600" b="1" i="0">
+                <a:solidFill>
+                  <a:srgbClr val="FFFFFF"/>
+                </a:solidFill>
+                <a:latin typeface="Calibri"/>
+              </a:rPr>
+              <a:t>2</a:t>
+            </a:r>
+          </a:p>
+        </p:txBody>
+      </p:sp>
+      <p:sp>
+        <p:nvSpPr>
+          <p:cNvPr id="12" name="TextBox 11"/>
+          <p:cNvSpPr txBox="1"/>
+          <p:nvPr/>
+        </p:nvSpPr>
+        <p:spPr>
+          <a:xfrm>
+            <a:off x="1188720" y="2368296"/>
+            <a:ext cx="10271455" cy="786384"/>
+          </a:xfrm>
+          <a:prstGeom prst="rect">
+            <a:avLst/>
+          </a:prstGeom>
+          <a:noFill/>
+        </p:spPr>
+        <p:txBody>
+          <a:bodyPr wrap="square" anchor="ctr"/>
+          <a:lstStyle/>
+          <a:p>
+            <a:r>
+              <a:rPr sz="1500" b="1" i="0">
+                <a:solidFill>
+                  <a:srgbClr val="095292"/>
+                </a:solidFill>
+                <a:latin typeface="Calibri"/>
+              </a:rPr>
+              <a:t>Marque con relleno amarillo la fila de la fase donde esta el equipo hoy y escriba debajo dos evidencias verificables que lo demuestren (por ejemplo: 'existe la entrevista transcrita' y 'no existe ningun diagrama aprobado').</a:t>
+            </a:r>
+          </a:p>
+        </p:txBody>
+      </p:sp>
+      <p:sp>
+        <p:nvSpPr>
+          <p:cNvPr id="13" name="Rounded Rectangle 12"/>
+          <p:cNvSpPr/>
+          <p:nvPr/>
+        </p:nvSpPr>
+        <p:spPr>
+          <a:xfrm>
+            <a:off x="457200" y="3319272"/>
+            <a:ext cx="11277295" cy="950976"/>
+          </a:xfrm>
+          <a:prstGeom prst="roundRect">
+            <a:avLst>
+              <a:gd name="adj" fmla="val 12000"/>
+            </a:avLst>
+          </a:prstGeom>
+          <a:solidFill>
+            <a:srgbClr val="F2F2F2"/>
+          </a:solidFill>
+          <a:ln>
+            <a:noFill/>
+          </a:ln>
+        </p:spPr>
+        <p:style>
+          <a:lnRef idx="1">
+            <a:schemeClr val="accent1"/>
+          </a:lnRef>
+          <a:fillRef idx="3">
+            <a:schemeClr val="accent1"/>
+          </a:fillRef>
+          <a:effectRef idx="2">
+            <a:schemeClr val="accent1"/>
+          </a:effectRef>
+          <a:fontRef idx="minor">
+            <a:schemeClr val="lt1"/>
+          </a:fontRef>
+        </p:style>
+        <p:txBody>
+          <a:bodyPr rtlCol="0" anchor="ctr"/>
+          <a:lstStyle/>
+          <a:p>
+            <a:pPr algn="ctr"/>
+          </a:p>
+        </p:txBody>
+      </p:sp>
+      <p:sp>
+        <p:nvSpPr>
+          <p:cNvPr id="14" name="Rounded Rectangle 13"/>
+          <p:cNvSpPr/>
+          <p:nvPr/>
+        </p:nvSpPr>
+        <p:spPr>
+          <a:xfrm>
+            <a:off x="594360" y="3575304"/>
+            <a:ext cx="438912" cy="438912"/>
+          </a:xfrm>
+          <a:prstGeom prst="roundRect">
+            <a:avLst>
+              <a:gd name="adj" fmla="val 12000"/>
+            </a:avLst>
+          </a:prstGeom>
+          <a:solidFill>
+            <a:srgbClr val="095292"/>
+          </a:solidFill>
+          <a:ln>
+            <a:noFill/>
+          </a:ln>
+        </p:spPr>
+        <p:style>
+          <a:lnRef idx="1">
+            <a:schemeClr val="accent1"/>
+          </a:lnRef>
+          <a:fillRef idx="3">
+            <a:schemeClr val="accent1"/>
+          </a:fillRef>
+          <a:effectRef idx="2">
+            <a:schemeClr val="accent1"/>
+          </a:effectRef>
+          <a:fontRef idx="minor">
+            <a:schemeClr val="lt1"/>
+          </a:fontRef>
+        </p:style>
+        <p:txBody>
+          <a:bodyPr rtlCol="0" anchor="ctr"/>
+          <a:lstStyle/>
+          <a:p>
+            <a:pPr algn="ctr"/>
+          </a:p>
+        </p:txBody>
+      </p:sp>
+      <p:sp>
+        <p:nvSpPr>
+          <p:cNvPr id="15" name="TextBox 14"/>
+          <p:cNvSpPr txBox="1"/>
+          <p:nvPr/>
+        </p:nvSpPr>
+        <p:spPr>
+          <a:xfrm>
+            <a:off x="594360" y="3575304"/>
+            <a:ext cx="438912" cy="438912"/>
+          </a:xfrm>
+          <a:prstGeom prst="rect">
+            <a:avLst/>
+          </a:prstGeom>
+          <a:noFill/>
+        </p:spPr>
+        <p:txBody>
+          <a:bodyPr wrap="square" anchor="ctr"/>
+          <a:lstStyle/>
+          <a:p>
+            <a:pPr algn="ctr"/>
+            <a:r>
+              <a:rPr sz="1600" b="1" i="0">
+                <a:solidFill>
+                  <a:srgbClr val="FFFFFF"/>
+                </a:solidFill>
+                <a:latin typeface="Calibri"/>
+              </a:rPr>
+              <a:t>3</a:t>
+            </a:r>
+          </a:p>
+        </p:txBody>
+      </p:sp>
+      <p:sp>
+        <p:nvSpPr>
+          <p:cNvPr id="16" name="TextBox 15"/>
+          <p:cNvSpPr txBox="1"/>
+          <p:nvPr/>
+        </p:nvSpPr>
+        <p:spPr>
+          <a:xfrm>
+            <a:off x="1188720" y="3410712"/>
+            <a:ext cx="10271455" cy="786384"/>
+          </a:xfrm>
+          <a:prstGeom prst="rect">
+            <a:avLst/>
+          </a:prstGeom>
+          <a:noFill/>
+        </p:spPr>
+        <p:txBody>
+          <a:bodyPr wrap="square" anchor="ctr"/>
+          <a:lstStyle/>
+          <a:p>
+            <a:r>
+              <a:rPr sz="1500" b="1" i="0">
+                <a:solidFill>
+                  <a:srgbClr val="095292"/>
+                </a:solidFill>
+                <a:latin typeface="Calibri"/>
+              </a:rPr>
+              <a:t>En draw.io dibuje el recorrido lineal de VetCare: cinco cajas en fila, y sobre cada flecha escriba el artefacto que se entrega para poder pasar a la siguiente fase.</a:t>
+            </a:r>
+          </a:p>
+        </p:txBody>
+      </p:sp>
+      <p:sp>
+        <p:nvSpPr>
+          <p:cNvPr id="17" name="Rounded Rectangle 16"/>
+          <p:cNvSpPr/>
+          <p:nvPr/>
+        </p:nvSpPr>
+        <p:spPr>
+          <a:xfrm>
+            <a:off x="457200" y="4361688"/>
+            <a:ext cx="11277295" cy="950976"/>
+          </a:xfrm>
+          <a:prstGeom prst="roundRect">
+            <a:avLst>
+              <a:gd name="adj" fmla="val 12000"/>
+            </a:avLst>
+          </a:prstGeom>
+          <a:solidFill>
+            <a:srgbClr val="E8F4FA"/>
+          </a:solidFill>
+          <a:ln>
+            <a:noFill/>
+          </a:ln>
+        </p:spPr>
+        <p:style>
+          <a:lnRef idx="1">
+            <a:schemeClr val="accent1"/>
+          </a:lnRef>
+          <a:fillRef idx="3">
+            <a:schemeClr val="accent1"/>
+          </a:fillRef>
+          <a:effectRef idx="2">
+            <a:schemeClr val="accent1"/>
+          </a:effectRef>
+          <a:fontRef idx="minor">
+            <a:schemeClr val="lt1"/>
+          </a:fontRef>
+        </p:style>
+        <p:txBody>
+          <a:bodyPr rtlCol="0" anchor="ctr"/>
+          <a:lstStyle/>
+          <a:p>
+            <a:pPr algn="ctr"/>
+          </a:p>
+        </p:txBody>
+      </p:sp>
+      <p:sp>
+        <p:nvSpPr>
+          <p:cNvPr id="18" name="Rounded Rectangle 17"/>
+          <p:cNvSpPr/>
+          <p:nvPr/>
+        </p:nvSpPr>
+        <p:spPr>
+          <a:xfrm>
+            <a:off x="594360" y="4617720"/>
+            <a:ext cx="438912" cy="438912"/>
+          </a:xfrm>
+          <a:prstGeom prst="roundRect">
+            <a:avLst>
+              <a:gd name="adj" fmla="val 12000"/>
+            </a:avLst>
+          </a:prstGeom>
+          <a:solidFill>
+            <a:srgbClr val="095292"/>
+          </a:solidFill>
+          <a:ln>
+            <a:noFill/>
+          </a:ln>
+        </p:spPr>
+        <p:style>
+          <a:lnRef idx="1">
+            <a:schemeClr val="accent1"/>
+          </a:lnRef>
+          <a:fillRef idx="3">
+            <a:schemeClr val="accent1"/>
+          </a:fillRef>
+          <a:effectRef idx="2">
+            <a:schemeClr val="accent1"/>
+          </a:effectRef>
+          <a:fontRef idx="minor">
+            <a:schemeClr val="lt1"/>
+          </a:fontRef>
+        </p:style>
+        <p:txBody>
+          <a:bodyPr rtlCol="0" anchor="ctr"/>
+          <a:lstStyle/>
+          <a:p>
+            <a:pPr algn="ctr"/>
+          </a:p>
+        </p:txBody>
+      </p:sp>
+      <p:sp>
+        <p:nvSpPr>
+          <p:cNvPr id="19" name="TextBox 18"/>
+          <p:cNvSpPr txBox="1"/>
+          <p:nvPr/>
+        </p:nvSpPr>
+        <p:spPr>
+          <a:xfrm>
+            <a:off x="594360" y="4617720"/>
+            <a:ext cx="438912" cy="438912"/>
+          </a:xfrm>
+          <a:prstGeom prst="rect">
+            <a:avLst/>
+          </a:prstGeom>
+          <a:noFill/>
+        </p:spPr>
+        <p:txBody>
+          <a:bodyPr wrap="square" anchor="ctr"/>
+          <a:lstStyle/>
+          <a:p>
+            <a:pPr algn="ctr"/>
+            <a:r>
+              <a:rPr sz="1600" b="1" i="0">
+                <a:solidFill>
+                  <a:srgbClr val="FFFFFF"/>
+                </a:solidFill>
+                <a:latin typeface="Calibri"/>
+              </a:rPr>
+              <a:t>4</a:t>
+            </a:r>
+          </a:p>
+        </p:txBody>
+      </p:sp>
+      <p:sp>
+        <p:nvSpPr>
+          <p:cNvPr id="20" name="TextBox 19"/>
+          <p:cNvSpPr txBox="1"/>
+          <p:nvPr/>
+        </p:nvSpPr>
+        <p:spPr>
+          <a:xfrm>
+            <a:off x="1188720" y="4453128"/>
+            <a:ext cx="10271455" cy="786384"/>
+          </a:xfrm>
+          <a:prstGeom prst="rect">
+            <a:avLst/>
+          </a:prstGeom>
+          <a:noFill/>
+        </p:spPr>
+        <p:txBody>
+          <a:bodyPr wrap="square" anchor="ctr"/>
+          <a:lstStyle/>
+          <a:p>
+            <a:r>
+              <a:rPr sz="1400" b="1" i="0">
+                <a:solidFill>
+                  <a:srgbClr val="095292"/>
+                </a:solidFill>
+                <a:latin typeface="Calibri"/>
+              </a:rPr>
+              <a:t>Duplique la pagina en draw.io y dibuje el recorrido en tres vueltas: las mismas cinco cajas, pero con las vueltas rotuladas Incremento 1 (ficha del paciente), Incremento 2 (historia clinica y busqueda) e Incremento 3 (reportes y metricas), y una flecha de retroalimentacion desde la clinica hacia requisitos.</a:t>
+            </a:r>
+          </a:p>
+        </p:txBody>
+      </p:sp>
+      <p:sp>
+        <p:nvSpPr>
+          <p:cNvPr id="21" name="Rounded Rectangle 20"/>
+          <p:cNvSpPr/>
+          <p:nvPr/>
+        </p:nvSpPr>
+        <p:spPr>
+          <a:xfrm>
+            <a:off x="457200" y="5404104"/>
+            <a:ext cx="11277295" cy="950976"/>
+          </a:xfrm>
+          <a:prstGeom prst="roundRect">
+            <a:avLst>
+              <a:gd name="adj" fmla="val 12000"/>
+            </a:avLst>
+          </a:prstGeom>
+          <a:solidFill>
+            <a:srgbClr val="F2F2F2"/>
+          </a:solidFill>
+          <a:ln>
+            <a:noFill/>
+          </a:ln>
+        </p:spPr>
+        <p:style>
+          <a:lnRef idx="1">
+            <a:schemeClr val="accent1"/>
+          </a:lnRef>
+          <a:fillRef idx="3">
+            <a:schemeClr val="accent1"/>
+          </a:fillRef>
+          <a:effectRef idx="2">
+            <a:schemeClr val="accent1"/>
+          </a:effectRef>
+          <a:fontRef idx="minor">
+            <a:schemeClr val="lt1"/>
+          </a:fontRef>
+        </p:style>
+        <p:txBody>
+          <a:bodyPr rtlCol="0" anchor="ctr"/>
+          <a:lstStyle/>
+          <a:p>
+            <a:pPr algn="ctr"/>
+          </a:p>
+        </p:txBody>
+      </p:sp>
+      <p:sp>
+        <p:nvSpPr>
+          <p:cNvPr id="22" name="Rounded Rectangle 21"/>
+          <p:cNvSpPr/>
+          <p:nvPr/>
+        </p:nvSpPr>
+        <p:spPr>
+          <a:xfrm>
+            <a:off x="594360" y="5660136"/>
+            <a:ext cx="438912" cy="438912"/>
+          </a:xfrm>
+          <a:prstGeom prst="roundRect">
+            <a:avLst>
+              <a:gd name="adj" fmla="val 12000"/>
+            </a:avLst>
+          </a:prstGeom>
+          <a:solidFill>
+            <a:srgbClr val="095292"/>
+          </a:solidFill>
+          <a:ln>
+            <a:noFill/>
+          </a:ln>
+        </p:spPr>
+        <p:style>
+          <a:lnRef idx="1">
+            <a:schemeClr val="accent1"/>
+          </a:lnRef>
+          <a:fillRef idx="3">
+            <a:schemeClr val="accent1"/>
+          </a:fillRef>
+          <a:effectRef idx="2">
+            <a:schemeClr val="accent1"/>
+          </a:effectRef>
+          <a:fontRef idx="minor">
+            <a:schemeClr val="lt1"/>
+          </a:fontRef>
+        </p:style>
+        <p:txBody>
+          <a:bodyPr rtlCol="0" anchor="ctr"/>
+          <a:lstStyle/>
+          <a:p>
+            <a:pPr algn="ctr"/>
+          </a:p>
+        </p:txBody>
+      </p:sp>
+      <p:sp>
+        <p:nvSpPr>
+          <p:cNvPr id="23" name="TextBox 22"/>
+          <p:cNvSpPr txBox="1"/>
+          <p:nvPr/>
+        </p:nvSpPr>
+        <p:spPr>
+          <a:xfrm>
+            <a:off x="594360" y="5660136"/>
+            <a:ext cx="438912" cy="438912"/>
+          </a:xfrm>
+          <a:prstGeom prst="rect">
+            <a:avLst/>
+          </a:prstGeom>
+          <a:noFill/>
+        </p:spPr>
+        <p:txBody>
+          <a:bodyPr wrap="square" anchor="ctr"/>
+          <a:lstStyle/>
+          <a:p>
+            <a:pPr algn="ctr"/>
+            <a:r>
+              <a:rPr sz="1600" b="1" i="0">
+                <a:solidFill>
+                  <a:srgbClr val="FFFFFF"/>
+                </a:solidFill>
+                <a:latin typeface="Calibri"/>
+              </a:rPr>
+              <a:t>5</a:t>
+            </a:r>
+          </a:p>
+        </p:txBody>
+      </p:sp>
+      <p:sp>
+        <p:nvSpPr>
+          <p:cNvPr id="24" name="TextBox 23"/>
+          <p:cNvSpPr txBox="1"/>
+          <p:nvPr/>
+        </p:nvSpPr>
+        <p:spPr>
+          <a:xfrm>
+            <a:off x="1188720" y="5495544"/>
+            <a:ext cx="10271455" cy="786384"/>
+          </a:xfrm>
+          <a:prstGeom prst="rect">
+            <a:avLst/>
+          </a:prstGeom>
+          <a:noFill/>
+        </p:spPr>
+        <p:txBody>
+          <a:bodyPr wrap="square" anchor="ctr"/>
+          <a:lstStyle/>
+          <a:p>
+            <a:r>
+              <a:rPr sz="1400" b="1" i="0">
+                <a:solidFill>
+                  <a:srgbClr val="095292"/>
+                </a:solidFill>
+                <a:latin typeface="Calibri"/>
+              </a:rPr>
+              <a:t>Escriba al final del documento un parrafo de tres renglones titulado 'Producto vs proyecto en VetCare' que responda: cuando termina el proyecto, cuando terminaria el producto y un ejemplo concreto de una solicitud de mantenimiento; exporte a PDF y suba el archivo a la plataforma del curso.</a:t>
+            </a:r>
+          </a:p>
+        </p:txBody>
+      </p:sp>
+      <p:sp>
+        <p:nvSpPr>
+          <p:cNvPr id="25" name="TextBox 24"/>
+          <p:cNvSpPr txBox="1"/>
+          <p:nvPr/>
+        </p:nvSpPr>
+        <p:spPr>
+          <a:xfrm>
+            <a:off x="11185855" y="6473952"/>
+            <a:ext cx="640080" cy="274320"/>
+          </a:xfrm>
+          <a:prstGeom prst="rect">
+            <a:avLst/>
+          </a:prstGeom>
+          <a:noFill/>
+        </p:spPr>
+        <p:txBody>
+          <a:bodyPr wrap="square">
+            <a:spAutoFit/>
+          </a:bodyPr>
+          <a:lstStyle/>
+          <a:p>
+            <a:pPr algn="r"/>
+            <a:r>
+              <a:rPr sz="1100" b="0" i="0">
+                <a:solidFill>
+                  <a:srgbClr val="666666"/>
+                </a:solidFill>
+                <a:latin typeface="Calibri"/>
+              </a:rPr>
+              <a:t>14</a:t>
+            </a:r>
+          </a:p>
+        </p:txBody>
+      </p:sp>
+    </p:spTree>
+  </p:cSld>
+  <p:clrMapOvr>
+    <a:masterClrMapping/>
+  </p:clrMapOvr>
+</p:sld>
+</file>
+
+<file path=ppt/slides/slide15.xml><?xml version="1.0" encoding="utf-8"?>
+<p:sld xmlns:a="http://schemas.openxmlformats.org/drawingml/2006/main" xmlns:p="http://schemas.openxmlformats.org/presentationml/2006/main" xmlns:r="http://schemas.openxmlformats.org/officeDocument/2006/relationships">
+  <p:cSld>
+    <p:bg>
+      <p:bgPr>
+        <a:solidFill>
+          <a:srgbClr val="FFFFFF"/>
+        </a:solidFill>
+        <a:effectLst/>
+      </p:bgPr>
+    </p:bg>
+    <p:spTree>
+      <p:nvGrpSpPr>
+        <p:cNvPr id="1" name=""/>
+        <p:cNvGrpSpPr/>
+        <p:nvPr/>
+      </p:nvGrpSpPr>
+      <p:grpSpPr/>
+      <p:sp>
+        <p:nvSpPr>
+          <p:cNvPr id="2" name="Rectangle 1"/>
+          <p:cNvSpPr/>
+          <p:nvPr/>
+        </p:nvSpPr>
+        <p:spPr>
+          <a:xfrm>
+            <a:off x="0" y="0"/>
+            <a:ext cx="12191695" cy="960120"/>
+          </a:xfrm>
+          <a:prstGeom prst="rect">
+            <a:avLst/>
+          </a:prstGeom>
+          <a:solidFill>
+            <a:srgbClr val="095292"/>
+          </a:solidFill>
+          <a:ln>
+            <a:noFill/>
+          </a:ln>
+        </p:spPr>
+        <p:style>
+          <a:lnRef idx="1">
+            <a:schemeClr val="accent1"/>
+          </a:lnRef>
+          <a:fillRef idx="3">
+            <a:schemeClr val="accent1"/>
+          </a:fillRef>
+          <a:effectRef idx="2">
+            <a:schemeClr val="accent1"/>
+          </a:effectRef>
+          <a:fontRef idx="minor">
+            <a:schemeClr val="lt1"/>
+          </a:fontRef>
+        </p:style>
+        <p:txBody>
+          <a:bodyPr rtlCol="0" anchor="ctr"/>
+          <a:lstStyle/>
+          <a:p>
+            <a:pPr algn="ctr"/>
+          </a:p>
+        </p:txBody>
+      </p:sp>
+      <p:sp>
+        <p:nvSpPr>
+          <p:cNvPr id="3" name="Rectangle 2"/>
+          <p:cNvSpPr/>
+          <p:nvPr/>
+        </p:nvSpPr>
+        <p:spPr>
+          <a:xfrm>
+            <a:off x="0" y="960120"/>
+            <a:ext cx="12191695" cy="41148"/>
+          </a:xfrm>
+          <a:prstGeom prst="rect">
+            <a:avLst/>
+          </a:prstGeom>
+          <a:solidFill>
+            <a:srgbClr val="FFD000"/>
+          </a:solidFill>
+          <a:ln>
+            <a:noFill/>
+          </a:ln>
+        </p:spPr>
+        <p:style>
+          <a:lnRef idx="1">
+            <a:schemeClr val="accent1"/>
+          </a:lnRef>
+          <a:fillRef idx="3">
+            <a:schemeClr val="accent1"/>
+          </a:fillRef>
+          <a:effectRef idx="2">
+            <a:schemeClr val="accent1"/>
+          </a:effectRef>
+          <a:fontRef idx="minor">
+            <a:schemeClr val="lt1"/>
+          </a:fontRef>
+        </p:style>
+        <p:txBody>
+          <a:bodyPr rtlCol="0" anchor="ctr"/>
+          <a:lstStyle/>
+          <a:p>
+            <a:pPr algn="ctr"/>
+          </a:p>
+        </p:txBody>
+      </p:sp>
+      <p:sp>
+        <p:nvSpPr>
+          <p:cNvPr id="4" name="TextBox 3"/>
+          <p:cNvSpPr txBox="1"/>
+          <p:nvPr/>
+        </p:nvSpPr>
+        <p:spPr>
+          <a:xfrm>
+            <a:off x="457200" y="164592"/>
+            <a:ext cx="11277295" cy="502920"/>
+          </a:xfrm>
+          <a:prstGeom prst="rect">
+            <a:avLst/>
+          </a:prstGeom>
+          <a:noFill/>
+        </p:spPr>
+        <p:txBody>
+          <a:bodyPr wrap="square">
+            <a:spAutoFit/>
+          </a:bodyPr>
+          <a:lstStyle/>
+          <a:p>
+            <a:r>
+              <a:rPr sz="2600" b="1" i="0">
+                <a:solidFill>
+                  <a:srgbClr val="FFFFFF"/>
+                </a:solidFill>
+                <a:latin typeface="Calibri"/>
+              </a:rPr>
+              <a:t>Antes de entregar — autochequeo</a:t>
+            </a:r>
+          </a:p>
+        </p:txBody>
+      </p:sp>
+      <p:sp>
+        <p:nvSpPr>
+          <p:cNvPr id="5" name="Rounded Rectangle 4"/>
+          <p:cNvSpPr/>
+          <p:nvPr/>
+        </p:nvSpPr>
+        <p:spPr>
+          <a:xfrm>
+            <a:off x="457200" y="1261872"/>
+            <a:ext cx="11277295" cy="566928"/>
+          </a:xfrm>
+          <a:prstGeom prst="roundRect">
+            <a:avLst>
+              <a:gd name="adj" fmla="val 12000"/>
+            </a:avLst>
+          </a:prstGeom>
+          <a:solidFill>
+            <a:srgbClr val="F2F2F2"/>
+          </a:solidFill>
+          <a:ln>
+            <a:noFill/>
+          </a:ln>
+        </p:spPr>
+        <p:style>
+          <a:lnRef idx="1">
+            <a:schemeClr val="accent1"/>
+          </a:lnRef>
+          <a:fillRef idx="3">
+            <a:schemeClr val="accent1"/>
+          </a:fillRef>
+          <a:effectRef idx="2">
+            <a:schemeClr val="accent1"/>
+          </a:effectRef>
+          <a:fontRef idx="minor">
+            <a:schemeClr val="lt1"/>
+          </a:fontRef>
+        </p:style>
+        <p:txBody>
+          <a:bodyPr rtlCol="0" anchor="ctr"/>
+          <a:lstStyle/>
+          <a:p>
+            <a:pPr algn="ctr"/>
+          </a:p>
+        </p:txBody>
+      </p:sp>
+      <p:sp>
+        <p:nvSpPr>
+          <p:cNvPr id="6" name="Rectangle 5"/>
+          <p:cNvSpPr/>
+          <p:nvPr/>
+        </p:nvSpPr>
+        <p:spPr>
+          <a:xfrm>
+            <a:off x="640080" y="1408175"/>
+            <a:ext cx="274320" cy="274320"/>
+          </a:xfrm>
+          <a:prstGeom prst="rect">
+            <a:avLst/>
+          </a:prstGeom>
+          <a:solidFill>
+            <a:srgbClr val="FFFFFF"/>
+          </a:solidFill>
+          <a:ln>
+            <a:solidFill>
+              <a:srgbClr val="333333"/>
+            </a:solidFill>
+          </a:ln>
+        </p:spPr>
+        <p:style>
+          <a:lnRef idx="1">
+            <a:schemeClr val="accent1"/>
+          </a:lnRef>
+          <a:fillRef idx="3">
+            <a:schemeClr val="accent1"/>
+          </a:fillRef>
+          <a:effectRef idx="2">
+            <a:schemeClr val="accent1"/>
+          </a:effectRef>
+          <a:fontRef idx="minor">
+            <a:schemeClr val="lt1"/>
+          </a:fontRef>
+        </p:style>
+        <p:txBody>
+          <a:bodyPr rtlCol="0" anchor="ctr"/>
+          <a:lstStyle/>
+          <a:p>
+            <a:pPr algn="ctr"/>
+          </a:p>
+        </p:txBody>
+      </p:sp>
+      <p:sp>
+        <p:nvSpPr>
+          <p:cNvPr id="7" name="Rectangle 6"/>
+          <p:cNvSpPr/>
+          <p:nvPr/>
+        </p:nvSpPr>
+        <p:spPr>
+          <a:xfrm>
+            <a:off x="640080" y="1408175"/>
+            <a:ext cx="73152" cy="274320"/>
+          </a:xfrm>
+          <a:prstGeom prst="rect">
+            <a:avLst/>
+          </a:prstGeom>
+          <a:solidFill>
+            <a:srgbClr val="269CCB"/>
+          </a:solidFill>
+          <a:ln>
+            <a:noFill/>
+          </a:ln>
+        </p:spPr>
+        <p:style>
+          <a:lnRef idx="1">
+            <a:schemeClr val="accent1"/>
+          </a:lnRef>
+          <a:fillRef idx="3">
+            <a:schemeClr val="accent1"/>
+          </a:fillRef>
+          <a:effectRef idx="2">
+            <a:schemeClr val="accent1"/>
+          </a:effectRef>
+          <a:fontRef idx="minor">
+            <a:schemeClr val="lt1"/>
+          </a:fontRef>
+        </p:style>
+        <p:txBody>
+          <a:bodyPr rtlCol="0" anchor="ctr"/>
+          <a:lstStyle/>
+          <a:p>
+            <a:pPr algn="ctr"/>
+          </a:p>
+        </p:txBody>
+      </p:sp>
+      <p:sp>
+        <p:nvSpPr>
+          <p:cNvPr id="8" name="TextBox 7"/>
+          <p:cNvSpPr txBox="1"/>
+          <p:nvPr/>
+        </p:nvSpPr>
+        <p:spPr>
+          <a:xfrm>
+            <a:off x="1097280" y="1353312"/>
+            <a:ext cx="10362895" cy="402336"/>
+          </a:xfrm>
+          <a:prstGeom prst="rect">
+            <a:avLst/>
+          </a:prstGeom>
+          <a:noFill/>
+        </p:spPr>
+        <p:txBody>
+          <a:bodyPr wrap="square" anchor="ctr"/>
+          <a:lstStyle/>
+          <a:p>
+            <a:r>
+              <a:rPr sz="1500" b="0" i="0">
+                <a:solidFill>
+                  <a:srgbClr val="333333"/>
+                </a:solidFill>
+                <a:latin typeface="Calibri"/>
+              </a:rPr>
+              <a:t>Si borro la palabra VetCare de su tabla, esa tabla serviria igual para un cajero automatico o para una tienda de ropa? Si la respuesta es si, todavia no aterrizo nada.</a:t>
+            </a:r>
+          </a:p>
+        </p:txBody>
+      </p:sp>
+      <p:sp>
+        <p:nvSpPr>
+          <p:cNvPr id="9" name="Rounded Rectangle 8"/>
+          <p:cNvSpPr/>
+          <p:nvPr/>
+        </p:nvSpPr>
+        <p:spPr>
+          <a:xfrm>
+            <a:off x="457200" y="1938528"/>
+            <a:ext cx="11277295" cy="566928"/>
+          </a:xfrm>
+          <a:prstGeom prst="roundRect">
+            <a:avLst>
+              <a:gd name="adj" fmla="val 12000"/>
+            </a:avLst>
+          </a:prstGeom>
+          <a:solidFill>
+            <a:srgbClr val="F2F2F2"/>
+          </a:solidFill>
+          <a:ln>
+            <a:noFill/>
+          </a:ln>
+        </p:spPr>
+        <p:style>
+          <a:lnRef idx="1">
+            <a:schemeClr val="accent1"/>
+          </a:lnRef>
+          <a:fillRef idx="3">
+            <a:schemeClr val="accent1"/>
+          </a:fillRef>
+          <a:effectRef idx="2">
+            <a:schemeClr val="accent1"/>
+          </a:effectRef>
+          <a:fontRef idx="minor">
+            <a:schemeClr val="lt1"/>
+          </a:fontRef>
+        </p:style>
+        <p:txBody>
+          <a:bodyPr rtlCol="0" anchor="ctr"/>
+          <a:lstStyle/>
+          <a:p>
+            <a:pPr algn="ctr"/>
+          </a:p>
+        </p:txBody>
+      </p:sp>
+      <p:sp>
+        <p:nvSpPr>
+          <p:cNvPr id="10" name="Rectangle 9"/>
+          <p:cNvSpPr/>
+          <p:nvPr/>
+        </p:nvSpPr>
+        <p:spPr>
+          <a:xfrm>
+            <a:off x="640080" y="2084832"/>
+            <a:ext cx="274320" cy="274320"/>
+          </a:xfrm>
+          <a:prstGeom prst="rect">
+            <a:avLst/>
+          </a:prstGeom>
+          <a:solidFill>
+            <a:srgbClr val="FFFFFF"/>
+          </a:solidFill>
+          <a:ln>
+            <a:solidFill>
+              <a:srgbClr val="333333"/>
+            </a:solidFill>
+          </a:ln>
+        </p:spPr>
+        <p:style>
+          <a:lnRef idx="1">
+            <a:schemeClr val="accent1"/>
+          </a:lnRef>
+          <a:fillRef idx="3">
+            <a:schemeClr val="accent1"/>
+          </a:fillRef>
+          <a:effectRef idx="2">
+            <a:schemeClr val="accent1"/>
+          </a:effectRef>
+          <a:fontRef idx="minor">
+            <a:schemeClr val="lt1"/>
+          </a:fontRef>
+        </p:style>
+        <p:txBody>
+          <a:bodyPr rtlCol="0" anchor="ctr"/>
+          <a:lstStyle/>
+          <a:p>
+            <a:pPr algn="ctr"/>
+          </a:p>
+        </p:txBody>
+      </p:sp>
+      <p:sp>
+        <p:nvSpPr>
+          <p:cNvPr id="11" name="Rectangle 10"/>
+          <p:cNvSpPr/>
+          <p:nvPr/>
+        </p:nvSpPr>
+        <p:spPr>
+          <a:xfrm>
+            <a:off x="640080" y="2084832"/>
+            <a:ext cx="73152" cy="274320"/>
+          </a:xfrm>
+          <a:prstGeom prst="rect">
+            <a:avLst/>
+          </a:prstGeom>
+          <a:solidFill>
+            <a:srgbClr val="269CCB"/>
+          </a:solidFill>
+          <a:ln>
+            <a:noFill/>
+          </a:ln>
+        </p:spPr>
+        <p:style>
+          <a:lnRef idx="1">
+            <a:schemeClr val="accent1"/>
+          </a:lnRef>
+          <a:fillRef idx="3">
+            <a:schemeClr val="accent1"/>
+          </a:fillRef>
+          <a:effectRef idx="2">
+            <a:schemeClr val="accent1"/>
+          </a:effectRef>
+          <a:fontRef idx="minor">
+            <a:schemeClr val="lt1"/>
+          </a:fontRef>
+        </p:style>
+        <p:txBody>
+          <a:bodyPr rtlCol="0" anchor="ctr"/>
+          <a:lstStyle/>
+          <a:p>
+            <a:pPr algn="ctr"/>
+          </a:p>
+        </p:txBody>
+      </p:sp>
+      <p:sp>
+        <p:nvSpPr>
+          <p:cNvPr id="12" name="TextBox 11"/>
+          <p:cNvSpPr txBox="1"/>
+          <p:nvPr/>
+        </p:nvSpPr>
+        <p:spPr>
+          <a:xfrm>
+            <a:off x="1097280" y="2029968"/>
+            <a:ext cx="10362895" cy="402336"/>
+          </a:xfrm>
+          <a:prstGeom prst="rect">
+            <a:avLst/>
+          </a:prstGeom>
+          <a:noFill/>
+        </p:spPr>
+        <p:txBody>
+          <a:bodyPr wrap="square" anchor="ctr"/>
+          <a:lstStyle/>
+          <a:p>
+            <a:r>
+              <a:rPr sz="1500" b="0" i="0">
+                <a:solidFill>
+                  <a:srgbClr val="333333"/>
+                </a:solidFill>
+                <a:latin typeface="Calibri"/>
+              </a:rPr>
+              <a:t>En su diagrama de vueltas, cada vuelta termina en algo que la veterinaria podria mirar y opinar, o termina en trabajo interno que solo entiende el equipo?</a:t>
+            </a:r>
+          </a:p>
+        </p:txBody>
+      </p:sp>
+      <p:sp>
+        <p:nvSpPr>
+          <p:cNvPr id="13" name="Rounded Rectangle 12"/>
+          <p:cNvSpPr/>
+          <p:nvPr/>
+        </p:nvSpPr>
+        <p:spPr>
+          <a:xfrm>
+            <a:off x="457200" y="2615184"/>
+            <a:ext cx="11277295" cy="566928"/>
+          </a:xfrm>
+          <a:prstGeom prst="roundRect">
+            <a:avLst>
+              <a:gd name="adj" fmla="val 12000"/>
+            </a:avLst>
+          </a:prstGeom>
+          <a:solidFill>
+            <a:srgbClr val="F2F2F2"/>
+          </a:solidFill>
+          <a:ln>
+            <a:noFill/>
+          </a:ln>
+        </p:spPr>
+        <p:style>
+          <a:lnRef idx="1">
+            <a:schemeClr val="accent1"/>
+          </a:lnRef>
+          <a:fillRef idx="3">
+            <a:schemeClr val="accent1"/>
+          </a:fillRef>
+          <a:effectRef idx="2">
+            <a:schemeClr val="accent1"/>
+          </a:effectRef>
+          <a:fontRef idx="minor">
+            <a:schemeClr val="lt1"/>
+          </a:fontRef>
+        </p:style>
+        <p:txBody>
+          <a:bodyPr rtlCol="0" anchor="ctr"/>
+          <a:lstStyle/>
+          <a:p>
+            <a:pPr algn="ctr"/>
+          </a:p>
+        </p:txBody>
+      </p:sp>
+      <p:sp>
+        <p:nvSpPr>
+          <p:cNvPr id="14" name="Rectangle 13"/>
+          <p:cNvSpPr/>
+          <p:nvPr/>
+        </p:nvSpPr>
+        <p:spPr>
+          <a:xfrm>
+            <a:off x="640080" y="2761488"/>
+            <a:ext cx="274320" cy="274320"/>
+          </a:xfrm>
+          <a:prstGeom prst="rect">
+            <a:avLst/>
+          </a:prstGeom>
+          <a:solidFill>
+            <a:srgbClr val="FFFFFF"/>
+          </a:solidFill>
+          <a:ln>
+            <a:solidFill>
+              <a:srgbClr val="333333"/>
+            </a:solidFill>
+          </a:ln>
+        </p:spPr>
+        <p:style>
+          <a:lnRef idx="1">
+            <a:schemeClr val="accent1"/>
+          </a:lnRef>
+          <a:fillRef idx="3">
+            <a:schemeClr val="accent1"/>
+          </a:fillRef>
+          <a:effectRef idx="2">
+            <a:schemeClr val="accent1"/>
+          </a:effectRef>
+          <a:fontRef idx="minor">
+            <a:schemeClr val="lt1"/>
+          </a:fontRef>
+        </p:style>
+        <p:txBody>
+          <a:bodyPr rtlCol="0" anchor="ctr"/>
+          <a:lstStyle/>
+          <a:p>
+            <a:pPr algn="ctr"/>
+          </a:p>
+        </p:txBody>
+      </p:sp>
+      <p:sp>
+        <p:nvSpPr>
+          <p:cNvPr id="15" name="Rectangle 14"/>
+          <p:cNvSpPr/>
+          <p:nvPr/>
+        </p:nvSpPr>
+        <p:spPr>
+          <a:xfrm>
+            <a:off x="640080" y="2761488"/>
+            <a:ext cx="73152" cy="274320"/>
+          </a:xfrm>
+          <a:prstGeom prst="rect">
+            <a:avLst/>
+          </a:prstGeom>
+          <a:solidFill>
+            <a:srgbClr val="269CCB"/>
+          </a:solidFill>
+          <a:ln>
+            <a:noFill/>
+          </a:ln>
+        </p:spPr>
+        <p:style>
+          <a:lnRef idx="1">
+            <a:schemeClr val="accent1"/>
+          </a:lnRef>
+          <a:fillRef idx="3">
+            <a:schemeClr val="accent1"/>
+          </a:fillRef>
+          <a:effectRef idx="2">
+            <a:schemeClr val="accent1"/>
+          </a:effectRef>
+          <a:fontRef idx="minor">
+            <a:schemeClr val="lt1"/>
+          </a:fontRef>
+        </p:style>
+        <p:txBody>
+          <a:bodyPr rtlCol="0" anchor="ctr"/>
+          <a:lstStyle/>
+          <a:p>
+            <a:pPr algn="ctr"/>
+          </a:p>
+        </p:txBody>
+      </p:sp>
+      <p:sp>
+        <p:nvSpPr>
+          <p:cNvPr id="16" name="TextBox 15"/>
+          <p:cNvSpPr txBox="1"/>
+          <p:nvPr/>
+        </p:nvSpPr>
+        <p:spPr>
+          <a:xfrm>
+            <a:off x="1097280" y="2706624"/>
+            <a:ext cx="10362895" cy="402336"/>
+          </a:xfrm>
+          <a:prstGeom prst="rect">
+            <a:avLst/>
+          </a:prstGeom>
+          <a:noFill/>
+        </p:spPr>
+        <p:txBody>
+          <a:bodyPr wrap="square" anchor="ctr"/>
+          <a:lstStyle/>
+          <a:p>
+            <a:r>
+              <a:rPr sz="1500" b="0" i="0">
+                <a:solidFill>
+                  <a:srgbClr val="333333"/>
+                </a:solidFill>
+                <a:latin typeface="Calibri"/>
+              </a:rPr>
+              <a:t>Que documento exacto tendria que mostrar hoy, en pantalla, para demostrarle a la clinica que la fase de requisitos ya quedo cerrada?</a:t>
+            </a:r>
+          </a:p>
+        </p:txBody>
+      </p:sp>
+      <p:sp>
+        <p:nvSpPr>
+          <p:cNvPr id="17" name="TextBox 16"/>
+          <p:cNvSpPr txBox="1"/>
+          <p:nvPr/>
+        </p:nvSpPr>
+        <p:spPr>
+          <a:xfrm>
+            <a:off x="11185855" y="6473952"/>
+            <a:ext cx="640080" cy="274320"/>
+          </a:xfrm>
+          <a:prstGeom prst="rect">
+            <a:avLst/>
+          </a:prstGeom>
+          <a:noFill/>
+        </p:spPr>
+        <p:txBody>
+          <a:bodyPr wrap="square">
+            <a:spAutoFit/>
+          </a:bodyPr>
+          <a:lstStyle/>
+          <a:p>
+            <a:pPr algn="r"/>
+            <a:r>
+              <a:rPr sz="1100" b="0" i="0">
+                <a:solidFill>
+                  <a:srgbClr val="666666"/>
+                </a:solidFill>
+                <a:latin typeface="Calibri"/>
+              </a:rPr>
+              <a:t>15</a:t>
+            </a:r>
+          </a:p>
+        </p:txBody>
+      </p:sp>
+    </p:spTree>
+  </p:cSld>
+  <p:clrMapOvr>
+    <a:masterClrMapping/>
+  </p:clrMapOvr>
+</p:sld>
+</file>
+
+<file path=ppt/slides/slide16.xml><?xml version="1.0" encoding="utf-8"?>
+<p:sld xmlns:a="http://schemas.openxmlformats.org/drawingml/2006/main" xmlns:p="http://schemas.openxmlformats.org/presentationml/2006/main" xmlns:r="http://schemas.openxmlformats.org/officeDocument/2006/relationships">
+  <p:cSld>
+    <p:bg>
+      <p:bgPr>
+        <a:solidFill>
+          <a:srgbClr val="FFFFFF"/>
+        </a:solidFill>
+        <a:effectLst/>
+      </p:bgPr>
+    </p:bg>
+    <p:spTree>
+      <p:nvGrpSpPr>
+        <p:cNvPr id="1" name=""/>
+        <p:cNvGrpSpPr/>
+        <p:nvPr/>
+      </p:nvGrpSpPr>
+      <p:grpSpPr/>
+      <p:sp>
+        <p:nvSpPr>
+          <p:cNvPr id="2" name="Rectangle 1"/>
+          <p:cNvSpPr/>
+          <p:nvPr/>
+        </p:nvSpPr>
+        <p:spPr>
+          <a:xfrm>
+            <a:off x="0" y="0"/>
+            <a:ext cx="12191695" cy="960120"/>
+          </a:xfrm>
+          <a:prstGeom prst="rect">
+            <a:avLst/>
+          </a:prstGeom>
+          <a:solidFill>
+            <a:srgbClr val="095292"/>
+          </a:solidFill>
+          <a:ln>
+            <a:noFill/>
+          </a:ln>
+        </p:spPr>
+        <p:style>
+          <a:lnRef idx="1">
+            <a:schemeClr val="accent1"/>
+          </a:lnRef>
+          <a:fillRef idx="3">
+            <a:schemeClr val="accent1"/>
+          </a:fillRef>
+          <a:effectRef idx="2">
+            <a:schemeClr val="accent1"/>
+          </a:effectRef>
+          <a:fontRef idx="minor">
+            <a:schemeClr val="lt1"/>
+          </a:fontRef>
+        </p:style>
+        <p:txBody>
+          <a:bodyPr rtlCol="0" anchor="ctr"/>
+          <a:lstStyle/>
+          <a:p>
+            <a:pPr algn="ctr"/>
+          </a:p>
+        </p:txBody>
+      </p:sp>
+      <p:sp>
+        <p:nvSpPr>
+          <p:cNvPr id="3" name="Rectangle 2"/>
+          <p:cNvSpPr/>
+          <p:nvPr/>
+        </p:nvSpPr>
+        <p:spPr>
+          <a:xfrm>
+            <a:off x="0" y="960120"/>
+            <a:ext cx="12191695" cy="41148"/>
+          </a:xfrm>
+          <a:prstGeom prst="rect">
+            <a:avLst/>
+          </a:prstGeom>
+          <a:solidFill>
+            <a:srgbClr val="FFD000"/>
+          </a:solidFill>
+          <a:ln>
+            <a:noFill/>
+          </a:ln>
+        </p:spPr>
+        <p:style>
+          <a:lnRef idx="1">
+            <a:schemeClr val="accent1"/>
+          </a:lnRef>
+          <a:fillRef idx="3">
+            <a:schemeClr val="accent1"/>
+          </a:fillRef>
+          <a:effectRef idx="2">
+            <a:schemeClr val="accent1"/>
+          </a:effectRef>
+          <a:fontRef idx="minor">
+            <a:schemeClr val="lt1"/>
+          </a:fontRef>
+        </p:style>
+        <p:txBody>
+          <a:bodyPr rtlCol="0" anchor="ctr"/>
+          <a:lstStyle/>
+          <a:p>
+            <a:pPr algn="ctr"/>
+          </a:p>
+        </p:txBody>
+      </p:sp>
+      <p:sp>
+        <p:nvSpPr>
+          <p:cNvPr id="4" name="TextBox 3"/>
+          <p:cNvSpPr txBox="1"/>
+          <p:nvPr/>
+        </p:nvSpPr>
+        <p:spPr>
+          <a:xfrm>
+            <a:off x="457200" y="164592"/>
+            <a:ext cx="11277295" cy="502920"/>
+          </a:xfrm>
+          <a:prstGeom prst="rect">
+            <a:avLst/>
+          </a:prstGeom>
+          <a:noFill/>
+        </p:spPr>
+        <p:txBody>
+          <a:bodyPr wrap="square">
+            <a:spAutoFit/>
+          </a:bodyPr>
+          <a:lstStyle/>
+          <a:p>
+            <a:r>
+              <a:rPr sz="2600" b="1" i="0">
+                <a:solidFill>
+                  <a:srgbClr val="FFFFFF"/>
+                </a:solidFill>
+                <a:latin typeface="Calibri"/>
+              </a:rPr>
+              <a:t>Criterios de exito / entregable</a:t>
+            </a:r>
+          </a:p>
+        </p:txBody>
+      </p:sp>
+      <p:sp>
+        <p:nvSpPr>
+          <p:cNvPr id="5" name="TextBox 4"/>
+          <p:cNvSpPr txBox="1"/>
+          <p:nvPr/>
+        </p:nvSpPr>
+        <p:spPr>
+          <a:xfrm>
+            <a:off x="457200" y="1170432"/>
+            <a:ext cx="11277295" cy="5230368"/>
+          </a:xfrm>
+          <a:prstGeom prst="rect">
+            <a:avLst/>
+          </a:prstGeom>
+          <a:noFill/>
+        </p:spPr>
+        <p:txBody>
+          <a:bodyPr wrap="square">
+            <a:spAutoFit/>
+          </a:bodyPr>
+          <a:lstStyle/>
+          <a:p>
+            <a:pPr>
+              <a:spcAft>
+                <a:spcPts val="800"/>
+              </a:spcAft>
+            </a:pPr>
+            <a:r>
+              <a:rPr sz="2000" b="0" i="0">
+                <a:solidFill>
+                  <a:srgbClr val="333333"/>
+                </a:solidFill>
+                <a:latin typeface="Calibri"/>
+              </a:rPr>
+              <a:t>–   </a:t>
+            </a:r>
+            <a:r>
+              <a:rPr sz="2000" b="1" i="0">
+                <a:solidFill>
+                  <a:srgbClr val="333333"/>
+                </a:solidFill>
+                <a:latin typeface="Calibri"/>
+              </a:rPr>
+              <a:t>Entregable:</a:t>
+            </a:r>
+            <a:r>
+              <a:rPr sz="2000" b="0" i="0">
+                <a:solidFill>
+                  <a:srgbClr val="333333"/>
+                </a:solidFill>
+                <a:latin typeface="Calibri"/>
+              </a:rPr>
+              <a:t> Un documento de una pagina en Google Docs con la tabla Fase / Pregunta que responde / Artefacto de VetCare / Quien lo aprueba, mas dos diagramas en draw.io (recorrido lineal y recorrido en tres vueltas) exportados a PDF y subidos a la plataforma del curso.</a:t>
+            </a:r>
+          </a:p>
+          <a:p>
+            <a:pPr>
+              <a:spcAft>
+                <a:spcPts val="800"/>
+              </a:spcAft>
+            </a:pPr>
+            <a:r>
+              <a:rPr sz="2000" b="0" i="0">
+                <a:solidFill>
+                  <a:srgbClr val="333333"/>
+                </a:solidFill>
+                <a:latin typeface="Calibri"/>
+              </a:rPr>
+              <a:t>–   </a:t>
+            </a:r>
+            <a:r>
+              <a:rPr sz="2000" b="1" i="0">
+                <a:solidFill>
+                  <a:srgbClr val="333333"/>
+                </a:solidFill>
+                <a:latin typeface="Calibri"/>
+              </a:rPr>
+              <a:t>Exito:</a:t>
+            </a:r>
+            <a:r>
+              <a:rPr sz="2000" b="0" i="0">
+                <a:solidFill>
+                  <a:srgbClr val="333333"/>
+                </a:solidFill>
+                <a:latin typeface="Calibri"/>
+              </a:rPr>
+              <a:t> La tabla tiene las cinco fases y en cada una un artefacto concreto de VetCare escrito con nombre propio, no una definicion generica de libro.</a:t>
+            </a:r>
+          </a:p>
+          <a:p>
+            <a:pPr>
+              <a:spcAft>
+                <a:spcPts val="800"/>
+              </a:spcAft>
+            </a:pPr>
+            <a:r>
+              <a:rPr sz="2000" b="0" i="0">
+                <a:solidFill>
+                  <a:srgbClr val="333333"/>
+                </a:solidFill>
+                <a:latin typeface="Calibri"/>
+              </a:rPr>
+              <a:t>–   </a:t>
+            </a:r>
+            <a:r>
+              <a:rPr sz="2000" b="1" i="0">
+                <a:solidFill>
+                  <a:srgbClr val="333333"/>
+                </a:solidFill>
+                <a:latin typeface="Calibri"/>
+              </a:rPr>
+              <a:t>Exito:</a:t>
+            </a:r>
+            <a:r>
+              <a:rPr sz="2000" b="0" i="0">
+                <a:solidFill>
+                  <a:srgbClr val="333333"/>
+                </a:solidFill>
+                <a:latin typeface="Calibri"/>
+              </a:rPr>
+              <a:t> El diagrama lineal y el diagrama en vueltas usan exactamente las mismas cinco cajas; lo unico distinto entre ellos es el recorrido.</a:t>
+            </a:r>
+          </a:p>
+          <a:p>
+            <a:pPr>
+              <a:spcAft>
+                <a:spcPts val="800"/>
+              </a:spcAft>
+            </a:pPr>
+            <a:r>
+              <a:rPr sz="2000" b="0" i="0">
+                <a:solidFill>
+                  <a:srgbClr val="333333"/>
+                </a:solidFill>
+                <a:latin typeface="Calibri"/>
+              </a:rPr>
+              <a:t>–   </a:t>
+            </a:r>
+            <a:r>
+              <a:rPr sz="2000" b="1" i="0">
+                <a:solidFill>
+                  <a:srgbClr val="333333"/>
+                </a:solidFill>
+                <a:latin typeface="Calibri"/>
+              </a:rPr>
+              <a:t>Exito:</a:t>
+            </a:r>
+            <a:r>
+              <a:rPr sz="2000" b="0" i="0">
+                <a:solidFill>
+                  <a:srgbClr val="333333"/>
+                </a:solidFill>
+                <a:latin typeface="Calibri"/>
+              </a:rPr>
+              <a:t> La fase actual del equipo esta marcada y sustentada con dos evidencias verificables del estado real de VetCare.</a:t>
+            </a:r>
+          </a:p>
+          <a:p>
+            <a:pPr>
+              <a:spcAft>
+                <a:spcPts val="800"/>
+              </a:spcAft>
+            </a:pPr>
+            <a:r>
+              <a:rPr sz="2000" b="0" i="0">
+                <a:solidFill>
+                  <a:srgbClr val="333333"/>
+                </a:solidFill>
+                <a:latin typeface="Calibri"/>
+              </a:rPr>
+              <a:t>–   </a:t>
+            </a:r>
+            <a:r>
+              <a:rPr sz="2000" b="1" i="0">
+                <a:solidFill>
+                  <a:srgbClr val="333333"/>
+                </a:solidFill>
+                <a:latin typeface="Calibri"/>
+              </a:rPr>
+              <a:t>Exito:</a:t>
+            </a:r>
+            <a:r>
+              <a:rPr sz="2000" b="0" i="0">
+                <a:solidFill>
+                  <a:srgbClr val="333333"/>
+                </a:solidFill>
+                <a:latin typeface="Calibri"/>
+              </a:rPr>
+              <a:t> El parrafo final distingue con hechos concretos cuando termina el proyecto y cuando terminaria el producto, e incluye un ejemplo de mantenimiento.</a:t>
+            </a:r>
+          </a:p>
+          <a:p>
+            <a:pPr>
+              <a:spcAft>
+                <a:spcPts val="800"/>
+              </a:spcAft>
+            </a:pPr>
+            <a:r>
+              <a:rPr sz="2000" b="0" i="0">
+                <a:solidFill>
+                  <a:srgbClr val="333333"/>
+                </a:solidFill>
+                <a:latin typeface="Calibri"/>
+              </a:rPr>
+              <a:t>–   </a:t>
+            </a:r>
+            <a:r>
+              <a:rPr sz="2000" b="1" i="0">
+                <a:solidFill>
+                  <a:srgbClr val="333333"/>
+                </a:solidFill>
+                <a:latin typeface="Calibri"/>
+              </a:rPr>
+              <a:t>Entrega en la plataforma del curso</a:t>
+            </a:r>
+            <a:r>
+              <a:rPr sz="2000" b="0" i="0">
+                <a:solidFill>
+                  <a:srgbClr val="333333"/>
+                </a:solidFill>
+                <a:latin typeface="Calibri"/>
+              </a:rPr>
+              <a:t> — en la fecha que indique el docente.</a:t>
+            </a:r>
+          </a:p>
+        </p:txBody>
+      </p:sp>
+      <p:sp>
+        <p:nvSpPr>
+          <p:cNvPr id="6" name="TextBox 5"/>
+          <p:cNvSpPr txBox="1"/>
+          <p:nvPr/>
+        </p:nvSpPr>
+        <p:spPr>
+          <a:xfrm>
+            <a:off x="11185855" y="6473952"/>
+            <a:ext cx="640080" cy="274320"/>
+          </a:xfrm>
+          <a:prstGeom prst="rect">
+            <a:avLst/>
+          </a:prstGeom>
+          <a:noFill/>
+        </p:spPr>
+        <p:txBody>
+          <a:bodyPr wrap="square">
+            <a:spAutoFit/>
+          </a:bodyPr>
+          <a:lstStyle/>
+          <a:p>
+            <a:pPr algn="r"/>
+            <a:r>
+              <a:rPr sz="1100" b="0" i="0">
+                <a:solidFill>
+                  <a:srgbClr val="666666"/>
+                </a:solidFill>
+                <a:latin typeface="Calibri"/>
+              </a:rPr>
+              <a:t>16</a:t>
+            </a:r>
+          </a:p>
+        </p:txBody>
+      </p:sp>
+    </p:spTree>
+  </p:cSld>
+  <p:clrMapOvr>
+    <a:masterClrMapping/>
+  </p:clrMapOvr>
+</p:sld>
+</file>
+
+<file path=ppt/slides/slide17.xml><?xml version="1.0" encoding="utf-8"?>
+<p:sld xmlns:a="http://schemas.openxmlformats.org/drawingml/2006/main" xmlns:p="http://schemas.openxmlformats.org/presentationml/2006/main" xmlns:r="http://schemas.openxmlformats.org/officeDocument/2006/relationships">
+  <p:cSld>
+    <p:bg>
+      <p:bgPr>
+        <a:solidFill>
+          <a:srgbClr val="FFFFFF"/>
+        </a:solidFill>
+        <a:effectLst/>
+      </p:bgPr>
+    </p:bg>
+    <p:spTree>
+      <p:nvGrpSpPr>
+        <p:cNvPr id="1" name=""/>
+        <p:cNvGrpSpPr/>
+        <p:nvPr/>
+      </p:nvGrpSpPr>
+      <p:grpSpPr/>
+      <p:sp>
+        <p:nvSpPr>
+          <p:cNvPr id="2" name="Rectangle 1"/>
+          <p:cNvSpPr/>
+          <p:nvPr/>
+        </p:nvSpPr>
+        <p:spPr>
+          <a:xfrm>
+            <a:off x="0" y="0"/>
+            <a:ext cx="12191695" cy="960120"/>
+          </a:xfrm>
+          <a:prstGeom prst="rect">
+            <a:avLst/>
+          </a:prstGeom>
+          <a:solidFill>
+            <a:srgbClr val="095292"/>
+          </a:solidFill>
+          <a:ln>
+            <a:noFill/>
+          </a:ln>
+        </p:spPr>
+        <p:style>
+          <a:lnRef idx="1">
+            <a:schemeClr val="accent1"/>
+          </a:lnRef>
+          <a:fillRef idx="3">
+            <a:schemeClr val="accent1"/>
+          </a:fillRef>
+          <a:effectRef idx="2">
+            <a:schemeClr val="accent1"/>
+          </a:effectRef>
+          <a:fontRef idx="minor">
+            <a:schemeClr val="lt1"/>
+          </a:fontRef>
+        </p:style>
+        <p:txBody>
+          <a:bodyPr rtlCol="0" anchor="ctr"/>
+          <a:lstStyle/>
+          <a:p>
+            <a:pPr algn="ctr"/>
+          </a:p>
+        </p:txBody>
+      </p:sp>
+      <p:sp>
+        <p:nvSpPr>
+          <p:cNvPr id="3" name="Rectangle 2"/>
+          <p:cNvSpPr/>
+          <p:nvPr/>
+        </p:nvSpPr>
+        <p:spPr>
+          <a:xfrm>
+            <a:off x="0" y="960120"/>
+            <a:ext cx="12191695" cy="41148"/>
+          </a:xfrm>
+          <a:prstGeom prst="rect">
+            <a:avLst/>
+          </a:prstGeom>
+          <a:solidFill>
+            <a:srgbClr val="FFD000"/>
+          </a:solidFill>
+          <a:ln>
+            <a:noFill/>
+          </a:ln>
+        </p:spPr>
+        <p:style>
+          <a:lnRef idx="1">
+            <a:schemeClr val="accent1"/>
+          </a:lnRef>
+          <a:fillRef idx="3">
+            <a:schemeClr val="accent1"/>
+          </a:fillRef>
+          <a:effectRef idx="2">
+            <a:schemeClr val="accent1"/>
+          </a:effectRef>
+          <a:fontRef idx="minor">
+            <a:schemeClr val="lt1"/>
+          </a:fontRef>
+        </p:style>
+        <p:txBody>
+          <a:bodyPr rtlCol="0" anchor="ctr"/>
+          <a:lstStyle/>
+          <a:p>
+            <a:pPr algn="ctr"/>
+          </a:p>
+        </p:txBody>
+      </p:sp>
+      <p:sp>
+        <p:nvSpPr>
+          <p:cNvPr id="4" name="TextBox 3"/>
+          <p:cNvSpPr txBox="1"/>
+          <p:nvPr/>
+        </p:nvSpPr>
+        <p:spPr>
+          <a:xfrm>
+            <a:off x="457200" y="164592"/>
+            <a:ext cx="11277295" cy="502920"/>
+          </a:xfrm>
+          <a:prstGeom prst="rect">
+            <a:avLst/>
+          </a:prstGeom>
+          <a:noFill/>
+        </p:spPr>
+        <p:txBody>
+          <a:bodyPr wrap="square">
+            <a:spAutoFit/>
+          </a:bodyPr>
+          <a:lstStyle/>
+          <a:p>
+            <a:r>
+              <a:rPr sz="2600" b="1" i="0">
+                <a:solidFill>
+                  <a:srgbClr val="FFFFFF"/>
+                </a:solidFill>
+                <a:latin typeface="Calibri"/>
+              </a:rPr>
+              <a:t>Para el PI esta semana</a:t>
+            </a:r>
+          </a:p>
+        </p:txBody>
+      </p:sp>
+      <p:sp>
+        <p:nvSpPr>
+          <p:cNvPr id="5" name="Rounded Rectangle 4"/>
+          <p:cNvSpPr/>
+          <p:nvPr/>
+        </p:nvSpPr>
+        <p:spPr>
+          <a:xfrm>
+            <a:off x="457200" y="1261872"/>
+            <a:ext cx="11277295" cy="1051560"/>
+          </a:xfrm>
+          <a:prstGeom prst="roundRect">
+            <a:avLst>
+              <a:gd name="adj" fmla="val 12000"/>
+            </a:avLst>
+          </a:prstGeom>
+          <a:solidFill>
+            <a:srgbClr val="E8F4FA"/>
+          </a:solidFill>
+          <a:ln>
+            <a:noFill/>
+          </a:ln>
+        </p:spPr>
+        <p:style>
+          <a:lnRef idx="1">
+            <a:schemeClr val="accent1"/>
+          </a:lnRef>
+          <a:fillRef idx="3">
+            <a:schemeClr val="accent1"/>
+          </a:fillRef>
+          <a:effectRef idx="2">
+            <a:schemeClr val="accent1"/>
+          </a:effectRef>
+          <a:fontRef idx="minor">
+            <a:schemeClr val="lt1"/>
+          </a:fontRef>
+        </p:style>
+        <p:txBody>
+          <a:bodyPr rtlCol="0" anchor="ctr"/>
+          <a:lstStyle/>
+          <a:p>
+            <a:pPr algn="ctr"/>
+          </a:p>
+        </p:txBody>
+      </p:sp>
+      <p:sp>
+        <p:nvSpPr>
+          <p:cNvPr id="6" name="Rectangle 5"/>
+          <p:cNvSpPr/>
+          <p:nvPr/>
+        </p:nvSpPr>
+        <p:spPr>
+          <a:xfrm>
+            <a:off x="457200" y="1261872"/>
+            <a:ext cx="128016" cy="1051560"/>
+          </a:xfrm>
+          <a:prstGeom prst="rect">
+            <a:avLst/>
+          </a:prstGeom>
+          <a:solidFill>
+            <a:srgbClr val="269CCB"/>
+          </a:solidFill>
+          <a:ln>
+            <a:noFill/>
+          </a:ln>
+        </p:spPr>
+        <p:style>
+          <a:lnRef idx="1">
+            <a:schemeClr val="accent1"/>
+          </a:lnRef>
+          <a:fillRef idx="3">
+            <a:schemeClr val="accent1"/>
+          </a:fillRef>
+          <a:effectRef idx="2">
+            <a:schemeClr val="accent1"/>
+          </a:effectRef>
+          <a:fontRef idx="minor">
+            <a:schemeClr val="lt1"/>
+          </a:fontRef>
+        </p:style>
+        <p:txBody>
+          <a:bodyPr rtlCol="0" anchor="ctr"/>
+          <a:lstStyle/>
+          <a:p>
+            <a:pPr algn="ctr"/>
+          </a:p>
+        </p:txBody>
+      </p:sp>
+      <p:sp>
+        <p:nvSpPr>
+          <p:cNvPr id="7" name="TextBox 6"/>
+          <p:cNvSpPr txBox="1"/>
+          <p:nvPr/>
+        </p:nvSpPr>
+        <p:spPr>
+          <a:xfrm>
+            <a:off x="777240" y="1399031"/>
+            <a:ext cx="10774375" cy="822959"/>
+          </a:xfrm>
+          <a:prstGeom prst="rect">
+            <a:avLst/>
+          </a:prstGeom>
+          <a:noFill/>
+        </p:spPr>
+        <p:txBody>
+          <a:bodyPr wrap="square">
+            <a:spAutoFit/>
+          </a:bodyPr>
+          <a:lstStyle/>
+          <a:p>
+            <a:r>
+              <a:rPr sz="1200" b="1" i="0">
+                <a:solidFill>
+                  <a:srgbClr val="269CCB"/>
+                </a:solidFill>
+                <a:latin typeface="Calibri"/>
+              </a:rPr>
+              <a:t>Info</a:t>
+            </a:r>
+          </a:p>
+          <a:p>
+            <a:pPr>
+              <a:spcBef>
+                <a:spcPts val="400"/>
+              </a:spcBef>
+            </a:pPr>
+            <a:r>
+              <a:rPr sz="1400" b="0" i="0">
+                <a:solidFill>
+                  <a:srgbClr val="333333"/>
+                </a:solidFill>
+                <a:latin typeface="Calibri"/>
+              </a:rPr>
+              <a:t>Hito: Queda listo el mapa de fases de VetCare con el artefacto concreto que produce cada fase y la marca de en cual esta parado el equipo hoy.</a:t>
+            </a:r>
+          </a:p>
+        </p:txBody>
+      </p:sp>
+      <p:sp>
+        <p:nvSpPr>
+          <p:cNvPr id="8" name="Rounded Rectangle 7"/>
+          <p:cNvSpPr/>
+          <p:nvPr/>
+        </p:nvSpPr>
+        <p:spPr>
+          <a:xfrm>
+            <a:off x="457200" y="2478024"/>
+            <a:ext cx="11277295" cy="1051560"/>
+          </a:xfrm>
+          <a:prstGeom prst="roundRect">
+            <a:avLst>
+              <a:gd name="adj" fmla="val 12000"/>
+            </a:avLst>
+          </a:prstGeom>
+          <a:solidFill>
+            <a:srgbClr val="FFF8E1"/>
+          </a:solidFill>
+          <a:ln>
+            <a:noFill/>
+          </a:ln>
+        </p:spPr>
+        <p:style>
+          <a:lnRef idx="1">
+            <a:schemeClr val="accent1"/>
+          </a:lnRef>
+          <a:fillRef idx="3">
+            <a:schemeClr val="accent1"/>
+          </a:fillRef>
+          <a:effectRef idx="2">
+            <a:schemeClr val="accent1"/>
+          </a:effectRef>
+          <a:fontRef idx="minor">
+            <a:schemeClr val="lt1"/>
+          </a:fontRef>
+        </p:style>
+        <p:txBody>
+          <a:bodyPr rtlCol="0" anchor="ctr"/>
+          <a:lstStyle/>
+          <a:p>
+            <a:pPr algn="ctr"/>
+          </a:p>
+        </p:txBody>
+      </p:sp>
+      <p:sp>
+        <p:nvSpPr>
+          <p:cNvPr id="9" name="Rectangle 8"/>
+          <p:cNvSpPr/>
+          <p:nvPr/>
+        </p:nvSpPr>
+        <p:spPr>
+          <a:xfrm>
+            <a:off x="457200" y="2478024"/>
+            <a:ext cx="128016" cy="1051560"/>
+          </a:xfrm>
+          <a:prstGeom prst="rect">
+            <a:avLst/>
+          </a:prstGeom>
+          <a:solidFill>
+            <a:srgbClr val="FFD000"/>
+          </a:solidFill>
+          <a:ln>
+            <a:noFill/>
+          </a:ln>
+        </p:spPr>
+        <p:style>
+          <a:lnRef idx="1">
+            <a:schemeClr val="accent1"/>
+          </a:lnRef>
+          <a:fillRef idx="3">
+            <a:schemeClr val="accent1"/>
+          </a:fillRef>
+          <a:effectRef idx="2">
+            <a:schemeClr val="accent1"/>
+          </a:effectRef>
+          <a:fontRef idx="minor">
+            <a:schemeClr val="lt1"/>
+          </a:fontRef>
+        </p:style>
+        <p:txBody>
+          <a:bodyPr rtlCol="0" anchor="ctr"/>
+          <a:lstStyle/>
+          <a:p>
+            <a:pPr algn="ctr"/>
+          </a:p>
+        </p:txBody>
+      </p:sp>
+      <p:sp>
+        <p:nvSpPr>
+          <p:cNvPr id="10" name="TextBox 9"/>
+          <p:cNvSpPr txBox="1"/>
+          <p:nvPr/>
+        </p:nvSpPr>
+        <p:spPr>
+          <a:xfrm>
+            <a:off x="777240" y="2615184"/>
+            <a:ext cx="10774375" cy="822959"/>
+          </a:xfrm>
+          <a:prstGeom prst="rect">
+            <a:avLst/>
+          </a:prstGeom>
+          <a:noFill/>
+        </p:spPr>
+        <p:txBody>
+          <a:bodyPr wrap="square">
+            <a:spAutoFit/>
+          </a:bodyPr>
+          <a:lstStyle/>
+          <a:p>
+            <a:r>
+              <a:rPr sz="1200" b="1" i="0">
+                <a:solidFill>
+                  <a:srgbClr val="FFD000"/>
+                </a:solidFill>
+                <a:latin typeface="Calibri"/>
+              </a:rPr>
+              <a:t>Aclaración</a:t>
+            </a:r>
+          </a:p>
+          <a:p>
+            <a:pPr>
+              <a:spcBef>
+                <a:spcPts val="400"/>
+              </a:spcBef>
+            </a:pPr>
+            <a:r>
+              <a:rPr sz="1400" b="0" i="0">
+                <a:solidFill>
+                  <a:srgbClr val="333333"/>
+                </a:solidFill>
+                <a:latin typeface="Calibri"/>
+              </a:rPr>
+              <a:t>Enunciado completo: Clases/Proyecto Integrador/ (VetCare).</a:t>
+            </a:r>
+          </a:p>
+        </p:txBody>
+      </p:sp>
+      <p:sp>
+        <p:nvSpPr>
+          <p:cNvPr id="11" name="Rounded Rectangle 10"/>
+          <p:cNvSpPr/>
+          <p:nvPr/>
+        </p:nvSpPr>
+        <p:spPr>
+          <a:xfrm>
+            <a:off x="457200" y="3694176"/>
+            <a:ext cx="11277295" cy="1051560"/>
+          </a:xfrm>
+          <a:prstGeom prst="roundRect">
+            <a:avLst>
+              <a:gd name="adj" fmla="val 12000"/>
+            </a:avLst>
+          </a:prstGeom>
+          <a:solidFill>
+            <a:srgbClr val="FBE4E4"/>
+          </a:solidFill>
+          <a:ln>
+            <a:noFill/>
+          </a:ln>
+        </p:spPr>
+        <p:style>
+          <a:lnRef idx="1">
+            <a:schemeClr val="accent1"/>
+          </a:lnRef>
+          <a:fillRef idx="3">
+            <a:schemeClr val="accent1"/>
+          </a:fillRef>
+          <a:effectRef idx="2">
+            <a:schemeClr val="accent1"/>
+          </a:effectRef>
+          <a:fontRef idx="minor">
+            <a:schemeClr val="lt1"/>
+          </a:fontRef>
+        </p:style>
+        <p:txBody>
+          <a:bodyPr rtlCol="0" anchor="ctr"/>
+          <a:lstStyle/>
+          <a:p>
+            <a:pPr algn="ctr"/>
+          </a:p>
+        </p:txBody>
+      </p:sp>
+      <p:sp>
+        <p:nvSpPr>
+          <p:cNvPr id="12" name="Rectangle 11"/>
+          <p:cNvSpPr/>
+          <p:nvPr/>
+        </p:nvSpPr>
+        <p:spPr>
+          <a:xfrm>
+            <a:off x="457200" y="3694176"/>
+            <a:ext cx="128016" cy="1051560"/>
+          </a:xfrm>
+          <a:prstGeom prst="rect">
+            <a:avLst/>
+          </a:prstGeom>
+          <a:solidFill>
+            <a:srgbClr val="A02030"/>
+          </a:solidFill>
+          <a:ln>
+            <a:noFill/>
+          </a:ln>
+        </p:spPr>
+        <p:style>
+          <a:lnRef idx="1">
+            <a:schemeClr val="accent1"/>
+          </a:lnRef>
+          <a:fillRef idx="3">
+            <a:schemeClr val="accent1"/>
+          </a:fillRef>
+          <a:effectRef idx="2">
+            <a:schemeClr val="accent1"/>
+          </a:effectRef>
+          <a:fontRef idx="minor">
+            <a:schemeClr val="lt1"/>
+          </a:fontRef>
+        </p:style>
+        <p:txBody>
+          <a:bodyPr rtlCol="0" anchor="ctr"/>
+          <a:lstStyle/>
+          <a:p>
+            <a:pPr algn="ctr"/>
+          </a:p>
+        </p:txBody>
+      </p:sp>
+      <p:sp>
+        <p:nvSpPr>
+          <p:cNvPr id="13" name="TextBox 12"/>
+          <p:cNvSpPr txBox="1"/>
+          <p:nvPr/>
+        </p:nvSpPr>
+        <p:spPr>
+          <a:xfrm>
+            <a:off x="777240" y="3831336"/>
+            <a:ext cx="10774375" cy="822959"/>
+          </a:xfrm>
+          <a:prstGeom prst="rect">
+            <a:avLst/>
+          </a:prstGeom>
+          <a:noFill/>
+        </p:spPr>
+        <p:txBody>
+          <a:bodyPr wrap="square">
+            <a:spAutoFit/>
+          </a:bodyPr>
+          <a:lstStyle/>
+          <a:p>
+            <a:r>
+              <a:rPr sz="1200" b="1" i="0">
+                <a:solidFill>
+                  <a:srgbClr val="A02030"/>
+                </a:solidFill>
+                <a:latin typeface="Calibri"/>
+              </a:rPr>
+              <a:t>Atención</a:t>
+            </a:r>
+          </a:p>
+          <a:p>
+            <a:pPr>
+              <a:spcBef>
+                <a:spcPts val="400"/>
+              </a:spcBef>
+            </a:pPr>
+            <a:r>
+              <a:rPr sz="1400" b="0" i="0">
+                <a:solidFill>
+                  <a:srgbClr val="333333"/>
+                </a:solidFill>
+                <a:latin typeface="Calibri"/>
+              </a:rPr>
+              <a:t>Entrega del taller, si el docente lo asigna · en la fecha que indique el docente.</a:t>
+            </a:r>
+          </a:p>
+        </p:txBody>
+      </p:sp>
+      <p:sp>
+        <p:nvSpPr>
+          <p:cNvPr id="14" name="TextBox 13"/>
+          <p:cNvSpPr txBox="1"/>
+          <p:nvPr/>
+        </p:nvSpPr>
+        <p:spPr>
+          <a:xfrm>
+            <a:off x="11185855" y="6473952"/>
+            <a:ext cx="640080" cy="274320"/>
+          </a:xfrm>
+          <a:prstGeom prst="rect">
+            <a:avLst/>
+          </a:prstGeom>
+          <a:noFill/>
+        </p:spPr>
+        <p:txBody>
+          <a:bodyPr wrap="square">
+            <a:spAutoFit/>
+          </a:bodyPr>
+          <a:lstStyle/>
+          <a:p>
+            <a:pPr algn="r"/>
+            <a:r>
+              <a:rPr sz="1100" b="0" i="0">
+                <a:solidFill>
+                  <a:srgbClr val="666666"/>
+                </a:solidFill>
+                <a:latin typeface="Calibri"/>
+              </a:rPr>
+              <a:t>17</a:t>
+            </a:r>
+          </a:p>
+        </p:txBody>
+      </p:sp>
+    </p:spTree>
+  </p:cSld>
+  <p:clrMapOvr>
+    <a:masterClrMapping/>
+  </p:clrMapOvr>
+</p:sld>
+</file>
+
+<file path=ppt/slides/slide18.xml><?xml version="1.0" encoding="utf-8"?>
+<p:sld xmlns:a="http://schemas.openxmlformats.org/drawingml/2006/main" xmlns:p="http://schemas.openxmlformats.org/presentationml/2006/main" xmlns:r="http://schemas.openxmlformats.org/officeDocument/2006/relationships">
+  <p:cSld>
+    <p:bg>
+      <p:bgPr>
+        <a:solidFill>
+          <a:srgbClr val="FFFFFF"/>
+        </a:solidFill>
+        <a:effectLst/>
+      </p:bgPr>
+    </p:bg>
+    <p:spTree>
+      <p:nvGrpSpPr>
+        <p:cNvPr id="1" name=""/>
+        <p:cNvGrpSpPr/>
+        <p:nvPr/>
+      </p:nvGrpSpPr>
+      <p:grpSpPr/>
+      <p:sp>
+        <p:nvSpPr>
+          <p:cNvPr id="2" name="Rectangle 1"/>
+          <p:cNvSpPr/>
+          <p:nvPr/>
+        </p:nvSpPr>
+        <p:spPr>
+          <a:xfrm>
+            <a:off x="0" y="0"/>
             <a:ext cx="12191695" cy="164592"/>
           </a:xfrm>
           <a:prstGeom prst="rect">
@@ -7669,7 +9310,7 @@
                 </a:solidFill>
                 <a:latin typeface="Calibri"/>
               </a:rPr>
-              <a:t>Teoria Core</a:t>
+              <a:t>Un ciclo de vida del software es el orden en que se recorren las etapas...</a:t>
             </a:r>
           </a:p>
         </p:txBody>
@@ -7708,7 +9349,7 @@
                 </a:solidFill>
                 <a:latin typeface="Calibri"/>
               </a:rPr>
-              <a:t>–   Un ciclo de vida del software es el orden en que se recorren las etapas que van desde que alguien dice 'necesito…</a:t>
+              <a:t>–   Un ciclo de vida del software es el orden en que se recorren las etapas que van desde que alguien dice 'necesito un sistema' hasta que ese sistema se apaga definitivamente.</a:t>
             </a:r>
           </a:p>
           <a:p>
@@ -7724,7 +9365,7 @@
                 </a:solidFill>
                 <a:latin typeface="Calibri"/>
               </a:rPr>
-              <a:t>–   Vale la pena decir con precision que produce cada fase, porque ahi se cae la mitad de los equipos</a:t>
+              <a:t>–   Las etapas clasicas son cinco: requisitos, diseño, construccion, pruebas y mantenimiento.</a:t>
             </a:r>
           </a:p>
           <a:p>
@@ -7740,7 +9381,7 @@
                 </a:solidFill>
                 <a:latin typeface="Calibri"/>
               </a:rPr>
-              <a:t>–   La gran decision no es cuales fases hacer, sino cuantas veces recorrerlas y con cuanto sistema a la vez</a:t>
+              <a:t>–   Lo importante no es memorizar los nombres sino entender que cada fase tiene tres cosas: una entrada (lo que recibe de la fase anterior), una salida tangible llamada artefacto (un documento, un diagrama, un programa) y un criterio para decir 'esto ya quedo'.</a:t>
             </a:r>
           </a:p>
           <a:p>
@@ -7756,7 +9397,7 @@
                 </a:solidFill>
                 <a:latin typeface="Calibri"/>
               </a:rPr>
-              <a:t>–   Hay que separar dos palabras que los equipos usan como sinonimos y no lo son: proyecto y producto</a:t>
+              <a:t>–   Si una fase no produce un artefacto verificable, esa fase no existe, existe una conversacion.</a:t>
             </a:r>
           </a:p>
           <a:p>
@@ -7772,7 +9413,7 @@
                 </a:solidFill>
                 <a:latin typeface="Calibri"/>
               </a:rPr>
-              <a:t>–   Como se elige el recorrido? Con criterios, no con moda</a:t>
+              <a:t>–   En VetCare la fase de requisitos no termina cuando el equipo 'ya entendio' el problema de Huellitas: termina cuando existe una lista numerada de requisitos funcionales y no funcionales que la clinica leyo y aprobo.</a:t>
             </a:r>
           </a:p>
         </p:txBody>
@@ -7953,141 +9594,21 @@
                 </a:solidFill>
                 <a:latin typeface="Calibri"/>
               </a:rPr>
-              <a:t>El ciclo de vida de VetCare en Mermaid: mismas cajas, dos recorridos</a:t>
-            </a:r>
-          </a:p>
-        </p:txBody>
-      </p:sp>
-      <p:sp>
-        <p:nvSpPr>
-          <p:cNvPr id="5" name="Rounded Rectangle 4"/>
-          <p:cNvSpPr/>
-          <p:nvPr/>
-        </p:nvSpPr>
-        <p:spPr>
-          <a:xfrm>
-            <a:off x="457200" y="1261872"/>
-            <a:ext cx="11277295" cy="4773168"/>
-          </a:xfrm>
-          <a:prstGeom prst="roundRect">
-            <a:avLst>
-              <a:gd name="adj" fmla="val 12000"/>
-            </a:avLst>
-          </a:prstGeom>
-          <a:solidFill>
-            <a:srgbClr val="1E2A38"/>
-          </a:solidFill>
-          <a:ln>
-            <a:noFill/>
-          </a:ln>
-        </p:spPr>
-        <p:style>
-          <a:lnRef idx="1">
-            <a:schemeClr val="accent1"/>
-          </a:lnRef>
-          <a:fillRef idx="3">
-            <a:schemeClr val="accent1"/>
-          </a:fillRef>
-          <a:effectRef idx="2">
-            <a:schemeClr val="accent1"/>
-          </a:effectRef>
-          <a:fontRef idx="minor">
-            <a:schemeClr val="lt1"/>
-          </a:fontRef>
-        </p:style>
-        <p:txBody>
-          <a:bodyPr rtlCol="0" anchor="ctr"/>
-          <a:lstStyle/>
-          <a:p>
-            <a:pPr algn="ctr"/>
-          </a:p>
-        </p:txBody>
-      </p:sp>
-      <p:sp>
-        <p:nvSpPr>
-          <p:cNvPr id="6" name="Rectangle 5"/>
-          <p:cNvSpPr/>
-          <p:nvPr/>
-        </p:nvSpPr>
-        <p:spPr>
-          <a:xfrm>
-            <a:off x="457200" y="1261872"/>
-            <a:ext cx="11277295" cy="320040"/>
-          </a:xfrm>
-          <a:prstGeom prst="rect">
-            <a:avLst/>
-          </a:prstGeom>
-          <a:solidFill>
-            <a:srgbClr val="095292"/>
-          </a:solidFill>
-          <a:ln>
-            <a:noFill/>
-          </a:ln>
-        </p:spPr>
-        <p:style>
-          <a:lnRef idx="1">
-            <a:schemeClr val="accent1"/>
-          </a:lnRef>
-          <a:fillRef idx="3">
-            <a:schemeClr val="accent1"/>
-          </a:fillRef>
-          <a:effectRef idx="2">
-            <a:schemeClr val="accent1"/>
-          </a:effectRef>
-          <a:fontRef idx="minor">
-            <a:schemeClr val="lt1"/>
-          </a:fontRef>
-        </p:style>
-        <p:txBody>
-          <a:bodyPr rtlCol="0" anchor="ctr"/>
-          <a:lstStyle/>
-          <a:p>
-            <a:pPr algn="ctr"/>
-          </a:p>
-        </p:txBody>
-      </p:sp>
-      <p:sp>
-        <p:nvSpPr>
-          <p:cNvPr id="7" name="TextBox 6"/>
+              <a:t>Vale la pena decir con precision que produce cada fase, porque ahi se...</a:t>
+            </a:r>
+          </a:p>
+        </p:txBody>
+      </p:sp>
+      <p:sp>
+        <p:nvSpPr>
+          <p:cNvPr id="5" name="TextBox 4"/>
           <p:cNvSpPr txBox="1"/>
           <p:nvPr/>
         </p:nvSpPr>
         <p:spPr>
           <a:xfrm>
-            <a:off x="685800" y="1307592"/>
-            <a:ext cx="10820095" cy="256032"/>
-          </a:xfrm>
-          <a:prstGeom prst="rect">
-            <a:avLst/>
-          </a:prstGeom>
-          <a:noFill/>
-        </p:spPr>
-        <p:txBody>
-          <a:bodyPr wrap="square" anchor="ctr"/>
-          <a:lstStyle/>
-          <a:p>
-            <a:r>
-              <a:rPr sz="1000" b="1" i="0">
-                <a:solidFill>
-                  <a:srgbClr val="269CCB"/>
-                </a:solidFill>
-                <a:latin typeface="Calibri"/>
-              </a:rPr>
-              <a:t>● ● ●</a:t>
-            </a:r>
-          </a:p>
-        </p:txBody>
-      </p:sp>
-      <p:sp>
-        <p:nvSpPr>
-          <p:cNvPr id="8" name="TextBox 7"/>
-          <p:cNvSpPr txBox="1"/>
-          <p:nvPr/>
-        </p:nvSpPr>
-        <p:spPr>
-          <a:xfrm>
-            <a:off x="777240" y="1719072"/>
-            <a:ext cx="10637215" cy="4133087"/>
+            <a:off x="457200" y="1170432"/>
+            <a:ext cx="11277295" cy="5230368"/>
           </a:xfrm>
           <a:prstGeom prst="rect">
             <a:avLst/>
@@ -8102,235 +9623,120 @@
           <a:p>
             <a:pPr>
               <a:spcAft>
-                <a:spcPts val="400"/>
+                <a:spcPts val="800"/>
               </a:spcAft>
             </a:pPr>
             <a:r>
-              <a:rPr sz="1400" b="0" i="0">
-                <a:solidFill>
-                  <a:srgbClr val="FFFFFF"/>
-                </a:solidFill>
-                <a:latin typeface="Calibri"/>
-              </a:rPr>
-              <a:t>flowchart LR</a:t>
+              <a:rPr sz="2000" b="0" i="0">
+                <a:solidFill>
+                  <a:srgbClr val="333333"/>
+                </a:solidFill>
+                <a:latin typeface="Calibri"/>
+              </a:rPr>
+              <a:t>–   Requisitos responde la pregunta QUE debe hacer el sistema y produce la lista de RF y RNF, el glosario y las reglas de negocio.</a:t>
             </a:r>
           </a:p>
           <a:p>
             <a:pPr>
               <a:spcAft>
-                <a:spcPts val="400"/>
+                <a:spcPts val="800"/>
               </a:spcAft>
             </a:pPr>
             <a:r>
-              <a:rPr sz="1400" b="0" i="0">
-                <a:solidFill>
-                  <a:srgbClr val="FFFFFF"/>
-                </a:solidFill>
-                <a:latin typeface="Calibri"/>
-              </a:rPr>
-              <a:t>  A[Requisitos] --&gt;|RF-01 a RF-12 aprobados| B[Diseno]</a:t>
+              <a:rPr sz="2000" b="0" i="0">
+                <a:solidFill>
+                  <a:srgbClr val="333333"/>
+                </a:solidFill>
+                <a:latin typeface="Calibri"/>
+              </a:rPr>
+              <a:t>–   Diseño responde COMO se va a lograr y produce casos de uso, diagramas de clases, modelo de datos, wireframes y mockups.</a:t>
             </a:r>
           </a:p>
           <a:p>
             <a:pPr>
               <a:spcAft>
-                <a:spcPts val="400"/>
+                <a:spcPts val="800"/>
               </a:spcAft>
             </a:pPr>
             <a:r>
-              <a:rPr sz="1400" b="0" i="0">
-                <a:solidFill>
-                  <a:srgbClr val="FFFFFF"/>
-                </a:solidFill>
-                <a:latin typeface="Calibri"/>
-              </a:rPr>
-              <a:t>  B --&gt;|Casos de uso + clases + mockups| C[Construccion]</a:t>
+              <a:rPr sz="2000" b="0" i="0">
+                <a:solidFill>
+                  <a:srgbClr val="333333"/>
+                </a:solidFill>
+                <a:latin typeface="Calibri"/>
+              </a:rPr>
+              <a:t>–   Construccion es escribir el codigo y produce el ejecutable.</a:t>
             </a:r>
           </a:p>
           <a:p>
             <a:pPr>
               <a:spcAft>
-                <a:spcPts val="400"/>
+                <a:spcPts val="800"/>
               </a:spcAft>
             </a:pPr>
             <a:r>
-              <a:rPr sz="1400" b="0" i="0">
-                <a:solidFill>
-                  <a:srgbClr val="FFFFFF"/>
-                </a:solidFill>
-                <a:latin typeface="Calibri"/>
-              </a:rPr>
-              <a:t>  C --&gt;|Modulo ficha del paciente| D[Pruebas]</a:t>
+              <a:rPr sz="2000" b="0" i="0">
+                <a:solidFill>
+                  <a:srgbClr val="333333"/>
+                </a:solidFill>
+                <a:latin typeface="Calibri"/>
+              </a:rPr>
+              <a:t>–   Pruebas verifica que lo construido corresponde a lo pedido y produce casos de prueba y evidencias.</a:t>
             </a:r>
           </a:p>
           <a:p>
             <a:pPr>
               <a:spcAft>
-                <a:spcPts val="400"/>
+                <a:spcPts val="800"/>
               </a:spcAft>
             </a:pPr>
             <a:r>
-              <a:rPr sz="1400" b="0" i="0">
-                <a:solidFill>
-                  <a:srgbClr val="FFFFFF"/>
-                </a:solidFill>
-                <a:latin typeface="Calibri"/>
-              </a:rPr>
-              <a:t>  D --&gt;|Acta de aceptacion| E[Operacion y mantenimiento]</a:t>
+              <a:rPr sz="2000" b="0" i="0">
+                <a:solidFill>
+                  <a:srgbClr val="333333"/>
+                </a:solidFill>
+                <a:latin typeface="Calibri"/>
+              </a:rPr>
+              <a:t>–   Mantenimiento arregla, ajusta y evoluciona el sistema ya en uso.</a:t>
             </a:r>
           </a:p>
           <a:p>
             <a:pPr>
               <a:spcAft>
-                <a:spcPts val="400"/>
+                <a:spcPts val="800"/>
               </a:spcAft>
             </a:pPr>
             <a:r>
-              <a:rPr sz="1400" b="0" i="0">
-                <a:solidFill>
-                  <a:srgbClr val="FFFFFF"/>
-                </a:solidFill>
-                <a:latin typeface="Calibri"/>
-              </a:rPr>
-              <a:t>  E -.-&gt;|Solicitud: vacunacion a domicilio| A</a:t>
+              <a:rPr sz="2000" b="0" i="0">
+                <a:solidFill>
+                  <a:srgbClr val="333333"/>
+                </a:solidFill>
+                <a:latin typeface="Calibri"/>
+              </a:rPr>
+              <a:t>–   En nuestro Proyecto Integrador esto se reparte: Seminario de Sistemas vive en requisitos y diseño (los planos), y Programacion II vive en construccion y pruebas (la obra).</a:t>
             </a:r>
           </a:p>
           <a:p>
             <a:pPr>
               <a:spcAft>
-                <a:spcPts val="400"/>
+                <a:spcPts val="800"/>
               </a:spcAft>
             </a:pPr>
             <a:r>
-              <a:rPr sz="1400" b="0" i="0">
-                <a:solidFill>
-                  <a:srgbClr val="FFFFFF"/>
-                </a:solidFill>
-                <a:latin typeface="Calibri"/>
-              </a:rPr>
-              <a:t>%% Recorrido lineal  = UNA sola pasada por A..E</a:t>
-            </a:r>
-          </a:p>
-          <a:p>
-            <a:pPr>
-              <a:spcAft>
-                <a:spcPts val="400"/>
-              </a:spcAft>
-            </a:pPr>
-            <a:r>
-              <a:rPr sz="1400" b="0" i="0">
-                <a:solidFill>
-                  <a:srgbClr val="FFFFFF"/>
-                </a:solidFill>
-                <a:latin typeface="Calibri"/>
-              </a:rPr>
-              <a:t>%% Recorrido en ciclos = TRES pasadas por A..E</a:t>
-            </a:r>
-          </a:p>
-          <a:p>
-            <a:pPr>
-              <a:spcAft>
-                <a:spcPts val="400"/>
-              </a:spcAft>
-            </a:pPr>
-            <a:r>
-              <a:rPr sz="1400" b="0" i="0">
-                <a:solidFill>
-                  <a:srgbClr val="FFFFFF"/>
-                </a:solidFill>
-                <a:latin typeface="Calibri"/>
-              </a:rPr>
-              <a:t>%%   Vuelta 1: ficha del paciente</a:t>
-            </a:r>
-          </a:p>
-          <a:p>
-            <a:pPr>
-              <a:spcAft>
-                <a:spcPts val="400"/>
-              </a:spcAft>
-            </a:pPr>
-            <a:r>
-              <a:rPr sz="1400" b="0" i="0">
-                <a:solidFill>
-                  <a:srgbClr val="FFFFFF"/>
-                </a:solidFill>
-                <a:latin typeface="Calibri"/>
-              </a:rPr>
-              <a:t>%%   Vuelta 2: historia clinica y busqueda</a:t>
-            </a:r>
-          </a:p>
-          <a:p>
-            <a:pPr>
-              <a:spcAft>
-                <a:spcPts val="400"/>
-              </a:spcAft>
-            </a:pPr>
-            <a:r>
-              <a:rPr sz="1400" b="0" i="0">
-                <a:solidFill>
-                  <a:srgbClr val="FFFFFF"/>
-                </a:solidFill>
-                <a:latin typeface="Calibri"/>
-              </a:rPr>
-              <a:t>%%   Vuelta 3: reportes y metricas</a:t>
-            </a:r>
-          </a:p>
-          <a:p>
-            <a:pPr>
-              <a:spcAft>
-                <a:spcPts val="400"/>
-              </a:spcAft>
-            </a:pPr>
-            <a:r>
-              <a:rPr sz="1400" b="0" i="0">
-                <a:solidFill>
-                  <a:srgbClr val="FFFFFF"/>
-                </a:solidFill>
-                <a:latin typeface="Calibri"/>
-              </a:rPr>
-              <a:t>%% Las cajas nunca cambian; lo que cambia es cuantas veces se recorren</a:t>
-            </a:r>
-          </a:p>
-        </p:txBody>
-      </p:sp>
-      <p:sp>
-        <p:nvSpPr>
-          <p:cNvPr id="9" name="TextBox 8"/>
-          <p:cNvSpPr txBox="1"/>
-          <p:nvPr/>
-        </p:nvSpPr>
-        <p:spPr>
-          <a:xfrm>
-            <a:off x="457200" y="6080760"/>
-            <a:ext cx="11277295" cy="320040"/>
-          </a:xfrm>
-          <a:prstGeom prst="rect">
-            <a:avLst/>
-          </a:prstGeom>
-          <a:noFill/>
-        </p:spPr>
-        <p:txBody>
-          <a:bodyPr wrap="square">
-            <a:spAutoFit/>
-          </a:bodyPr>
-          <a:lstStyle/>
-          <a:p>
-            <a:pPr algn="ctr"/>
-            <a:r>
-              <a:rPr sz="1200" b="0" i="1">
-                <a:solidFill>
-                  <a:srgbClr val="666666"/>
-                </a:solidFill>
-                <a:latin typeface="Calibri"/>
-              </a:rPr>
-              <a:t>Las fases son las mismas en cualquier metodologia; lo unico que se negocia es cuantas vueltas se dan y cuanto sistema entra en cada vuelta.</a:t>
-            </a:r>
-          </a:p>
-        </p:txBody>
-      </p:sp>
-      <p:sp>
-        <p:nvSpPr>
-          <p:cNvPr id="10" name="TextBox 9"/>
+              <a:rPr sz="2000" b="0" i="0">
+                <a:solidFill>
+                  <a:srgbClr val="333333"/>
+                </a:solidFill>
+                <a:latin typeface="Calibri"/>
+              </a:rPr>
+              <a:t>–   Por eso aqui nunca se califica codigo: se califica que los planos esten completos, coherentes y sean construibles.</a:t>
+            </a:r>
+          </a:p>
+        </p:txBody>
+      </p:sp>
+      <p:sp>
+        <p:nvSpPr>
+          <p:cNvPr id="6" name="TextBox 5"/>
           <p:cNvSpPr txBox="1"/>
           <p:nvPr/>
         </p:nvSpPr>
@@ -8504,7 +9910,7 @@
                 </a:solidFill>
                 <a:latin typeface="Calibri"/>
               </a:rPr>
-              <a:t>Demo del dia</a:t>
+              <a:t>La gran decision no es cuales fases hacer, sino cuantas veces...</a:t>
             </a:r>
           </a:p>
         </p:txBody>
@@ -8543,25 +9949,7 @@
                 </a:solidFill>
                 <a:latin typeface="Calibri"/>
               </a:rPr>
-              <a:t>–   </a:t>
-            </a:r>
-            <a:r>
-              <a:rPr sz="2000" b="1" i="0">
-                <a:solidFill>
-                  <a:srgbClr val="333333"/>
-                </a:solidFill>
-                <a:latin typeface="Calibri"/>
-              </a:rPr>
-              <a:t>Herramienta:</a:t>
-            </a:r>
-            <a:r>
-              <a:rPr sz="2000" b="0" i="0">
-                <a:solidFill>
-                  <a:srgbClr val="333333"/>
-                </a:solidFill>
-                <a:latin typeface="Calibri"/>
-              </a:rPr>
-              <a:t> draw.io · Google Docs</a:t>
+              <a:t>–   La gran decision no es cuales fases hacer, sino cuantas veces recorrerlas y con cuanto sistema a la vez.</a:t>
             </a:r>
           </a:p>
           <a:p>
@@ -8577,25 +9965,7 @@
                 </a:solidFill>
                 <a:latin typeface="Calibri"/>
               </a:rPr>
-              <a:t>–   </a:t>
-            </a:r>
-            <a:r>
-              <a:rPr sz="2000" b="1" i="0">
-                <a:solidFill>
-                  <a:srgbClr val="333333"/>
-                </a:solidFill>
-                <a:latin typeface="Calibri"/>
-              </a:rPr>
-              <a:t>Demo:</a:t>
-            </a:r>
-            <a:r>
-              <a:rPr sz="2000" b="0" i="0">
-                <a:solidFill>
-                  <a:srgbClr val="333333"/>
-                </a:solidFill>
-                <a:latin typeface="Calibri"/>
-              </a:rPr>
-              <a:t> El docente arma en vivo en draw.io el ciclo de VetCare en dos versiones, una sola pasada y tres vueltas, y muestra que las cajas son identicas y lo unico que cambia es el recorrido.</a:t>
+              <a:t>–   Recorrerlas una sola vez y en orden significa cerrar requisitos de TODO VetCare, luego diseñar TODO VetCare, luego construir TODO.</a:t>
             </a:r>
           </a:p>
           <a:p>
@@ -8611,7 +9981,55 @@
                 </a:solidFill>
                 <a:latin typeface="Calibri"/>
               </a:rPr>
-              <a:t>–   Mismo dominio VetCare — no otro ejemplo. Aqui se diseña, no se programa.</a:t>
+              <a:t>–   Recorrerlas en ciclos significa tomar un pedazo util del sistema y pasarlo por las cinco fases en una vuelta corta, y despues repetir con el siguiente pedazo.</a:t>
+            </a:r>
+          </a:p>
+          <a:p>
+            <a:pPr>
+              <a:spcAft>
+                <a:spcPts val="800"/>
+              </a:spcAft>
+            </a:pPr>
+            <a:r>
+              <a:rPr sz="2000" b="0" i="0">
+                <a:solidFill>
+                  <a:srgbClr val="333333"/>
+                </a:solidFill>
+                <a:latin typeface="Calibri"/>
+              </a:rPr>
+              <a:t>–   En VetCare la vuelta 1 podria ser solo la ficha del paciente (requisitos de la ficha, diseño de la ficha, mockup de la ficha, revision con la clinica); la vuelta 2, la historia clinica y la busqueda; la vuelta 3, los reportes y metricas.</a:t>
+            </a:r>
+          </a:p>
+          <a:p>
+            <a:pPr>
+              <a:spcAft>
+                <a:spcPts val="800"/>
+              </a:spcAft>
+            </a:pPr>
+            <a:r>
+              <a:rPr sz="2000" b="0" i="0">
+                <a:solidFill>
+                  <a:srgbClr val="333333"/>
+                </a:solidFill>
+                <a:latin typeface="Calibri"/>
+              </a:rPr>
+              <a:t>–   La diferencia practica es brutal: en el recorrido unico la clinica ve algo hasta el final y un malentendido de la semana 2 se descubre en la semana 15</a:t>
+            </a:r>
+          </a:p>
+          <a:p>
+            <a:pPr>
+              <a:spcAft>
+                <a:spcPts val="800"/>
+              </a:spcAft>
+            </a:pPr>
+            <a:r>
+              <a:rPr sz="2000" b="0" i="0">
+                <a:solidFill>
+                  <a:srgbClr val="333333"/>
+                </a:solidFill>
+                <a:latin typeface="Calibri"/>
+              </a:rPr>
+              <a:t>–   En el recorrido en ciclos la clinica opina cada dos o tres semanas y el error se corrige cuando todavia es barato corregirlo.</a:t>
             </a:r>
           </a:p>
         </p:txBody>
@@ -8686,7 +10104,7 @@
         <p:spPr>
           <a:xfrm>
             <a:off x="0" y="0"/>
-            <a:ext cx="12191695" cy="1170432"/>
+            <a:ext cx="12191695" cy="960120"/>
           </a:xfrm>
           <a:prstGeom prst="rect">
             <a:avLst/>
@@ -8728,7 +10146,7 @@
         </p:nvSpPr>
         <p:spPr>
           <a:xfrm>
-            <a:off x="0" y="1170432"/>
+            <a:off x="0" y="960120"/>
             <a:ext cx="12191695" cy="41148"/>
           </a:xfrm>
           <a:prstGeom prst="rect">
@@ -8772,7 +10190,7 @@
         <p:spPr>
           <a:xfrm>
             <a:off x="457200" y="164592"/>
-            <a:ext cx="11277295" cy="384048"/>
+            <a:ext cx="11277295" cy="502920"/>
           </a:xfrm>
           <a:prstGeom prst="rect">
             <a:avLst/>
@@ -8792,7 +10210,7 @@
                 </a:solidFill>
                 <a:latin typeface="Calibri"/>
               </a:rPr>
-              <a:t>Herramientas de hoy</a:t>
+              <a:t>Hay que separar dos palabras que los equipos usan como sinonimos y no...</a:t>
             </a:r>
           </a:p>
         </p:txBody>
@@ -8805,8 +10223,8 @@
         </p:nvSpPr>
         <p:spPr>
           <a:xfrm>
-            <a:off x="457200" y="566928"/>
-            <a:ext cx="11277295" cy="411480"/>
+            <a:off x="457200" y="1170432"/>
+            <a:ext cx="11277295" cy="5230368"/>
           </a:xfrm>
           <a:prstGeom prst="rect">
             <a:avLst/>
@@ -8819,633 +10237,122 @@
           </a:bodyPr>
           <a:lstStyle/>
           <a:p>
-            <a:r>
-              <a:rPr sz="1400" b="0" i="0">
-                <a:solidFill>
-                  <a:srgbClr val="B8D8EE"/>
-                </a:solidFill>
-                <a:latin typeface="Calibri"/>
-              </a:rPr>
-              <a:t>Gratis · funcionan en el navegador</a:t>
-            </a:r>
-          </a:p>
-        </p:txBody>
-      </p:sp>
-      <p:sp>
-        <p:nvSpPr>
-          <p:cNvPr id="6" name="Rounded Rectangle 5"/>
-          <p:cNvSpPr/>
-          <p:nvPr/>
-        </p:nvSpPr>
-        <p:spPr>
-          <a:xfrm>
-            <a:off x="457200" y="1591056"/>
-            <a:ext cx="3624986" cy="2331720"/>
-          </a:xfrm>
-          <a:prstGeom prst="roundRect">
-            <a:avLst>
-              <a:gd name="adj" fmla="val 12000"/>
-            </a:avLst>
-          </a:prstGeom>
-          <a:solidFill>
-            <a:srgbClr val="F2F2F2"/>
-          </a:solidFill>
-          <a:ln>
-            <a:noFill/>
-          </a:ln>
-        </p:spPr>
-        <p:style>
-          <a:lnRef idx="1">
-            <a:schemeClr val="accent1"/>
-          </a:lnRef>
-          <a:fillRef idx="3">
-            <a:schemeClr val="accent1"/>
-          </a:fillRef>
-          <a:effectRef idx="2">
-            <a:schemeClr val="accent1"/>
-          </a:effectRef>
-          <a:fontRef idx="minor">
-            <a:schemeClr val="lt1"/>
-          </a:fontRef>
-        </p:style>
-        <p:txBody>
-          <a:bodyPr rtlCol="0" anchor="ctr"/>
-          <a:lstStyle/>
-          <a:p>
-            <a:pPr algn="ctr"/>
-          </a:p>
-        </p:txBody>
-      </p:sp>
-      <p:sp>
-        <p:nvSpPr>
-          <p:cNvPr id="7" name="Rectangle 6"/>
-          <p:cNvSpPr/>
-          <p:nvPr/>
-        </p:nvSpPr>
-        <p:spPr>
-          <a:xfrm>
-            <a:off x="457200" y="1591056"/>
-            <a:ext cx="3624986" cy="64008"/>
-          </a:xfrm>
-          <a:prstGeom prst="rect">
-            <a:avLst/>
-          </a:prstGeom>
-          <a:solidFill>
-            <a:srgbClr val="095292"/>
-          </a:solidFill>
-          <a:ln>
-            <a:noFill/>
-          </a:ln>
-        </p:spPr>
-        <p:style>
-          <a:lnRef idx="1">
-            <a:schemeClr val="accent1"/>
-          </a:lnRef>
-          <a:fillRef idx="3">
-            <a:schemeClr val="accent1"/>
-          </a:fillRef>
-          <a:effectRef idx="2">
-            <a:schemeClr val="accent1"/>
-          </a:effectRef>
-          <a:fontRef idx="minor">
-            <a:schemeClr val="lt1"/>
-          </a:fontRef>
-        </p:style>
-        <p:txBody>
-          <a:bodyPr rtlCol="0" anchor="ctr"/>
-          <a:lstStyle/>
-          <a:p>
-            <a:pPr algn="ctr"/>
-          </a:p>
-        </p:txBody>
-      </p:sp>
-      <p:sp>
-        <p:nvSpPr>
-          <p:cNvPr id="8" name="Rectangle 7"/>
-          <p:cNvSpPr/>
-          <p:nvPr/>
-        </p:nvSpPr>
-        <p:spPr>
-          <a:xfrm>
-            <a:off x="457200" y="1655064"/>
-            <a:ext cx="3624986" cy="27432"/>
-          </a:xfrm>
-          <a:prstGeom prst="rect">
-            <a:avLst/>
-          </a:prstGeom>
-          <a:solidFill>
-            <a:srgbClr val="FFD000"/>
-          </a:solidFill>
-          <a:ln>
-            <a:noFill/>
-          </a:ln>
-        </p:spPr>
-        <p:style>
-          <a:lnRef idx="1">
-            <a:schemeClr val="accent1"/>
-          </a:lnRef>
-          <a:fillRef idx="3">
-            <a:schemeClr val="accent1"/>
-          </a:fillRef>
-          <a:effectRef idx="2">
-            <a:schemeClr val="accent1"/>
-          </a:effectRef>
-          <a:fontRef idx="minor">
-            <a:schemeClr val="lt1"/>
-          </a:fontRef>
-        </p:style>
-        <p:txBody>
-          <a:bodyPr rtlCol="0" anchor="ctr"/>
-          <a:lstStyle/>
-          <a:p>
-            <a:pPr algn="ctr"/>
-          </a:p>
-        </p:txBody>
-      </p:sp>
-      <p:pic>
-        <p:nvPicPr>
-          <p:cNvPr id="9" name="Picture 8" descr="drawio.png"/>
-          <p:cNvPicPr>
-            <a:picLocks noChangeAspect="1"/>
-          </p:cNvPicPr>
-          <p:nvPr/>
-        </p:nvPicPr>
-        <p:blipFill>
-          <a:blip r:embed="rId2"/>
-          <a:stretch>
-            <a:fillRect/>
-          </a:stretch>
-        </p:blipFill>
-        <p:spPr>
-          <a:xfrm>
-            <a:off x="1643329" y="1847087"/>
-            <a:ext cx="1252728" cy="1252728"/>
-          </a:xfrm>
-          <a:prstGeom prst="rect">
-            <a:avLst/>
-          </a:prstGeom>
-        </p:spPr>
-      </p:pic>
-      <p:sp>
-        <p:nvSpPr>
-          <p:cNvPr id="10" name="TextBox 9"/>
-          <p:cNvSpPr txBox="1"/>
-          <p:nvPr/>
-        </p:nvSpPr>
-        <p:spPr>
-          <a:xfrm>
-            <a:off x="530352" y="3191256"/>
-            <a:ext cx="3478682" cy="621792"/>
-          </a:xfrm>
-          <a:prstGeom prst="rect">
-            <a:avLst/>
-          </a:prstGeom>
-          <a:noFill/>
-        </p:spPr>
-        <p:txBody>
-          <a:bodyPr wrap="square" anchor="t"/>
-          <a:lstStyle/>
-          <a:p>
-            <a:pPr algn="ctr"/>
-            <a:r>
-              <a:rPr sz="1300" b="1" i="0">
-                <a:solidFill>
-                  <a:srgbClr val="095292"/>
-                </a:solidFill>
-                <a:latin typeface="Calibri"/>
-              </a:rPr>
-              <a:t>Draw.Io</a:t>
-            </a:r>
-          </a:p>
-          <a:p>
-            <a:pPr algn="ctr">
-              <a:spcBef>
-                <a:spcPts val="200"/>
-              </a:spcBef>
+            <a:pPr>
+              <a:spcAft>
+                <a:spcPts val="800"/>
+              </a:spcAft>
             </a:pPr>
             <a:r>
-              <a:rPr sz="1000" b="0" i="0">
-                <a:solidFill>
-                  <a:srgbClr val="666666"/>
-                </a:solidFill>
-                <a:latin typeface="Calibri"/>
-              </a:rPr>
-              <a:t>Diagramas UML y de contexto</a:t>
-            </a:r>
-          </a:p>
-        </p:txBody>
-      </p:sp>
-      <p:sp>
-        <p:nvSpPr>
-          <p:cNvPr id="11" name="Rounded Rectangle 10"/>
-          <p:cNvSpPr/>
-          <p:nvPr/>
-        </p:nvSpPr>
-        <p:spPr>
-          <a:xfrm>
-            <a:off x="4283354" y="1591056"/>
-            <a:ext cx="3624986" cy="2331720"/>
-          </a:xfrm>
-          <a:prstGeom prst="roundRect">
-            <a:avLst>
-              <a:gd name="adj" fmla="val 12000"/>
-            </a:avLst>
-          </a:prstGeom>
-          <a:solidFill>
-            <a:srgbClr val="F2F2F2"/>
-          </a:solidFill>
-          <a:ln>
-            <a:noFill/>
-          </a:ln>
-        </p:spPr>
-        <p:style>
-          <a:lnRef idx="1">
-            <a:schemeClr val="accent1"/>
-          </a:lnRef>
-          <a:fillRef idx="3">
-            <a:schemeClr val="accent1"/>
-          </a:fillRef>
-          <a:effectRef idx="2">
-            <a:schemeClr val="accent1"/>
-          </a:effectRef>
-          <a:fontRef idx="minor">
-            <a:schemeClr val="lt1"/>
-          </a:fontRef>
-        </p:style>
-        <p:txBody>
-          <a:bodyPr rtlCol="0" anchor="ctr"/>
-          <a:lstStyle/>
-          <a:p>
-            <a:pPr algn="ctr"/>
-          </a:p>
-        </p:txBody>
-      </p:sp>
-      <p:sp>
-        <p:nvSpPr>
-          <p:cNvPr id="12" name="Rectangle 11"/>
-          <p:cNvSpPr/>
-          <p:nvPr/>
-        </p:nvSpPr>
-        <p:spPr>
-          <a:xfrm>
-            <a:off x="4283354" y="1591056"/>
-            <a:ext cx="3624986" cy="64008"/>
-          </a:xfrm>
-          <a:prstGeom prst="rect">
-            <a:avLst/>
-          </a:prstGeom>
-          <a:solidFill>
-            <a:srgbClr val="095292"/>
-          </a:solidFill>
-          <a:ln>
-            <a:noFill/>
-          </a:ln>
-        </p:spPr>
-        <p:style>
-          <a:lnRef idx="1">
-            <a:schemeClr val="accent1"/>
-          </a:lnRef>
-          <a:fillRef idx="3">
-            <a:schemeClr val="accent1"/>
-          </a:fillRef>
-          <a:effectRef idx="2">
-            <a:schemeClr val="accent1"/>
-          </a:effectRef>
-          <a:fontRef idx="minor">
-            <a:schemeClr val="lt1"/>
-          </a:fontRef>
-        </p:style>
-        <p:txBody>
-          <a:bodyPr rtlCol="0" anchor="ctr"/>
-          <a:lstStyle/>
-          <a:p>
-            <a:pPr algn="ctr"/>
-          </a:p>
-        </p:txBody>
-      </p:sp>
-      <p:sp>
-        <p:nvSpPr>
-          <p:cNvPr id="13" name="Rectangle 12"/>
-          <p:cNvSpPr/>
-          <p:nvPr/>
-        </p:nvSpPr>
-        <p:spPr>
-          <a:xfrm>
-            <a:off x="4283354" y="1655064"/>
-            <a:ext cx="3624986" cy="27432"/>
-          </a:xfrm>
-          <a:prstGeom prst="rect">
-            <a:avLst/>
-          </a:prstGeom>
-          <a:solidFill>
-            <a:srgbClr val="FFD000"/>
-          </a:solidFill>
-          <a:ln>
-            <a:noFill/>
-          </a:ln>
-        </p:spPr>
-        <p:style>
-          <a:lnRef idx="1">
-            <a:schemeClr val="accent1"/>
-          </a:lnRef>
-          <a:fillRef idx="3">
-            <a:schemeClr val="accent1"/>
-          </a:fillRef>
-          <a:effectRef idx="2">
-            <a:schemeClr val="accent1"/>
-          </a:effectRef>
-          <a:fontRef idx="minor">
-            <a:schemeClr val="lt1"/>
-          </a:fontRef>
-        </p:style>
-        <p:txBody>
-          <a:bodyPr rtlCol="0" anchor="ctr"/>
-          <a:lstStyle/>
-          <a:p>
-            <a:pPr algn="ctr"/>
-          </a:p>
-        </p:txBody>
-      </p:sp>
-      <p:pic>
-        <p:nvPicPr>
-          <p:cNvPr id="14" name="Picture 13" descr="google_docs.png"/>
-          <p:cNvPicPr>
-            <a:picLocks noChangeAspect="1"/>
-          </p:cNvPicPr>
-          <p:nvPr/>
-        </p:nvPicPr>
-        <p:blipFill>
-          <a:blip r:embed="rId3"/>
-          <a:stretch>
-            <a:fillRect/>
-          </a:stretch>
-        </p:blipFill>
-        <p:spPr>
-          <a:xfrm>
-            <a:off x="5469483" y="1847087"/>
-            <a:ext cx="1252728" cy="1252728"/>
-          </a:xfrm>
-          <a:prstGeom prst="rect">
-            <a:avLst/>
-          </a:prstGeom>
-        </p:spPr>
-      </p:pic>
-      <p:sp>
-        <p:nvSpPr>
-          <p:cNvPr id="15" name="TextBox 14"/>
-          <p:cNvSpPr txBox="1"/>
-          <p:nvPr/>
-        </p:nvSpPr>
-        <p:spPr>
-          <a:xfrm>
-            <a:off x="4356506" y="3191256"/>
-            <a:ext cx="3478682" cy="621792"/>
-          </a:xfrm>
-          <a:prstGeom prst="rect">
-            <a:avLst/>
-          </a:prstGeom>
-          <a:noFill/>
-        </p:spPr>
-        <p:txBody>
-          <a:bodyPr wrap="square" anchor="t"/>
-          <a:lstStyle/>
-          <a:p>
-            <a:pPr algn="ctr"/>
-            <a:r>
-              <a:rPr sz="1300" b="1" i="0">
-                <a:solidFill>
-                  <a:srgbClr val="095292"/>
-                </a:solidFill>
-                <a:latin typeface="Calibri"/>
-              </a:rPr>
-              <a:t>google docs</a:t>
-            </a:r>
-          </a:p>
-          <a:p>
-            <a:pPr algn="ctr">
-              <a:spcBef>
-                <a:spcPts val="200"/>
-              </a:spcBef>
+              <a:rPr sz="2000" b="0" i="0">
+                <a:solidFill>
+                  <a:srgbClr val="333333"/>
+                </a:solidFill>
+                <a:latin typeface="Calibri"/>
+              </a:rPr>
+              <a:t>–   Hay que separar dos palabras que los equipos usan como sinonimos y no lo son: proyecto y producto.</a:t>
+            </a:r>
+          </a:p>
+          <a:p>
+            <a:pPr>
+              <a:spcAft>
+                <a:spcPts val="800"/>
+              </a:spcAft>
             </a:pPr>
             <a:r>
-              <a:rPr sz="1000" b="0" i="0">
-                <a:solidFill>
-                  <a:srgbClr val="666666"/>
-                </a:solidFill>
-                <a:latin typeface="Calibri"/>
-              </a:rPr>
-              <a:t>Documentos del paquete de diseño</a:t>
-            </a:r>
-          </a:p>
-        </p:txBody>
-      </p:sp>
-      <p:sp>
-        <p:nvSpPr>
-          <p:cNvPr id="16" name="Rounded Rectangle 15"/>
-          <p:cNvSpPr/>
-          <p:nvPr/>
-        </p:nvSpPr>
-        <p:spPr>
-          <a:xfrm>
-            <a:off x="8109508" y="1591056"/>
-            <a:ext cx="3624986" cy="2331720"/>
-          </a:xfrm>
-          <a:prstGeom prst="roundRect">
-            <a:avLst>
-              <a:gd name="adj" fmla="val 12000"/>
-            </a:avLst>
-          </a:prstGeom>
-          <a:solidFill>
-            <a:srgbClr val="F2F2F2"/>
-          </a:solidFill>
-          <a:ln>
-            <a:noFill/>
-          </a:ln>
-        </p:spPr>
-        <p:style>
-          <a:lnRef idx="1">
-            <a:schemeClr val="accent1"/>
-          </a:lnRef>
-          <a:fillRef idx="3">
-            <a:schemeClr val="accent1"/>
-          </a:fillRef>
-          <a:effectRef idx="2">
-            <a:schemeClr val="accent1"/>
-          </a:effectRef>
-          <a:fontRef idx="minor">
-            <a:schemeClr val="lt1"/>
-          </a:fontRef>
-        </p:style>
-        <p:txBody>
-          <a:bodyPr rtlCol="0" anchor="ctr"/>
-          <a:lstStyle/>
-          <a:p>
-            <a:pPr algn="ctr"/>
-          </a:p>
-        </p:txBody>
-      </p:sp>
-      <p:sp>
-        <p:nvSpPr>
-          <p:cNvPr id="17" name="Rectangle 16"/>
-          <p:cNvSpPr/>
-          <p:nvPr/>
-        </p:nvSpPr>
-        <p:spPr>
-          <a:xfrm>
-            <a:off x="8109508" y="1591056"/>
-            <a:ext cx="3624986" cy="64008"/>
-          </a:xfrm>
-          <a:prstGeom prst="rect">
-            <a:avLst/>
-          </a:prstGeom>
-          <a:solidFill>
-            <a:srgbClr val="095292"/>
-          </a:solidFill>
-          <a:ln>
-            <a:noFill/>
-          </a:ln>
-        </p:spPr>
-        <p:style>
-          <a:lnRef idx="1">
-            <a:schemeClr val="accent1"/>
-          </a:lnRef>
-          <a:fillRef idx="3">
-            <a:schemeClr val="accent1"/>
-          </a:fillRef>
-          <a:effectRef idx="2">
-            <a:schemeClr val="accent1"/>
-          </a:effectRef>
-          <a:fontRef idx="minor">
-            <a:schemeClr val="lt1"/>
-          </a:fontRef>
-        </p:style>
-        <p:txBody>
-          <a:bodyPr rtlCol="0" anchor="ctr"/>
-          <a:lstStyle/>
-          <a:p>
-            <a:pPr algn="ctr"/>
-          </a:p>
-        </p:txBody>
-      </p:sp>
-      <p:sp>
-        <p:nvSpPr>
-          <p:cNvPr id="18" name="Rectangle 17"/>
-          <p:cNvSpPr/>
-          <p:nvPr/>
-        </p:nvSpPr>
-        <p:spPr>
-          <a:xfrm>
-            <a:off x="8109508" y="1655064"/>
-            <a:ext cx="3624986" cy="27432"/>
-          </a:xfrm>
-          <a:prstGeom prst="rect">
-            <a:avLst/>
-          </a:prstGeom>
-          <a:solidFill>
-            <a:srgbClr val="FFD000"/>
-          </a:solidFill>
-          <a:ln>
-            <a:noFill/>
-          </a:ln>
-        </p:spPr>
-        <p:style>
-          <a:lnRef idx="1">
-            <a:schemeClr val="accent1"/>
-          </a:lnRef>
-          <a:fillRef idx="3">
-            <a:schemeClr val="accent1"/>
-          </a:fillRef>
-          <a:effectRef idx="2">
-            <a:schemeClr val="accent1"/>
-          </a:effectRef>
-          <a:fontRef idx="minor">
-            <a:schemeClr val="lt1"/>
-          </a:fontRef>
-        </p:style>
-        <p:txBody>
-          <a:bodyPr rtlCol="0" anchor="ctr"/>
-          <a:lstStyle/>
-          <a:p>
-            <a:pPr algn="ctr"/>
-          </a:p>
-        </p:txBody>
-      </p:sp>
-      <p:pic>
-        <p:nvPicPr>
-          <p:cNvPr id="19" name="Picture 18" descr="examlab.png"/>
-          <p:cNvPicPr>
-            <a:picLocks noChangeAspect="1"/>
-          </p:cNvPicPr>
-          <p:nvPr/>
-        </p:nvPicPr>
-        <p:blipFill>
-          <a:blip r:embed="rId4"/>
-          <a:stretch>
-            <a:fillRect/>
-          </a:stretch>
-        </p:blipFill>
-        <p:spPr>
-          <a:xfrm>
-            <a:off x="9295638" y="1847087"/>
-            <a:ext cx="1252728" cy="1252728"/>
-          </a:xfrm>
-          <a:prstGeom prst="rect">
-            <a:avLst/>
-          </a:prstGeom>
-        </p:spPr>
-      </p:pic>
-      <p:sp>
-        <p:nvSpPr>
-          <p:cNvPr id="20" name="TextBox 19"/>
-          <p:cNvSpPr txBox="1"/>
-          <p:nvPr/>
-        </p:nvSpPr>
-        <p:spPr>
-          <a:xfrm>
-            <a:off x="8182660" y="3191256"/>
-            <a:ext cx="3478682" cy="621792"/>
-          </a:xfrm>
-          <a:prstGeom prst="rect">
-            <a:avLst/>
-          </a:prstGeom>
-          <a:noFill/>
-        </p:spPr>
-        <p:txBody>
-          <a:bodyPr wrap="square" anchor="t"/>
-          <a:lstStyle/>
-          <a:p>
-            <a:pPr algn="ctr"/>
-            <a:r>
-              <a:rPr sz="1300" b="1" i="0">
-                <a:solidFill>
-                  <a:srgbClr val="095292"/>
-                </a:solidFill>
-                <a:latin typeface="Calibri"/>
-              </a:rPr>
-              <a:t>la plataforma del curso</a:t>
-            </a:r>
-          </a:p>
-          <a:p>
-            <a:pPr algn="ctr">
-              <a:spcBef>
-                <a:spcPts val="200"/>
-              </a:spcBef>
+              <a:rPr sz="2000" b="0" i="0">
+                <a:solidFill>
+                  <a:srgbClr val="333333"/>
+                </a:solidFill>
+                <a:latin typeface="Calibri"/>
+              </a:rPr>
+              <a:t>–   Un proyecto es un esfuerzo temporal, con inicio, fin, alcance, presupuesto y responsables; se acaba y se cierra.</a:t>
+            </a:r>
+          </a:p>
+          <a:p>
+            <a:pPr>
+              <a:spcAft>
+                <a:spcPts val="800"/>
+              </a:spcAft>
             </a:pPr>
             <a:r>
-              <a:rPr sz="1000" b="0" i="0">
-                <a:solidFill>
-                  <a:srgbClr val="666666"/>
-                </a:solidFill>
-                <a:latin typeface="Calibri"/>
-              </a:rPr>
-              <a:t>Entrega del taller · en la fecha que indique el docente</a:t>
-            </a:r>
-          </a:p>
-        </p:txBody>
-      </p:sp>
-      <p:sp>
-        <p:nvSpPr>
-          <p:cNvPr id="21" name="TextBox 20"/>
+              <a:rPr sz="2000" b="0" i="0">
+                <a:solidFill>
+                  <a:srgbClr val="333333"/>
+                </a:solidFill>
+                <a:latin typeface="Calibri"/>
+              </a:rPr>
+              <a:t>–   Un producto es el sistema vivo, que la gente usa, que tiene versiones y que sigue existiendo cuando el proyecto ya se cerro.</a:t>
+            </a:r>
+          </a:p>
+          <a:p>
+            <a:pPr>
+              <a:spcAft>
+                <a:spcPts val="800"/>
+              </a:spcAft>
+            </a:pPr>
+            <a:r>
+              <a:rPr sz="2000" b="0" i="0">
+                <a:solidFill>
+                  <a:srgbClr val="333333"/>
+                </a:solidFill>
+                <a:latin typeface="Calibri"/>
+              </a:rPr>
+              <a:t>–   En VetCare el proyecto es 'entregar los planos y el prototipo de VetCare en este semestre'</a:t>
+            </a:r>
+          </a:p>
+          <a:p>
+            <a:pPr>
+              <a:spcAft>
+                <a:spcPts val="800"/>
+              </a:spcAft>
+            </a:pPr>
+            <a:r>
+              <a:rPr sz="2000" b="0" i="0">
+                <a:solidFill>
+                  <a:srgbClr val="333333"/>
+                </a:solidFill>
+                <a:latin typeface="Calibri"/>
+              </a:rPr>
+              <a:t>–   El producto es el sistema que Huellitas usaria durante los proximos años, con su version 1.0, su 1.1 cuando pidan vacunacion a domicilio y su 2.0 cuando quieran facturacion electronica.</a:t>
+            </a:r>
+          </a:p>
+          <a:p>
+            <a:pPr>
+              <a:spcAft>
+                <a:spcPts val="800"/>
+              </a:spcAft>
+            </a:pPr>
+            <a:r>
+              <a:rPr sz="2000" b="0" i="0">
+                <a:solidFill>
+                  <a:srgbClr val="333333"/>
+                </a:solidFill>
+                <a:latin typeface="Calibri"/>
+              </a:rPr>
+              <a:t>–   Esta distincion tiene una consecuencia dura: la fase mas larga y mas costosa de la vida de un sistema no es construirlo, es mantenerlo</a:t>
+            </a:r>
+          </a:p>
+          <a:p>
+            <a:pPr>
+              <a:spcAft>
+                <a:spcPts val="800"/>
+              </a:spcAft>
+            </a:pPr>
+            <a:r>
+              <a:rPr sz="2000" b="0" i="0">
+                <a:solidFill>
+                  <a:srgbClr val="333333"/>
+                </a:solidFill>
+                <a:latin typeface="Calibri"/>
+              </a:rPr>
+              <a:t>–   Y por eso el diseño y la documentacion que hacemos aqui no son un tramite, son lo que permite que otro entienda el sistema dentro de dos años.</a:t>
+            </a:r>
+          </a:p>
+        </p:txBody>
+      </p:sp>
+      <p:sp>
+        <p:nvSpPr>
+          <p:cNvPr id="6" name="TextBox 5"/>
           <p:cNvSpPr txBox="1"/>
           <p:nvPr/>
         </p:nvSpPr>
@@ -9619,7 +10526,7 @@
                 </a:solidFill>
                 <a:latin typeface="Calibri"/>
               </a:rPr>
-              <a:t>Taller PI — por que importa</a:t>
+              <a:t>Como se elige el recorrido?</a:t>
             </a:r>
           </a:p>
         </p:txBody>
@@ -9658,25 +10565,7 @@
                 </a:solidFill>
                 <a:latin typeface="Calibri"/>
               </a:rPr>
-              <a:t>–   </a:t>
-            </a:r>
-            <a:r>
-              <a:rPr sz="2000" b="1" i="0">
-                <a:solidFill>
-                  <a:srgbClr val="333333"/>
-                </a:solidFill>
-                <a:latin typeface="Calibri"/>
-              </a:rPr>
-              <a:t>Por que importa al PI:</a:t>
-            </a:r>
-            <a:r>
-              <a:rPr sz="2000" b="0" i="0">
-                <a:solidFill>
-                  <a:srgbClr val="333333"/>
-                </a:solidFill>
-                <a:latin typeface="Calibri"/>
-              </a:rPr>
-              <a:t> VetCare no se dibuja de una sola sentada, y hoy definimos el mapa de fases que vamos a recorrer todo el semestre y en cual de ellas se califica cada entrega.</a:t>
+              <a:t>–   Como se elige el recorrido?</a:t>
             </a:r>
           </a:p>
           <a:p>
@@ -9692,7 +10581,7 @@
                 </a:solidFill>
                 <a:latin typeface="Calibri"/>
               </a:rPr>
-              <a:t>–   En la clase anterior quedo claro el dolor de Huellitas (fichas que se extravian, busquedas eternas y cero metricas); hoy ese dolor se ubica dentro de un ciclo de vida y se le pone nombre a lo que sale de cada etapa.</a:t>
+              <a:t>–   Con criterios, no con moda.</a:t>
             </a:r>
           </a:p>
           <a:p>
@@ -9708,7 +10597,71 @@
                 </a:solidFill>
                 <a:latin typeface="Calibri"/>
               </a:rPr>
-              <a:t>–   Los tres casos de matricula se entienden mejor con el ciclo en la mano: aqui vivimos en requisitos y diseño, Programacion II vive en construccion y pruebas, y quien solo cursa Seminario cierra con documento de diseño y prototipo navegable.</a:t>
+              <a:t>–   Si los requisitos son estables, el contrato es cerrado y el sistema es critico, conviene un recorrido lineal con aprobaciones formales.</a:t>
+            </a:r>
+          </a:p>
+          <a:p>
+            <a:pPr>
+              <a:spcAft>
+                <a:spcPts val="800"/>
+              </a:spcAft>
+            </a:pPr>
+            <a:r>
+              <a:rPr sz="2000" b="0" i="0">
+                <a:solidFill>
+                  <a:srgbClr val="333333"/>
+                </a:solidFill>
+                <a:latin typeface="Calibri"/>
+              </a:rPr>
+              <a:t>–   Si el dominio es nuevo, el cliente descubre lo que quiere cuando lo ve, y hay margen para ajustar, conviene un recorrido en ciclos.</a:t>
+            </a:r>
+          </a:p>
+          <a:p>
+            <a:pPr>
+              <a:spcAft>
+                <a:spcPts val="800"/>
+              </a:spcAft>
+            </a:pPr>
+            <a:r>
+              <a:rPr sz="2000" b="0" i="0">
+                <a:solidFill>
+                  <a:srgbClr val="333333"/>
+                </a:solidFill>
+                <a:latin typeface="Calibri"/>
+              </a:rPr>
+              <a:t>–   En VetCare aplican los dos matices: los datos basicos de un paciente (nombre, especie, raza, propietario) son estables y se pueden cerrar temprano; el tablero de metricas es incierto porque la clinica nunca ha visto uno y va a cambiar de opinion apenas lo vea.</a:t>
+            </a:r>
+          </a:p>
+          <a:p>
+            <a:pPr>
+              <a:spcAft>
+                <a:spcPts val="800"/>
+              </a:spcAft>
+            </a:pPr>
+            <a:r>
+              <a:rPr sz="2000" b="0" i="0">
+                <a:solidFill>
+                  <a:srgbClr val="333333"/>
+                </a:solidFill>
+                <a:latin typeface="Calibri"/>
+              </a:rPr>
+              <a:t>–   Ademas, el ciclo elegido debe caber en la realidad del curso: el estudiante que solo cursa Seminario cierra con documento de diseño y prototipo navegable</a:t>
+            </a:r>
+          </a:p>
+          <a:p>
+            <a:pPr>
+              <a:spcAft>
+                <a:spcPts val="800"/>
+              </a:spcAft>
+            </a:pPr>
+            <a:r>
+              <a:rPr sz="2000" b="0" i="0">
+                <a:solidFill>
+                  <a:srgbClr val="333333"/>
+                </a:solidFill>
+                <a:latin typeface="Calibri"/>
+              </a:rPr>
+              <a:t>–   Y esa es una ruta completa, porque el ciclo de vida del software incluye fases donde no se escribe una sola linea de codigo y aun asi se produce valor.</a:t>
             </a:r>
           </a:p>
         </p:txBody>
@@ -9889,21 +10842,141 @@
                 </a:solidFill>
                 <a:latin typeface="Calibri"/>
               </a:rPr>
-              <a:t>Taller PI — punto de partida</a:t>
-            </a:r>
-          </a:p>
-        </p:txBody>
-      </p:sp>
-      <p:sp>
-        <p:nvSpPr>
-          <p:cNvPr id="5" name="TextBox 4"/>
+              <a:t>El ciclo de vida de VetCare en Mermaid: mismas cajas, dos recorridos</a:t>
+            </a:r>
+          </a:p>
+        </p:txBody>
+      </p:sp>
+      <p:sp>
+        <p:nvSpPr>
+          <p:cNvPr id="5" name="Rounded Rectangle 4"/>
+          <p:cNvSpPr/>
+          <p:nvPr/>
+        </p:nvSpPr>
+        <p:spPr>
+          <a:xfrm>
+            <a:off x="457200" y="1261872"/>
+            <a:ext cx="11277295" cy="4773168"/>
+          </a:xfrm>
+          <a:prstGeom prst="roundRect">
+            <a:avLst>
+              <a:gd name="adj" fmla="val 12000"/>
+            </a:avLst>
+          </a:prstGeom>
+          <a:solidFill>
+            <a:srgbClr val="1E2A38"/>
+          </a:solidFill>
+          <a:ln>
+            <a:noFill/>
+          </a:ln>
+        </p:spPr>
+        <p:style>
+          <a:lnRef idx="1">
+            <a:schemeClr val="accent1"/>
+          </a:lnRef>
+          <a:fillRef idx="3">
+            <a:schemeClr val="accent1"/>
+          </a:fillRef>
+          <a:effectRef idx="2">
+            <a:schemeClr val="accent1"/>
+          </a:effectRef>
+          <a:fontRef idx="minor">
+            <a:schemeClr val="lt1"/>
+          </a:fontRef>
+        </p:style>
+        <p:txBody>
+          <a:bodyPr rtlCol="0" anchor="ctr"/>
+          <a:lstStyle/>
+          <a:p>
+            <a:pPr algn="ctr"/>
+          </a:p>
+        </p:txBody>
+      </p:sp>
+      <p:sp>
+        <p:nvSpPr>
+          <p:cNvPr id="6" name="Rectangle 5"/>
+          <p:cNvSpPr/>
+          <p:nvPr/>
+        </p:nvSpPr>
+        <p:spPr>
+          <a:xfrm>
+            <a:off x="457200" y="1261872"/>
+            <a:ext cx="11277295" cy="320040"/>
+          </a:xfrm>
+          <a:prstGeom prst="rect">
+            <a:avLst/>
+          </a:prstGeom>
+          <a:solidFill>
+            <a:srgbClr val="095292"/>
+          </a:solidFill>
+          <a:ln>
+            <a:noFill/>
+          </a:ln>
+        </p:spPr>
+        <p:style>
+          <a:lnRef idx="1">
+            <a:schemeClr val="accent1"/>
+          </a:lnRef>
+          <a:fillRef idx="3">
+            <a:schemeClr val="accent1"/>
+          </a:fillRef>
+          <a:effectRef idx="2">
+            <a:schemeClr val="accent1"/>
+          </a:effectRef>
+          <a:fontRef idx="minor">
+            <a:schemeClr val="lt1"/>
+          </a:fontRef>
+        </p:style>
+        <p:txBody>
+          <a:bodyPr rtlCol="0" anchor="ctr"/>
+          <a:lstStyle/>
+          <a:p>
+            <a:pPr algn="ctr"/>
+          </a:p>
+        </p:txBody>
+      </p:sp>
+      <p:sp>
+        <p:nvSpPr>
+          <p:cNvPr id="7" name="TextBox 6"/>
           <p:cNvSpPr txBox="1"/>
           <p:nvPr/>
         </p:nvSpPr>
         <p:spPr>
           <a:xfrm>
-            <a:off x="457200" y="1170432"/>
-            <a:ext cx="11277295" cy="5230368"/>
+            <a:off x="685800" y="1307592"/>
+            <a:ext cx="10820095" cy="256032"/>
+          </a:xfrm>
+          <a:prstGeom prst="rect">
+            <a:avLst/>
+          </a:prstGeom>
+          <a:noFill/>
+        </p:spPr>
+        <p:txBody>
+          <a:bodyPr wrap="square" anchor="ctr"/>
+          <a:lstStyle/>
+          <a:p>
+            <a:r>
+              <a:rPr sz="1000" b="1" i="0">
+                <a:solidFill>
+                  <a:srgbClr val="269CCB"/>
+                </a:solidFill>
+                <a:latin typeface="Calibri"/>
+              </a:rPr>
+              <a:t>● ● ●</a:t>
+            </a:r>
+          </a:p>
+        </p:txBody>
+      </p:sp>
+      <p:sp>
+        <p:nvSpPr>
+          <p:cNvPr id="8" name="TextBox 7"/>
+          <p:cNvSpPr txBox="1"/>
+          <p:nvPr/>
+        </p:nvSpPr>
+        <p:spPr>
+          <a:xfrm>
+            <a:off x="777240" y="1719072"/>
+            <a:ext cx="10637215" cy="4133087"/>
           </a:xfrm>
           <a:prstGeom prst="rect">
             <a:avLst/>
@@ -9918,56 +10991,235 @@
           <a:p>
             <a:pPr>
               <a:spcAft>
-                <a:spcPts val="800"/>
+                <a:spcPts val="400"/>
               </a:spcAft>
             </a:pPr>
             <a:r>
-              <a:rPr sz="2000" b="0" i="0">
-                <a:solidFill>
-                  <a:srgbClr val="333333"/>
-                </a:solidFill>
-                <a:latin typeface="Calibri"/>
-              </a:rPr>
-              <a:t>–   Huellitas guarda hoy 5.000 fichas en carpetas de carton dentro de un archivador metalico, y las citas del dia se anotan a mano en una libreta que se lleva la auxiliar.</a:t>
+              <a:rPr sz="1400" b="0" i="0">
+                <a:solidFill>
+                  <a:srgbClr val="FFFFFF"/>
+                </a:solidFill>
+                <a:latin typeface="Calibri"/>
+              </a:rPr>
+              <a:t>flowchart LR</a:t>
             </a:r>
           </a:p>
           <a:p>
             <a:pPr>
               <a:spcAft>
-                <a:spcPts val="800"/>
+                <a:spcPts val="400"/>
               </a:spcAft>
             </a:pPr>
             <a:r>
-              <a:rPr sz="2000" b="0" i="0">
-                <a:solidFill>
-                  <a:srgbClr val="333333"/>
-                </a:solidFill>
-                <a:latin typeface="Calibri"/>
-              </a:rPr>
-              <a:t>–   El equipo tiene una lista cruda de necesidades salida de la entrevista, pero nadie ha definido que documento sale de cada etapa ni quien lo firma como aprobado.</a:t>
+              <a:rPr sz="1400" b="0" i="0">
+                <a:solidFill>
+                  <a:srgbClr val="FFFFFF"/>
+                </a:solidFill>
+                <a:latin typeface="Calibri"/>
+              </a:rPr>
+              <a:t>  A[Requisitos] --&gt;|RF-01 a RF-12 aprobados| B[Diseno]</a:t>
             </a:r>
           </a:p>
           <a:p>
             <a:pPr>
               <a:spcAft>
-                <a:spcPts val="800"/>
+                <a:spcPts val="400"/>
               </a:spcAft>
             </a:pPr>
             <a:r>
-              <a:rPr sz="2000" b="0" i="0">
-                <a:solidFill>
-                  <a:srgbClr val="333333"/>
-                </a:solidFill>
-                <a:latin typeface="Calibri"/>
-              </a:rPr>
-              <a:t>–   No existe ni una linea de codigo ni un diagrama formal: se parte de cero y el unico insumo real es lo que dijo la clinica.</a:t>
-            </a:r>
-          </a:p>
-        </p:txBody>
-      </p:sp>
-      <p:sp>
-        <p:nvSpPr>
-          <p:cNvPr id="6" name="TextBox 5"/>
+              <a:rPr sz="1400" b="0" i="0">
+                <a:solidFill>
+                  <a:srgbClr val="FFFFFF"/>
+                </a:solidFill>
+                <a:latin typeface="Calibri"/>
+              </a:rPr>
+              <a:t>  B --&gt;|Casos de uso + clases + mockups| C[Construccion]</a:t>
+            </a:r>
+          </a:p>
+          <a:p>
+            <a:pPr>
+              <a:spcAft>
+                <a:spcPts val="400"/>
+              </a:spcAft>
+            </a:pPr>
+            <a:r>
+              <a:rPr sz="1400" b="0" i="0">
+                <a:solidFill>
+                  <a:srgbClr val="FFFFFF"/>
+                </a:solidFill>
+                <a:latin typeface="Calibri"/>
+              </a:rPr>
+              <a:t>  C --&gt;|Modulo ficha del paciente| D[Pruebas]</a:t>
+            </a:r>
+          </a:p>
+          <a:p>
+            <a:pPr>
+              <a:spcAft>
+                <a:spcPts val="400"/>
+              </a:spcAft>
+            </a:pPr>
+            <a:r>
+              <a:rPr sz="1400" b="0" i="0">
+                <a:solidFill>
+                  <a:srgbClr val="FFFFFF"/>
+                </a:solidFill>
+                <a:latin typeface="Calibri"/>
+              </a:rPr>
+              <a:t>  D --&gt;|Acta de aceptacion| E[Operacion y mantenimiento]</a:t>
+            </a:r>
+          </a:p>
+          <a:p>
+            <a:pPr>
+              <a:spcAft>
+                <a:spcPts val="400"/>
+              </a:spcAft>
+            </a:pPr>
+            <a:r>
+              <a:rPr sz="1400" b="0" i="0">
+                <a:solidFill>
+                  <a:srgbClr val="FFFFFF"/>
+                </a:solidFill>
+                <a:latin typeface="Calibri"/>
+              </a:rPr>
+              <a:t>  E -.-&gt;|Solicitud: vacunacion a domicilio| A</a:t>
+            </a:r>
+          </a:p>
+          <a:p>
+            <a:pPr>
+              <a:spcAft>
+                <a:spcPts val="400"/>
+              </a:spcAft>
+            </a:pPr>
+            <a:r>
+              <a:rPr sz="1400" b="0" i="0">
+                <a:solidFill>
+                  <a:srgbClr val="FFFFFF"/>
+                </a:solidFill>
+                <a:latin typeface="Calibri"/>
+              </a:rPr>
+              <a:t>%% Recorrido lineal  = UNA sola pasada por A..E</a:t>
+            </a:r>
+          </a:p>
+          <a:p>
+            <a:pPr>
+              <a:spcAft>
+                <a:spcPts val="400"/>
+              </a:spcAft>
+            </a:pPr>
+            <a:r>
+              <a:rPr sz="1400" b="0" i="0">
+                <a:solidFill>
+                  <a:srgbClr val="FFFFFF"/>
+                </a:solidFill>
+                <a:latin typeface="Calibri"/>
+              </a:rPr>
+              <a:t>%% Recorrido en ciclos = TRES pasadas por A..E</a:t>
+            </a:r>
+          </a:p>
+          <a:p>
+            <a:pPr>
+              <a:spcAft>
+                <a:spcPts val="400"/>
+              </a:spcAft>
+            </a:pPr>
+            <a:r>
+              <a:rPr sz="1400" b="0" i="0">
+                <a:solidFill>
+                  <a:srgbClr val="FFFFFF"/>
+                </a:solidFill>
+                <a:latin typeface="Calibri"/>
+              </a:rPr>
+              <a:t>%%   Vuelta 1: ficha del paciente</a:t>
+            </a:r>
+          </a:p>
+          <a:p>
+            <a:pPr>
+              <a:spcAft>
+                <a:spcPts val="400"/>
+              </a:spcAft>
+            </a:pPr>
+            <a:r>
+              <a:rPr sz="1400" b="0" i="0">
+                <a:solidFill>
+                  <a:srgbClr val="FFFFFF"/>
+                </a:solidFill>
+                <a:latin typeface="Calibri"/>
+              </a:rPr>
+              <a:t>%%   Vuelta 2: historia clinica y busqueda</a:t>
+            </a:r>
+          </a:p>
+          <a:p>
+            <a:pPr>
+              <a:spcAft>
+                <a:spcPts val="400"/>
+              </a:spcAft>
+            </a:pPr>
+            <a:r>
+              <a:rPr sz="1400" b="0" i="0">
+                <a:solidFill>
+                  <a:srgbClr val="FFFFFF"/>
+                </a:solidFill>
+                <a:latin typeface="Calibri"/>
+              </a:rPr>
+              <a:t>%%   Vuelta 3: reportes y metricas</a:t>
+            </a:r>
+          </a:p>
+          <a:p>
+            <a:pPr>
+              <a:spcAft>
+                <a:spcPts val="400"/>
+              </a:spcAft>
+            </a:pPr>
+            <a:r>
+              <a:rPr sz="1400" b="0" i="0">
+                <a:solidFill>
+                  <a:srgbClr val="FFFFFF"/>
+                </a:solidFill>
+                <a:latin typeface="Calibri"/>
+              </a:rPr>
+              <a:t>%% Las cajas nunca cambian; lo que cambia es cuantas veces se recorren</a:t>
+            </a:r>
+          </a:p>
+        </p:txBody>
+      </p:sp>
+      <p:sp>
+        <p:nvSpPr>
+          <p:cNvPr id="9" name="TextBox 8"/>
+          <p:cNvSpPr txBox="1"/>
+          <p:nvPr/>
+        </p:nvSpPr>
+        <p:spPr>
+          <a:xfrm>
+            <a:off x="457200" y="6080760"/>
+            <a:ext cx="11277295" cy="320040"/>
+          </a:xfrm>
+          <a:prstGeom prst="rect">
+            <a:avLst/>
+          </a:prstGeom>
+          <a:noFill/>
+        </p:spPr>
+        <p:txBody>
+          <a:bodyPr wrap="square">
+            <a:spAutoFit/>
+          </a:bodyPr>
+          <a:lstStyle/>
+          <a:p>
+            <a:pPr algn="ctr"/>
+            <a:r>
+              <a:rPr sz="1200" b="0" i="1">
+                <a:solidFill>
+                  <a:srgbClr val="666666"/>
+                </a:solidFill>
+                <a:latin typeface="Calibri"/>
+              </a:rPr>
+              <a:t>Las fases son las mismas en cualquier metodologia; lo unico que se negocia es cuantas vueltas se dan y cuanto sistema entra en cada vuelta.</a:t>
+            </a:r>
+          </a:p>
+        </p:txBody>
+      </p:sp>
+      <p:sp>
+        <p:nvSpPr>
+          <p:cNvPr id="10" name="TextBox 9"/>
           <p:cNvSpPr txBox="1"/>
           <p:nvPr/>
         </p:nvSpPr>

--- a/Seminario de Sistemas/Clases/Clase 2 - Ciclos de vida del software/Presentacion.pptx
+++ b/Seminario de Sistemas/Clases/Clase 2 - Ciclos de vida del software/Presentacion.pptx
@@ -23,6 +23,8 @@
     <p:sldId id="271" r:id="rId22"/>
     <p:sldId id="272" r:id="rId23"/>
     <p:sldId id="273" r:id="rId24"/>
+    <p:sldId id="274" r:id="rId25"/>
+    <p:sldId id="275" r:id="rId26"/>
   </p:sldIdLst>
   <p:sldSz cx="12191695" cy="6858000" type="screen4x3"/>
   <p:notesSz cx="6858000" cy="9144000"/>
@@ -3623,7 +3625,7 @@
                 </a:solidFill>
                 <a:latin typeface="Calibri"/>
               </a:rPr>
-              <a:t>Demo del dia</a:t>
+              <a:t>Como se elige el recorrido? (2/2)</a:t>
             </a:r>
           </a:p>
         </p:txBody>
@@ -3662,25 +3664,7 @@
                 </a:solidFill>
                 <a:latin typeface="Calibri"/>
               </a:rPr>
-              <a:t>–   </a:t>
-            </a:r>
-            <a:r>
-              <a:rPr sz="2000" b="1" i="0">
-                <a:solidFill>
-                  <a:srgbClr val="333333"/>
-                </a:solidFill>
-                <a:latin typeface="Calibri"/>
-              </a:rPr>
-              <a:t>Herramienta:</a:t>
-            </a:r>
-            <a:r>
-              <a:rPr sz="2000" b="0" i="0">
-                <a:solidFill>
-                  <a:srgbClr val="333333"/>
-                </a:solidFill>
-                <a:latin typeface="Calibri"/>
-              </a:rPr>
-              <a:t> draw.io · Google Docs</a:t>
+              <a:t>–   Ademas, el ciclo elegido debe caber en la realidad del curso: el estudiante que solo cursa Seminario cierra con documento de diseño y prototipo navegable</a:t>
             </a:r>
           </a:p>
           <a:p>
@@ -3696,41 +3680,7 @@
                 </a:solidFill>
                 <a:latin typeface="Calibri"/>
               </a:rPr>
-              <a:t>–   </a:t>
-            </a:r>
-            <a:r>
-              <a:rPr sz="2000" b="1" i="0">
-                <a:solidFill>
-                  <a:srgbClr val="333333"/>
-                </a:solidFill>
-                <a:latin typeface="Calibri"/>
-              </a:rPr>
-              <a:t>Demo:</a:t>
-            </a:r>
-            <a:r>
-              <a:rPr sz="2000" b="0" i="0">
-                <a:solidFill>
-                  <a:srgbClr val="333333"/>
-                </a:solidFill>
-                <a:latin typeface="Calibri"/>
-              </a:rPr>
-              <a:t> El docente arma en vivo en draw.io el ciclo de VetCare en dos versiones, una sola pasada y tres vueltas, y muestra que las cajas son identicas y lo unico que cambia es el recorrido.</a:t>
-            </a:r>
-          </a:p>
-          <a:p>
-            <a:pPr>
-              <a:spcAft>
-                <a:spcPts val="800"/>
-              </a:spcAft>
-            </a:pPr>
-            <a:r>
-              <a:rPr sz="2000" b="0" i="0">
-                <a:solidFill>
-                  <a:srgbClr val="333333"/>
-                </a:solidFill>
-                <a:latin typeface="Calibri"/>
-              </a:rPr>
-              <a:t>–   Mismo dominio VetCare — no otro ejemplo. Aqui se diseña, no se programa.</a:t>
+              <a:t>–   Y esa es una ruta completa, porque el ciclo de vida del software incluye fases donde no se escribe una sola linea de codigo y aun asi se produce valor.</a:t>
             </a:r>
           </a:p>
         </p:txBody>
@@ -3805,7 +3755,7 @@
         <p:spPr>
           <a:xfrm>
             <a:off x="0" y="0"/>
-            <a:ext cx="12191695" cy="1170432"/>
+            <a:ext cx="12191695" cy="960120"/>
           </a:xfrm>
           <a:prstGeom prst="rect">
             <a:avLst/>
@@ -3847,7 +3797,7 @@
         </p:nvSpPr>
         <p:spPr>
           <a:xfrm>
-            <a:off x="0" y="1170432"/>
+            <a:off x="0" y="960120"/>
             <a:ext cx="12191695" cy="41148"/>
           </a:xfrm>
           <a:prstGeom prst="rect">
@@ -3891,7 +3841,7 @@
         <p:spPr>
           <a:xfrm>
             <a:off x="457200" y="164592"/>
-            <a:ext cx="11277295" cy="384048"/>
+            <a:ext cx="11277295" cy="502920"/>
           </a:xfrm>
           <a:prstGeom prst="rect">
             <a:avLst/>
@@ -3911,55 +3861,21 @@
                 </a:solidFill>
                 <a:latin typeface="Calibri"/>
               </a:rPr>
-              <a:t>Herramientas de hoy</a:t>
-            </a:r>
-          </a:p>
-        </p:txBody>
-      </p:sp>
-      <p:sp>
-        <p:nvSpPr>
-          <p:cNvPr id="5" name="TextBox 4"/>
-          <p:cNvSpPr txBox="1"/>
-          <p:nvPr/>
-        </p:nvSpPr>
-        <p:spPr>
-          <a:xfrm>
-            <a:off x="457200" y="566928"/>
-            <a:ext cx="11277295" cy="411480"/>
-          </a:xfrm>
-          <a:prstGeom prst="rect">
-            <a:avLst/>
-          </a:prstGeom>
-          <a:noFill/>
-        </p:spPr>
-        <p:txBody>
-          <a:bodyPr wrap="square">
-            <a:spAutoFit/>
-          </a:bodyPr>
-          <a:lstStyle/>
-          <a:p>
-            <a:r>
-              <a:rPr sz="1400" b="0" i="0">
-                <a:solidFill>
-                  <a:srgbClr val="B8D8EE"/>
-                </a:solidFill>
-                <a:latin typeface="Calibri"/>
-              </a:rPr>
-              <a:t>Gratis · funcionan en el navegador</a:t>
-            </a:r>
-          </a:p>
-        </p:txBody>
-      </p:sp>
-      <p:sp>
-        <p:nvSpPr>
-          <p:cNvPr id="6" name="Rounded Rectangle 5"/>
+              <a:t>El ciclo de vida de VetCare en Mermaid: mismas cajas, dos recorridos</a:t>
+            </a:r>
+          </a:p>
+        </p:txBody>
+      </p:sp>
+      <p:sp>
+        <p:nvSpPr>
+          <p:cNvPr id="5" name="Rounded Rectangle 4"/>
           <p:cNvSpPr/>
           <p:nvPr/>
         </p:nvSpPr>
         <p:spPr>
           <a:xfrm>
-            <a:off x="457200" y="1591056"/>
-            <a:ext cx="3624986" cy="2331720"/>
+            <a:off x="457200" y="1261872"/>
+            <a:ext cx="11277295" cy="4773168"/>
           </a:xfrm>
           <a:prstGeom prst="roundRect">
             <a:avLst>
@@ -3967,7 +3883,7 @@
             </a:avLst>
           </a:prstGeom>
           <a:solidFill>
-            <a:srgbClr val="F2F2F2"/>
+            <a:srgbClr val="1E2A38"/>
           </a:solidFill>
           <a:ln>
             <a:noFill/>
@@ -3997,14 +3913,14 @@
       </p:sp>
       <p:sp>
         <p:nvSpPr>
-          <p:cNvPr id="7" name="Rectangle 6"/>
+          <p:cNvPr id="6" name="Rectangle 5"/>
           <p:cNvSpPr/>
           <p:nvPr/>
         </p:nvSpPr>
         <p:spPr>
           <a:xfrm>
-            <a:off x="457200" y="1591056"/>
-            <a:ext cx="3624986" cy="64008"/>
+            <a:off x="457200" y="1261872"/>
+            <a:ext cx="11277295" cy="320040"/>
           </a:xfrm>
           <a:prstGeom prst="rect">
             <a:avLst/>
@@ -4040,531 +3956,289 @@
       </p:sp>
       <p:sp>
         <p:nvSpPr>
-          <p:cNvPr id="8" name="Rectangle 7"/>
-          <p:cNvSpPr/>
-          <p:nvPr/>
-        </p:nvSpPr>
-        <p:spPr>
-          <a:xfrm>
-            <a:off x="457200" y="1655064"/>
-            <a:ext cx="3624986" cy="27432"/>
-          </a:xfrm>
-          <a:prstGeom prst="rect">
-            <a:avLst/>
-          </a:prstGeom>
-          <a:solidFill>
-            <a:srgbClr val="FFD000"/>
-          </a:solidFill>
-          <a:ln>
-            <a:noFill/>
-          </a:ln>
-        </p:spPr>
-        <p:style>
-          <a:lnRef idx="1">
-            <a:schemeClr val="accent1"/>
-          </a:lnRef>
-          <a:fillRef idx="3">
-            <a:schemeClr val="accent1"/>
-          </a:fillRef>
-          <a:effectRef idx="2">
-            <a:schemeClr val="accent1"/>
-          </a:effectRef>
-          <a:fontRef idx="minor">
-            <a:schemeClr val="lt1"/>
-          </a:fontRef>
-        </p:style>
-        <p:txBody>
-          <a:bodyPr rtlCol="0" anchor="ctr"/>
+          <p:cNvPr id="7" name="TextBox 6"/>
+          <p:cNvSpPr txBox="1"/>
+          <p:nvPr/>
+        </p:nvSpPr>
+        <p:spPr>
+          <a:xfrm>
+            <a:off x="685800" y="1307592"/>
+            <a:ext cx="10820095" cy="256032"/>
+          </a:xfrm>
+          <a:prstGeom prst="rect">
+            <a:avLst/>
+          </a:prstGeom>
+          <a:noFill/>
+        </p:spPr>
+        <p:txBody>
+          <a:bodyPr wrap="square" anchor="ctr"/>
+          <a:lstStyle/>
+          <a:p>
+            <a:r>
+              <a:rPr sz="1000" b="1" i="0">
+                <a:solidFill>
+                  <a:srgbClr val="269CCB"/>
+                </a:solidFill>
+                <a:latin typeface="Calibri"/>
+              </a:rPr>
+              <a:t>● ● ●</a:t>
+            </a:r>
+          </a:p>
+        </p:txBody>
+      </p:sp>
+      <p:sp>
+        <p:nvSpPr>
+          <p:cNvPr id="8" name="TextBox 7"/>
+          <p:cNvSpPr txBox="1"/>
+          <p:nvPr/>
+        </p:nvSpPr>
+        <p:spPr>
+          <a:xfrm>
+            <a:off x="777240" y="1719072"/>
+            <a:ext cx="10637215" cy="4133087"/>
+          </a:xfrm>
+          <a:prstGeom prst="rect">
+            <a:avLst/>
+          </a:prstGeom>
+          <a:noFill/>
+        </p:spPr>
+        <p:txBody>
+          <a:bodyPr wrap="square">
+            <a:spAutoFit/>
+          </a:bodyPr>
+          <a:lstStyle/>
+          <a:p>
+            <a:pPr>
+              <a:spcAft>
+                <a:spcPts val="400"/>
+              </a:spcAft>
+            </a:pPr>
+            <a:r>
+              <a:rPr sz="1400" b="0" i="0">
+                <a:solidFill>
+                  <a:srgbClr val="FFFFFF"/>
+                </a:solidFill>
+                <a:latin typeface="Calibri"/>
+              </a:rPr>
+              <a:t>flowchart LR</a:t>
+            </a:r>
+          </a:p>
+          <a:p>
+            <a:pPr>
+              <a:spcAft>
+                <a:spcPts val="400"/>
+              </a:spcAft>
+            </a:pPr>
+            <a:r>
+              <a:rPr sz="1400" b="0" i="0">
+                <a:solidFill>
+                  <a:srgbClr val="FFFFFF"/>
+                </a:solidFill>
+                <a:latin typeface="Calibri"/>
+              </a:rPr>
+              <a:t>  A[Requisitos] --&gt;|RF-01 a RF-12 aprobados| B[Diseno]</a:t>
+            </a:r>
+          </a:p>
+          <a:p>
+            <a:pPr>
+              <a:spcAft>
+                <a:spcPts val="400"/>
+              </a:spcAft>
+            </a:pPr>
+            <a:r>
+              <a:rPr sz="1400" b="0" i="0">
+                <a:solidFill>
+                  <a:srgbClr val="FFFFFF"/>
+                </a:solidFill>
+                <a:latin typeface="Calibri"/>
+              </a:rPr>
+              <a:t>  B --&gt;|Casos de uso + clases + mockups| C[Construccion]</a:t>
+            </a:r>
+          </a:p>
+          <a:p>
+            <a:pPr>
+              <a:spcAft>
+                <a:spcPts val="400"/>
+              </a:spcAft>
+            </a:pPr>
+            <a:r>
+              <a:rPr sz="1400" b="0" i="0">
+                <a:solidFill>
+                  <a:srgbClr val="FFFFFF"/>
+                </a:solidFill>
+                <a:latin typeface="Calibri"/>
+              </a:rPr>
+              <a:t>  C --&gt;|Modulo ficha del paciente| D[Pruebas]</a:t>
+            </a:r>
+          </a:p>
+          <a:p>
+            <a:pPr>
+              <a:spcAft>
+                <a:spcPts val="400"/>
+              </a:spcAft>
+            </a:pPr>
+            <a:r>
+              <a:rPr sz="1400" b="0" i="0">
+                <a:solidFill>
+                  <a:srgbClr val="FFFFFF"/>
+                </a:solidFill>
+                <a:latin typeface="Calibri"/>
+              </a:rPr>
+              <a:t>  D --&gt;|Acta de aceptacion| E[Operacion y mantenimiento]</a:t>
+            </a:r>
+          </a:p>
+          <a:p>
+            <a:pPr>
+              <a:spcAft>
+                <a:spcPts val="400"/>
+              </a:spcAft>
+            </a:pPr>
+            <a:r>
+              <a:rPr sz="1400" b="0" i="0">
+                <a:solidFill>
+                  <a:srgbClr val="FFFFFF"/>
+                </a:solidFill>
+                <a:latin typeface="Calibri"/>
+              </a:rPr>
+              <a:t>  E -.-&gt;|Solicitud: vacunacion a domicilio| A</a:t>
+            </a:r>
+          </a:p>
+          <a:p>
+            <a:pPr>
+              <a:spcAft>
+                <a:spcPts val="400"/>
+              </a:spcAft>
+            </a:pPr>
+            <a:r>
+              <a:rPr sz="1400" b="0" i="0">
+                <a:solidFill>
+                  <a:srgbClr val="FFFFFF"/>
+                </a:solidFill>
+                <a:latin typeface="Calibri"/>
+              </a:rPr>
+              <a:t>%% Recorrido lineal  = UNA sola pasada por A..E</a:t>
+            </a:r>
+          </a:p>
+          <a:p>
+            <a:pPr>
+              <a:spcAft>
+                <a:spcPts val="400"/>
+              </a:spcAft>
+            </a:pPr>
+            <a:r>
+              <a:rPr sz="1400" b="0" i="0">
+                <a:solidFill>
+                  <a:srgbClr val="FFFFFF"/>
+                </a:solidFill>
+                <a:latin typeface="Calibri"/>
+              </a:rPr>
+              <a:t>%% Recorrido en ciclos = TRES pasadas por A..E</a:t>
+            </a:r>
+          </a:p>
+          <a:p>
+            <a:pPr>
+              <a:spcAft>
+                <a:spcPts val="400"/>
+              </a:spcAft>
+            </a:pPr>
+            <a:r>
+              <a:rPr sz="1400" b="0" i="0">
+                <a:solidFill>
+                  <a:srgbClr val="FFFFFF"/>
+                </a:solidFill>
+                <a:latin typeface="Calibri"/>
+              </a:rPr>
+              <a:t>%%   Vuelta 1: ficha del paciente</a:t>
+            </a:r>
+          </a:p>
+          <a:p>
+            <a:pPr>
+              <a:spcAft>
+                <a:spcPts val="400"/>
+              </a:spcAft>
+            </a:pPr>
+            <a:r>
+              <a:rPr sz="1400" b="0" i="0">
+                <a:solidFill>
+                  <a:srgbClr val="FFFFFF"/>
+                </a:solidFill>
+                <a:latin typeface="Calibri"/>
+              </a:rPr>
+              <a:t>%%   Vuelta 2: historia clinica y busqueda</a:t>
+            </a:r>
+          </a:p>
+          <a:p>
+            <a:pPr>
+              <a:spcAft>
+                <a:spcPts val="400"/>
+              </a:spcAft>
+            </a:pPr>
+            <a:r>
+              <a:rPr sz="1400" b="0" i="0">
+                <a:solidFill>
+                  <a:srgbClr val="FFFFFF"/>
+                </a:solidFill>
+                <a:latin typeface="Calibri"/>
+              </a:rPr>
+              <a:t>%%   Vuelta 3: reportes y metricas</a:t>
+            </a:r>
+          </a:p>
+          <a:p>
+            <a:pPr>
+              <a:spcAft>
+                <a:spcPts val="400"/>
+              </a:spcAft>
+            </a:pPr>
+            <a:r>
+              <a:rPr sz="1400" b="0" i="0">
+                <a:solidFill>
+                  <a:srgbClr val="FFFFFF"/>
+                </a:solidFill>
+                <a:latin typeface="Calibri"/>
+              </a:rPr>
+              <a:t>%% Las cajas nunca cambian; lo que cambia es cuantas veces se recorren</a:t>
+            </a:r>
+          </a:p>
+        </p:txBody>
+      </p:sp>
+      <p:sp>
+        <p:nvSpPr>
+          <p:cNvPr id="9" name="TextBox 8"/>
+          <p:cNvSpPr txBox="1"/>
+          <p:nvPr/>
+        </p:nvSpPr>
+        <p:spPr>
+          <a:xfrm>
+            <a:off x="457200" y="6080760"/>
+            <a:ext cx="11277295" cy="320040"/>
+          </a:xfrm>
+          <a:prstGeom prst="rect">
+            <a:avLst/>
+          </a:prstGeom>
+          <a:noFill/>
+        </p:spPr>
+        <p:txBody>
+          <a:bodyPr wrap="square">
+            <a:spAutoFit/>
+          </a:bodyPr>
           <a:lstStyle/>
           <a:p>
             <a:pPr algn="ctr"/>
-          </a:p>
-        </p:txBody>
-      </p:sp>
-      <p:pic>
-        <p:nvPicPr>
-          <p:cNvPr id="9" name="Picture 8" descr="drawio.png"/>
-          <p:cNvPicPr>
-            <a:picLocks noChangeAspect="1"/>
-          </p:cNvPicPr>
-          <p:nvPr/>
-        </p:nvPicPr>
-        <p:blipFill>
-          <a:blip r:embed="rId2"/>
-          <a:stretch>
-            <a:fillRect/>
-          </a:stretch>
-        </p:blipFill>
-        <p:spPr>
-          <a:xfrm>
-            <a:off x="1643329" y="1847087"/>
-            <a:ext cx="1252728" cy="1252728"/>
-          </a:xfrm>
-          <a:prstGeom prst="rect">
-            <a:avLst/>
-          </a:prstGeom>
-        </p:spPr>
-      </p:pic>
+            <a:r>
+              <a:rPr sz="1200" b="0" i="1">
+                <a:solidFill>
+                  <a:srgbClr val="666666"/>
+                </a:solidFill>
+                <a:latin typeface="Calibri"/>
+              </a:rPr>
+              <a:t>Las fases son las mismas en cualquier metodologia; lo unico que se negocia es cuantas vueltas se dan y cuanto sistema entra en cada vuelta.</a:t>
+            </a:r>
+          </a:p>
+        </p:txBody>
+      </p:sp>
       <p:sp>
         <p:nvSpPr>
           <p:cNvPr id="10" name="TextBox 9"/>
-          <p:cNvSpPr txBox="1"/>
-          <p:nvPr/>
-        </p:nvSpPr>
-        <p:spPr>
-          <a:xfrm>
-            <a:off x="530352" y="3191256"/>
-            <a:ext cx="3478682" cy="621792"/>
-          </a:xfrm>
-          <a:prstGeom prst="rect">
-            <a:avLst/>
-          </a:prstGeom>
-          <a:noFill/>
-        </p:spPr>
-        <p:txBody>
-          <a:bodyPr wrap="square" anchor="t"/>
-          <a:lstStyle/>
-          <a:p>
-            <a:pPr algn="ctr"/>
-            <a:r>
-              <a:rPr sz="1300" b="1" i="0">
-                <a:solidFill>
-                  <a:srgbClr val="095292"/>
-                </a:solidFill>
-                <a:latin typeface="Calibri"/>
-              </a:rPr>
-              <a:t>Draw.Io</a:t>
-            </a:r>
-          </a:p>
-          <a:p>
-            <a:pPr algn="ctr">
-              <a:spcBef>
-                <a:spcPts val="200"/>
-              </a:spcBef>
-            </a:pPr>
-            <a:r>
-              <a:rPr sz="1000" b="0" i="0">
-                <a:solidFill>
-                  <a:srgbClr val="666666"/>
-                </a:solidFill>
-                <a:latin typeface="Calibri"/>
-              </a:rPr>
-              <a:t>Diagramas UML y de contexto</a:t>
-            </a:r>
-          </a:p>
-        </p:txBody>
-      </p:sp>
-      <p:sp>
-        <p:nvSpPr>
-          <p:cNvPr id="11" name="Rounded Rectangle 10"/>
-          <p:cNvSpPr/>
-          <p:nvPr/>
-        </p:nvSpPr>
-        <p:spPr>
-          <a:xfrm>
-            <a:off x="4283354" y="1591056"/>
-            <a:ext cx="3624986" cy="2331720"/>
-          </a:xfrm>
-          <a:prstGeom prst="roundRect">
-            <a:avLst>
-              <a:gd name="adj" fmla="val 12000"/>
-            </a:avLst>
-          </a:prstGeom>
-          <a:solidFill>
-            <a:srgbClr val="F2F2F2"/>
-          </a:solidFill>
-          <a:ln>
-            <a:noFill/>
-          </a:ln>
-        </p:spPr>
-        <p:style>
-          <a:lnRef idx="1">
-            <a:schemeClr val="accent1"/>
-          </a:lnRef>
-          <a:fillRef idx="3">
-            <a:schemeClr val="accent1"/>
-          </a:fillRef>
-          <a:effectRef idx="2">
-            <a:schemeClr val="accent1"/>
-          </a:effectRef>
-          <a:fontRef idx="minor">
-            <a:schemeClr val="lt1"/>
-          </a:fontRef>
-        </p:style>
-        <p:txBody>
-          <a:bodyPr rtlCol="0" anchor="ctr"/>
-          <a:lstStyle/>
-          <a:p>
-            <a:pPr algn="ctr"/>
-          </a:p>
-        </p:txBody>
-      </p:sp>
-      <p:sp>
-        <p:nvSpPr>
-          <p:cNvPr id="12" name="Rectangle 11"/>
-          <p:cNvSpPr/>
-          <p:nvPr/>
-        </p:nvSpPr>
-        <p:spPr>
-          <a:xfrm>
-            <a:off x="4283354" y="1591056"/>
-            <a:ext cx="3624986" cy="64008"/>
-          </a:xfrm>
-          <a:prstGeom prst="rect">
-            <a:avLst/>
-          </a:prstGeom>
-          <a:solidFill>
-            <a:srgbClr val="095292"/>
-          </a:solidFill>
-          <a:ln>
-            <a:noFill/>
-          </a:ln>
-        </p:spPr>
-        <p:style>
-          <a:lnRef idx="1">
-            <a:schemeClr val="accent1"/>
-          </a:lnRef>
-          <a:fillRef idx="3">
-            <a:schemeClr val="accent1"/>
-          </a:fillRef>
-          <a:effectRef idx="2">
-            <a:schemeClr val="accent1"/>
-          </a:effectRef>
-          <a:fontRef idx="minor">
-            <a:schemeClr val="lt1"/>
-          </a:fontRef>
-        </p:style>
-        <p:txBody>
-          <a:bodyPr rtlCol="0" anchor="ctr"/>
-          <a:lstStyle/>
-          <a:p>
-            <a:pPr algn="ctr"/>
-          </a:p>
-        </p:txBody>
-      </p:sp>
-      <p:sp>
-        <p:nvSpPr>
-          <p:cNvPr id="13" name="Rectangle 12"/>
-          <p:cNvSpPr/>
-          <p:nvPr/>
-        </p:nvSpPr>
-        <p:spPr>
-          <a:xfrm>
-            <a:off x="4283354" y="1655064"/>
-            <a:ext cx="3624986" cy="27432"/>
-          </a:xfrm>
-          <a:prstGeom prst="rect">
-            <a:avLst/>
-          </a:prstGeom>
-          <a:solidFill>
-            <a:srgbClr val="FFD000"/>
-          </a:solidFill>
-          <a:ln>
-            <a:noFill/>
-          </a:ln>
-        </p:spPr>
-        <p:style>
-          <a:lnRef idx="1">
-            <a:schemeClr val="accent1"/>
-          </a:lnRef>
-          <a:fillRef idx="3">
-            <a:schemeClr val="accent1"/>
-          </a:fillRef>
-          <a:effectRef idx="2">
-            <a:schemeClr val="accent1"/>
-          </a:effectRef>
-          <a:fontRef idx="minor">
-            <a:schemeClr val="lt1"/>
-          </a:fontRef>
-        </p:style>
-        <p:txBody>
-          <a:bodyPr rtlCol="0" anchor="ctr"/>
-          <a:lstStyle/>
-          <a:p>
-            <a:pPr algn="ctr"/>
-          </a:p>
-        </p:txBody>
-      </p:sp>
-      <p:pic>
-        <p:nvPicPr>
-          <p:cNvPr id="14" name="Picture 13" descr="google_docs.png"/>
-          <p:cNvPicPr>
-            <a:picLocks noChangeAspect="1"/>
-          </p:cNvPicPr>
-          <p:nvPr/>
-        </p:nvPicPr>
-        <p:blipFill>
-          <a:blip r:embed="rId3"/>
-          <a:stretch>
-            <a:fillRect/>
-          </a:stretch>
-        </p:blipFill>
-        <p:spPr>
-          <a:xfrm>
-            <a:off x="5469483" y="1847087"/>
-            <a:ext cx="1252728" cy="1252728"/>
-          </a:xfrm>
-          <a:prstGeom prst="rect">
-            <a:avLst/>
-          </a:prstGeom>
-        </p:spPr>
-      </p:pic>
-      <p:sp>
-        <p:nvSpPr>
-          <p:cNvPr id="15" name="TextBox 14"/>
-          <p:cNvSpPr txBox="1"/>
-          <p:nvPr/>
-        </p:nvSpPr>
-        <p:spPr>
-          <a:xfrm>
-            <a:off x="4356506" y="3191256"/>
-            <a:ext cx="3478682" cy="621792"/>
-          </a:xfrm>
-          <a:prstGeom prst="rect">
-            <a:avLst/>
-          </a:prstGeom>
-          <a:noFill/>
-        </p:spPr>
-        <p:txBody>
-          <a:bodyPr wrap="square" anchor="t"/>
-          <a:lstStyle/>
-          <a:p>
-            <a:pPr algn="ctr"/>
-            <a:r>
-              <a:rPr sz="1300" b="1" i="0">
-                <a:solidFill>
-                  <a:srgbClr val="095292"/>
-                </a:solidFill>
-                <a:latin typeface="Calibri"/>
-              </a:rPr>
-              <a:t>google docs</a:t>
-            </a:r>
-          </a:p>
-          <a:p>
-            <a:pPr algn="ctr">
-              <a:spcBef>
-                <a:spcPts val="200"/>
-              </a:spcBef>
-            </a:pPr>
-            <a:r>
-              <a:rPr sz="1000" b="0" i="0">
-                <a:solidFill>
-                  <a:srgbClr val="666666"/>
-                </a:solidFill>
-                <a:latin typeface="Calibri"/>
-              </a:rPr>
-              <a:t>Documentos del paquete de diseño</a:t>
-            </a:r>
-          </a:p>
-        </p:txBody>
-      </p:sp>
-      <p:sp>
-        <p:nvSpPr>
-          <p:cNvPr id="16" name="Rounded Rectangle 15"/>
-          <p:cNvSpPr/>
-          <p:nvPr/>
-        </p:nvSpPr>
-        <p:spPr>
-          <a:xfrm>
-            <a:off x="8109508" y="1591056"/>
-            <a:ext cx="3624986" cy="2331720"/>
-          </a:xfrm>
-          <a:prstGeom prst="roundRect">
-            <a:avLst>
-              <a:gd name="adj" fmla="val 12000"/>
-            </a:avLst>
-          </a:prstGeom>
-          <a:solidFill>
-            <a:srgbClr val="F2F2F2"/>
-          </a:solidFill>
-          <a:ln>
-            <a:noFill/>
-          </a:ln>
-        </p:spPr>
-        <p:style>
-          <a:lnRef idx="1">
-            <a:schemeClr val="accent1"/>
-          </a:lnRef>
-          <a:fillRef idx="3">
-            <a:schemeClr val="accent1"/>
-          </a:fillRef>
-          <a:effectRef idx="2">
-            <a:schemeClr val="accent1"/>
-          </a:effectRef>
-          <a:fontRef idx="minor">
-            <a:schemeClr val="lt1"/>
-          </a:fontRef>
-        </p:style>
-        <p:txBody>
-          <a:bodyPr rtlCol="0" anchor="ctr"/>
-          <a:lstStyle/>
-          <a:p>
-            <a:pPr algn="ctr"/>
-          </a:p>
-        </p:txBody>
-      </p:sp>
-      <p:sp>
-        <p:nvSpPr>
-          <p:cNvPr id="17" name="Rectangle 16"/>
-          <p:cNvSpPr/>
-          <p:nvPr/>
-        </p:nvSpPr>
-        <p:spPr>
-          <a:xfrm>
-            <a:off x="8109508" y="1591056"/>
-            <a:ext cx="3624986" cy="64008"/>
-          </a:xfrm>
-          <a:prstGeom prst="rect">
-            <a:avLst/>
-          </a:prstGeom>
-          <a:solidFill>
-            <a:srgbClr val="095292"/>
-          </a:solidFill>
-          <a:ln>
-            <a:noFill/>
-          </a:ln>
-        </p:spPr>
-        <p:style>
-          <a:lnRef idx="1">
-            <a:schemeClr val="accent1"/>
-          </a:lnRef>
-          <a:fillRef idx="3">
-            <a:schemeClr val="accent1"/>
-          </a:fillRef>
-          <a:effectRef idx="2">
-            <a:schemeClr val="accent1"/>
-          </a:effectRef>
-          <a:fontRef idx="minor">
-            <a:schemeClr val="lt1"/>
-          </a:fontRef>
-        </p:style>
-        <p:txBody>
-          <a:bodyPr rtlCol="0" anchor="ctr"/>
-          <a:lstStyle/>
-          <a:p>
-            <a:pPr algn="ctr"/>
-          </a:p>
-        </p:txBody>
-      </p:sp>
-      <p:sp>
-        <p:nvSpPr>
-          <p:cNvPr id="18" name="Rectangle 17"/>
-          <p:cNvSpPr/>
-          <p:nvPr/>
-        </p:nvSpPr>
-        <p:spPr>
-          <a:xfrm>
-            <a:off x="8109508" y="1655064"/>
-            <a:ext cx="3624986" cy="27432"/>
-          </a:xfrm>
-          <a:prstGeom prst="rect">
-            <a:avLst/>
-          </a:prstGeom>
-          <a:solidFill>
-            <a:srgbClr val="FFD000"/>
-          </a:solidFill>
-          <a:ln>
-            <a:noFill/>
-          </a:ln>
-        </p:spPr>
-        <p:style>
-          <a:lnRef idx="1">
-            <a:schemeClr val="accent1"/>
-          </a:lnRef>
-          <a:fillRef idx="3">
-            <a:schemeClr val="accent1"/>
-          </a:fillRef>
-          <a:effectRef idx="2">
-            <a:schemeClr val="accent1"/>
-          </a:effectRef>
-          <a:fontRef idx="minor">
-            <a:schemeClr val="lt1"/>
-          </a:fontRef>
-        </p:style>
-        <p:txBody>
-          <a:bodyPr rtlCol="0" anchor="ctr"/>
-          <a:lstStyle/>
-          <a:p>
-            <a:pPr algn="ctr"/>
-          </a:p>
-        </p:txBody>
-      </p:sp>
-      <p:pic>
-        <p:nvPicPr>
-          <p:cNvPr id="19" name="Picture 18" descr="examlab.png"/>
-          <p:cNvPicPr>
-            <a:picLocks noChangeAspect="1"/>
-          </p:cNvPicPr>
-          <p:nvPr/>
-        </p:nvPicPr>
-        <p:blipFill>
-          <a:blip r:embed="rId4"/>
-          <a:stretch>
-            <a:fillRect/>
-          </a:stretch>
-        </p:blipFill>
-        <p:spPr>
-          <a:xfrm>
-            <a:off x="9295638" y="1847087"/>
-            <a:ext cx="1252728" cy="1252728"/>
-          </a:xfrm>
-          <a:prstGeom prst="rect">
-            <a:avLst/>
-          </a:prstGeom>
-        </p:spPr>
-      </p:pic>
-      <p:sp>
-        <p:nvSpPr>
-          <p:cNvPr id="20" name="TextBox 19"/>
-          <p:cNvSpPr txBox="1"/>
-          <p:nvPr/>
-        </p:nvSpPr>
-        <p:spPr>
-          <a:xfrm>
-            <a:off x="8182660" y="3191256"/>
-            <a:ext cx="3478682" cy="621792"/>
-          </a:xfrm>
-          <a:prstGeom prst="rect">
-            <a:avLst/>
-          </a:prstGeom>
-          <a:noFill/>
-        </p:spPr>
-        <p:txBody>
-          <a:bodyPr wrap="square" anchor="t"/>
-          <a:lstStyle/>
-          <a:p>
-            <a:pPr algn="ctr"/>
-            <a:r>
-              <a:rPr sz="1300" b="1" i="0">
-                <a:solidFill>
-                  <a:srgbClr val="095292"/>
-                </a:solidFill>
-                <a:latin typeface="Calibri"/>
-              </a:rPr>
-              <a:t>la plataforma del curso</a:t>
-            </a:r>
-          </a:p>
-          <a:p>
-            <a:pPr algn="ctr">
-              <a:spcBef>
-                <a:spcPts val="200"/>
-              </a:spcBef>
-            </a:pPr>
-            <a:r>
-              <a:rPr sz="1000" b="0" i="0">
-                <a:solidFill>
-                  <a:srgbClr val="666666"/>
-                </a:solidFill>
-                <a:latin typeface="Calibri"/>
-              </a:rPr>
-              <a:t>Entrega del taller · en la fecha que indique el docente</a:t>
-            </a:r>
-          </a:p>
-        </p:txBody>
-      </p:sp>
-      <p:sp>
-        <p:nvSpPr>
-          <p:cNvPr id="21" name="TextBox 20"/>
           <p:cNvSpPr txBox="1"/>
           <p:nvPr/>
         </p:nvSpPr>
@@ -4738,7 +4412,7 @@
                 </a:solidFill>
                 <a:latin typeface="Calibri"/>
               </a:rPr>
-              <a:t>Taller PI — por que importa</a:t>
+              <a:t>Demo del dia</a:t>
             </a:r>
           </a:p>
         </p:txBody>
@@ -4786,7 +4460,7 @@
                 </a:solidFill>
                 <a:latin typeface="Calibri"/>
               </a:rPr>
-              <a:t>Por que importa al PI:</a:t>
+              <a:t>Herramienta:</a:t>
             </a:r>
             <a:r>
               <a:rPr sz="2000" b="0" i="0">
@@ -4795,7 +4469,7 @@
                 </a:solidFill>
                 <a:latin typeface="Calibri"/>
               </a:rPr>
-              <a:t> VetCare no se dibuja de una sola sentada, y hoy definimos el mapa de fases que vamos a recorrer todo el semestre y en cual de ellas se califica cada entrega.</a:t>
+              <a:t> draw.io · Google Docs</a:t>
             </a:r>
           </a:p>
           <a:p>
@@ -4811,7 +4485,25 @@
                 </a:solidFill>
                 <a:latin typeface="Calibri"/>
               </a:rPr>
-              <a:t>–   En la clase anterior quedo claro el dolor de Huellitas (fichas que se extravian, busquedas eternas y cero metricas); hoy ese dolor se ubica dentro de un ciclo de vida y se le pone nombre a lo que sale de cada etapa.</a:t>
+              <a:t>–   </a:t>
+            </a:r>
+            <a:r>
+              <a:rPr sz="2000" b="1" i="0">
+                <a:solidFill>
+                  <a:srgbClr val="333333"/>
+                </a:solidFill>
+                <a:latin typeface="Calibri"/>
+              </a:rPr>
+              <a:t>Demo:</a:t>
+            </a:r>
+            <a:r>
+              <a:rPr sz="2000" b="0" i="0">
+                <a:solidFill>
+                  <a:srgbClr val="333333"/>
+                </a:solidFill>
+                <a:latin typeface="Calibri"/>
+              </a:rPr>
+              <a:t> El docente arma en vivo en draw.io el ciclo de VetCare en dos versiones, una sola pasada y tres vueltas, y muestra que las cajas son identicas y lo unico que cambia es el recorrido.</a:t>
             </a:r>
           </a:p>
           <a:p>
@@ -4827,7 +4519,7 @@
                 </a:solidFill>
                 <a:latin typeface="Calibri"/>
               </a:rPr>
-              <a:t>–   Los tres casos de matricula se entienden mejor con el ciclo en la mano: aqui vivimos en requisitos y diseño, Programacion II vive en construccion y pruebas, y quien solo cursa Seminario cierra con documento de diseño y prototipo navegable.</a:t>
+              <a:t>–   Mismo dominio VetCare — no otro ejemplo. Aqui se diseña, no se programa.</a:t>
             </a:r>
           </a:p>
         </p:txBody>
@@ -4902,7 +4594,7 @@
         <p:spPr>
           <a:xfrm>
             <a:off x="0" y="0"/>
-            <a:ext cx="12191695" cy="960120"/>
+            <a:ext cx="12191695" cy="1170432"/>
           </a:xfrm>
           <a:prstGeom prst="rect">
             <a:avLst/>
@@ -4944,7 +4636,7 @@
         </p:nvSpPr>
         <p:spPr>
           <a:xfrm>
-            <a:off x="0" y="960120"/>
+            <a:off x="0" y="1170432"/>
             <a:ext cx="12191695" cy="41148"/>
           </a:xfrm>
           <a:prstGeom prst="rect">
@@ -4988,7 +4680,7 @@
         <p:spPr>
           <a:xfrm>
             <a:off x="457200" y="164592"/>
-            <a:ext cx="11277295" cy="502920"/>
+            <a:ext cx="11277295" cy="384048"/>
           </a:xfrm>
           <a:prstGeom prst="rect">
             <a:avLst/>
@@ -5008,7 +4700,7 @@
                 </a:solidFill>
                 <a:latin typeface="Calibri"/>
               </a:rPr>
-              <a:t>Taller PI — punto de partida</a:t>
+              <a:t>Herramientas de hoy</a:t>
             </a:r>
           </a:p>
         </p:txBody>
@@ -5021,8 +4713,8 @@
         </p:nvSpPr>
         <p:spPr>
           <a:xfrm>
-            <a:off x="457200" y="1170432"/>
-            <a:ext cx="11277295" cy="5230368"/>
+            <a:off x="457200" y="566928"/>
+            <a:ext cx="11277295" cy="411480"/>
           </a:xfrm>
           <a:prstGeom prst="rect">
             <a:avLst/>
@@ -5035,58 +4727,633 @@
           </a:bodyPr>
           <a:lstStyle/>
           <a:p>
-            <a:pPr>
-              <a:spcAft>
-                <a:spcPts val="800"/>
-              </a:spcAft>
+            <a:r>
+              <a:rPr sz="1400" b="0" i="0">
+                <a:solidFill>
+                  <a:srgbClr val="B8D8EE"/>
+                </a:solidFill>
+                <a:latin typeface="Calibri"/>
+              </a:rPr>
+              <a:t>Gratis · funcionan en el navegador</a:t>
+            </a:r>
+          </a:p>
+        </p:txBody>
+      </p:sp>
+      <p:sp>
+        <p:nvSpPr>
+          <p:cNvPr id="6" name="Rounded Rectangle 5"/>
+          <p:cNvSpPr/>
+          <p:nvPr/>
+        </p:nvSpPr>
+        <p:spPr>
+          <a:xfrm>
+            <a:off x="457200" y="1591056"/>
+            <a:ext cx="3624986" cy="2331720"/>
+          </a:xfrm>
+          <a:prstGeom prst="roundRect">
+            <a:avLst>
+              <a:gd name="adj" fmla="val 12000"/>
+            </a:avLst>
+          </a:prstGeom>
+          <a:solidFill>
+            <a:srgbClr val="F2F2F2"/>
+          </a:solidFill>
+          <a:ln>
+            <a:noFill/>
+          </a:ln>
+        </p:spPr>
+        <p:style>
+          <a:lnRef idx="1">
+            <a:schemeClr val="accent1"/>
+          </a:lnRef>
+          <a:fillRef idx="3">
+            <a:schemeClr val="accent1"/>
+          </a:fillRef>
+          <a:effectRef idx="2">
+            <a:schemeClr val="accent1"/>
+          </a:effectRef>
+          <a:fontRef idx="minor">
+            <a:schemeClr val="lt1"/>
+          </a:fontRef>
+        </p:style>
+        <p:txBody>
+          <a:bodyPr rtlCol="0" anchor="ctr"/>
+          <a:lstStyle/>
+          <a:p>
+            <a:pPr algn="ctr"/>
+          </a:p>
+        </p:txBody>
+      </p:sp>
+      <p:sp>
+        <p:nvSpPr>
+          <p:cNvPr id="7" name="Rectangle 6"/>
+          <p:cNvSpPr/>
+          <p:nvPr/>
+        </p:nvSpPr>
+        <p:spPr>
+          <a:xfrm>
+            <a:off x="457200" y="1591056"/>
+            <a:ext cx="3624986" cy="64008"/>
+          </a:xfrm>
+          <a:prstGeom prst="rect">
+            <a:avLst/>
+          </a:prstGeom>
+          <a:solidFill>
+            <a:srgbClr val="095292"/>
+          </a:solidFill>
+          <a:ln>
+            <a:noFill/>
+          </a:ln>
+        </p:spPr>
+        <p:style>
+          <a:lnRef idx="1">
+            <a:schemeClr val="accent1"/>
+          </a:lnRef>
+          <a:fillRef idx="3">
+            <a:schemeClr val="accent1"/>
+          </a:fillRef>
+          <a:effectRef idx="2">
+            <a:schemeClr val="accent1"/>
+          </a:effectRef>
+          <a:fontRef idx="minor">
+            <a:schemeClr val="lt1"/>
+          </a:fontRef>
+        </p:style>
+        <p:txBody>
+          <a:bodyPr rtlCol="0" anchor="ctr"/>
+          <a:lstStyle/>
+          <a:p>
+            <a:pPr algn="ctr"/>
+          </a:p>
+        </p:txBody>
+      </p:sp>
+      <p:sp>
+        <p:nvSpPr>
+          <p:cNvPr id="8" name="Rectangle 7"/>
+          <p:cNvSpPr/>
+          <p:nvPr/>
+        </p:nvSpPr>
+        <p:spPr>
+          <a:xfrm>
+            <a:off x="457200" y="1655064"/>
+            <a:ext cx="3624986" cy="27432"/>
+          </a:xfrm>
+          <a:prstGeom prst="rect">
+            <a:avLst/>
+          </a:prstGeom>
+          <a:solidFill>
+            <a:srgbClr val="FFD000"/>
+          </a:solidFill>
+          <a:ln>
+            <a:noFill/>
+          </a:ln>
+        </p:spPr>
+        <p:style>
+          <a:lnRef idx="1">
+            <a:schemeClr val="accent1"/>
+          </a:lnRef>
+          <a:fillRef idx="3">
+            <a:schemeClr val="accent1"/>
+          </a:fillRef>
+          <a:effectRef idx="2">
+            <a:schemeClr val="accent1"/>
+          </a:effectRef>
+          <a:fontRef idx="minor">
+            <a:schemeClr val="lt1"/>
+          </a:fontRef>
+        </p:style>
+        <p:txBody>
+          <a:bodyPr rtlCol="0" anchor="ctr"/>
+          <a:lstStyle/>
+          <a:p>
+            <a:pPr algn="ctr"/>
+          </a:p>
+        </p:txBody>
+      </p:sp>
+      <p:pic>
+        <p:nvPicPr>
+          <p:cNvPr id="9" name="Picture 8" descr="drawio.png"/>
+          <p:cNvPicPr>
+            <a:picLocks noChangeAspect="1"/>
+          </p:cNvPicPr>
+          <p:nvPr/>
+        </p:nvPicPr>
+        <p:blipFill>
+          <a:blip r:embed="rId2"/>
+          <a:stretch>
+            <a:fillRect/>
+          </a:stretch>
+        </p:blipFill>
+        <p:spPr>
+          <a:xfrm>
+            <a:off x="1643329" y="1847087"/>
+            <a:ext cx="1252728" cy="1252728"/>
+          </a:xfrm>
+          <a:prstGeom prst="rect">
+            <a:avLst/>
+          </a:prstGeom>
+        </p:spPr>
+      </p:pic>
+      <p:sp>
+        <p:nvSpPr>
+          <p:cNvPr id="10" name="TextBox 9"/>
+          <p:cNvSpPr txBox="1"/>
+          <p:nvPr/>
+        </p:nvSpPr>
+        <p:spPr>
+          <a:xfrm>
+            <a:off x="530352" y="3191256"/>
+            <a:ext cx="3478682" cy="621792"/>
+          </a:xfrm>
+          <a:prstGeom prst="rect">
+            <a:avLst/>
+          </a:prstGeom>
+          <a:noFill/>
+        </p:spPr>
+        <p:txBody>
+          <a:bodyPr wrap="square" anchor="t"/>
+          <a:lstStyle/>
+          <a:p>
+            <a:pPr algn="ctr"/>
+            <a:r>
+              <a:rPr sz="1300" b="1" i="0">
+                <a:solidFill>
+                  <a:srgbClr val="095292"/>
+                </a:solidFill>
+                <a:latin typeface="Calibri"/>
+              </a:rPr>
+              <a:t>Draw.Io</a:t>
+            </a:r>
+          </a:p>
+          <a:p>
+            <a:pPr algn="ctr">
+              <a:spcBef>
+                <a:spcPts val="200"/>
+              </a:spcBef>
             </a:pPr>
             <a:r>
-              <a:rPr sz="2000" b="0" i="0">
-                <a:solidFill>
-                  <a:srgbClr val="333333"/>
-                </a:solidFill>
-                <a:latin typeface="Calibri"/>
-              </a:rPr>
-              <a:t>–   Huellitas guarda hoy 5.000 fichas en carpetas de carton dentro de un archivador metalico, y las citas del dia se anotan a mano en una libreta que se lleva la auxiliar.</a:t>
-            </a:r>
-          </a:p>
-          <a:p>
-            <a:pPr>
-              <a:spcAft>
-                <a:spcPts val="800"/>
-              </a:spcAft>
+              <a:rPr sz="1000" b="0" i="0">
+                <a:solidFill>
+                  <a:srgbClr val="666666"/>
+                </a:solidFill>
+                <a:latin typeface="Calibri"/>
+              </a:rPr>
+              <a:t>Diagramas UML y de contexto</a:t>
+            </a:r>
+          </a:p>
+        </p:txBody>
+      </p:sp>
+      <p:sp>
+        <p:nvSpPr>
+          <p:cNvPr id="11" name="Rounded Rectangle 10"/>
+          <p:cNvSpPr/>
+          <p:nvPr/>
+        </p:nvSpPr>
+        <p:spPr>
+          <a:xfrm>
+            <a:off x="4283354" y="1591056"/>
+            <a:ext cx="3624986" cy="2331720"/>
+          </a:xfrm>
+          <a:prstGeom prst="roundRect">
+            <a:avLst>
+              <a:gd name="adj" fmla="val 12000"/>
+            </a:avLst>
+          </a:prstGeom>
+          <a:solidFill>
+            <a:srgbClr val="F2F2F2"/>
+          </a:solidFill>
+          <a:ln>
+            <a:noFill/>
+          </a:ln>
+        </p:spPr>
+        <p:style>
+          <a:lnRef idx="1">
+            <a:schemeClr val="accent1"/>
+          </a:lnRef>
+          <a:fillRef idx="3">
+            <a:schemeClr val="accent1"/>
+          </a:fillRef>
+          <a:effectRef idx="2">
+            <a:schemeClr val="accent1"/>
+          </a:effectRef>
+          <a:fontRef idx="minor">
+            <a:schemeClr val="lt1"/>
+          </a:fontRef>
+        </p:style>
+        <p:txBody>
+          <a:bodyPr rtlCol="0" anchor="ctr"/>
+          <a:lstStyle/>
+          <a:p>
+            <a:pPr algn="ctr"/>
+          </a:p>
+        </p:txBody>
+      </p:sp>
+      <p:sp>
+        <p:nvSpPr>
+          <p:cNvPr id="12" name="Rectangle 11"/>
+          <p:cNvSpPr/>
+          <p:nvPr/>
+        </p:nvSpPr>
+        <p:spPr>
+          <a:xfrm>
+            <a:off x="4283354" y="1591056"/>
+            <a:ext cx="3624986" cy="64008"/>
+          </a:xfrm>
+          <a:prstGeom prst="rect">
+            <a:avLst/>
+          </a:prstGeom>
+          <a:solidFill>
+            <a:srgbClr val="095292"/>
+          </a:solidFill>
+          <a:ln>
+            <a:noFill/>
+          </a:ln>
+        </p:spPr>
+        <p:style>
+          <a:lnRef idx="1">
+            <a:schemeClr val="accent1"/>
+          </a:lnRef>
+          <a:fillRef idx="3">
+            <a:schemeClr val="accent1"/>
+          </a:fillRef>
+          <a:effectRef idx="2">
+            <a:schemeClr val="accent1"/>
+          </a:effectRef>
+          <a:fontRef idx="minor">
+            <a:schemeClr val="lt1"/>
+          </a:fontRef>
+        </p:style>
+        <p:txBody>
+          <a:bodyPr rtlCol="0" anchor="ctr"/>
+          <a:lstStyle/>
+          <a:p>
+            <a:pPr algn="ctr"/>
+          </a:p>
+        </p:txBody>
+      </p:sp>
+      <p:sp>
+        <p:nvSpPr>
+          <p:cNvPr id="13" name="Rectangle 12"/>
+          <p:cNvSpPr/>
+          <p:nvPr/>
+        </p:nvSpPr>
+        <p:spPr>
+          <a:xfrm>
+            <a:off x="4283354" y="1655064"/>
+            <a:ext cx="3624986" cy="27432"/>
+          </a:xfrm>
+          <a:prstGeom prst="rect">
+            <a:avLst/>
+          </a:prstGeom>
+          <a:solidFill>
+            <a:srgbClr val="FFD000"/>
+          </a:solidFill>
+          <a:ln>
+            <a:noFill/>
+          </a:ln>
+        </p:spPr>
+        <p:style>
+          <a:lnRef idx="1">
+            <a:schemeClr val="accent1"/>
+          </a:lnRef>
+          <a:fillRef idx="3">
+            <a:schemeClr val="accent1"/>
+          </a:fillRef>
+          <a:effectRef idx="2">
+            <a:schemeClr val="accent1"/>
+          </a:effectRef>
+          <a:fontRef idx="minor">
+            <a:schemeClr val="lt1"/>
+          </a:fontRef>
+        </p:style>
+        <p:txBody>
+          <a:bodyPr rtlCol="0" anchor="ctr"/>
+          <a:lstStyle/>
+          <a:p>
+            <a:pPr algn="ctr"/>
+          </a:p>
+        </p:txBody>
+      </p:sp>
+      <p:pic>
+        <p:nvPicPr>
+          <p:cNvPr id="14" name="Picture 13" descr="google_docs.png"/>
+          <p:cNvPicPr>
+            <a:picLocks noChangeAspect="1"/>
+          </p:cNvPicPr>
+          <p:nvPr/>
+        </p:nvPicPr>
+        <p:blipFill>
+          <a:blip r:embed="rId3"/>
+          <a:stretch>
+            <a:fillRect/>
+          </a:stretch>
+        </p:blipFill>
+        <p:spPr>
+          <a:xfrm>
+            <a:off x="5469483" y="1847087"/>
+            <a:ext cx="1252728" cy="1252728"/>
+          </a:xfrm>
+          <a:prstGeom prst="rect">
+            <a:avLst/>
+          </a:prstGeom>
+        </p:spPr>
+      </p:pic>
+      <p:sp>
+        <p:nvSpPr>
+          <p:cNvPr id="15" name="TextBox 14"/>
+          <p:cNvSpPr txBox="1"/>
+          <p:nvPr/>
+        </p:nvSpPr>
+        <p:spPr>
+          <a:xfrm>
+            <a:off x="4356506" y="3191256"/>
+            <a:ext cx="3478682" cy="621792"/>
+          </a:xfrm>
+          <a:prstGeom prst="rect">
+            <a:avLst/>
+          </a:prstGeom>
+          <a:noFill/>
+        </p:spPr>
+        <p:txBody>
+          <a:bodyPr wrap="square" anchor="t"/>
+          <a:lstStyle/>
+          <a:p>
+            <a:pPr algn="ctr"/>
+            <a:r>
+              <a:rPr sz="1300" b="1" i="0">
+                <a:solidFill>
+                  <a:srgbClr val="095292"/>
+                </a:solidFill>
+                <a:latin typeface="Calibri"/>
+              </a:rPr>
+              <a:t>google docs</a:t>
+            </a:r>
+          </a:p>
+          <a:p>
+            <a:pPr algn="ctr">
+              <a:spcBef>
+                <a:spcPts val="200"/>
+              </a:spcBef>
             </a:pPr>
             <a:r>
-              <a:rPr sz="2000" b="0" i="0">
-                <a:solidFill>
-                  <a:srgbClr val="333333"/>
-                </a:solidFill>
-                <a:latin typeface="Calibri"/>
-              </a:rPr>
-              <a:t>–   El equipo tiene una lista cruda de necesidades salida de la entrevista, pero nadie ha definido que documento sale de cada etapa ni quien lo firma como aprobado.</a:t>
-            </a:r>
-          </a:p>
-          <a:p>
-            <a:pPr>
-              <a:spcAft>
-                <a:spcPts val="800"/>
-              </a:spcAft>
+              <a:rPr sz="1000" b="0" i="0">
+                <a:solidFill>
+                  <a:srgbClr val="666666"/>
+                </a:solidFill>
+                <a:latin typeface="Calibri"/>
+              </a:rPr>
+              <a:t>Documentos del paquete de diseño</a:t>
+            </a:r>
+          </a:p>
+        </p:txBody>
+      </p:sp>
+      <p:sp>
+        <p:nvSpPr>
+          <p:cNvPr id="16" name="Rounded Rectangle 15"/>
+          <p:cNvSpPr/>
+          <p:nvPr/>
+        </p:nvSpPr>
+        <p:spPr>
+          <a:xfrm>
+            <a:off x="8109508" y="1591056"/>
+            <a:ext cx="3624986" cy="2331720"/>
+          </a:xfrm>
+          <a:prstGeom prst="roundRect">
+            <a:avLst>
+              <a:gd name="adj" fmla="val 12000"/>
+            </a:avLst>
+          </a:prstGeom>
+          <a:solidFill>
+            <a:srgbClr val="F2F2F2"/>
+          </a:solidFill>
+          <a:ln>
+            <a:noFill/>
+          </a:ln>
+        </p:spPr>
+        <p:style>
+          <a:lnRef idx="1">
+            <a:schemeClr val="accent1"/>
+          </a:lnRef>
+          <a:fillRef idx="3">
+            <a:schemeClr val="accent1"/>
+          </a:fillRef>
+          <a:effectRef idx="2">
+            <a:schemeClr val="accent1"/>
+          </a:effectRef>
+          <a:fontRef idx="minor">
+            <a:schemeClr val="lt1"/>
+          </a:fontRef>
+        </p:style>
+        <p:txBody>
+          <a:bodyPr rtlCol="0" anchor="ctr"/>
+          <a:lstStyle/>
+          <a:p>
+            <a:pPr algn="ctr"/>
+          </a:p>
+        </p:txBody>
+      </p:sp>
+      <p:sp>
+        <p:nvSpPr>
+          <p:cNvPr id="17" name="Rectangle 16"/>
+          <p:cNvSpPr/>
+          <p:nvPr/>
+        </p:nvSpPr>
+        <p:spPr>
+          <a:xfrm>
+            <a:off x="8109508" y="1591056"/>
+            <a:ext cx="3624986" cy="64008"/>
+          </a:xfrm>
+          <a:prstGeom prst="rect">
+            <a:avLst/>
+          </a:prstGeom>
+          <a:solidFill>
+            <a:srgbClr val="095292"/>
+          </a:solidFill>
+          <a:ln>
+            <a:noFill/>
+          </a:ln>
+        </p:spPr>
+        <p:style>
+          <a:lnRef idx="1">
+            <a:schemeClr val="accent1"/>
+          </a:lnRef>
+          <a:fillRef idx="3">
+            <a:schemeClr val="accent1"/>
+          </a:fillRef>
+          <a:effectRef idx="2">
+            <a:schemeClr val="accent1"/>
+          </a:effectRef>
+          <a:fontRef idx="minor">
+            <a:schemeClr val="lt1"/>
+          </a:fontRef>
+        </p:style>
+        <p:txBody>
+          <a:bodyPr rtlCol="0" anchor="ctr"/>
+          <a:lstStyle/>
+          <a:p>
+            <a:pPr algn="ctr"/>
+          </a:p>
+        </p:txBody>
+      </p:sp>
+      <p:sp>
+        <p:nvSpPr>
+          <p:cNvPr id="18" name="Rectangle 17"/>
+          <p:cNvSpPr/>
+          <p:nvPr/>
+        </p:nvSpPr>
+        <p:spPr>
+          <a:xfrm>
+            <a:off x="8109508" y="1655064"/>
+            <a:ext cx="3624986" cy="27432"/>
+          </a:xfrm>
+          <a:prstGeom prst="rect">
+            <a:avLst/>
+          </a:prstGeom>
+          <a:solidFill>
+            <a:srgbClr val="FFD000"/>
+          </a:solidFill>
+          <a:ln>
+            <a:noFill/>
+          </a:ln>
+        </p:spPr>
+        <p:style>
+          <a:lnRef idx="1">
+            <a:schemeClr val="accent1"/>
+          </a:lnRef>
+          <a:fillRef idx="3">
+            <a:schemeClr val="accent1"/>
+          </a:fillRef>
+          <a:effectRef idx="2">
+            <a:schemeClr val="accent1"/>
+          </a:effectRef>
+          <a:fontRef idx="minor">
+            <a:schemeClr val="lt1"/>
+          </a:fontRef>
+        </p:style>
+        <p:txBody>
+          <a:bodyPr rtlCol="0" anchor="ctr"/>
+          <a:lstStyle/>
+          <a:p>
+            <a:pPr algn="ctr"/>
+          </a:p>
+        </p:txBody>
+      </p:sp>
+      <p:pic>
+        <p:nvPicPr>
+          <p:cNvPr id="19" name="Picture 18" descr="examlab.png"/>
+          <p:cNvPicPr>
+            <a:picLocks noChangeAspect="1"/>
+          </p:cNvPicPr>
+          <p:nvPr/>
+        </p:nvPicPr>
+        <p:blipFill>
+          <a:blip r:embed="rId4"/>
+          <a:stretch>
+            <a:fillRect/>
+          </a:stretch>
+        </p:blipFill>
+        <p:spPr>
+          <a:xfrm>
+            <a:off x="9295638" y="1847087"/>
+            <a:ext cx="1252728" cy="1252728"/>
+          </a:xfrm>
+          <a:prstGeom prst="rect">
+            <a:avLst/>
+          </a:prstGeom>
+        </p:spPr>
+      </p:pic>
+      <p:sp>
+        <p:nvSpPr>
+          <p:cNvPr id="20" name="TextBox 19"/>
+          <p:cNvSpPr txBox="1"/>
+          <p:nvPr/>
+        </p:nvSpPr>
+        <p:spPr>
+          <a:xfrm>
+            <a:off x="8182660" y="3191256"/>
+            <a:ext cx="3478682" cy="621792"/>
+          </a:xfrm>
+          <a:prstGeom prst="rect">
+            <a:avLst/>
+          </a:prstGeom>
+          <a:noFill/>
+        </p:spPr>
+        <p:txBody>
+          <a:bodyPr wrap="square" anchor="t"/>
+          <a:lstStyle/>
+          <a:p>
+            <a:pPr algn="ctr"/>
+            <a:r>
+              <a:rPr sz="1300" b="1" i="0">
+                <a:solidFill>
+                  <a:srgbClr val="095292"/>
+                </a:solidFill>
+                <a:latin typeface="Calibri"/>
+              </a:rPr>
+              <a:t>la plataforma del curso</a:t>
+            </a:r>
+          </a:p>
+          <a:p>
+            <a:pPr algn="ctr">
+              <a:spcBef>
+                <a:spcPts val="200"/>
+              </a:spcBef>
             </a:pPr>
             <a:r>
-              <a:rPr sz="2000" b="0" i="0">
-                <a:solidFill>
-                  <a:srgbClr val="333333"/>
-                </a:solidFill>
-                <a:latin typeface="Calibri"/>
-              </a:rPr>
-              <a:t>–   No existe ni una linea de codigo ni un diagrama formal: se parte de cero y el unico insumo real es lo que dijo la clinica.</a:t>
-            </a:r>
-          </a:p>
-        </p:txBody>
-      </p:sp>
-      <p:sp>
-        <p:nvSpPr>
-          <p:cNvPr id="6" name="TextBox 5"/>
+              <a:rPr sz="1000" b="0" i="0">
+                <a:solidFill>
+                  <a:srgbClr val="666666"/>
+                </a:solidFill>
+                <a:latin typeface="Calibri"/>
+              </a:rPr>
+              <a:t>Entrega del taller · en la fecha que indique el docente</a:t>
+            </a:r>
+          </a:p>
+        </p:txBody>
+      </p:sp>
+      <p:sp>
+        <p:nvSpPr>
+          <p:cNvPr id="21" name="TextBox 20"/>
           <p:cNvSpPr txBox="1"/>
           <p:nvPr/>
         </p:nvSpPr>
@@ -5260,111 +5527,21 @@
                 </a:solidFill>
                 <a:latin typeface="Calibri"/>
               </a:rPr>
-              <a:t>Taller PI — pasos guiados</a:t>
-            </a:r>
-          </a:p>
-        </p:txBody>
-      </p:sp>
-      <p:sp>
-        <p:nvSpPr>
-          <p:cNvPr id="5" name="Rounded Rectangle 4"/>
-          <p:cNvSpPr/>
-          <p:nvPr/>
-        </p:nvSpPr>
-        <p:spPr>
-          <a:xfrm>
-            <a:off x="457200" y="1234440"/>
-            <a:ext cx="11277295" cy="950976"/>
-          </a:xfrm>
-          <a:prstGeom prst="roundRect">
-            <a:avLst>
-              <a:gd name="adj" fmla="val 12000"/>
-            </a:avLst>
-          </a:prstGeom>
-          <a:solidFill>
-            <a:srgbClr val="F2F2F2"/>
-          </a:solidFill>
-          <a:ln>
-            <a:noFill/>
-          </a:ln>
-        </p:spPr>
-        <p:style>
-          <a:lnRef idx="1">
-            <a:schemeClr val="accent1"/>
-          </a:lnRef>
-          <a:fillRef idx="3">
-            <a:schemeClr val="accent1"/>
-          </a:fillRef>
-          <a:effectRef idx="2">
-            <a:schemeClr val="accent1"/>
-          </a:effectRef>
-          <a:fontRef idx="minor">
-            <a:schemeClr val="lt1"/>
-          </a:fontRef>
-        </p:style>
-        <p:txBody>
-          <a:bodyPr rtlCol="0" anchor="ctr"/>
-          <a:lstStyle/>
-          <a:p>
-            <a:pPr algn="ctr"/>
-          </a:p>
-        </p:txBody>
-      </p:sp>
-      <p:sp>
-        <p:nvSpPr>
-          <p:cNvPr id="6" name="Rounded Rectangle 5"/>
-          <p:cNvSpPr/>
-          <p:nvPr/>
-        </p:nvSpPr>
-        <p:spPr>
-          <a:xfrm>
-            <a:off x="594360" y="1490472"/>
-            <a:ext cx="438912" cy="438912"/>
-          </a:xfrm>
-          <a:prstGeom prst="roundRect">
-            <a:avLst>
-              <a:gd name="adj" fmla="val 12000"/>
-            </a:avLst>
-          </a:prstGeom>
-          <a:solidFill>
-            <a:srgbClr val="095292"/>
-          </a:solidFill>
-          <a:ln>
-            <a:noFill/>
-          </a:ln>
-        </p:spPr>
-        <p:style>
-          <a:lnRef idx="1">
-            <a:schemeClr val="accent1"/>
-          </a:lnRef>
-          <a:fillRef idx="3">
-            <a:schemeClr val="accent1"/>
-          </a:fillRef>
-          <a:effectRef idx="2">
-            <a:schemeClr val="accent1"/>
-          </a:effectRef>
-          <a:fontRef idx="minor">
-            <a:schemeClr val="lt1"/>
-          </a:fontRef>
-        </p:style>
-        <p:txBody>
-          <a:bodyPr rtlCol="0" anchor="ctr"/>
-          <a:lstStyle/>
-          <a:p>
-            <a:pPr algn="ctr"/>
-          </a:p>
-        </p:txBody>
-      </p:sp>
-      <p:sp>
-        <p:nvSpPr>
-          <p:cNvPr id="7" name="TextBox 6"/>
+              <a:t>Taller PI — por que importa</a:t>
+            </a:r>
+          </a:p>
+        </p:txBody>
+      </p:sp>
+      <p:sp>
+        <p:nvSpPr>
+          <p:cNvPr id="5" name="TextBox 4"/>
           <p:cNvSpPr txBox="1"/>
           <p:nvPr/>
         </p:nvSpPr>
         <p:spPr>
           <a:xfrm>
-            <a:off x="594360" y="1490472"/>
-            <a:ext cx="438912" cy="438912"/>
+            <a:off x="457200" y="1170432"/>
+            <a:ext cx="11277295" cy="5230368"/>
           </a:xfrm>
           <a:prstGeom prst="rect">
             <a:avLst/>
@@ -5372,677 +5549,81 @@
           <a:noFill/>
         </p:spPr>
         <p:txBody>
-          <a:bodyPr wrap="square" anchor="ctr"/>
-          <a:lstStyle/>
-          <a:p>
-            <a:pPr algn="ctr"/>
-            <a:r>
-              <a:rPr sz="1600" b="1" i="0">
-                <a:solidFill>
-                  <a:srgbClr val="FFFFFF"/>
-                </a:solidFill>
-                <a:latin typeface="Calibri"/>
-              </a:rPr>
-              <a:t>1</a:t>
-            </a:r>
-          </a:p>
-        </p:txBody>
-      </p:sp>
-      <p:sp>
-        <p:nvSpPr>
-          <p:cNvPr id="8" name="TextBox 7"/>
-          <p:cNvSpPr txBox="1"/>
-          <p:nvPr/>
-        </p:nvSpPr>
-        <p:spPr>
-          <a:xfrm>
-            <a:off x="1188720" y="1325880"/>
-            <a:ext cx="10271455" cy="786384"/>
-          </a:xfrm>
-          <a:prstGeom prst="rect">
-            <a:avLst/>
-          </a:prstGeom>
-          <a:noFill/>
-        </p:spPr>
-        <p:txBody>
-          <a:bodyPr wrap="square" anchor="ctr"/>
-          <a:lstStyle/>
-          <a:p>
-            <a:r>
-              <a:rPr sz="1400" b="1" i="0">
-                <a:solidFill>
-                  <a:srgbClr val="095292"/>
-                </a:solidFill>
-                <a:latin typeface="Calibri"/>
-              </a:rPr>
-              <a:t>En Google Docs cree la tabla de cuatro columnas (Fase / Pregunta que responde / Artefacto concreto de VetCare / Quien lo aprueba) y llenela con las cinco fases; en la columna del artefacto esta prohibido escribir generalidades: debe decir cosas como 'Lista RF-01 a RF-12 de Huellitas' o 'Mockup de la ficha del paciente'.</a:t>
-            </a:r>
-          </a:p>
-        </p:txBody>
-      </p:sp>
-      <p:sp>
-        <p:nvSpPr>
-          <p:cNvPr id="9" name="Rounded Rectangle 8"/>
-          <p:cNvSpPr/>
-          <p:nvPr/>
-        </p:nvSpPr>
-        <p:spPr>
-          <a:xfrm>
-            <a:off x="457200" y="2276856"/>
-            <a:ext cx="11277295" cy="950976"/>
-          </a:xfrm>
-          <a:prstGeom prst="roundRect">
-            <a:avLst>
-              <a:gd name="adj" fmla="val 12000"/>
-            </a:avLst>
-          </a:prstGeom>
-          <a:solidFill>
-            <a:srgbClr val="E8F4FA"/>
-          </a:solidFill>
-          <a:ln>
-            <a:noFill/>
-          </a:ln>
-        </p:spPr>
-        <p:style>
-          <a:lnRef idx="1">
-            <a:schemeClr val="accent1"/>
-          </a:lnRef>
-          <a:fillRef idx="3">
-            <a:schemeClr val="accent1"/>
-          </a:fillRef>
-          <a:effectRef idx="2">
-            <a:schemeClr val="accent1"/>
-          </a:effectRef>
-          <a:fontRef idx="minor">
-            <a:schemeClr val="lt1"/>
-          </a:fontRef>
-        </p:style>
-        <p:txBody>
-          <a:bodyPr rtlCol="0" anchor="ctr"/>
-          <a:lstStyle/>
-          <a:p>
-            <a:pPr algn="ctr"/>
-          </a:p>
-        </p:txBody>
-      </p:sp>
-      <p:sp>
-        <p:nvSpPr>
-          <p:cNvPr id="10" name="Rounded Rectangle 9"/>
-          <p:cNvSpPr/>
-          <p:nvPr/>
-        </p:nvSpPr>
-        <p:spPr>
-          <a:xfrm>
-            <a:off x="594360" y="2532888"/>
-            <a:ext cx="438912" cy="438912"/>
-          </a:xfrm>
-          <a:prstGeom prst="roundRect">
-            <a:avLst>
-              <a:gd name="adj" fmla="val 12000"/>
-            </a:avLst>
-          </a:prstGeom>
-          <a:solidFill>
-            <a:srgbClr val="095292"/>
-          </a:solidFill>
-          <a:ln>
-            <a:noFill/>
-          </a:ln>
-        </p:spPr>
-        <p:style>
-          <a:lnRef idx="1">
-            <a:schemeClr val="accent1"/>
-          </a:lnRef>
-          <a:fillRef idx="3">
-            <a:schemeClr val="accent1"/>
-          </a:fillRef>
-          <a:effectRef idx="2">
-            <a:schemeClr val="accent1"/>
-          </a:effectRef>
-          <a:fontRef idx="minor">
-            <a:schemeClr val="lt1"/>
-          </a:fontRef>
-        </p:style>
-        <p:txBody>
-          <a:bodyPr rtlCol="0" anchor="ctr"/>
-          <a:lstStyle/>
-          <a:p>
-            <a:pPr algn="ctr"/>
-          </a:p>
-        </p:txBody>
-      </p:sp>
-      <p:sp>
-        <p:nvSpPr>
-          <p:cNvPr id="11" name="TextBox 10"/>
-          <p:cNvSpPr txBox="1"/>
-          <p:nvPr/>
-        </p:nvSpPr>
-        <p:spPr>
-          <a:xfrm>
-            <a:off x="594360" y="2532888"/>
-            <a:ext cx="438912" cy="438912"/>
-          </a:xfrm>
-          <a:prstGeom prst="rect">
-            <a:avLst/>
-          </a:prstGeom>
-          <a:noFill/>
-        </p:spPr>
-        <p:txBody>
-          <a:bodyPr wrap="square" anchor="ctr"/>
-          <a:lstStyle/>
-          <a:p>
-            <a:pPr algn="ctr"/>
-            <a:r>
-              <a:rPr sz="1600" b="1" i="0">
-                <a:solidFill>
-                  <a:srgbClr val="FFFFFF"/>
-                </a:solidFill>
-                <a:latin typeface="Calibri"/>
-              </a:rPr>
-              <a:t>2</a:t>
-            </a:r>
-          </a:p>
-        </p:txBody>
-      </p:sp>
-      <p:sp>
-        <p:nvSpPr>
-          <p:cNvPr id="12" name="TextBox 11"/>
-          <p:cNvSpPr txBox="1"/>
-          <p:nvPr/>
-        </p:nvSpPr>
-        <p:spPr>
-          <a:xfrm>
-            <a:off x="1188720" y="2368296"/>
-            <a:ext cx="10271455" cy="786384"/>
-          </a:xfrm>
-          <a:prstGeom prst="rect">
-            <a:avLst/>
-          </a:prstGeom>
-          <a:noFill/>
-        </p:spPr>
-        <p:txBody>
-          <a:bodyPr wrap="square" anchor="ctr"/>
-          <a:lstStyle/>
-          <a:p>
-            <a:r>
-              <a:rPr sz="1500" b="1" i="0">
-                <a:solidFill>
-                  <a:srgbClr val="095292"/>
-                </a:solidFill>
-                <a:latin typeface="Calibri"/>
-              </a:rPr>
-              <a:t>Marque con relleno amarillo la fila de la fase donde esta el equipo hoy y escriba debajo dos evidencias verificables que lo demuestren (por ejemplo: 'existe la entrevista transcrita' y 'no existe ningun diagrama aprobado').</a:t>
-            </a:r>
-          </a:p>
-        </p:txBody>
-      </p:sp>
-      <p:sp>
-        <p:nvSpPr>
-          <p:cNvPr id="13" name="Rounded Rectangle 12"/>
-          <p:cNvSpPr/>
-          <p:nvPr/>
-        </p:nvSpPr>
-        <p:spPr>
-          <a:xfrm>
-            <a:off x="457200" y="3319272"/>
-            <a:ext cx="11277295" cy="950976"/>
-          </a:xfrm>
-          <a:prstGeom prst="roundRect">
-            <a:avLst>
-              <a:gd name="adj" fmla="val 12000"/>
-            </a:avLst>
-          </a:prstGeom>
-          <a:solidFill>
-            <a:srgbClr val="F2F2F2"/>
-          </a:solidFill>
-          <a:ln>
-            <a:noFill/>
-          </a:ln>
-        </p:spPr>
-        <p:style>
-          <a:lnRef idx="1">
-            <a:schemeClr val="accent1"/>
-          </a:lnRef>
-          <a:fillRef idx="3">
-            <a:schemeClr val="accent1"/>
-          </a:fillRef>
-          <a:effectRef idx="2">
-            <a:schemeClr val="accent1"/>
-          </a:effectRef>
-          <a:fontRef idx="minor">
-            <a:schemeClr val="lt1"/>
-          </a:fontRef>
-        </p:style>
-        <p:txBody>
-          <a:bodyPr rtlCol="0" anchor="ctr"/>
-          <a:lstStyle/>
-          <a:p>
-            <a:pPr algn="ctr"/>
-          </a:p>
-        </p:txBody>
-      </p:sp>
-      <p:sp>
-        <p:nvSpPr>
-          <p:cNvPr id="14" name="Rounded Rectangle 13"/>
-          <p:cNvSpPr/>
-          <p:nvPr/>
-        </p:nvSpPr>
-        <p:spPr>
-          <a:xfrm>
-            <a:off x="594360" y="3575304"/>
-            <a:ext cx="438912" cy="438912"/>
-          </a:xfrm>
-          <a:prstGeom prst="roundRect">
-            <a:avLst>
-              <a:gd name="adj" fmla="val 12000"/>
-            </a:avLst>
-          </a:prstGeom>
-          <a:solidFill>
-            <a:srgbClr val="095292"/>
-          </a:solidFill>
-          <a:ln>
-            <a:noFill/>
-          </a:ln>
-        </p:spPr>
-        <p:style>
-          <a:lnRef idx="1">
-            <a:schemeClr val="accent1"/>
-          </a:lnRef>
-          <a:fillRef idx="3">
-            <a:schemeClr val="accent1"/>
-          </a:fillRef>
-          <a:effectRef idx="2">
-            <a:schemeClr val="accent1"/>
-          </a:effectRef>
-          <a:fontRef idx="minor">
-            <a:schemeClr val="lt1"/>
-          </a:fontRef>
-        </p:style>
-        <p:txBody>
-          <a:bodyPr rtlCol="0" anchor="ctr"/>
-          <a:lstStyle/>
-          <a:p>
-            <a:pPr algn="ctr"/>
-          </a:p>
-        </p:txBody>
-      </p:sp>
-      <p:sp>
-        <p:nvSpPr>
-          <p:cNvPr id="15" name="TextBox 14"/>
-          <p:cNvSpPr txBox="1"/>
-          <p:nvPr/>
-        </p:nvSpPr>
-        <p:spPr>
-          <a:xfrm>
-            <a:off x="594360" y="3575304"/>
-            <a:ext cx="438912" cy="438912"/>
-          </a:xfrm>
-          <a:prstGeom prst="rect">
-            <a:avLst/>
-          </a:prstGeom>
-          <a:noFill/>
-        </p:spPr>
-        <p:txBody>
-          <a:bodyPr wrap="square" anchor="ctr"/>
-          <a:lstStyle/>
-          <a:p>
-            <a:pPr algn="ctr"/>
-            <a:r>
-              <a:rPr sz="1600" b="1" i="0">
-                <a:solidFill>
-                  <a:srgbClr val="FFFFFF"/>
-                </a:solidFill>
-                <a:latin typeface="Calibri"/>
-              </a:rPr>
-              <a:t>3</a:t>
-            </a:r>
-          </a:p>
-        </p:txBody>
-      </p:sp>
-      <p:sp>
-        <p:nvSpPr>
-          <p:cNvPr id="16" name="TextBox 15"/>
-          <p:cNvSpPr txBox="1"/>
-          <p:nvPr/>
-        </p:nvSpPr>
-        <p:spPr>
-          <a:xfrm>
-            <a:off x="1188720" y="3410712"/>
-            <a:ext cx="10271455" cy="786384"/>
-          </a:xfrm>
-          <a:prstGeom prst="rect">
-            <a:avLst/>
-          </a:prstGeom>
-          <a:noFill/>
-        </p:spPr>
-        <p:txBody>
-          <a:bodyPr wrap="square" anchor="ctr"/>
-          <a:lstStyle/>
-          <a:p>
-            <a:r>
-              <a:rPr sz="1500" b="1" i="0">
-                <a:solidFill>
-                  <a:srgbClr val="095292"/>
-                </a:solidFill>
-                <a:latin typeface="Calibri"/>
-              </a:rPr>
-              <a:t>En draw.io dibuje el recorrido lineal de VetCare: cinco cajas en fila, y sobre cada flecha escriba el artefacto que se entrega para poder pasar a la siguiente fase.</a:t>
-            </a:r>
-          </a:p>
-        </p:txBody>
-      </p:sp>
-      <p:sp>
-        <p:nvSpPr>
-          <p:cNvPr id="17" name="Rounded Rectangle 16"/>
-          <p:cNvSpPr/>
-          <p:nvPr/>
-        </p:nvSpPr>
-        <p:spPr>
-          <a:xfrm>
-            <a:off x="457200" y="4361688"/>
-            <a:ext cx="11277295" cy="950976"/>
-          </a:xfrm>
-          <a:prstGeom prst="roundRect">
-            <a:avLst>
-              <a:gd name="adj" fmla="val 12000"/>
-            </a:avLst>
-          </a:prstGeom>
-          <a:solidFill>
-            <a:srgbClr val="E8F4FA"/>
-          </a:solidFill>
-          <a:ln>
-            <a:noFill/>
-          </a:ln>
-        </p:spPr>
-        <p:style>
-          <a:lnRef idx="1">
-            <a:schemeClr val="accent1"/>
-          </a:lnRef>
-          <a:fillRef idx="3">
-            <a:schemeClr val="accent1"/>
-          </a:fillRef>
-          <a:effectRef idx="2">
-            <a:schemeClr val="accent1"/>
-          </a:effectRef>
-          <a:fontRef idx="minor">
-            <a:schemeClr val="lt1"/>
-          </a:fontRef>
-        </p:style>
-        <p:txBody>
-          <a:bodyPr rtlCol="0" anchor="ctr"/>
-          <a:lstStyle/>
-          <a:p>
-            <a:pPr algn="ctr"/>
-          </a:p>
-        </p:txBody>
-      </p:sp>
-      <p:sp>
-        <p:nvSpPr>
-          <p:cNvPr id="18" name="Rounded Rectangle 17"/>
-          <p:cNvSpPr/>
-          <p:nvPr/>
-        </p:nvSpPr>
-        <p:spPr>
-          <a:xfrm>
-            <a:off x="594360" y="4617720"/>
-            <a:ext cx="438912" cy="438912"/>
-          </a:xfrm>
-          <a:prstGeom prst="roundRect">
-            <a:avLst>
-              <a:gd name="adj" fmla="val 12000"/>
-            </a:avLst>
-          </a:prstGeom>
-          <a:solidFill>
-            <a:srgbClr val="095292"/>
-          </a:solidFill>
-          <a:ln>
-            <a:noFill/>
-          </a:ln>
-        </p:spPr>
-        <p:style>
-          <a:lnRef idx="1">
-            <a:schemeClr val="accent1"/>
-          </a:lnRef>
-          <a:fillRef idx="3">
-            <a:schemeClr val="accent1"/>
-          </a:fillRef>
-          <a:effectRef idx="2">
-            <a:schemeClr val="accent1"/>
-          </a:effectRef>
-          <a:fontRef idx="minor">
-            <a:schemeClr val="lt1"/>
-          </a:fontRef>
-        </p:style>
-        <p:txBody>
-          <a:bodyPr rtlCol="0" anchor="ctr"/>
-          <a:lstStyle/>
-          <a:p>
-            <a:pPr algn="ctr"/>
-          </a:p>
-        </p:txBody>
-      </p:sp>
-      <p:sp>
-        <p:nvSpPr>
-          <p:cNvPr id="19" name="TextBox 18"/>
-          <p:cNvSpPr txBox="1"/>
-          <p:nvPr/>
-        </p:nvSpPr>
-        <p:spPr>
-          <a:xfrm>
-            <a:off x="594360" y="4617720"/>
-            <a:ext cx="438912" cy="438912"/>
-          </a:xfrm>
-          <a:prstGeom prst="rect">
-            <a:avLst/>
-          </a:prstGeom>
-          <a:noFill/>
-        </p:spPr>
-        <p:txBody>
-          <a:bodyPr wrap="square" anchor="ctr"/>
-          <a:lstStyle/>
-          <a:p>
-            <a:pPr algn="ctr"/>
-            <a:r>
-              <a:rPr sz="1600" b="1" i="0">
-                <a:solidFill>
-                  <a:srgbClr val="FFFFFF"/>
-                </a:solidFill>
-                <a:latin typeface="Calibri"/>
-              </a:rPr>
-              <a:t>4</a:t>
-            </a:r>
-          </a:p>
-        </p:txBody>
-      </p:sp>
-      <p:sp>
-        <p:nvSpPr>
-          <p:cNvPr id="20" name="TextBox 19"/>
-          <p:cNvSpPr txBox="1"/>
-          <p:nvPr/>
-        </p:nvSpPr>
-        <p:spPr>
-          <a:xfrm>
-            <a:off x="1188720" y="4453128"/>
-            <a:ext cx="10271455" cy="786384"/>
-          </a:xfrm>
-          <a:prstGeom prst="rect">
-            <a:avLst/>
-          </a:prstGeom>
-          <a:noFill/>
-        </p:spPr>
-        <p:txBody>
-          <a:bodyPr wrap="square" anchor="ctr"/>
-          <a:lstStyle/>
-          <a:p>
-            <a:r>
-              <a:rPr sz="1400" b="1" i="0">
-                <a:solidFill>
-                  <a:srgbClr val="095292"/>
-                </a:solidFill>
-                <a:latin typeface="Calibri"/>
-              </a:rPr>
-              <a:t>Duplique la pagina en draw.io y dibuje el recorrido en tres vueltas: las mismas cinco cajas, pero con las vueltas rotuladas Incremento 1 (ficha del paciente), Incremento 2 (historia clinica y busqueda) e Incremento 3 (reportes y metricas), y una flecha de retroalimentacion desde la clinica hacia requisitos.</a:t>
-            </a:r>
-          </a:p>
-        </p:txBody>
-      </p:sp>
-      <p:sp>
-        <p:nvSpPr>
-          <p:cNvPr id="21" name="Rounded Rectangle 20"/>
-          <p:cNvSpPr/>
-          <p:nvPr/>
-        </p:nvSpPr>
-        <p:spPr>
-          <a:xfrm>
-            <a:off x="457200" y="5404104"/>
-            <a:ext cx="11277295" cy="950976"/>
-          </a:xfrm>
-          <a:prstGeom prst="roundRect">
-            <a:avLst>
-              <a:gd name="adj" fmla="val 12000"/>
-            </a:avLst>
-          </a:prstGeom>
-          <a:solidFill>
-            <a:srgbClr val="F2F2F2"/>
-          </a:solidFill>
-          <a:ln>
-            <a:noFill/>
-          </a:ln>
-        </p:spPr>
-        <p:style>
-          <a:lnRef idx="1">
-            <a:schemeClr val="accent1"/>
-          </a:lnRef>
-          <a:fillRef idx="3">
-            <a:schemeClr val="accent1"/>
-          </a:fillRef>
-          <a:effectRef idx="2">
-            <a:schemeClr val="accent1"/>
-          </a:effectRef>
-          <a:fontRef idx="minor">
-            <a:schemeClr val="lt1"/>
-          </a:fontRef>
-        </p:style>
-        <p:txBody>
-          <a:bodyPr rtlCol="0" anchor="ctr"/>
-          <a:lstStyle/>
-          <a:p>
-            <a:pPr algn="ctr"/>
-          </a:p>
-        </p:txBody>
-      </p:sp>
-      <p:sp>
-        <p:nvSpPr>
-          <p:cNvPr id="22" name="Rounded Rectangle 21"/>
-          <p:cNvSpPr/>
-          <p:nvPr/>
-        </p:nvSpPr>
-        <p:spPr>
-          <a:xfrm>
-            <a:off x="594360" y="5660136"/>
-            <a:ext cx="438912" cy="438912"/>
-          </a:xfrm>
-          <a:prstGeom prst="roundRect">
-            <a:avLst>
-              <a:gd name="adj" fmla="val 12000"/>
-            </a:avLst>
-          </a:prstGeom>
-          <a:solidFill>
-            <a:srgbClr val="095292"/>
-          </a:solidFill>
-          <a:ln>
-            <a:noFill/>
-          </a:ln>
-        </p:spPr>
-        <p:style>
-          <a:lnRef idx="1">
-            <a:schemeClr val="accent1"/>
-          </a:lnRef>
-          <a:fillRef idx="3">
-            <a:schemeClr val="accent1"/>
-          </a:fillRef>
-          <a:effectRef idx="2">
-            <a:schemeClr val="accent1"/>
-          </a:effectRef>
-          <a:fontRef idx="minor">
-            <a:schemeClr val="lt1"/>
-          </a:fontRef>
-        </p:style>
-        <p:txBody>
-          <a:bodyPr rtlCol="0" anchor="ctr"/>
-          <a:lstStyle/>
-          <a:p>
-            <a:pPr algn="ctr"/>
-          </a:p>
-        </p:txBody>
-      </p:sp>
-      <p:sp>
-        <p:nvSpPr>
-          <p:cNvPr id="23" name="TextBox 22"/>
-          <p:cNvSpPr txBox="1"/>
-          <p:nvPr/>
-        </p:nvSpPr>
-        <p:spPr>
-          <a:xfrm>
-            <a:off x="594360" y="5660136"/>
-            <a:ext cx="438912" cy="438912"/>
-          </a:xfrm>
-          <a:prstGeom prst="rect">
-            <a:avLst/>
-          </a:prstGeom>
-          <a:noFill/>
-        </p:spPr>
-        <p:txBody>
-          <a:bodyPr wrap="square" anchor="ctr"/>
-          <a:lstStyle/>
-          <a:p>
-            <a:pPr algn="ctr"/>
-            <a:r>
-              <a:rPr sz="1600" b="1" i="0">
-                <a:solidFill>
-                  <a:srgbClr val="FFFFFF"/>
-                </a:solidFill>
-                <a:latin typeface="Calibri"/>
-              </a:rPr>
-              <a:t>5</a:t>
-            </a:r>
-          </a:p>
-        </p:txBody>
-      </p:sp>
-      <p:sp>
-        <p:nvSpPr>
-          <p:cNvPr id="24" name="TextBox 23"/>
-          <p:cNvSpPr txBox="1"/>
-          <p:nvPr/>
-        </p:nvSpPr>
-        <p:spPr>
-          <a:xfrm>
-            <a:off x="1188720" y="5495544"/>
-            <a:ext cx="10271455" cy="786384"/>
-          </a:xfrm>
-          <a:prstGeom prst="rect">
-            <a:avLst/>
-          </a:prstGeom>
-          <a:noFill/>
-        </p:spPr>
-        <p:txBody>
-          <a:bodyPr wrap="square" anchor="ctr"/>
-          <a:lstStyle/>
-          <a:p>
-            <a:r>
-              <a:rPr sz="1400" b="1" i="0">
-                <a:solidFill>
-                  <a:srgbClr val="095292"/>
-                </a:solidFill>
-                <a:latin typeface="Calibri"/>
-              </a:rPr>
-              <a:t>Escriba al final del documento un parrafo de tres renglones titulado 'Producto vs proyecto en VetCare' que responda: cuando termina el proyecto, cuando terminaria el producto y un ejemplo concreto de una solicitud de mantenimiento; exporte a PDF y suba el archivo a la plataforma del curso.</a:t>
-            </a:r>
-          </a:p>
-        </p:txBody>
-      </p:sp>
-      <p:sp>
-        <p:nvSpPr>
-          <p:cNvPr id="25" name="TextBox 24"/>
+          <a:bodyPr wrap="square">
+            <a:spAutoFit/>
+          </a:bodyPr>
+          <a:lstStyle/>
+          <a:p>
+            <a:pPr>
+              <a:spcAft>
+                <a:spcPts val="800"/>
+              </a:spcAft>
+            </a:pPr>
+            <a:r>
+              <a:rPr sz="2000" b="0" i="0">
+                <a:solidFill>
+                  <a:srgbClr val="333333"/>
+                </a:solidFill>
+                <a:latin typeface="Calibri"/>
+              </a:rPr>
+              <a:t>–   </a:t>
+            </a:r>
+            <a:r>
+              <a:rPr sz="2000" b="1" i="0">
+                <a:solidFill>
+                  <a:srgbClr val="333333"/>
+                </a:solidFill>
+                <a:latin typeface="Calibri"/>
+              </a:rPr>
+              <a:t>Por que importa al PI:</a:t>
+            </a:r>
+            <a:r>
+              <a:rPr sz="2000" b="0" i="0">
+                <a:solidFill>
+                  <a:srgbClr val="333333"/>
+                </a:solidFill>
+                <a:latin typeface="Calibri"/>
+              </a:rPr>
+              <a:t> VetCare no se dibuja de una sola sentada, y hoy definimos el mapa de fases que vamos a recorrer todo el semestre y en cual de ellas se califica cada entrega.</a:t>
+            </a:r>
+          </a:p>
+          <a:p>
+            <a:pPr>
+              <a:spcAft>
+                <a:spcPts val="800"/>
+              </a:spcAft>
+            </a:pPr>
+            <a:r>
+              <a:rPr sz="2000" b="0" i="0">
+                <a:solidFill>
+                  <a:srgbClr val="333333"/>
+                </a:solidFill>
+                <a:latin typeface="Calibri"/>
+              </a:rPr>
+              <a:t>–   En la clase anterior quedo claro el dolor de Huellitas (fichas que se extravian, busquedas eternas y cero metricas); hoy ese dolor se ubica dentro de un ciclo de vida y se le pone nombre a lo que sale de cada etapa.</a:t>
+            </a:r>
+          </a:p>
+          <a:p>
+            <a:pPr>
+              <a:spcAft>
+                <a:spcPts val="800"/>
+              </a:spcAft>
+            </a:pPr>
+            <a:r>
+              <a:rPr sz="2000" b="0" i="0">
+                <a:solidFill>
+                  <a:srgbClr val="333333"/>
+                </a:solidFill>
+                <a:latin typeface="Calibri"/>
+              </a:rPr>
+              <a:t>–   Los tres casos de matricula se entienden mejor con el ciclo en la mano: aqui vivimos en requisitos y diseño, Programacion II vive en construccion y pruebas, y quien solo cursa Seminario cierra con documento de diseño y prototipo navegable.</a:t>
+            </a:r>
+          </a:p>
+        </p:txBody>
+      </p:sp>
+      <p:sp>
+        <p:nvSpPr>
+          <p:cNvPr id="6" name="TextBox 5"/>
           <p:cNvSpPr txBox="1"/>
           <p:nvPr/>
         </p:nvSpPr>
@@ -6216,154 +5797,21 @@
                 </a:solidFill>
                 <a:latin typeface="Calibri"/>
               </a:rPr>
-              <a:t>Antes de entregar — autochequeo</a:t>
-            </a:r>
-          </a:p>
-        </p:txBody>
-      </p:sp>
-      <p:sp>
-        <p:nvSpPr>
-          <p:cNvPr id="5" name="Rounded Rectangle 4"/>
-          <p:cNvSpPr/>
-          <p:nvPr/>
-        </p:nvSpPr>
-        <p:spPr>
-          <a:xfrm>
-            <a:off x="457200" y="1261872"/>
-            <a:ext cx="11277295" cy="566928"/>
-          </a:xfrm>
-          <a:prstGeom prst="roundRect">
-            <a:avLst>
-              <a:gd name="adj" fmla="val 12000"/>
-            </a:avLst>
-          </a:prstGeom>
-          <a:solidFill>
-            <a:srgbClr val="F2F2F2"/>
-          </a:solidFill>
-          <a:ln>
-            <a:noFill/>
-          </a:ln>
-        </p:spPr>
-        <p:style>
-          <a:lnRef idx="1">
-            <a:schemeClr val="accent1"/>
-          </a:lnRef>
-          <a:fillRef idx="3">
-            <a:schemeClr val="accent1"/>
-          </a:fillRef>
-          <a:effectRef idx="2">
-            <a:schemeClr val="accent1"/>
-          </a:effectRef>
-          <a:fontRef idx="minor">
-            <a:schemeClr val="lt1"/>
-          </a:fontRef>
-        </p:style>
-        <p:txBody>
-          <a:bodyPr rtlCol="0" anchor="ctr"/>
-          <a:lstStyle/>
-          <a:p>
-            <a:pPr algn="ctr"/>
-          </a:p>
-        </p:txBody>
-      </p:sp>
-      <p:sp>
-        <p:nvSpPr>
-          <p:cNvPr id="6" name="Rectangle 5"/>
-          <p:cNvSpPr/>
-          <p:nvPr/>
-        </p:nvSpPr>
-        <p:spPr>
-          <a:xfrm>
-            <a:off x="640080" y="1408175"/>
-            <a:ext cx="274320" cy="274320"/>
-          </a:xfrm>
-          <a:prstGeom prst="rect">
-            <a:avLst/>
-          </a:prstGeom>
-          <a:solidFill>
-            <a:srgbClr val="FFFFFF"/>
-          </a:solidFill>
-          <a:ln>
-            <a:solidFill>
-              <a:srgbClr val="333333"/>
-            </a:solidFill>
-          </a:ln>
-        </p:spPr>
-        <p:style>
-          <a:lnRef idx="1">
-            <a:schemeClr val="accent1"/>
-          </a:lnRef>
-          <a:fillRef idx="3">
-            <a:schemeClr val="accent1"/>
-          </a:fillRef>
-          <a:effectRef idx="2">
-            <a:schemeClr val="accent1"/>
-          </a:effectRef>
-          <a:fontRef idx="minor">
-            <a:schemeClr val="lt1"/>
-          </a:fontRef>
-        </p:style>
-        <p:txBody>
-          <a:bodyPr rtlCol="0" anchor="ctr"/>
-          <a:lstStyle/>
-          <a:p>
-            <a:pPr algn="ctr"/>
-          </a:p>
-        </p:txBody>
-      </p:sp>
-      <p:sp>
-        <p:nvSpPr>
-          <p:cNvPr id="7" name="Rectangle 6"/>
-          <p:cNvSpPr/>
-          <p:nvPr/>
-        </p:nvSpPr>
-        <p:spPr>
-          <a:xfrm>
-            <a:off x="640080" y="1408175"/>
-            <a:ext cx="73152" cy="274320"/>
-          </a:xfrm>
-          <a:prstGeom prst="rect">
-            <a:avLst/>
-          </a:prstGeom>
-          <a:solidFill>
-            <a:srgbClr val="269CCB"/>
-          </a:solidFill>
-          <a:ln>
-            <a:noFill/>
-          </a:ln>
-        </p:spPr>
-        <p:style>
-          <a:lnRef idx="1">
-            <a:schemeClr val="accent1"/>
-          </a:lnRef>
-          <a:fillRef idx="3">
-            <a:schemeClr val="accent1"/>
-          </a:fillRef>
-          <a:effectRef idx="2">
-            <a:schemeClr val="accent1"/>
-          </a:effectRef>
-          <a:fontRef idx="minor">
-            <a:schemeClr val="lt1"/>
-          </a:fontRef>
-        </p:style>
-        <p:txBody>
-          <a:bodyPr rtlCol="0" anchor="ctr"/>
-          <a:lstStyle/>
-          <a:p>
-            <a:pPr algn="ctr"/>
-          </a:p>
-        </p:txBody>
-      </p:sp>
-      <p:sp>
-        <p:nvSpPr>
-          <p:cNvPr id="8" name="TextBox 7"/>
+              <a:t>Taller PI — punto de partida</a:t>
+            </a:r>
+          </a:p>
+        </p:txBody>
+      </p:sp>
+      <p:sp>
+        <p:nvSpPr>
+          <p:cNvPr id="5" name="TextBox 4"/>
           <p:cNvSpPr txBox="1"/>
           <p:nvPr/>
         </p:nvSpPr>
         <p:spPr>
           <a:xfrm>
-            <a:off x="1097280" y="1353312"/>
-            <a:ext cx="10362895" cy="402336"/>
+            <a:off x="457200" y="1170432"/>
+            <a:ext cx="11277295" cy="5230368"/>
           </a:xfrm>
           <a:prstGeom prst="rect">
             <a:avLst/>
@@ -6371,354 +5819,63 @@
           <a:noFill/>
         </p:spPr>
         <p:txBody>
-          <a:bodyPr wrap="square" anchor="ctr"/>
-          <a:lstStyle/>
-          <a:p>
-            <a:r>
-              <a:rPr sz="1500" b="0" i="0">
+          <a:bodyPr wrap="square">
+            <a:spAutoFit/>
+          </a:bodyPr>
+          <a:lstStyle/>
+          <a:p>
+            <a:pPr>
+              <a:spcAft>
+                <a:spcPts val="800"/>
+              </a:spcAft>
+            </a:pPr>
+            <a:r>
+              <a:rPr sz="2000" b="0" i="0">
                 <a:solidFill>
                   <a:srgbClr val="333333"/>
                 </a:solidFill>
                 <a:latin typeface="Calibri"/>
               </a:rPr>
-              <a:t>Si borro la palabra VetCare de su tabla, esa tabla serviria igual para un cajero automatico o para una tienda de ropa? Si la respuesta es si, todavia no aterrizo nada.</a:t>
-            </a:r>
-          </a:p>
-        </p:txBody>
-      </p:sp>
-      <p:sp>
-        <p:nvSpPr>
-          <p:cNvPr id="9" name="Rounded Rectangle 8"/>
-          <p:cNvSpPr/>
-          <p:nvPr/>
-        </p:nvSpPr>
-        <p:spPr>
-          <a:xfrm>
-            <a:off x="457200" y="1938528"/>
-            <a:ext cx="11277295" cy="566928"/>
-          </a:xfrm>
-          <a:prstGeom prst="roundRect">
-            <a:avLst>
-              <a:gd name="adj" fmla="val 12000"/>
-            </a:avLst>
-          </a:prstGeom>
-          <a:solidFill>
-            <a:srgbClr val="F2F2F2"/>
-          </a:solidFill>
-          <a:ln>
-            <a:noFill/>
-          </a:ln>
-        </p:spPr>
-        <p:style>
-          <a:lnRef idx="1">
-            <a:schemeClr val="accent1"/>
-          </a:lnRef>
-          <a:fillRef idx="3">
-            <a:schemeClr val="accent1"/>
-          </a:fillRef>
-          <a:effectRef idx="2">
-            <a:schemeClr val="accent1"/>
-          </a:effectRef>
-          <a:fontRef idx="minor">
-            <a:schemeClr val="lt1"/>
-          </a:fontRef>
-        </p:style>
-        <p:txBody>
-          <a:bodyPr rtlCol="0" anchor="ctr"/>
-          <a:lstStyle/>
-          <a:p>
-            <a:pPr algn="ctr"/>
-          </a:p>
-        </p:txBody>
-      </p:sp>
-      <p:sp>
-        <p:nvSpPr>
-          <p:cNvPr id="10" name="Rectangle 9"/>
-          <p:cNvSpPr/>
-          <p:nvPr/>
-        </p:nvSpPr>
-        <p:spPr>
-          <a:xfrm>
-            <a:off x="640080" y="2084832"/>
-            <a:ext cx="274320" cy="274320"/>
-          </a:xfrm>
-          <a:prstGeom prst="rect">
-            <a:avLst/>
-          </a:prstGeom>
-          <a:solidFill>
-            <a:srgbClr val="FFFFFF"/>
-          </a:solidFill>
-          <a:ln>
-            <a:solidFill>
-              <a:srgbClr val="333333"/>
-            </a:solidFill>
-          </a:ln>
-        </p:spPr>
-        <p:style>
-          <a:lnRef idx="1">
-            <a:schemeClr val="accent1"/>
-          </a:lnRef>
-          <a:fillRef idx="3">
-            <a:schemeClr val="accent1"/>
-          </a:fillRef>
-          <a:effectRef idx="2">
-            <a:schemeClr val="accent1"/>
-          </a:effectRef>
-          <a:fontRef idx="minor">
-            <a:schemeClr val="lt1"/>
-          </a:fontRef>
-        </p:style>
-        <p:txBody>
-          <a:bodyPr rtlCol="0" anchor="ctr"/>
-          <a:lstStyle/>
-          <a:p>
-            <a:pPr algn="ctr"/>
-          </a:p>
-        </p:txBody>
-      </p:sp>
-      <p:sp>
-        <p:nvSpPr>
-          <p:cNvPr id="11" name="Rectangle 10"/>
-          <p:cNvSpPr/>
-          <p:nvPr/>
-        </p:nvSpPr>
-        <p:spPr>
-          <a:xfrm>
-            <a:off x="640080" y="2084832"/>
-            <a:ext cx="73152" cy="274320"/>
-          </a:xfrm>
-          <a:prstGeom prst="rect">
-            <a:avLst/>
-          </a:prstGeom>
-          <a:solidFill>
-            <a:srgbClr val="269CCB"/>
-          </a:solidFill>
-          <a:ln>
-            <a:noFill/>
-          </a:ln>
-        </p:spPr>
-        <p:style>
-          <a:lnRef idx="1">
-            <a:schemeClr val="accent1"/>
-          </a:lnRef>
-          <a:fillRef idx="3">
-            <a:schemeClr val="accent1"/>
-          </a:fillRef>
-          <a:effectRef idx="2">
-            <a:schemeClr val="accent1"/>
-          </a:effectRef>
-          <a:fontRef idx="minor">
-            <a:schemeClr val="lt1"/>
-          </a:fontRef>
-        </p:style>
-        <p:txBody>
-          <a:bodyPr rtlCol="0" anchor="ctr"/>
-          <a:lstStyle/>
-          <a:p>
-            <a:pPr algn="ctr"/>
-          </a:p>
-        </p:txBody>
-      </p:sp>
-      <p:sp>
-        <p:nvSpPr>
-          <p:cNvPr id="12" name="TextBox 11"/>
-          <p:cNvSpPr txBox="1"/>
-          <p:nvPr/>
-        </p:nvSpPr>
-        <p:spPr>
-          <a:xfrm>
-            <a:off x="1097280" y="2029968"/>
-            <a:ext cx="10362895" cy="402336"/>
-          </a:xfrm>
-          <a:prstGeom prst="rect">
-            <a:avLst/>
-          </a:prstGeom>
-          <a:noFill/>
-        </p:spPr>
-        <p:txBody>
-          <a:bodyPr wrap="square" anchor="ctr"/>
-          <a:lstStyle/>
-          <a:p>
-            <a:r>
-              <a:rPr sz="1500" b="0" i="0">
+              <a:t>–   Huellitas guarda hoy 5.000 fichas en carpetas de carton dentro de un archivador metalico, y las citas del dia se anotan a mano en una libreta que se lleva la auxiliar.</a:t>
+            </a:r>
+          </a:p>
+          <a:p>
+            <a:pPr>
+              <a:spcAft>
+                <a:spcPts val="800"/>
+              </a:spcAft>
+            </a:pPr>
+            <a:r>
+              <a:rPr sz="2000" b="0" i="0">
                 <a:solidFill>
                   <a:srgbClr val="333333"/>
                 </a:solidFill>
                 <a:latin typeface="Calibri"/>
               </a:rPr>
-              <a:t>En su diagrama de vueltas, cada vuelta termina en algo que la veterinaria podria mirar y opinar, o termina en trabajo interno que solo entiende el equipo?</a:t>
-            </a:r>
-          </a:p>
-        </p:txBody>
-      </p:sp>
-      <p:sp>
-        <p:nvSpPr>
-          <p:cNvPr id="13" name="Rounded Rectangle 12"/>
-          <p:cNvSpPr/>
-          <p:nvPr/>
-        </p:nvSpPr>
-        <p:spPr>
-          <a:xfrm>
-            <a:off x="457200" y="2615184"/>
-            <a:ext cx="11277295" cy="566928"/>
-          </a:xfrm>
-          <a:prstGeom prst="roundRect">
-            <a:avLst>
-              <a:gd name="adj" fmla="val 12000"/>
-            </a:avLst>
-          </a:prstGeom>
-          <a:solidFill>
-            <a:srgbClr val="F2F2F2"/>
-          </a:solidFill>
-          <a:ln>
-            <a:noFill/>
-          </a:ln>
-        </p:spPr>
-        <p:style>
-          <a:lnRef idx="1">
-            <a:schemeClr val="accent1"/>
-          </a:lnRef>
-          <a:fillRef idx="3">
-            <a:schemeClr val="accent1"/>
-          </a:fillRef>
-          <a:effectRef idx="2">
-            <a:schemeClr val="accent1"/>
-          </a:effectRef>
-          <a:fontRef idx="minor">
-            <a:schemeClr val="lt1"/>
-          </a:fontRef>
-        </p:style>
-        <p:txBody>
-          <a:bodyPr rtlCol="0" anchor="ctr"/>
-          <a:lstStyle/>
-          <a:p>
-            <a:pPr algn="ctr"/>
-          </a:p>
-        </p:txBody>
-      </p:sp>
-      <p:sp>
-        <p:nvSpPr>
-          <p:cNvPr id="14" name="Rectangle 13"/>
-          <p:cNvSpPr/>
-          <p:nvPr/>
-        </p:nvSpPr>
-        <p:spPr>
-          <a:xfrm>
-            <a:off x="640080" y="2761488"/>
-            <a:ext cx="274320" cy="274320"/>
-          </a:xfrm>
-          <a:prstGeom prst="rect">
-            <a:avLst/>
-          </a:prstGeom>
-          <a:solidFill>
-            <a:srgbClr val="FFFFFF"/>
-          </a:solidFill>
-          <a:ln>
-            <a:solidFill>
-              <a:srgbClr val="333333"/>
-            </a:solidFill>
-          </a:ln>
-        </p:spPr>
-        <p:style>
-          <a:lnRef idx="1">
-            <a:schemeClr val="accent1"/>
-          </a:lnRef>
-          <a:fillRef idx="3">
-            <a:schemeClr val="accent1"/>
-          </a:fillRef>
-          <a:effectRef idx="2">
-            <a:schemeClr val="accent1"/>
-          </a:effectRef>
-          <a:fontRef idx="minor">
-            <a:schemeClr val="lt1"/>
-          </a:fontRef>
-        </p:style>
-        <p:txBody>
-          <a:bodyPr rtlCol="0" anchor="ctr"/>
-          <a:lstStyle/>
-          <a:p>
-            <a:pPr algn="ctr"/>
-          </a:p>
-        </p:txBody>
-      </p:sp>
-      <p:sp>
-        <p:nvSpPr>
-          <p:cNvPr id="15" name="Rectangle 14"/>
-          <p:cNvSpPr/>
-          <p:nvPr/>
-        </p:nvSpPr>
-        <p:spPr>
-          <a:xfrm>
-            <a:off x="640080" y="2761488"/>
-            <a:ext cx="73152" cy="274320"/>
-          </a:xfrm>
-          <a:prstGeom prst="rect">
-            <a:avLst/>
-          </a:prstGeom>
-          <a:solidFill>
-            <a:srgbClr val="269CCB"/>
-          </a:solidFill>
-          <a:ln>
-            <a:noFill/>
-          </a:ln>
-        </p:spPr>
-        <p:style>
-          <a:lnRef idx="1">
-            <a:schemeClr val="accent1"/>
-          </a:lnRef>
-          <a:fillRef idx="3">
-            <a:schemeClr val="accent1"/>
-          </a:fillRef>
-          <a:effectRef idx="2">
-            <a:schemeClr val="accent1"/>
-          </a:effectRef>
-          <a:fontRef idx="minor">
-            <a:schemeClr val="lt1"/>
-          </a:fontRef>
-        </p:style>
-        <p:txBody>
-          <a:bodyPr rtlCol="0" anchor="ctr"/>
-          <a:lstStyle/>
-          <a:p>
-            <a:pPr algn="ctr"/>
-          </a:p>
-        </p:txBody>
-      </p:sp>
-      <p:sp>
-        <p:nvSpPr>
-          <p:cNvPr id="16" name="TextBox 15"/>
-          <p:cNvSpPr txBox="1"/>
-          <p:nvPr/>
-        </p:nvSpPr>
-        <p:spPr>
-          <a:xfrm>
-            <a:off x="1097280" y="2706624"/>
-            <a:ext cx="10362895" cy="402336"/>
-          </a:xfrm>
-          <a:prstGeom prst="rect">
-            <a:avLst/>
-          </a:prstGeom>
-          <a:noFill/>
-        </p:spPr>
-        <p:txBody>
-          <a:bodyPr wrap="square" anchor="ctr"/>
-          <a:lstStyle/>
-          <a:p>
-            <a:r>
-              <a:rPr sz="1500" b="0" i="0">
+              <a:t>–   El equipo tiene una lista cruda de necesidades salida de la entrevista, pero nadie ha definido que documento sale de cada etapa ni quien lo firma como aprobado.</a:t>
+            </a:r>
+          </a:p>
+          <a:p>
+            <a:pPr>
+              <a:spcAft>
+                <a:spcPts val="800"/>
+              </a:spcAft>
+            </a:pPr>
+            <a:r>
+              <a:rPr sz="2000" b="0" i="0">
                 <a:solidFill>
                   <a:srgbClr val="333333"/>
                 </a:solidFill>
                 <a:latin typeface="Calibri"/>
               </a:rPr>
-              <a:t>Que documento exacto tendria que mostrar hoy, en pantalla, para demostrarle a la clinica que la fase de requisitos ya quedo cerrada?</a:t>
-            </a:r>
-          </a:p>
-        </p:txBody>
-      </p:sp>
-      <p:sp>
-        <p:nvSpPr>
-          <p:cNvPr id="17" name="TextBox 16"/>
+              <a:t>–   No existe ni una linea de codigo ni un diagrama formal: se parte de cero y el unico insumo real es lo que dijo la clinica.</a:t>
+            </a:r>
+          </a:p>
+        </p:txBody>
+      </p:sp>
+      <p:sp>
+        <p:nvSpPr>
+          <p:cNvPr id="6" name="TextBox 5"/>
           <p:cNvSpPr txBox="1"/>
           <p:nvPr/>
         </p:nvSpPr>
@@ -6892,21 +6049,111 @@
                 </a:solidFill>
                 <a:latin typeface="Calibri"/>
               </a:rPr>
-              <a:t>Criterios de exito / entregable</a:t>
-            </a:r>
-          </a:p>
-        </p:txBody>
-      </p:sp>
-      <p:sp>
-        <p:nvSpPr>
-          <p:cNvPr id="5" name="TextBox 4"/>
+              <a:t>Taller PI — pasos guiados</a:t>
+            </a:r>
+          </a:p>
+        </p:txBody>
+      </p:sp>
+      <p:sp>
+        <p:nvSpPr>
+          <p:cNvPr id="5" name="Rounded Rectangle 4"/>
+          <p:cNvSpPr/>
+          <p:nvPr/>
+        </p:nvSpPr>
+        <p:spPr>
+          <a:xfrm>
+            <a:off x="457200" y="1234440"/>
+            <a:ext cx="11277295" cy="950976"/>
+          </a:xfrm>
+          <a:prstGeom prst="roundRect">
+            <a:avLst>
+              <a:gd name="adj" fmla="val 12000"/>
+            </a:avLst>
+          </a:prstGeom>
+          <a:solidFill>
+            <a:srgbClr val="F2F2F2"/>
+          </a:solidFill>
+          <a:ln>
+            <a:noFill/>
+          </a:ln>
+        </p:spPr>
+        <p:style>
+          <a:lnRef idx="1">
+            <a:schemeClr val="accent1"/>
+          </a:lnRef>
+          <a:fillRef idx="3">
+            <a:schemeClr val="accent1"/>
+          </a:fillRef>
+          <a:effectRef idx="2">
+            <a:schemeClr val="accent1"/>
+          </a:effectRef>
+          <a:fontRef idx="minor">
+            <a:schemeClr val="lt1"/>
+          </a:fontRef>
+        </p:style>
+        <p:txBody>
+          <a:bodyPr rtlCol="0" anchor="ctr"/>
+          <a:lstStyle/>
+          <a:p>
+            <a:pPr algn="ctr"/>
+          </a:p>
+        </p:txBody>
+      </p:sp>
+      <p:sp>
+        <p:nvSpPr>
+          <p:cNvPr id="6" name="Rounded Rectangle 5"/>
+          <p:cNvSpPr/>
+          <p:nvPr/>
+        </p:nvSpPr>
+        <p:spPr>
+          <a:xfrm>
+            <a:off x="594360" y="1490472"/>
+            <a:ext cx="438912" cy="438912"/>
+          </a:xfrm>
+          <a:prstGeom prst="roundRect">
+            <a:avLst>
+              <a:gd name="adj" fmla="val 12000"/>
+            </a:avLst>
+          </a:prstGeom>
+          <a:solidFill>
+            <a:srgbClr val="095292"/>
+          </a:solidFill>
+          <a:ln>
+            <a:noFill/>
+          </a:ln>
+        </p:spPr>
+        <p:style>
+          <a:lnRef idx="1">
+            <a:schemeClr val="accent1"/>
+          </a:lnRef>
+          <a:fillRef idx="3">
+            <a:schemeClr val="accent1"/>
+          </a:fillRef>
+          <a:effectRef idx="2">
+            <a:schemeClr val="accent1"/>
+          </a:effectRef>
+          <a:fontRef idx="minor">
+            <a:schemeClr val="lt1"/>
+          </a:fontRef>
+        </p:style>
+        <p:txBody>
+          <a:bodyPr rtlCol="0" anchor="ctr"/>
+          <a:lstStyle/>
+          <a:p>
+            <a:pPr algn="ctr"/>
+          </a:p>
+        </p:txBody>
+      </p:sp>
+      <p:sp>
+        <p:nvSpPr>
+          <p:cNvPr id="7" name="TextBox 6"/>
           <p:cNvSpPr txBox="1"/>
           <p:nvPr/>
         </p:nvSpPr>
         <p:spPr>
           <a:xfrm>
-            <a:off x="457200" y="1170432"/>
-            <a:ext cx="11277295" cy="5230368"/>
+            <a:off x="594360" y="1490472"/>
+            <a:ext cx="438912" cy="438912"/>
           </a:xfrm>
           <a:prstGeom prst="rect">
             <a:avLst/>
@@ -6914,219 +6161,677 @@
           <a:noFill/>
         </p:spPr>
         <p:txBody>
-          <a:bodyPr wrap="square">
-            <a:spAutoFit/>
-          </a:bodyPr>
-          <a:lstStyle/>
-          <a:p>
-            <a:pPr>
-              <a:spcAft>
-                <a:spcPts val="800"/>
-              </a:spcAft>
-            </a:pPr>
-            <a:r>
-              <a:rPr sz="2000" b="0" i="0">
-                <a:solidFill>
-                  <a:srgbClr val="333333"/>
-                </a:solidFill>
-                <a:latin typeface="Calibri"/>
-              </a:rPr>
-              <a:t>–   </a:t>
-            </a:r>
-            <a:r>
-              <a:rPr sz="2000" b="1" i="0">
-                <a:solidFill>
-                  <a:srgbClr val="333333"/>
-                </a:solidFill>
-                <a:latin typeface="Calibri"/>
-              </a:rPr>
-              <a:t>Entregable:</a:t>
-            </a:r>
-            <a:r>
-              <a:rPr sz="2000" b="0" i="0">
-                <a:solidFill>
-                  <a:srgbClr val="333333"/>
-                </a:solidFill>
-                <a:latin typeface="Calibri"/>
-              </a:rPr>
-              <a:t> Un documento de una pagina en Google Docs con la tabla Fase / Pregunta que responde / Artefacto de VetCare / Quien lo aprueba, mas dos diagramas en draw.io (recorrido lineal y recorrido en tres vueltas) exportados a PDF y subidos a la plataforma del curso.</a:t>
-            </a:r>
-          </a:p>
-          <a:p>
-            <a:pPr>
-              <a:spcAft>
-                <a:spcPts val="800"/>
-              </a:spcAft>
-            </a:pPr>
-            <a:r>
-              <a:rPr sz="2000" b="0" i="0">
-                <a:solidFill>
-                  <a:srgbClr val="333333"/>
-                </a:solidFill>
-                <a:latin typeface="Calibri"/>
-              </a:rPr>
-              <a:t>–   </a:t>
-            </a:r>
-            <a:r>
-              <a:rPr sz="2000" b="1" i="0">
-                <a:solidFill>
-                  <a:srgbClr val="333333"/>
-                </a:solidFill>
-                <a:latin typeface="Calibri"/>
-              </a:rPr>
-              <a:t>Exito:</a:t>
-            </a:r>
-            <a:r>
-              <a:rPr sz="2000" b="0" i="0">
-                <a:solidFill>
-                  <a:srgbClr val="333333"/>
-                </a:solidFill>
-                <a:latin typeface="Calibri"/>
-              </a:rPr>
-              <a:t> La tabla tiene las cinco fases y en cada una un artefacto concreto de VetCare escrito con nombre propio, no una definicion generica de libro.</a:t>
-            </a:r>
-          </a:p>
-          <a:p>
-            <a:pPr>
-              <a:spcAft>
-                <a:spcPts val="800"/>
-              </a:spcAft>
-            </a:pPr>
-            <a:r>
-              <a:rPr sz="2000" b="0" i="0">
-                <a:solidFill>
-                  <a:srgbClr val="333333"/>
-                </a:solidFill>
-                <a:latin typeface="Calibri"/>
-              </a:rPr>
-              <a:t>–   </a:t>
-            </a:r>
-            <a:r>
-              <a:rPr sz="2000" b="1" i="0">
-                <a:solidFill>
-                  <a:srgbClr val="333333"/>
-                </a:solidFill>
-                <a:latin typeface="Calibri"/>
-              </a:rPr>
-              <a:t>Exito:</a:t>
-            </a:r>
-            <a:r>
-              <a:rPr sz="2000" b="0" i="0">
-                <a:solidFill>
-                  <a:srgbClr val="333333"/>
-                </a:solidFill>
-                <a:latin typeface="Calibri"/>
-              </a:rPr>
-              <a:t> El diagrama lineal y el diagrama en vueltas usan exactamente las mismas cinco cajas; lo unico distinto entre ellos es el recorrido.</a:t>
-            </a:r>
-          </a:p>
-          <a:p>
-            <a:pPr>
-              <a:spcAft>
-                <a:spcPts val="800"/>
-              </a:spcAft>
-            </a:pPr>
-            <a:r>
-              <a:rPr sz="2000" b="0" i="0">
-                <a:solidFill>
-                  <a:srgbClr val="333333"/>
-                </a:solidFill>
-                <a:latin typeface="Calibri"/>
-              </a:rPr>
-              <a:t>–   </a:t>
-            </a:r>
-            <a:r>
-              <a:rPr sz="2000" b="1" i="0">
-                <a:solidFill>
-                  <a:srgbClr val="333333"/>
-                </a:solidFill>
-                <a:latin typeface="Calibri"/>
-              </a:rPr>
-              <a:t>Exito:</a:t>
-            </a:r>
-            <a:r>
-              <a:rPr sz="2000" b="0" i="0">
-                <a:solidFill>
-                  <a:srgbClr val="333333"/>
-                </a:solidFill>
-                <a:latin typeface="Calibri"/>
-              </a:rPr>
-              <a:t> La fase actual del equipo esta marcada y sustentada con dos evidencias verificables del estado real de VetCare.</a:t>
-            </a:r>
-          </a:p>
-          <a:p>
-            <a:pPr>
-              <a:spcAft>
-                <a:spcPts val="800"/>
-              </a:spcAft>
-            </a:pPr>
-            <a:r>
-              <a:rPr sz="2000" b="0" i="0">
-                <a:solidFill>
-                  <a:srgbClr val="333333"/>
-                </a:solidFill>
-                <a:latin typeface="Calibri"/>
-              </a:rPr>
-              <a:t>–   </a:t>
-            </a:r>
-            <a:r>
-              <a:rPr sz="2000" b="1" i="0">
-                <a:solidFill>
-                  <a:srgbClr val="333333"/>
-                </a:solidFill>
-                <a:latin typeface="Calibri"/>
-              </a:rPr>
-              <a:t>Exito:</a:t>
-            </a:r>
-            <a:r>
-              <a:rPr sz="2000" b="0" i="0">
-                <a:solidFill>
-                  <a:srgbClr val="333333"/>
-                </a:solidFill>
-                <a:latin typeface="Calibri"/>
-              </a:rPr>
-              <a:t> El parrafo final distingue con hechos concretos cuando termina el proyecto y cuando terminaria el producto, e incluye un ejemplo de mantenimiento.</a:t>
-            </a:r>
-          </a:p>
-          <a:p>
-            <a:pPr>
-              <a:spcAft>
-                <a:spcPts val="800"/>
-              </a:spcAft>
-            </a:pPr>
-            <a:r>
-              <a:rPr sz="2000" b="0" i="0">
-                <a:solidFill>
-                  <a:srgbClr val="333333"/>
-                </a:solidFill>
-                <a:latin typeface="Calibri"/>
-              </a:rPr>
-              <a:t>–   </a:t>
-            </a:r>
-            <a:r>
-              <a:rPr sz="2000" b="1" i="0">
-                <a:solidFill>
-                  <a:srgbClr val="333333"/>
-                </a:solidFill>
-                <a:latin typeface="Calibri"/>
-              </a:rPr>
-              <a:t>Entrega en la plataforma del curso</a:t>
-            </a:r>
-            <a:r>
-              <a:rPr sz="2000" b="0" i="0">
-                <a:solidFill>
-                  <a:srgbClr val="333333"/>
-                </a:solidFill>
-                <a:latin typeface="Calibri"/>
-              </a:rPr>
-              <a:t> — en la fecha que indique el docente.</a:t>
-            </a:r>
-          </a:p>
-        </p:txBody>
-      </p:sp>
-      <p:sp>
-        <p:nvSpPr>
-          <p:cNvPr id="6" name="TextBox 5"/>
+          <a:bodyPr wrap="square" anchor="ctr"/>
+          <a:lstStyle/>
+          <a:p>
+            <a:pPr algn="ctr"/>
+            <a:r>
+              <a:rPr sz="1600" b="1" i="0">
+                <a:solidFill>
+                  <a:srgbClr val="FFFFFF"/>
+                </a:solidFill>
+                <a:latin typeface="Calibri"/>
+              </a:rPr>
+              <a:t>1</a:t>
+            </a:r>
+          </a:p>
+        </p:txBody>
+      </p:sp>
+      <p:sp>
+        <p:nvSpPr>
+          <p:cNvPr id="8" name="TextBox 7"/>
+          <p:cNvSpPr txBox="1"/>
+          <p:nvPr/>
+        </p:nvSpPr>
+        <p:spPr>
+          <a:xfrm>
+            <a:off x="1188720" y="1325880"/>
+            <a:ext cx="10271455" cy="786384"/>
+          </a:xfrm>
+          <a:prstGeom prst="rect">
+            <a:avLst/>
+          </a:prstGeom>
+          <a:noFill/>
+        </p:spPr>
+        <p:txBody>
+          <a:bodyPr wrap="square" anchor="ctr"/>
+          <a:lstStyle/>
+          <a:p>
+            <a:r>
+              <a:rPr sz="1400" b="1" i="0">
+                <a:solidFill>
+                  <a:srgbClr val="095292"/>
+                </a:solidFill>
+                <a:latin typeface="Calibri"/>
+              </a:rPr>
+              <a:t>En Google Docs cree la tabla de cuatro columnas (Fase / Pregunta que responde / Artefacto concreto de VetCare / Quien lo aprueba) y llenela con las cinco fases; en la columna del artefacto esta prohibido escribir generalidades: debe decir cosas como 'Lista RF-01 a RF-12 de Huellitas' o 'Mockup de la ficha del paciente'.</a:t>
+            </a:r>
+          </a:p>
+        </p:txBody>
+      </p:sp>
+      <p:sp>
+        <p:nvSpPr>
+          <p:cNvPr id="9" name="Rounded Rectangle 8"/>
+          <p:cNvSpPr/>
+          <p:nvPr/>
+        </p:nvSpPr>
+        <p:spPr>
+          <a:xfrm>
+            <a:off x="457200" y="2276856"/>
+            <a:ext cx="11277295" cy="950976"/>
+          </a:xfrm>
+          <a:prstGeom prst="roundRect">
+            <a:avLst>
+              <a:gd name="adj" fmla="val 12000"/>
+            </a:avLst>
+          </a:prstGeom>
+          <a:solidFill>
+            <a:srgbClr val="E8F4FA"/>
+          </a:solidFill>
+          <a:ln>
+            <a:noFill/>
+          </a:ln>
+        </p:spPr>
+        <p:style>
+          <a:lnRef idx="1">
+            <a:schemeClr val="accent1"/>
+          </a:lnRef>
+          <a:fillRef idx="3">
+            <a:schemeClr val="accent1"/>
+          </a:fillRef>
+          <a:effectRef idx="2">
+            <a:schemeClr val="accent1"/>
+          </a:effectRef>
+          <a:fontRef idx="minor">
+            <a:schemeClr val="lt1"/>
+          </a:fontRef>
+        </p:style>
+        <p:txBody>
+          <a:bodyPr rtlCol="0" anchor="ctr"/>
+          <a:lstStyle/>
+          <a:p>
+            <a:pPr algn="ctr"/>
+          </a:p>
+        </p:txBody>
+      </p:sp>
+      <p:sp>
+        <p:nvSpPr>
+          <p:cNvPr id="10" name="Rounded Rectangle 9"/>
+          <p:cNvSpPr/>
+          <p:nvPr/>
+        </p:nvSpPr>
+        <p:spPr>
+          <a:xfrm>
+            <a:off x="594360" y="2532888"/>
+            <a:ext cx="438912" cy="438912"/>
+          </a:xfrm>
+          <a:prstGeom prst="roundRect">
+            <a:avLst>
+              <a:gd name="adj" fmla="val 12000"/>
+            </a:avLst>
+          </a:prstGeom>
+          <a:solidFill>
+            <a:srgbClr val="095292"/>
+          </a:solidFill>
+          <a:ln>
+            <a:noFill/>
+          </a:ln>
+        </p:spPr>
+        <p:style>
+          <a:lnRef idx="1">
+            <a:schemeClr val="accent1"/>
+          </a:lnRef>
+          <a:fillRef idx="3">
+            <a:schemeClr val="accent1"/>
+          </a:fillRef>
+          <a:effectRef idx="2">
+            <a:schemeClr val="accent1"/>
+          </a:effectRef>
+          <a:fontRef idx="minor">
+            <a:schemeClr val="lt1"/>
+          </a:fontRef>
+        </p:style>
+        <p:txBody>
+          <a:bodyPr rtlCol="0" anchor="ctr"/>
+          <a:lstStyle/>
+          <a:p>
+            <a:pPr algn="ctr"/>
+          </a:p>
+        </p:txBody>
+      </p:sp>
+      <p:sp>
+        <p:nvSpPr>
+          <p:cNvPr id="11" name="TextBox 10"/>
+          <p:cNvSpPr txBox="1"/>
+          <p:nvPr/>
+        </p:nvSpPr>
+        <p:spPr>
+          <a:xfrm>
+            <a:off x="594360" y="2532888"/>
+            <a:ext cx="438912" cy="438912"/>
+          </a:xfrm>
+          <a:prstGeom prst="rect">
+            <a:avLst/>
+          </a:prstGeom>
+          <a:noFill/>
+        </p:spPr>
+        <p:txBody>
+          <a:bodyPr wrap="square" anchor="ctr"/>
+          <a:lstStyle/>
+          <a:p>
+            <a:pPr algn="ctr"/>
+            <a:r>
+              <a:rPr sz="1600" b="1" i="0">
+                <a:solidFill>
+                  <a:srgbClr val="FFFFFF"/>
+                </a:solidFill>
+                <a:latin typeface="Calibri"/>
+              </a:rPr>
+              <a:t>2</a:t>
+            </a:r>
+          </a:p>
+        </p:txBody>
+      </p:sp>
+      <p:sp>
+        <p:nvSpPr>
+          <p:cNvPr id="12" name="TextBox 11"/>
+          <p:cNvSpPr txBox="1"/>
+          <p:nvPr/>
+        </p:nvSpPr>
+        <p:spPr>
+          <a:xfrm>
+            <a:off x="1188720" y="2368296"/>
+            <a:ext cx="10271455" cy="786384"/>
+          </a:xfrm>
+          <a:prstGeom prst="rect">
+            <a:avLst/>
+          </a:prstGeom>
+          <a:noFill/>
+        </p:spPr>
+        <p:txBody>
+          <a:bodyPr wrap="square" anchor="ctr"/>
+          <a:lstStyle/>
+          <a:p>
+            <a:r>
+              <a:rPr sz="1500" b="1" i="0">
+                <a:solidFill>
+                  <a:srgbClr val="095292"/>
+                </a:solidFill>
+                <a:latin typeface="Calibri"/>
+              </a:rPr>
+              <a:t>Marque con relleno amarillo la fila de la fase donde esta el equipo hoy y escriba debajo dos evidencias verificables que lo demuestren (por ejemplo: 'existe la entrevista transcrita' y 'no existe ningun diagrama aprobado').</a:t>
+            </a:r>
+          </a:p>
+        </p:txBody>
+      </p:sp>
+      <p:sp>
+        <p:nvSpPr>
+          <p:cNvPr id="13" name="Rounded Rectangle 12"/>
+          <p:cNvSpPr/>
+          <p:nvPr/>
+        </p:nvSpPr>
+        <p:spPr>
+          <a:xfrm>
+            <a:off x="457200" y="3319272"/>
+            <a:ext cx="11277295" cy="950976"/>
+          </a:xfrm>
+          <a:prstGeom prst="roundRect">
+            <a:avLst>
+              <a:gd name="adj" fmla="val 12000"/>
+            </a:avLst>
+          </a:prstGeom>
+          <a:solidFill>
+            <a:srgbClr val="F2F2F2"/>
+          </a:solidFill>
+          <a:ln>
+            <a:noFill/>
+          </a:ln>
+        </p:spPr>
+        <p:style>
+          <a:lnRef idx="1">
+            <a:schemeClr val="accent1"/>
+          </a:lnRef>
+          <a:fillRef idx="3">
+            <a:schemeClr val="accent1"/>
+          </a:fillRef>
+          <a:effectRef idx="2">
+            <a:schemeClr val="accent1"/>
+          </a:effectRef>
+          <a:fontRef idx="minor">
+            <a:schemeClr val="lt1"/>
+          </a:fontRef>
+        </p:style>
+        <p:txBody>
+          <a:bodyPr rtlCol="0" anchor="ctr"/>
+          <a:lstStyle/>
+          <a:p>
+            <a:pPr algn="ctr"/>
+          </a:p>
+        </p:txBody>
+      </p:sp>
+      <p:sp>
+        <p:nvSpPr>
+          <p:cNvPr id="14" name="Rounded Rectangle 13"/>
+          <p:cNvSpPr/>
+          <p:nvPr/>
+        </p:nvSpPr>
+        <p:spPr>
+          <a:xfrm>
+            <a:off x="594360" y="3575304"/>
+            <a:ext cx="438912" cy="438912"/>
+          </a:xfrm>
+          <a:prstGeom prst="roundRect">
+            <a:avLst>
+              <a:gd name="adj" fmla="val 12000"/>
+            </a:avLst>
+          </a:prstGeom>
+          <a:solidFill>
+            <a:srgbClr val="095292"/>
+          </a:solidFill>
+          <a:ln>
+            <a:noFill/>
+          </a:ln>
+        </p:spPr>
+        <p:style>
+          <a:lnRef idx="1">
+            <a:schemeClr val="accent1"/>
+          </a:lnRef>
+          <a:fillRef idx="3">
+            <a:schemeClr val="accent1"/>
+          </a:fillRef>
+          <a:effectRef idx="2">
+            <a:schemeClr val="accent1"/>
+          </a:effectRef>
+          <a:fontRef idx="minor">
+            <a:schemeClr val="lt1"/>
+          </a:fontRef>
+        </p:style>
+        <p:txBody>
+          <a:bodyPr rtlCol="0" anchor="ctr"/>
+          <a:lstStyle/>
+          <a:p>
+            <a:pPr algn="ctr"/>
+          </a:p>
+        </p:txBody>
+      </p:sp>
+      <p:sp>
+        <p:nvSpPr>
+          <p:cNvPr id="15" name="TextBox 14"/>
+          <p:cNvSpPr txBox="1"/>
+          <p:nvPr/>
+        </p:nvSpPr>
+        <p:spPr>
+          <a:xfrm>
+            <a:off x="594360" y="3575304"/>
+            <a:ext cx="438912" cy="438912"/>
+          </a:xfrm>
+          <a:prstGeom prst="rect">
+            <a:avLst/>
+          </a:prstGeom>
+          <a:noFill/>
+        </p:spPr>
+        <p:txBody>
+          <a:bodyPr wrap="square" anchor="ctr"/>
+          <a:lstStyle/>
+          <a:p>
+            <a:pPr algn="ctr"/>
+            <a:r>
+              <a:rPr sz="1600" b="1" i="0">
+                <a:solidFill>
+                  <a:srgbClr val="FFFFFF"/>
+                </a:solidFill>
+                <a:latin typeface="Calibri"/>
+              </a:rPr>
+              <a:t>3</a:t>
+            </a:r>
+          </a:p>
+        </p:txBody>
+      </p:sp>
+      <p:sp>
+        <p:nvSpPr>
+          <p:cNvPr id="16" name="TextBox 15"/>
+          <p:cNvSpPr txBox="1"/>
+          <p:nvPr/>
+        </p:nvSpPr>
+        <p:spPr>
+          <a:xfrm>
+            <a:off x="1188720" y="3410712"/>
+            <a:ext cx="10271455" cy="786384"/>
+          </a:xfrm>
+          <a:prstGeom prst="rect">
+            <a:avLst/>
+          </a:prstGeom>
+          <a:noFill/>
+        </p:spPr>
+        <p:txBody>
+          <a:bodyPr wrap="square" anchor="ctr"/>
+          <a:lstStyle/>
+          <a:p>
+            <a:r>
+              <a:rPr sz="1500" b="1" i="0">
+                <a:solidFill>
+                  <a:srgbClr val="095292"/>
+                </a:solidFill>
+                <a:latin typeface="Calibri"/>
+              </a:rPr>
+              <a:t>En draw.io dibuje el recorrido lineal de VetCare: cinco cajas en fila, y sobre cada flecha escriba el artefacto que se entrega para poder pasar a la siguiente fase.</a:t>
+            </a:r>
+          </a:p>
+        </p:txBody>
+      </p:sp>
+      <p:sp>
+        <p:nvSpPr>
+          <p:cNvPr id="17" name="Rounded Rectangle 16"/>
+          <p:cNvSpPr/>
+          <p:nvPr/>
+        </p:nvSpPr>
+        <p:spPr>
+          <a:xfrm>
+            <a:off x="457200" y="4361688"/>
+            <a:ext cx="11277295" cy="950976"/>
+          </a:xfrm>
+          <a:prstGeom prst="roundRect">
+            <a:avLst>
+              <a:gd name="adj" fmla="val 12000"/>
+            </a:avLst>
+          </a:prstGeom>
+          <a:solidFill>
+            <a:srgbClr val="E8F4FA"/>
+          </a:solidFill>
+          <a:ln>
+            <a:noFill/>
+          </a:ln>
+        </p:spPr>
+        <p:style>
+          <a:lnRef idx="1">
+            <a:schemeClr val="accent1"/>
+          </a:lnRef>
+          <a:fillRef idx="3">
+            <a:schemeClr val="accent1"/>
+          </a:fillRef>
+          <a:effectRef idx="2">
+            <a:schemeClr val="accent1"/>
+          </a:effectRef>
+          <a:fontRef idx="minor">
+            <a:schemeClr val="lt1"/>
+          </a:fontRef>
+        </p:style>
+        <p:txBody>
+          <a:bodyPr rtlCol="0" anchor="ctr"/>
+          <a:lstStyle/>
+          <a:p>
+            <a:pPr algn="ctr"/>
+          </a:p>
+        </p:txBody>
+      </p:sp>
+      <p:sp>
+        <p:nvSpPr>
+          <p:cNvPr id="18" name="Rounded Rectangle 17"/>
+          <p:cNvSpPr/>
+          <p:nvPr/>
+        </p:nvSpPr>
+        <p:spPr>
+          <a:xfrm>
+            <a:off x="594360" y="4617720"/>
+            <a:ext cx="438912" cy="438912"/>
+          </a:xfrm>
+          <a:prstGeom prst="roundRect">
+            <a:avLst>
+              <a:gd name="adj" fmla="val 12000"/>
+            </a:avLst>
+          </a:prstGeom>
+          <a:solidFill>
+            <a:srgbClr val="095292"/>
+          </a:solidFill>
+          <a:ln>
+            <a:noFill/>
+          </a:ln>
+        </p:spPr>
+        <p:style>
+          <a:lnRef idx="1">
+            <a:schemeClr val="accent1"/>
+          </a:lnRef>
+          <a:fillRef idx="3">
+            <a:schemeClr val="accent1"/>
+          </a:fillRef>
+          <a:effectRef idx="2">
+            <a:schemeClr val="accent1"/>
+          </a:effectRef>
+          <a:fontRef idx="minor">
+            <a:schemeClr val="lt1"/>
+          </a:fontRef>
+        </p:style>
+        <p:txBody>
+          <a:bodyPr rtlCol="0" anchor="ctr"/>
+          <a:lstStyle/>
+          <a:p>
+            <a:pPr algn="ctr"/>
+          </a:p>
+        </p:txBody>
+      </p:sp>
+      <p:sp>
+        <p:nvSpPr>
+          <p:cNvPr id="19" name="TextBox 18"/>
+          <p:cNvSpPr txBox="1"/>
+          <p:nvPr/>
+        </p:nvSpPr>
+        <p:spPr>
+          <a:xfrm>
+            <a:off x="594360" y="4617720"/>
+            <a:ext cx="438912" cy="438912"/>
+          </a:xfrm>
+          <a:prstGeom prst="rect">
+            <a:avLst/>
+          </a:prstGeom>
+          <a:noFill/>
+        </p:spPr>
+        <p:txBody>
+          <a:bodyPr wrap="square" anchor="ctr"/>
+          <a:lstStyle/>
+          <a:p>
+            <a:pPr algn="ctr"/>
+            <a:r>
+              <a:rPr sz="1600" b="1" i="0">
+                <a:solidFill>
+                  <a:srgbClr val="FFFFFF"/>
+                </a:solidFill>
+                <a:latin typeface="Calibri"/>
+              </a:rPr>
+              <a:t>4</a:t>
+            </a:r>
+          </a:p>
+        </p:txBody>
+      </p:sp>
+      <p:sp>
+        <p:nvSpPr>
+          <p:cNvPr id="20" name="TextBox 19"/>
+          <p:cNvSpPr txBox="1"/>
+          <p:nvPr/>
+        </p:nvSpPr>
+        <p:spPr>
+          <a:xfrm>
+            <a:off x="1188720" y="4453128"/>
+            <a:ext cx="10271455" cy="786384"/>
+          </a:xfrm>
+          <a:prstGeom prst="rect">
+            <a:avLst/>
+          </a:prstGeom>
+          <a:noFill/>
+        </p:spPr>
+        <p:txBody>
+          <a:bodyPr wrap="square" anchor="ctr"/>
+          <a:lstStyle/>
+          <a:p>
+            <a:r>
+              <a:rPr sz="1400" b="1" i="0">
+                <a:solidFill>
+                  <a:srgbClr val="095292"/>
+                </a:solidFill>
+                <a:latin typeface="Calibri"/>
+              </a:rPr>
+              <a:t>Duplique la pagina en draw.io y dibuje el recorrido en tres vueltas: las mismas cinco cajas, pero con las vueltas rotuladas Incremento 1 (ficha del paciente), Incremento 2 (historia clinica y busqueda) e Incremento 3 (reportes y metricas), y una flecha de retroalimentacion desde la clinica hacia requisitos.</a:t>
+            </a:r>
+          </a:p>
+        </p:txBody>
+      </p:sp>
+      <p:sp>
+        <p:nvSpPr>
+          <p:cNvPr id="21" name="Rounded Rectangle 20"/>
+          <p:cNvSpPr/>
+          <p:nvPr/>
+        </p:nvSpPr>
+        <p:spPr>
+          <a:xfrm>
+            <a:off x="457200" y="5404104"/>
+            <a:ext cx="11277295" cy="950976"/>
+          </a:xfrm>
+          <a:prstGeom prst="roundRect">
+            <a:avLst>
+              <a:gd name="adj" fmla="val 12000"/>
+            </a:avLst>
+          </a:prstGeom>
+          <a:solidFill>
+            <a:srgbClr val="F2F2F2"/>
+          </a:solidFill>
+          <a:ln>
+            <a:noFill/>
+          </a:ln>
+        </p:spPr>
+        <p:style>
+          <a:lnRef idx="1">
+            <a:schemeClr val="accent1"/>
+          </a:lnRef>
+          <a:fillRef idx="3">
+            <a:schemeClr val="accent1"/>
+          </a:fillRef>
+          <a:effectRef idx="2">
+            <a:schemeClr val="accent1"/>
+          </a:effectRef>
+          <a:fontRef idx="minor">
+            <a:schemeClr val="lt1"/>
+          </a:fontRef>
+        </p:style>
+        <p:txBody>
+          <a:bodyPr rtlCol="0" anchor="ctr"/>
+          <a:lstStyle/>
+          <a:p>
+            <a:pPr algn="ctr"/>
+          </a:p>
+        </p:txBody>
+      </p:sp>
+      <p:sp>
+        <p:nvSpPr>
+          <p:cNvPr id="22" name="Rounded Rectangle 21"/>
+          <p:cNvSpPr/>
+          <p:nvPr/>
+        </p:nvSpPr>
+        <p:spPr>
+          <a:xfrm>
+            <a:off x="594360" y="5660136"/>
+            <a:ext cx="438912" cy="438912"/>
+          </a:xfrm>
+          <a:prstGeom prst="roundRect">
+            <a:avLst>
+              <a:gd name="adj" fmla="val 12000"/>
+            </a:avLst>
+          </a:prstGeom>
+          <a:solidFill>
+            <a:srgbClr val="095292"/>
+          </a:solidFill>
+          <a:ln>
+            <a:noFill/>
+          </a:ln>
+        </p:spPr>
+        <p:style>
+          <a:lnRef idx="1">
+            <a:schemeClr val="accent1"/>
+          </a:lnRef>
+          <a:fillRef idx="3">
+            <a:schemeClr val="accent1"/>
+          </a:fillRef>
+          <a:effectRef idx="2">
+            <a:schemeClr val="accent1"/>
+          </a:effectRef>
+          <a:fontRef idx="minor">
+            <a:schemeClr val="lt1"/>
+          </a:fontRef>
+        </p:style>
+        <p:txBody>
+          <a:bodyPr rtlCol="0" anchor="ctr"/>
+          <a:lstStyle/>
+          <a:p>
+            <a:pPr algn="ctr"/>
+          </a:p>
+        </p:txBody>
+      </p:sp>
+      <p:sp>
+        <p:nvSpPr>
+          <p:cNvPr id="23" name="TextBox 22"/>
+          <p:cNvSpPr txBox="1"/>
+          <p:nvPr/>
+        </p:nvSpPr>
+        <p:spPr>
+          <a:xfrm>
+            <a:off x="594360" y="5660136"/>
+            <a:ext cx="438912" cy="438912"/>
+          </a:xfrm>
+          <a:prstGeom prst="rect">
+            <a:avLst/>
+          </a:prstGeom>
+          <a:noFill/>
+        </p:spPr>
+        <p:txBody>
+          <a:bodyPr wrap="square" anchor="ctr"/>
+          <a:lstStyle/>
+          <a:p>
+            <a:pPr algn="ctr"/>
+            <a:r>
+              <a:rPr sz="1600" b="1" i="0">
+                <a:solidFill>
+                  <a:srgbClr val="FFFFFF"/>
+                </a:solidFill>
+                <a:latin typeface="Calibri"/>
+              </a:rPr>
+              <a:t>5</a:t>
+            </a:r>
+          </a:p>
+        </p:txBody>
+      </p:sp>
+      <p:sp>
+        <p:nvSpPr>
+          <p:cNvPr id="24" name="TextBox 23"/>
+          <p:cNvSpPr txBox="1"/>
+          <p:nvPr/>
+        </p:nvSpPr>
+        <p:spPr>
+          <a:xfrm>
+            <a:off x="1188720" y="5495544"/>
+            <a:ext cx="10271455" cy="786384"/>
+          </a:xfrm>
+          <a:prstGeom prst="rect">
+            <a:avLst/>
+          </a:prstGeom>
+          <a:noFill/>
+        </p:spPr>
+        <p:txBody>
+          <a:bodyPr wrap="square" anchor="ctr"/>
+          <a:lstStyle/>
+          <a:p>
+            <a:r>
+              <a:rPr sz="1400" b="1" i="0">
+                <a:solidFill>
+                  <a:srgbClr val="095292"/>
+                </a:solidFill>
+                <a:latin typeface="Calibri"/>
+              </a:rPr>
+              <a:t>Escriba al final del documento un parrafo de tres renglones titulado 'Producto vs proyecto en VetCare' que responda: cuando termina el proyecto, cuando terminaria el producto y un ejemplo concreto de una solicitud de mantenimiento; exporte a PDF y suba el archivo a la plataforma del curso.</a:t>
+            </a:r>
+          </a:p>
+        </p:txBody>
+      </p:sp>
+      <p:sp>
+        <p:nvSpPr>
+          <p:cNvPr id="25" name="TextBox 24"/>
           <p:cNvSpPr txBox="1"/>
           <p:nvPr/>
         </p:nvSpPr>
@@ -7300,7 +7005,7 @@
                 </a:solidFill>
                 <a:latin typeface="Calibri"/>
               </a:rPr>
-              <a:t>Para el PI esta semana</a:t>
+              <a:t>Antes de entregar — autochequeo</a:t>
             </a:r>
           </a:p>
         </p:txBody>
@@ -7314,7 +7019,7 @@
         <p:spPr>
           <a:xfrm>
             <a:off x="457200" y="1261872"/>
-            <a:ext cx="11277295" cy="1051560"/>
+            <a:ext cx="11277295" cy="566928"/>
           </a:xfrm>
           <a:prstGeom prst="roundRect">
             <a:avLst>
@@ -7322,7 +7027,7 @@
             </a:avLst>
           </a:prstGeom>
           <a:solidFill>
-            <a:srgbClr val="E8F4FA"/>
+            <a:srgbClr val="F2F2F2"/>
           </a:solidFill>
           <a:ln>
             <a:noFill/>
@@ -7358,8 +7063,53 @@
         </p:nvSpPr>
         <p:spPr>
           <a:xfrm>
-            <a:off x="457200" y="1261872"/>
-            <a:ext cx="128016" cy="1051560"/>
+            <a:off x="640080" y="1408175"/>
+            <a:ext cx="274320" cy="274320"/>
+          </a:xfrm>
+          <a:prstGeom prst="rect">
+            <a:avLst/>
+          </a:prstGeom>
+          <a:solidFill>
+            <a:srgbClr val="FFFFFF"/>
+          </a:solidFill>
+          <a:ln>
+            <a:solidFill>
+              <a:srgbClr val="333333"/>
+            </a:solidFill>
+          </a:ln>
+        </p:spPr>
+        <p:style>
+          <a:lnRef idx="1">
+            <a:schemeClr val="accent1"/>
+          </a:lnRef>
+          <a:fillRef idx="3">
+            <a:schemeClr val="accent1"/>
+          </a:fillRef>
+          <a:effectRef idx="2">
+            <a:schemeClr val="accent1"/>
+          </a:effectRef>
+          <a:fontRef idx="minor">
+            <a:schemeClr val="lt1"/>
+          </a:fontRef>
+        </p:style>
+        <p:txBody>
+          <a:bodyPr rtlCol="0" anchor="ctr"/>
+          <a:lstStyle/>
+          <a:p>
+            <a:pPr algn="ctr"/>
+          </a:p>
+        </p:txBody>
+      </p:sp>
+      <p:sp>
+        <p:nvSpPr>
+          <p:cNvPr id="7" name="Rectangle 6"/>
+          <p:cNvSpPr/>
+          <p:nvPr/>
+        </p:nvSpPr>
+        <p:spPr>
+          <a:xfrm>
+            <a:off x="640080" y="1408175"/>
+            <a:ext cx="73152" cy="274320"/>
           </a:xfrm>
           <a:prstGeom prst="rect">
             <a:avLst/>
@@ -7395,14 +7145,14 @@
       </p:sp>
       <p:sp>
         <p:nvSpPr>
-          <p:cNvPr id="7" name="TextBox 6"/>
+          <p:cNvPr id="8" name="TextBox 7"/>
           <p:cNvSpPr txBox="1"/>
           <p:nvPr/>
         </p:nvSpPr>
         <p:spPr>
           <a:xfrm>
-            <a:off x="777240" y="1399031"/>
-            <a:ext cx="10774375" cy="822959"/>
+            <a:off x="1097280" y="1353312"/>
+            <a:ext cx="10362895" cy="402336"/>
           </a:xfrm>
           <a:prstGeom prst="rect">
             <a:avLst/>
@@ -7410,49 +7160,31 @@
           <a:noFill/>
         </p:spPr>
         <p:txBody>
-          <a:bodyPr wrap="square">
-            <a:spAutoFit/>
-          </a:bodyPr>
-          <a:lstStyle/>
-          <a:p>
-            <a:r>
-              <a:rPr sz="1200" b="1" i="0">
-                <a:solidFill>
-                  <a:srgbClr val="269CCB"/>
-                </a:solidFill>
-                <a:latin typeface="Calibri"/>
-              </a:rPr>
-              <a:t>Info</a:t>
-            </a:r>
-          </a:p>
-          <a:p>
-            <a:pPr>
-              <a:spcBef>
-                <a:spcPts val="400"/>
-              </a:spcBef>
-            </a:pPr>
-            <a:r>
-              <a:rPr sz="1400" b="0" i="0">
+          <a:bodyPr wrap="square" anchor="ctr"/>
+          <a:lstStyle/>
+          <a:p>
+            <a:r>
+              <a:rPr sz="1500" b="0" i="0">
                 <a:solidFill>
                   <a:srgbClr val="333333"/>
                 </a:solidFill>
                 <a:latin typeface="Calibri"/>
               </a:rPr>
-              <a:t>Hito: Queda listo el mapa de fases de VetCare con el artefacto concreto que produce cada fase y la marca de en cual esta parado el equipo hoy.</a:t>
-            </a:r>
-          </a:p>
-        </p:txBody>
-      </p:sp>
-      <p:sp>
-        <p:nvSpPr>
-          <p:cNvPr id="8" name="Rounded Rectangle 7"/>
+              <a:t>Si borro la palabra VetCare de su tabla, esa tabla serviria igual para un cajero automatico o para una tienda de ropa? Si la respuesta es si, todavia no aterrizo nada.</a:t>
+            </a:r>
+          </a:p>
+        </p:txBody>
+      </p:sp>
+      <p:sp>
+        <p:nvSpPr>
+          <p:cNvPr id="9" name="Rounded Rectangle 8"/>
           <p:cNvSpPr/>
           <p:nvPr/>
         </p:nvSpPr>
         <p:spPr>
           <a:xfrm>
-            <a:off x="457200" y="2478024"/>
-            <a:ext cx="11277295" cy="1051560"/>
+            <a:off x="457200" y="1938528"/>
+            <a:ext cx="11277295" cy="566928"/>
           </a:xfrm>
           <a:prstGeom prst="roundRect">
             <a:avLst>
@@ -7460,7 +7192,7 @@
             </a:avLst>
           </a:prstGeom>
           <a:solidFill>
-            <a:srgbClr val="FFF8E1"/>
+            <a:srgbClr val="F2F2F2"/>
           </a:solidFill>
           <a:ln>
             <a:noFill/>
@@ -7490,23 +7222,25 @@
       </p:sp>
       <p:sp>
         <p:nvSpPr>
-          <p:cNvPr id="9" name="Rectangle 8"/>
+          <p:cNvPr id="10" name="Rectangle 9"/>
           <p:cNvSpPr/>
           <p:nvPr/>
         </p:nvSpPr>
         <p:spPr>
           <a:xfrm>
-            <a:off x="457200" y="2478024"/>
-            <a:ext cx="128016" cy="1051560"/>
+            <a:off x="640080" y="2084832"/>
+            <a:ext cx="274320" cy="274320"/>
           </a:xfrm>
           <a:prstGeom prst="rect">
             <a:avLst/>
           </a:prstGeom>
           <a:solidFill>
-            <a:srgbClr val="FFD000"/>
+            <a:srgbClr val="FFFFFF"/>
           </a:solidFill>
           <a:ln>
-            <a:noFill/>
+            <a:solidFill>
+              <a:srgbClr val="333333"/>
+            </a:solidFill>
           </a:ln>
         </p:spPr>
         <p:style>
@@ -7533,72 +7267,20 @@
       </p:sp>
       <p:sp>
         <p:nvSpPr>
-          <p:cNvPr id="10" name="TextBox 9"/>
-          <p:cNvSpPr txBox="1"/>
-          <p:nvPr/>
-        </p:nvSpPr>
-        <p:spPr>
-          <a:xfrm>
-            <a:off x="777240" y="2615184"/>
-            <a:ext cx="10774375" cy="822959"/>
-          </a:xfrm>
-          <a:prstGeom prst="rect">
-            <a:avLst/>
-          </a:prstGeom>
-          <a:noFill/>
-        </p:spPr>
-        <p:txBody>
-          <a:bodyPr wrap="square">
-            <a:spAutoFit/>
-          </a:bodyPr>
-          <a:lstStyle/>
-          <a:p>
-            <a:r>
-              <a:rPr sz="1200" b="1" i="0">
-                <a:solidFill>
-                  <a:srgbClr val="FFD000"/>
-                </a:solidFill>
-                <a:latin typeface="Calibri"/>
-              </a:rPr>
-              <a:t>Aclaración</a:t>
-            </a:r>
-          </a:p>
-          <a:p>
-            <a:pPr>
-              <a:spcBef>
-                <a:spcPts val="400"/>
-              </a:spcBef>
-            </a:pPr>
-            <a:r>
-              <a:rPr sz="1400" b="0" i="0">
-                <a:solidFill>
-                  <a:srgbClr val="333333"/>
-                </a:solidFill>
-                <a:latin typeface="Calibri"/>
-              </a:rPr>
-              <a:t>Enunciado completo: Clases/Proyecto Integrador/ (VetCare).</a:t>
-            </a:r>
-          </a:p>
-        </p:txBody>
-      </p:sp>
-      <p:sp>
-        <p:nvSpPr>
-          <p:cNvPr id="11" name="Rounded Rectangle 10"/>
+          <p:cNvPr id="11" name="Rectangle 10"/>
           <p:cNvSpPr/>
           <p:nvPr/>
         </p:nvSpPr>
         <p:spPr>
           <a:xfrm>
-            <a:off x="457200" y="3694176"/>
-            <a:ext cx="11277295" cy="1051560"/>
-          </a:xfrm>
-          <a:prstGeom prst="roundRect">
-            <a:avLst>
-              <a:gd name="adj" fmla="val 12000"/>
-            </a:avLst>
+            <a:off x="640080" y="2084832"/>
+            <a:ext cx="73152" cy="274320"/>
+          </a:xfrm>
+          <a:prstGeom prst="rect">
+            <a:avLst/>
           </a:prstGeom>
           <a:solidFill>
-            <a:srgbClr val="FBE4E4"/>
+            <a:srgbClr val="269CCB"/>
           </a:solidFill>
           <a:ln>
             <a:noFill/>
@@ -7628,20 +7310,54 @@
       </p:sp>
       <p:sp>
         <p:nvSpPr>
-          <p:cNvPr id="12" name="Rectangle 11"/>
+          <p:cNvPr id="12" name="TextBox 11"/>
+          <p:cNvSpPr txBox="1"/>
+          <p:nvPr/>
+        </p:nvSpPr>
+        <p:spPr>
+          <a:xfrm>
+            <a:off x="1097280" y="2029968"/>
+            <a:ext cx="10362895" cy="402336"/>
+          </a:xfrm>
+          <a:prstGeom prst="rect">
+            <a:avLst/>
+          </a:prstGeom>
+          <a:noFill/>
+        </p:spPr>
+        <p:txBody>
+          <a:bodyPr wrap="square" anchor="ctr"/>
+          <a:lstStyle/>
+          <a:p>
+            <a:r>
+              <a:rPr sz="1500" b="0" i="0">
+                <a:solidFill>
+                  <a:srgbClr val="333333"/>
+                </a:solidFill>
+                <a:latin typeface="Calibri"/>
+              </a:rPr>
+              <a:t>En su diagrama de vueltas, cada vuelta termina en algo que la veterinaria podria mirar y opinar, o termina en trabajo interno que solo entiende el equipo?</a:t>
+            </a:r>
+          </a:p>
+        </p:txBody>
+      </p:sp>
+      <p:sp>
+        <p:nvSpPr>
+          <p:cNvPr id="13" name="Rounded Rectangle 12"/>
           <p:cNvSpPr/>
           <p:nvPr/>
         </p:nvSpPr>
         <p:spPr>
           <a:xfrm>
-            <a:off x="457200" y="3694176"/>
-            <a:ext cx="128016" cy="1051560"/>
-          </a:xfrm>
-          <a:prstGeom prst="rect">
-            <a:avLst/>
+            <a:off x="457200" y="2615184"/>
+            <a:ext cx="11277295" cy="566928"/>
+          </a:xfrm>
+          <a:prstGeom prst="roundRect">
+            <a:avLst>
+              <a:gd name="adj" fmla="val 12000"/>
+            </a:avLst>
           </a:prstGeom>
           <a:solidFill>
-            <a:srgbClr val="A02030"/>
+            <a:srgbClr val="F2F2F2"/>
           </a:solidFill>
           <a:ln>
             <a:noFill/>
@@ -7671,14 +7387,102 @@
       </p:sp>
       <p:sp>
         <p:nvSpPr>
-          <p:cNvPr id="13" name="TextBox 12"/>
+          <p:cNvPr id="14" name="Rectangle 13"/>
+          <p:cNvSpPr/>
+          <p:nvPr/>
+        </p:nvSpPr>
+        <p:spPr>
+          <a:xfrm>
+            <a:off x="640080" y="2761488"/>
+            <a:ext cx="274320" cy="274320"/>
+          </a:xfrm>
+          <a:prstGeom prst="rect">
+            <a:avLst/>
+          </a:prstGeom>
+          <a:solidFill>
+            <a:srgbClr val="FFFFFF"/>
+          </a:solidFill>
+          <a:ln>
+            <a:solidFill>
+              <a:srgbClr val="333333"/>
+            </a:solidFill>
+          </a:ln>
+        </p:spPr>
+        <p:style>
+          <a:lnRef idx="1">
+            <a:schemeClr val="accent1"/>
+          </a:lnRef>
+          <a:fillRef idx="3">
+            <a:schemeClr val="accent1"/>
+          </a:fillRef>
+          <a:effectRef idx="2">
+            <a:schemeClr val="accent1"/>
+          </a:effectRef>
+          <a:fontRef idx="minor">
+            <a:schemeClr val="lt1"/>
+          </a:fontRef>
+        </p:style>
+        <p:txBody>
+          <a:bodyPr rtlCol="0" anchor="ctr"/>
+          <a:lstStyle/>
+          <a:p>
+            <a:pPr algn="ctr"/>
+          </a:p>
+        </p:txBody>
+      </p:sp>
+      <p:sp>
+        <p:nvSpPr>
+          <p:cNvPr id="15" name="Rectangle 14"/>
+          <p:cNvSpPr/>
+          <p:nvPr/>
+        </p:nvSpPr>
+        <p:spPr>
+          <a:xfrm>
+            <a:off x="640080" y="2761488"/>
+            <a:ext cx="73152" cy="274320"/>
+          </a:xfrm>
+          <a:prstGeom prst="rect">
+            <a:avLst/>
+          </a:prstGeom>
+          <a:solidFill>
+            <a:srgbClr val="269CCB"/>
+          </a:solidFill>
+          <a:ln>
+            <a:noFill/>
+          </a:ln>
+        </p:spPr>
+        <p:style>
+          <a:lnRef idx="1">
+            <a:schemeClr val="accent1"/>
+          </a:lnRef>
+          <a:fillRef idx="3">
+            <a:schemeClr val="accent1"/>
+          </a:fillRef>
+          <a:effectRef idx="2">
+            <a:schemeClr val="accent1"/>
+          </a:effectRef>
+          <a:fontRef idx="minor">
+            <a:schemeClr val="lt1"/>
+          </a:fontRef>
+        </p:style>
+        <p:txBody>
+          <a:bodyPr rtlCol="0" anchor="ctr"/>
+          <a:lstStyle/>
+          <a:p>
+            <a:pPr algn="ctr"/>
+          </a:p>
+        </p:txBody>
+      </p:sp>
+      <p:sp>
+        <p:nvSpPr>
+          <p:cNvPr id="16" name="TextBox 15"/>
           <p:cNvSpPr txBox="1"/>
           <p:nvPr/>
         </p:nvSpPr>
         <p:spPr>
           <a:xfrm>
-            <a:off x="777240" y="3831336"/>
-            <a:ext cx="10774375" cy="822959"/>
+            <a:off x="1097280" y="2706624"/>
+            <a:ext cx="10362895" cy="402336"/>
           </a:xfrm>
           <a:prstGeom prst="rect">
             <a:avLst/>
@@ -7686,42 +7490,24 @@
           <a:noFill/>
         </p:spPr>
         <p:txBody>
-          <a:bodyPr wrap="square">
-            <a:spAutoFit/>
-          </a:bodyPr>
-          <a:lstStyle/>
-          <a:p>
-            <a:r>
-              <a:rPr sz="1200" b="1" i="0">
-                <a:solidFill>
-                  <a:srgbClr val="A02030"/>
-                </a:solidFill>
-                <a:latin typeface="Calibri"/>
-              </a:rPr>
-              <a:t>Atención</a:t>
-            </a:r>
-          </a:p>
-          <a:p>
-            <a:pPr>
-              <a:spcBef>
-                <a:spcPts val="400"/>
-              </a:spcBef>
-            </a:pPr>
-            <a:r>
-              <a:rPr sz="1400" b="0" i="0">
+          <a:bodyPr wrap="square" anchor="ctr"/>
+          <a:lstStyle/>
+          <a:p>
+            <a:r>
+              <a:rPr sz="1500" b="0" i="0">
                 <a:solidFill>
                   <a:srgbClr val="333333"/>
                 </a:solidFill>
                 <a:latin typeface="Calibri"/>
               </a:rPr>
-              <a:t>Entrega del taller, si el docente lo asigna · en la fecha que indique el docente.</a:t>
-            </a:r>
-          </a:p>
-        </p:txBody>
-      </p:sp>
-      <p:sp>
-        <p:nvSpPr>
-          <p:cNvPr id="14" name="TextBox 13"/>
+              <a:t>Que documento exacto tendria que mostrar hoy, en pantalla, para demostrarle a la clinica que la fase de requisitos ya quedo cerrada?</a:t>
+            </a:r>
+          </a:p>
+        </p:txBody>
+      </p:sp>
+      <p:sp>
+        <p:nvSpPr>
+          <p:cNvPr id="17" name="TextBox 16"/>
           <p:cNvSpPr txBox="1"/>
           <p:nvPr/>
         </p:nvSpPr>
@@ -7789,7 +7575,580 @@
         <p:spPr>
           <a:xfrm>
             <a:off x="0" y="0"/>
-            <a:ext cx="12191695" cy="164592"/>
+            <a:ext cx="12191695" cy="960120"/>
+          </a:xfrm>
+          <a:prstGeom prst="rect">
+            <a:avLst/>
+          </a:prstGeom>
+          <a:solidFill>
+            <a:srgbClr val="095292"/>
+          </a:solidFill>
+          <a:ln>
+            <a:noFill/>
+          </a:ln>
+        </p:spPr>
+        <p:style>
+          <a:lnRef idx="1">
+            <a:schemeClr val="accent1"/>
+          </a:lnRef>
+          <a:fillRef idx="3">
+            <a:schemeClr val="accent1"/>
+          </a:fillRef>
+          <a:effectRef idx="2">
+            <a:schemeClr val="accent1"/>
+          </a:effectRef>
+          <a:fontRef idx="minor">
+            <a:schemeClr val="lt1"/>
+          </a:fontRef>
+        </p:style>
+        <p:txBody>
+          <a:bodyPr rtlCol="0" anchor="ctr"/>
+          <a:lstStyle/>
+          <a:p>
+            <a:pPr algn="ctr"/>
+          </a:p>
+        </p:txBody>
+      </p:sp>
+      <p:sp>
+        <p:nvSpPr>
+          <p:cNvPr id="3" name="Rectangle 2"/>
+          <p:cNvSpPr/>
+          <p:nvPr/>
+        </p:nvSpPr>
+        <p:spPr>
+          <a:xfrm>
+            <a:off x="0" y="960120"/>
+            <a:ext cx="12191695" cy="41148"/>
+          </a:xfrm>
+          <a:prstGeom prst="rect">
+            <a:avLst/>
+          </a:prstGeom>
+          <a:solidFill>
+            <a:srgbClr val="FFD000"/>
+          </a:solidFill>
+          <a:ln>
+            <a:noFill/>
+          </a:ln>
+        </p:spPr>
+        <p:style>
+          <a:lnRef idx="1">
+            <a:schemeClr val="accent1"/>
+          </a:lnRef>
+          <a:fillRef idx="3">
+            <a:schemeClr val="accent1"/>
+          </a:fillRef>
+          <a:effectRef idx="2">
+            <a:schemeClr val="accent1"/>
+          </a:effectRef>
+          <a:fontRef idx="minor">
+            <a:schemeClr val="lt1"/>
+          </a:fontRef>
+        </p:style>
+        <p:txBody>
+          <a:bodyPr rtlCol="0" anchor="ctr"/>
+          <a:lstStyle/>
+          <a:p>
+            <a:pPr algn="ctr"/>
+          </a:p>
+        </p:txBody>
+      </p:sp>
+      <p:sp>
+        <p:nvSpPr>
+          <p:cNvPr id="4" name="TextBox 3"/>
+          <p:cNvSpPr txBox="1"/>
+          <p:nvPr/>
+        </p:nvSpPr>
+        <p:spPr>
+          <a:xfrm>
+            <a:off x="457200" y="164592"/>
+            <a:ext cx="11277295" cy="502920"/>
+          </a:xfrm>
+          <a:prstGeom prst="rect">
+            <a:avLst/>
+          </a:prstGeom>
+          <a:noFill/>
+        </p:spPr>
+        <p:txBody>
+          <a:bodyPr wrap="square">
+            <a:spAutoFit/>
+          </a:bodyPr>
+          <a:lstStyle/>
+          <a:p>
+            <a:r>
+              <a:rPr sz="2600" b="1" i="0">
+                <a:solidFill>
+                  <a:srgbClr val="FFFFFF"/>
+                </a:solidFill>
+                <a:latin typeface="Calibri"/>
+              </a:rPr>
+              <a:t>Criterios de exito / entregable</a:t>
+            </a:r>
+          </a:p>
+        </p:txBody>
+      </p:sp>
+      <p:sp>
+        <p:nvSpPr>
+          <p:cNvPr id="5" name="TextBox 4"/>
+          <p:cNvSpPr txBox="1"/>
+          <p:nvPr/>
+        </p:nvSpPr>
+        <p:spPr>
+          <a:xfrm>
+            <a:off x="457200" y="1170432"/>
+            <a:ext cx="11277295" cy="5230368"/>
+          </a:xfrm>
+          <a:prstGeom prst="rect">
+            <a:avLst/>
+          </a:prstGeom>
+          <a:noFill/>
+        </p:spPr>
+        <p:txBody>
+          <a:bodyPr wrap="square">
+            <a:spAutoFit/>
+          </a:bodyPr>
+          <a:lstStyle/>
+          <a:p>
+            <a:pPr>
+              <a:spcAft>
+                <a:spcPts val="800"/>
+              </a:spcAft>
+            </a:pPr>
+            <a:r>
+              <a:rPr sz="2000" b="0" i="0">
+                <a:solidFill>
+                  <a:srgbClr val="333333"/>
+                </a:solidFill>
+                <a:latin typeface="Calibri"/>
+              </a:rPr>
+              <a:t>–   </a:t>
+            </a:r>
+            <a:r>
+              <a:rPr sz="2000" b="1" i="0">
+                <a:solidFill>
+                  <a:srgbClr val="333333"/>
+                </a:solidFill>
+                <a:latin typeface="Calibri"/>
+              </a:rPr>
+              <a:t>Entregable:</a:t>
+            </a:r>
+            <a:r>
+              <a:rPr sz="2000" b="0" i="0">
+                <a:solidFill>
+                  <a:srgbClr val="333333"/>
+                </a:solidFill>
+                <a:latin typeface="Calibri"/>
+              </a:rPr>
+              <a:t> Un documento de una pagina en Google Docs con la tabla Fase / Pregunta que responde / Artefacto de VetCare / Quien lo aprueba, mas dos diagramas en draw.io (recorrido lineal y recorrido en tres vueltas) exportados a PDF y subidos a la plataforma del curso.</a:t>
+            </a:r>
+          </a:p>
+          <a:p>
+            <a:pPr>
+              <a:spcAft>
+                <a:spcPts val="800"/>
+              </a:spcAft>
+            </a:pPr>
+            <a:r>
+              <a:rPr sz="2000" b="0" i="0">
+                <a:solidFill>
+                  <a:srgbClr val="333333"/>
+                </a:solidFill>
+                <a:latin typeface="Calibri"/>
+              </a:rPr>
+              <a:t>–   </a:t>
+            </a:r>
+            <a:r>
+              <a:rPr sz="2000" b="1" i="0">
+                <a:solidFill>
+                  <a:srgbClr val="333333"/>
+                </a:solidFill>
+                <a:latin typeface="Calibri"/>
+              </a:rPr>
+              <a:t>Exito:</a:t>
+            </a:r>
+            <a:r>
+              <a:rPr sz="2000" b="0" i="0">
+                <a:solidFill>
+                  <a:srgbClr val="333333"/>
+                </a:solidFill>
+                <a:latin typeface="Calibri"/>
+              </a:rPr>
+              <a:t> La tabla tiene las cinco fases y en cada una un artefacto concreto de VetCare escrito con nombre propio, no una definicion generica de libro.</a:t>
+            </a:r>
+          </a:p>
+          <a:p>
+            <a:pPr>
+              <a:spcAft>
+                <a:spcPts val="800"/>
+              </a:spcAft>
+            </a:pPr>
+            <a:r>
+              <a:rPr sz="2000" b="0" i="0">
+                <a:solidFill>
+                  <a:srgbClr val="333333"/>
+                </a:solidFill>
+                <a:latin typeface="Calibri"/>
+              </a:rPr>
+              <a:t>–   </a:t>
+            </a:r>
+            <a:r>
+              <a:rPr sz="2000" b="1" i="0">
+                <a:solidFill>
+                  <a:srgbClr val="333333"/>
+                </a:solidFill>
+                <a:latin typeface="Calibri"/>
+              </a:rPr>
+              <a:t>Exito:</a:t>
+            </a:r>
+            <a:r>
+              <a:rPr sz="2000" b="0" i="0">
+                <a:solidFill>
+                  <a:srgbClr val="333333"/>
+                </a:solidFill>
+                <a:latin typeface="Calibri"/>
+              </a:rPr>
+              <a:t> El diagrama lineal y el diagrama en vueltas usan exactamente las mismas cinco cajas; lo unico distinto entre ellos es el recorrido.</a:t>
+            </a:r>
+          </a:p>
+          <a:p>
+            <a:pPr>
+              <a:spcAft>
+                <a:spcPts val="800"/>
+              </a:spcAft>
+            </a:pPr>
+            <a:r>
+              <a:rPr sz="2000" b="0" i="0">
+                <a:solidFill>
+                  <a:srgbClr val="333333"/>
+                </a:solidFill>
+                <a:latin typeface="Calibri"/>
+              </a:rPr>
+              <a:t>–   </a:t>
+            </a:r>
+            <a:r>
+              <a:rPr sz="2000" b="1" i="0">
+                <a:solidFill>
+                  <a:srgbClr val="333333"/>
+                </a:solidFill>
+                <a:latin typeface="Calibri"/>
+              </a:rPr>
+              <a:t>Exito:</a:t>
+            </a:r>
+            <a:r>
+              <a:rPr sz="2000" b="0" i="0">
+                <a:solidFill>
+                  <a:srgbClr val="333333"/>
+                </a:solidFill>
+                <a:latin typeface="Calibri"/>
+              </a:rPr>
+              <a:t> La fase actual del equipo esta marcada y sustentada con dos evidencias verificables del estado real de VetCare.</a:t>
+            </a:r>
+          </a:p>
+          <a:p>
+            <a:pPr>
+              <a:spcAft>
+                <a:spcPts val="800"/>
+              </a:spcAft>
+            </a:pPr>
+            <a:r>
+              <a:rPr sz="2000" b="0" i="0">
+                <a:solidFill>
+                  <a:srgbClr val="333333"/>
+                </a:solidFill>
+                <a:latin typeface="Calibri"/>
+              </a:rPr>
+              <a:t>–   </a:t>
+            </a:r>
+            <a:r>
+              <a:rPr sz="2000" b="1" i="0">
+                <a:solidFill>
+                  <a:srgbClr val="333333"/>
+                </a:solidFill>
+                <a:latin typeface="Calibri"/>
+              </a:rPr>
+              <a:t>Exito:</a:t>
+            </a:r>
+            <a:r>
+              <a:rPr sz="2000" b="0" i="0">
+                <a:solidFill>
+                  <a:srgbClr val="333333"/>
+                </a:solidFill>
+                <a:latin typeface="Calibri"/>
+              </a:rPr>
+              <a:t> El parrafo final distingue con hechos concretos cuando termina el proyecto y cuando terminaria el producto, e incluye un ejemplo de mantenimiento.</a:t>
+            </a:r>
+          </a:p>
+          <a:p>
+            <a:pPr>
+              <a:spcAft>
+                <a:spcPts val="800"/>
+              </a:spcAft>
+            </a:pPr>
+            <a:r>
+              <a:rPr sz="2000" b="0" i="0">
+                <a:solidFill>
+                  <a:srgbClr val="333333"/>
+                </a:solidFill>
+                <a:latin typeface="Calibri"/>
+              </a:rPr>
+              <a:t>–   </a:t>
+            </a:r>
+            <a:r>
+              <a:rPr sz="2000" b="1" i="0">
+                <a:solidFill>
+                  <a:srgbClr val="333333"/>
+                </a:solidFill>
+                <a:latin typeface="Calibri"/>
+              </a:rPr>
+              <a:t>Entrega en la plataforma del curso</a:t>
+            </a:r>
+            <a:r>
+              <a:rPr sz="2000" b="0" i="0">
+                <a:solidFill>
+                  <a:srgbClr val="333333"/>
+                </a:solidFill>
+                <a:latin typeface="Calibri"/>
+              </a:rPr>
+              <a:t> — en la fecha que indique el docente.</a:t>
+            </a:r>
+          </a:p>
+        </p:txBody>
+      </p:sp>
+      <p:sp>
+        <p:nvSpPr>
+          <p:cNvPr id="6" name="TextBox 5"/>
+          <p:cNvSpPr txBox="1"/>
+          <p:nvPr/>
+        </p:nvSpPr>
+        <p:spPr>
+          <a:xfrm>
+            <a:off x="11185855" y="6473952"/>
+            <a:ext cx="640080" cy="274320"/>
+          </a:xfrm>
+          <a:prstGeom prst="rect">
+            <a:avLst/>
+          </a:prstGeom>
+          <a:noFill/>
+        </p:spPr>
+        <p:txBody>
+          <a:bodyPr wrap="square">
+            <a:spAutoFit/>
+          </a:bodyPr>
+          <a:lstStyle/>
+          <a:p>
+            <a:pPr algn="r"/>
+            <a:r>
+              <a:rPr sz="1100" b="0" i="0">
+                <a:solidFill>
+                  <a:srgbClr val="666666"/>
+                </a:solidFill>
+                <a:latin typeface="Calibri"/>
+              </a:rPr>
+              <a:t>18</a:t>
+            </a:r>
+          </a:p>
+        </p:txBody>
+      </p:sp>
+    </p:spTree>
+  </p:cSld>
+  <p:clrMapOvr>
+    <a:masterClrMapping/>
+  </p:clrMapOvr>
+</p:sld>
+</file>
+
+<file path=ppt/slides/slide19.xml><?xml version="1.0" encoding="utf-8"?>
+<p:sld xmlns:a="http://schemas.openxmlformats.org/drawingml/2006/main" xmlns:p="http://schemas.openxmlformats.org/presentationml/2006/main" xmlns:r="http://schemas.openxmlformats.org/officeDocument/2006/relationships">
+  <p:cSld>
+    <p:bg>
+      <p:bgPr>
+        <a:solidFill>
+          <a:srgbClr val="FFFFFF"/>
+        </a:solidFill>
+        <a:effectLst/>
+      </p:bgPr>
+    </p:bg>
+    <p:spTree>
+      <p:nvGrpSpPr>
+        <p:cNvPr id="1" name=""/>
+        <p:cNvGrpSpPr/>
+        <p:nvPr/>
+      </p:nvGrpSpPr>
+      <p:grpSpPr/>
+      <p:sp>
+        <p:nvSpPr>
+          <p:cNvPr id="2" name="Rectangle 1"/>
+          <p:cNvSpPr/>
+          <p:nvPr/>
+        </p:nvSpPr>
+        <p:spPr>
+          <a:xfrm>
+            <a:off x="0" y="0"/>
+            <a:ext cx="12191695" cy="960120"/>
+          </a:xfrm>
+          <a:prstGeom prst="rect">
+            <a:avLst/>
+          </a:prstGeom>
+          <a:solidFill>
+            <a:srgbClr val="095292"/>
+          </a:solidFill>
+          <a:ln>
+            <a:noFill/>
+          </a:ln>
+        </p:spPr>
+        <p:style>
+          <a:lnRef idx="1">
+            <a:schemeClr val="accent1"/>
+          </a:lnRef>
+          <a:fillRef idx="3">
+            <a:schemeClr val="accent1"/>
+          </a:fillRef>
+          <a:effectRef idx="2">
+            <a:schemeClr val="accent1"/>
+          </a:effectRef>
+          <a:fontRef idx="minor">
+            <a:schemeClr val="lt1"/>
+          </a:fontRef>
+        </p:style>
+        <p:txBody>
+          <a:bodyPr rtlCol="0" anchor="ctr"/>
+          <a:lstStyle/>
+          <a:p>
+            <a:pPr algn="ctr"/>
+          </a:p>
+        </p:txBody>
+      </p:sp>
+      <p:sp>
+        <p:nvSpPr>
+          <p:cNvPr id="3" name="Rectangle 2"/>
+          <p:cNvSpPr/>
+          <p:nvPr/>
+        </p:nvSpPr>
+        <p:spPr>
+          <a:xfrm>
+            <a:off x="0" y="960120"/>
+            <a:ext cx="12191695" cy="41148"/>
+          </a:xfrm>
+          <a:prstGeom prst="rect">
+            <a:avLst/>
+          </a:prstGeom>
+          <a:solidFill>
+            <a:srgbClr val="FFD000"/>
+          </a:solidFill>
+          <a:ln>
+            <a:noFill/>
+          </a:ln>
+        </p:spPr>
+        <p:style>
+          <a:lnRef idx="1">
+            <a:schemeClr val="accent1"/>
+          </a:lnRef>
+          <a:fillRef idx="3">
+            <a:schemeClr val="accent1"/>
+          </a:fillRef>
+          <a:effectRef idx="2">
+            <a:schemeClr val="accent1"/>
+          </a:effectRef>
+          <a:fontRef idx="minor">
+            <a:schemeClr val="lt1"/>
+          </a:fontRef>
+        </p:style>
+        <p:txBody>
+          <a:bodyPr rtlCol="0" anchor="ctr"/>
+          <a:lstStyle/>
+          <a:p>
+            <a:pPr algn="ctr"/>
+          </a:p>
+        </p:txBody>
+      </p:sp>
+      <p:sp>
+        <p:nvSpPr>
+          <p:cNvPr id="4" name="TextBox 3"/>
+          <p:cNvSpPr txBox="1"/>
+          <p:nvPr/>
+        </p:nvSpPr>
+        <p:spPr>
+          <a:xfrm>
+            <a:off x="457200" y="164592"/>
+            <a:ext cx="11277295" cy="502920"/>
+          </a:xfrm>
+          <a:prstGeom prst="rect">
+            <a:avLst/>
+          </a:prstGeom>
+          <a:noFill/>
+        </p:spPr>
+        <p:txBody>
+          <a:bodyPr wrap="square">
+            <a:spAutoFit/>
+          </a:bodyPr>
+          <a:lstStyle/>
+          <a:p>
+            <a:r>
+              <a:rPr sz="2600" b="1" i="0">
+                <a:solidFill>
+                  <a:srgbClr val="FFFFFF"/>
+                </a:solidFill>
+                <a:latin typeface="Calibri"/>
+              </a:rPr>
+              <a:t>Para el PI esta semana</a:t>
+            </a:r>
+          </a:p>
+        </p:txBody>
+      </p:sp>
+      <p:sp>
+        <p:nvSpPr>
+          <p:cNvPr id="5" name="Rounded Rectangle 4"/>
+          <p:cNvSpPr/>
+          <p:nvPr/>
+        </p:nvSpPr>
+        <p:spPr>
+          <a:xfrm>
+            <a:off x="457200" y="1261872"/>
+            <a:ext cx="11277295" cy="1051560"/>
+          </a:xfrm>
+          <a:prstGeom prst="roundRect">
+            <a:avLst>
+              <a:gd name="adj" fmla="val 12000"/>
+            </a:avLst>
+          </a:prstGeom>
+          <a:solidFill>
+            <a:srgbClr val="E8F4FA"/>
+          </a:solidFill>
+          <a:ln>
+            <a:noFill/>
+          </a:ln>
+        </p:spPr>
+        <p:style>
+          <a:lnRef idx="1">
+            <a:schemeClr val="accent1"/>
+          </a:lnRef>
+          <a:fillRef idx="3">
+            <a:schemeClr val="accent1"/>
+          </a:fillRef>
+          <a:effectRef idx="2">
+            <a:schemeClr val="accent1"/>
+          </a:effectRef>
+          <a:fontRef idx="minor">
+            <a:schemeClr val="lt1"/>
+          </a:fontRef>
+        </p:style>
+        <p:txBody>
+          <a:bodyPr rtlCol="0" anchor="ctr"/>
+          <a:lstStyle/>
+          <a:p>
+            <a:pPr algn="ctr"/>
+          </a:p>
+        </p:txBody>
+      </p:sp>
+      <p:sp>
+        <p:nvSpPr>
+          <p:cNvPr id="6" name="Rectangle 5"/>
+          <p:cNvSpPr/>
+          <p:nvPr/>
+        </p:nvSpPr>
+        <p:spPr>
+          <a:xfrm>
+            <a:off x="457200" y="1261872"/>
+            <a:ext cx="128016" cy="1051560"/>
           </a:xfrm>
           <a:prstGeom prst="rect">
             <a:avLst/>
@@ -7823,73 +8182,16 @@
           </a:p>
         </p:txBody>
       </p:sp>
-      <p:pic>
-        <p:nvPicPr>
-          <p:cNvPr id="3" name="Picture 2" descr="logo_uniajc_color.png"/>
-          <p:cNvPicPr>
-            <a:picLocks noChangeAspect="1"/>
-          </p:cNvPicPr>
-          <p:nvPr/>
-        </p:nvPicPr>
-        <p:blipFill>
-          <a:blip r:embed="rId2"/>
-          <a:stretch>
-            <a:fillRect/>
-          </a:stretch>
-        </p:blipFill>
-        <p:spPr>
-          <a:xfrm>
-            <a:off x="10271455" y="5998464"/>
-            <a:ext cx="1463040" cy="643233"/>
-          </a:xfrm>
-          <a:prstGeom prst="rect">
-            <a:avLst/>
-          </a:prstGeom>
-        </p:spPr>
-      </p:pic>
-      <p:sp>
-        <p:nvSpPr>
-          <p:cNvPr id="4" name="TextBox 3"/>
+      <p:sp>
+        <p:nvSpPr>
+          <p:cNvPr id="7" name="TextBox 6"/>
           <p:cNvSpPr txBox="1"/>
           <p:nvPr/>
         </p:nvSpPr>
         <p:spPr>
           <a:xfrm>
-            <a:off x="457200" y="1737360"/>
-            <a:ext cx="11277295" cy="1097280"/>
-          </a:xfrm>
-          <a:prstGeom prst="rect">
-            <a:avLst/>
-          </a:prstGeom>
-          <a:noFill/>
-        </p:spPr>
-        <p:txBody>
-          <a:bodyPr wrap="square" anchor="ctr"/>
-          <a:lstStyle/>
-          <a:p>
-            <a:pPr algn="ctr"/>
-            <a:r>
-              <a:rPr sz="3400" b="1" i="0">
-                <a:solidFill>
-                  <a:srgbClr val="095292"/>
-                </a:solidFill>
-                <a:latin typeface="Calibri"/>
-              </a:rPr>
-              <a:t>Clase 2 · VetCare avanza</a:t>
-            </a:r>
-          </a:p>
-        </p:txBody>
-      </p:sp>
-      <p:sp>
-        <p:nvSpPr>
-          <p:cNvPr id="5" name="TextBox 4"/>
-          <p:cNvSpPr txBox="1"/>
-          <p:nvPr/>
-        </p:nvSpPr>
-        <p:spPr>
-          <a:xfrm>
-            <a:off x="457200" y="3017520"/>
-            <a:ext cx="11277295" cy="1645920"/>
+            <a:off x="777240" y="1399031"/>
+            <a:ext cx="10774375" cy="822959"/>
           </a:xfrm>
           <a:prstGeom prst="rect">
             <a:avLst/>
@@ -7902,65 +8204,132 @@
           </a:bodyPr>
           <a:lstStyle/>
           <a:p>
-            <a:pPr algn="ctr">
-              <a:spcAft>
-                <a:spcPts val="600"/>
-              </a:spcAft>
+            <a:r>
+              <a:rPr sz="1200" b="1" i="0">
+                <a:solidFill>
+                  <a:srgbClr val="269CCB"/>
+                </a:solidFill>
+                <a:latin typeface="Calibri"/>
+              </a:rPr>
+              <a:t>Info</a:t>
+            </a:r>
+          </a:p>
+          <a:p>
+            <a:pPr>
+              <a:spcBef>
+                <a:spcPts val="400"/>
+              </a:spcBef>
             </a:pPr>
             <a:r>
-              <a:rPr sz="1600" b="0" i="0">
+              <a:rPr sz="1400" b="0" i="0">
                 <a:solidFill>
                   <a:srgbClr val="333333"/>
                 </a:solidFill>
                 <a:latin typeface="Calibri"/>
               </a:rPr>
-              <a:t>Queda listo el mapa de fases de VetCare con el artefacto concreto que produce cada fase y la marca de en cual esta parado el equipo hoy.</a:t>
-            </a:r>
-          </a:p>
-          <a:p>
-            <a:pPr algn="ctr">
-              <a:spcAft>
-                <a:spcPts val="600"/>
-              </a:spcAft>
-            </a:pPr>
-            <a:r>
-              <a:rPr sz="1600" b="0" i="0">
-                <a:solidFill>
-                  <a:srgbClr val="333333"/>
-                </a:solidFill>
-                <a:latin typeface="Calibri"/>
-              </a:rPr>
-              <a:t>Entregable: Un documento de una pagina en Google Docs con la tabla Fase / Pregunta que responde / Artefacto de VetCare / Quien lo aprueba, mas dos diagramas en draw.io (recorrido lineal y recorrido en tres vueltas) exportados a PDF y subidos a la plataforma del curso.</a:t>
-            </a:r>
-          </a:p>
-          <a:p>
-            <a:pPr algn="ctr">
-              <a:spcAft>
-                <a:spcPts val="600"/>
-              </a:spcAft>
-            </a:pPr>
-            <a:r>
-              <a:rPr sz="1600" b="0" i="0">
-                <a:solidFill>
-                  <a:srgbClr val="333333"/>
-                </a:solidFill>
-                <a:latin typeface="Calibri"/>
-              </a:rPr>
-              <a:t>Siguiente clase: continuamos el hilo del PI</a:t>
-            </a:r>
-          </a:p>
-        </p:txBody>
-      </p:sp>
-      <p:sp>
-        <p:nvSpPr>
-          <p:cNvPr id="6" name="TextBox 5"/>
+              <a:t>Hito: Queda listo el mapa de fases de VetCare con el artefacto concreto que produce cada fase y la marca de en cual esta parado el equipo hoy.</a:t>
+            </a:r>
+          </a:p>
+        </p:txBody>
+      </p:sp>
+      <p:sp>
+        <p:nvSpPr>
+          <p:cNvPr id="8" name="Rounded Rectangle 7"/>
+          <p:cNvSpPr/>
+          <p:nvPr/>
+        </p:nvSpPr>
+        <p:spPr>
+          <a:xfrm>
+            <a:off x="457200" y="2478024"/>
+            <a:ext cx="11277295" cy="1051560"/>
+          </a:xfrm>
+          <a:prstGeom prst="roundRect">
+            <a:avLst>
+              <a:gd name="adj" fmla="val 12000"/>
+            </a:avLst>
+          </a:prstGeom>
+          <a:solidFill>
+            <a:srgbClr val="FFF8E1"/>
+          </a:solidFill>
+          <a:ln>
+            <a:noFill/>
+          </a:ln>
+        </p:spPr>
+        <p:style>
+          <a:lnRef idx="1">
+            <a:schemeClr val="accent1"/>
+          </a:lnRef>
+          <a:fillRef idx="3">
+            <a:schemeClr val="accent1"/>
+          </a:fillRef>
+          <a:effectRef idx="2">
+            <a:schemeClr val="accent1"/>
+          </a:effectRef>
+          <a:fontRef idx="minor">
+            <a:schemeClr val="lt1"/>
+          </a:fontRef>
+        </p:style>
+        <p:txBody>
+          <a:bodyPr rtlCol="0" anchor="ctr"/>
+          <a:lstStyle/>
+          <a:p>
+            <a:pPr algn="ctr"/>
+          </a:p>
+        </p:txBody>
+      </p:sp>
+      <p:sp>
+        <p:nvSpPr>
+          <p:cNvPr id="9" name="Rectangle 8"/>
+          <p:cNvSpPr/>
+          <p:nvPr/>
+        </p:nvSpPr>
+        <p:spPr>
+          <a:xfrm>
+            <a:off x="457200" y="2478024"/>
+            <a:ext cx="128016" cy="1051560"/>
+          </a:xfrm>
+          <a:prstGeom prst="rect">
+            <a:avLst/>
+          </a:prstGeom>
+          <a:solidFill>
+            <a:srgbClr val="FFD000"/>
+          </a:solidFill>
+          <a:ln>
+            <a:noFill/>
+          </a:ln>
+        </p:spPr>
+        <p:style>
+          <a:lnRef idx="1">
+            <a:schemeClr val="accent1"/>
+          </a:lnRef>
+          <a:fillRef idx="3">
+            <a:schemeClr val="accent1"/>
+          </a:fillRef>
+          <a:effectRef idx="2">
+            <a:schemeClr val="accent1"/>
+          </a:effectRef>
+          <a:fontRef idx="minor">
+            <a:schemeClr val="lt1"/>
+          </a:fontRef>
+        </p:style>
+        <p:txBody>
+          <a:bodyPr rtlCol="0" anchor="ctr"/>
+          <a:lstStyle/>
+          <a:p>
+            <a:pPr algn="ctr"/>
+          </a:p>
+        </p:txBody>
+      </p:sp>
+      <p:sp>
+        <p:nvSpPr>
+          <p:cNvPr id="10" name="TextBox 9"/>
           <p:cNvSpPr txBox="1"/>
           <p:nvPr/>
         </p:nvSpPr>
         <p:spPr>
           <a:xfrm>
-            <a:off x="457200" y="4754880"/>
-            <a:ext cx="11277295" cy="640080"/>
+            <a:off x="777240" y="2615184"/>
+            <a:ext cx="10774375" cy="822959"/>
           </a:xfrm>
           <a:prstGeom prst="rect">
             <a:avLst/>
@@ -7973,15 +8342,203 @@
           </a:bodyPr>
           <a:lstStyle/>
           <a:p>
+            <a:r>
+              <a:rPr sz="1200" b="1" i="0">
+                <a:solidFill>
+                  <a:srgbClr val="FFD000"/>
+                </a:solidFill>
+                <a:latin typeface="Calibri"/>
+              </a:rPr>
+              <a:t>Aclaración</a:t>
+            </a:r>
+          </a:p>
+          <a:p>
+            <a:pPr>
+              <a:spcBef>
+                <a:spcPts val="400"/>
+              </a:spcBef>
+            </a:pPr>
+            <a:r>
+              <a:rPr sz="1400" b="0" i="0">
+                <a:solidFill>
+                  <a:srgbClr val="333333"/>
+                </a:solidFill>
+                <a:latin typeface="Calibri"/>
+              </a:rPr>
+              <a:t>Enunciado completo: Clases/Proyecto Integrador/ (VetCare).</a:t>
+            </a:r>
+          </a:p>
+        </p:txBody>
+      </p:sp>
+      <p:sp>
+        <p:nvSpPr>
+          <p:cNvPr id="11" name="Rounded Rectangle 10"/>
+          <p:cNvSpPr/>
+          <p:nvPr/>
+        </p:nvSpPr>
+        <p:spPr>
+          <a:xfrm>
+            <a:off x="457200" y="3694176"/>
+            <a:ext cx="11277295" cy="1051560"/>
+          </a:xfrm>
+          <a:prstGeom prst="roundRect">
+            <a:avLst>
+              <a:gd name="adj" fmla="val 12000"/>
+            </a:avLst>
+          </a:prstGeom>
+          <a:solidFill>
+            <a:srgbClr val="FBE4E4"/>
+          </a:solidFill>
+          <a:ln>
+            <a:noFill/>
+          </a:ln>
+        </p:spPr>
+        <p:style>
+          <a:lnRef idx="1">
+            <a:schemeClr val="accent1"/>
+          </a:lnRef>
+          <a:fillRef idx="3">
+            <a:schemeClr val="accent1"/>
+          </a:fillRef>
+          <a:effectRef idx="2">
+            <a:schemeClr val="accent1"/>
+          </a:effectRef>
+          <a:fontRef idx="minor">
+            <a:schemeClr val="lt1"/>
+          </a:fontRef>
+        </p:style>
+        <p:txBody>
+          <a:bodyPr rtlCol="0" anchor="ctr"/>
+          <a:lstStyle/>
+          <a:p>
             <a:pPr algn="ctr"/>
-            <a:r>
-              <a:rPr sz="2000" b="1" i="0">
-                <a:solidFill>
-                  <a:srgbClr val="269CCB"/>
-                </a:solidFill>
-                <a:latin typeface="Calibri"/>
-              </a:rPr>
-              <a:t>Teoria al servicio del proyecto</a:t>
+          </a:p>
+        </p:txBody>
+      </p:sp>
+      <p:sp>
+        <p:nvSpPr>
+          <p:cNvPr id="12" name="Rectangle 11"/>
+          <p:cNvSpPr/>
+          <p:nvPr/>
+        </p:nvSpPr>
+        <p:spPr>
+          <a:xfrm>
+            <a:off x="457200" y="3694176"/>
+            <a:ext cx="128016" cy="1051560"/>
+          </a:xfrm>
+          <a:prstGeom prst="rect">
+            <a:avLst/>
+          </a:prstGeom>
+          <a:solidFill>
+            <a:srgbClr val="A02030"/>
+          </a:solidFill>
+          <a:ln>
+            <a:noFill/>
+          </a:ln>
+        </p:spPr>
+        <p:style>
+          <a:lnRef idx="1">
+            <a:schemeClr val="accent1"/>
+          </a:lnRef>
+          <a:fillRef idx="3">
+            <a:schemeClr val="accent1"/>
+          </a:fillRef>
+          <a:effectRef idx="2">
+            <a:schemeClr val="accent1"/>
+          </a:effectRef>
+          <a:fontRef idx="minor">
+            <a:schemeClr val="lt1"/>
+          </a:fontRef>
+        </p:style>
+        <p:txBody>
+          <a:bodyPr rtlCol="0" anchor="ctr"/>
+          <a:lstStyle/>
+          <a:p>
+            <a:pPr algn="ctr"/>
+          </a:p>
+        </p:txBody>
+      </p:sp>
+      <p:sp>
+        <p:nvSpPr>
+          <p:cNvPr id="13" name="TextBox 12"/>
+          <p:cNvSpPr txBox="1"/>
+          <p:nvPr/>
+        </p:nvSpPr>
+        <p:spPr>
+          <a:xfrm>
+            <a:off x="777240" y="3831336"/>
+            <a:ext cx="10774375" cy="822959"/>
+          </a:xfrm>
+          <a:prstGeom prst="rect">
+            <a:avLst/>
+          </a:prstGeom>
+          <a:noFill/>
+        </p:spPr>
+        <p:txBody>
+          <a:bodyPr wrap="square">
+            <a:spAutoFit/>
+          </a:bodyPr>
+          <a:lstStyle/>
+          <a:p>
+            <a:r>
+              <a:rPr sz="1200" b="1" i="0">
+                <a:solidFill>
+                  <a:srgbClr val="A02030"/>
+                </a:solidFill>
+                <a:latin typeface="Calibri"/>
+              </a:rPr>
+              <a:t>Atención</a:t>
+            </a:r>
+          </a:p>
+          <a:p>
+            <a:pPr>
+              <a:spcBef>
+                <a:spcPts val="400"/>
+              </a:spcBef>
+            </a:pPr>
+            <a:r>
+              <a:rPr sz="1400" b="0" i="0">
+                <a:solidFill>
+                  <a:srgbClr val="333333"/>
+                </a:solidFill>
+                <a:latin typeface="Calibri"/>
+              </a:rPr>
+              <a:t>Entrega del taller, si el docente lo asigna · en la fecha que indique el docente.</a:t>
+            </a:r>
+          </a:p>
+        </p:txBody>
+      </p:sp>
+      <p:sp>
+        <p:nvSpPr>
+          <p:cNvPr id="14" name="TextBox 13"/>
+          <p:cNvSpPr txBox="1"/>
+          <p:nvPr/>
+        </p:nvSpPr>
+        <p:spPr>
+          <a:xfrm>
+            <a:off x="11185855" y="6473952"/>
+            <a:ext cx="640080" cy="274320"/>
+          </a:xfrm>
+          <a:prstGeom prst="rect">
+            <a:avLst/>
+          </a:prstGeom>
+          <a:noFill/>
+        </p:spPr>
+        <p:txBody>
+          <a:bodyPr wrap="square">
+            <a:spAutoFit/>
+          </a:bodyPr>
+          <a:lstStyle/>
+          <a:p>
+            <a:pPr algn="r"/>
+            <a:r>
+              <a:rPr sz="1100" b="0" i="0">
+                <a:solidFill>
+                  <a:srgbClr val="666666"/>
+                </a:solidFill>
+                <a:latin typeface="Calibri"/>
+              </a:rPr>
+              <a:t>19</a:t>
             </a:r>
           </a:p>
         </p:txBody>
@@ -8325,6 +8882,238 @@
 </p:sld>
 </file>
 
+<file path=ppt/slides/slide20.xml><?xml version="1.0" encoding="utf-8"?>
+<p:sld xmlns:a="http://schemas.openxmlformats.org/drawingml/2006/main" xmlns:p="http://schemas.openxmlformats.org/presentationml/2006/main" xmlns:r="http://schemas.openxmlformats.org/officeDocument/2006/relationships">
+  <p:cSld>
+    <p:bg>
+      <p:bgPr>
+        <a:solidFill>
+          <a:srgbClr val="FFFFFF"/>
+        </a:solidFill>
+        <a:effectLst/>
+      </p:bgPr>
+    </p:bg>
+    <p:spTree>
+      <p:nvGrpSpPr>
+        <p:cNvPr id="1" name=""/>
+        <p:cNvGrpSpPr/>
+        <p:nvPr/>
+      </p:nvGrpSpPr>
+      <p:grpSpPr/>
+      <p:sp>
+        <p:nvSpPr>
+          <p:cNvPr id="2" name="Rectangle 1"/>
+          <p:cNvSpPr/>
+          <p:nvPr/>
+        </p:nvSpPr>
+        <p:spPr>
+          <a:xfrm>
+            <a:off x="0" y="0"/>
+            <a:ext cx="12191695" cy="164592"/>
+          </a:xfrm>
+          <a:prstGeom prst="rect">
+            <a:avLst/>
+          </a:prstGeom>
+          <a:solidFill>
+            <a:srgbClr val="269CCB"/>
+          </a:solidFill>
+          <a:ln>
+            <a:noFill/>
+          </a:ln>
+        </p:spPr>
+        <p:style>
+          <a:lnRef idx="1">
+            <a:schemeClr val="accent1"/>
+          </a:lnRef>
+          <a:fillRef idx="3">
+            <a:schemeClr val="accent1"/>
+          </a:fillRef>
+          <a:effectRef idx="2">
+            <a:schemeClr val="accent1"/>
+          </a:effectRef>
+          <a:fontRef idx="minor">
+            <a:schemeClr val="lt1"/>
+          </a:fontRef>
+        </p:style>
+        <p:txBody>
+          <a:bodyPr rtlCol="0" anchor="ctr"/>
+          <a:lstStyle/>
+          <a:p>
+            <a:pPr algn="ctr"/>
+          </a:p>
+        </p:txBody>
+      </p:sp>
+      <p:pic>
+        <p:nvPicPr>
+          <p:cNvPr id="3" name="Picture 2" descr="logo_uniajc_color.png"/>
+          <p:cNvPicPr>
+            <a:picLocks noChangeAspect="1"/>
+          </p:cNvPicPr>
+          <p:nvPr/>
+        </p:nvPicPr>
+        <p:blipFill>
+          <a:blip r:embed="rId2"/>
+          <a:stretch>
+            <a:fillRect/>
+          </a:stretch>
+        </p:blipFill>
+        <p:spPr>
+          <a:xfrm>
+            <a:off x="10271455" y="5998464"/>
+            <a:ext cx="1463040" cy="643233"/>
+          </a:xfrm>
+          <a:prstGeom prst="rect">
+            <a:avLst/>
+          </a:prstGeom>
+        </p:spPr>
+      </p:pic>
+      <p:sp>
+        <p:nvSpPr>
+          <p:cNvPr id="4" name="TextBox 3"/>
+          <p:cNvSpPr txBox="1"/>
+          <p:nvPr/>
+        </p:nvSpPr>
+        <p:spPr>
+          <a:xfrm>
+            <a:off x="457200" y="1737360"/>
+            <a:ext cx="11277295" cy="1097280"/>
+          </a:xfrm>
+          <a:prstGeom prst="rect">
+            <a:avLst/>
+          </a:prstGeom>
+          <a:noFill/>
+        </p:spPr>
+        <p:txBody>
+          <a:bodyPr wrap="square" anchor="ctr"/>
+          <a:lstStyle/>
+          <a:p>
+            <a:pPr algn="ctr"/>
+            <a:r>
+              <a:rPr sz="3400" b="1" i="0">
+                <a:solidFill>
+                  <a:srgbClr val="095292"/>
+                </a:solidFill>
+                <a:latin typeface="Calibri"/>
+              </a:rPr>
+              <a:t>Clase 2 · VetCare avanza</a:t>
+            </a:r>
+          </a:p>
+        </p:txBody>
+      </p:sp>
+      <p:sp>
+        <p:nvSpPr>
+          <p:cNvPr id="5" name="TextBox 4"/>
+          <p:cNvSpPr txBox="1"/>
+          <p:nvPr/>
+        </p:nvSpPr>
+        <p:spPr>
+          <a:xfrm>
+            <a:off x="457200" y="3017520"/>
+            <a:ext cx="11277295" cy="1645920"/>
+          </a:xfrm>
+          <a:prstGeom prst="rect">
+            <a:avLst/>
+          </a:prstGeom>
+          <a:noFill/>
+        </p:spPr>
+        <p:txBody>
+          <a:bodyPr wrap="square">
+            <a:spAutoFit/>
+          </a:bodyPr>
+          <a:lstStyle/>
+          <a:p>
+            <a:pPr algn="ctr">
+              <a:spcAft>
+                <a:spcPts val="600"/>
+              </a:spcAft>
+            </a:pPr>
+            <a:r>
+              <a:rPr sz="1600" b="0" i="0">
+                <a:solidFill>
+                  <a:srgbClr val="333333"/>
+                </a:solidFill>
+                <a:latin typeface="Calibri"/>
+              </a:rPr>
+              <a:t>Queda listo el mapa de fases de VetCare con el artefacto concreto que produce cada fase y la marca de en cual esta parado el equipo hoy.</a:t>
+            </a:r>
+          </a:p>
+          <a:p>
+            <a:pPr algn="ctr">
+              <a:spcAft>
+                <a:spcPts val="600"/>
+              </a:spcAft>
+            </a:pPr>
+            <a:r>
+              <a:rPr sz="1600" b="0" i="0">
+                <a:solidFill>
+                  <a:srgbClr val="333333"/>
+                </a:solidFill>
+                <a:latin typeface="Calibri"/>
+              </a:rPr>
+              <a:t>Entregable: Un documento de una pagina en Google Docs con la tabla Fase / Pregunta que responde / Artefacto de VetCare / Quien lo aprueba, mas dos diagramas en draw.io (recorrido lineal y recorrido en tres vueltas) exportados a PDF y subidos a la plataforma del curso.</a:t>
+            </a:r>
+          </a:p>
+          <a:p>
+            <a:pPr algn="ctr">
+              <a:spcAft>
+                <a:spcPts val="600"/>
+              </a:spcAft>
+            </a:pPr>
+            <a:r>
+              <a:rPr sz="1600" b="0" i="0">
+                <a:solidFill>
+                  <a:srgbClr val="333333"/>
+                </a:solidFill>
+                <a:latin typeface="Calibri"/>
+              </a:rPr>
+              <a:t>Siguiente clase: continuamos el hilo del PI</a:t>
+            </a:r>
+          </a:p>
+        </p:txBody>
+      </p:sp>
+      <p:sp>
+        <p:nvSpPr>
+          <p:cNvPr id="6" name="TextBox 5"/>
+          <p:cNvSpPr txBox="1"/>
+          <p:nvPr/>
+        </p:nvSpPr>
+        <p:spPr>
+          <a:xfrm>
+            <a:off x="457200" y="4754880"/>
+            <a:ext cx="11277295" cy="640080"/>
+          </a:xfrm>
+          <a:prstGeom prst="rect">
+            <a:avLst/>
+          </a:prstGeom>
+          <a:noFill/>
+        </p:spPr>
+        <p:txBody>
+          <a:bodyPr wrap="square">
+            <a:spAutoFit/>
+          </a:bodyPr>
+          <a:lstStyle/>
+          <a:p>
+            <a:pPr algn="ctr"/>
+            <a:r>
+              <a:rPr sz="2000" b="1" i="0">
+                <a:solidFill>
+                  <a:srgbClr val="269CCB"/>
+                </a:solidFill>
+                <a:latin typeface="Calibri"/>
+              </a:rPr>
+              <a:t>Teoria al servicio del proyecto</a:t>
+            </a:r>
+          </a:p>
+        </p:txBody>
+      </p:sp>
+    </p:spTree>
+  </p:cSld>
+  <p:clrMapOvr>
+    <a:masterClrMapping/>
+  </p:clrMapOvr>
+</p:sld>
+</file>
+
 <file path=ppt/slides/slide3.xml><?xml version="1.0" encoding="utf-8"?>
 <p:sld xmlns:a="http://schemas.openxmlformats.org/drawingml/2006/main" xmlns:p="http://schemas.openxmlformats.org/presentationml/2006/main" xmlns:r="http://schemas.openxmlformats.org/officeDocument/2006/relationships">
   <p:cSld>
@@ -9381,38 +10170,6 @@
                 </a:solidFill>
                 <a:latin typeface="Calibri"/>
               </a:rPr>
-              <a:t>–   Lo importante no es memorizar los nombres sino entender que cada fase tiene tres cosas: una entrada (lo que recibe de la fase anterior), una salida tangible llamada artefacto (un documento, un diagrama, un programa) y un criterio para decir 'esto ya quedo'.</a:t>
-            </a:r>
-          </a:p>
-          <a:p>
-            <a:pPr>
-              <a:spcAft>
-                <a:spcPts val="800"/>
-              </a:spcAft>
-            </a:pPr>
-            <a:r>
-              <a:rPr sz="2000" b="0" i="0">
-                <a:solidFill>
-                  <a:srgbClr val="333333"/>
-                </a:solidFill>
-                <a:latin typeface="Calibri"/>
-              </a:rPr>
-              <a:t>–   Si una fase no produce un artefacto verificable, esa fase no existe, existe una conversacion.</a:t>
-            </a:r>
-          </a:p>
-          <a:p>
-            <a:pPr>
-              <a:spcAft>
-                <a:spcPts val="800"/>
-              </a:spcAft>
-            </a:pPr>
-            <a:r>
-              <a:rPr sz="2000" b="0" i="0">
-                <a:solidFill>
-                  <a:srgbClr val="333333"/>
-                </a:solidFill>
-                <a:latin typeface="Calibri"/>
-              </a:rPr>
               <a:t>–   En VetCare la fase de requisitos no termina cuando el equipo 'ya entendio' el problema de Huellitas: termina cuando existe una lista numerada de requisitos funcionales y no funcionales que la clinica leyo y aprobo.</a:t>
             </a:r>
           </a:p>
@@ -9649,7 +10406,7 @@
                 </a:solidFill>
                 <a:latin typeface="Calibri"/>
               </a:rPr>
-              <a:t>–   Diseño responde COMO se va a lograr y produce casos de uso, diagramas de clases, modelo de datos, wireframes y mockups.</a:t>
+              <a:t>–   Construccion es escribir el codigo y produce el ejecutable.</a:t>
             </a:r>
           </a:p>
           <a:p>
@@ -9665,71 +10422,7 @@
                 </a:solidFill>
                 <a:latin typeface="Calibri"/>
               </a:rPr>
-              <a:t>–   Construccion es escribir el codigo y produce el ejecutable.</a:t>
-            </a:r>
-          </a:p>
-          <a:p>
-            <a:pPr>
-              <a:spcAft>
-                <a:spcPts val="800"/>
-              </a:spcAft>
-            </a:pPr>
-            <a:r>
-              <a:rPr sz="2000" b="0" i="0">
-                <a:solidFill>
-                  <a:srgbClr val="333333"/>
-                </a:solidFill>
-                <a:latin typeface="Calibri"/>
-              </a:rPr>
-              <a:t>–   Pruebas verifica que lo construido corresponde a lo pedido y produce casos de prueba y evidencias.</a:t>
-            </a:r>
-          </a:p>
-          <a:p>
-            <a:pPr>
-              <a:spcAft>
-                <a:spcPts val="800"/>
-              </a:spcAft>
-            </a:pPr>
-            <a:r>
-              <a:rPr sz="2000" b="0" i="0">
-                <a:solidFill>
-                  <a:srgbClr val="333333"/>
-                </a:solidFill>
-                <a:latin typeface="Calibri"/>
-              </a:rPr>
-              <a:t>–   Mantenimiento arregla, ajusta y evoluciona el sistema ya en uso.</a:t>
-            </a:r>
-          </a:p>
-          <a:p>
-            <a:pPr>
-              <a:spcAft>
-                <a:spcPts val="800"/>
-              </a:spcAft>
-            </a:pPr>
-            <a:r>
-              <a:rPr sz="2000" b="0" i="0">
-                <a:solidFill>
-                  <a:srgbClr val="333333"/>
-                </a:solidFill>
-                <a:latin typeface="Calibri"/>
-              </a:rPr>
               <a:t>–   En nuestro Proyecto Integrador esto se reparte: Seminario de Sistemas vive en requisitos y diseño (los planos), y Programacion II vive en construccion y pruebas (la obra).</a:t>
-            </a:r>
-          </a:p>
-          <a:p>
-            <a:pPr>
-              <a:spcAft>
-                <a:spcPts val="800"/>
-              </a:spcAft>
-            </a:pPr>
-            <a:r>
-              <a:rPr sz="2000" b="0" i="0">
-                <a:solidFill>
-                  <a:srgbClr val="333333"/>
-                </a:solidFill>
-                <a:latin typeface="Calibri"/>
-              </a:rPr>
-              <a:t>–   Por eso aqui nunca se califica codigo: se califica que los planos esten completos, coherentes y sean construibles.</a:t>
             </a:r>
           </a:p>
         </p:txBody>
@@ -9965,38 +10658,6 @@
                 </a:solidFill>
                 <a:latin typeface="Calibri"/>
               </a:rPr>
-              <a:t>–   Recorrerlas una sola vez y en orden significa cerrar requisitos de TODO VetCare, luego diseñar TODO VetCare, luego construir TODO.</a:t>
-            </a:r>
-          </a:p>
-          <a:p>
-            <a:pPr>
-              <a:spcAft>
-                <a:spcPts val="800"/>
-              </a:spcAft>
-            </a:pPr>
-            <a:r>
-              <a:rPr sz="2000" b="0" i="0">
-                <a:solidFill>
-                  <a:srgbClr val="333333"/>
-                </a:solidFill>
-                <a:latin typeface="Calibri"/>
-              </a:rPr>
-              <a:t>–   Recorrerlas en ciclos significa tomar un pedazo util del sistema y pasarlo por las cinco fases en una vuelta corta, y despues repetir con el siguiente pedazo.</a:t>
-            </a:r>
-          </a:p>
-          <a:p>
-            <a:pPr>
-              <a:spcAft>
-                <a:spcPts val="800"/>
-              </a:spcAft>
-            </a:pPr>
-            <a:r>
-              <a:rPr sz="2000" b="0" i="0">
-                <a:solidFill>
-                  <a:srgbClr val="333333"/>
-                </a:solidFill>
-                <a:latin typeface="Calibri"/>
-              </a:rPr>
               <a:t>–   En VetCare la vuelta 1 podria ser solo la ficha del paciente (requisitos de la ficha, diseño de la ficha, mockup de la ficha, revision con la clinica); la vuelta 2, la historia clinica y la busqueda; la vuelta 3, los reportes y metricas.</a:t>
             </a:r>
           </a:p>
@@ -10210,7 +10871,7 @@
                 </a:solidFill>
                 <a:latin typeface="Calibri"/>
               </a:rPr>
-              <a:t>Hay que separar dos palabras que los equipos usan como sinonimos y no...</a:t>
+              <a:t>Hay que separar dos palabras que los equipos usan como sinonimos y no... (1/2)</a:t>
             </a:r>
           </a:p>
         </p:txBody>
@@ -10314,38 +10975,6 @@
                 <a:latin typeface="Calibri"/>
               </a:rPr>
               <a:t>–   El producto es el sistema que Huellitas usaria durante los proximos años, con su version 1.0, su 1.1 cuando pidan vacunacion a domicilio y su 2.0 cuando quieran facturacion electronica.</a:t>
-            </a:r>
-          </a:p>
-          <a:p>
-            <a:pPr>
-              <a:spcAft>
-                <a:spcPts val="800"/>
-              </a:spcAft>
-            </a:pPr>
-            <a:r>
-              <a:rPr sz="2000" b="0" i="0">
-                <a:solidFill>
-                  <a:srgbClr val="333333"/>
-                </a:solidFill>
-                <a:latin typeface="Calibri"/>
-              </a:rPr>
-              <a:t>–   Esta distincion tiene una consecuencia dura: la fase mas larga y mas costosa de la vida de un sistema no es construirlo, es mantenerlo</a:t>
-            </a:r>
-          </a:p>
-          <a:p>
-            <a:pPr>
-              <a:spcAft>
-                <a:spcPts val="800"/>
-              </a:spcAft>
-            </a:pPr>
-            <a:r>
-              <a:rPr sz="2000" b="0" i="0">
-                <a:solidFill>
-                  <a:srgbClr val="333333"/>
-                </a:solidFill>
-                <a:latin typeface="Calibri"/>
-              </a:rPr>
-              <a:t>–   Y por eso el diseño y la documentacion que hacemos aqui no son un tramite, son lo que permite que otro entienda el sistema dentro de dos años.</a:t>
             </a:r>
           </a:p>
         </p:txBody>
@@ -10526,7 +11155,7 @@
                 </a:solidFill>
                 <a:latin typeface="Calibri"/>
               </a:rPr>
-              <a:t>Como se elige el recorrido?</a:t>
+              <a:t>Hay que separar dos palabras que los equipos usan como sinonimos y no... (2/2)</a:t>
             </a:r>
           </a:p>
         </p:txBody>
@@ -10565,7 +11194,7 @@
                 </a:solidFill>
                 <a:latin typeface="Calibri"/>
               </a:rPr>
-              <a:t>–   Como se elige el recorrido?</a:t>
+              <a:t>–   Esta distincion tiene una consecuencia dura: la fase mas larga y mas costosa de la vida de un sistema no es construirlo, es mantenerlo</a:t>
             </a:r>
           </a:p>
           <a:p>
@@ -10581,87 +11210,7 @@
                 </a:solidFill>
                 <a:latin typeface="Calibri"/>
               </a:rPr>
-              <a:t>–   Con criterios, no con moda.</a:t>
-            </a:r>
-          </a:p>
-          <a:p>
-            <a:pPr>
-              <a:spcAft>
-                <a:spcPts val="800"/>
-              </a:spcAft>
-            </a:pPr>
-            <a:r>
-              <a:rPr sz="2000" b="0" i="0">
-                <a:solidFill>
-                  <a:srgbClr val="333333"/>
-                </a:solidFill>
-                <a:latin typeface="Calibri"/>
-              </a:rPr>
-              <a:t>–   Si los requisitos son estables, el contrato es cerrado y el sistema es critico, conviene un recorrido lineal con aprobaciones formales.</a:t>
-            </a:r>
-          </a:p>
-          <a:p>
-            <a:pPr>
-              <a:spcAft>
-                <a:spcPts val="800"/>
-              </a:spcAft>
-            </a:pPr>
-            <a:r>
-              <a:rPr sz="2000" b="0" i="0">
-                <a:solidFill>
-                  <a:srgbClr val="333333"/>
-                </a:solidFill>
-                <a:latin typeface="Calibri"/>
-              </a:rPr>
-              <a:t>–   Si el dominio es nuevo, el cliente descubre lo que quiere cuando lo ve, y hay margen para ajustar, conviene un recorrido en ciclos.</a:t>
-            </a:r>
-          </a:p>
-          <a:p>
-            <a:pPr>
-              <a:spcAft>
-                <a:spcPts val="800"/>
-              </a:spcAft>
-            </a:pPr>
-            <a:r>
-              <a:rPr sz="2000" b="0" i="0">
-                <a:solidFill>
-                  <a:srgbClr val="333333"/>
-                </a:solidFill>
-                <a:latin typeface="Calibri"/>
-              </a:rPr>
-              <a:t>–   En VetCare aplican los dos matices: los datos basicos de un paciente (nombre, especie, raza, propietario) son estables y se pueden cerrar temprano; el tablero de metricas es incierto porque la clinica nunca ha visto uno y va a cambiar de opinion apenas lo vea.</a:t>
-            </a:r>
-          </a:p>
-          <a:p>
-            <a:pPr>
-              <a:spcAft>
-                <a:spcPts val="800"/>
-              </a:spcAft>
-            </a:pPr>
-            <a:r>
-              <a:rPr sz="2000" b="0" i="0">
-                <a:solidFill>
-                  <a:srgbClr val="333333"/>
-                </a:solidFill>
-                <a:latin typeface="Calibri"/>
-              </a:rPr>
-              <a:t>–   Ademas, el ciclo elegido debe caber en la realidad del curso: el estudiante que solo cursa Seminario cierra con documento de diseño y prototipo navegable</a:t>
-            </a:r>
-          </a:p>
-          <a:p>
-            <a:pPr>
-              <a:spcAft>
-                <a:spcPts val="800"/>
-              </a:spcAft>
-            </a:pPr>
-            <a:r>
-              <a:rPr sz="2000" b="0" i="0">
-                <a:solidFill>
-                  <a:srgbClr val="333333"/>
-                </a:solidFill>
-                <a:latin typeface="Calibri"/>
-              </a:rPr>
-              <a:t>–   Y esa es una ruta completa, porque el ciclo de vida del software incluye fases donde no se escribe una sola linea de codigo y aun asi se produce valor.</a:t>
+              <a:t>–   Y por eso el diseño y la documentacion que hacemos aqui no son un tramite, son lo que permite que otro entienda el sistema dentro de dos años.</a:t>
             </a:r>
           </a:p>
         </p:txBody>
@@ -10842,141 +11391,21 @@
                 </a:solidFill>
                 <a:latin typeface="Calibri"/>
               </a:rPr>
-              <a:t>El ciclo de vida de VetCare en Mermaid: mismas cajas, dos recorridos</a:t>
-            </a:r>
-          </a:p>
-        </p:txBody>
-      </p:sp>
-      <p:sp>
-        <p:nvSpPr>
-          <p:cNvPr id="5" name="Rounded Rectangle 4"/>
-          <p:cNvSpPr/>
-          <p:nvPr/>
-        </p:nvSpPr>
-        <p:spPr>
-          <a:xfrm>
-            <a:off x="457200" y="1261872"/>
-            <a:ext cx="11277295" cy="4773168"/>
-          </a:xfrm>
-          <a:prstGeom prst="roundRect">
-            <a:avLst>
-              <a:gd name="adj" fmla="val 12000"/>
-            </a:avLst>
-          </a:prstGeom>
-          <a:solidFill>
-            <a:srgbClr val="1E2A38"/>
-          </a:solidFill>
-          <a:ln>
-            <a:noFill/>
-          </a:ln>
-        </p:spPr>
-        <p:style>
-          <a:lnRef idx="1">
-            <a:schemeClr val="accent1"/>
-          </a:lnRef>
-          <a:fillRef idx="3">
-            <a:schemeClr val="accent1"/>
-          </a:fillRef>
-          <a:effectRef idx="2">
-            <a:schemeClr val="accent1"/>
-          </a:effectRef>
-          <a:fontRef idx="minor">
-            <a:schemeClr val="lt1"/>
-          </a:fontRef>
-        </p:style>
-        <p:txBody>
-          <a:bodyPr rtlCol="0" anchor="ctr"/>
-          <a:lstStyle/>
-          <a:p>
-            <a:pPr algn="ctr"/>
-          </a:p>
-        </p:txBody>
-      </p:sp>
-      <p:sp>
-        <p:nvSpPr>
-          <p:cNvPr id="6" name="Rectangle 5"/>
-          <p:cNvSpPr/>
-          <p:nvPr/>
-        </p:nvSpPr>
-        <p:spPr>
-          <a:xfrm>
-            <a:off x="457200" y="1261872"/>
-            <a:ext cx="11277295" cy="320040"/>
-          </a:xfrm>
-          <a:prstGeom prst="rect">
-            <a:avLst/>
-          </a:prstGeom>
-          <a:solidFill>
-            <a:srgbClr val="095292"/>
-          </a:solidFill>
-          <a:ln>
-            <a:noFill/>
-          </a:ln>
-        </p:spPr>
-        <p:style>
-          <a:lnRef idx="1">
-            <a:schemeClr val="accent1"/>
-          </a:lnRef>
-          <a:fillRef idx="3">
-            <a:schemeClr val="accent1"/>
-          </a:fillRef>
-          <a:effectRef idx="2">
-            <a:schemeClr val="accent1"/>
-          </a:effectRef>
-          <a:fontRef idx="minor">
-            <a:schemeClr val="lt1"/>
-          </a:fontRef>
-        </p:style>
-        <p:txBody>
-          <a:bodyPr rtlCol="0" anchor="ctr"/>
-          <a:lstStyle/>
-          <a:p>
-            <a:pPr algn="ctr"/>
-          </a:p>
-        </p:txBody>
-      </p:sp>
-      <p:sp>
-        <p:nvSpPr>
-          <p:cNvPr id="7" name="TextBox 6"/>
+              <a:t>Como se elige el recorrido? (1/2)</a:t>
+            </a:r>
+          </a:p>
+        </p:txBody>
+      </p:sp>
+      <p:sp>
+        <p:nvSpPr>
+          <p:cNvPr id="5" name="TextBox 4"/>
           <p:cNvSpPr txBox="1"/>
           <p:nvPr/>
         </p:nvSpPr>
         <p:spPr>
           <a:xfrm>
-            <a:off x="685800" y="1307592"/>
-            <a:ext cx="10820095" cy="256032"/>
-          </a:xfrm>
-          <a:prstGeom prst="rect">
-            <a:avLst/>
-          </a:prstGeom>
-          <a:noFill/>
-        </p:spPr>
-        <p:txBody>
-          <a:bodyPr wrap="square" anchor="ctr"/>
-          <a:lstStyle/>
-          <a:p>
-            <a:r>
-              <a:rPr sz="1000" b="1" i="0">
-                <a:solidFill>
-                  <a:srgbClr val="269CCB"/>
-                </a:solidFill>
-                <a:latin typeface="Calibri"/>
-              </a:rPr>
-              <a:t>● ● ●</a:t>
-            </a:r>
-          </a:p>
-        </p:txBody>
-      </p:sp>
-      <p:sp>
-        <p:nvSpPr>
-          <p:cNvPr id="8" name="TextBox 7"/>
-          <p:cNvSpPr txBox="1"/>
-          <p:nvPr/>
-        </p:nvSpPr>
-        <p:spPr>
-          <a:xfrm>
-            <a:off x="777240" y="1719072"/>
-            <a:ext cx="10637215" cy="4133087"/>
+            <a:off x="457200" y="1170432"/>
+            <a:ext cx="11277295" cy="5230368"/>
           </a:xfrm>
           <a:prstGeom prst="rect">
             <a:avLst/>
@@ -10991,235 +11420,56 @@
           <a:p>
             <a:pPr>
               <a:spcAft>
-                <a:spcPts val="400"/>
+                <a:spcPts val="800"/>
               </a:spcAft>
             </a:pPr>
             <a:r>
-              <a:rPr sz="1400" b="0" i="0">
-                <a:solidFill>
-                  <a:srgbClr val="FFFFFF"/>
-                </a:solidFill>
-                <a:latin typeface="Calibri"/>
-              </a:rPr>
-              <a:t>flowchart LR</a:t>
+              <a:rPr sz="2000" b="0" i="0">
+                <a:solidFill>
+                  <a:srgbClr val="333333"/>
+                </a:solidFill>
+                <a:latin typeface="Calibri"/>
+              </a:rPr>
+              <a:t>–   Si los requisitos son estables, el contrato es cerrado y el sistema es critico, conviene un recorrido lineal con aprobaciones formales.</a:t>
             </a:r>
           </a:p>
           <a:p>
             <a:pPr>
               <a:spcAft>
-                <a:spcPts val="400"/>
+                <a:spcPts val="800"/>
               </a:spcAft>
             </a:pPr>
             <a:r>
-              <a:rPr sz="1400" b="0" i="0">
-                <a:solidFill>
-                  <a:srgbClr val="FFFFFF"/>
-                </a:solidFill>
-                <a:latin typeface="Calibri"/>
-              </a:rPr>
-              <a:t>  A[Requisitos] --&gt;|RF-01 a RF-12 aprobados| B[Diseno]</a:t>
+              <a:rPr sz="2000" b="0" i="0">
+                <a:solidFill>
+                  <a:srgbClr val="333333"/>
+                </a:solidFill>
+                <a:latin typeface="Calibri"/>
+              </a:rPr>
+              <a:t>–   Si el dominio es nuevo, el cliente descubre lo que quiere cuando lo ve, y hay margen para ajustar, conviene un recorrido en ciclos.</a:t>
             </a:r>
           </a:p>
           <a:p>
             <a:pPr>
               <a:spcAft>
-                <a:spcPts val="400"/>
+                <a:spcPts val="800"/>
               </a:spcAft>
             </a:pPr>
             <a:r>
-              <a:rPr sz="1400" b="0" i="0">
-                <a:solidFill>
-                  <a:srgbClr val="FFFFFF"/>
-                </a:solidFill>
-                <a:latin typeface="Calibri"/>
-              </a:rPr>
-              <a:t>  B --&gt;|Casos de uso + clases + mockups| C[Construccion]</a:t>
-            </a:r>
-          </a:p>
-          <a:p>
-            <a:pPr>
-              <a:spcAft>
-                <a:spcPts val="400"/>
-              </a:spcAft>
-            </a:pPr>
-            <a:r>
-              <a:rPr sz="1400" b="0" i="0">
-                <a:solidFill>
-                  <a:srgbClr val="FFFFFF"/>
-                </a:solidFill>
-                <a:latin typeface="Calibri"/>
-              </a:rPr>
-              <a:t>  C --&gt;|Modulo ficha del paciente| D[Pruebas]</a:t>
-            </a:r>
-          </a:p>
-          <a:p>
-            <a:pPr>
-              <a:spcAft>
-                <a:spcPts val="400"/>
-              </a:spcAft>
-            </a:pPr>
-            <a:r>
-              <a:rPr sz="1400" b="0" i="0">
-                <a:solidFill>
-                  <a:srgbClr val="FFFFFF"/>
-                </a:solidFill>
-                <a:latin typeface="Calibri"/>
-              </a:rPr>
-              <a:t>  D --&gt;|Acta de aceptacion| E[Operacion y mantenimiento]</a:t>
-            </a:r>
-          </a:p>
-          <a:p>
-            <a:pPr>
-              <a:spcAft>
-                <a:spcPts val="400"/>
-              </a:spcAft>
-            </a:pPr>
-            <a:r>
-              <a:rPr sz="1400" b="0" i="0">
-                <a:solidFill>
-                  <a:srgbClr val="FFFFFF"/>
-                </a:solidFill>
-                <a:latin typeface="Calibri"/>
-              </a:rPr>
-              <a:t>  E -.-&gt;|Solicitud: vacunacion a domicilio| A</a:t>
-            </a:r>
-          </a:p>
-          <a:p>
-            <a:pPr>
-              <a:spcAft>
-                <a:spcPts val="400"/>
-              </a:spcAft>
-            </a:pPr>
-            <a:r>
-              <a:rPr sz="1400" b="0" i="0">
-                <a:solidFill>
-                  <a:srgbClr val="FFFFFF"/>
-                </a:solidFill>
-                <a:latin typeface="Calibri"/>
-              </a:rPr>
-              <a:t>%% Recorrido lineal  = UNA sola pasada por A..E</a:t>
-            </a:r>
-          </a:p>
-          <a:p>
-            <a:pPr>
-              <a:spcAft>
-                <a:spcPts val="400"/>
-              </a:spcAft>
-            </a:pPr>
-            <a:r>
-              <a:rPr sz="1400" b="0" i="0">
-                <a:solidFill>
-                  <a:srgbClr val="FFFFFF"/>
-                </a:solidFill>
-                <a:latin typeface="Calibri"/>
-              </a:rPr>
-              <a:t>%% Recorrido en ciclos = TRES pasadas por A..E</a:t>
-            </a:r>
-          </a:p>
-          <a:p>
-            <a:pPr>
-              <a:spcAft>
-                <a:spcPts val="400"/>
-              </a:spcAft>
-            </a:pPr>
-            <a:r>
-              <a:rPr sz="1400" b="0" i="0">
-                <a:solidFill>
-                  <a:srgbClr val="FFFFFF"/>
-                </a:solidFill>
-                <a:latin typeface="Calibri"/>
-              </a:rPr>
-              <a:t>%%   Vuelta 1: ficha del paciente</a:t>
-            </a:r>
-          </a:p>
-          <a:p>
-            <a:pPr>
-              <a:spcAft>
-                <a:spcPts val="400"/>
-              </a:spcAft>
-            </a:pPr>
-            <a:r>
-              <a:rPr sz="1400" b="0" i="0">
-                <a:solidFill>
-                  <a:srgbClr val="FFFFFF"/>
-                </a:solidFill>
-                <a:latin typeface="Calibri"/>
-              </a:rPr>
-              <a:t>%%   Vuelta 2: historia clinica y busqueda</a:t>
-            </a:r>
-          </a:p>
-          <a:p>
-            <a:pPr>
-              <a:spcAft>
-                <a:spcPts val="400"/>
-              </a:spcAft>
-            </a:pPr>
-            <a:r>
-              <a:rPr sz="1400" b="0" i="0">
-                <a:solidFill>
-                  <a:srgbClr val="FFFFFF"/>
-                </a:solidFill>
-                <a:latin typeface="Calibri"/>
-              </a:rPr>
-              <a:t>%%   Vuelta 3: reportes y metricas</a:t>
-            </a:r>
-          </a:p>
-          <a:p>
-            <a:pPr>
-              <a:spcAft>
-                <a:spcPts val="400"/>
-              </a:spcAft>
-            </a:pPr>
-            <a:r>
-              <a:rPr sz="1400" b="0" i="0">
-                <a:solidFill>
-                  <a:srgbClr val="FFFFFF"/>
-                </a:solidFill>
-                <a:latin typeface="Calibri"/>
-              </a:rPr>
-              <a:t>%% Las cajas nunca cambian; lo que cambia es cuantas veces se recorren</a:t>
-            </a:r>
-          </a:p>
-        </p:txBody>
-      </p:sp>
-      <p:sp>
-        <p:nvSpPr>
-          <p:cNvPr id="9" name="TextBox 8"/>
-          <p:cNvSpPr txBox="1"/>
-          <p:nvPr/>
-        </p:nvSpPr>
-        <p:spPr>
-          <a:xfrm>
-            <a:off x="457200" y="6080760"/>
-            <a:ext cx="11277295" cy="320040"/>
-          </a:xfrm>
-          <a:prstGeom prst="rect">
-            <a:avLst/>
-          </a:prstGeom>
-          <a:noFill/>
-        </p:spPr>
-        <p:txBody>
-          <a:bodyPr wrap="square">
-            <a:spAutoFit/>
-          </a:bodyPr>
-          <a:lstStyle/>
-          <a:p>
-            <a:pPr algn="ctr"/>
-            <a:r>
-              <a:rPr sz="1200" b="0" i="1">
-                <a:solidFill>
-                  <a:srgbClr val="666666"/>
-                </a:solidFill>
-                <a:latin typeface="Calibri"/>
-              </a:rPr>
-              <a:t>Las fases son las mismas en cualquier metodologia; lo unico que se negocia es cuantas vueltas se dan y cuanto sistema entra en cada vuelta.</a:t>
-            </a:r>
-          </a:p>
-        </p:txBody>
-      </p:sp>
-      <p:sp>
-        <p:nvSpPr>
-          <p:cNvPr id="10" name="TextBox 9"/>
+              <a:rPr sz="2000" b="0" i="0">
+                <a:solidFill>
+                  <a:srgbClr val="333333"/>
+                </a:solidFill>
+                <a:latin typeface="Calibri"/>
+              </a:rPr>
+              <a:t>–   En VetCare aplican los dos matices: los datos basicos de un paciente (nombre, especie, raza, propietario) son estables y se pueden cerrar temprano; el tablero de metricas es incierto porque la clinica nunca ha visto uno y va a cambiar de opinion apenas lo vea.</a:t>
+            </a:r>
+          </a:p>
+        </p:txBody>
+      </p:sp>
+      <p:sp>
+        <p:nvSpPr>
+          <p:cNvPr id="6" name="TextBox 5"/>
           <p:cNvSpPr txBox="1"/>
           <p:nvPr/>
         </p:nvSpPr>

--- a/Seminario de Sistemas/Clases/Clase 2 - Ciclos de vida del software/Presentacion.pptx
+++ b/Seminario de Sistemas/Clases/Clase 2 - Ciclos de vida del software/Presentacion.pptx
@@ -25,6 +25,8 @@
     <p:sldId id="273" r:id="rId24"/>
     <p:sldId id="274" r:id="rId25"/>
     <p:sldId id="275" r:id="rId26"/>
+    <p:sldId id="276" r:id="rId27"/>
+    <p:sldId id="277" r:id="rId28"/>
   </p:sldIdLst>
   <p:sldSz cx="12191695" cy="6858000" type="screen4x3"/>
   <p:notesSz cx="6858000" cy="9144000"/>
@@ -3861,7 +3863,7 @@
                 </a:solidFill>
                 <a:latin typeface="Calibri"/>
               </a:rPr>
-              <a:t>El ciclo de vida de VetCare en Mermaid: mismas cajas, dos recorridos</a:t>
+              <a:t>El recorrido lineal del ciclo de vida</a:t>
             </a:r>
           </a:p>
         </p:txBody>
@@ -3875,7 +3877,7 @@
         <p:spPr>
           <a:xfrm>
             <a:off x="457200" y="1261872"/>
-            <a:ext cx="11277295" cy="4773168"/>
+            <a:ext cx="11277295" cy="5093208"/>
           </a:xfrm>
           <a:prstGeom prst="roundRect">
             <a:avLst>
@@ -3995,7 +3997,7 @@
         <p:spPr>
           <a:xfrm>
             <a:off x="777240" y="1719072"/>
-            <a:ext cx="10637215" cy="4133087"/>
+            <a:ext cx="10637215" cy="4453128"/>
           </a:xfrm>
           <a:prstGeom prst="rect">
             <a:avLst/>
@@ -4036,7 +4038,7 @@
                 </a:solidFill>
                 <a:latin typeface="Calibri"/>
               </a:rPr>
-              <a:t>  A[Requisitos] --&gt;|RF-01 a RF-12 aprobados| B[Diseno]</a:t>
+              <a:t>  A[Analisis] --&gt; D[Diseno] --&gt; I[Implementacion]</a:t>
             </a:r>
           </a:p>
           <a:p>
@@ -4052,7 +4054,7 @@
                 </a:solidFill>
                 <a:latin typeface="Calibri"/>
               </a:rPr>
-              <a:t>  B --&gt;|Casos de uso + clases + mockups| C[Construccion]</a:t>
+              <a:t>  I --&gt; P[Pruebas] --&gt; M[Mantenimiento]</a:t>
             </a:r>
           </a:p>
           <a:p>
@@ -4068,7 +4070,7 @@
                 </a:solidFill>
                 <a:latin typeface="Calibri"/>
               </a:rPr>
-              <a:t>  C --&gt;|Modulo ficha del paciente| D[Pruebas]</a:t>
+              <a:t/>
             </a:r>
           </a:p>
           <a:p>
@@ -4084,7 +4086,7 @@
                 </a:solidFill>
                 <a:latin typeface="Calibri"/>
               </a:rPr>
-              <a:t>  D --&gt;|Acta de aceptacion| E[Operacion y mantenimiento]</a:t>
+              <a:t>%% Lineal significa: no se vuelve. Cada fase cierra con un entregable</a:t>
             </a:r>
           </a:p>
           <a:p>
@@ -4100,103 +4102,7 @@
                 </a:solidFill>
                 <a:latin typeface="Calibri"/>
               </a:rPr>
-              <a:t>  E -.-&gt;|Solicitud: vacunacion a domicilio| A</a:t>
-            </a:r>
-          </a:p>
-          <a:p>
-            <a:pPr>
-              <a:spcAft>
-                <a:spcPts val="400"/>
-              </a:spcAft>
-            </a:pPr>
-            <a:r>
-              <a:rPr sz="1400" b="0" i="0">
-                <a:solidFill>
-                  <a:srgbClr val="FFFFFF"/>
-                </a:solidFill>
-                <a:latin typeface="Calibri"/>
-              </a:rPr>
-              <a:t>%% Recorrido lineal  = UNA sola pasada por A..E</a:t>
-            </a:r>
-          </a:p>
-          <a:p>
-            <a:pPr>
-              <a:spcAft>
-                <a:spcPts val="400"/>
-              </a:spcAft>
-            </a:pPr>
-            <a:r>
-              <a:rPr sz="1400" b="0" i="0">
-                <a:solidFill>
-                  <a:srgbClr val="FFFFFF"/>
-                </a:solidFill>
-                <a:latin typeface="Calibri"/>
-              </a:rPr>
-              <a:t>%% Recorrido en ciclos = TRES pasadas por A..E</a:t>
-            </a:r>
-          </a:p>
-          <a:p>
-            <a:pPr>
-              <a:spcAft>
-                <a:spcPts val="400"/>
-              </a:spcAft>
-            </a:pPr>
-            <a:r>
-              <a:rPr sz="1400" b="0" i="0">
-                <a:solidFill>
-                  <a:srgbClr val="FFFFFF"/>
-                </a:solidFill>
-                <a:latin typeface="Calibri"/>
-              </a:rPr>
-              <a:t>%%   Vuelta 1: ficha del paciente</a:t>
-            </a:r>
-          </a:p>
-          <a:p>
-            <a:pPr>
-              <a:spcAft>
-                <a:spcPts val="400"/>
-              </a:spcAft>
-            </a:pPr>
-            <a:r>
-              <a:rPr sz="1400" b="0" i="0">
-                <a:solidFill>
-                  <a:srgbClr val="FFFFFF"/>
-                </a:solidFill>
-                <a:latin typeface="Calibri"/>
-              </a:rPr>
-              <a:t>%%   Vuelta 2: historia clinica y busqueda</a:t>
-            </a:r>
-          </a:p>
-          <a:p>
-            <a:pPr>
-              <a:spcAft>
-                <a:spcPts val="400"/>
-              </a:spcAft>
-            </a:pPr>
-            <a:r>
-              <a:rPr sz="1400" b="0" i="0">
-                <a:solidFill>
-                  <a:srgbClr val="FFFFFF"/>
-                </a:solidFill>
-                <a:latin typeface="Calibri"/>
-              </a:rPr>
-              <a:t>%%   Vuelta 3: reportes y metricas</a:t>
-            </a:r>
-          </a:p>
-          <a:p>
-            <a:pPr>
-              <a:spcAft>
-                <a:spcPts val="400"/>
-              </a:spcAft>
-            </a:pPr>
-            <a:r>
-              <a:rPr sz="1400" b="0" i="0">
-                <a:solidFill>
-                  <a:srgbClr val="FFFFFF"/>
-                </a:solidFill>
-                <a:latin typeface="Calibri"/>
-              </a:rPr>
-              <a:t>%% Las cajas nunca cambian; lo que cambia es cuantas veces se recorren</a:t>
+              <a:t>%% aprobado y la siguiente empieza sobre el.</a:t>
             </a:r>
           </a:p>
         </p:txBody>
@@ -4204,41 +4110,6 @@
       <p:sp>
         <p:nvSpPr>
           <p:cNvPr id="9" name="TextBox 8"/>
-          <p:cNvSpPr txBox="1"/>
-          <p:nvPr/>
-        </p:nvSpPr>
-        <p:spPr>
-          <a:xfrm>
-            <a:off x="457200" y="6080760"/>
-            <a:ext cx="11277295" cy="320040"/>
-          </a:xfrm>
-          <a:prstGeom prst="rect">
-            <a:avLst/>
-          </a:prstGeom>
-          <a:noFill/>
-        </p:spPr>
-        <p:txBody>
-          <a:bodyPr wrap="square">
-            <a:spAutoFit/>
-          </a:bodyPr>
-          <a:lstStyle/>
-          <a:p>
-            <a:pPr algn="ctr"/>
-            <a:r>
-              <a:rPr sz="1200" b="0" i="1">
-                <a:solidFill>
-                  <a:srgbClr val="666666"/>
-                </a:solidFill>
-                <a:latin typeface="Calibri"/>
-              </a:rPr>
-              <a:t>Las fases son las mismas en cualquier metodologia; lo unico que se negocia es cuantas vueltas se dan y cuanto sistema entra en cada vuelta.</a:t>
-            </a:r>
-          </a:p>
-        </p:txBody>
-      </p:sp>
-      <p:sp>
-        <p:nvSpPr>
-          <p:cNvPr id="10" name="TextBox 9"/>
           <p:cNvSpPr txBox="1"/>
           <p:nvPr/>
         </p:nvSpPr>
@@ -4412,21 +4283,141 @@
                 </a:solidFill>
                 <a:latin typeface="Calibri"/>
               </a:rPr>
-              <a:t>Demo del dia</a:t>
-            </a:r>
-          </a:p>
-        </p:txBody>
-      </p:sp>
-      <p:sp>
-        <p:nvSpPr>
-          <p:cNvPr id="5" name="TextBox 4"/>
+              <a:t>El mismo ciclo en tres vueltas</a:t>
+            </a:r>
+          </a:p>
+        </p:txBody>
+      </p:sp>
+      <p:sp>
+        <p:nvSpPr>
+          <p:cNvPr id="5" name="Rounded Rectangle 4"/>
+          <p:cNvSpPr/>
+          <p:nvPr/>
+        </p:nvSpPr>
+        <p:spPr>
+          <a:xfrm>
+            <a:off x="457200" y="1261872"/>
+            <a:ext cx="11277295" cy="5093208"/>
+          </a:xfrm>
+          <a:prstGeom prst="roundRect">
+            <a:avLst>
+              <a:gd name="adj" fmla="val 12000"/>
+            </a:avLst>
+          </a:prstGeom>
+          <a:solidFill>
+            <a:srgbClr val="1E2A38"/>
+          </a:solidFill>
+          <a:ln>
+            <a:noFill/>
+          </a:ln>
+        </p:spPr>
+        <p:style>
+          <a:lnRef idx="1">
+            <a:schemeClr val="accent1"/>
+          </a:lnRef>
+          <a:fillRef idx="3">
+            <a:schemeClr val="accent1"/>
+          </a:fillRef>
+          <a:effectRef idx="2">
+            <a:schemeClr val="accent1"/>
+          </a:effectRef>
+          <a:fontRef idx="minor">
+            <a:schemeClr val="lt1"/>
+          </a:fontRef>
+        </p:style>
+        <p:txBody>
+          <a:bodyPr rtlCol="0" anchor="ctr"/>
+          <a:lstStyle/>
+          <a:p>
+            <a:pPr algn="ctr"/>
+          </a:p>
+        </p:txBody>
+      </p:sp>
+      <p:sp>
+        <p:nvSpPr>
+          <p:cNvPr id="6" name="Rectangle 5"/>
+          <p:cNvSpPr/>
+          <p:nvPr/>
+        </p:nvSpPr>
+        <p:spPr>
+          <a:xfrm>
+            <a:off x="457200" y="1261872"/>
+            <a:ext cx="11277295" cy="320040"/>
+          </a:xfrm>
+          <a:prstGeom prst="rect">
+            <a:avLst/>
+          </a:prstGeom>
+          <a:solidFill>
+            <a:srgbClr val="095292"/>
+          </a:solidFill>
+          <a:ln>
+            <a:noFill/>
+          </a:ln>
+        </p:spPr>
+        <p:style>
+          <a:lnRef idx="1">
+            <a:schemeClr val="accent1"/>
+          </a:lnRef>
+          <a:fillRef idx="3">
+            <a:schemeClr val="accent1"/>
+          </a:fillRef>
+          <a:effectRef idx="2">
+            <a:schemeClr val="accent1"/>
+          </a:effectRef>
+          <a:fontRef idx="minor">
+            <a:schemeClr val="lt1"/>
+          </a:fontRef>
+        </p:style>
+        <p:txBody>
+          <a:bodyPr rtlCol="0" anchor="ctr"/>
+          <a:lstStyle/>
+          <a:p>
+            <a:pPr algn="ctr"/>
+          </a:p>
+        </p:txBody>
+      </p:sp>
+      <p:sp>
+        <p:nvSpPr>
+          <p:cNvPr id="7" name="TextBox 6"/>
           <p:cNvSpPr txBox="1"/>
           <p:nvPr/>
         </p:nvSpPr>
         <p:spPr>
           <a:xfrm>
-            <a:off x="457200" y="1170432"/>
-            <a:ext cx="11277295" cy="5230368"/>
+            <a:off x="685800" y="1307592"/>
+            <a:ext cx="10820095" cy="256032"/>
+          </a:xfrm>
+          <a:prstGeom prst="rect">
+            <a:avLst/>
+          </a:prstGeom>
+          <a:noFill/>
+        </p:spPr>
+        <p:txBody>
+          <a:bodyPr wrap="square" anchor="ctr"/>
+          <a:lstStyle/>
+          <a:p>
+            <a:r>
+              <a:rPr sz="1000" b="1" i="0">
+                <a:solidFill>
+                  <a:srgbClr val="269CCB"/>
+                </a:solidFill>
+                <a:latin typeface="Calibri"/>
+              </a:rPr>
+              <a:t>● ● ●</a:t>
+            </a:r>
+          </a:p>
+        </p:txBody>
+      </p:sp>
+      <p:sp>
+        <p:nvSpPr>
+          <p:cNvPr id="8" name="TextBox 7"/>
+          <p:cNvSpPr txBox="1"/>
+          <p:nvPr/>
+        </p:nvSpPr>
+        <p:spPr>
+          <a:xfrm>
+            <a:off x="777240" y="1719072"/>
+            <a:ext cx="10637215" cy="4453128"/>
           </a:xfrm>
           <a:prstGeom prst="rect">
             <a:avLst/>
@@ -4441,92 +4432,248 @@
           <a:p>
             <a:pPr>
               <a:spcAft>
-                <a:spcPts val="800"/>
+                <a:spcPts val="400"/>
               </a:spcAft>
             </a:pPr>
             <a:r>
-              <a:rPr sz="2000" b="0" i="0">
-                <a:solidFill>
-                  <a:srgbClr val="333333"/>
-                </a:solidFill>
-                <a:latin typeface="Calibri"/>
-              </a:rPr>
-              <a:t>–   </a:t>
-            </a:r>
-            <a:r>
-              <a:rPr sz="2000" b="1" i="0">
-                <a:solidFill>
-                  <a:srgbClr val="333333"/>
-                </a:solidFill>
-                <a:latin typeface="Calibri"/>
-              </a:rPr>
-              <a:t>Herramienta:</a:t>
-            </a:r>
-            <a:r>
-              <a:rPr sz="2000" b="0" i="0">
-                <a:solidFill>
-                  <a:srgbClr val="333333"/>
-                </a:solidFill>
-                <a:latin typeface="Calibri"/>
-              </a:rPr>
-              <a:t> draw.io · Google Docs</a:t>
+              <a:rPr sz="1400" b="0" i="0">
+                <a:solidFill>
+                  <a:srgbClr val="FFFFFF"/>
+                </a:solidFill>
+                <a:latin typeface="Calibri"/>
+              </a:rPr>
+              <a:t>flowchart TB</a:t>
             </a:r>
           </a:p>
           <a:p>
             <a:pPr>
               <a:spcAft>
-                <a:spcPts val="800"/>
+                <a:spcPts val="400"/>
               </a:spcAft>
             </a:pPr>
             <a:r>
-              <a:rPr sz="2000" b="0" i="0">
-                <a:solidFill>
-                  <a:srgbClr val="333333"/>
-                </a:solidFill>
-                <a:latin typeface="Calibri"/>
-              </a:rPr>
-              <a:t>–   </a:t>
-            </a:r>
-            <a:r>
-              <a:rPr sz="2000" b="1" i="0">
-                <a:solidFill>
-                  <a:srgbClr val="333333"/>
-                </a:solidFill>
-                <a:latin typeface="Calibri"/>
-              </a:rPr>
-              <a:t>Demo:</a:t>
-            </a:r>
-            <a:r>
-              <a:rPr sz="2000" b="0" i="0">
-                <a:solidFill>
-                  <a:srgbClr val="333333"/>
-                </a:solidFill>
-                <a:latin typeface="Calibri"/>
-              </a:rPr>
-              <a:t> El docente arma en vivo en draw.io el ciclo de VetCare en dos versiones, una sola pasada y tres vueltas, y muestra que las cajas son identicas y lo unico que cambia es el recorrido.</a:t>
+              <a:rPr sz="1400" b="0" i="0">
+                <a:solidFill>
+                  <a:srgbClr val="FFFFFF"/>
+                </a:solidFill>
+                <a:latin typeface="Calibri"/>
+              </a:rPr>
+              <a:t>  subgraph v1[Vuelta 1 - agendamiento]</a:t>
             </a:r>
           </a:p>
           <a:p>
             <a:pPr>
               <a:spcAft>
-                <a:spcPts val="800"/>
+                <a:spcPts val="400"/>
               </a:spcAft>
             </a:pPr>
             <a:r>
-              <a:rPr sz="2000" b="0" i="0">
-                <a:solidFill>
-                  <a:srgbClr val="333333"/>
-                </a:solidFill>
-                <a:latin typeface="Calibri"/>
-              </a:rPr>
-              <a:t>–   Mismo dominio VetCare — no otro ejemplo. Aqui se diseña, no se programa.</a:t>
-            </a:r>
-          </a:p>
-        </p:txBody>
-      </p:sp>
-      <p:sp>
-        <p:nvSpPr>
-          <p:cNvPr id="6" name="TextBox 5"/>
+              <a:rPr sz="1400" b="0" i="0">
+                <a:solidFill>
+                  <a:srgbClr val="FFFFFF"/>
+                </a:solidFill>
+                <a:latin typeface="Calibri"/>
+              </a:rPr>
+              <a:t>    a1[Analisis] --&gt; d1[Diseno] --&gt; i1[Implementacion] --&gt; p1[Pruebas]</a:t>
+            </a:r>
+          </a:p>
+          <a:p>
+            <a:pPr>
+              <a:spcAft>
+                <a:spcPts val="400"/>
+              </a:spcAft>
+            </a:pPr>
+            <a:r>
+              <a:rPr sz="1400" b="0" i="0">
+                <a:solidFill>
+                  <a:srgbClr val="FFFFFF"/>
+                </a:solidFill>
+                <a:latin typeface="Calibri"/>
+              </a:rPr>
+              <a:t>  end</a:t>
+            </a:r>
+          </a:p>
+          <a:p>
+            <a:pPr>
+              <a:spcAft>
+                <a:spcPts val="400"/>
+              </a:spcAft>
+            </a:pPr>
+            <a:r>
+              <a:rPr sz="1400" b="0" i="0">
+                <a:solidFill>
+                  <a:srgbClr val="FFFFFF"/>
+                </a:solidFill>
+                <a:latin typeface="Calibri"/>
+              </a:rPr>
+              <a:t>  subgraph v2[Vuelta 2 - expediente]</a:t>
+            </a:r>
+          </a:p>
+          <a:p>
+            <a:pPr>
+              <a:spcAft>
+                <a:spcPts val="400"/>
+              </a:spcAft>
+            </a:pPr>
+            <a:r>
+              <a:rPr sz="1400" b="0" i="0">
+                <a:solidFill>
+                  <a:srgbClr val="FFFFFF"/>
+                </a:solidFill>
+                <a:latin typeface="Calibri"/>
+              </a:rPr>
+              <a:t>    a2[Analisis] --&gt; d2[Diseno] --&gt; i2[Implementacion] --&gt; p2[Pruebas]</a:t>
+            </a:r>
+          </a:p>
+          <a:p>
+            <a:pPr>
+              <a:spcAft>
+                <a:spcPts val="400"/>
+              </a:spcAft>
+            </a:pPr>
+            <a:r>
+              <a:rPr sz="1400" b="0" i="0">
+                <a:solidFill>
+                  <a:srgbClr val="FFFFFF"/>
+                </a:solidFill>
+                <a:latin typeface="Calibri"/>
+              </a:rPr>
+              <a:t>  end</a:t>
+            </a:r>
+          </a:p>
+          <a:p>
+            <a:pPr>
+              <a:spcAft>
+                <a:spcPts val="400"/>
+              </a:spcAft>
+            </a:pPr>
+            <a:r>
+              <a:rPr sz="1400" b="0" i="0">
+                <a:solidFill>
+                  <a:srgbClr val="FFFFFF"/>
+                </a:solidFill>
+                <a:latin typeface="Calibri"/>
+              </a:rPr>
+              <a:t>  subgraph v3[Vuelta 3 - facturacion]</a:t>
+            </a:r>
+          </a:p>
+          <a:p>
+            <a:pPr>
+              <a:spcAft>
+                <a:spcPts val="400"/>
+              </a:spcAft>
+            </a:pPr>
+            <a:r>
+              <a:rPr sz="1400" b="0" i="0">
+                <a:solidFill>
+                  <a:srgbClr val="FFFFFF"/>
+                </a:solidFill>
+                <a:latin typeface="Calibri"/>
+              </a:rPr>
+              <a:t>    a3[Analisis] --&gt; d3[Diseno] --&gt; i3[Implementacion] --&gt; p3[Pruebas]</a:t>
+            </a:r>
+          </a:p>
+          <a:p>
+            <a:pPr>
+              <a:spcAft>
+                <a:spcPts val="400"/>
+              </a:spcAft>
+            </a:pPr>
+            <a:r>
+              <a:rPr sz="1400" b="0" i="0">
+                <a:solidFill>
+                  <a:srgbClr val="FFFFFF"/>
+                </a:solidFill>
+                <a:latin typeface="Calibri"/>
+              </a:rPr>
+              <a:t>  end</a:t>
+            </a:r>
+          </a:p>
+          <a:p>
+            <a:pPr>
+              <a:spcAft>
+                <a:spcPts val="400"/>
+              </a:spcAft>
+            </a:pPr>
+            <a:r>
+              <a:rPr sz="1400" b="0" i="0">
+                <a:solidFill>
+                  <a:srgbClr val="FFFFFF"/>
+                </a:solidFill>
+                <a:latin typeface="Calibri"/>
+              </a:rPr>
+              <a:t>  p1 --&gt; a2</a:t>
+            </a:r>
+          </a:p>
+          <a:p>
+            <a:pPr>
+              <a:spcAft>
+                <a:spcPts val="400"/>
+              </a:spcAft>
+            </a:pPr>
+            <a:r>
+              <a:rPr sz="1400" b="0" i="0">
+                <a:solidFill>
+                  <a:srgbClr val="FFFFFF"/>
+                </a:solidFill>
+                <a:latin typeface="Calibri"/>
+              </a:rPr>
+              <a:t>  p2 --&gt; a3</a:t>
+            </a:r>
+          </a:p>
+          <a:p>
+            <a:pPr>
+              <a:spcAft>
+                <a:spcPts val="400"/>
+              </a:spcAft>
+            </a:pPr>
+            <a:r>
+              <a:rPr sz="1400" b="0" i="0">
+                <a:solidFill>
+                  <a:srgbClr val="FFFFFF"/>
+                </a:solidFill>
+                <a:latin typeface="Calibri"/>
+              </a:rPr>
+              <a:t/>
+            </a:r>
+          </a:p>
+          <a:p>
+            <a:pPr>
+              <a:spcAft>
+                <a:spcPts val="400"/>
+              </a:spcAft>
+            </a:pPr>
+            <a:r>
+              <a:rPr sz="1400" b="0" i="0">
+                <a:solidFill>
+                  <a:srgbClr val="FFFFFF"/>
+                </a:solidFill>
+                <a:latin typeface="Calibri"/>
+              </a:rPr>
+              <a:t>%% Iterativo no es «hacerlo mal y repetir»: cada vuelta entrega algo</a:t>
+            </a:r>
+          </a:p>
+          <a:p>
+            <a:pPr>
+              <a:spcAft>
+                <a:spcPts val="400"/>
+              </a:spcAft>
+            </a:pPr>
+            <a:r>
+              <a:rPr sz="1400" b="0" i="0">
+                <a:solidFill>
+                  <a:srgbClr val="FFFFFF"/>
+                </a:solidFill>
+                <a:latin typeface="Calibri"/>
+              </a:rPr>
+              <a:t>%% que funciona, sobre un subconjunto del alcance.</a:t>
+            </a:r>
+          </a:p>
+        </p:txBody>
+      </p:sp>
+      <p:sp>
+        <p:nvSpPr>
+          <p:cNvPr id="9" name="TextBox 8"/>
           <p:cNvSpPr txBox="1"/>
           <p:nvPr/>
         </p:nvSpPr>
@@ -4594,7 +4741,7 @@
         <p:spPr>
           <a:xfrm>
             <a:off x="0" y="0"/>
-            <a:ext cx="12191695" cy="1170432"/>
+            <a:ext cx="12191695" cy="960120"/>
           </a:xfrm>
           <a:prstGeom prst="rect">
             <a:avLst/>
@@ -4636,7 +4783,7 @@
         </p:nvSpPr>
         <p:spPr>
           <a:xfrm>
-            <a:off x="0" y="1170432"/>
+            <a:off x="0" y="960120"/>
             <a:ext cx="12191695" cy="41148"/>
           </a:xfrm>
           <a:prstGeom prst="rect">
@@ -4680,7 +4827,7 @@
         <p:spPr>
           <a:xfrm>
             <a:off x="457200" y="164592"/>
-            <a:ext cx="11277295" cy="384048"/>
+            <a:ext cx="11277295" cy="502920"/>
           </a:xfrm>
           <a:prstGeom prst="rect">
             <a:avLst/>
@@ -4700,55 +4847,21 @@
                 </a:solidFill>
                 <a:latin typeface="Calibri"/>
               </a:rPr>
-              <a:t>Herramientas de hoy</a:t>
-            </a:r>
-          </a:p>
-        </p:txBody>
-      </p:sp>
-      <p:sp>
-        <p:nvSpPr>
-          <p:cNvPr id="5" name="TextBox 4"/>
-          <p:cNvSpPr txBox="1"/>
-          <p:nvPr/>
-        </p:nvSpPr>
-        <p:spPr>
-          <a:xfrm>
-            <a:off x="457200" y="566928"/>
-            <a:ext cx="11277295" cy="411480"/>
-          </a:xfrm>
-          <a:prstGeom prst="rect">
-            <a:avLst/>
-          </a:prstGeom>
-          <a:noFill/>
-        </p:spPr>
-        <p:txBody>
-          <a:bodyPr wrap="square">
-            <a:spAutoFit/>
-          </a:bodyPr>
-          <a:lstStyle/>
-          <a:p>
-            <a:r>
-              <a:rPr sz="1400" b="0" i="0">
-                <a:solidFill>
-                  <a:srgbClr val="B8D8EE"/>
-                </a:solidFill>
-                <a:latin typeface="Calibri"/>
-              </a:rPr>
-              <a:t>Gratis · funcionan en el navegador</a:t>
-            </a:r>
-          </a:p>
-        </p:txBody>
-      </p:sp>
-      <p:sp>
-        <p:nvSpPr>
-          <p:cNvPr id="6" name="Rounded Rectangle 5"/>
+              <a:t>El ciclo de vida de VetCare en Mermaid: mismas cajas, dos recorridos</a:t>
+            </a:r>
+          </a:p>
+        </p:txBody>
+      </p:sp>
+      <p:sp>
+        <p:nvSpPr>
+          <p:cNvPr id="5" name="Rounded Rectangle 4"/>
           <p:cNvSpPr/>
           <p:nvPr/>
         </p:nvSpPr>
         <p:spPr>
           <a:xfrm>
-            <a:off x="457200" y="1591056"/>
-            <a:ext cx="3624986" cy="2331720"/>
+            <a:off x="457200" y="1261872"/>
+            <a:ext cx="11277295" cy="4773168"/>
           </a:xfrm>
           <a:prstGeom prst="roundRect">
             <a:avLst>
@@ -4756,7 +4869,7 @@
             </a:avLst>
           </a:prstGeom>
           <a:solidFill>
-            <a:srgbClr val="F2F2F2"/>
+            <a:srgbClr val="1E2A38"/>
           </a:solidFill>
           <a:ln>
             <a:noFill/>
@@ -4786,14 +4899,14 @@
       </p:sp>
       <p:sp>
         <p:nvSpPr>
-          <p:cNvPr id="7" name="Rectangle 6"/>
+          <p:cNvPr id="6" name="Rectangle 5"/>
           <p:cNvSpPr/>
           <p:nvPr/>
         </p:nvSpPr>
         <p:spPr>
           <a:xfrm>
-            <a:off x="457200" y="1591056"/>
-            <a:ext cx="3624986" cy="64008"/>
+            <a:off x="457200" y="1261872"/>
+            <a:ext cx="11277295" cy="320040"/>
           </a:xfrm>
           <a:prstGeom prst="rect">
             <a:avLst/>
@@ -4829,531 +4942,289 @@
       </p:sp>
       <p:sp>
         <p:nvSpPr>
-          <p:cNvPr id="8" name="Rectangle 7"/>
-          <p:cNvSpPr/>
-          <p:nvPr/>
-        </p:nvSpPr>
-        <p:spPr>
-          <a:xfrm>
-            <a:off x="457200" y="1655064"/>
-            <a:ext cx="3624986" cy="27432"/>
-          </a:xfrm>
-          <a:prstGeom prst="rect">
-            <a:avLst/>
-          </a:prstGeom>
-          <a:solidFill>
-            <a:srgbClr val="FFD000"/>
-          </a:solidFill>
-          <a:ln>
-            <a:noFill/>
-          </a:ln>
-        </p:spPr>
-        <p:style>
-          <a:lnRef idx="1">
-            <a:schemeClr val="accent1"/>
-          </a:lnRef>
-          <a:fillRef idx="3">
-            <a:schemeClr val="accent1"/>
-          </a:fillRef>
-          <a:effectRef idx="2">
-            <a:schemeClr val="accent1"/>
-          </a:effectRef>
-          <a:fontRef idx="minor">
-            <a:schemeClr val="lt1"/>
-          </a:fontRef>
-        </p:style>
-        <p:txBody>
-          <a:bodyPr rtlCol="0" anchor="ctr"/>
+          <p:cNvPr id="7" name="TextBox 6"/>
+          <p:cNvSpPr txBox="1"/>
+          <p:nvPr/>
+        </p:nvSpPr>
+        <p:spPr>
+          <a:xfrm>
+            <a:off x="685800" y="1307592"/>
+            <a:ext cx="10820095" cy="256032"/>
+          </a:xfrm>
+          <a:prstGeom prst="rect">
+            <a:avLst/>
+          </a:prstGeom>
+          <a:noFill/>
+        </p:spPr>
+        <p:txBody>
+          <a:bodyPr wrap="square" anchor="ctr"/>
+          <a:lstStyle/>
+          <a:p>
+            <a:r>
+              <a:rPr sz="1000" b="1" i="0">
+                <a:solidFill>
+                  <a:srgbClr val="269CCB"/>
+                </a:solidFill>
+                <a:latin typeface="Calibri"/>
+              </a:rPr>
+              <a:t>● ● ●</a:t>
+            </a:r>
+          </a:p>
+        </p:txBody>
+      </p:sp>
+      <p:sp>
+        <p:nvSpPr>
+          <p:cNvPr id="8" name="TextBox 7"/>
+          <p:cNvSpPr txBox="1"/>
+          <p:nvPr/>
+        </p:nvSpPr>
+        <p:spPr>
+          <a:xfrm>
+            <a:off x="777240" y="1719072"/>
+            <a:ext cx="10637215" cy="4133087"/>
+          </a:xfrm>
+          <a:prstGeom prst="rect">
+            <a:avLst/>
+          </a:prstGeom>
+          <a:noFill/>
+        </p:spPr>
+        <p:txBody>
+          <a:bodyPr wrap="square">
+            <a:spAutoFit/>
+          </a:bodyPr>
+          <a:lstStyle/>
+          <a:p>
+            <a:pPr>
+              <a:spcAft>
+                <a:spcPts val="400"/>
+              </a:spcAft>
+            </a:pPr>
+            <a:r>
+              <a:rPr sz="1400" b="0" i="0">
+                <a:solidFill>
+                  <a:srgbClr val="FFFFFF"/>
+                </a:solidFill>
+                <a:latin typeface="Calibri"/>
+              </a:rPr>
+              <a:t>flowchart LR</a:t>
+            </a:r>
+          </a:p>
+          <a:p>
+            <a:pPr>
+              <a:spcAft>
+                <a:spcPts val="400"/>
+              </a:spcAft>
+            </a:pPr>
+            <a:r>
+              <a:rPr sz="1400" b="0" i="0">
+                <a:solidFill>
+                  <a:srgbClr val="FFFFFF"/>
+                </a:solidFill>
+                <a:latin typeface="Calibri"/>
+              </a:rPr>
+              <a:t>  A[Requisitos] --&gt;|RF-01 a RF-12 aprobados| B[Diseno]</a:t>
+            </a:r>
+          </a:p>
+          <a:p>
+            <a:pPr>
+              <a:spcAft>
+                <a:spcPts val="400"/>
+              </a:spcAft>
+            </a:pPr>
+            <a:r>
+              <a:rPr sz="1400" b="0" i="0">
+                <a:solidFill>
+                  <a:srgbClr val="FFFFFF"/>
+                </a:solidFill>
+                <a:latin typeface="Calibri"/>
+              </a:rPr>
+              <a:t>  B --&gt;|Casos de uso + clases + mockups| C[Construccion]</a:t>
+            </a:r>
+          </a:p>
+          <a:p>
+            <a:pPr>
+              <a:spcAft>
+                <a:spcPts val="400"/>
+              </a:spcAft>
+            </a:pPr>
+            <a:r>
+              <a:rPr sz="1400" b="0" i="0">
+                <a:solidFill>
+                  <a:srgbClr val="FFFFFF"/>
+                </a:solidFill>
+                <a:latin typeface="Calibri"/>
+              </a:rPr>
+              <a:t>  C --&gt;|Modulo ficha del paciente| D[Pruebas]</a:t>
+            </a:r>
+          </a:p>
+          <a:p>
+            <a:pPr>
+              <a:spcAft>
+                <a:spcPts val="400"/>
+              </a:spcAft>
+            </a:pPr>
+            <a:r>
+              <a:rPr sz="1400" b="0" i="0">
+                <a:solidFill>
+                  <a:srgbClr val="FFFFFF"/>
+                </a:solidFill>
+                <a:latin typeface="Calibri"/>
+              </a:rPr>
+              <a:t>  D --&gt;|Acta de aceptacion| E[Operacion y mantenimiento]</a:t>
+            </a:r>
+          </a:p>
+          <a:p>
+            <a:pPr>
+              <a:spcAft>
+                <a:spcPts val="400"/>
+              </a:spcAft>
+            </a:pPr>
+            <a:r>
+              <a:rPr sz="1400" b="0" i="0">
+                <a:solidFill>
+                  <a:srgbClr val="FFFFFF"/>
+                </a:solidFill>
+                <a:latin typeface="Calibri"/>
+              </a:rPr>
+              <a:t>  E -.-&gt;|Solicitud: vacunacion a domicilio| A</a:t>
+            </a:r>
+          </a:p>
+          <a:p>
+            <a:pPr>
+              <a:spcAft>
+                <a:spcPts val="400"/>
+              </a:spcAft>
+            </a:pPr>
+            <a:r>
+              <a:rPr sz="1400" b="0" i="0">
+                <a:solidFill>
+                  <a:srgbClr val="FFFFFF"/>
+                </a:solidFill>
+                <a:latin typeface="Calibri"/>
+              </a:rPr>
+              <a:t>%% Recorrido lineal  = UNA sola pasada por A..E</a:t>
+            </a:r>
+          </a:p>
+          <a:p>
+            <a:pPr>
+              <a:spcAft>
+                <a:spcPts val="400"/>
+              </a:spcAft>
+            </a:pPr>
+            <a:r>
+              <a:rPr sz="1400" b="0" i="0">
+                <a:solidFill>
+                  <a:srgbClr val="FFFFFF"/>
+                </a:solidFill>
+                <a:latin typeface="Calibri"/>
+              </a:rPr>
+              <a:t>%% Recorrido en ciclos = TRES pasadas por A..E</a:t>
+            </a:r>
+          </a:p>
+          <a:p>
+            <a:pPr>
+              <a:spcAft>
+                <a:spcPts val="400"/>
+              </a:spcAft>
+            </a:pPr>
+            <a:r>
+              <a:rPr sz="1400" b="0" i="0">
+                <a:solidFill>
+                  <a:srgbClr val="FFFFFF"/>
+                </a:solidFill>
+                <a:latin typeface="Calibri"/>
+              </a:rPr>
+              <a:t>%%   Vuelta 1: ficha del paciente</a:t>
+            </a:r>
+          </a:p>
+          <a:p>
+            <a:pPr>
+              <a:spcAft>
+                <a:spcPts val="400"/>
+              </a:spcAft>
+            </a:pPr>
+            <a:r>
+              <a:rPr sz="1400" b="0" i="0">
+                <a:solidFill>
+                  <a:srgbClr val="FFFFFF"/>
+                </a:solidFill>
+                <a:latin typeface="Calibri"/>
+              </a:rPr>
+              <a:t>%%   Vuelta 2: historia clinica y busqueda</a:t>
+            </a:r>
+          </a:p>
+          <a:p>
+            <a:pPr>
+              <a:spcAft>
+                <a:spcPts val="400"/>
+              </a:spcAft>
+            </a:pPr>
+            <a:r>
+              <a:rPr sz="1400" b="0" i="0">
+                <a:solidFill>
+                  <a:srgbClr val="FFFFFF"/>
+                </a:solidFill>
+                <a:latin typeface="Calibri"/>
+              </a:rPr>
+              <a:t>%%   Vuelta 3: reportes y metricas</a:t>
+            </a:r>
+          </a:p>
+          <a:p>
+            <a:pPr>
+              <a:spcAft>
+                <a:spcPts val="400"/>
+              </a:spcAft>
+            </a:pPr>
+            <a:r>
+              <a:rPr sz="1400" b="0" i="0">
+                <a:solidFill>
+                  <a:srgbClr val="FFFFFF"/>
+                </a:solidFill>
+                <a:latin typeface="Calibri"/>
+              </a:rPr>
+              <a:t>%% Las cajas nunca cambian; lo que cambia es cuantas veces se recorren</a:t>
+            </a:r>
+          </a:p>
+        </p:txBody>
+      </p:sp>
+      <p:sp>
+        <p:nvSpPr>
+          <p:cNvPr id="9" name="TextBox 8"/>
+          <p:cNvSpPr txBox="1"/>
+          <p:nvPr/>
+        </p:nvSpPr>
+        <p:spPr>
+          <a:xfrm>
+            <a:off x="457200" y="6080760"/>
+            <a:ext cx="11277295" cy="320040"/>
+          </a:xfrm>
+          <a:prstGeom prst="rect">
+            <a:avLst/>
+          </a:prstGeom>
+          <a:noFill/>
+        </p:spPr>
+        <p:txBody>
+          <a:bodyPr wrap="square">
+            <a:spAutoFit/>
+          </a:bodyPr>
           <a:lstStyle/>
           <a:p>
             <a:pPr algn="ctr"/>
-          </a:p>
-        </p:txBody>
-      </p:sp>
-      <p:pic>
-        <p:nvPicPr>
-          <p:cNvPr id="9" name="Picture 8" descr="drawio.png"/>
-          <p:cNvPicPr>
-            <a:picLocks noChangeAspect="1"/>
-          </p:cNvPicPr>
-          <p:nvPr/>
-        </p:nvPicPr>
-        <p:blipFill>
-          <a:blip r:embed="rId2"/>
-          <a:stretch>
-            <a:fillRect/>
-          </a:stretch>
-        </p:blipFill>
-        <p:spPr>
-          <a:xfrm>
-            <a:off x="1643329" y="1847087"/>
-            <a:ext cx="1252728" cy="1252728"/>
-          </a:xfrm>
-          <a:prstGeom prst="rect">
-            <a:avLst/>
-          </a:prstGeom>
-        </p:spPr>
-      </p:pic>
+            <a:r>
+              <a:rPr sz="1200" b="0" i="1">
+                <a:solidFill>
+                  <a:srgbClr val="666666"/>
+                </a:solidFill>
+                <a:latin typeface="Calibri"/>
+              </a:rPr>
+              <a:t>Las fases son las mismas en cualquier metodologia; lo unico que se negocia es cuantas vueltas se dan y cuanto sistema entra en cada vuelta.</a:t>
+            </a:r>
+          </a:p>
+        </p:txBody>
+      </p:sp>
       <p:sp>
         <p:nvSpPr>
           <p:cNvPr id="10" name="TextBox 9"/>
-          <p:cNvSpPr txBox="1"/>
-          <p:nvPr/>
-        </p:nvSpPr>
-        <p:spPr>
-          <a:xfrm>
-            <a:off x="530352" y="3191256"/>
-            <a:ext cx="3478682" cy="621792"/>
-          </a:xfrm>
-          <a:prstGeom prst="rect">
-            <a:avLst/>
-          </a:prstGeom>
-          <a:noFill/>
-        </p:spPr>
-        <p:txBody>
-          <a:bodyPr wrap="square" anchor="t"/>
-          <a:lstStyle/>
-          <a:p>
-            <a:pPr algn="ctr"/>
-            <a:r>
-              <a:rPr sz="1300" b="1" i="0">
-                <a:solidFill>
-                  <a:srgbClr val="095292"/>
-                </a:solidFill>
-                <a:latin typeface="Calibri"/>
-              </a:rPr>
-              <a:t>Draw.Io</a:t>
-            </a:r>
-          </a:p>
-          <a:p>
-            <a:pPr algn="ctr">
-              <a:spcBef>
-                <a:spcPts val="200"/>
-              </a:spcBef>
-            </a:pPr>
-            <a:r>
-              <a:rPr sz="1000" b="0" i="0">
-                <a:solidFill>
-                  <a:srgbClr val="666666"/>
-                </a:solidFill>
-                <a:latin typeface="Calibri"/>
-              </a:rPr>
-              <a:t>Diagramas UML y de contexto</a:t>
-            </a:r>
-          </a:p>
-        </p:txBody>
-      </p:sp>
-      <p:sp>
-        <p:nvSpPr>
-          <p:cNvPr id="11" name="Rounded Rectangle 10"/>
-          <p:cNvSpPr/>
-          <p:nvPr/>
-        </p:nvSpPr>
-        <p:spPr>
-          <a:xfrm>
-            <a:off x="4283354" y="1591056"/>
-            <a:ext cx="3624986" cy="2331720"/>
-          </a:xfrm>
-          <a:prstGeom prst="roundRect">
-            <a:avLst>
-              <a:gd name="adj" fmla="val 12000"/>
-            </a:avLst>
-          </a:prstGeom>
-          <a:solidFill>
-            <a:srgbClr val="F2F2F2"/>
-          </a:solidFill>
-          <a:ln>
-            <a:noFill/>
-          </a:ln>
-        </p:spPr>
-        <p:style>
-          <a:lnRef idx="1">
-            <a:schemeClr val="accent1"/>
-          </a:lnRef>
-          <a:fillRef idx="3">
-            <a:schemeClr val="accent1"/>
-          </a:fillRef>
-          <a:effectRef idx="2">
-            <a:schemeClr val="accent1"/>
-          </a:effectRef>
-          <a:fontRef idx="minor">
-            <a:schemeClr val="lt1"/>
-          </a:fontRef>
-        </p:style>
-        <p:txBody>
-          <a:bodyPr rtlCol="0" anchor="ctr"/>
-          <a:lstStyle/>
-          <a:p>
-            <a:pPr algn="ctr"/>
-          </a:p>
-        </p:txBody>
-      </p:sp>
-      <p:sp>
-        <p:nvSpPr>
-          <p:cNvPr id="12" name="Rectangle 11"/>
-          <p:cNvSpPr/>
-          <p:nvPr/>
-        </p:nvSpPr>
-        <p:spPr>
-          <a:xfrm>
-            <a:off x="4283354" y="1591056"/>
-            <a:ext cx="3624986" cy="64008"/>
-          </a:xfrm>
-          <a:prstGeom prst="rect">
-            <a:avLst/>
-          </a:prstGeom>
-          <a:solidFill>
-            <a:srgbClr val="095292"/>
-          </a:solidFill>
-          <a:ln>
-            <a:noFill/>
-          </a:ln>
-        </p:spPr>
-        <p:style>
-          <a:lnRef idx="1">
-            <a:schemeClr val="accent1"/>
-          </a:lnRef>
-          <a:fillRef idx="3">
-            <a:schemeClr val="accent1"/>
-          </a:fillRef>
-          <a:effectRef idx="2">
-            <a:schemeClr val="accent1"/>
-          </a:effectRef>
-          <a:fontRef idx="minor">
-            <a:schemeClr val="lt1"/>
-          </a:fontRef>
-        </p:style>
-        <p:txBody>
-          <a:bodyPr rtlCol="0" anchor="ctr"/>
-          <a:lstStyle/>
-          <a:p>
-            <a:pPr algn="ctr"/>
-          </a:p>
-        </p:txBody>
-      </p:sp>
-      <p:sp>
-        <p:nvSpPr>
-          <p:cNvPr id="13" name="Rectangle 12"/>
-          <p:cNvSpPr/>
-          <p:nvPr/>
-        </p:nvSpPr>
-        <p:spPr>
-          <a:xfrm>
-            <a:off x="4283354" y="1655064"/>
-            <a:ext cx="3624986" cy="27432"/>
-          </a:xfrm>
-          <a:prstGeom prst="rect">
-            <a:avLst/>
-          </a:prstGeom>
-          <a:solidFill>
-            <a:srgbClr val="FFD000"/>
-          </a:solidFill>
-          <a:ln>
-            <a:noFill/>
-          </a:ln>
-        </p:spPr>
-        <p:style>
-          <a:lnRef idx="1">
-            <a:schemeClr val="accent1"/>
-          </a:lnRef>
-          <a:fillRef idx="3">
-            <a:schemeClr val="accent1"/>
-          </a:fillRef>
-          <a:effectRef idx="2">
-            <a:schemeClr val="accent1"/>
-          </a:effectRef>
-          <a:fontRef idx="minor">
-            <a:schemeClr val="lt1"/>
-          </a:fontRef>
-        </p:style>
-        <p:txBody>
-          <a:bodyPr rtlCol="0" anchor="ctr"/>
-          <a:lstStyle/>
-          <a:p>
-            <a:pPr algn="ctr"/>
-          </a:p>
-        </p:txBody>
-      </p:sp>
-      <p:pic>
-        <p:nvPicPr>
-          <p:cNvPr id="14" name="Picture 13" descr="google_docs.png"/>
-          <p:cNvPicPr>
-            <a:picLocks noChangeAspect="1"/>
-          </p:cNvPicPr>
-          <p:nvPr/>
-        </p:nvPicPr>
-        <p:blipFill>
-          <a:blip r:embed="rId3"/>
-          <a:stretch>
-            <a:fillRect/>
-          </a:stretch>
-        </p:blipFill>
-        <p:spPr>
-          <a:xfrm>
-            <a:off x="5469483" y="1847087"/>
-            <a:ext cx="1252728" cy="1252728"/>
-          </a:xfrm>
-          <a:prstGeom prst="rect">
-            <a:avLst/>
-          </a:prstGeom>
-        </p:spPr>
-      </p:pic>
-      <p:sp>
-        <p:nvSpPr>
-          <p:cNvPr id="15" name="TextBox 14"/>
-          <p:cNvSpPr txBox="1"/>
-          <p:nvPr/>
-        </p:nvSpPr>
-        <p:spPr>
-          <a:xfrm>
-            <a:off x="4356506" y="3191256"/>
-            <a:ext cx="3478682" cy="621792"/>
-          </a:xfrm>
-          <a:prstGeom prst="rect">
-            <a:avLst/>
-          </a:prstGeom>
-          <a:noFill/>
-        </p:spPr>
-        <p:txBody>
-          <a:bodyPr wrap="square" anchor="t"/>
-          <a:lstStyle/>
-          <a:p>
-            <a:pPr algn="ctr"/>
-            <a:r>
-              <a:rPr sz="1300" b="1" i="0">
-                <a:solidFill>
-                  <a:srgbClr val="095292"/>
-                </a:solidFill>
-                <a:latin typeface="Calibri"/>
-              </a:rPr>
-              <a:t>google docs</a:t>
-            </a:r>
-          </a:p>
-          <a:p>
-            <a:pPr algn="ctr">
-              <a:spcBef>
-                <a:spcPts val="200"/>
-              </a:spcBef>
-            </a:pPr>
-            <a:r>
-              <a:rPr sz="1000" b="0" i="0">
-                <a:solidFill>
-                  <a:srgbClr val="666666"/>
-                </a:solidFill>
-                <a:latin typeface="Calibri"/>
-              </a:rPr>
-              <a:t>Documentos del paquete de diseño</a:t>
-            </a:r>
-          </a:p>
-        </p:txBody>
-      </p:sp>
-      <p:sp>
-        <p:nvSpPr>
-          <p:cNvPr id="16" name="Rounded Rectangle 15"/>
-          <p:cNvSpPr/>
-          <p:nvPr/>
-        </p:nvSpPr>
-        <p:spPr>
-          <a:xfrm>
-            <a:off x="8109508" y="1591056"/>
-            <a:ext cx="3624986" cy="2331720"/>
-          </a:xfrm>
-          <a:prstGeom prst="roundRect">
-            <a:avLst>
-              <a:gd name="adj" fmla="val 12000"/>
-            </a:avLst>
-          </a:prstGeom>
-          <a:solidFill>
-            <a:srgbClr val="F2F2F2"/>
-          </a:solidFill>
-          <a:ln>
-            <a:noFill/>
-          </a:ln>
-        </p:spPr>
-        <p:style>
-          <a:lnRef idx="1">
-            <a:schemeClr val="accent1"/>
-          </a:lnRef>
-          <a:fillRef idx="3">
-            <a:schemeClr val="accent1"/>
-          </a:fillRef>
-          <a:effectRef idx="2">
-            <a:schemeClr val="accent1"/>
-          </a:effectRef>
-          <a:fontRef idx="minor">
-            <a:schemeClr val="lt1"/>
-          </a:fontRef>
-        </p:style>
-        <p:txBody>
-          <a:bodyPr rtlCol="0" anchor="ctr"/>
-          <a:lstStyle/>
-          <a:p>
-            <a:pPr algn="ctr"/>
-          </a:p>
-        </p:txBody>
-      </p:sp>
-      <p:sp>
-        <p:nvSpPr>
-          <p:cNvPr id="17" name="Rectangle 16"/>
-          <p:cNvSpPr/>
-          <p:nvPr/>
-        </p:nvSpPr>
-        <p:spPr>
-          <a:xfrm>
-            <a:off x="8109508" y="1591056"/>
-            <a:ext cx="3624986" cy="64008"/>
-          </a:xfrm>
-          <a:prstGeom prst="rect">
-            <a:avLst/>
-          </a:prstGeom>
-          <a:solidFill>
-            <a:srgbClr val="095292"/>
-          </a:solidFill>
-          <a:ln>
-            <a:noFill/>
-          </a:ln>
-        </p:spPr>
-        <p:style>
-          <a:lnRef idx="1">
-            <a:schemeClr val="accent1"/>
-          </a:lnRef>
-          <a:fillRef idx="3">
-            <a:schemeClr val="accent1"/>
-          </a:fillRef>
-          <a:effectRef idx="2">
-            <a:schemeClr val="accent1"/>
-          </a:effectRef>
-          <a:fontRef idx="minor">
-            <a:schemeClr val="lt1"/>
-          </a:fontRef>
-        </p:style>
-        <p:txBody>
-          <a:bodyPr rtlCol="0" anchor="ctr"/>
-          <a:lstStyle/>
-          <a:p>
-            <a:pPr algn="ctr"/>
-          </a:p>
-        </p:txBody>
-      </p:sp>
-      <p:sp>
-        <p:nvSpPr>
-          <p:cNvPr id="18" name="Rectangle 17"/>
-          <p:cNvSpPr/>
-          <p:nvPr/>
-        </p:nvSpPr>
-        <p:spPr>
-          <a:xfrm>
-            <a:off x="8109508" y="1655064"/>
-            <a:ext cx="3624986" cy="27432"/>
-          </a:xfrm>
-          <a:prstGeom prst="rect">
-            <a:avLst/>
-          </a:prstGeom>
-          <a:solidFill>
-            <a:srgbClr val="FFD000"/>
-          </a:solidFill>
-          <a:ln>
-            <a:noFill/>
-          </a:ln>
-        </p:spPr>
-        <p:style>
-          <a:lnRef idx="1">
-            <a:schemeClr val="accent1"/>
-          </a:lnRef>
-          <a:fillRef idx="3">
-            <a:schemeClr val="accent1"/>
-          </a:fillRef>
-          <a:effectRef idx="2">
-            <a:schemeClr val="accent1"/>
-          </a:effectRef>
-          <a:fontRef idx="minor">
-            <a:schemeClr val="lt1"/>
-          </a:fontRef>
-        </p:style>
-        <p:txBody>
-          <a:bodyPr rtlCol="0" anchor="ctr"/>
-          <a:lstStyle/>
-          <a:p>
-            <a:pPr algn="ctr"/>
-          </a:p>
-        </p:txBody>
-      </p:sp>
-      <p:pic>
-        <p:nvPicPr>
-          <p:cNvPr id="19" name="Picture 18" descr="examlab.png"/>
-          <p:cNvPicPr>
-            <a:picLocks noChangeAspect="1"/>
-          </p:cNvPicPr>
-          <p:nvPr/>
-        </p:nvPicPr>
-        <p:blipFill>
-          <a:blip r:embed="rId4"/>
-          <a:stretch>
-            <a:fillRect/>
-          </a:stretch>
-        </p:blipFill>
-        <p:spPr>
-          <a:xfrm>
-            <a:off x="9295638" y="1847087"/>
-            <a:ext cx="1252728" cy="1252728"/>
-          </a:xfrm>
-          <a:prstGeom prst="rect">
-            <a:avLst/>
-          </a:prstGeom>
-        </p:spPr>
-      </p:pic>
-      <p:sp>
-        <p:nvSpPr>
-          <p:cNvPr id="20" name="TextBox 19"/>
-          <p:cNvSpPr txBox="1"/>
-          <p:nvPr/>
-        </p:nvSpPr>
-        <p:spPr>
-          <a:xfrm>
-            <a:off x="8182660" y="3191256"/>
-            <a:ext cx="3478682" cy="621792"/>
-          </a:xfrm>
-          <a:prstGeom prst="rect">
-            <a:avLst/>
-          </a:prstGeom>
-          <a:noFill/>
-        </p:spPr>
-        <p:txBody>
-          <a:bodyPr wrap="square" anchor="t"/>
-          <a:lstStyle/>
-          <a:p>
-            <a:pPr algn="ctr"/>
-            <a:r>
-              <a:rPr sz="1300" b="1" i="0">
-                <a:solidFill>
-                  <a:srgbClr val="095292"/>
-                </a:solidFill>
-                <a:latin typeface="Calibri"/>
-              </a:rPr>
-              <a:t>la plataforma del curso</a:t>
-            </a:r>
-          </a:p>
-          <a:p>
-            <a:pPr algn="ctr">
-              <a:spcBef>
-                <a:spcPts val="200"/>
-              </a:spcBef>
-            </a:pPr>
-            <a:r>
-              <a:rPr sz="1000" b="0" i="0">
-                <a:solidFill>
-                  <a:srgbClr val="666666"/>
-                </a:solidFill>
-                <a:latin typeface="Calibri"/>
-              </a:rPr>
-              <a:t>Entrega del taller · en la fecha que indique el docente</a:t>
-            </a:r>
-          </a:p>
-        </p:txBody>
-      </p:sp>
-      <p:sp>
-        <p:nvSpPr>
-          <p:cNvPr id="21" name="TextBox 20"/>
           <p:cNvSpPr txBox="1"/>
           <p:nvPr/>
         </p:nvSpPr>
@@ -5527,7 +5398,7 @@
                 </a:solidFill>
                 <a:latin typeface="Calibri"/>
               </a:rPr>
-              <a:t>Taller PI — por que importa</a:t>
+              <a:t>Demo del dia</a:t>
             </a:r>
           </a:p>
         </p:txBody>
@@ -5575,7 +5446,7 @@
                 </a:solidFill>
                 <a:latin typeface="Calibri"/>
               </a:rPr>
-              <a:t>Por que importa al PI:</a:t>
+              <a:t>Herramienta:</a:t>
             </a:r>
             <a:r>
               <a:rPr sz="2000" b="0" i="0">
@@ -5584,7 +5455,7 @@
                 </a:solidFill>
                 <a:latin typeface="Calibri"/>
               </a:rPr>
-              <a:t> VetCare no se dibuja de una sola sentada, y hoy definimos el mapa de fases que vamos a recorrer todo el semestre y en cual de ellas se califica cada entrega.</a:t>
+              <a:t> draw.io · Google Docs</a:t>
             </a:r>
           </a:p>
           <a:p>
@@ -5600,7 +5471,25 @@
                 </a:solidFill>
                 <a:latin typeface="Calibri"/>
               </a:rPr>
-              <a:t>–   En la clase anterior quedo claro el dolor de Huellitas (fichas que se extravian, busquedas eternas y cero metricas); hoy ese dolor se ubica dentro de un ciclo de vida y se le pone nombre a lo que sale de cada etapa.</a:t>
+              <a:t>–   </a:t>
+            </a:r>
+            <a:r>
+              <a:rPr sz="2000" b="1" i="0">
+                <a:solidFill>
+                  <a:srgbClr val="333333"/>
+                </a:solidFill>
+                <a:latin typeface="Calibri"/>
+              </a:rPr>
+              <a:t>Demo:</a:t>
+            </a:r>
+            <a:r>
+              <a:rPr sz="2000" b="0" i="0">
+                <a:solidFill>
+                  <a:srgbClr val="333333"/>
+                </a:solidFill>
+                <a:latin typeface="Calibri"/>
+              </a:rPr>
+              <a:t> El docente arma en vivo en draw.io el ciclo de VetCare en dos versiones, una sola pasada y tres vueltas, y muestra que las cajas son identicas y lo unico que cambia es el recorrido.</a:t>
             </a:r>
           </a:p>
           <a:p>
@@ -5616,7 +5505,7 @@
                 </a:solidFill>
                 <a:latin typeface="Calibri"/>
               </a:rPr>
-              <a:t>–   Los tres casos de matricula se entienden mejor con el ciclo en la mano: aqui vivimos en requisitos y diseño, Programacion II vive en construccion y pruebas, y quien solo cursa Seminario cierra con documento de diseño y prototipo navegable.</a:t>
+              <a:t>–   Mismo dominio VetCare — no otro ejemplo. Aqui se diseña, no se programa.</a:t>
             </a:r>
           </a:p>
         </p:txBody>
@@ -5691,7 +5580,7 @@
         <p:spPr>
           <a:xfrm>
             <a:off x="0" y="0"/>
-            <a:ext cx="12191695" cy="960120"/>
+            <a:ext cx="12191695" cy="1170432"/>
           </a:xfrm>
           <a:prstGeom prst="rect">
             <a:avLst/>
@@ -5733,7 +5622,7 @@
         </p:nvSpPr>
         <p:spPr>
           <a:xfrm>
-            <a:off x="0" y="960120"/>
+            <a:off x="0" y="1170432"/>
             <a:ext cx="12191695" cy="41148"/>
           </a:xfrm>
           <a:prstGeom prst="rect">
@@ -5777,7 +5666,7 @@
         <p:spPr>
           <a:xfrm>
             <a:off x="457200" y="164592"/>
-            <a:ext cx="11277295" cy="502920"/>
+            <a:ext cx="11277295" cy="384048"/>
           </a:xfrm>
           <a:prstGeom prst="rect">
             <a:avLst/>
@@ -5797,7 +5686,7 @@
                 </a:solidFill>
                 <a:latin typeface="Calibri"/>
               </a:rPr>
-              <a:t>Taller PI — punto de partida</a:t>
+              <a:t>Herramientas de hoy</a:t>
             </a:r>
           </a:p>
         </p:txBody>
@@ -5810,8 +5699,8 @@
         </p:nvSpPr>
         <p:spPr>
           <a:xfrm>
-            <a:off x="457200" y="1170432"/>
-            <a:ext cx="11277295" cy="5230368"/>
+            <a:off x="457200" y="566928"/>
+            <a:ext cx="11277295" cy="411480"/>
           </a:xfrm>
           <a:prstGeom prst="rect">
             <a:avLst/>
@@ -5824,58 +5713,633 @@
           </a:bodyPr>
           <a:lstStyle/>
           <a:p>
-            <a:pPr>
-              <a:spcAft>
-                <a:spcPts val="800"/>
-              </a:spcAft>
+            <a:r>
+              <a:rPr sz="1400" b="0" i="0">
+                <a:solidFill>
+                  <a:srgbClr val="B8D8EE"/>
+                </a:solidFill>
+                <a:latin typeface="Calibri"/>
+              </a:rPr>
+              <a:t>Gratis · funcionan en el navegador</a:t>
+            </a:r>
+          </a:p>
+        </p:txBody>
+      </p:sp>
+      <p:sp>
+        <p:nvSpPr>
+          <p:cNvPr id="6" name="Rounded Rectangle 5"/>
+          <p:cNvSpPr/>
+          <p:nvPr/>
+        </p:nvSpPr>
+        <p:spPr>
+          <a:xfrm>
+            <a:off x="457200" y="1591056"/>
+            <a:ext cx="3624986" cy="2331720"/>
+          </a:xfrm>
+          <a:prstGeom prst="roundRect">
+            <a:avLst>
+              <a:gd name="adj" fmla="val 12000"/>
+            </a:avLst>
+          </a:prstGeom>
+          <a:solidFill>
+            <a:srgbClr val="F2F2F2"/>
+          </a:solidFill>
+          <a:ln>
+            <a:noFill/>
+          </a:ln>
+        </p:spPr>
+        <p:style>
+          <a:lnRef idx="1">
+            <a:schemeClr val="accent1"/>
+          </a:lnRef>
+          <a:fillRef idx="3">
+            <a:schemeClr val="accent1"/>
+          </a:fillRef>
+          <a:effectRef idx="2">
+            <a:schemeClr val="accent1"/>
+          </a:effectRef>
+          <a:fontRef idx="minor">
+            <a:schemeClr val="lt1"/>
+          </a:fontRef>
+        </p:style>
+        <p:txBody>
+          <a:bodyPr rtlCol="0" anchor="ctr"/>
+          <a:lstStyle/>
+          <a:p>
+            <a:pPr algn="ctr"/>
+          </a:p>
+        </p:txBody>
+      </p:sp>
+      <p:sp>
+        <p:nvSpPr>
+          <p:cNvPr id="7" name="Rectangle 6"/>
+          <p:cNvSpPr/>
+          <p:nvPr/>
+        </p:nvSpPr>
+        <p:spPr>
+          <a:xfrm>
+            <a:off x="457200" y="1591056"/>
+            <a:ext cx="3624986" cy="64008"/>
+          </a:xfrm>
+          <a:prstGeom prst="rect">
+            <a:avLst/>
+          </a:prstGeom>
+          <a:solidFill>
+            <a:srgbClr val="095292"/>
+          </a:solidFill>
+          <a:ln>
+            <a:noFill/>
+          </a:ln>
+        </p:spPr>
+        <p:style>
+          <a:lnRef idx="1">
+            <a:schemeClr val="accent1"/>
+          </a:lnRef>
+          <a:fillRef idx="3">
+            <a:schemeClr val="accent1"/>
+          </a:fillRef>
+          <a:effectRef idx="2">
+            <a:schemeClr val="accent1"/>
+          </a:effectRef>
+          <a:fontRef idx="minor">
+            <a:schemeClr val="lt1"/>
+          </a:fontRef>
+        </p:style>
+        <p:txBody>
+          <a:bodyPr rtlCol="0" anchor="ctr"/>
+          <a:lstStyle/>
+          <a:p>
+            <a:pPr algn="ctr"/>
+          </a:p>
+        </p:txBody>
+      </p:sp>
+      <p:sp>
+        <p:nvSpPr>
+          <p:cNvPr id="8" name="Rectangle 7"/>
+          <p:cNvSpPr/>
+          <p:nvPr/>
+        </p:nvSpPr>
+        <p:spPr>
+          <a:xfrm>
+            <a:off x="457200" y="1655064"/>
+            <a:ext cx="3624986" cy="27432"/>
+          </a:xfrm>
+          <a:prstGeom prst="rect">
+            <a:avLst/>
+          </a:prstGeom>
+          <a:solidFill>
+            <a:srgbClr val="FFD000"/>
+          </a:solidFill>
+          <a:ln>
+            <a:noFill/>
+          </a:ln>
+        </p:spPr>
+        <p:style>
+          <a:lnRef idx="1">
+            <a:schemeClr val="accent1"/>
+          </a:lnRef>
+          <a:fillRef idx="3">
+            <a:schemeClr val="accent1"/>
+          </a:fillRef>
+          <a:effectRef idx="2">
+            <a:schemeClr val="accent1"/>
+          </a:effectRef>
+          <a:fontRef idx="minor">
+            <a:schemeClr val="lt1"/>
+          </a:fontRef>
+        </p:style>
+        <p:txBody>
+          <a:bodyPr rtlCol="0" anchor="ctr"/>
+          <a:lstStyle/>
+          <a:p>
+            <a:pPr algn="ctr"/>
+          </a:p>
+        </p:txBody>
+      </p:sp>
+      <p:pic>
+        <p:nvPicPr>
+          <p:cNvPr id="9" name="Picture 8" descr="drawio.png"/>
+          <p:cNvPicPr>
+            <a:picLocks noChangeAspect="1"/>
+          </p:cNvPicPr>
+          <p:nvPr/>
+        </p:nvPicPr>
+        <p:blipFill>
+          <a:blip r:embed="rId2"/>
+          <a:stretch>
+            <a:fillRect/>
+          </a:stretch>
+        </p:blipFill>
+        <p:spPr>
+          <a:xfrm>
+            <a:off x="1643329" y="1847087"/>
+            <a:ext cx="1252728" cy="1252728"/>
+          </a:xfrm>
+          <a:prstGeom prst="rect">
+            <a:avLst/>
+          </a:prstGeom>
+        </p:spPr>
+      </p:pic>
+      <p:sp>
+        <p:nvSpPr>
+          <p:cNvPr id="10" name="TextBox 9"/>
+          <p:cNvSpPr txBox="1"/>
+          <p:nvPr/>
+        </p:nvSpPr>
+        <p:spPr>
+          <a:xfrm>
+            <a:off x="530352" y="3191256"/>
+            <a:ext cx="3478682" cy="621792"/>
+          </a:xfrm>
+          <a:prstGeom prst="rect">
+            <a:avLst/>
+          </a:prstGeom>
+          <a:noFill/>
+        </p:spPr>
+        <p:txBody>
+          <a:bodyPr wrap="square" anchor="t"/>
+          <a:lstStyle/>
+          <a:p>
+            <a:pPr algn="ctr"/>
+            <a:r>
+              <a:rPr sz="1300" b="1" i="0">
+                <a:solidFill>
+                  <a:srgbClr val="095292"/>
+                </a:solidFill>
+                <a:latin typeface="Calibri"/>
+              </a:rPr>
+              <a:t>Draw.Io</a:t>
+            </a:r>
+          </a:p>
+          <a:p>
+            <a:pPr algn="ctr">
+              <a:spcBef>
+                <a:spcPts val="200"/>
+              </a:spcBef>
             </a:pPr>
             <a:r>
-              <a:rPr sz="2000" b="0" i="0">
-                <a:solidFill>
-                  <a:srgbClr val="333333"/>
-                </a:solidFill>
-                <a:latin typeface="Calibri"/>
-              </a:rPr>
-              <a:t>–   Huellitas guarda hoy 5.000 fichas en carpetas de carton dentro de un archivador metalico, y las citas del dia se anotan a mano en una libreta que se lleva la auxiliar.</a:t>
-            </a:r>
-          </a:p>
-          <a:p>
-            <a:pPr>
-              <a:spcAft>
-                <a:spcPts val="800"/>
-              </a:spcAft>
+              <a:rPr sz="1000" b="0" i="0">
+                <a:solidFill>
+                  <a:srgbClr val="666666"/>
+                </a:solidFill>
+                <a:latin typeface="Calibri"/>
+              </a:rPr>
+              <a:t>Diagramas UML y de contexto</a:t>
+            </a:r>
+          </a:p>
+        </p:txBody>
+      </p:sp>
+      <p:sp>
+        <p:nvSpPr>
+          <p:cNvPr id="11" name="Rounded Rectangle 10"/>
+          <p:cNvSpPr/>
+          <p:nvPr/>
+        </p:nvSpPr>
+        <p:spPr>
+          <a:xfrm>
+            <a:off x="4283354" y="1591056"/>
+            <a:ext cx="3624986" cy="2331720"/>
+          </a:xfrm>
+          <a:prstGeom prst="roundRect">
+            <a:avLst>
+              <a:gd name="adj" fmla="val 12000"/>
+            </a:avLst>
+          </a:prstGeom>
+          <a:solidFill>
+            <a:srgbClr val="F2F2F2"/>
+          </a:solidFill>
+          <a:ln>
+            <a:noFill/>
+          </a:ln>
+        </p:spPr>
+        <p:style>
+          <a:lnRef idx="1">
+            <a:schemeClr val="accent1"/>
+          </a:lnRef>
+          <a:fillRef idx="3">
+            <a:schemeClr val="accent1"/>
+          </a:fillRef>
+          <a:effectRef idx="2">
+            <a:schemeClr val="accent1"/>
+          </a:effectRef>
+          <a:fontRef idx="minor">
+            <a:schemeClr val="lt1"/>
+          </a:fontRef>
+        </p:style>
+        <p:txBody>
+          <a:bodyPr rtlCol="0" anchor="ctr"/>
+          <a:lstStyle/>
+          <a:p>
+            <a:pPr algn="ctr"/>
+          </a:p>
+        </p:txBody>
+      </p:sp>
+      <p:sp>
+        <p:nvSpPr>
+          <p:cNvPr id="12" name="Rectangle 11"/>
+          <p:cNvSpPr/>
+          <p:nvPr/>
+        </p:nvSpPr>
+        <p:spPr>
+          <a:xfrm>
+            <a:off x="4283354" y="1591056"/>
+            <a:ext cx="3624986" cy="64008"/>
+          </a:xfrm>
+          <a:prstGeom prst="rect">
+            <a:avLst/>
+          </a:prstGeom>
+          <a:solidFill>
+            <a:srgbClr val="095292"/>
+          </a:solidFill>
+          <a:ln>
+            <a:noFill/>
+          </a:ln>
+        </p:spPr>
+        <p:style>
+          <a:lnRef idx="1">
+            <a:schemeClr val="accent1"/>
+          </a:lnRef>
+          <a:fillRef idx="3">
+            <a:schemeClr val="accent1"/>
+          </a:fillRef>
+          <a:effectRef idx="2">
+            <a:schemeClr val="accent1"/>
+          </a:effectRef>
+          <a:fontRef idx="minor">
+            <a:schemeClr val="lt1"/>
+          </a:fontRef>
+        </p:style>
+        <p:txBody>
+          <a:bodyPr rtlCol="0" anchor="ctr"/>
+          <a:lstStyle/>
+          <a:p>
+            <a:pPr algn="ctr"/>
+          </a:p>
+        </p:txBody>
+      </p:sp>
+      <p:sp>
+        <p:nvSpPr>
+          <p:cNvPr id="13" name="Rectangle 12"/>
+          <p:cNvSpPr/>
+          <p:nvPr/>
+        </p:nvSpPr>
+        <p:spPr>
+          <a:xfrm>
+            <a:off x="4283354" y="1655064"/>
+            <a:ext cx="3624986" cy="27432"/>
+          </a:xfrm>
+          <a:prstGeom prst="rect">
+            <a:avLst/>
+          </a:prstGeom>
+          <a:solidFill>
+            <a:srgbClr val="FFD000"/>
+          </a:solidFill>
+          <a:ln>
+            <a:noFill/>
+          </a:ln>
+        </p:spPr>
+        <p:style>
+          <a:lnRef idx="1">
+            <a:schemeClr val="accent1"/>
+          </a:lnRef>
+          <a:fillRef idx="3">
+            <a:schemeClr val="accent1"/>
+          </a:fillRef>
+          <a:effectRef idx="2">
+            <a:schemeClr val="accent1"/>
+          </a:effectRef>
+          <a:fontRef idx="minor">
+            <a:schemeClr val="lt1"/>
+          </a:fontRef>
+        </p:style>
+        <p:txBody>
+          <a:bodyPr rtlCol="0" anchor="ctr"/>
+          <a:lstStyle/>
+          <a:p>
+            <a:pPr algn="ctr"/>
+          </a:p>
+        </p:txBody>
+      </p:sp>
+      <p:pic>
+        <p:nvPicPr>
+          <p:cNvPr id="14" name="Picture 13" descr="google_docs.png"/>
+          <p:cNvPicPr>
+            <a:picLocks noChangeAspect="1"/>
+          </p:cNvPicPr>
+          <p:nvPr/>
+        </p:nvPicPr>
+        <p:blipFill>
+          <a:blip r:embed="rId3"/>
+          <a:stretch>
+            <a:fillRect/>
+          </a:stretch>
+        </p:blipFill>
+        <p:spPr>
+          <a:xfrm>
+            <a:off x="5469483" y="1847087"/>
+            <a:ext cx="1252728" cy="1252728"/>
+          </a:xfrm>
+          <a:prstGeom prst="rect">
+            <a:avLst/>
+          </a:prstGeom>
+        </p:spPr>
+      </p:pic>
+      <p:sp>
+        <p:nvSpPr>
+          <p:cNvPr id="15" name="TextBox 14"/>
+          <p:cNvSpPr txBox="1"/>
+          <p:nvPr/>
+        </p:nvSpPr>
+        <p:spPr>
+          <a:xfrm>
+            <a:off x="4356506" y="3191256"/>
+            <a:ext cx="3478682" cy="621792"/>
+          </a:xfrm>
+          <a:prstGeom prst="rect">
+            <a:avLst/>
+          </a:prstGeom>
+          <a:noFill/>
+        </p:spPr>
+        <p:txBody>
+          <a:bodyPr wrap="square" anchor="t"/>
+          <a:lstStyle/>
+          <a:p>
+            <a:pPr algn="ctr"/>
+            <a:r>
+              <a:rPr sz="1300" b="1" i="0">
+                <a:solidFill>
+                  <a:srgbClr val="095292"/>
+                </a:solidFill>
+                <a:latin typeface="Calibri"/>
+              </a:rPr>
+              <a:t>google docs</a:t>
+            </a:r>
+          </a:p>
+          <a:p>
+            <a:pPr algn="ctr">
+              <a:spcBef>
+                <a:spcPts val="200"/>
+              </a:spcBef>
             </a:pPr>
             <a:r>
-              <a:rPr sz="2000" b="0" i="0">
-                <a:solidFill>
-                  <a:srgbClr val="333333"/>
-                </a:solidFill>
-                <a:latin typeface="Calibri"/>
-              </a:rPr>
-              <a:t>–   El equipo tiene una lista cruda de necesidades salida de la entrevista, pero nadie ha definido que documento sale de cada etapa ni quien lo firma como aprobado.</a:t>
-            </a:r>
-          </a:p>
-          <a:p>
-            <a:pPr>
-              <a:spcAft>
-                <a:spcPts val="800"/>
-              </a:spcAft>
+              <a:rPr sz="1000" b="0" i="0">
+                <a:solidFill>
+                  <a:srgbClr val="666666"/>
+                </a:solidFill>
+                <a:latin typeface="Calibri"/>
+              </a:rPr>
+              <a:t>Documentos del paquete de diseño</a:t>
+            </a:r>
+          </a:p>
+        </p:txBody>
+      </p:sp>
+      <p:sp>
+        <p:nvSpPr>
+          <p:cNvPr id="16" name="Rounded Rectangle 15"/>
+          <p:cNvSpPr/>
+          <p:nvPr/>
+        </p:nvSpPr>
+        <p:spPr>
+          <a:xfrm>
+            <a:off x="8109508" y="1591056"/>
+            <a:ext cx="3624986" cy="2331720"/>
+          </a:xfrm>
+          <a:prstGeom prst="roundRect">
+            <a:avLst>
+              <a:gd name="adj" fmla="val 12000"/>
+            </a:avLst>
+          </a:prstGeom>
+          <a:solidFill>
+            <a:srgbClr val="F2F2F2"/>
+          </a:solidFill>
+          <a:ln>
+            <a:noFill/>
+          </a:ln>
+        </p:spPr>
+        <p:style>
+          <a:lnRef idx="1">
+            <a:schemeClr val="accent1"/>
+          </a:lnRef>
+          <a:fillRef idx="3">
+            <a:schemeClr val="accent1"/>
+          </a:fillRef>
+          <a:effectRef idx="2">
+            <a:schemeClr val="accent1"/>
+          </a:effectRef>
+          <a:fontRef idx="minor">
+            <a:schemeClr val="lt1"/>
+          </a:fontRef>
+        </p:style>
+        <p:txBody>
+          <a:bodyPr rtlCol="0" anchor="ctr"/>
+          <a:lstStyle/>
+          <a:p>
+            <a:pPr algn="ctr"/>
+          </a:p>
+        </p:txBody>
+      </p:sp>
+      <p:sp>
+        <p:nvSpPr>
+          <p:cNvPr id="17" name="Rectangle 16"/>
+          <p:cNvSpPr/>
+          <p:nvPr/>
+        </p:nvSpPr>
+        <p:spPr>
+          <a:xfrm>
+            <a:off x="8109508" y="1591056"/>
+            <a:ext cx="3624986" cy="64008"/>
+          </a:xfrm>
+          <a:prstGeom prst="rect">
+            <a:avLst/>
+          </a:prstGeom>
+          <a:solidFill>
+            <a:srgbClr val="095292"/>
+          </a:solidFill>
+          <a:ln>
+            <a:noFill/>
+          </a:ln>
+        </p:spPr>
+        <p:style>
+          <a:lnRef idx="1">
+            <a:schemeClr val="accent1"/>
+          </a:lnRef>
+          <a:fillRef idx="3">
+            <a:schemeClr val="accent1"/>
+          </a:fillRef>
+          <a:effectRef idx="2">
+            <a:schemeClr val="accent1"/>
+          </a:effectRef>
+          <a:fontRef idx="minor">
+            <a:schemeClr val="lt1"/>
+          </a:fontRef>
+        </p:style>
+        <p:txBody>
+          <a:bodyPr rtlCol="0" anchor="ctr"/>
+          <a:lstStyle/>
+          <a:p>
+            <a:pPr algn="ctr"/>
+          </a:p>
+        </p:txBody>
+      </p:sp>
+      <p:sp>
+        <p:nvSpPr>
+          <p:cNvPr id="18" name="Rectangle 17"/>
+          <p:cNvSpPr/>
+          <p:nvPr/>
+        </p:nvSpPr>
+        <p:spPr>
+          <a:xfrm>
+            <a:off x="8109508" y="1655064"/>
+            <a:ext cx="3624986" cy="27432"/>
+          </a:xfrm>
+          <a:prstGeom prst="rect">
+            <a:avLst/>
+          </a:prstGeom>
+          <a:solidFill>
+            <a:srgbClr val="FFD000"/>
+          </a:solidFill>
+          <a:ln>
+            <a:noFill/>
+          </a:ln>
+        </p:spPr>
+        <p:style>
+          <a:lnRef idx="1">
+            <a:schemeClr val="accent1"/>
+          </a:lnRef>
+          <a:fillRef idx="3">
+            <a:schemeClr val="accent1"/>
+          </a:fillRef>
+          <a:effectRef idx="2">
+            <a:schemeClr val="accent1"/>
+          </a:effectRef>
+          <a:fontRef idx="minor">
+            <a:schemeClr val="lt1"/>
+          </a:fontRef>
+        </p:style>
+        <p:txBody>
+          <a:bodyPr rtlCol="0" anchor="ctr"/>
+          <a:lstStyle/>
+          <a:p>
+            <a:pPr algn="ctr"/>
+          </a:p>
+        </p:txBody>
+      </p:sp>
+      <p:pic>
+        <p:nvPicPr>
+          <p:cNvPr id="19" name="Picture 18" descr="examlab.png"/>
+          <p:cNvPicPr>
+            <a:picLocks noChangeAspect="1"/>
+          </p:cNvPicPr>
+          <p:nvPr/>
+        </p:nvPicPr>
+        <p:blipFill>
+          <a:blip r:embed="rId4"/>
+          <a:stretch>
+            <a:fillRect/>
+          </a:stretch>
+        </p:blipFill>
+        <p:spPr>
+          <a:xfrm>
+            <a:off x="9295638" y="1847087"/>
+            <a:ext cx="1252728" cy="1252728"/>
+          </a:xfrm>
+          <a:prstGeom prst="rect">
+            <a:avLst/>
+          </a:prstGeom>
+        </p:spPr>
+      </p:pic>
+      <p:sp>
+        <p:nvSpPr>
+          <p:cNvPr id="20" name="TextBox 19"/>
+          <p:cNvSpPr txBox="1"/>
+          <p:nvPr/>
+        </p:nvSpPr>
+        <p:spPr>
+          <a:xfrm>
+            <a:off x="8182660" y="3191256"/>
+            <a:ext cx="3478682" cy="621792"/>
+          </a:xfrm>
+          <a:prstGeom prst="rect">
+            <a:avLst/>
+          </a:prstGeom>
+          <a:noFill/>
+        </p:spPr>
+        <p:txBody>
+          <a:bodyPr wrap="square" anchor="t"/>
+          <a:lstStyle/>
+          <a:p>
+            <a:pPr algn="ctr"/>
+            <a:r>
+              <a:rPr sz="1300" b="1" i="0">
+                <a:solidFill>
+                  <a:srgbClr val="095292"/>
+                </a:solidFill>
+                <a:latin typeface="Calibri"/>
+              </a:rPr>
+              <a:t>la plataforma del curso</a:t>
+            </a:r>
+          </a:p>
+          <a:p>
+            <a:pPr algn="ctr">
+              <a:spcBef>
+                <a:spcPts val="200"/>
+              </a:spcBef>
             </a:pPr>
             <a:r>
-              <a:rPr sz="2000" b="0" i="0">
-                <a:solidFill>
-                  <a:srgbClr val="333333"/>
-                </a:solidFill>
-                <a:latin typeface="Calibri"/>
-              </a:rPr>
-              <a:t>–   No existe ni una linea de codigo ni un diagrama formal: se parte de cero y el unico insumo real es lo que dijo la clinica.</a:t>
-            </a:r>
-          </a:p>
-        </p:txBody>
-      </p:sp>
-      <p:sp>
-        <p:nvSpPr>
-          <p:cNvPr id="6" name="TextBox 5"/>
+              <a:rPr sz="1000" b="0" i="0">
+                <a:solidFill>
+                  <a:srgbClr val="666666"/>
+                </a:solidFill>
+                <a:latin typeface="Calibri"/>
+              </a:rPr>
+              <a:t>Entrega del taller · en la fecha que indique el docente</a:t>
+            </a:r>
+          </a:p>
+        </p:txBody>
+      </p:sp>
+      <p:sp>
+        <p:nvSpPr>
+          <p:cNvPr id="21" name="TextBox 20"/>
           <p:cNvSpPr txBox="1"/>
           <p:nvPr/>
         </p:nvSpPr>
@@ -6049,111 +6513,21 @@
                 </a:solidFill>
                 <a:latin typeface="Calibri"/>
               </a:rPr>
-              <a:t>Taller PI — pasos guiados</a:t>
-            </a:r>
-          </a:p>
-        </p:txBody>
-      </p:sp>
-      <p:sp>
-        <p:nvSpPr>
-          <p:cNvPr id="5" name="Rounded Rectangle 4"/>
-          <p:cNvSpPr/>
-          <p:nvPr/>
-        </p:nvSpPr>
-        <p:spPr>
-          <a:xfrm>
-            <a:off x="457200" y="1234440"/>
-            <a:ext cx="11277295" cy="950976"/>
-          </a:xfrm>
-          <a:prstGeom prst="roundRect">
-            <a:avLst>
-              <a:gd name="adj" fmla="val 12000"/>
-            </a:avLst>
-          </a:prstGeom>
-          <a:solidFill>
-            <a:srgbClr val="F2F2F2"/>
-          </a:solidFill>
-          <a:ln>
-            <a:noFill/>
-          </a:ln>
-        </p:spPr>
-        <p:style>
-          <a:lnRef idx="1">
-            <a:schemeClr val="accent1"/>
-          </a:lnRef>
-          <a:fillRef idx="3">
-            <a:schemeClr val="accent1"/>
-          </a:fillRef>
-          <a:effectRef idx="2">
-            <a:schemeClr val="accent1"/>
-          </a:effectRef>
-          <a:fontRef idx="minor">
-            <a:schemeClr val="lt1"/>
-          </a:fontRef>
-        </p:style>
-        <p:txBody>
-          <a:bodyPr rtlCol="0" anchor="ctr"/>
-          <a:lstStyle/>
-          <a:p>
-            <a:pPr algn="ctr"/>
-          </a:p>
-        </p:txBody>
-      </p:sp>
-      <p:sp>
-        <p:nvSpPr>
-          <p:cNvPr id="6" name="Rounded Rectangle 5"/>
-          <p:cNvSpPr/>
-          <p:nvPr/>
-        </p:nvSpPr>
-        <p:spPr>
-          <a:xfrm>
-            <a:off x="594360" y="1490472"/>
-            <a:ext cx="438912" cy="438912"/>
-          </a:xfrm>
-          <a:prstGeom prst="roundRect">
-            <a:avLst>
-              <a:gd name="adj" fmla="val 12000"/>
-            </a:avLst>
-          </a:prstGeom>
-          <a:solidFill>
-            <a:srgbClr val="095292"/>
-          </a:solidFill>
-          <a:ln>
-            <a:noFill/>
-          </a:ln>
-        </p:spPr>
-        <p:style>
-          <a:lnRef idx="1">
-            <a:schemeClr val="accent1"/>
-          </a:lnRef>
-          <a:fillRef idx="3">
-            <a:schemeClr val="accent1"/>
-          </a:fillRef>
-          <a:effectRef idx="2">
-            <a:schemeClr val="accent1"/>
-          </a:effectRef>
-          <a:fontRef idx="minor">
-            <a:schemeClr val="lt1"/>
-          </a:fontRef>
-        </p:style>
-        <p:txBody>
-          <a:bodyPr rtlCol="0" anchor="ctr"/>
-          <a:lstStyle/>
-          <a:p>
-            <a:pPr algn="ctr"/>
-          </a:p>
-        </p:txBody>
-      </p:sp>
-      <p:sp>
-        <p:nvSpPr>
-          <p:cNvPr id="7" name="TextBox 6"/>
+              <a:t>Taller PI — por que importa</a:t>
+            </a:r>
+          </a:p>
+        </p:txBody>
+      </p:sp>
+      <p:sp>
+        <p:nvSpPr>
+          <p:cNvPr id="5" name="TextBox 4"/>
           <p:cNvSpPr txBox="1"/>
           <p:nvPr/>
         </p:nvSpPr>
         <p:spPr>
           <a:xfrm>
-            <a:off x="594360" y="1490472"/>
-            <a:ext cx="438912" cy="438912"/>
+            <a:off x="457200" y="1170432"/>
+            <a:ext cx="11277295" cy="5230368"/>
           </a:xfrm>
           <a:prstGeom prst="rect">
             <a:avLst/>
@@ -6161,677 +6535,81 @@
           <a:noFill/>
         </p:spPr>
         <p:txBody>
-          <a:bodyPr wrap="square" anchor="ctr"/>
-          <a:lstStyle/>
-          <a:p>
-            <a:pPr algn="ctr"/>
-            <a:r>
-              <a:rPr sz="1600" b="1" i="0">
-                <a:solidFill>
-                  <a:srgbClr val="FFFFFF"/>
-                </a:solidFill>
-                <a:latin typeface="Calibri"/>
-              </a:rPr>
-              <a:t>1</a:t>
-            </a:r>
-          </a:p>
-        </p:txBody>
-      </p:sp>
-      <p:sp>
-        <p:nvSpPr>
-          <p:cNvPr id="8" name="TextBox 7"/>
-          <p:cNvSpPr txBox="1"/>
-          <p:nvPr/>
-        </p:nvSpPr>
-        <p:spPr>
-          <a:xfrm>
-            <a:off x="1188720" y="1325880"/>
-            <a:ext cx="10271455" cy="786384"/>
-          </a:xfrm>
-          <a:prstGeom prst="rect">
-            <a:avLst/>
-          </a:prstGeom>
-          <a:noFill/>
-        </p:spPr>
-        <p:txBody>
-          <a:bodyPr wrap="square" anchor="ctr"/>
-          <a:lstStyle/>
-          <a:p>
-            <a:r>
-              <a:rPr sz="1400" b="1" i="0">
-                <a:solidFill>
-                  <a:srgbClr val="095292"/>
-                </a:solidFill>
-                <a:latin typeface="Calibri"/>
-              </a:rPr>
-              <a:t>En Google Docs cree la tabla de cuatro columnas (Fase / Pregunta que responde / Artefacto concreto de VetCare / Quien lo aprueba) y llenela con las cinco fases; en la columna del artefacto esta prohibido escribir generalidades: debe decir cosas como 'Lista RF-01 a RF-12 de Huellitas' o 'Mockup de la ficha del paciente'.</a:t>
-            </a:r>
-          </a:p>
-        </p:txBody>
-      </p:sp>
-      <p:sp>
-        <p:nvSpPr>
-          <p:cNvPr id="9" name="Rounded Rectangle 8"/>
-          <p:cNvSpPr/>
-          <p:nvPr/>
-        </p:nvSpPr>
-        <p:spPr>
-          <a:xfrm>
-            <a:off x="457200" y="2276856"/>
-            <a:ext cx="11277295" cy="950976"/>
-          </a:xfrm>
-          <a:prstGeom prst="roundRect">
-            <a:avLst>
-              <a:gd name="adj" fmla="val 12000"/>
-            </a:avLst>
-          </a:prstGeom>
-          <a:solidFill>
-            <a:srgbClr val="E8F4FA"/>
-          </a:solidFill>
-          <a:ln>
-            <a:noFill/>
-          </a:ln>
-        </p:spPr>
-        <p:style>
-          <a:lnRef idx="1">
-            <a:schemeClr val="accent1"/>
-          </a:lnRef>
-          <a:fillRef idx="3">
-            <a:schemeClr val="accent1"/>
-          </a:fillRef>
-          <a:effectRef idx="2">
-            <a:schemeClr val="accent1"/>
-          </a:effectRef>
-          <a:fontRef idx="minor">
-            <a:schemeClr val="lt1"/>
-          </a:fontRef>
-        </p:style>
-        <p:txBody>
-          <a:bodyPr rtlCol="0" anchor="ctr"/>
-          <a:lstStyle/>
-          <a:p>
-            <a:pPr algn="ctr"/>
-          </a:p>
-        </p:txBody>
-      </p:sp>
-      <p:sp>
-        <p:nvSpPr>
-          <p:cNvPr id="10" name="Rounded Rectangle 9"/>
-          <p:cNvSpPr/>
-          <p:nvPr/>
-        </p:nvSpPr>
-        <p:spPr>
-          <a:xfrm>
-            <a:off x="594360" y="2532888"/>
-            <a:ext cx="438912" cy="438912"/>
-          </a:xfrm>
-          <a:prstGeom prst="roundRect">
-            <a:avLst>
-              <a:gd name="adj" fmla="val 12000"/>
-            </a:avLst>
-          </a:prstGeom>
-          <a:solidFill>
-            <a:srgbClr val="095292"/>
-          </a:solidFill>
-          <a:ln>
-            <a:noFill/>
-          </a:ln>
-        </p:spPr>
-        <p:style>
-          <a:lnRef idx="1">
-            <a:schemeClr val="accent1"/>
-          </a:lnRef>
-          <a:fillRef idx="3">
-            <a:schemeClr val="accent1"/>
-          </a:fillRef>
-          <a:effectRef idx="2">
-            <a:schemeClr val="accent1"/>
-          </a:effectRef>
-          <a:fontRef idx="minor">
-            <a:schemeClr val="lt1"/>
-          </a:fontRef>
-        </p:style>
-        <p:txBody>
-          <a:bodyPr rtlCol="0" anchor="ctr"/>
-          <a:lstStyle/>
-          <a:p>
-            <a:pPr algn="ctr"/>
-          </a:p>
-        </p:txBody>
-      </p:sp>
-      <p:sp>
-        <p:nvSpPr>
-          <p:cNvPr id="11" name="TextBox 10"/>
-          <p:cNvSpPr txBox="1"/>
-          <p:nvPr/>
-        </p:nvSpPr>
-        <p:spPr>
-          <a:xfrm>
-            <a:off x="594360" y="2532888"/>
-            <a:ext cx="438912" cy="438912"/>
-          </a:xfrm>
-          <a:prstGeom prst="rect">
-            <a:avLst/>
-          </a:prstGeom>
-          <a:noFill/>
-        </p:spPr>
-        <p:txBody>
-          <a:bodyPr wrap="square" anchor="ctr"/>
-          <a:lstStyle/>
-          <a:p>
-            <a:pPr algn="ctr"/>
-            <a:r>
-              <a:rPr sz="1600" b="1" i="0">
-                <a:solidFill>
-                  <a:srgbClr val="FFFFFF"/>
-                </a:solidFill>
-                <a:latin typeface="Calibri"/>
-              </a:rPr>
-              <a:t>2</a:t>
-            </a:r>
-          </a:p>
-        </p:txBody>
-      </p:sp>
-      <p:sp>
-        <p:nvSpPr>
-          <p:cNvPr id="12" name="TextBox 11"/>
-          <p:cNvSpPr txBox="1"/>
-          <p:nvPr/>
-        </p:nvSpPr>
-        <p:spPr>
-          <a:xfrm>
-            <a:off x="1188720" y="2368296"/>
-            <a:ext cx="10271455" cy="786384"/>
-          </a:xfrm>
-          <a:prstGeom prst="rect">
-            <a:avLst/>
-          </a:prstGeom>
-          <a:noFill/>
-        </p:spPr>
-        <p:txBody>
-          <a:bodyPr wrap="square" anchor="ctr"/>
-          <a:lstStyle/>
-          <a:p>
-            <a:r>
-              <a:rPr sz="1500" b="1" i="0">
-                <a:solidFill>
-                  <a:srgbClr val="095292"/>
-                </a:solidFill>
-                <a:latin typeface="Calibri"/>
-              </a:rPr>
-              <a:t>Marque con relleno amarillo la fila de la fase donde esta el equipo hoy y escriba debajo dos evidencias verificables que lo demuestren (por ejemplo: 'existe la entrevista transcrita' y 'no existe ningun diagrama aprobado').</a:t>
-            </a:r>
-          </a:p>
-        </p:txBody>
-      </p:sp>
-      <p:sp>
-        <p:nvSpPr>
-          <p:cNvPr id="13" name="Rounded Rectangle 12"/>
-          <p:cNvSpPr/>
-          <p:nvPr/>
-        </p:nvSpPr>
-        <p:spPr>
-          <a:xfrm>
-            <a:off x="457200" y="3319272"/>
-            <a:ext cx="11277295" cy="950976"/>
-          </a:xfrm>
-          <a:prstGeom prst="roundRect">
-            <a:avLst>
-              <a:gd name="adj" fmla="val 12000"/>
-            </a:avLst>
-          </a:prstGeom>
-          <a:solidFill>
-            <a:srgbClr val="F2F2F2"/>
-          </a:solidFill>
-          <a:ln>
-            <a:noFill/>
-          </a:ln>
-        </p:spPr>
-        <p:style>
-          <a:lnRef idx="1">
-            <a:schemeClr val="accent1"/>
-          </a:lnRef>
-          <a:fillRef idx="3">
-            <a:schemeClr val="accent1"/>
-          </a:fillRef>
-          <a:effectRef idx="2">
-            <a:schemeClr val="accent1"/>
-          </a:effectRef>
-          <a:fontRef idx="minor">
-            <a:schemeClr val="lt1"/>
-          </a:fontRef>
-        </p:style>
-        <p:txBody>
-          <a:bodyPr rtlCol="0" anchor="ctr"/>
-          <a:lstStyle/>
-          <a:p>
-            <a:pPr algn="ctr"/>
-          </a:p>
-        </p:txBody>
-      </p:sp>
-      <p:sp>
-        <p:nvSpPr>
-          <p:cNvPr id="14" name="Rounded Rectangle 13"/>
-          <p:cNvSpPr/>
-          <p:nvPr/>
-        </p:nvSpPr>
-        <p:spPr>
-          <a:xfrm>
-            <a:off x="594360" y="3575304"/>
-            <a:ext cx="438912" cy="438912"/>
-          </a:xfrm>
-          <a:prstGeom prst="roundRect">
-            <a:avLst>
-              <a:gd name="adj" fmla="val 12000"/>
-            </a:avLst>
-          </a:prstGeom>
-          <a:solidFill>
-            <a:srgbClr val="095292"/>
-          </a:solidFill>
-          <a:ln>
-            <a:noFill/>
-          </a:ln>
-        </p:spPr>
-        <p:style>
-          <a:lnRef idx="1">
-            <a:schemeClr val="accent1"/>
-          </a:lnRef>
-          <a:fillRef idx="3">
-            <a:schemeClr val="accent1"/>
-          </a:fillRef>
-          <a:effectRef idx="2">
-            <a:schemeClr val="accent1"/>
-          </a:effectRef>
-          <a:fontRef idx="minor">
-            <a:schemeClr val="lt1"/>
-          </a:fontRef>
-        </p:style>
-        <p:txBody>
-          <a:bodyPr rtlCol="0" anchor="ctr"/>
-          <a:lstStyle/>
-          <a:p>
-            <a:pPr algn="ctr"/>
-          </a:p>
-        </p:txBody>
-      </p:sp>
-      <p:sp>
-        <p:nvSpPr>
-          <p:cNvPr id="15" name="TextBox 14"/>
-          <p:cNvSpPr txBox="1"/>
-          <p:nvPr/>
-        </p:nvSpPr>
-        <p:spPr>
-          <a:xfrm>
-            <a:off x="594360" y="3575304"/>
-            <a:ext cx="438912" cy="438912"/>
-          </a:xfrm>
-          <a:prstGeom prst="rect">
-            <a:avLst/>
-          </a:prstGeom>
-          <a:noFill/>
-        </p:spPr>
-        <p:txBody>
-          <a:bodyPr wrap="square" anchor="ctr"/>
-          <a:lstStyle/>
-          <a:p>
-            <a:pPr algn="ctr"/>
-            <a:r>
-              <a:rPr sz="1600" b="1" i="0">
-                <a:solidFill>
-                  <a:srgbClr val="FFFFFF"/>
-                </a:solidFill>
-                <a:latin typeface="Calibri"/>
-              </a:rPr>
-              <a:t>3</a:t>
-            </a:r>
-          </a:p>
-        </p:txBody>
-      </p:sp>
-      <p:sp>
-        <p:nvSpPr>
-          <p:cNvPr id="16" name="TextBox 15"/>
-          <p:cNvSpPr txBox="1"/>
-          <p:nvPr/>
-        </p:nvSpPr>
-        <p:spPr>
-          <a:xfrm>
-            <a:off x="1188720" y="3410712"/>
-            <a:ext cx="10271455" cy="786384"/>
-          </a:xfrm>
-          <a:prstGeom prst="rect">
-            <a:avLst/>
-          </a:prstGeom>
-          <a:noFill/>
-        </p:spPr>
-        <p:txBody>
-          <a:bodyPr wrap="square" anchor="ctr"/>
-          <a:lstStyle/>
-          <a:p>
-            <a:r>
-              <a:rPr sz="1500" b="1" i="0">
-                <a:solidFill>
-                  <a:srgbClr val="095292"/>
-                </a:solidFill>
-                <a:latin typeface="Calibri"/>
-              </a:rPr>
-              <a:t>En draw.io dibuje el recorrido lineal de VetCare: cinco cajas en fila, y sobre cada flecha escriba el artefacto que se entrega para poder pasar a la siguiente fase.</a:t>
-            </a:r>
-          </a:p>
-        </p:txBody>
-      </p:sp>
-      <p:sp>
-        <p:nvSpPr>
-          <p:cNvPr id="17" name="Rounded Rectangle 16"/>
-          <p:cNvSpPr/>
-          <p:nvPr/>
-        </p:nvSpPr>
-        <p:spPr>
-          <a:xfrm>
-            <a:off x="457200" y="4361688"/>
-            <a:ext cx="11277295" cy="950976"/>
-          </a:xfrm>
-          <a:prstGeom prst="roundRect">
-            <a:avLst>
-              <a:gd name="adj" fmla="val 12000"/>
-            </a:avLst>
-          </a:prstGeom>
-          <a:solidFill>
-            <a:srgbClr val="E8F4FA"/>
-          </a:solidFill>
-          <a:ln>
-            <a:noFill/>
-          </a:ln>
-        </p:spPr>
-        <p:style>
-          <a:lnRef idx="1">
-            <a:schemeClr val="accent1"/>
-          </a:lnRef>
-          <a:fillRef idx="3">
-            <a:schemeClr val="accent1"/>
-          </a:fillRef>
-          <a:effectRef idx="2">
-            <a:schemeClr val="accent1"/>
-          </a:effectRef>
-          <a:fontRef idx="minor">
-            <a:schemeClr val="lt1"/>
-          </a:fontRef>
-        </p:style>
-        <p:txBody>
-          <a:bodyPr rtlCol="0" anchor="ctr"/>
-          <a:lstStyle/>
-          <a:p>
-            <a:pPr algn="ctr"/>
-          </a:p>
-        </p:txBody>
-      </p:sp>
-      <p:sp>
-        <p:nvSpPr>
-          <p:cNvPr id="18" name="Rounded Rectangle 17"/>
-          <p:cNvSpPr/>
-          <p:nvPr/>
-        </p:nvSpPr>
-        <p:spPr>
-          <a:xfrm>
-            <a:off x="594360" y="4617720"/>
-            <a:ext cx="438912" cy="438912"/>
-          </a:xfrm>
-          <a:prstGeom prst="roundRect">
-            <a:avLst>
-              <a:gd name="adj" fmla="val 12000"/>
-            </a:avLst>
-          </a:prstGeom>
-          <a:solidFill>
-            <a:srgbClr val="095292"/>
-          </a:solidFill>
-          <a:ln>
-            <a:noFill/>
-          </a:ln>
-        </p:spPr>
-        <p:style>
-          <a:lnRef idx="1">
-            <a:schemeClr val="accent1"/>
-          </a:lnRef>
-          <a:fillRef idx="3">
-            <a:schemeClr val="accent1"/>
-          </a:fillRef>
-          <a:effectRef idx="2">
-            <a:schemeClr val="accent1"/>
-          </a:effectRef>
-          <a:fontRef idx="minor">
-            <a:schemeClr val="lt1"/>
-          </a:fontRef>
-        </p:style>
-        <p:txBody>
-          <a:bodyPr rtlCol="0" anchor="ctr"/>
-          <a:lstStyle/>
-          <a:p>
-            <a:pPr algn="ctr"/>
-          </a:p>
-        </p:txBody>
-      </p:sp>
-      <p:sp>
-        <p:nvSpPr>
-          <p:cNvPr id="19" name="TextBox 18"/>
-          <p:cNvSpPr txBox="1"/>
-          <p:nvPr/>
-        </p:nvSpPr>
-        <p:spPr>
-          <a:xfrm>
-            <a:off x="594360" y="4617720"/>
-            <a:ext cx="438912" cy="438912"/>
-          </a:xfrm>
-          <a:prstGeom prst="rect">
-            <a:avLst/>
-          </a:prstGeom>
-          <a:noFill/>
-        </p:spPr>
-        <p:txBody>
-          <a:bodyPr wrap="square" anchor="ctr"/>
-          <a:lstStyle/>
-          <a:p>
-            <a:pPr algn="ctr"/>
-            <a:r>
-              <a:rPr sz="1600" b="1" i="0">
-                <a:solidFill>
-                  <a:srgbClr val="FFFFFF"/>
-                </a:solidFill>
-                <a:latin typeface="Calibri"/>
-              </a:rPr>
-              <a:t>4</a:t>
-            </a:r>
-          </a:p>
-        </p:txBody>
-      </p:sp>
-      <p:sp>
-        <p:nvSpPr>
-          <p:cNvPr id="20" name="TextBox 19"/>
-          <p:cNvSpPr txBox="1"/>
-          <p:nvPr/>
-        </p:nvSpPr>
-        <p:spPr>
-          <a:xfrm>
-            <a:off x="1188720" y="4453128"/>
-            <a:ext cx="10271455" cy="786384"/>
-          </a:xfrm>
-          <a:prstGeom prst="rect">
-            <a:avLst/>
-          </a:prstGeom>
-          <a:noFill/>
-        </p:spPr>
-        <p:txBody>
-          <a:bodyPr wrap="square" anchor="ctr"/>
-          <a:lstStyle/>
-          <a:p>
-            <a:r>
-              <a:rPr sz="1400" b="1" i="0">
-                <a:solidFill>
-                  <a:srgbClr val="095292"/>
-                </a:solidFill>
-                <a:latin typeface="Calibri"/>
-              </a:rPr>
-              <a:t>Duplique la pagina en draw.io y dibuje el recorrido en tres vueltas: las mismas cinco cajas, pero con las vueltas rotuladas Incremento 1 (ficha del paciente), Incremento 2 (historia clinica y busqueda) e Incremento 3 (reportes y metricas), y una flecha de retroalimentacion desde la clinica hacia requisitos.</a:t>
-            </a:r>
-          </a:p>
-        </p:txBody>
-      </p:sp>
-      <p:sp>
-        <p:nvSpPr>
-          <p:cNvPr id="21" name="Rounded Rectangle 20"/>
-          <p:cNvSpPr/>
-          <p:nvPr/>
-        </p:nvSpPr>
-        <p:spPr>
-          <a:xfrm>
-            <a:off x="457200" y="5404104"/>
-            <a:ext cx="11277295" cy="950976"/>
-          </a:xfrm>
-          <a:prstGeom prst="roundRect">
-            <a:avLst>
-              <a:gd name="adj" fmla="val 12000"/>
-            </a:avLst>
-          </a:prstGeom>
-          <a:solidFill>
-            <a:srgbClr val="F2F2F2"/>
-          </a:solidFill>
-          <a:ln>
-            <a:noFill/>
-          </a:ln>
-        </p:spPr>
-        <p:style>
-          <a:lnRef idx="1">
-            <a:schemeClr val="accent1"/>
-          </a:lnRef>
-          <a:fillRef idx="3">
-            <a:schemeClr val="accent1"/>
-          </a:fillRef>
-          <a:effectRef idx="2">
-            <a:schemeClr val="accent1"/>
-          </a:effectRef>
-          <a:fontRef idx="minor">
-            <a:schemeClr val="lt1"/>
-          </a:fontRef>
-        </p:style>
-        <p:txBody>
-          <a:bodyPr rtlCol="0" anchor="ctr"/>
-          <a:lstStyle/>
-          <a:p>
-            <a:pPr algn="ctr"/>
-          </a:p>
-        </p:txBody>
-      </p:sp>
-      <p:sp>
-        <p:nvSpPr>
-          <p:cNvPr id="22" name="Rounded Rectangle 21"/>
-          <p:cNvSpPr/>
-          <p:nvPr/>
-        </p:nvSpPr>
-        <p:spPr>
-          <a:xfrm>
-            <a:off x="594360" y="5660136"/>
-            <a:ext cx="438912" cy="438912"/>
-          </a:xfrm>
-          <a:prstGeom prst="roundRect">
-            <a:avLst>
-              <a:gd name="adj" fmla="val 12000"/>
-            </a:avLst>
-          </a:prstGeom>
-          <a:solidFill>
-            <a:srgbClr val="095292"/>
-          </a:solidFill>
-          <a:ln>
-            <a:noFill/>
-          </a:ln>
-        </p:spPr>
-        <p:style>
-          <a:lnRef idx="1">
-            <a:schemeClr val="accent1"/>
-          </a:lnRef>
-          <a:fillRef idx="3">
-            <a:schemeClr val="accent1"/>
-          </a:fillRef>
-          <a:effectRef idx="2">
-            <a:schemeClr val="accent1"/>
-          </a:effectRef>
-          <a:fontRef idx="minor">
-            <a:schemeClr val="lt1"/>
-          </a:fontRef>
-        </p:style>
-        <p:txBody>
-          <a:bodyPr rtlCol="0" anchor="ctr"/>
-          <a:lstStyle/>
-          <a:p>
-            <a:pPr algn="ctr"/>
-          </a:p>
-        </p:txBody>
-      </p:sp>
-      <p:sp>
-        <p:nvSpPr>
-          <p:cNvPr id="23" name="TextBox 22"/>
-          <p:cNvSpPr txBox="1"/>
-          <p:nvPr/>
-        </p:nvSpPr>
-        <p:spPr>
-          <a:xfrm>
-            <a:off x="594360" y="5660136"/>
-            <a:ext cx="438912" cy="438912"/>
-          </a:xfrm>
-          <a:prstGeom prst="rect">
-            <a:avLst/>
-          </a:prstGeom>
-          <a:noFill/>
-        </p:spPr>
-        <p:txBody>
-          <a:bodyPr wrap="square" anchor="ctr"/>
-          <a:lstStyle/>
-          <a:p>
-            <a:pPr algn="ctr"/>
-            <a:r>
-              <a:rPr sz="1600" b="1" i="0">
-                <a:solidFill>
-                  <a:srgbClr val="FFFFFF"/>
-                </a:solidFill>
-                <a:latin typeface="Calibri"/>
-              </a:rPr>
-              <a:t>5</a:t>
-            </a:r>
-          </a:p>
-        </p:txBody>
-      </p:sp>
-      <p:sp>
-        <p:nvSpPr>
-          <p:cNvPr id="24" name="TextBox 23"/>
-          <p:cNvSpPr txBox="1"/>
-          <p:nvPr/>
-        </p:nvSpPr>
-        <p:spPr>
-          <a:xfrm>
-            <a:off x="1188720" y="5495544"/>
-            <a:ext cx="10271455" cy="786384"/>
-          </a:xfrm>
-          <a:prstGeom prst="rect">
-            <a:avLst/>
-          </a:prstGeom>
-          <a:noFill/>
-        </p:spPr>
-        <p:txBody>
-          <a:bodyPr wrap="square" anchor="ctr"/>
-          <a:lstStyle/>
-          <a:p>
-            <a:r>
-              <a:rPr sz="1400" b="1" i="0">
-                <a:solidFill>
-                  <a:srgbClr val="095292"/>
-                </a:solidFill>
-                <a:latin typeface="Calibri"/>
-              </a:rPr>
-              <a:t>Escriba al final del documento un parrafo de tres renglones titulado 'Producto vs proyecto en VetCare' que responda: cuando termina el proyecto, cuando terminaria el producto y un ejemplo concreto de una solicitud de mantenimiento; exporte a PDF y suba el archivo a la plataforma del curso.</a:t>
-            </a:r>
-          </a:p>
-        </p:txBody>
-      </p:sp>
-      <p:sp>
-        <p:nvSpPr>
-          <p:cNvPr id="25" name="TextBox 24"/>
+          <a:bodyPr wrap="square">
+            <a:spAutoFit/>
+          </a:bodyPr>
+          <a:lstStyle/>
+          <a:p>
+            <a:pPr>
+              <a:spcAft>
+                <a:spcPts val="800"/>
+              </a:spcAft>
+            </a:pPr>
+            <a:r>
+              <a:rPr sz="2000" b="0" i="0">
+                <a:solidFill>
+                  <a:srgbClr val="333333"/>
+                </a:solidFill>
+                <a:latin typeface="Calibri"/>
+              </a:rPr>
+              <a:t>–   </a:t>
+            </a:r>
+            <a:r>
+              <a:rPr sz="2000" b="1" i="0">
+                <a:solidFill>
+                  <a:srgbClr val="333333"/>
+                </a:solidFill>
+                <a:latin typeface="Calibri"/>
+              </a:rPr>
+              <a:t>Por que importa al PI:</a:t>
+            </a:r>
+            <a:r>
+              <a:rPr sz="2000" b="0" i="0">
+                <a:solidFill>
+                  <a:srgbClr val="333333"/>
+                </a:solidFill>
+                <a:latin typeface="Calibri"/>
+              </a:rPr>
+              <a:t> VetCare no se dibuja de una sola sentada, y hoy definimos el mapa de fases que vamos a recorrer todo el semestre y en cual de ellas se califica cada entrega.</a:t>
+            </a:r>
+          </a:p>
+          <a:p>
+            <a:pPr>
+              <a:spcAft>
+                <a:spcPts val="800"/>
+              </a:spcAft>
+            </a:pPr>
+            <a:r>
+              <a:rPr sz="2000" b="0" i="0">
+                <a:solidFill>
+                  <a:srgbClr val="333333"/>
+                </a:solidFill>
+                <a:latin typeface="Calibri"/>
+              </a:rPr>
+              <a:t>–   En la clase anterior quedo claro el dolor de Huellitas (fichas que se extravian, busquedas eternas y cero metricas); hoy ese dolor se ubica dentro de un ciclo de vida y se le pone nombre a lo que sale de cada etapa.</a:t>
+            </a:r>
+          </a:p>
+          <a:p>
+            <a:pPr>
+              <a:spcAft>
+                <a:spcPts val="800"/>
+              </a:spcAft>
+            </a:pPr>
+            <a:r>
+              <a:rPr sz="2000" b="0" i="0">
+                <a:solidFill>
+                  <a:srgbClr val="333333"/>
+                </a:solidFill>
+                <a:latin typeface="Calibri"/>
+              </a:rPr>
+              <a:t>–   Los tres casos de matricula se entienden mejor con el ciclo en la mano: aqui vivimos en requisitos y diseño, Programacion II vive en construccion y pruebas, y quien solo cursa Seminario cierra con documento de diseño y prototipo navegable.</a:t>
+            </a:r>
+          </a:p>
+        </p:txBody>
+      </p:sp>
+      <p:sp>
+        <p:nvSpPr>
+          <p:cNvPr id="6" name="TextBox 5"/>
           <p:cNvSpPr txBox="1"/>
           <p:nvPr/>
         </p:nvSpPr>
@@ -7005,154 +6783,21 @@
                 </a:solidFill>
                 <a:latin typeface="Calibri"/>
               </a:rPr>
-              <a:t>Antes de entregar — autochequeo</a:t>
-            </a:r>
-          </a:p>
-        </p:txBody>
-      </p:sp>
-      <p:sp>
-        <p:nvSpPr>
-          <p:cNvPr id="5" name="Rounded Rectangle 4"/>
-          <p:cNvSpPr/>
-          <p:nvPr/>
-        </p:nvSpPr>
-        <p:spPr>
-          <a:xfrm>
-            <a:off x="457200" y="1261872"/>
-            <a:ext cx="11277295" cy="566928"/>
-          </a:xfrm>
-          <a:prstGeom prst="roundRect">
-            <a:avLst>
-              <a:gd name="adj" fmla="val 12000"/>
-            </a:avLst>
-          </a:prstGeom>
-          <a:solidFill>
-            <a:srgbClr val="F2F2F2"/>
-          </a:solidFill>
-          <a:ln>
-            <a:noFill/>
-          </a:ln>
-        </p:spPr>
-        <p:style>
-          <a:lnRef idx="1">
-            <a:schemeClr val="accent1"/>
-          </a:lnRef>
-          <a:fillRef idx="3">
-            <a:schemeClr val="accent1"/>
-          </a:fillRef>
-          <a:effectRef idx="2">
-            <a:schemeClr val="accent1"/>
-          </a:effectRef>
-          <a:fontRef idx="minor">
-            <a:schemeClr val="lt1"/>
-          </a:fontRef>
-        </p:style>
-        <p:txBody>
-          <a:bodyPr rtlCol="0" anchor="ctr"/>
-          <a:lstStyle/>
-          <a:p>
-            <a:pPr algn="ctr"/>
-          </a:p>
-        </p:txBody>
-      </p:sp>
-      <p:sp>
-        <p:nvSpPr>
-          <p:cNvPr id="6" name="Rectangle 5"/>
-          <p:cNvSpPr/>
-          <p:nvPr/>
-        </p:nvSpPr>
-        <p:spPr>
-          <a:xfrm>
-            <a:off x="640080" y="1408175"/>
-            <a:ext cx="274320" cy="274320"/>
-          </a:xfrm>
-          <a:prstGeom prst="rect">
-            <a:avLst/>
-          </a:prstGeom>
-          <a:solidFill>
-            <a:srgbClr val="FFFFFF"/>
-          </a:solidFill>
-          <a:ln>
-            <a:solidFill>
-              <a:srgbClr val="333333"/>
-            </a:solidFill>
-          </a:ln>
-        </p:spPr>
-        <p:style>
-          <a:lnRef idx="1">
-            <a:schemeClr val="accent1"/>
-          </a:lnRef>
-          <a:fillRef idx="3">
-            <a:schemeClr val="accent1"/>
-          </a:fillRef>
-          <a:effectRef idx="2">
-            <a:schemeClr val="accent1"/>
-          </a:effectRef>
-          <a:fontRef idx="minor">
-            <a:schemeClr val="lt1"/>
-          </a:fontRef>
-        </p:style>
-        <p:txBody>
-          <a:bodyPr rtlCol="0" anchor="ctr"/>
-          <a:lstStyle/>
-          <a:p>
-            <a:pPr algn="ctr"/>
-          </a:p>
-        </p:txBody>
-      </p:sp>
-      <p:sp>
-        <p:nvSpPr>
-          <p:cNvPr id="7" name="Rectangle 6"/>
-          <p:cNvSpPr/>
-          <p:nvPr/>
-        </p:nvSpPr>
-        <p:spPr>
-          <a:xfrm>
-            <a:off x="640080" y="1408175"/>
-            <a:ext cx="73152" cy="274320"/>
-          </a:xfrm>
-          <a:prstGeom prst="rect">
-            <a:avLst/>
-          </a:prstGeom>
-          <a:solidFill>
-            <a:srgbClr val="269CCB"/>
-          </a:solidFill>
-          <a:ln>
-            <a:noFill/>
-          </a:ln>
-        </p:spPr>
-        <p:style>
-          <a:lnRef idx="1">
-            <a:schemeClr val="accent1"/>
-          </a:lnRef>
-          <a:fillRef idx="3">
-            <a:schemeClr val="accent1"/>
-          </a:fillRef>
-          <a:effectRef idx="2">
-            <a:schemeClr val="accent1"/>
-          </a:effectRef>
-          <a:fontRef idx="minor">
-            <a:schemeClr val="lt1"/>
-          </a:fontRef>
-        </p:style>
-        <p:txBody>
-          <a:bodyPr rtlCol="0" anchor="ctr"/>
-          <a:lstStyle/>
-          <a:p>
-            <a:pPr algn="ctr"/>
-          </a:p>
-        </p:txBody>
-      </p:sp>
-      <p:sp>
-        <p:nvSpPr>
-          <p:cNvPr id="8" name="TextBox 7"/>
+              <a:t>Taller PI — punto de partida</a:t>
+            </a:r>
+          </a:p>
+        </p:txBody>
+      </p:sp>
+      <p:sp>
+        <p:nvSpPr>
+          <p:cNvPr id="5" name="TextBox 4"/>
           <p:cNvSpPr txBox="1"/>
           <p:nvPr/>
         </p:nvSpPr>
         <p:spPr>
           <a:xfrm>
-            <a:off x="1097280" y="1353312"/>
-            <a:ext cx="10362895" cy="402336"/>
+            <a:off x="457200" y="1170432"/>
+            <a:ext cx="11277295" cy="5230368"/>
           </a:xfrm>
           <a:prstGeom prst="rect">
             <a:avLst/>
@@ -7160,354 +6805,63 @@
           <a:noFill/>
         </p:spPr>
         <p:txBody>
-          <a:bodyPr wrap="square" anchor="ctr"/>
-          <a:lstStyle/>
-          <a:p>
-            <a:r>
-              <a:rPr sz="1500" b="0" i="0">
+          <a:bodyPr wrap="square">
+            <a:spAutoFit/>
+          </a:bodyPr>
+          <a:lstStyle/>
+          <a:p>
+            <a:pPr>
+              <a:spcAft>
+                <a:spcPts val="800"/>
+              </a:spcAft>
+            </a:pPr>
+            <a:r>
+              <a:rPr sz="2000" b="0" i="0">
                 <a:solidFill>
                   <a:srgbClr val="333333"/>
                 </a:solidFill>
                 <a:latin typeface="Calibri"/>
               </a:rPr>
-              <a:t>Si borro la palabra VetCare de su tabla, esa tabla serviria igual para un cajero automatico o para una tienda de ropa? Si la respuesta es si, todavia no aterrizo nada.</a:t>
-            </a:r>
-          </a:p>
-        </p:txBody>
-      </p:sp>
-      <p:sp>
-        <p:nvSpPr>
-          <p:cNvPr id="9" name="Rounded Rectangle 8"/>
-          <p:cNvSpPr/>
-          <p:nvPr/>
-        </p:nvSpPr>
-        <p:spPr>
-          <a:xfrm>
-            <a:off x="457200" y="1938528"/>
-            <a:ext cx="11277295" cy="566928"/>
-          </a:xfrm>
-          <a:prstGeom prst="roundRect">
-            <a:avLst>
-              <a:gd name="adj" fmla="val 12000"/>
-            </a:avLst>
-          </a:prstGeom>
-          <a:solidFill>
-            <a:srgbClr val="F2F2F2"/>
-          </a:solidFill>
-          <a:ln>
-            <a:noFill/>
-          </a:ln>
-        </p:spPr>
-        <p:style>
-          <a:lnRef idx="1">
-            <a:schemeClr val="accent1"/>
-          </a:lnRef>
-          <a:fillRef idx="3">
-            <a:schemeClr val="accent1"/>
-          </a:fillRef>
-          <a:effectRef idx="2">
-            <a:schemeClr val="accent1"/>
-          </a:effectRef>
-          <a:fontRef idx="minor">
-            <a:schemeClr val="lt1"/>
-          </a:fontRef>
-        </p:style>
-        <p:txBody>
-          <a:bodyPr rtlCol="0" anchor="ctr"/>
-          <a:lstStyle/>
-          <a:p>
-            <a:pPr algn="ctr"/>
-          </a:p>
-        </p:txBody>
-      </p:sp>
-      <p:sp>
-        <p:nvSpPr>
-          <p:cNvPr id="10" name="Rectangle 9"/>
-          <p:cNvSpPr/>
-          <p:nvPr/>
-        </p:nvSpPr>
-        <p:spPr>
-          <a:xfrm>
-            <a:off x="640080" y="2084832"/>
-            <a:ext cx="274320" cy="274320"/>
-          </a:xfrm>
-          <a:prstGeom prst="rect">
-            <a:avLst/>
-          </a:prstGeom>
-          <a:solidFill>
-            <a:srgbClr val="FFFFFF"/>
-          </a:solidFill>
-          <a:ln>
-            <a:solidFill>
-              <a:srgbClr val="333333"/>
-            </a:solidFill>
-          </a:ln>
-        </p:spPr>
-        <p:style>
-          <a:lnRef idx="1">
-            <a:schemeClr val="accent1"/>
-          </a:lnRef>
-          <a:fillRef idx="3">
-            <a:schemeClr val="accent1"/>
-          </a:fillRef>
-          <a:effectRef idx="2">
-            <a:schemeClr val="accent1"/>
-          </a:effectRef>
-          <a:fontRef idx="minor">
-            <a:schemeClr val="lt1"/>
-          </a:fontRef>
-        </p:style>
-        <p:txBody>
-          <a:bodyPr rtlCol="0" anchor="ctr"/>
-          <a:lstStyle/>
-          <a:p>
-            <a:pPr algn="ctr"/>
-          </a:p>
-        </p:txBody>
-      </p:sp>
-      <p:sp>
-        <p:nvSpPr>
-          <p:cNvPr id="11" name="Rectangle 10"/>
-          <p:cNvSpPr/>
-          <p:nvPr/>
-        </p:nvSpPr>
-        <p:spPr>
-          <a:xfrm>
-            <a:off x="640080" y="2084832"/>
-            <a:ext cx="73152" cy="274320"/>
-          </a:xfrm>
-          <a:prstGeom prst="rect">
-            <a:avLst/>
-          </a:prstGeom>
-          <a:solidFill>
-            <a:srgbClr val="269CCB"/>
-          </a:solidFill>
-          <a:ln>
-            <a:noFill/>
-          </a:ln>
-        </p:spPr>
-        <p:style>
-          <a:lnRef idx="1">
-            <a:schemeClr val="accent1"/>
-          </a:lnRef>
-          <a:fillRef idx="3">
-            <a:schemeClr val="accent1"/>
-          </a:fillRef>
-          <a:effectRef idx="2">
-            <a:schemeClr val="accent1"/>
-          </a:effectRef>
-          <a:fontRef idx="minor">
-            <a:schemeClr val="lt1"/>
-          </a:fontRef>
-        </p:style>
-        <p:txBody>
-          <a:bodyPr rtlCol="0" anchor="ctr"/>
-          <a:lstStyle/>
-          <a:p>
-            <a:pPr algn="ctr"/>
-          </a:p>
-        </p:txBody>
-      </p:sp>
-      <p:sp>
-        <p:nvSpPr>
-          <p:cNvPr id="12" name="TextBox 11"/>
-          <p:cNvSpPr txBox="1"/>
-          <p:nvPr/>
-        </p:nvSpPr>
-        <p:spPr>
-          <a:xfrm>
-            <a:off x="1097280" y="2029968"/>
-            <a:ext cx="10362895" cy="402336"/>
-          </a:xfrm>
-          <a:prstGeom prst="rect">
-            <a:avLst/>
-          </a:prstGeom>
-          <a:noFill/>
-        </p:spPr>
-        <p:txBody>
-          <a:bodyPr wrap="square" anchor="ctr"/>
-          <a:lstStyle/>
-          <a:p>
-            <a:r>
-              <a:rPr sz="1500" b="0" i="0">
+              <a:t>–   Huellitas guarda hoy 5.000 fichas en carpetas de carton dentro de un archivador metalico, y las citas del dia se anotan a mano en una libreta que se lleva la auxiliar.</a:t>
+            </a:r>
+          </a:p>
+          <a:p>
+            <a:pPr>
+              <a:spcAft>
+                <a:spcPts val="800"/>
+              </a:spcAft>
+            </a:pPr>
+            <a:r>
+              <a:rPr sz="2000" b="0" i="0">
                 <a:solidFill>
                   <a:srgbClr val="333333"/>
                 </a:solidFill>
                 <a:latin typeface="Calibri"/>
               </a:rPr>
-              <a:t>En su diagrama de vueltas, cada vuelta termina en algo que la veterinaria podria mirar y opinar, o termina en trabajo interno que solo entiende el equipo?</a:t>
-            </a:r>
-          </a:p>
-        </p:txBody>
-      </p:sp>
-      <p:sp>
-        <p:nvSpPr>
-          <p:cNvPr id="13" name="Rounded Rectangle 12"/>
-          <p:cNvSpPr/>
-          <p:nvPr/>
-        </p:nvSpPr>
-        <p:spPr>
-          <a:xfrm>
-            <a:off x="457200" y="2615184"/>
-            <a:ext cx="11277295" cy="566928"/>
-          </a:xfrm>
-          <a:prstGeom prst="roundRect">
-            <a:avLst>
-              <a:gd name="adj" fmla="val 12000"/>
-            </a:avLst>
-          </a:prstGeom>
-          <a:solidFill>
-            <a:srgbClr val="F2F2F2"/>
-          </a:solidFill>
-          <a:ln>
-            <a:noFill/>
-          </a:ln>
-        </p:spPr>
-        <p:style>
-          <a:lnRef idx="1">
-            <a:schemeClr val="accent1"/>
-          </a:lnRef>
-          <a:fillRef idx="3">
-            <a:schemeClr val="accent1"/>
-          </a:fillRef>
-          <a:effectRef idx="2">
-            <a:schemeClr val="accent1"/>
-          </a:effectRef>
-          <a:fontRef idx="minor">
-            <a:schemeClr val="lt1"/>
-          </a:fontRef>
-        </p:style>
-        <p:txBody>
-          <a:bodyPr rtlCol="0" anchor="ctr"/>
-          <a:lstStyle/>
-          <a:p>
-            <a:pPr algn="ctr"/>
-          </a:p>
-        </p:txBody>
-      </p:sp>
-      <p:sp>
-        <p:nvSpPr>
-          <p:cNvPr id="14" name="Rectangle 13"/>
-          <p:cNvSpPr/>
-          <p:nvPr/>
-        </p:nvSpPr>
-        <p:spPr>
-          <a:xfrm>
-            <a:off x="640080" y="2761488"/>
-            <a:ext cx="274320" cy="274320"/>
-          </a:xfrm>
-          <a:prstGeom prst="rect">
-            <a:avLst/>
-          </a:prstGeom>
-          <a:solidFill>
-            <a:srgbClr val="FFFFFF"/>
-          </a:solidFill>
-          <a:ln>
-            <a:solidFill>
-              <a:srgbClr val="333333"/>
-            </a:solidFill>
-          </a:ln>
-        </p:spPr>
-        <p:style>
-          <a:lnRef idx="1">
-            <a:schemeClr val="accent1"/>
-          </a:lnRef>
-          <a:fillRef idx="3">
-            <a:schemeClr val="accent1"/>
-          </a:fillRef>
-          <a:effectRef idx="2">
-            <a:schemeClr val="accent1"/>
-          </a:effectRef>
-          <a:fontRef idx="minor">
-            <a:schemeClr val="lt1"/>
-          </a:fontRef>
-        </p:style>
-        <p:txBody>
-          <a:bodyPr rtlCol="0" anchor="ctr"/>
-          <a:lstStyle/>
-          <a:p>
-            <a:pPr algn="ctr"/>
-          </a:p>
-        </p:txBody>
-      </p:sp>
-      <p:sp>
-        <p:nvSpPr>
-          <p:cNvPr id="15" name="Rectangle 14"/>
-          <p:cNvSpPr/>
-          <p:nvPr/>
-        </p:nvSpPr>
-        <p:spPr>
-          <a:xfrm>
-            <a:off x="640080" y="2761488"/>
-            <a:ext cx="73152" cy="274320"/>
-          </a:xfrm>
-          <a:prstGeom prst="rect">
-            <a:avLst/>
-          </a:prstGeom>
-          <a:solidFill>
-            <a:srgbClr val="269CCB"/>
-          </a:solidFill>
-          <a:ln>
-            <a:noFill/>
-          </a:ln>
-        </p:spPr>
-        <p:style>
-          <a:lnRef idx="1">
-            <a:schemeClr val="accent1"/>
-          </a:lnRef>
-          <a:fillRef idx="3">
-            <a:schemeClr val="accent1"/>
-          </a:fillRef>
-          <a:effectRef idx="2">
-            <a:schemeClr val="accent1"/>
-          </a:effectRef>
-          <a:fontRef idx="minor">
-            <a:schemeClr val="lt1"/>
-          </a:fontRef>
-        </p:style>
-        <p:txBody>
-          <a:bodyPr rtlCol="0" anchor="ctr"/>
-          <a:lstStyle/>
-          <a:p>
-            <a:pPr algn="ctr"/>
-          </a:p>
-        </p:txBody>
-      </p:sp>
-      <p:sp>
-        <p:nvSpPr>
-          <p:cNvPr id="16" name="TextBox 15"/>
-          <p:cNvSpPr txBox="1"/>
-          <p:nvPr/>
-        </p:nvSpPr>
-        <p:spPr>
-          <a:xfrm>
-            <a:off x="1097280" y="2706624"/>
-            <a:ext cx="10362895" cy="402336"/>
-          </a:xfrm>
-          <a:prstGeom prst="rect">
-            <a:avLst/>
-          </a:prstGeom>
-          <a:noFill/>
-        </p:spPr>
-        <p:txBody>
-          <a:bodyPr wrap="square" anchor="ctr"/>
-          <a:lstStyle/>
-          <a:p>
-            <a:r>
-              <a:rPr sz="1500" b="0" i="0">
+              <a:t>–   El equipo tiene una lista cruda de necesidades salida de la entrevista, pero nadie ha definido que documento sale de cada etapa ni quien lo firma como aprobado.</a:t>
+            </a:r>
+          </a:p>
+          <a:p>
+            <a:pPr>
+              <a:spcAft>
+                <a:spcPts val="800"/>
+              </a:spcAft>
+            </a:pPr>
+            <a:r>
+              <a:rPr sz="2000" b="0" i="0">
                 <a:solidFill>
                   <a:srgbClr val="333333"/>
                 </a:solidFill>
                 <a:latin typeface="Calibri"/>
               </a:rPr>
-              <a:t>Que documento exacto tendria que mostrar hoy, en pantalla, para demostrarle a la clinica que la fase de requisitos ya quedo cerrada?</a:t>
-            </a:r>
-          </a:p>
-        </p:txBody>
-      </p:sp>
-      <p:sp>
-        <p:nvSpPr>
-          <p:cNvPr id="17" name="TextBox 16"/>
+              <a:t>–   No existe ni una linea de codigo ni un diagrama formal: se parte de cero y el unico insumo real es lo que dijo la clinica.</a:t>
+            </a:r>
+          </a:p>
+        </p:txBody>
+      </p:sp>
+      <p:sp>
+        <p:nvSpPr>
+          <p:cNvPr id="6" name="TextBox 5"/>
           <p:cNvSpPr txBox="1"/>
           <p:nvPr/>
         </p:nvSpPr>
@@ -7681,21 +7035,111 @@
                 </a:solidFill>
                 <a:latin typeface="Calibri"/>
               </a:rPr>
-              <a:t>Criterios de exito / entregable</a:t>
-            </a:r>
-          </a:p>
-        </p:txBody>
-      </p:sp>
-      <p:sp>
-        <p:nvSpPr>
-          <p:cNvPr id="5" name="TextBox 4"/>
+              <a:t>Taller PI — pasos guiados</a:t>
+            </a:r>
+          </a:p>
+        </p:txBody>
+      </p:sp>
+      <p:sp>
+        <p:nvSpPr>
+          <p:cNvPr id="5" name="Rounded Rectangle 4"/>
+          <p:cNvSpPr/>
+          <p:nvPr/>
+        </p:nvSpPr>
+        <p:spPr>
+          <a:xfrm>
+            <a:off x="457200" y="1234440"/>
+            <a:ext cx="11277295" cy="950976"/>
+          </a:xfrm>
+          <a:prstGeom prst="roundRect">
+            <a:avLst>
+              <a:gd name="adj" fmla="val 12000"/>
+            </a:avLst>
+          </a:prstGeom>
+          <a:solidFill>
+            <a:srgbClr val="F2F2F2"/>
+          </a:solidFill>
+          <a:ln>
+            <a:noFill/>
+          </a:ln>
+        </p:spPr>
+        <p:style>
+          <a:lnRef idx="1">
+            <a:schemeClr val="accent1"/>
+          </a:lnRef>
+          <a:fillRef idx="3">
+            <a:schemeClr val="accent1"/>
+          </a:fillRef>
+          <a:effectRef idx="2">
+            <a:schemeClr val="accent1"/>
+          </a:effectRef>
+          <a:fontRef idx="minor">
+            <a:schemeClr val="lt1"/>
+          </a:fontRef>
+        </p:style>
+        <p:txBody>
+          <a:bodyPr rtlCol="0" anchor="ctr"/>
+          <a:lstStyle/>
+          <a:p>
+            <a:pPr algn="ctr"/>
+          </a:p>
+        </p:txBody>
+      </p:sp>
+      <p:sp>
+        <p:nvSpPr>
+          <p:cNvPr id="6" name="Rounded Rectangle 5"/>
+          <p:cNvSpPr/>
+          <p:nvPr/>
+        </p:nvSpPr>
+        <p:spPr>
+          <a:xfrm>
+            <a:off x="594360" y="1490472"/>
+            <a:ext cx="438912" cy="438912"/>
+          </a:xfrm>
+          <a:prstGeom prst="roundRect">
+            <a:avLst>
+              <a:gd name="adj" fmla="val 12000"/>
+            </a:avLst>
+          </a:prstGeom>
+          <a:solidFill>
+            <a:srgbClr val="095292"/>
+          </a:solidFill>
+          <a:ln>
+            <a:noFill/>
+          </a:ln>
+        </p:spPr>
+        <p:style>
+          <a:lnRef idx="1">
+            <a:schemeClr val="accent1"/>
+          </a:lnRef>
+          <a:fillRef idx="3">
+            <a:schemeClr val="accent1"/>
+          </a:fillRef>
+          <a:effectRef idx="2">
+            <a:schemeClr val="accent1"/>
+          </a:effectRef>
+          <a:fontRef idx="minor">
+            <a:schemeClr val="lt1"/>
+          </a:fontRef>
+        </p:style>
+        <p:txBody>
+          <a:bodyPr rtlCol="0" anchor="ctr"/>
+          <a:lstStyle/>
+          <a:p>
+            <a:pPr algn="ctr"/>
+          </a:p>
+        </p:txBody>
+      </p:sp>
+      <p:sp>
+        <p:nvSpPr>
+          <p:cNvPr id="7" name="TextBox 6"/>
           <p:cNvSpPr txBox="1"/>
           <p:nvPr/>
         </p:nvSpPr>
         <p:spPr>
           <a:xfrm>
-            <a:off x="457200" y="1170432"/>
-            <a:ext cx="11277295" cy="5230368"/>
+            <a:off x="594360" y="1490472"/>
+            <a:ext cx="438912" cy="438912"/>
           </a:xfrm>
           <a:prstGeom prst="rect">
             <a:avLst/>
@@ -7703,219 +7147,677 @@
           <a:noFill/>
         </p:spPr>
         <p:txBody>
-          <a:bodyPr wrap="square">
-            <a:spAutoFit/>
-          </a:bodyPr>
-          <a:lstStyle/>
-          <a:p>
-            <a:pPr>
-              <a:spcAft>
-                <a:spcPts val="800"/>
-              </a:spcAft>
-            </a:pPr>
-            <a:r>
-              <a:rPr sz="2000" b="0" i="0">
-                <a:solidFill>
-                  <a:srgbClr val="333333"/>
-                </a:solidFill>
-                <a:latin typeface="Calibri"/>
-              </a:rPr>
-              <a:t>–   </a:t>
-            </a:r>
-            <a:r>
-              <a:rPr sz="2000" b="1" i="0">
-                <a:solidFill>
-                  <a:srgbClr val="333333"/>
-                </a:solidFill>
-                <a:latin typeface="Calibri"/>
-              </a:rPr>
-              <a:t>Entregable:</a:t>
-            </a:r>
-            <a:r>
-              <a:rPr sz="2000" b="0" i="0">
-                <a:solidFill>
-                  <a:srgbClr val="333333"/>
-                </a:solidFill>
-                <a:latin typeface="Calibri"/>
-              </a:rPr>
-              <a:t> Un documento de una pagina en Google Docs con la tabla Fase / Pregunta que responde / Artefacto de VetCare / Quien lo aprueba, mas dos diagramas en draw.io (recorrido lineal y recorrido en tres vueltas) exportados a PDF y subidos a la plataforma del curso.</a:t>
-            </a:r>
-          </a:p>
-          <a:p>
-            <a:pPr>
-              <a:spcAft>
-                <a:spcPts val="800"/>
-              </a:spcAft>
-            </a:pPr>
-            <a:r>
-              <a:rPr sz="2000" b="0" i="0">
-                <a:solidFill>
-                  <a:srgbClr val="333333"/>
-                </a:solidFill>
-                <a:latin typeface="Calibri"/>
-              </a:rPr>
-              <a:t>–   </a:t>
-            </a:r>
-            <a:r>
-              <a:rPr sz="2000" b="1" i="0">
-                <a:solidFill>
-                  <a:srgbClr val="333333"/>
-                </a:solidFill>
-                <a:latin typeface="Calibri"/>
-              </a:rPr>
-              <a:t>Exito:</a:t>
-            </a:r>
-            <a:r>
-              <a:rPr sz="2000" b="0" i="0">
-                <a:solidFill>
-                  <a:srgbClr val="333333"/>
-                </a:solidFill>
-                <a:latin typeface="Calibri"/>
-              </a:rPr>
-              <a:t> La tabla tiene las cinco fases y en cada una un artefacto concreto de VetCare escrito con nombre propio, no una definicion generica de libro.</a:t>
-            </a:r>
-          </a:p>
-          <a:p>
-            <a:pPr>
-              <a:spcAft>
-                <a:spcPts val="800"/>
-              </a:spcAft>
-            </a:pPr>
-            <a:r>
-              <a:rPr sz="2000" b="0" i="0">
-                <a:solidFill>
-                  <a:srgbClr val="333333"/>
-                </a:solidFill>
-                <a:latin typeface="Calibri"/>
-              </a:rPr>
-              <a:t>–   </a:t>
-            </a:r>
-            <a:r>
-              <a:rPr sz="2000" b="1" i="0">
-                <a:solidFill>
-                  <a:srgbClr val="333333"/>
-                </a:solidFill>
-                <a:latin typeface="Calibri"/>
-              </a:rPr>
-              <a:t>Exito:</a:t>
-            </a:r>
-            <a:r>
-              <a:rPr sz="2000" b="0" i="0">
-                <a:solidFill>
-                  <a:srgbClr val="333333"/>
-                </a:solidFill>
-                <a:latin typeface="Calibri"/>
-              </a:rPr>
-              <a:t> El diagrama lineal y el diagrama en vueltas usan exactamente las mismas cinco cajas; lo unico distinto entre ellos es el recorrido.</a:t>
-            </a:r>
-          </a:p>
-          <a:p>
-            <a:pPr>
-              <a:spcAft>
-                <a:spcPts val="800"/>
-              </a:spcAft>
-            </a:pPr>
-            <a:r>
-              <a:rPr sz="2000" b="0" i="0">
-                <a:solidFill>
-                  <a:srgbClr val="333333"/>
-                </a:solidFill>
-                <a:latin typeface="Calibri"/>
-              </a:rPr>
-              <a:t>–   </a:t>
-            </a:r>
-            <a:r>
-              <a:rPr sz="2000" b="1" i="0">
-                <a:solidFill>
-                  <a:srgbClr val="333333"/>
-                </a:solidFill>
-                <a:latin typeface="Calibri"/>
-              </a:rPr>
-              <a:t>Exito:</a:t>
-            </a:r>
-            <a:r>
-              <a:rPr sz="2000" b="0" i="0">
-                <a:solidFill>
-                  <a:srgbClr val="333333"/>
-                </a:solidFill>
-                <a:latin typeface="Calibri"/>
-              </a:rPr>
-              <a:t> La fase actual del equipo esta marcada y sustentada con dos evidencias verificables del estado real de VetCare.</a:t>
-            </a:r>
-          </a:p>
-          <a:p>
-            <a:pPr>
-              <a:spcAft>
-                <a:spcPts val="800"/>
-              </a:spcAft>
-            </a:pPr>
-            <a:r>
-              <a:rPr sz="2000" b="0" i="0">
-                <a:solidFill>
-                  <a:srgbClr val="333333"/>
-                </a:solidFill>
-                <a:latin typeface="Calibri"/>
-              </a:rPr>
-              <a:t>–   </a:t>
-            </a:r>
-            <a:r>
-              <a:rPr sz="2000" b="1" i="0">
-                <a:solidFill>
-                  <a:srgbClr val="333333"/>
-                </a:solidFill>
-                <a:latin typeface="Calibri"/>
-              </a:rPr>
-              <a:t>Exito:</a:t>
-            </a:r>
-            <a:r>
-              <a:rPr sz="2000" b="0" i="0">
-                <a:solidFill>
-                  <a:srgbClr val="333333"/>
-                </a:solidFill>
-                <a:latin typeface="Calibri"/>
-              </a:rPr>
-              <a:t> El parrafo final distingue con hechos concretos cuando termina el proyecto y cuando terminaria el producto, e incluye un ejemplo de mantenimiento.</a:t>
-            </a:r>
-          </a:p>
-          <a:p>
-            <a:pPr>
-              <a:spcAft>
-                <a:spcPts val="800"/>
-              </a:spcAft>
-            </a:pPr>
-            <a:r>
-              <a:rPr sz="2000" b="0" i="0">
-                <a:solidFill>
-                  <a:srgbClr val="333333"/>
-                </a:solidFill>
-                <a:latin typeface="Calibri"/>
-              </a:rPr>
-              <a:t>–   </a:t>
-            </a:r>
-            <a:r>
-              <a:rPr sz="2000" b="1" i="0">
-                <a:solidFill>
-                  <a:srgbClr val="333333"/>
-                </a:solidFill>
-                <a:latin typeface="Calibri"/>
-              </a:rPr>
-              <a:t>Entrega en la plataforma del curso</a:t>
-            </a:r>
-            <a:r>
-              <a:rPr sz="2000" b="0" i="0">
-                <a:solidFill>
-                  <a:srgbClr val="333333"/>
-                </a:solidFill>
-                <a:latin typeface="Calibri"/>
-              </a:rPr>
-              <a:t> — en la fecha que indique el docente.</a:t>
-            </a:r>
-          </a:p>
-        </p:txBody>
-      </p:sp>
-      <p:sp>
-        <p:nvSpPr>
-          <p:cNvPr id="6" name="TextBox 5"/>
+          <a:bodyPr wrap="square" anchor="ctr"/>
+          <a:lstStyle/>
+          <a:p>
+            <a:pPr algn="ctr"/>
+            <a:r>
+              <a:rPr sz="1600" b="1" i="0">
+                <a:solidFill>
+                  <a:srgbClr val="FFFFFF"/>
+                </a:solidFill>
+                <a:latin typeface="Calibri"/>
+              </a:rPr>
+              <a:t>1</a:t>
+            </a:r>
+          </a:p>
+        </p:txBody>
+      </p:sp>
+      <p:sp>
+        <p:nvSpPr>
+          <p:cNvPr id="8" name="TextBox 7"/>
+          <p:cNvSpPr txBox="1"/>
+          <p:nvPr/>
+        </p:nvSpPr>
+        <p:spPr>
+          <a:xfrm>
+            <a:off x="1188720" y="1325880"/>
+            <a:ext cx="10271455" cy="786384"/>
+          </a:xfrm>
+          <a:prstGeom prst="rect">
+            <a:avLst/>
+          </a:prstGeom>
+          <a:noFill/>
+        </p:spPr>
+        <p:txBody>
+          <a:bodyPr wrap="square" anchor="ctr"/>
+          <a:lstStyle/>
+          <a:p>
+            <a:r>
+              <a:rPr sz="1400" b="1" i="0">
+                <a:solidFill>
+                  <a:srgbClr val="095292"/>
+                </a:solidFill>
+                <a:latin typeface="Calibri"/>
+              </a:rPr>
+              <a:t>En Google Docs cree la tabla de cuatro columnas (Fase / Pregunta que responde / Artefacto concreto de VetCare / Quien lo aprueba) y llenela con las cinco fases; en la columna del artefacto esta prohibido escribir generalidades: debe decir cosas como 'Lista RF-01 a RF-12 de Huellitas' o 'Mockup de la ficha del paciente'.</a:t>
+            </a:r>
+          </a:p>
+        </p:txBody>
+      </p:sp>
+      <p:sp>
+        <p:nvSpPr>
+          <p:cNvPr id="9" name="Rounded Rectangle 8"/>
+          <p:cNvSpPr/>
+          <p:nvPr/>
+        </p:nvSpPr>
+        <p:spPr>
+          <a:xfrm>
+            <a:off x="457200" y="2276856"/>
+            <a:ext cx="11277295" cy="950976"/>
+          </a:xfrm>
+          <a:prstGeom prst="roundRect">
+            <a:avLst>
+              <a:gd name="adj" fmla="val 12000"/>
+            </a:avLst>
+          </a:prstGeom>
+          <a:solidFill>
+            <a:srgbClr val="E8F4FA"/>
+          </a:solidFill>
+          <a:ln>
+            <a:noFill/>
+          </a:ln>
+        </p:spPr>
+        <p:style>
+          <a:lnRef idx="1">
+            <a:schemeClr val="accent1"/>
+          </a:lnRef>
+          <a:fillRef idx="3">
+            <a:schemeClr val="accent1"/>
+          </a:fillRef>
+          <a:effectRef idx="2">
+            <a:schemeClr val="accent1"/>
+          </a:effectRef>
+          <a:fontRef idx="minor">
+            <a:schemeClr val="lt1"/>
+          </a:fontRef>
+        </p:style>
+        <p:txBody>
+          <a:bodyPr rtlCol="0" anchor="ctr"/>
+          <a:lstStyle/>
+          <a:p>
+            <a:pPr algn="ctr"/>
+          </a:p>
+        </p:txBody>
+      </p:sp>
+      <p:sp>
+        <p:nvSpPr>
+          <p:cNvPr id="10" name="Rounded Rectangle 9"/>
+          <p:cNvSpPr/>
+          <p:nvPr/>
+        </p:nvSpPr>
+        <p:spPr>
+          <a:xfrm>
+            <a:off x="594360" y="2532888"/>
+            <a:ext cx="438912" cy="438912"/>
+          </a:xfrm>
+          <a:prstGeom prst="roundRect">
+            <a:avLst>
+              <a:gd name="adj" fmla="val 12000"/>
+            </a:avLst>
+          </a:prstGeom>
+          <a:solidFill>
+            <a:srgbClr val="095292"/>
+          </a:solidFill>
+          <a:ln>
+            <a:noFill/>
+          </a:ln>
+        </p:spPr>
+        <p:style>
+          <a:lnRef idx="1">
+            <a:schemeClr val="accent1"/>
+          </a:lnRef>
+          <a:fillRef idx="3">
+            <a:schemeClr val="accent1"/>
+          </a:fillRef>
+          <a:effectRef idx="2">
+            <a:schemeClr val="accent1"/>
+          </a:effectRef>
+          <a:fontRef idx="minor">
+            <a:schemeClr val="lt1"/>
+          </a:fontRef>
+        </p:style>
+        <p:txBody>
+          <a:bodyPr rtlCol="0" anchor="ctr"/>
+          <a:lstStyle/>
+          <a:p>
+            <a:pPr algn="ctr"/>
+          </a:p>
+        </p:txBody>
+      </p:sp>
+      <p:sp>
+        <p:nvSpPr>
+          <p:cNvPr id="11" name="TextBox 10"/>
+          <p:cNvSpPr txBox="1"/>
+          <p:nvPr/>
+        </p:nvSpPr>
+        <p:spPr>
+          <a:xfrm>
+            <a:off x="594360" y="2532888"/>
+            <a:ext cx="438912" cy="438912"/>
+          </a:xfrm>
+          <a:prstGeom prst="rect">
+            <a:avLst/>
+          </a:prstGeom>
+          <a:noFill/>
+        </p:spPr>
+        <p:txBody>
+          <a:bodyPr wrap="square" anchor="ctr"/>
+          <a:lstStyle/>
+          <a:p>
+            <a:pPr algn="ctr"/>
+            <a:r>
+              <a:rPr sz="1600" b="1" i="0">
+                <a:solidFill>
+                  <a:srgbClr val="FFFFFF"/>
+                </a:solidFill>
+                <a:latin typeface="Calibri"/>
+              </a:rPr>
+              <a:t>2</a:t>
+            </a:r>
+          </a:p>
+        </p:txBody>
+      </p:sp>
+      <p:sp>
+        <p:nvSpPr>
+          <p:cNvPr id="12" name="TextBox 11"/>
+          <p:cNvSpPr txBox="1"/>
+          <p:nvPr/>
+        </p:nvSpPr>
+        <p:spPr>
+          <a:xfrm>
+            <a:off x="1188720" y="2368296"/>
+            <a:ext cx="10271455" cy="786384"/>
+          </a:xfrm>
+          <a:prstGeom prst="rect">
+            <a:avLst/>
+          </a:prstGeom>
+          <a:noFill/>
+        </p:spPr>
+        <p:txBody>
+          <a:bodyPr wrap="square" anchor="ctr"/>
+          <a:lstStyle/>
+          <a:p>
+            <a:r>
+              <a:rPr sz="1500" b="1" i="0">
+                <a:solidFill>
+                  <a:srgbClr val="095292"/>
+                </a:solidFill>
+                <a:latin typeface="Calibri"/>
+              </a:rPr>
+              <a:t>Marque con relleno amarillo la fila de la fase donde esta el equipo hoy y escriba debajo dos evidencias verificables que lo demuestren (por ejemplo: 'existe la entrevista transcrita' y 'no existe ningun diagrama aprobado').</a:t>
+            </a:r>
+          </a:p>
+        </p:txBody>
+      </p:sp>
+      <p:sp>
+        <p:nvSpPr>
+          <p:cNvPr id="13" name="Rounded Rectangle 12"/>
+          <p:cNvSpPr/>
+          <p:nvPr/>
+        </p:nvSpPr>
+        <p:spPr>
+          <a:xfrm>
+            <a:off x="457200" y="3319272"/>
+            <a:ext cx="11277295" cy="950976"/>
+          </a:xfrm>
+          <a:prstGeom prst="roundRect">
+            <a:avLst>
+              <a:gd name="adj" fmla="val 12000"/>
+            </a:avLst>
+          </a:prstGeom>
+          <a:solidFill>
+            <a:srgbClr val="F2F2F2"/>
+          </a:solidFill>
+          <a:ln>
+            <a:noFill/>
+          </a:ln>
+        </p:spPr>
+        <p:style>
+          <a:lnRef idx="1">
+            <a:schemeClr val="accent1"/>
+          </a:lnRef>
+          <a:fillRef idx="3">
+            <a:schemeClr val="accent1"/>
+          </a:fillRef>
+          <a:effectRef idx="2">
+            <a:schemeClr val="accent1"/>
+          </a:effectRef>
+          <a:fontRef idx="minor">
+            <a:schemeClr val="lt1"/>
+          </a:fontRef>
+        </p:style>
+        <p:txBody>
+          <a:bodyPr rtlCol="0" anchor="ctr"/>
+          <a:lstStyle/>
+          <a:p>
+            <a:pPr algn="ctr"/>
+          </a:p>
+        </p:txBody>
+      </p:sp>
+      <p:sp>
+        <p:nvSpPr>
+          <p:cNvPr id="14" name="Rounded Rectangle 13"/>
+          <p:cNvSpPr/>
+          <p:nvPr/>
+        </p:nvSpPr>
+        <p:spPr>
+          <a:xfrm>
+            <a:off x="594360" y="3575304"/>
+            <a:ext cx="438912" cy="438912"/>
+          </a:xfrm>
+          <a:prstGeom prst="roundRect">
+            <a:avLst>
+              <a:gd name="adj" fmla="val 12000"/>
+            </a:avLst>
+          </a:prstGeom>
+          <a:solidFill>
+            <a:srgbClr val="095292"/>
+          </a:solidFill>
+          <a:ln>
+            <a:noFill/>
+          </a:ln>
+        </p:spPr>
+        <p:style>
+          <a:lnRef idx="1">
+            <a:schemeClr val="accent1"/>
+          </a:lnRef>
+          <a:fillRef idx="3">
+            <a:schemeClr val="accent1"/>
+          </a:fillRef>
+          <a:effectRef idx="2">
+            <a:schemeClr val="accent1"/>
+          </a:effectRef>
+          <a:fontRef idx="minor">
+            <a:schemeClr val="lt1"/>
+          </a:fontRef>
+        </p:style>
+        <p:txBody>
+          <a:bodyPr rtlCol="0" anchor="ctr"/>
+          <a:lstStyle/>
+          <a:p>
+            <a:pPr algn="ctr"/>
+          </a:p>
+        </p:txBody>
+      </p:sp>
+      <p:sp>
+        <p:nvSpPr>
+          <p:cNvPr id="15" name="TextBox 14"/>
+          <p:cNvSpPr txBox="1"/>
+          <p:nvPr/>
+        </p:nvSpPr>
+        <p:spPr>
+          <a:xfrm>
+            <a:off x="594360" y="3575304"/>
+            <a:ext cx="438912" cy="438912"/>
+          </a:xfrm>
+          <a:prstGeom prst="rect">
+            <a:avLst/>
+          </a:prstGeom>
+          <a:noFill/>
+        </p:spPr>
+        <p:txBody>
+          <a:bodyPr wrap="square" anchor="ctr"/>
+          <a:lstStyle/>
+          <a:p>
+            <a:pPr algn="ctr"/>
+            <a:r>
+              <a:rPr sz="1600" b="1" i="0">
+                <a:solidFill>
+                  <a:srgbClr val="FFFFFF"/>
+                </a:solidFill>
+                <a:latin typeface="Calibri"/>
+              </a:rPr>
+              <a:t>3</a:t>
+            </a:r>
+          </a:p>
+        </p:txBody>
+      </p:sp>
+      <p:sp>
+        <p:nvSpPr>
+          <p:cNvPr id="16" name="TextBox 15"/>
+          <p:cNvSpPr txBox="1"/>
+          <p:nvPr/>
+        </p:nvSpPr>
+        <p:spPr>
+          <a:xfrm>
+            <a:off x="1188720" y="3410712"/>
+            <a:ext cx="10271455" cy="786384"/>
+          </a:xfrm>
+          <a:prstGeom prst="rect">
+            <a:avLst/>
+          </a:prstGeom>
+          <a:noFill/>
+        </p:spPr>
+        <p:txBody>
+          <a:bodyPr wrap="square" anchor="ctr"/>
+          <a:lstStyle/>
+          <a:p>
+            <a:r>
+              <a:rPr sz="1500" b="1" i="0">
+                <a:solidFill>
+                  <a:srgbClr val="095292"/>
+                </a:solidFill>
+                <a:latin typeface="Calibri"/>
+              </a:rPr>
+              <a:t>En draw.io dibuje el recorrido lineal de VetCare: cinco cajas en fila, y sobre cada flecha escriba el artefacto que se entrega para poder pasar a la siguiente fase.</a:t>
+            </a:r>
+          </a:p>
+        </p:txBody>
+      </p:sp>
+      <p:sp>
+        <p:nvSpPr>
+          <p:cNvPr id="17" name="Rounded Rectangle 16"/>
+          <p:cNvSpPr/>
+          <p:nvPr/>
+        </p:nvSpPr>
+        <p:spPr>
+          <a:xfrm>
+            <a:off x="457200" y="4361688"/>
+            <a:ext cx="11277295" cy="950976"/>
+          </a:xfrm>
+          <a:prstGeom prst="roundRect">
+            <a:avLst>
+              <a:gd name="adj" fmla="val 12000"/>
+            </a:avLst>
+          </a:prstGeom>
+          <a:solidFill>
+            <a:srgbClr val="E8F4FA"/>
+          </a:solidFill>
+          <a:ln>
+            <a:noFill/>
+          </a:ln>
+        </p:spPr>
+        <p:style>
+          <a:lnRef idx="1">
+            <a:schemeClr val="accent1"/>
+          </a:lnRef>
+          <a:fillRef idx="3">
+            <a:schemeClr val="accent1"/>
+          </a:fillRef>
+          <a:effectRef idx="2">
+            <a:schemeClr val="accent1"/>
+          </a:effectRef>
+          <a:fontRef idx="minor">
+            <a:schemeClr val="lt1"/>
+          </a:fontRef>
+        </p:style>
+        <p:txBody>
+          <a:bodyPr rtlCol="0" anchor="ctr"/>
+          <a:lstStyle/>
+          <a:p>
+            <a:pPr algn="ctr"/>
+          </a:p>
+        </p:txBody>
+      </p:sp>
+      <p:sp>
+        <p:nvSpPr>
+          <p:cNvPr id="18" name="Rounded Rectangle 17"/>
+          <p:cNvSpPr/>
+          <p:nvPr/>
+        </p:nvSpPr>
+        <p:spPr>
+          <a:xfrm>
+            <a:off x="594360" y="4617720"/>
+            <a:ext cx="438912" cy="438912"/>
+          </a:xfrm>
+          <a:prstGeom prst="roundRect">
+            <a:avLst>
+              <a:gd name="adj" fmla="val 12000"/>
+            </a:avLst>
+          </a:prstGeom>
+          <a:solidFill>
+            <a:srgbClr val="095292"/>
+          </a:solidFill>
+          <a:ln>
+            <a:noFill/>
+          </a:ln>
+        </p:spPr>
+        <p:style>
+          <a:lnRef idx="1">
+            <a:schemeClr val="accent1"/>
+          </a:lnRef>
+          <a:fillRef idx="3">
+            <a:schemeClr val="accent1"/>
+          </a:fillRef>
+          <a:effectRef idx="2">
+            <a:schemeClr val="accent1"/>
+          </a:effectRef>
+          <a:fontRef idx="minor">
+            <a:schemeClr val="lt1"/>
+          </a:fontRef>
+        </p:style>
+        <p:txBody>
+          <a:bodyPr rtlCol="0" anchor="ctr"/>
+          <a:lstStyle/>
+          <a:p>
+            <a:pPr algn="ctr"/>
+          </a:p>
+        </p:txBody>
+      </p:sp>
+      <p:sp>
+        <p:nvSpPr>
+          <p:cNvPr id="19" name="TextBox 18"/>
+          <p:cNvSpPr txBox="1"/>
+          <p:nvPr/>
+        </p:nvSpPr>
+        <p:spPr>
+          <a:xfrm>
+            <a:off x="594360" y="4617720"/>
+            <a:ext cx="438912" cy="438912"/>
+          </a:xfrm>
+          <a:prstGeom prst="rect">
+            <a:avLst/>
+          </a:prstGeom>
+          <a:noFill/>
+        </p:spPr>
+        <p:txBody>
+          <a:bodyPr wrap="square" anchor="ctr"/>
+          <a:lstStyle/>
+          <a:p>
+            <a:pPr algn="ctr"/>
+            <a:r>
+              <a:rPr sz="1600" b="1" i="0">
+                <a:solidFill>
+                  <a:srgbClr val="FFFFFF"/>
+                </a:solidFill>
+                <a:latin typeface="Calibri"/>
+              </a:rPr>
+              <a:t>4</a:t>
+            </a:r>
+          </a:p>
+        </p:txBody>
+      </p:sp>
+      <p:sp>
+        <p:nvSpPr>
+          <p:cNvPr id="20" name="TextBox 19"/>
+          <p:cNvSpPr txBox="1"/>
+          <p:nvPr/>
+        </p:nvSpPr>
+        <p:spPr>
+          <a:xfrm>
+            <a:off x="1188720" y="4453128"/>
+            <a:ext cx="10271455" cy="786384"/>
+          </a:xfrm>
+          <a:prstGeom prst="rect">
+            <a:avLst/>
+          </a:prstGeom>
+          <a:noFill/>
+        </p:spPr>
+        <p:txBody>
+          <a:bodyPr wrap="square" anchor="ctr"/>
+          <a:lstStyle/>
+          <a:p>
+            <a:r>
+              <a:rPr sz="1400" b="1" i="0">
+                <a:solidFill>
+                  <a:srgbClr val="095292"/>
+                </a:solidFill>
+                <a:latin typeface="Calibri"/>
+              </a:rPr>
+              <a:t>Duplique la pagina en draw.io y dibuje el recorrido en tres vueltas: las mismas cinco cajas, pero con las vueltas rotuladas Incremento 1 (ficha del paciente), Incremento 2 (historia clinica y busqueda) e Incremento 3 (reportes y metricas), y una flecha de retroalimentacion desde la clinica hacia requisitos.</a:t>
+            </a:r>
+          </a:p>
+        </p:txBody>
+      </p:sp>
+      <p:sp>
+        <p:nvSpPr>
+          <p:cNvPr id="21" name="Rounded Rectangle 20"/>
+          <p:cNvSpPr/>
+          <p:nvPr/>
+        </p:nvSpPr>
+        <p:spPr>
+          <a:xfrm>
+            <a:off x="457200" y="5404104"/>
+            <a:ext cx="11277295" cy="950976"/>
+          </a:xfrm>
+          <a:prstGeom prst="roundRect">
+            <a:avLst>
+              <a:gd name="adj" fmla="val 12000"/>
+            </a:avLst>
+          </a:prstGeom>
+          <a:solidFill>
+            <a:srgbClr val="F2F2F2"/>
+          </a:solidFill>
+          <a:ln>
+            <a:noFill/>
+          </a:ln>
+        </p:spPr>
+        <p:style>
+          <a:lnRef idx="1">
+            <a:schemeClr val="accent1"/>
+          </a:lnRef>
+          <a:fillRef idx="3">
+            <a:schemeClr val="accent1"/>
+          </a:fillRef>
+          <a:effectRef idx="2">
+            <a:schemeClr val="accent1"/>
+          </a:effectRef>
+          <a:fontRef idx="minor">
+            <a:schemeClr val="lt1"/>
+          </a:fontRef>
+        </p:style>
+        <p:txBody>
+          <a:bodyPr rtlCol="0" anchor="ctr"/>
+          <a:lstStyle/>
+          <a:p>
+            <a:pPr algn="ctr"/>
+          </a:p>
+        </p:txBody>
+      </p:sp>
+      <p:sp>
+        <p:nvSpPr>
+          <p:cNvPr id="22" name="Rounded Rectangle 21"/>
+          <p:cNvSpPr/>
+          <p:nvPr/>
+        </p:nvSpPr>
+        <p:spPr>
+          <a:xfrm>
+            <a:off x="594360" y="5660136"/>
+            <a:ext cx="438912" cy="438912"/>
+          </a:xfrm>
+          <a:prstGeom prst="roundRect">
+            <a:avLst>
+              <a:gd name="adj" fmla="val 12000"/>
+            </a:avLst>
+          </a:prstGeom>
+          <a:solidFill>
+            <a:srgbClr val="095292"/>
+          </a:solidFill>
+          <a:ln>
+            <a:noFill/>
+          </a:ln>
+        </p:spPr>
+        <p:style>
+          <a:lnRef idx="1">
+            <a:schemeClr val="accent1"/>
+          </a:lnRef>
+          <a:fillRef idx="3">
+            <a:schemeClr val="accent1"/>
+          </a:fillRef>
+          <a:effectRef idx="2">
+            <a:schemeClr val="accent1"/>
+          </a:effectRef>
+          <a:fontRef idx="minor">
+            <a:schemeClr val="lt1"/>
+          </a:fontRef>
+        </p:style>
+        <p:txBody>
+          <a:bodyPr rtlCol="0" anchor="ctr"/>
+          <a:lstStyle/>
+          <a:p>
+            <a:pPr algn="ctr"/>
+          </a:p>
+        </p:txBody>
+      </p:sp>
+      <p:sp>
+        <p:nvSpPr>
+          <p:cNvPr id="23" name="TextBox 22"/>
+          <p:cNvSpPr txBox="1"/>
+          <p:nvPr/>
+        </p:nvSpPr>
+        <p:spPr>
+          <a:xfrm>
+            <a:off x="594360" y="5660136"/>
+            <a:ext cx="438912" cy="438912"/>
+          </a:xfrm>
+          <a:prstGeom prst="rect">
+            <a:avLst/>
+          </a:prstGeom>
+          <a:noFill/>
+        </p:spPr>
+        <p:txBody>
+          <a:bodyPr wrap="square" anchor="ctr"/>
+          <a:lstStyle/>
+          <a:p>
+            <a:pPr algn="ctr"/>
+            <a:r>
+              <a:rPr sz="1600" b="1" i="0">
+                <a:solidFill>
+                  <a:srgbClr val="FFFFFF"/>
+                </a:solidFill>
+                <a:latin typeface="Calibri"/>
+              </a:rPr>
+              <a:t>5</a:t>
+            </a:r>
+          </a:p>
+        </p:txBody>
+      </p:sp>
+      <p:sp>
+        <p:nvSpPr>
+          <p:cNvPr id="24" name="TextBox 23"/>
+          <p:cNvSpPr txBox="1"/>
+          <p:nvPr/>
+        </p:nvSpPr>
+        <p:spPr>
+          <a:xfrm>
+            <a:off x="1188720" y="5495544"/>
+            <a:ext cx="10271455" cy="786384"/>
+          </a:xfrm>
+          <a:prstGeom prst="rect">
+            <a:avLst/>
+          </a:prstGeom>
+          <a:noFill/>
+        </p:spPr>
+        <p:txBody>
+          <a:bodyPr wrap="square" anchor="ctr"/>
+          <a:lstStyle/>
+          <a:p>
+            <a:r>
+              <a:rPr sz="1400" b="1" i="0">
+                <a:solidFill>
+                  <a:srgbClr val="095292"/>
+                </a:solidFill>
+                <a:latin typeface="Calibri"/>
+              </a:rPr>
+              <a:t>Escriba al final del documento un parrafo de tres renglones titulado 'Producto vs proyecto en VetCare' que responda: cuando termina el proyecto, cuando terminaria el producto y un ejemplo concreto de una solicitud de mantenimiento; exporte a PDF y suba el archivo a la plataforma del curso.</a:t>
+            </a:r>
+          </a:p>
+        </p:txBody>
+      </p:sp>
+      <p:sp>
+        <p:nvSpPr>
+          <p:cNvPr id="25" name="TextBox 24"/>
           <p:cNvSpPr txBox="1"/>
           <p:nvPr/>
         </p:nvSpPr>
@@ -8089,7 +7991,7 @@
                 </a:solidFill>
                 <a:latin typeface="Calibri"/>
               </a:rPr>
-              <a:t>Para el PI esta semana</a:t>
+              <a:t>Antes de entregar — autochequeo</a:t>
             </a:r>
           </a:p>
         </p:txBody>
@@ -8103,7 +8005,7 @@
         <p:spPr>
           <a:xfrm>
             <a:off x="457200" y="1261872"/>
-            <a:ext cx="11277295" cy="1051560"/>
+            <a:ext cx="11277295" cy="566928"/>
           </a:xfrm>
           <a:prstGeom prst="roundRect">
             <a:avLst>
@@ -8111,7 +8013,7 @@
             </a:avLst>
           </a:prstGeom>
           <a:solidFill>
-            <a:srgbClr val="E8F4FA"/>
+            <a:srgbClr val="F2F2F2"/>
           </a:solidFill>
           <a:ln>
             <a:noFill/>
@@ -8147,8 +8049,53 @@
         </p:nvSpPr>
         <p:spPr>
           <a:xfrm>
-            <a:off x="457200" y="1261872"/>
-            <a:ext cx="128016" cy="1051560"/>
+            <a:off x="640080" y="1408175"/>
+            <a:ext cx="274320" cy="274320"/>
+          </a:xfrm>
+          <a:prstGeom prst="rect">
+            <a:avLst/>
+          </a:prstGeom>
+          <a:solidFill>
+            <a:srgbClr val="FFFFFF"/>
+          </a:solidFill>
+          <a:ln>
+            <a:solidFill>
+              <a:srgbClr val="333333"/>
+            </a:solidFill>
+          </a:ln>
+        </p:spPr>
+        <p:style>
+          <a:lnRef idx="1">
+            <a:schemeClr val="accent1"/>
+          </a:lnRef>
+          <a:fillRef idx="3">
+            <a:schemeClr val="accent1"/>
+          </a:fillRef>
+          <a:effectRef idx="2">
+            <a:schemeClr val="accent1"/>
+          </a:effectRef>
+          <a:fontRef idx="minor">
+            <a:schemeClr val="lt1"/>
+          </a:fontRef>
+        </p:style>
+        <p:txBody>
+          <a:bodyPr rtlCol="0" anchor="ctr"/>
+          <a:lstStyle/>
+          <a:p>
+            <a:pPr algn="ctr"/>
+          </a:p>
+        </p:txBody>
+      </p:sp>
+      <p:sp>
+        <p:nvSpPr>
+          <p:cNvPr id="7" name="Rectangle 6"/>
+          <p:cNvSpPr/>
+          <p:nvPr/>
+        </p:nvSpPr>
+        <p:spPr>
+          <a:xfrm>
+            <a:off x="640080" y="1408175"/>
+            <a:ext cx="73152" cy="274320"/>
           </a:xfrm>
           <a:prstGeom prst="rect">
             <a:avLst/>
@@ -8184,14 +8131,14 @@
       </p:sp>
       <p:sp>
         <p:nvSpPr>
-          <p:cNvPr id="7" name="TextBox 6"/>
+          <p:cNvPr id="8" name="TextBox 7"/>
           <p:cNvSpPr txBox="1"/>
           <p:nvPr/>
         </p:nvSpPr>
         <p:spPr>
           <a:xfrm>
-            <a:off x="777240" y="1399031"/>
-            <a:ext cx="10774375" cy="822959"/>
+            <a:off x="1097280" y="1353312"/>
+            <a:ext cx="10362895" cy="402336"/>
           </a:xfrm>
           <a:prstGeom prst="rect">
             <a:avLst/>
@@ -8199,49 +8146,31 @@
           <a:noFill/>
         </p:spPr>
         <p:txBody>
-          <a:bodyPr wrap="square">
-            <a:spAutoFit/>
-          </a:bodyPr>
-          <a:lstStyle/>
-          <a:p>
-            <a:r>
-              <a:rPr sz="1200" b="1" i="0">
-                <a:solidFill>
-                  <a:srgbClr val="269CCB"/>
-                </a:solidFill>
-                <a:latin typeface="Calibri"/>
-              </a:rPr>
-              <a:t>Info</a:t>
-            </a:r>
-          </a:p>
-          <a:p>
-            <a:pPr>
-              <a:spcBef>
-                <a:spcPts val="400"/>
-              </a:spcBef>
-            </a:pPr>
-            <a:r>
-              <a:rPr sz="1400" b="0" i="0">
+          <a:bodyPr wrap="square" anchor="ctr"/>
+          <a:lstStyle/>
+          <a:p>
+            <a:r>
+              <a:rPr sz="1500" b="0" i="0">
                 <a:solidFill>
                   <a:srgbClr val="333333"/>
                 </a:solidFill>
                 <a:latin typeface="Calibri"/>
               </a:rPr>
-              <a:t>Hito: Queda listo el mapa de fases de VetCare con el artefacto concreto que produce cada fase y la marca de en cual esta parado el equipo hoy.</a:t>
-            </a:r>
-          </a:p>
-        </p:txBody>
-      </p:sp>
-      <p:sp>
-        <p:nvSpPr>
-          <p:cNvPr id="8" name="Rounded Rectangle 7"/>
+              <a:t>Si borro la palabra VetCare de su tabla, esa tabla serviria igual para un cajero automatico o para una tienda de ropa? Si la respuesta es si, todavia no aterrizo nada.</a:t>
+            </a:r>
+          </a:p>
+        </p:txBody>
+      </p:sp>
+      <p:sp>
+        <p:nvSpPr>
+          <p:cNvPr id="9" name="Rounded Rectangle 8"/>
           <p:cNvSpPr/>
           <p:nvPr/>
         </p:nvSpPr>
         <p:spPr>
           <a:xfrm>
-            <a:off x="457200" y="2478024"/>
-            <a:ext cx="11277295" cy="1051560"/>
+            <a:off x="457200" y="1938528"/>
+            <a:ext cx="11277295" cy="566928"/>
           </a:xfrm>
           <a:prstGeom prst="roundRect">
             <a:avLst>
@@ -8249,7 +8178,7 @@
             </a:avLst>
           </a:prstGeom>
           <a:solidFill>
-            <a:srgbClr val="FFF8E1"/>
+            <a:srgbClr val="F2F2F2"/>
           </a:solidFill>
           <a:ln>
             <a:noFill/>
@@ -8279,23 +8208,25 @@
       </p:sp>
       <p:sp>
         <p:nvSpPr>
-          <p:cNvPr id="9" name="Rectangle 8"/>
+          <p:cNvPr id="10" name="Rectangle 9"/>
           <p:cNvSpPr/>
           <p:nvPr/>
         </p:nvSpPr>
         <p:spPr>
           <a:xfrm>
-            <a:off x="457200" y="2478024"/>
-            <a:ext cx="128016" cy="1051560"/>
+            <a:off x="640080" y="2084832"/>
+            <a:ext cx="274320" cy="274320"/>
           </a:xfrm>
           <a:prstGeom prst="rect">
             <a:avLst/>
           </a:prstGeom>
           <a:solidFill>
-            <a:srgbClr val="FFD000"/>
+            <a:srgbClr val="FFFFFF"/>
           </a:solidFill>
           <a:ln>
-            <a:noFill/>
+            <a:solidFill>
+              <a:srgbClr val="333333"/>
+            </a:solidFill>
           </a:ln>
         </p:spPr>
         <p:style>
@@ -8322,72 +8253,20 @@
       </p:sp>
       <p:sp>
         <p:nvSpPr>
-          <p:cNvPr id="10" name="TextBox 9"/>
-          <p:cNvSpPr txBox="1"/>
-          <p:nvPr/>
-        </p:nvSpPr>
-        <p:spPr>
-          <a:xfrm>
-            <a:off x="777240" y="2615184"/>
-            <a:ext cx="10774375" cy="822959"/>
-          </a:xfrm>
-          <a:prstGeom prst="rect">
-            <a:avLst/>
-          </a:prstGeom>
-          <a:noFill/>
-        </p:spPr>
-        <p:txBody>
-          <a:bodyPr wrap="square">
-            <a:spAutoFit/>
-          </a:bodyPr>
-          <a:lstStyle/>
-          <a:p>
-            <a:r>
-              <a:rPr sz="1200" b="1" i="0">
-                <a:solidFill>
-                  <a:srgbClr val="FFD000"/>
-                </a:solidFill>
-                <a:latin typeface="Calibri"/>
-              </a:rPr>
-              <a:t>Aclaración</a:t>
-            </a:r>
-          </a:p>
-          <a:p>
-            <a:pPr>
-              <a:spcBef>
-                <a:spcPts val="400"/>
-              </a:spcBef>
-            </a:pPr>
-            <a:r>
-              <a:rPr sz="1400" b="0" i="0">
-                <a:solidFill>
-                  <a:srgbClr val="333333"/>
-                </a:solidFill>
-                <a:latin typeface="Calibri"/>
-              </a:rPr>
-              <a:t>Enunciado completo: Clases/Proyecto Integrador/ (VetCare).</a:t>
-            </a:r>
-          </a:p>
-        </p:txBody>
-      </p:sp>
-      <p:sp>
-        <p:nvSpPr>
-          <p:cNvPr id="11" name="Rounded Rectangle 10"/>
+          <p:cNvPr id="11" name="Rectangle 10"/>
           <p:cNvSpPr/>
           <p:nvPr/>
         </p:nvSpPr>
         <p:spPr>
           <a:xfrm>
-            <a:off x="457200" y="3694176"/>
-            <a:ext cx="11277295" cy="1051560"/>
-          </a:xfrm>
-          <a:prstGeom prst="roundRect">
-            <a:avLst>
-              <a:gd name="adj" fmla="val 12000"/>
-            </a:avLst>
+            <a:off x="640080" y="2084832"/>
+            <a:ext cx="73152" cy="274320"/>
+          </a:xfrm>
+          <a:prstGeom prst="rect">
+            <a:avLst/>
           </a:prstGeom>
           <a:solidFill>
-            <a:srgbClr val="FBE4E4"/>
+            <a:srgbClr val="269CCB"/>
           </a:solidFill>
           <a:ln>
             <a:noFill/>
@@ -8417,20 +8296,54 @@
       </p:sp>
       <p:sp>
         <p:nvSpPr>
-          <p:cNvPr id="12" name="Rectangle 11"/>
+          <p:cNvPr id="12" name="TextBox 11"/>
+          <p:cNvSpPr txBox="1"/>
+          <p:nvPr/>
+        </p:nvSpPr>
+        <p:spPr>
+          <a:xfrm>
+            <a:off x="1097280" y="2029968"/>
+            <a:ext cx="10362895" cy="402336"/>
+          </a:xfrm>
+          <a:prstGeom prst="rect">
+            <a:avLst/>
+          </a:prstGeom>
+          <a:noFill/>
+        </p:spPr>
+        <p:txBody>
+          <a:bodyPr wrap="square" anchor="ctr"/>
+          <a:lstStyle/>
+          <a:p>
+            <a:r>
+              <a:rPr sz="1500" b="0" i="0">
+                <a:solidFill>
+                  <a:srgbClr val="333333"/>
+                </a:solidFill>
+                <a:latin typeface="Calibri"/>
+              </a:rPr>
+              <a:t>En su diagrama de vueltas, cada vuelta termina en algo que la veterinaria podria mirar y opinar, o termina en trabajo interno que solo entiende el equipo?</a:t>
+            </a:r>
+          </a:p>
+        </p:txBody>
+      </p:sp>
+      <p:sp>
+        <p:nvSpPr>
+          <p:cNvPr id="13" name="Rounded Rectangle 12"/>
           <p:cNvSpPr/>
           <p:nvPr/>
         </p:nvSpPr>
         <p:spPr>
           <a:xfrm>
-            <a:off x="457200" y="3694176"/>
-            <a:ext cx="128016" cy="1051560"/>
-          </a:xfrm>
-          <a:prstGeom prst="rect">
-            <a:avLst/>
+            <a:off x="457200" y="2615184"/>
+            <a:ext cx="11277295" cy="566928"/>
+          </a:xfrm>
+          <a:prstGeom prst="roundRect">
+            <a:avLst>
+              <a:gd name="adj" fmla="val 12000"/>
+            </a:avLst>
           </a:prstGeom>
           <a:solidFill>
-            <a:srgbClr val="A02030"/>
+            <a:srgbClr val="F2F2F2"/>
           </a:solidFill>
           <a:ln>
             <a:noFill/>
@@ -8460,14 +8373,102 @@
       </p:sp>
       <p:sp>
         <p:nvSpPr>
-          <p:cNvPr id="13" name="TextBox 12"/>
+          <p:cNvPr id="14" name="Rectangle 13"/>
+          <p:cNvSpPr/>
+          <p:nvPr/>
+        </p:nvSpPr>
+        <p:spPr>
+          <a:xfrm>
+            <a:off x="640080" y="2761488"/>
+            <a:ext cx="274320" cy="274320"/>
+          </a:xfrm>
+          <a:prstGeom prst="rect">
+            <a:avLst/>
+          </a:prstGeom>
+          <a:solidFill>
+            <a:srgbClr val="FFFFFF"/>
+          </a:solidFill>
+          <a:ln>
+            <a:solidFill>
+              <a:srgbClr val="333333"/>
+            </a:solidFill>
+          </a:ln>
+        </p:spPr>
+        <p:style>
+          <a:lnRef idx="1">
+            <a:schemeClr val="accent1"/>
+          </a:lnRef>
+          <a:fillRef idx="3">
+            <a:schemeClr val="accent1"/>
+          </a:fillRef>
+          <a:effectRef idx="2">
+            <a:schemeClr val="accent1"/>
+          </a:effectRef>
+          <a:fontRef idx="minor">
+            <a:schemeClr val="lt1"/>
+          </a:fontRef>
+        </p:style>
+        <p:txBody>
+          <a:bodyPr rtlCol="0" anchor="ctr"/>
+          <a:lstStyle/>
+          <a:p>
+            <a:pPr algn="ctr"/>
+          </a:p>
+        </p:txBody>
+      </p:sp>
+      <p:sp>
+        <p:nvSpPr>
+          <p:cNvPr id="15" name="Rectangle 14"/>
+          <p:cNvSpPr/>
+          <p:nvPr/>
+        </p:nvSpPr>
+        <p:spPr>
+          <a:xfrm>
+            <a:off x="640080" y="2761488"/>
+            <a:ext cx="73152" cy="274320"/>
+          </a:xfrm>
+          <a:prstGeom prst="rect">
+            <a:avLst/>
+          </a:prstGeom>
+          <a:solidFill>
+            <a:srgbClr val="269CCB"/>
+          </a:solidFill>
+          <a:ln>
+            <a:noFill/>
+          </a:ln>
+        </p:spPr>
+        <p:style>
+          <a:lnRef idx="1">
+            <a:schemeClr val="accent1"/>
+          </a:lnRef>
+          <a:fillRef idx="3">
+            <a:schemeClr val="accent1"/>
+          </a:fillRef>
+          <a:effectRef idx="2">
+            <a:schemeClr val="accent1"/>
+          </a:effectRef>
+          <a:fontRef idx="minor">
+            <a:schemeClr val="lt1"/>
+          </a:fontRef>
+        </p:style>
+        <p:txBody>
+          <a:bodyPr rtlCol="0" anchor="ctr"/>
+          <a:lstStyle/>
+          <a:p>
+            <a:pPr algn="ctr"/>
+          </a:p>
+        </p:txBody>
+      </p:sp>
+      <p:sp>
+        <p:nvSpPr>
+          <p:cNvPr id="16" name="TextBox 15"/>
           <p:cNvSpPr txBox="1"/>
           <p:nvPr/>
         </p:nvSpPr>
         <p:spPr>
           <a:xfrm>
-            <a:off x="777240" y="3831336"/>
-            <a:ext cx="10774375" cy="822959"/>
+            <a:off x="1097280" y="2706624"/>
+            <a:ext cx="10362895" cy="402336"/>
           </a:xfrm>
           <a:prstGeom prst="rect">
             <a:avLst/>
@@ -8475,42 +8476,24 @@
           <a:noFill/>
         </p:spPr>
         <p:txBody>
-          <a:bodyPr wrap="square">
-            <a:spAutoFit/>
-          </a:bodyPr>
-          <a:lstStyle/>
-          <a:p>
-            <a:r>
-              <a:rPr sz="1200" b="1" i="0">
-                <a:solidFill>
-                  <a:srgbClr val="A02030"/>
-                </a:solidFill>
-                <a:latin typeface="Calibri"/>
-              </a:rPr>
-              <a:t>Atención</a:t>
-            </a:r>
-          </a:p>
-          <a:p>
-            <a:pPr>
-              <a:spcBef>
-                <a:spcPts val="400"/>
-              </a:spcBef>
-            </a:pPr>
-            <a:r>
-              <a:rPr sz="1400" b="0" i="0">
+          <a:bodyPr wrap="square" anchor="ctr"/>
+          <a:lstStyle/>
+          <a:p>
+            <a:r>
+              <a:rPr sz="1500" b="0" i="0">
                 <a:solidFill>
                   <a:srgbClr val="333333"/>
                 </a:solidFill>
                 <a:latin typeface="Calibri"/>
               </a:rPr>
-              <a:t>Entrega del taller, si el docente lo asigna · en la fecha que indique el docente.</a:t>
-            </a:r>
-          </a:p>
-        </p:txBody>
-      </p:sp>
-      <p:sp>
-        <p:nvSpPr>
-          <p:cNvPr id="14" name="TextBox 13"/>
+              <a:t>Que documento exacto tendria que mostrar hoy, en pantalla, para demostrarle a la clinica que la fase de requisitos ya quedo cerrada?</a:t>
+            </a:r>
+          </a:p>
+        </p:txBody>
+      </p:sp>
+      <p:sp>
+        <p:nvSpPr>
+          <p:cNvPr id="17" name="TextBox 16"/>
           <p:cNvSpPr txBox="1"/>
           <p:nvPr/>
         </p:nvSpPr>
@@ -8883,6 +8866,1009 @@
 </file>
 
 <file path=ppt/slides/slide20.xml><?xml version="1.0" encoding="utf-8"?>
+<p:sld xmlns:a="http://schemas.openxmlformats.org/drawingml/2006/main" xmlns:p="http://schemas.openxmlformats.org/presentationml/2006/main" xmlns:r="http://schemas.openxmlformats.org/officeDocument/2006/relationships">
+  <p:cSld>
+    <p:bg>
+      <p:bgPr>
+        <a:solidFill>
+          <a:srgbClr val="FFFFFF"/>
+        </a:solidFill>
+        <a:effectLst/>
+      </p:bgPr>
+    </p:bg>
+    <p:spTree>
+      <p:nvGrpSpPr>
+        <p:cNvPr id="1" name=""/>
+        <p:cNvGrpSpPr/>
+        <p:nvPr/>
+      </p:nvGrpSpPr>
+      <p:grpSpPr/>
+      <p:sp>
+        <p:nvSpPr>
+          <p:cNvPr id="2" name="Rectangle 1"/>
+          <p:cNvSpPr/>
+          <p:nvPr/>
+        </p:nvSpPr>
+        <p:spPr>
+          <a:xfrm>
+            <a:off x="0" y="0"/>
+            <a:ext cx="12191695" cy="960120"/>
+          </a:xfrm>
+          <a:prstGeom prst="rect">
+            <a:avLst/>
+          </a:prstGeom>
+          <a:solidFill>
+            <a:srgbClr val="095292"/>
+          </a:solidFill>
+          <a:ln>
+            <a:noFill/>
+          </a:ln>
+        </p:spPr>
+        <p:style>
+          <a:lnRef idx="1">
+            <a:schemeClr val="accent1"/>
+          </a:lnRef>
+          <a:fillRef idx="3">
+            <a:schemeClr val="accent1"/>
+          </a:fillRef>
+          <a:effectRef idx="2">
+            <a:schemeClr val="accent1"/>
+          </a:effectRef>
+          <a:fontRef idx="minor">
+            <a:schemeClr val="lt1"/>
+          </a:fontRef>
+        </p:style>
+        <p:txBody>
+          <a:bodyPr rtlCol="0" anchor="ctr"/>
+          <a:lstStyle/>
+          <a:p>
+            <a:pPr algn="ctr"/>
+          </a:p>
+        </p:txBody>
+      </p:sp>
+      <p:sp>
+        <p:nvSpPr>
+          <p:cNvPr id="3" name="Rectangle 2"/>
+          <p:cNvSpPr/>
+          <p:nvPr/>
+        </p:nvSpPr>
+        <p:spPr>
+          <a:xfrm>
+            <a:off x="0" y="960120"/>
+            <a:ext cx="12191695" cy="41148"/>
+          </a:xfrm>
+          <a:prstGeom prst="rect">
+            <a:avLst/>
+          </a:prstGeom>
+          <a:solidFill>
+            <a:srgbClr val="FFD000"/>
+          </a:solidFill>
+          <a:ln>
+            <a:noFill/>
+          </a:ln>
+        </p:spPr>
+        <p:style>
+          <a:lnRef idx="1">
+            <a:schemeClr val="accent1"/>
+          </a:lnRef>
+          <a:fillRef idx="3">
+            <a:schemeClr val="accent1"/>
+          </a:fillRef>
+          <a:effectRef idx="2">
+            <a:schemeClr val="accent1"/>
+          </a:effectRef>
+          <a:fontRef idx="minor">
+            <a:schemeClr val="lt1"/>
+          </a:fontRef>
+        </p:style>
+        <p:txBody>
+          <a:bodyPr rtlCol="0" anchor="ctr"/>
+          <a:lstStyle/>
+          <a:p>
+            <a:pPr algn="ctr"/>
+          </a:p>
+        </p:txBody>
+      </p:sp>
+      <p:sp>
+        <p:nvSpPr>
+          <p:cNvPr id="4" name="TextBox 3"/>
+          <p:cNvSpPr txBox="1"/>
+          <p:nvPr/>
+        </p:nvSpPr>
+        <p:spPr>
+          <a:xfrm>
+            <a:off x="457200" y="164592"/>
+            <a:ext cx="11277295" cy="502920"/>
+          </a:xfrm>
+          <a:prstGeom prst="rect">
+            <a:avLst/>
+          </a:prstGeom>
+          <a:noFill/>
+        </p:spPr>
+        <p:txBody>
+          <a:bodyPr wrap="square">
+            <a:spAutoFit/>
+          </a:bodyPr>
+          <a:lstStyle/>
+          <a:p>
+            <a:r>
+              <a:rPr sz="2600" b="1" i="0">
+                <a:solidFill>
+                  <a:srgbClr val="FFFFFF"/>
+                </a:solidFill>
+                <a:latin typeface="Calibri"/>
+              </a:rPr>
+              <a:t>Criterios de exito / entregable</a:t>
+            </a:r>
+          </a:p>
+        </p:txBody>
+      </p:sp>
+      <p:sp>
+        <p:nvSpPr>
+          <p:cNvPr id="5" name="TextBox 4"/>
+          <p:cNvSpPr txBox="1"/>
+          <p:nvPr/>
+        </p:nvSpPr>
+        <p:spPr>
+          <a:xfrm>
+            <a:off x="457200" y="1170432"/>
+            <a:ext cx="11277295" cy="5230368"/>
+          </a:xfrm>
+          <a:prstGeom prst="rect">
+            <a:avLst/>
+          </a:prstGeom>
+          <a:noFill/>
+        </p:spPr>
+        <p:txBody>
+          <a:bodyPr wrap="square">
+            <a:spAutoFit/>
+          </a:bodyPr>
+          <a:lstStyle/>
+          <a:p>
+            <a:pPr>
+              <a:spcAft>
+                <a:spcPts val="800"/>
+              </a:spcAft>
+            </a:pPr>
+            <a:r>
+              <a:rPr sz="2000" b="0" i="0">
+                <a:solidFill>
+                  <a:srgbClr val="333333"/>
+                </a:solidFill>
+                <a:latin typeface="Calibri"/>
+              </a:rPr>
+              <a:t>–   </a:t>
+            </a:r>
+            <a:r>
+              <a:rPr sz="2000" b="1" i="0">
+                <a:solidFill>
+                  <a:srgbClr val="333333"/>
+                </a:solidFill>
+                <a:latin typeface="Calibri"/>
+              </a:rPr>
+              <a:t>Entregable:</a:t>
+            </a:r>
+            <a:r>
+              <a:rPr sz="2000" b="0" i="0">
+                <a:solidFill>
+                  <a:srgbClr val="333333"/>
+                </a:solidFill>
+                <a:latin typeface="Calibri"/>
+              </a:rPr>
+              <a:t> Un documento de una pagina en Google Docs con la tabla Fase / Pregunta que responde / Artefacto de VetCare / Quien lo aprueba, mas dos diagramas en draw.io (recorrido lineal y recorrido en tres vueltas) exportados a PDF y subidos a la plataforma del curso.</a:t>
+            </a:r>
+          </a:p>
+          <a:p>
+            <a:pPr>
+              <a:spcAft>
+                <a:spcPts val="800"/>
+              </a:spcAft>
+            </a:pPr>
+            <a:r>
+              <a:rPr sz="2000" b="0" i="0">
+                <a:solidFill>
+                  <a:srgbClr val="333333"/>
+                </a:solidFill>
+                <a:latin typeface="Calibri"/>
+              </a:rPr>
+              <a:t>–   </a:t>
+            </a:r>
+            <a:r>
+              <a:rPr sz="2000" b="1" i="0">
+                <a:solidFill>
+                  <a:srgbClr val="333333"/>
+                </a:solidFill>
+                <a:latin typeface="Calibri"/>
+              </a:rPr>
+              <a:t>Exito:</a:t>
+            </a:r>
+            <a:r>
+              <a:rPr sz="2000" b="0" i="0">
+                <a:solidFill>
+                  <a:srgbClr val="333333"/>
+                </a:solidFill>
+                <a:latin typeface="Calibri"/>
+              </a:rPr>
+              <a:t> La tabla tiene las cinco fases y en cada una un artefacto concreto de VetCare escrito con nombre propio, no una definicion generica de libro.</a:t>
+            </a:r>
+          </a:p>
+          <a:p>
+            <a:pPr>
+              <a:spcAft>
+                <a:spcPts val="800"/>
+              </a:spcAft>
+            </a:pPr>
+            <a:r>
+              <a:rPr sz="2000" b="0" i="0">
+                <a:solidFill>
+                  <a:srgbClr val="333333"/>
+                </a:solidFill>
+                <a:latin typeface="Calibri"/>
+              </a:rPr>
+              <a:t>–   </a:t>
+            </a:r>
+            <a:r>
+              <a:rPr sz="2000" b="1" i="0">
+                <a:solidFill>
+                  <a:srgbClr val="333333"/>
+                </a:solidFill>
+                <a:latin typeface="Calibri"/>
+              </a:rPr>
+              <a:t>Exito:</a:t>
+            </a:r>
+            <a:r>
+              <a:rPr sz="2000" b="0" i="0">
+                <a:solidFill>
+                  <a:srgbClr val="333333"/>
+                </a:solidFill>
+                <a:latin typeface="Calibri"/>
+              </a:rPr>
+              <a:t> El diagrama lineal y el diagrama en vueltas usan exactamente las mismas cinco cajas; lo unico distinto entre ellos es el recorrido.</a:t>
+            </a:r>
+          </a:p>
+          <a:p>
+            <a:pPr>
+              <a:spcAft>
+                <a:spcPts val="800"/>
+              </a:spcAft>
+            </a:pPr>
+            <a:r>
+              <a:rPr sz="2000" b="0" i="0">
+                <a:solidFill>
+                  <a:srgbClr val="333333"/>
+                </a:solidFill>
+                <a:latin typeface="Calibri"/>
+              </a:rPr>
+              <a:t>–   </a:t>
+            </a:r>
+            <a:r>
+              <a:rPr sz="2000" b="1" i="0">
+                <a:solidFill>
+                  <a:srgbClr val="333333"/>
+                </a:solidFill>
+                <a:latin typeface="Calibri"/>
+              </a:rPr>
+              <a:t>Exito:</a:t>
+            </a:r>
+            <a:r>
+              <a:rPr sz="2000" b="0" i="0">
+                <a:solidFill>
+                  <a:srgbClr val="333333"/>
+                </a:solidFill>
+                <a:latin typeface="Calibri"/>
+              </a:rPr>
+              <a:t> La fase actual del equipo esta marcada y sustentada con dos evidencias verificables del estado real de VetCare.</a:t>
+            </a:r>
+          </a:p>
+          <a:p>
+            <a:pPr>
+              <a:spcAft>
+                <a:spcPts val="800"/>
+              </a:spcAft>
+            </a:pPr>
+            <a:r>
+              <a:rPr sz="2000" b="0" i="0">
+                <a:solidFill>
+                  <a:srgbClr val="333333"/>
+                </a:solidFill>
+                <a:latin typeface="Calibri"/>
+              </a:rPr>
+              <a:t>–   </a:t>
+            </a:r>
+            <a:r>
+              <a:rPr sz="2000" b="1" i="0">
+                <a:solidFill>
+                  <a:srgbClr val="333333"/>
+                </a:solidFill>
+                <a:latin typeface="Calibri"/>
+              </a:rPr>
+              <a:t>Exito:</a:t>
+            </a:r>
+            <a:r>
+              <a:rPr sz="2000" b="0" i="0">
+                <a:solidFill>
+                  <a:srgbClr val="333333"/>
+                </a:solidFill>
+                <a:latin typeface="Calibri"/>
+              </a:rPr>
+              <a:t> El parrafo final distingue con hechos concretos cuando termina el proyecto y cuando terminaria el producto, e incluye un ejemplo de mantenimiento.</a:t>
+            </a:r>
+          </a:p>
+          <a:p>
+            <a:pPr>
+              <a:spcAft>
+                <a:spcPts val="800"/>
+              </a:spcAft>
+            </a:pPr>
+            <a:r>
+              <a:rPr sz="2000" b="0" i="0">
+                <a:solidFill>
+                  <a:srgbClr val="333333"/>
+                </a:solidFill>
+                <a:latin typeface="Calibri"/>
+              </a:rPr>
+              <a:t>–   </a:t>
+            </a:r>
+            <a:r>
+              <a:rPr sz="2000" b="1" i="0">
+                <a:solidFill>
+                  <a:srgbClr val="333333"/>
+                </a:solidFill>
+                <a:latin typeface="Calibri"/>
+              </a:rPr>
+              <a:t>Entrega en la plataforma del curso</a:t>
+            </a:r>
+            <a:r>
+              <a:rPr sz="2000" b="0" i="0">
+                <a:solidFill>
+                  <a:srgbClr val="333333"/>
+                </a:solidFill>
+                <a:latin typeface="Calibri"/>
+              </a:rPr>
+              <a:t> — en la fecha que indique el docente.</a:t>
+            </a:r>
+          </a:p>
+        </p:txBody>
+      </p:sp>
+      <p:sp>
+        <p:nvSpPr>
+          <p:cNvPr id="6" name="TextBox 5"/>
+          <p:cNvSpPr txBox="1"/>
+          <p:nvPr/>
+        </p:nvSpPr>
+        <p:spPr>
+          <a:xfrm>
+            <a:off x="11185855" y="6473952"/>
+            <a:ext cx="640080" cy="274320"/>
+          </a:xfrm>
+          <a:prstGeom prst="rect">
+            <a:avLst/>
+          </a:prstGeom>
+          <a:noFill/>
+        </p:spPr>
+        <p:txBody>
+          <a:bodyPr wrap="square">
+            <a:spAutoFit/>
+          </a:bodyPr>
+          <a:lstStyle/>
+          <a:p>
+            <a:pPr algn="r"/>
+            <a:r>
+              <a:rPr sz="1100" b="0" i="0">
+                <a:solidFill>
+                  <a:srgbClr val="666666"/>
+                </a:solidFill>
+                <a:latin typeface="Calibri"/>
+              </a:rPr>
+              <a:t>20</a:t>
+            </a:r>
+          </a:p>
+        </p:txBody>
+      </p:sp>
+    </p:spTree>
+  </p:cSld>
+  <p:clrMapOvr>
+    <a:masterClrMapping/>
+  </p:clrMapOvr>
+</p:sld>
+</file>
+
+<file path=ppt/slides/slide21.xml><?xml version="1.0" encoding="utf-8"?>
+<p:sld xmlns:a="http://schemas.openxmlformats.org/drawingml/2006/main" xmlns:p="http://schemas.openxmlformats.org/presentationml/2006/main" xmlns:r="http://schemas.openxmlformats.org/officeDocument/2006/relationships">
+  <p:cSld>
+    <p:bg>
+      <p:bgPr>
+        <a:solidFill>
+          <a:srgbClr val="FFFFFF"/>
+        </a:solidFill>
+        <a:effectLst/>
+      </p:bgPr>
+    </p:bg>
+    <p:spTree>
+      <p:nvGrpSpPr>
+        <p:cNvPr id="1" name=""/>
+        <p:cNvGrpSpPr/>
+        <p:nvPr/>
+      </p:nvGrpSpPr>
+      <p:grpSpPr/>
+      <p:sp>
+        <p:nvSpPr>
+          <p:cNvPr id="2" name="Rectangle 1"/>
+          <p:cNvSpPr/>
+          <p:nvPr/>
+        </p:nvSpPr>
+        <p:spPr>
+          <a:xfrm>
+            <a:off x="0" y="0"/>
+            <a:ext cx="12191695" cy="960120"/>
+          </a:xfrm>
+          <a:prstGeom prst="rect">
+            <a:avLst/>
+          </a:prstGeom>
+          <a:solidFill>
+            <a:srgbClr val="095292"/>
+          </a:solidFill>
+          <a:ln>
+            <a:noFill/>
+          </a:ln>
+        </p:spPr>
+        <p:style>
+          <a:lnRef idx="1">
+            <a:schemeClr val="accent1"/>
+          </a:lnRef>
+          <a:fillRef idx="3">
+            <a:schemeClr val="accent1"/>
+          </a:fillRef>
+          <a:effectRef idx="2">
+            <a:schemeClr val="accent1"/>
+          </a:effectRef>
+          <a:fontRef idx="minor">
+            <a:schemeClr val="lt1"/>
+          </a:fontRef>
+        </p:style>
+        <p:txBody>
+          <a:bodyPr rtlCol="0" anchor="ctr"/>
+          <a:lstStyle/>
+          <a:p>
+            <a:pPr algn="ctr"/>
+          </a:p>
+        </p:txBody>
+      </p:sp>
+      <p:sp>
+        <p:nvSpPr>
+          <p:cNvPr id="3" name="Rectangle 2"/>
+          <p:cNvSpPr/>
+          <p:nvPr/>
+        </p:nvSpPr>
+        <p:spPr>
+          <a:xfrm>
+            <a:off x="0" y="960120"/>
+            <a:ext cx="12191695" cy="41148"/>
+          </a:xfrm>
+          <a:prstGeom prst="rect">
+            <a:avLst/>
+          </a:prstGeom>
+          <a:solidFill>
+            <a:srgbClr val="FFD000"/>
+          </a:solidFill>
+          <a:ln>
+            <a:noFill/>
+          </a:ln>
+        </p:spPr>
+        <p:style>
+          <a:lnRef idx="1">
+            <a:schemeClr val="accent1"/>
+          </a:lnRef>
+          <a:fillRef idx="3">
+            <a:schemeClr val="accent1"/>
+          </a:fillRef>
+          <a:effectRef idx="2">
+            <a:schemeClr val="accent1"/>
+          </a:effectRef>
+          <a:fontRef idx="minor">
+            <a:schemeClr val="lt1"/>
+          </a:fontRef>
+        </p:style>
+        <p:txBody>
+          <a:bodyPr rtlCol="0" anchor="ctr"/>
+          <a:lstStyle/>
+          <a:p>
+            <a:pPr algn="ctr"/>
+          </a:p>
+        </p:txBody>
+      </p:sp>
+      <p:sp>
+        <p:nvSpPr>
+          <p:cNvPr id="4" name="TextBox 3"/>
+          <p:cNvSpPr txBox="1"/>
+          <p:nvPr/>
+        </p:nvSpPr>
+        <p:spPr>
+          <a:xfrm>
+            <a:off x="457200" y="164592"/>
+            <a:ext cx="11277295" cy="502920"/>
+          </a:xfrm>
+          <a:prstGeom prst="rect">
+            <a:avLst/>
+          </a:prstGeom>
+          <a:noFill/>
+        </p:spPr>
+        <p:txBody>
+          <a:bodyPr wrap="square">
+            <a:spAutoFit/>
+          </a:bodyPr>
+          <a:lstStyle/>
+          <a:p>
+            <a:r>
+              <a:rPr sz="2600" b="1" i="0">
+                <a:solidFill>
+                  <a:srgbClr val="FFFFFF"/>
+                </a:solidFill>
+                <a:latin typeface="Calibri"/>
+              </a:rPr>
+              <a:t>Para el PI esta semana</a:t>
+            </a:r>
+          </a:p>
+        </p:txBody>
+      </p:sp>
+      <p:sp>
+        <p:nvSpPr>
+          <p:cNvPr id="5" name="Rounded Rectangle 4"/>
+          <p:cNvSpPr/>
+          <p:nvPr/>
+        </p:nvSpPr>
+        <p:spPr>
+          <a:xfrm>
+            <a:off x="457200" y="1261872"/>
+            <a:ext cx="11277295" cy="1051560"/>
+          </a:xfrm>
+          <a:prstGeom prst="roundRect">
+            <a:avLst>
+              <a:gd name="adj" fmla="val 12000"/>
+            </a:avLst>
+          </a:prstGeom>
+          <a:solidFill>
+            <a:srgbClr val="E8F4FA"/>
+          </a:solidFill>
+          <a:ln>
+            <a:noFill/>
+          </a:ln>
+        </p:spPr>
+        <p:style>
+          <a:lnRef idx="1">
+            <a:schemeClr val="accent1"/>
+          </a:lnRef>
+          <a:fillRef idx="3">
+            <a:schemeClr val="accent1"/>
+          </a:fillRef>
+          <a:effectRef idx="2">
+            <a:schemeClr val="accent1"/>
+          </a:effectRef>
+          <a:fontRef idx="minor">
+            <a:schemeClr val="lt1"/>
+          </a:fontRef>
+        </p:style>
+        <p:txBody>
+          <a:bodyPr rtlCol="0" anchor="ctr"/>
+          <a:lstStyle/>
+          <a:p>
+            <a:pPr algn="ctr"/>
+          </a:p>
+        </p:txBody>
+      </p:sp>
+      <p:sp>
+        <p:nvSpPr>
+          <p:cNvPr id="6" name="Rectangle 5"/>
+          <p:cNvSpPr/>
+          <p:nvPr/>
+        </p:nvSpPr>
+        <p:spPr>
+          <a:xfrm>
+            <a:off x="457200" y="1261872"/>
+            <a:ext cx="128016" cy="1051560"/>
+          </a:xfrm>
+          <a:prstGeom prst="rect">
+            <a:avLst/>
+          </a:prstGeom>
+          <a:solidFill>
+            <a:srgbClr val="269CCB"/>
+          </a:solidFill>
+          <a:ln>
+            <a:noFill/>
+          </a:ln>
+        </p:spPr>
+        <p:style>
+          <a:lnRef idx="1">
+            <a:schemeClr val="accent1"/>
+          </a:lnRef>
+          <a:fillRef idx="3">
+            <a:schemeClr val="accent1"/>
+          </a:fillRef>
+          <a:effectRef idx="2">
+            <a:schemeClr val="accent1"/>
+          </a:effectRef>
+          <a:fontRef idx="minor">
+            <a:schemeClr val="lt1"/>
+          </a:fontRef>
+        </p:style>
+        <p:txBody>
+          <a:bodyPr rtlCol="0" anchor="ctr"/>
+          <a:lstStyle/>
+          <a:p>
+            <a:pPr algn="ctr"/>
+          </a:p>
+        </p:txBody>
+      </p:sp>
+      <p:sp>
+        <p:nvSpPr>
+          <p:cNvPr id="7" name="TextBox 6"/>
+          <p:cNvSpPr txBox="1"/>
+          <p:nvPr/>
+        </p:nvSpPr>
+        <p:spPr>
+          <a:xfrm>
+            <a:off x="777240" y="1399031"/>
+            <a:ext cx="10774375" cy="822959"/>
+          </a:xfrm>
+          <a:prstGeom prst="rect">
+            <a:avLst/>
+          </a:prstGeom>
+          <a:noFill/>
+        </p:spPr>
+        <p:txBody>
+          <a:bodyPr wrap="square">
+            <a:spAutoFit/>
+          </a:bodyPr>
+          <a:lstStyle/>
+          <a:p>
+            <a:r>
+              <a:rPr sz="1200" b="1" i="0">
+                <a:solidFill>
+                  <a:srgbClr val="269CCB"/>
+                </a:solidFill>
+                <a:latin typeface="Calibri"/>
+              </a:rPr>
+              <a:t>Info</a:t>
+            </a:r>
+          </a:p>
+          <a:p>
+            <a:pPr>
+              <a:spcBef>
+                <a:spcPts val="400"/>
+              </a:spcBef>
+            </a:pPr>
+            <a:r>
+              <a:rPr sz="1400" b="0" i="0">
+                <a:solidFill>
+                  <a:srgbClr val="333333"/>
+                </a:solidFill>
+                <a:latin typeface="Calibri"/>
+              </a:rPr>
+              <a:t>Hito: Queda listo el mapa de fases de VetCare con el artefacto concreto que produce cada fase y la marca de en cual esta parado el equipo hoy.</a:t>
+            </a:r>
+          </a:p>
+        </p:txBody>
+      </p:sp>
+      <p:sp>
+        <p:nvSpPr>
+          <p:cNvPr id="8" name="Rounded Rectangle 7"/>
+          <p:cNvSpPr/>
+          <p:nvPr/>
+        </p:nvSpPr>
+        <p:spPr>
+          <a:xfrm>
+            <a:off x="457200" y="2478024"/>
+            <a:ext cx="11277295" cy="1051560"/>
+          </a:xfrm>
+          <a:prstGeom prst="roundRect">
+            <a:avLst>
+              <a:gd name="adj" fmla="val 12000"/>
+            </a:avLst>
+          </a:prstGeom>
+          <a:solidFill>
+            <a:srgbClr val="FFF8E1"/>
+          </a:solidFill>
+          <a:ln>
+            <a:noFill/>
+          </a:ln>
+        </p:spPr>
+        <p:style>
+          <a:lnRef idx="1">
+            <a:schemeClr val="accent1"/>
+          </a:lnRef>
+          <a:fillRef idx="3">
+            <a:schemeClr val="accent1"/>
+          </a:fillRef>
+          <a:effectRef idx="2">
+            <a:schemeClr val="accent1"/>
+          </a:effectRef>
+          <a:fontRef idx="minor">
+            <a:schemeClr val="lt1"/>
+          </a:fontRef>
+        </p:style>
+        <p:txBody>
+          <a:bodyPr rtlCol="0" anchor="ctr"/>
+          <a:lstStyle/>
+          <a:p>
+            <a:pPr algn="ctr"/>
+          </a:p>
+        </p:txBody>
+      </p:sp>
+      <p:sp>
+        <p:nvSpPr>
+          <p:cNvPr id="9" name="Rectangle 8"/>
+          <p:cNvSpPr/>
+          <p:nvPr/>
+        </p:nvSpPr>
+        <p:spPr>
+          <a:xfrm>
+            <a:off x="457200" y="2478024"/>
+            <a:ext cx="128016" cy="1051560"/>
+          </a:xfrm>
+          <a:prstGeom prst="rect">
+            <a:avLst/>
+          </a:prstGeom>
+          <a:solidFill>
+            <a:srgbClr val="FFD000"/>
+          </a:solidFill>
+          <a:ln>
+            <a:noFill/>
+          </a:ln>
+        </p:spPr>
+        <p:style>
+          <a:lnRef idx="1">
+            <a:schemeClr val="accent1"/>
+          </a:lnRef>
+          <a:fillRef idx="3">
+            <a:schemeClr val="accent1"/>
+          </a:fillRef>
+          <a:effectRef idx="2">
+            <a:schemeClr val="accent1"/>
+          </a:effectRef>
+          <a:fontRef idx="minor">
+            <a:schemeClr val="lt1"/>
+          </a:fontRef>
+        </p:style>
+        <p:txBody>
+          <a:bodyPr rtlCol="0" anchor="ctr"/>
+          <a:lstStyle/>
+          <a:p>
+            <a:pPr algn="ctr"/>
+          </a:p>
+        </p:txBody>
+      </p:sp>
+      <p:sp>
+        <p:nvSpPr>
+          <p:cNvPr id="10" name="TextBox 9"/>
+          <p:cNvSpPr txBox="1"/>
+          <p:nvPr/>
+        </p:nvSpPr>
+        <p:spPr>
+          <a:xfrm>
+            <a:off x="777240" y="2615184"/>
+            <a:ext cx="10774375" cy="822959"/>
+          </a:xfrm>
+          <a:prstGeom prst="rect">
+            <a:avLst/>
+          </a:prstGeom>
+          <a:noFill/>
+        </p:spPr>
+        <p:txBody>
+          <a:bodyPr wrap="square">
+            <a:spAutoFit/>
+          </a:bodyPr>
+          <a:lstStyle/>
+          <a:p>
+            <a:r>
+              <a:rPr sz="1200" b="1" i="0">
+                <a:solidFill>
+                  <a:srgbClr val="FFD000"/>
+                </a:solidFill>
+                <a:latin typeface="Calibri"/>
+              </a:rPr>
+              <a:t>Aclaración</a:t>
+            </a:r>
+          </a:p>
+          <a:p>
+            <a:pPr>
+              <a:spcBef>
+                <a:spcPts val="400"/>
+              </a:spcBef>
+            </a:pPr>
+            <a:r>
+              <a:rPr sz="1400" b="0" i="0">
+                <a:solidFill>
+                  <a:srgbClr val="333333"/>
+                </a:solidFill>
+                <a:latin typeface="Calibri"/>
+              </a:rPr>
+              <a:t>Enunciado completo: Clases/Proyecto Integrador/ (VetCare).</a:t>
+            </a:r>
+          </a:p>
+        </p:txBody>
+      </p:sp>
+      <p:sp>
+        <p:nvSpPr>
+          <p:cNvPr id="11" name="Rounded Rectangle 10"/>
+          <p:cNvSpPr/>
+          <p:nvPr/>
+        </p:nvSpPr>
+        <p:spPr>
+          <a:xfrm>
+            <a:off x="457200" y="3694176"/>
+            <a:ext cx="11277295" cy="1051560"/>
+          </a:xfrm>
+          <a:prstGeom prst="roundRect">
+            <a:avLst>
+              <a:gd name="adj" fmla="val 12000"/>
+            </a:avLst>
+          </a:prstGeom>
+          <a:solidFill>
+            <a:srgbClr val="FBE4E4"/>
+          </a:solidFill>
+          <a:ln>
+            <a:noFill/>
+          </a:ln>
+        </p:spPr>
+        <p:style>
+          <a:lnRef idx="1">
+            <a:schemeClr val="accent1"/>
+          </a:lnRef>
+          <a:fillRef idx="3">
+            <a:schemeClr val="accent1"/>
+          </a:fillRef>
+          <a:effectRef idx="2">
+            <a:schemeClr val="accent1"/>
+          </a:effectRef>
+          <a:fontRef idx="minor">
+            <a:schemeClr val="lt1"/>
+          </a:fontRef>
+        </p:style>
+        <p:txBody>
+          <a:bodyPr rtlCol="0" anchor="ctr"/>
+          <a:lstStyle/>
+          <a:p>
+            <a:pPr algn="ctr"/>
+          </a:p>
+        </p:txBody>
+      </p:sp>
+      <p:sp>
+        <p:nvSpPr>
+          <p:cNvPr id="12" name="Rectangle 11"/>
+          <p:cNvSpPr/>
+          <p:nvPr/>
+        </p:nvSpPr>
+        <p:spPr>
+          <a:xfrm>
+            <a:off x="457200" y="3694176"/>
+            <a:ext cx="128016" cy="1051560"/>
+          </a:xfrm>
+          <a:prstGeom prst="rect">
+            <a:avLst/>
+          </a:prstGeom>
+          <a:solidFill>
+            <a:srgbClr val="A02030"/>
+          </a:solidFill>
+          <a:ln>
+            <a:noFill/>
+          </a:ln>
+        </p:spPr>
+        <p:style>
+          <a:lnRef idx="1">
+            <a:schemeClr val="accent1"/>
+          </a:lnRef>
+          <a:fillRef idx="3">
+            <a:schemeClr val="accent1"/>
+          </a:fillRef>
+          <a:effectRef idx="2">
+            <a:schemeClr val="accent1"/>
+          </a:effectRef>
+          <a:fontRef idx="minor">
+            <a:schemeClr val="lt1"/>
+          </a:fontRef>
+        </p:style>
+        <p:txBody>
+          <a:bodyPr rtlCol="0" anchor="ctr"/>
+          <a:lstStyle/>
+          <a:p>
+            <a:pPr algn="ctr"/>
+          </a:p>
+        </p:txBody>
+      </p:sp>
+      <p:sp>
+        <p:nvSpPr>
+          <p:cNvPr id="13" name="TextBox 12"/>
+          <p:cNvSpPr txBox="1"/>
+          <p:nvPr/>
+        </p:nvSpPr>
+        <p:spPr>
+          <a:xfrm>
+            <a:off x="777240" y="3831336"/>
+            <a:ext cx="10774375" cy="822959"/>
+          </a:xfrm>
+          <a:prstGeom prst="rect">
+            <a:avLst/>
+          </a:prstGeom>
+          <a:noFill/>
+        </p:spPr>
+        <p:txBody>
+          <a:bodyPr wrap="square">
+            <a:spAutoFit/>
+          </a:bodyPr>
+          <a:lstStyle/>
+          <a:p>
+            <a:r>
+              <a:rPr sz="1200" b="1" i="0">
+                <a:solidFill>
+                  <a:srgbClr val="A02030"/>
+                </a:solidFill>
+                <a:latin typeface="Calibri"/>
+              </a:rPr>
+              <a:t>Atención</a:t>
+            </a:r>
+          </a:p>
+          <a:p>
+            <a:pPr>
+              <a:spcBef>
+                <a:spcPts val="400"/>
+              </a:spcBef>
+            </a:pPr>
+            <a:r>
+              <a:rPr sz="1400" b="0" i="0">
+                <a:solidFill>
+                  <a:srgbClr val="333333"/>
+                </a:solidFill>
+                <a:latin typeface="Calibri"/>
+              </a:rPr>
+              <a:t>Entrega del taller, si el docente lo asigna · en la fecha que indique el docente.</a:t>
+            </a:r>
+          </a:p>
+        </p:txBody>
+      </p:sp>
+      <p:sp>
+        <p:nvSpPr>
+          <p:cNvPr id="14" name="TextBox 13"/>
+          <p:cNvSpPr txBox="1"/>
+          <p:nvPr/>
+        </p:nvSpPr>
+        <p:spPr>
+          <a:xfrm>
+            <a:off x="11185855" y="6473952"/>
+            <a:ext cx="640080" cy="274320"/>
+          </a:xfrm>
+          <a:prstGeom prst="rect">
+            <a:avLst/>
+          </a:prstGeom>
+          <a:noFill/>
+        </p:spPr>
+        <p:txBody>
+          <a:bodyPr wrap="square">
+            <a:spAutoFit/>
+          </a:bodyPr>
+          <a:lstStyle/>
+          <a:p>
+            <a:pPr algn="r"/>
+            <a:r>
+              <a:rPr sz="1100" b="0" i="0">
+                <a:solidFill>
+                  <a:srgbClr val="666666"/>
+                </a:solidFill>
+                <a:latin typeface="Calibri"/>
+              </a:rPr>
+              <a:t>21</a:t>
+            </a:r>
+          </a:p>
+        </p:txBody>
+      </p:sp>
+    </p:spTree>
+  </p:cSld>
+  <p:clrMapOvr>
+    <a:masterClrMapping/>
+  </p:clrMapOvr>
+</p:sld>
+</file>
+
+<file path=ppt/slides/slide22.xml><?xml version="1.0" encoding="utf-8"?>
 <p:sld xmlns:a="http://schemas.openxmlformats.org/drawingml/2006/main" xmlns:p="http://schemas.openxmlformats.org/presentationml/2006/main" xmlns:r="http://schemas.openxmlformats.org/officeDocument/2006/relationships">
   <p:cSld>
     <p:bg>

--- a/Seminario de Sistemas/Clases/Clase 2 - Ciclos de vida del software/Presentacion.pptx
+++ b/Seminario de Sistemas/Clases/Clase 2 - Ciclos de vida del software/Presentacion.pptx
@@ -9,24 +9,17 @@
     <p:sldId id="257" r:id="rId8"/>
     <p:sldId id="258" r:id="rId9"/>
     <p:sldId id="259" r:id="rId10"/>
-    <p:sldId id="260" r:id="rId11"/>
-    <p:sldId id="261" r:id="rId12"/>
-    <p:sldId id="262" r:id="rId13"/>
-    <p:sldId id="263" r:id="rId14"/>
-    <p:sldId id="264" r:id="rId15"/>
-    <p:sldId id="265" r:id="rId16"/>
-    <p:sldId id="266" r:id="rId17"/>
-    <p:sldId id="267" r:id="rId18"/>
-    <p:sldId id="268" r:id="rId19"/>
-    <p:sldId id="269" r:id="rId20"/>
-    <p:sldId id="270" r:id="rId21"/>
-    <p:sldId id="271" r:id="rId22"/>
-    <p:sldId id="272" r:id="rId23"/>
-    <p:sldId id="273" r:id="rId24"/>
-    <p:sldId id="274" r:id="rId25"/>
-    <p:sldId id="275" r:id="rId26"/>
-    <p:sldId id="276" r:id="rId27"/>
-    <p:sldId id="277" r:id="rId28"/>
+    <p:sldId id="260" r:id="rId12"/>
+    <p:sldId id="261" r:id="rId13"/>
+    <p:sldId id="262" r:id="rId14"/>
+    <p:sldId id="263" r:id="rId15"/>
+    <p:sldId id="264" r:id="rId16"/>
+    <p:sldId id="265" r:id="rId17"/>
+    <p:sldId id="266" r:id="rId18"/>
+    <p:sldId id="267" r:id="rId19"/>
+    <p:sldId id="268" r:id="rId20"/>
+    <p:sldId id="269" r:id="rId21"/>
+    <p:sldId id="270" r:id="rId22"/>
   </p:sldIdLst>
   <p:sldSz cx="12191695" cy="6858000" type="screen4x3"/>
   <p:notesSz cx="6858000" cy="9144000"/>
@@ -126,6 +119,678 @@
     </a:lvl9pPr>
   </p:defaultTextStyle>
 </p:presentation>
+</file>
+
+<file path=ppt/notesMasters/notesMaster1.xml><?xml version="1.0" encoding="utf-8"?>
+<p:notesMaster xmlns:a="http://schemas.openxmlformats.org/drawingml/2006/main" xmlns:p="http://schemas.openxmlformats.org/presentationml/2006/main" xmlns:r="http://schemas.openxmlformats.org/officeDocument/2006/relationships">
+  <p:cSld>
+    <p:bg>
+      <p:bgRef idx="1001">
+        <a:schemeClr val="bg1"/>
+      </p:bgRef>
+    </p:bg>
+    <p:spTree>
+      <p:nvGrpSpPr>
+        <p:cNvPr id="1" name=""/>
+        <p:cNvGrpSpPr/>
+        <p:nvPr/>
+      </p:nvGrpSpPr>
+      <p:grpSpPr>
+        <a:xfrm>
+          <a:off x="0" y="0"/>
+          <a:ext cx="0" cy="0"/>
+          <a:chOff x="0" y="0"/>
+          <a:chExt cx="0" cy="0"/>
+        </a:xfrm>
+      </p:grpSpPr>
+      <p:sp>
+        <p:nvSpPr>
+          <p:cNvPr id="2" name="Header Placeholder 1"/>
+          <p:cNvSpPr>
+            <a:spLocks noGrp="1"/>
+          </p:cNvSpPr>
+          <p:nvPr>
+            <p:ph type="hdr" sz="quarter"/>
+          </p:nvPr>
+        </p:nvSpPr>
+        <p:spPr>
+          <a:xfrm>
+            <a:off x="0" y="0"/>
+            <a:ext cx="2971800" cy="457200"/>
+          </a:xfrm>
+          <a:prstGeom prst="rect">
+            <a:avLst/>
+          </a:prstGeom>
+        </p:spPr>
+        <p:txBody>
+          <a:bodyPr vert="horz" lIns="91440" tIns="45720" rIns="91440" bIns="45720" rtlCol="0"/>
+          <a:lstStyle>
+            <a:lvl1pPr algn="l">
+              <a:defRPr sz="1200"/>
+            </a:lvl1pPr>
+          </a:lstStyle>
+          <a:p>
+            <a:endParaRPr lang="en-US"/>
+          </a:p>
+        </p:txBody>
+      </p:sp>
+      <p:sp>
+        <p:nvSpPr>
+          <p:cNvPr id="3" name="Date Placeholder 2"/>
+          <p:cNvSpPr>
+            <a:spLocks noGrp="1"/>
+          </p:cNvSpPr>
+          <p:nvPr>
+            <p:ph type="dt" idx="1"/>
+          </p:nvPr>
+        </p:nvSpPr>
+        <p:spPr>
+          <a:xfrm>
+            <a:off x="3884613" y="0"/>
+            <a:ext cx="2971800" cy="457200"/>
+          </a:xfrm>
+          <a:prstGeom prst="rect">
+            <a:avLst/>
+          </a:prstGeom>
+        </p:spPr>
+        <p:txBody>
+          <a:bodyPr vert="horz" lIns="91440" tIns="45720" rIns="91440" bIns="45720" rtlCol="0"/>
+          <a:lstStyle>
+            <a:lvl1pPr algn="r">
+              <a:defRPr sz="1200"/>
+            </a:lvl1pPr>
+          </a:lstStyle>
+          <a:p>
+            <a:fld id="{0F89C1C7-3DCD-1040-A9CF-14679D8B5DDD}" type="datetimeFigureOut">
+              <a:rPr lang="en-US" smtClean="0"/>
+              <a:t>10/17/16</a:t>
+            </a:fld>
+            <a:endParaRPr lang="en-US"/>
+          </a:p>
+        </p:txBody>
+      </p:sp>
+      <p:sp>
+        <p:nvSpPr>
+          <p:cNvPr id="4" name="Slide Image Placeholder 3"/>
+          <p:cNvSpPr>
+            <a:spLocks noGrp="1" noRot="1" noChangeAspect="1"/>
+          </p:cNvSpPr>
+          <p:nvPr>
+            <p:ph type="sldImg" idx="2"/>
+          </p:nvPr>
+        </p:nvSpPr>
+        <p:spPr>
+          <a:xfrm>
+            <a:off x="1143000" y="685800"/>
+            <a:ext cx="4572000" cy="3429000"/>
+          </a:xfrm>
+          <a:prstGeom prst="rect">
+            <a:avLst/>
+          </a:prstGeom>
+          <a:noFill/>
+          <a:ln w="12700">
+            <a:solidFill>
+              <a:prstClr val="black"/>
+            </a:solidFill>
+          </a:ln>
+        </p:spPr>
+        <p:txBody>
+          <a:bodyPr vert="horz" lIns="91440" tIns="45720" rIns="91440" bIns="45720" rtlCol="0" anchor="ctr"/>
+          <a:lstStyle/>
+          <a:p>
+            <a:endParaRPr lang="en-US"/>
+          </a:p>
+        </p:txBody>
+      </p:sp>
+      <p:sp>
+        <p:nvSpPr>
+          <p:cNvPr id="5" name="Notes Placeholder 4"/>
+          <p:cNvSpPr>
+            <a:spLocks noGrp="1"/>
+          </p:cNvSpPr>
+          <p:nvPr>
+            <p:ph type="body" sz="quarter" idx="3"/>
+          </p:nvPr>
+        </p:nvSpPr>
+        <p:spPr>
+          <a:xfrm>
+            <a:off x="685800" y="4343400"/>
+            <a:ext cx="5486400" cy="4114800"/>
+          </a:xfrm>
+          <a:prstGeom prst="rect">
+            <a:avLst/>
+          </a:prstGeom>
+        </p:spPr>
+        <p:txBody>
+          <a:bodyPr vert="horz" lIns="91440" tIns="45720" rIns="91440" bIns="45720" rtlCol="0"/>
+          <a:lstStyle/>
+          <a:p>
+            <a:pPr lvl="0"/>
+            <a:r>
+              <a:rPr lang="en-US" smtClean="0"/>
+              <a:t>Click to edit Master text styles</a:t>
+            </a:r>
+          </a:p>
+          <a:p>
+            <a:pPr lvl="1"/>
+            <a:r>
+              <a:rPr lang="en-US" smtClean="0"/>
+              <a:t>Second level</a:t>
+            </a:r>
+          </a:p>
+          <a:p>
+            <a:pPr lvl="2"/>
+            <a:r>
+              <a:rPr lang="en-US" smtClean="0"/>
+              <a:t>Third level</a:t>
+            </a:r>
+          </a:p>
+          <a:p>
+            <a:pPr lvl="3"/>
+            <a:r>
+              <a:rPr lang="en-US" smtClean="0"/>
+              <a:t>Fourth level</a:t>
+            </a:r>
+          </a:p>
+          <a:p>
+            <a:pPr lvl="4"/>
+            <a:r>
+              <a:rPr lang="en-US" smtClean="0"/>
+              <a:t>Fifth level</a:t>
+            </a:r>
+            <a:endParaRPr lang="en-US"/>
+          </a:p>
+        </p:txBody>
+      </p:sp>
+      <p:sp>
+        <p:nvSpPr>
+          <p:cNvPr id="6" name="Footer Placeholder 5"/>
+          <p:cNvSpPr>
+            <a:spLocks noGrp="1"/>
+          </p:cNvSpPr>
+          <p:nvPr>
+            <p:ph type="ftr" sz="quarter" idx="4"/>
+          </p:nvPr>
+        </p:nvSpPr>
+        <p:spPr>
+          <a:xfrm>
+            <a:off x="0" y="8685213"/>
+            <a:ext cx="2971800" cy="457200"/>
+          </a:xfrm>
+          <a:prstGeom prst="rect">
+            <a:avLst/>
+          </a:prstGeom>
+        </p:spPr>
+        <p:txBody>
+          <a:bodyPr vert="horz" lIns="91440" tIns="45720" rIns="91440" bIns="45720" rtlCol="0" anchor="b"/>
+          <a:lstStyle>
+            <a:lvl1pPr algn="l">
+              <a:defRPr sz="1200"/>
+            </a:lvl1pPr>
+          </a:lstStyle>
+          <a:p>
+            <a:endParaRPr lang="en-US"/>
+          </a:p>
+        </p:txBody>
+      </p:sp>
+      <p:sp>
+        <p:nvSpPr>
+          <p:cNvPr id="7" name="Slide Number Placeholder 6"/>
+          <p:cNvSpPr>
+            <a:spLocks noGrp="1"/>
+          </p:cNvSpPr>
+          <p:nvPr>
+            <p:ph type="sldNum" sz="quarter" idx="5"/>
+          </p:nvPr>
+        </p:nvSpPr>
+        <p:spPr>
+          <a:xfrm>
+            <a:off x="3884613" y="8685213"/>
+            <a:ext cx="2971800" cy="457200"/>
+          </a:xfrm>
+          <a:prstGeom prst="rect">
+            <a:avLst/>
+          </a:prstGeom>
+        </p:spPr>
+        <p:txBody>
+          <a:bodyPr vert="horz" lIns="91440" tIns="45720" rIns="91440" bIns="45720" rtlCol="0" anchor="b"/>
+          <a:lstStyle>
+            <a:lvl1pPr algn="r">
+              <a:defRPr sz="1200"/>
+            </a:lvl1pPr>
+          </a:lstStyle>
+          <a:p>
+            <a:fld id="{BB5E49A5-4136-284D-997B-48E1D791AD67}" type="slidenum">
+              <a:rPr lang="en-US" smtClean="0"/>
+              <a:t>‹#›</a:t>
+            </a:fld>
+            <a:endParaRPr lang="en-US"/>
+          </a:p>
+        </p:txBody>
+      </p:sp>
+    </p:spTree>
+    <p:extLst>
+      <p:ext uri="{BB962C8B-B14F-4D97-AF65-F5344CB8AC3E}">
+        <p14:creationId xmlns:p14="http://schemas.microsoft.com/office/powerpoint/2010/main" val="2623252185"/>
+      </p:ext>
+    </p:extLst>
+  </p:cSld>
+  <p:clrMap bg1="lt1" tx1="dk1" bg2="lt2" tx2="dk2" accent1="accent1" accent2="accent2" accent3="accent3" accent4="accent4" accent5="accent5" accent6="accent6" hlink="hlink" folHlink="folHlink"/>
+  <p:notesStyle>
+    <a:lvl1pPr marL="0" algn="l" defTabSz="457200" rtl="0" eaLnBrk="1" latinLnBrk="0" hangingPunct="1">
+      <a:defRPr sz="1200" kern="1200">
+        <a:solidFill>
+          <a:schemeClr val="tx1"/>
+        </a:solidFill>
+        <a:latin typeface="+mn-lt"/>
+        <a:ea typeface="+mn-ea"/>
+        <a:cs typeface="+mn-cs"/>
+      </a:defRPr>
+    </a:lvl1pPr>
+    <a:lvl2pPr marL="457200" algn="l" defTabSz="457200" rtl="0" eaLnBrk="1" latinLnBrk="0" hangingPunct="1">
+      <a:defRPr sz="1200" kern="1200">
+        <a:solidFill>
+          <a:schemeClr val="tx1"/>
+        </a:solidFill>
+        <a:latin typeface="+mn-lt"/>
+        <a:ea typeface="+mn-ea"/>
+        <a:cs typeface="+mn-cs"/>
+      </a:defRPr>
+    </a:lvl2pPr>
+    <a:lvl3pPr marL="914400" algn="l" defTabSz="457200" rtl="0" eaLnBrk="1" latinLnBrk="0" hangingPunct="1">
+      <a:defRPr sz="1200" kern="1200">
+        <a:solidFill>
+          <a:schemeClr val="tx1"/>
+        </a:solidFill>
+        <a:latin typeface="+mn-lt"/>
+        <a:ea typeface="+mn-ea"/>
+        <a:cs typeface="+mn-cs"/>
+      </a:defRPr>
+    </a:lvl3pPr>
+    <a:lvl4pPr marL="1371600" algn="l" defTabSz="457200" rtl="0" eaLnBrk="1" latinLnBrk="0" hangingPunct="1">
+      <a:defRPr sz="1200" kern="1200">
+        <a:solidFill>
+          <a:schemeClr val="tx1"/>
+        </a:solidFill>
+        <a:latin typeface="+mn-lt"/>
+        <a:ea typeface="+mn-ea"/>
+        <a:cs typeface="+mn-cs"/>
+      </a:defRPr>
+    </a:lvl4pPr>
+    <a:lvl5pPr marL="1828800" algn="l" defTabSz="457200" rtl="0" eaLnBrk="1" latinLnBrk="0" hangingPunct="1">
+      <a:defRPr sz="1200" kern="1200">
+        <a:solidFill>
+          <a:schemeClr val="tx1"/>
+        </a:solidFill>
+        <a:latin typeface="+mn-lt"/>
+        <a:ea typeface="+mn-ea"/>
+        <a:cs typeface="+mn-cs"/>
+      </a:defRPr>
+    </a:lvl5pPr>
+    <a:lvl6pPr marL="2286000" algn="l" defTabSz="457200" rtl="0" eaLnBrk="1" latinLnBrk="0" hangingPunct="1">
+      <a:defRPr sz="1200" kern="1200">
+        <a:solidFill>
+          <a:schemeClr val="tx1"/>
+        </a:solidFill>
+        <a:latin typeface="+mn-lt"/>
+        <a:ea typeface="+mn-ea"/>
+        <a:cs typeface="+mn-cs"/>
+      </a:defRPr>
+    </a:lvl6pPr>
+    <a:lvl7pPr marL="2743200" algn="l" defTabSz="457200" rtl="0" eaLnBrk="1" latinLnBrk="0" hangingPunct="1">
+      <a:defRPr sz="1200" kern="1200">
+        <a:solidFill>
+          <a:schemeClr val="tx1"/>
+        </a:solidFill>
+        <a:latin typeface="+mn-lt"/>
+        <a:ea typeface="+mn-ea"/>
+        <a:cs typeface="+mn-cs"/>
+      </a:defRPr>
+    </a:lvl7pPr>
+    <a:lvl8pPr marL="3200400" algn="l" defTabSz="457200" rtl="0" eaLnBrk="1" latinLnBrk="0" hangingPunct="1">
+      <a:defRPr sz="1200" kern="1200">
+        <a:solidFill>
+          <a:schemeClr val="tx1"/>
+        </a:solidFill>
+        <a:latin typeface="+mn-lt"/>
+        <a:ea typeface="+mn-ea"/>
+        <a:cs typeface="+mn-cs"/>
+      </a:defRPr>
+    </a:lvl8pPr>
+    <a:lvl9pPr marL="3657600" algn="l" defTabSz="457200" rtl="0" eaLnBrk="1" latinLnBrk="0" hangingPunct="1">
+      <a:defRPr sz="1200" kern="1200">
+        <a:solidFill>
+          <a:schemeClr val="tx1"/>
+        </a:solidFill>
+        <a:latin typeface="+mn-lt"/>
+        <a:ea typeface="+mn-ea"/>
+        <a:cs typeface="+mn-cs"/>
+      </a:defRPr>
+    </a:lvl9pPr>
+  </p:notesStyle>
+</p:notesMaster>
+</file>
+
+<file path=ppt/notesSlides/notesSlide1.xml><?xml version="1.0" encoding="utf-8"?>
+<p:notes xmlns:a="http://schemas.openxmlformats.org/drawingml/2006/main" xmlns:p="http://schemas.openxmlformats.org/presentationml/2006/main" xmlns:r="http://schemas.openxmlformats.org/officeDocument/2006/relationships">
+  <p:cSld>
+    <p:spTree>
+      <p:nvGrpSpPr>
+        <p:cNvPr id="1" name=""/>
+        <p:cNvGrpSpPr/>
+        <p:nvPr/>
+      </p:nvGrpSpPr>
+      <p:grpSpPr>
+        <a:xfrm>
+          <a:off x="0" y="0"/>
+          <a:ext cx="0" cy="0"/>
+          <a:chOff x="0" y="0"/>
+          <a:chExt cx="0" cy="0"/>
+        </a:xfrm>
+      </p:grpSpPr>
+      <p:sp>
+        <p:nvSpPr>
+          <p:cNvPr id="2" name="Slide Image Placeholder 1"/>
+          <p:cNvSpPr>
+            <a:spLocks noGrp="1"/>
+          </p:cNvSpPr>
+          <p:nvPr>
+            <p:ph type="sldImg" idx="2"/>
+          </p:nvPr>
+        </p:nvSpPr>
+        <p:spPr/>
+      </p:sp>
+      <p:sp>
+        <p:nvSpPr>
+          <p:cNvPr id="3" name="Notes Placeholder 2"/>
+          <p:cNvSpPr>
+            <a:spLocks noGrp="1"/>
+          </p:cNvSpPr>
+          <p:nvPr>
+            <p:ph type="body" idx="3" sz="quarter"/>
+          </p:nvPr>
+        </p:nvSpPr>
+        <p:spPr/>
+        <p:txBody>
+          <a:bodyPr/>
+          <a:lstStyle/>
+          <a:p>
+            <a:r>
+              <a:t>Lo importante no es memorizar los nombres sino entender que cada fase tiene tres cosas: una entrada (lo que recibe de la fase anterior), una salida tangible llamada artefacto (un documento, un diagrama, un programa) y un criterio para decir 'esto ya quedo'.</a:t>
+            </a:r>
+          </a:p>
+          <a:p/>
+          <a:p>
+            <a:r>
+              <a:t>Si una fase no produce un artefacto verificable, esa fase no existe, existe una conversacion.</a:t>
+            </a:r>
+          </a:p>
+        </p:txBody>
+      </p:sp>
+      <p:sp>
+        <p:nvSpPr>
+          <p:cNvPr id="4" name="Slide Number Placeholder 3"/>
+          <p:cNvSpPr>
+            <a:spLocks noGrp="1"/>
+          </p:cNvSpPr>
+          <p:nvPr>
+            <p:ph type="sldNum" idx="5" sz="quarter"/>
+          </p:nvPr>
+        </p:nvSpPr>
+        <p:spPr/>
+      </p:sp>
+    </p:spTree>
+  </p:cSld>
+  <p:clrMapOvr>
+    <a:masterClrMapping/>
+  </p:clrMapOvr>
+</p:notes>
+</file>
+
+<file path=ppt/notesSlides/notesSlide2.xml><?xml version="1.0" encoding="utf-8"?>
+<p:notes xmlns:a="http://schemas.openxmlformats.org/drawingml/2006/main" xmlns:p="http://schemas.openxmlformats.org/presentationml/2006/main" xmlns:r="http://schemas.openxmlformats.org/officeDocument/2006/relationships">
+  <p:cSld>
+    <p:spTree>
+      <p:nvGrpSpPr>
+        <p:cNvPr id="1" name=""/>
+        <p:cNvGrpSpPr/>
+        <p:nvPr/>
+      </p:nvGrpSpPr>
+      <p:grpSpPr>
+        <a:xfrm>
+          <a:off x="0" y="0"/>
+          <a:ext cx="0" cy="0"/>
+          <a:chOff x="0" y="0"/>
+          <a:chExt cx="0" cy="0"/>
+        </a:xfrm>
+      </p:grpSpPr>
+      <p:sp>
+        <p:nvSpPr>
+          <p:cNvPr id="2" name="Slide Image Placeholder 1"/>
+          <p:cNvSpPr>
+            <a:spLocks noGrp="1"/>
+          </p:cNvSpPr>
+          <p:nvPr>
+            <p:ph type="sldImg" idx="2"/>
+          </p:nvPr>
+        </p:nvSpPr>
+        <p:spPr/>
+      </p:sp>
+      <p:sp>
+        <p:nvSpPr>
+          <p:cNvPr id="3" name="Notes Placeholder 2"/>
+          <p:cNvSpPr>
+            <a:spLocks noGrp="1"/>
+          </p:cNvSpPr>
+          <p:nvPr>
+            <p:ph type="body" idx="3" sz="quarter"/>
+          </p:nvPr>
+        </p:nvSpPr>
+        <p:spPr/>
+        <p:txBody>
+          <a:bodyPr/>
+          <a:lstStyle/>
+          <a:p>
+            <a:r>
+              <a:t>Vale la pena decir con precision que produce cada fase, porque ahi se cae la mitad de los equipos.</a:t>
+            </a:r>
+          </a:p>
+          <a:p/>
+          <a:p>
+            <a:r>
+              <a:t>Diseño responde COMO se va a lograr y produce casos de uso, diagramas de clases, modelo de datos, wireframes y mockups.</a:t>
+            </a:r>
+          </a:p>
+          <a:p/>
+          <a:p>
+            <a:r>
+              <a:t>Pruebas verifica que lo construido corresponde a lo pedido y produce casos de prueba y evidencias.</a:t>
+            </a:r>
+          </a:p>
+          <a:p/>
+          <a:p>
+            <a:r>
+              <a:t>Mantenimiento arregla, ajusta y evoluciona el sistema ya en uso.</a:t>
+            </a:r>
+          </a:p>
+          <a:p/>
+          <a:p>
+            <a:r>
+              <a:t>Por eso aqui nunca se califica codigo: se califica que los planos esten completos, coherentes y sean construibles.</a:t>
+            </a:r>
+          </a:p>
+        </p:txBody>
+      </p:sp>
+      <p:sp>
+        <p:nvSpPr>
+          <p:cNvPr id="4" name="Slide Number Placeholder 3"/>
+          <p:cNvSpPr>
+            <a:spLocks noGrp="1"/>
+          </p:cNvSpPr>
+          <p:nvPr>
+            <p:ph type="sldNum" idx="5" sz="quarter"/>
+          </p:nvPr>
+        </p:nvSpPr>
+        <p:spPr/>
+      </p:sp>
+    </p:spTree>
+  </p:cSld>
+  <p:clrMapOvr>
+    <a:masterClrMapping/>
+  </p:clrMapOvr>
+</p:notes>
+</file>
+
+<file path=ppt/notesSlides/notesSlide3.xml><?xml version="1.0" encoding="utf-8"?>
+<p:notes xmlns:a="http://schemas.openxmlformats.org/drawingml/2006/main" xmlns:p="http://schemas.openxmlformats.org/presentationml/2006/main" xmlns:r="http://schemas.openxmlformats.org/officeDocument/2006/relationships">
+  <p:cSld>
+    <p:spTree>
+      <p:nvGrpSpPr>
+        <p:cNvPr id="1" name=""/>
+        <p:cNvGrpSpPr/>
+        <p:nvPr/>
+      </p:nvGrpSpPr>
+      <p:grpSpPr>
+        <a:xfrm>
+          <a:off x="0" y="0"/>
+          <a:ext cx="0" cy="0"/>
+          <a:chOff x="0" y="0"/>
+          <a:chExt cx="0" cy="0"/>
+        </a:xfrm>
+      </p:grpSpPr>
+      <p:sp>
+        <p:nvSpPr>
+          <p:cNvPr id="2" name="Slide Image Placeholder 1"/>
+          <p:cNvSpPr>
+            <a:spLocks noGrp="1"/>
+          </p:cNvSpPr>
+          <p:nvPr>
+            <p:ph type="sldImg" idx="2"/>
+          </p:nvPr>
+        </p:nvSpPr>
+        <p:spPr/>
+      </p:sp>
+      <p:sp>
+        <p:nvSpPr>
+          <p:cNvPr id="3" name="Notes Placeholder 2"/>
+          <p:cNvSpPr>
+            <a:spLocks noGrp="1"/>
+          </p:cNvSpPr>
+          <p:nvPr>
+            <p:ph type="body" idx="3" sz="quarter"/>
+          </p:nvPr>
+        </p:nvSpPr>
+        <p:spPr/>
+        <p:txBody>
+          <a:bodyPr/>
+          <a:lstStyle/>
+          <a:p>
+            <a:r>
+              <a:t>Recorrerlas una sola vez y en orden significa cerrar requisitos de TODO VetCare, luego diseñar TODO VetCare, luego construir TODO.</a:t>
+            </a:r>
+          </a:p>
+          <a:p/>
+          <a:p>
+            <a:r>
+              <a:t>Recorrerlas en ciclos significa tomar un pedazo util del sistema y pasarlo por las cinco fases en una vuelta corta, y despues repetir con el siguiente pedazo.</a:t>
+            </a:r>
+          </a:p>
+        </p:txBody>
+      </p:sp>
+      <p:sp>
+        <p:nvSpPr>
+          <p:cNvPr id="4" name="Slide Number Placeholder 3"/>
+          <p:cNvSpPr>
+            <a:spLocks noGrp="1"/>
+          </p:cNvSpPr>
+          <p:nvPr>
+            <p:ph type="sldNum" idx="5" sz="quarter"/>
+          </p:nvPr>
+        </p:nvSpPr>
+        <p:spPr/>
+      </p:sp>
+    </p:spTree>
+  </p:cSld>
+  <p:clrMapOvr>
+    <a:masterClrMapping/>
+  </p:clrMapOvr>
+</p:notes>
+</file>
+
+<file path=ppt/notesSlides/notesSlide4.xml><?xml version="1.0" encoding="utf-8"?>
+<p:notes xmlns:a="http://schemas.openxmlformats.org/drawingml/2006/main" xmlns:p="http://schemas.openxmlformats.org/presentationml/2006/main" xmlns:r="http://schemas.openxmlformats.org/officeDocument/2006/relationships">
+  <p:cSld>
+    <p:spTree>
+      <p:nvGrpSpPr>
+        <p:cNvPr id="1" name=""/>
+        <p:cNvGrpSpPr/>
+        <p:nvPr/>
+      </p:nvGrpSpPr>
+      <p:grpSpPr>
+        <a:xfrm>
+          <a:off x="0" y="0"/>
+          <a:ext cx="0" cy="0"/>
+          <a:chOff x="0" y="0"/>
+          <a:chExt cx="0" cy="0"/>
+        </a:xfrm>
+      </p:grpSpPr>
+      <p:sp>
+        <p:nvSpPr>
+          <p:cNvPr id="2" name="Slide Image Placeholder 1"/>
+          <p:cNvSpPr>
+            <a:spLocks noGrp="1"/>
+          </p:cNvSpPr>
+          <p:nvPr>
+            <p:ph type="sldImg" idx="2"/>
+          </p:nvPr>
+        </p:nvSpPr>
+        <p:spPr/>
+      </p:sp>
+      <p:sp>
+        <p:nvSpPr>
+          <p:cNvPr id="3" name="Notes Placeholder 2"/>
+          <p:cNvSpPr>
+            <a:spLocks noGrp="1"/>
+          </p:cNvSpPr>
+          <p:nvPr>
+            <p:ph type="body" idx="3" sz="quarter"/>
+          </p:nvPr>
+        </p:nvSpPr>
+        <p:spPr/>
+        <p:txBody>
+          <a:bodyPr/>
+          <a:lstStyle/>
+          <a:p>
+            <a:r>
+              <a:t>Como se elige el recorrido?</a:t>
+            </a:r>
+          </a:p>
+          <a:p/>
+          <a:p>
+            <a:r>
+              <a:t>Con criterios, no con moda.</a:t>
+            </a:r>
+          </a:p>
+        </p:txBody>
+      </p:sp>
+      <p:sp>
+        <p:nvSpPr>
+          <p:cNvPr id="4" name="Slide Number Placeholder 3"/>
+          <p:cNvSpPr>
+            <a:spLocks noGrp="1"/>
+          </p:cNvSpPr>
+          <p:nvPr>
+            <p:ph type="sldNum" idx="5" sz="quarter"/>
+          </p:nvPr>
+        </p:nvSpPr>
+        <p:spPr/>
+      </p:sp>
+    </p:spTree>
+  </p:cSld>
+  <p:clrMapOvr>
+    <a:masterClrMapping/>
+  </p:clrMapOvr>
+</p:notes>
 </file>
 
 <file path=ppt/slideLayouts/slideLayout1.xml><?xml version="1.0" encoding="utf-8"?>
@@ -5580,13 +6245,13 @@
         <p:spPr>
           <a:xfrm>
             <a:off x="0" y="0"/>
-            <a:ext cx="12191695" cy="1170432"/>
+            <a:ext cx="12191695" cy="164592"/>
           </a:xfrm>
           <a:prstGeom prst="rect">
             <a:avLst/>
           </a:prstGeom>
           <a:solidFill>
-            <a:srgbClr val="095292"/>
+            <a:srgbClr val="269CCB"/>
           </a:solidFill>
           <a:ln>
             <a:noFill/>
@@ -5614,251 +6279,9 @@
           </a:p>
         </p:txBody>
       </p:sp>
-      <p:sp>
-        <p:nvSpPr>
-          <p:cNvPr id="3" name="Rectangle 2"/>
-          <p:cNvSpPr/>
-          <p:nvPr/>
-        </p:nvSpPr>
-        <p:spPr>
-          <a:xfrm>
-            <a:off x="0" y="1170432"/>
-            <a:ext cx="12191695" cy="41148"/>
-          </a:xfrm>
-          <a:prstGeom prst="rect">
-            <a:avLst/>
-          </a:prstGeom>
-          <a:solidFill>
-            <a:srgbClr val="FFD000"/>
-          </a:solidFill>
-          <a:ln>
-            <a:noFill/>
-          </a:ln>
-        </p:spPr>
-        <p:style>
-          <a:lnRef idx="1">
-            <a:schemeClr val="accent1"/>
-          </a:lnRef>
-          <a:fillRef idx="3">
-            <a:schemeClr val="accent1"/>
-          </a:fillRef>
-          <a:effectRef idx="2">
-            <a:schemeClr val="accent1"/>
-          </a:effectRef>
-          <a:fontRef idx="minor">
-            <a:schemeClr val="lt1"/>
-          </a:fontRef>
-        </p:style>
-        <p:txBody>
-          <a:bodyPr rtlCol="0" anchor="ctr"/>
-          <a:lstStyle/>
-          <a:p>
-            <a:pPr algn="ctr"/>
-          </a:p>
-        </p:txBody>
-      </p:sp>
-      <p:sp>
-        <p:nvSpPr>
-          <p:cNvPr id="4" name="TextBox 3"/>
-          <p:cNvSpPr txBox="1"/>
-          <p:nvPr/>
-        </p:nvSpPr>
-        <p:spPr>
-          <a:xfrm>
-            <a:off x="457200" y="164592"/>
-            <a:ext cx="11277295" cy="384048"/>
-          </a:xfrm>
-          <a:prstGeom prst="rect">
-            <a:avLst/>
-          </a:prstGeom>
-          <a:noFill/>
-        </p:spPr>
-        <p:txBody>
-          <a:bodyPr wrap="square">
-            <a:spAutoFit/>
-          </a:bodyPr>
-          <a:lstStyle/>
-          <a:p>
-            <a:r>
-              <a:rPr sz="2600" b="1" i="0">
-                <a:solidFill>
-                  <a:srgbClr val="FFFFFF"/>
-                </a:solidFill>
-                <a:latin typeface="Calibri"/>
-              </a:rPr>
-              <a:t>Herramientas de hoy</a:t>
-            </a:r>
-          </a:p>
-        </p:txBody>
-      </p:sp>
-      <p:sp>
-        <p:nvSpPr>
-          <p:cNvPr id="5" name="TextBox 4"/>
-          <p:cNvSpPr txBox="1"/>
-          <p:nvPr/>
-        </p:nvSpPr>
-        <p:spPr>
-          <a:xfrm>
-            <a:off x="457200" y="566928"/>
-            <a:ext cx="11277295" cy="411480"/>
-          </a:xfrm>
-          <a:prstGeom prst="rect">
-            <a:avLst/>
-          </a:prstGeom>
-          <a:noFill/>
-        </p:spPr>
-        <p:txBody>
-          <a:bodyPr wrap="square">
-            <a:spAutoFit/>
-          </a:bodyPr>
-          <a:lstStyle/>
-          <a:p>
-            <a:r>
-              <a:rPr sz="1400" b="0" i="0">
-                <a:solidFill>
-                  <a:srgbClr val="B8D8EE"/>
-                </a:solidFill>
-                <a:latin typeface="Calibri"/>
-              </a:rPr>
-              <a:t>Gratis · funcionan en el navegador</a:t>
-            </a:r>
-          </a:p>
-        </p:txBody>
-      </p:sp>
-      <p:sp>
-        <p:nvSpPr>
-          <p:cNvPr id="6" name="Rounded Rectangle 5"/>
-          <p:cNvSpPr/>
-          <p:nvPr/>
-        </p:nvSpPr>
-        <p:spPr>
-          <a:xfrm>
-            <a:off x="457200" y="1591056"/>
-            <a:ext cx="3624986" cy="2331720"/>
-          </a:xfrm>
-          <a:prstGeom prst="roundRect">
-            <a:avLst>
-              <a:gd name="adj" fmla="val 12000"/>
-            </a:avLst>
-          </a:prstGeom>
-          <a:solidFill>
-            <a:srgbClr val="F2F2F2"/>
-          </a:solidFill>
-          <a:ln>
-            <a:noFill/>
-          </a:ln>
-        </p:spPr>
-        <p:style>
-          <a:lnRef idx="1">
-            <a:schemeClr val="accent1"/>
-          </a:lnRef>
-          <a:fillRef idx="3">
-            <a:schemeClr val="accent1"/>
-          </a:fillRef>
-          <a:effectRef idx="2">
-            <a:schemeClr val="accent1"/>
-          </a:effectRef>
-          <a:fontRef idx="minor">
-            <a:schemeClr val="lt1"/>
-          </a:fontRef>
-        </p:style>
-        <p:txBody>
-          <a:bodyPr rtlCol="0" anchor="ctr"/>
-          <a:lstStyle/>
-          <a:p>
-            <a:pPr algn="ctr"/>
-          </a:p>
-        </p:txBody>
-      </p:sp>
-      <p:sp>
-        <p:nvSpPr>
-          <p:cNvPr id="7" name="Rectangle 6"/>
-          <p:cNvSpPr/>
-          <p:nvPr/>
-        </p:nvSpPr>
-        <p:spPr>
-          <a:xfrm>
-            <a:off x="457200" y="1591056"/>
-            <a:ext cx="3624986" cy="64008"/>
-          </a:xfrm>
-          <a:prstGeom prst="rect">
-            <a:avLst/>
-          </a:prstGeom>
-          <a:solidFill>
-            <a:srgbClr val="095292"/>
-          </a:solidFill>
-          <a:ln>
-            <a:noFill/>
-          </a:ln>
-        </p:spPr>
-        <p:style>
-          <a:lnRef idx="1">
-            <a:schemeClr val="accent1"/>
-          </a:lnRef>
-          <a:fillRef idx="3">
-            <a:schemeClr val="accent1"/>
-          </a:fillRef>
-          <a:effectRef idx="2">
-            <a:schemeClr val="accent1"/>
-          </a:effectRef>
-          <a:fontRef idx="minor">
-            <a:schemeClr val="lt1"/>
-          </a:fontRef>
-        </p:style>
-        <p:txBody>
-          <a:bodyPr rtlCol="0" anchor="ctr"/>
-          <a:lstStyle/>
-          <a:p>
-            <a:pPr algn="ctr"/>
-          </a:p>
-        </p:txBody>
-      </p:sp>
-      <p:sp>
-        <p:nvSpPr>
-          <p:cNvPr id="8" name="Rectangle 7"/>
-          <p:cNvSpPr/>
-          <p:nvPr/>
-        </p:nvSpPr>
-        <p:spPr>
-          <a:xfrm>
-            <a:off x="457200" y="1655064"/>
-            <a:ext cx="3624986" cy="27432"/>
-          </a:xfrm>
-          <a:prstGeom prst="rect">
-            <a:avLst/>
-          </a:prstGeom>
-          <a:solidFill>
-            <a:srgbClr val="FFD000"/>
-          </a:solidFill>
-          <a:ln>
-            <a:noFill/>
-          </a:ln>
-        </p:spPr>
-        <p:style>
-          <a:lnRef idx="1">
-            <a:schemeClr val="accent1"/>
-          </a:lnRef>
-          <a:fillRef idx="3">
-            <a:schemeClr val="accent1"/>
-          </a:fillRef>
-          <a:effectRef idx="2">
-            <a:schemeClr val="accent1"/>
-          </a:effectRef>
-          <a:fontRef idx="minor">
-            <a:schemeClr val="lt1"/>
-          </a:fontRef>
-        </p:style>
-        <p:txBody>
-          <a:bodyPr rtlCol="0" anchor="ctr"/>
-          <a:lstStyle/>
-          <a:p>
-            <a:pPr algn="ctr"/>
-          </a:p>
-        </p:txBody>
-      </p:sp>
       <p:pic>
         <p:nvPicPr>
-          <p:cNvPr id="9" name="Picture 8" descr="drawio.png"/>
+          <p:cNvPr id="3" name="Picture 2" descr="logo_uniajc_color.png"/>
           <p:cNvPicPr>
             <a:picLocks noChangeAspect="1"/>
           </p:cNvPicPr>
@@ -5872,8 +6295,8 @@
         </p:blipFill>
         <p:spPr>
           <a:xfrm>
-            <a:off x="1643329" y="1847087"/>
-            <a:ext cx="1252728" cy="1252728"/>
+            <a:off x="10271455" y="5998464"/>
+            <a:ext cx="1463040" cy="643233"/>
           </a:xfrm>
           <a:prstGeom prst="rect">
             <a:avLst/>
@@ -5882,14 +6305,14 @@
       </p:pic>
       <p:sp>
         <p:nvSpPr>
-          <p:cNvPr id="10" name="TextBox 9"/>
+          <p:cNvPr id="4" name="TextBox 3"/>
           <p:cNvSpPr txBox="1"/>
           <p:nvPr/>
         </p:nvSpPr>
         <p:spPr>
           <a:xfrm>
-            <a:off x="530352" y="3191256"/>
-            <a:ext cx="3478682" cy="621792"/>
+            <a:off x="457200" y="1737360"/>
+            <a:ext cx="11277295" cy="1097280"/>
           </a:xfrm>
           <a:prstGeom prst="rect">
             <a:avLst/>
@@ -5897,456 +6320,32 @@
           <a:noFill/>
         </p:spPr>
         <p:txBody>
-          <a:bodyPr wrap="square" anchor="t"/>
+          <a:bodyPr wrap="square" anchor="ctr"/>
           <a:lstStyle/>
           <a:p>
             <a:pPr algn="ctr"/>
             <a:r>
-              <a:rPr sz="1300" b="1" i="0">
+              <a:rPr sz="3400" b="1" i="0">
                 <a:solidFill>
                   <a:srgbClr val="095292"/>
                 </a:solidFill>
                 <a:latin typeface="Calibri"/>
               </a:rPr>
-              <a:t>Draw.Io</a:t>
-            </a:r>
-          </a:p>
-          <a:p>
-            <a:pPr algn="ctr">
-              <a:spcBef>
-                <a:spcPts val="200"/>
-              </a:spcBef>
-            </a:pPr>
-            <a:r>
-              <a:rPr sz="1000" b="0" i="0">
-                <a:solidFill>
-                  <a:srgbClr val="666666"/>
-                </a:solidFill>
-                <a:latin typeface="Calibri"/>
-              </a:rPr>
-              <a:t>Diagramas UML y de contexto</a:t>
-            </a:r>
-          </a:p>
-        </p:txBody>
-      </p:sp>
-      <p:sp>
-        <p:nvSpPr>
-          <p:cNvPr id="11" name="Rounded Rectangle 10"/>
-          <p:cNvSpPr/>
-          <p:nvPr/>
-        </p:nvSpPr>
-        <p:spPr>
-          <a:xfrm>
-            <a:off x="4283354" y="1591056"/>
-            <a:ext cx="3624986" cy="2331720"/>
-          </a:xfrm>
-          <a:prstGeom prst="roundRect">
-            <a:avLst>
-              <a:gd name="adj" fmla="val 12000"/>
-            </a:avLst>
-          </a:prstGeom>
-          <a:solidFill>
-            <a:srgbClr val="F2F2F2"/>
-          </a:solidFill>
-          <a:ln>
-            <a:noFill/>
-          </a:ln>
-        </p:spPr>
-        <p:style>
-          <a:lnRef idx="1">
-            <a:schemeClr val="accent1"/>
-          </a:lnRef>
-          <a:fillRef idx="3">
-            <a:schemeClr val="accent1"/>
-          </a:fillRef>
-          <a:effectRef idx="2">
-            <a:schemeClr val="accent1"/>
-          </a:effectRef>
-          <a:fontRef idx="minor">
-            <a:schemeClr val="lt1"/>
-          </a:fontRef>
-        </p:style>
-        <p:txBody>
-          <a:bodyPr rtlCol="0" anchor="ctr"/>
-          <a:lstStyle/>
-          <a:p>
-            <a:pPr algn="ctr"/>
-          </a:p>
-        </p:txBody>
-      </p:sp>
-      <p:sp>
-        <p:nvSpPr>
-          <p:cNvPr id="12" name="Rectangle 11"/>
-          <p:cNvSpPr/>
-          <p:nvPr/>
-        </p:nvSpPr>
-        <p:spPr>
-          <a:xfrm>
-            <a:off x="4283354" y="1591056"/>
-            <a:ext cx="3624986" cy="64008"/>
-          </a:xfrm>
-          <a:prstGeom prst="rect">
-            <a:avLst/>
-          </a:prstGeom>
-          <a:solidFill>
-            <a:srgbClr val="095292"/>
-          </a:solidFill>
-          <a:ln>
-            <a:noFill/>
-          </a:ln>
-        </p:spPr>
-        <p:style>
-          <a:lnRef idx="1">
-            <a:schemeClr val="accent1"/>
-          </a:lnRef>
-          <a:fillRef idx="3">
-            <a:schemeClr val="accent1"/>
-          </a:fillRef>
-          <a:effectRef idx="2">
-            <a:schemeClr val="accent1"/>
-          </a:effectRef>
-          <a:fontRef idx="minor">
-            <a:schemeClr val="lt1"/>
-          </a:fontRef>
-        </p:style>
-        <p:txBody>
-          <a:bodyPr rtlCol="0" anchor="ctr"/>
-          <a:lstStyle/>
-          <a:p>
-            <a:pPr algn="ctr"/>
-          </a:p>
-        </p:txBody>
-      </p:sp>
-      <p:sp>
-        <p:nvSpPr>
-          <p:cNvPr id="13" name="Rectangle 12"/>
-          <p:cNvSpPr/>
-          <p:nvPr/>
-        </p:nvSpPr>
-        <p:spPr>
-          <a:xfrm>
-            <a:off x="4283354" y="1655064"/>
-            <a:ext cx="3624986" cy="27432"/>
-          </a:xfrm>
-          <a:prstGeom prst="rect">
-            <a:avLst/>
-          </a:prstGeom>
-          <a:solidFill>
-            <a:srgbClr val="FFD000"/>
-          </a:solidFill>
-          <a:ln>
-            <a:noFill/>
-          </a:ln>
-        </p:spPr>
-        <p:style>
-          <a:lnRef idx="1">
-            <a:schemeClr val="accent1"/>
-          </a:lnRef>
-          <a:fillRef idx="3">
-            <a:schemeClr val="accent1"/>
-          </a:fillRef>
-          <a:effectRef idx="2">
-            <a:schemeClr val="accent1"/>
-          </a:effectRef>
-          <a:fontRef idx="minor">
-            <a:schemeClr val="lt1"/>
-          </a:fontRef>
-        </p:style>
-        <p:txBody>
-          <a:bodyPr rtlCol="0" anchor="ctr"/>
-          <a:lstStyle/>
-          <a:p>
-            <a:pPr algn="ctr"/>
-          </a:p>
-        </p:txBody>
-      </p:sp>
-      <p:pic>
-        <p:nvPicPr>
-          <p:cNvPr id="14" name="Picture 13" descr="google_docs.png"/>
-          <p:cNvPicPr>
-            <a:picLocks noChangeAspect="1"/>
-          </p:cNvPicPr>
-          <p:nvPr/>
-        </p:nvPicPr>
-        <p:blipFill>
-          <a:blip r:embed="rId3"/>
-          <a:stretch>
-            <a:fillRect/>
-          </a:stretch>
-        </p:blipFill>
-        <p:spPr>
-          <a:xfrm>
-            <a:off x="5469483" y="1847087"/>
-            <a:ext cx="1252728" cy="1252728"/>
-          </a:xfrm>
-          <a:prstGeom prst="rect">
-            <a:avLst/>
-          </a:prstGeom>
-        </p:spPr>
-      </p:pic>
-      <p:sp>
-        <p:nvSpPr>
-          <p:cNvPr id="15" name="TextBox 14"/>
+              <a:t>Clase 2 · Ciclos de vida del software</a:t>
+            </a:r>
+          </a:p>
+        </p:txBody>
+      </p:sp>
+      <p:sp>
+        <p:nvSpPr>
+          <p:cNvPr id="5" name="TextBox 4"/>
           <p:cNvSpPr txBox="1"/>
           <p:nvPr/>
         </p:nvSpPr>
         <p:spPr>
           <a:xfrm>
-            <a:off x="4356506" y="3191256"/>
-            <a:ext cx="3478682" cy="621792"/>
-          </a:xfrm>
-          <a:prstGeom prst="rect">
-            <a:avLst/>
-          </a:prstGeom>
-          <a:noFill/>
-        </p:spPr>
-        <p:txBody>
-          <a:bodyPr wrap="square" anchor="t"/>
-          <a:lstStyle/>
-          <a:p>
-            <a:pPr algn="ctr"/>
-            <a:r>
-              <a:rPr sz="1300" b="1" i="0">
-                <a:solidFill>
-                  <a:srgbClr val="095292"/>
-                </a:solidFill>
-                <a:latin typeface="Calibri"/>
-              </a:rPr>
-              <a:t>google docs</a:t>
-            </a:r>
-          </a:p>
-          <a:p>
-            <a:pPr algn="ctr">
-              <a:spcBef>
-                <a:spcPts val="200"/>
-              </a:spcBef>
-            </a:pPr>
-            <a:r>
-              <a:rPr sz="1000" b="0" i="0">
-                <a:solidFill>
-                  <a:srgbClr val="666666"/>
-                </a:solidFill>
-                <a:latin typeface="Calibri"/>
-              </a:rPr>
-              <a:t>Documentos del paquete de diseño</a:t>
-            </a:r>
-          </a:p>
-        </p:txBody>
-      </p:sp>
-      <p:sp>
-        <p:nvSpPr>
-          <p:cNvPr id="16" name="Rounded Rectangle 15"/>
-          <p:cNvSpPr/>
-          <p:nvPr/>
-        </p:nvSpPr>
-        <p:spPr>
-          <a:xfrm>
-            <a:off x="8109508" y="1591056"/>
-            <a:ext cx="3624986" cy="2331720"/>
-          </a:xfrm>
-          <a:prstGeom prst="roundRect">
-            <a:avLst>
-              <a:gd name="adj" fmla="val 12000"/>
-            </a:avLst>
-          </a:prstGeom>
-          <a:solidFill>
-            <a:srgbClr val="F2F2F2"/>
-          </a:solidFill>
-          <a:ln>
-            <a:noFill/>
-          </a:ln>
-        </p:spPr>
-        <p:style>
-          <a:lnRef idx="1">
-            <a:schemeClr val="accent1"/>
-          </a:lnRef>
-          <a:fillRef idx="3">
-            <a:schemeClr val="accent1"/>
-          </a:fillRef>
-          <a:effectRef idx="2">
-            <a:schemeClr val="accent1"/>
-          </a:effectRef>
-          <a:fontRef idx="minor">
-            <a:schemeClr val="lt1"/>
-          </a:fontRef>
-        </p:style>
-        <p:txBody>
-          <a:bodyPr rtlCol="0" anchor="ctr"/>
-          <a:lstStyle/>
-          <a:p>
-            <a:pPr algn="ctr"/>
-          </a:p>
-        </p:txBody>
-      </p:sp>
-      <p:sp>
-        <p:nvSpPr>
-          <p:cNvPr id="17" name="Rectangle 16"/>
-          <p:cNvSpPr/>
-          <p:nvPr/>
-        </p:nvSpPr>
-        <p:spPr>
-          <a:xfrm>
-            <a:off x="8109508" y="1591056"/>
-            <a:ext cx="3624986" cy="64008"/>
-          </a:xfrm>
-          <a:prstGeom prst="rect">
-            <a:avLst/>
-          </a:prstGeom>
-          <a:solidFill>
-            <a:srgbClr val="095292"/>
-          </a:solidFill>
-          <a:ln>
-            <a:noFill/>
-          </a:ln>
-        </p:spPr>
-        <p:style>
-          <a:lnRef idx="1">
-            <a:schemeClr val="accent1"/>
-          </a:lnRef>
-          <a:fillRef idx="3">
-            <a:schemeClr val="accent1"/>
-          </a:fillRef>
-          <a:effectRef idx="2">
-            <a:schemeClr val="accent1"/>
-          </a:effectRef>
-          <a:fontRef idx="minor">
-            <a:schemeClr val="lt1"/>
-          </a:fontRef>
-        </p:style>
-        <p:txBody>
-          <a:bodyPr rtlCol="0" anchor="ctr"/>
-          <a:lstStyle/>
-          <a:p>
-            <a:pPr algn="ctr"/>
-          </a:p>
-        </p:txBody>
-      </p:sp>
-      <p:sp>
-        <p:nvSpPr>
-          <p:cNvPr id="18" name="Rectangle 17"/>
-          <p:cNvSpPr/>
-          <p:nvPr/>
-        </p:nvSpPr>
-        <p:spPr>
-          <a:xfrm>
-            <a:off x="8109508" y="1655064"/>
-            <a:ext cx="3624986" cy="27432"/>
-          </a:xfrm>
-          <a:prstGeom prst="rect">
-            <a:avLst/>
-          </a:prstGeom>
-          <a:solidFill>
-            <a:srgbClr val="FFD000"/>
-          </a:solidFill>
-          <a:ln>
-            <a:noFill/>
-          </a:ln>
-        </p:spPr>
-        <p:style>
-          <a:lnRef idx="1">
-            <a:schemeClr val="accent1"/>
-          </a:lnRef>
-          <a:fillRef idx="3">
-            <a:schemeClr val="accent1"/>
-          </a:fillRef>
-          <a:effectRef idx="2">
-            <a:schemeClr val="accent1"/>
-          </a:effectRef>
-          <a:fontRef idx="minor">
-            <a:schemeClr val="lt1"/>
-          </a:fontRef>
-        </p:style>
-        <p:txBody>
-          <a:bodyPr rtlCol="0" anchor="ctr"/>
-          <a:lstStyle/>
-          <a:p>
-            <a:pPr algn="ctr"/>
-          </a:p>
-        </p:txBody>
-      </p:sp>
-      <p:pic>
-        <p:nvPicPr>
-          <p:cNvPr id="19" name="Picture 18" descr="examlab.png"/>
-          <p:cNvPicPr>
-            <a:picLocks noChangeAspect="1"/>
-          </p:cNvPicPr>
-          <p:nvPr/>
-        </p:nvPicPr>
-        <p:blipFill>
-          <a:blip r:embed="rId4"/>
-          <a:stretch>
-            <a:fillRect/>
-          </a:stretch>
-        </p:blipFill>
-        <p:spPr>
-          <a:xfrm>
-            <a:off x="9295638" y="1847087"/>
-            <a:ext cx="1252728" cy="1252728"/>
-          </a:xfrm>
-          <a:prstGeom prst="rect">
-            <a:avLst/>
-          </a:prstGeom>
-        </p:spPr>
-      </p:pic>
-      <p:sp>
-        <p:nvSpPr>
-          <p:cNvPr id="20" name="TextBox 19"/>
-          <p:cNvSpPr txBox="1"/>
-          <p:nvPr/>
-        </p:nvSpPr>
-        <p:spPr>
-          <a:xfrm>
-            <a:off x="8182660" y="3191256"/>
-            <a:ext cx="3478682" cy="621792"/>
-          </a:xfrm>
-          <a:prstGeom prst="rect">
-            <a:avLst/>
-          </a:prstGeom>
-          <a:noFill/>
-        </p:spPr>
-        <p:txBody>
-          <a:bodyPr wrap="square" anchor="t"/>
-          <a:lstStyle/>
-          <a:p>
-            <a:pPr algn="ctr"/>
-            <a:r>
-              <a:rPr sz="1300" b="1" i="0">
-                <a:solidFill>
-                  <a:srgbClr val="095292"/>
-                </a:solidFill>
-                <a:latin typeface="Calibri"/>
-              </a:rPr>
-              <a:t>la plataforma del curso</a:t>
-            </a:r>
-          </a:p>
-          <a:p>
-            <a:pPr algn="ctr">
-              <a:spcBef>
-                <a:spcPts val="200"/>
-              </a:spcBef>
-            </a:pPr>
-            <a:r>
-              <a:rPr sz="1000" b="0" i="0">
-                <a:solidFill>
-                  <a:srgbClr val="666666"/>
-                </a:solidFill>
-                <a:latin typeface="Calibri"/>
-              </a:rPr>
-              <a:t>Entrega del taller · en la fecha que indique el docente</a:t>
-            </a:r>
-          </a:p>
-        </p:txBody>
-      </p:sp>
-      <p:sp>
-        <p:nvSpPr>
-          <p:cNvPr id="21" name="TextBox 20"/>
-          <p:cNvSpPr txBox="1"/>
-          <p:nvPr/>
-        </p:nvSpPr>
-        <p:spPr>
-          <a:xfrm>
-            <a:off x="11185855" y="6473952"/>
-            <a:ext cx="640080" cy="274320"/>
+            <a:off x="457200" y="3017520"/>
+            <a:ext cx="11277295" cy="1645920"/>
           </a:xfrm>
           <a:prstGeom prst="rect">
             <a:avLst/>
@@ -6359,141 +6358,65 @@
           </a:bodyPr>
           <a:lstStyle/>
           <a:p>
-            <a:pPr algn="r"/>
-            <a:r>
-              <a:rPr sz="1100" b="0" i="0">
-                <a:solidFill>
-                  <a:srgbClr val="666666"/>
-                </a:solidFill>
-                <a:latin typeface="Calibri"/>
-              </a:rPr>
-              <a:t>15</a:t>
-            </a:r>
-          </a:p>
-        </p:txBody>
-      </p:sp>
-    </p:spTree>
-  </p:cSld>
-  <p:clrMapOvr>
-    <a:masterClrMapping/>
-  </p:clrMapOvr>
-</p:sld>
-</file>
-
-<file path=ppt/slides/slide16.xml><?xml version="1.0" encoding="utf-8"?>
-<p:sld xmlns:a="http://schemas.openxmlformats.org/drawingml/2006/main" xmlns:p="http://schemas.openxmlformats.org/presentationml/2006/main" xmlns:r="http://schemas.openxmlformats.org/officeDocument/2006/relationships">
-  <p:cSld>
-    <p:bg>
-      <p:bgPr>
-        <a:solidFill>
-          <a:srgbClr val="FFFFFF"/>
-        </a:solidFill>
-        <a:effectLst/>
-      </p:bgPr>
-    </p:bg>
-    <p:spTree>
-      <p:nvGrpSpPr>
-        <p:cNvPr id="1" name=""/>
-        <p:cNvGrpSpPr/>
-        <p:nvPr/>
-      </p:nvGrpSpPr>
-      <p:grpSpPr/>
-      <p:sp>
-        <p:nvSpPr>
-          <p:cNvPr id="2" name="Rectangle 1"/>
-          <p:cNvSpPr/>
-          <p:nvPr/>
-        </p:nvSpPr>
-        <p:spPr>
-          <a:xfrm>
-            <a:off x="0" y="0"/>
-            <a:ext cx="12191695" cy="960120"/>
-          </a:xfrm>
-          <a:prstGeom prst="rect">
-            <a:avLst/>
-          </a:prstGeom>
-          <a:solidFill>
-            <a:srgbClr val="095292"/>
-          </a:solidFill>
-          <a:ln>
-            <a:noFill/>
-          </a:ln>
-        </p:spPr>
-        <p:style>
-          <a:lnRef idx="1">
-            <a:schemeClr val="accent1"/>
-          </a:lnRef>
-          <a:fillRef idx="3">
-            <a:schemeClr val="accent1"/>
-          </a:fillRef>
-          <a:effectRef idx="2">
-            <a:schemeClr val="accent1"/>
-          </a:effectRef>
-          <a:fontRef idx="minor">
-            <a:schemeClr val="lt1"/>
-          </a:fontRef>
-        </p:style>
-        <p:txBody>
-          <a:bodyPr rtlCol="0" anchor="ctr"/>
-          <a:lstStyle/>
-          <a:p>
-            <a:pPr algn="ctr"/>
-          </a:p>
-        </p:txBody>
-      </p:sp>
-      <p:sp>
-        <p:nvSpPr>
-          <p:cNvPr id="3" name="Rectangle 2"/>
-          <p:cNvSpPr/>
-          <p:nvPr/>
-        </p:nvSpPr>
-        <p:spPr>
-          <a:xfrm>
-            <a:off x="0" y="960120"/>
-            <a:ext cx="12191695" cy="41148"/>
-          </a:xfrm>
-          <a:prstGeom prst="rect">
-            <a:avLst/>
-          </a:prstGeom>
-          <a:solidFill>
-            <a:srgbClr val="FFD000"/>
-          </a:solidFill>
-          <a:ln>
-            <a:noFill/>
-          </a:ln>
-        </p:spPr>
-        <p:style>
-          <a:lnRef idx="1">
-            <a:schemeClr val="accent1"/>
-          </a:lnRef>
-          <a:fillRef idx="3">
-            <a:schemeClr val="accent1"/>
-          </a:fillRef>
-          <a:effectRef idx="2">
-            <a:schemeClr val="accent1"/>
-          </a:effectRef>
-          <a:fontRef idx="minor">
-            <a:schemeClr val="lt1"/>
-          </a:fontRef>
-        </p:style>
-        <p:txBody>
-          <a:bodyPr rtlCol="0" anchor="ctr"/>
-          <a:lstStyle/>
-          <a:p>
-            <a:pPr algn="ctr"/>
-          </a:p>
-        </p:txBody>
-      </p:sp>
-      <p:sp>
-        <p:nvSpPr>
-          <p:cNvPr id="4" name="TextBox 3"/>
+            <a:pPr algn="ctr">
+              <a:spcAft>
+                <a:spcPts val="600"/>
+              </a:spcAft>
+            </a:pPr>
+            <a:r>
+              <a:rPr sz="1600" b="0" i="0">
+                <a:solidFill>
+                  <a:srgbClr val="333333"/>
+                </a:solidFill>
+                <a:latin typeface="Calibri"/>
+              </a:rPr>
+              <a:t>Las mismas fases, recorridas de distinta forma</a:t>
+            </a:r>
+          </a:p>
+          <a:p>
+            <a:pPr algn="ctr">
+              <a:spcAft>
+                <a:spcPts val="600"/>
+              </a:spcAft>
+            </a:pPr>
+            <a:r>
+              <a:rPr sz="1600" b="0" i="0">
+                <a:solidFill>
+                  <a:srgbClr val="333333"/>
+                </a:solidFill>
+                <a:latin typeface="Calibri"/>
+              </a:rPr>
+              <a:t>Repasen las laminas de teoria: cada concepto esta completo</a:t>
+            </a:r>
+          </a:p>
+          <a:p>
+            <a:pPr algn="ctr">
+              <a:spcAft>
+                <a:spcPts val="600"/>
+              </a:spcAft>
+            </a:pPr>
+            <a:r>
+              <a:rPr sz="1600" b="0" i="0">
+                <a:solidFill>
+                  <a:srgbClr val="333333"/>
+                </a:solidFill>
+                <a:latin typeface="Calibri"/>
+              </a:rPr>
+              <a:t>Siguiente clase: continuamos con el siguiente tema</a:t>
+            </a:r>
+          </a:p>
+        </p:txBody>
+      </p:sp>
+      <p:sp>
+        <p:nvSpPr>
+          <p:cNvPr id="6" name="TextBox 5"/>
           <p:cNvSpPr txBox="1"/>
           <p:nvPr/>
         </p:nvSpPr>
         <p:spPr>
           <a:xfrm>
-            <a:off x="457200" y="164592"/>
-            <a:ext cx="11277295" cy="502920"/>
+            <a:off x="457200" y="4754880"/>
+            <a:ext cx="11277295" cy="640080"/>
           </a:xfrm>
           <a:prstGeom prst="rect">
             <a:avLst/>
@@ -6506,2022 +6429,15 @@
           </a:bodyPr>
           <a:lstStyle/>
           <a:p>
-            <a:r>
-              <a:rPr sz="2600" b="1" i="0">
-                <a:solidFill>
-                  <a:srgbClr val="FFFFFF"/>
-                </a:solidFill>
-                <a:latin typeface="Calibri"/>
-              </a:rPr>
-              <a:t>Taller PI — por que importa</a:t>
-            </a:r>
-          </a:p>
-        </p:txBody>
-      </p:sp>
-      <p:sp>
-        <p:nvSpPr>
-          <p:cNvPr id="5" name="TextBox 4"/>
-          <p:cNvSpPr txBox="1"/>
-          <p:nvPr/>
-        </p:nvSpPr>
-        <p:spPr>
-          <a:xfrm>
-            <a:off x="457200" y="1170432"/>
-            <a:ext cx="11277295" cy="5230368"/>
-          </a:xfrm>
-          <a:prstGeom prst="rect">
-            <a:avLst/>
-          </a:prstGeom>
-          <a:noFill/>
-        </p:spPr>
-        <p:txBody>
-          <a:bodyPr wrap="square">
-            <a:spAutoFit/>
-          </a:bodyPr>
-          <a:lstStyle/>
-          <a:p>
-            <a:pPr>
-              <a:spcAft>
-                <a:spcPts val="800"/>
-              </a:spcAft>
-            </a:pPr>
-            <a:r>
-              <a:rPr sz="2000" b="0" i="0">
-                <a:solidFill>
-                  <a:srgbClr val="333333"/>
-                </a:solidFill>
-                <a:latin typeface="Calibri"/>
-              </a:rPr>
-              <a:t>–   </a:t>
-            </a:r>
+            <a:pPr algn="ctr"/>
             <a:r>
               <a:rPr sz="2000" b="1" i="0">
                 <a:solidFill>
-                  <a:srgbClr val="333333"/>
-                </a:solidFill>
-                <a:latin typeface="Calibri"/>
-              </a:rPr>
-              <a:t>Por que importa al PI:</a:t>
-            </a:r>
-            <a:r>
-              <a:rPr sz="2000" b="0" i="0">
-                <a:solidFill>
-                  <a:srgbClr val="333333"/>
-                </a:solidFill>
-                <a:latin typeface="Calibri"/>
-              </a:rPr>
-              <a:t> VetCare no se dibuja de una sola sentada, y hoy definimos el mapa de fases que vamos a recorrer todo el semestre y en cual de ellas se califica cada entrega.</a:t>
-            </a:r>
-          </a:p>
-          <a:p>
-            <a:pPr>
-              <a:spcAft>
-                <a:spcPts val="800"/>
-              </a:spcAft>
-            </a:pPr>
-            <a:r>
-              <a:rPr sz="2000" b="0" i="0">
-                <a:solidFill>
-                  <a:srgbClr val="333333"/>
-                </a:solidFill>
-                <a:latin typeface="Calibri"/>
-              </a:rPr>
-              <a:t>–   En la clase anterior quedo claro el dolor de Huellitas (fichas que se extravian, busquedas eternas y cero metricas); hoy ese dolor se ubica dentro de un ciclo de vida y se le pone nombre a lo que sale de cada etapa.</a:t>
-            </a:r>
-          </a:p>
-          <a:p>
-            <a:pPr>
-              <a:spcAft>
-                <a:spcPts val="800"/>
-              </a:spcAft>
-            </a:pPr>
-            <a:r>
-              <a:rPr sz="2000" b="0" i="0">
-                <a:solidFill>
-                  <a:srgbClr val="333333"/>
-                </a:solidFill>
-                <a:latin typeface="Calibri"/>
-              </a:rPr>
-              <a:t>–   Los tres casos de matricula se entienden mejor con el ciclo en la mano: aqui vivimos en requisitos y diseño, Programacion II vive en construccion y pruebas, y quien solo cursa Seminario cierra con documento de diseño y prototipo navegable.</a:t>
-            </a:r>
-          </a:p>
-        </p:txBody>
-      </p:sp>
-      <p:sp>
-        <p:nvSpPr>
-          <p:cNvPr id="6" name="TextBox 5"/>
-          <p:cNvSpPr txBox="1"/>
-          <p:nvPr/>
-        </p:nvSpPr>
-        <p:spPr>
-          <a:xfrm>
-            <a:off x="11185855" y="6473952"/>
-            <a:ext cx="640080" cy="274320"/>
-          </a:xfrm>
-          <a:prstGeom prst="rect">
-            <a:avLst/>
-          </a:prstGeom>
-          <a:noFill/>
-        </p:spPr>
-        <p:txBody>
-          <a:bodyPr wrap="square">
-            <a:spAutoFit/>
-          </a:bodyPr>
-          <a:lstStyle/>
-          <a:p>
-            <a:pPr algn="r"/>
-            <a:r>
-              <a:rPr sz="1100" b="0" i="0">
-                <a:solidFill>
-                  <a:srgbClr val="666666"/>
-                </a:solidFill>
-                <a:latin typeface="Calibri"/>
-              </a:rPr>
-              <a:t>16</a:t>
-            </a:r>
-          </a:p>
-        </p:txBody>
-      </p:sp>
-    </p:spTree>
-  </p:cSld>
-  <p:clrMapOvr>
-    <a:masterClrMapping/>
-  </p:clrMapOvr>
-</p:sld>
-</file>
-
-<file path=ppt/slides/slide17.xml><?xml version="1.0" encoding="utf-8"?>
-<p:sld xmlns:a="http://schemas.openxmlformats.org/drawingml/2006/main" xmlns:p="http://schemas.openxmlformats.org/presentationml/2006/main" xmlns:r="http://schemas.openxmlformats.org/officeDocument/2006/relationships">
-  <p:cSld>
-    <p:bg>
-      <p:bgPr>
-        <a:solidFill>
-          <a:srgbClr val="FFFFFF"/>
-        </a:solidFill>
-        <a:effectLst/>
-      </p:bgPr>
-    </p:bg>
-    <p:spTree>
-      <p:nvGrpSpPr>
-        <p:cNvPr id="1" name=""/>
-        <p:cNvGrpSpPr/>
-        <p:nvPr/>
-      </p:nvGrpSpPr>
-      <p:grpSpPr/>
-      <p:sp>
-        <p:nvSpPr>
-          <p:cNvPr id="2" name="Rectangle 1"/>
-          <p:cNvSpPr/>
-          <p:nvPr/>
-        </p:nvSpPr>
-        <p:spPr>
-          <a:xfrm>
-            <a:off x="0" y="0"/>
-            <a:ext cx="12191695" cy="960120"/>
-          </a:xfrm>
-          <a:prstGeom prst="rect">
-            <a:avLst/>
-          </a:prstGeom>
-          <a:solidFill>
-            <a:srgbClr val="095292"/>
-          </a:solidFill>
-          <a:ln>
-            <a:noFill/>
-          </a:ln>
-        </p:spPr>
-        <p:style>
-          <a:lnRef idx="1">
-            <a:schemeClr val="accent1"/>
-          </a:lnRef>
-          <a:fillRef idx="3">
-            <a:schemeClr val="accent1"/>
-          </a:fillRef>
-          <a:effectRef idx="2">
-            <a:schemeClr val="accent1"/>
-          </a:effectRef>
-          <a:fontRef idx="minor">
-            <a:schemeClr val="lt1"/>
-          </a:fontRef>
-        </p:style>
-        <p:txBody>
-          <a:bodyPr rtlCol="0" anchor="ctr"/>
-          <a:lstStyle/>
-          <a:p>
-            <a:pPr algn="ctr"/>
-          </a:p>
-        </p:txBody>
-      </p:sp>
-      <p:sp>
-        <p:nvSpPr>
-          <p:cNvPr id="3" name="Rectangle 2"/>
-          <p:cNvSpPr/>
-          <p:nvPr/>
-        </p:nvSpPr>
-        <p:spPr>
-          <a:xfrm>
-            <a:off x="0" y="960120"/>
-            <a:ext cx="12191695" cy="41148"/>
-          </a:xfrm>
-          <a:prstGeom prst="rect">
-            <a:avLst/>
-          </a:prstGeom>
-          <a:solidFill>
-            <a:srgbClr val="FFD000"/>
-          </a:solidFill>
-          <a:ln>
-            <a:noFill/>
-          </a:ln>
-        </p:spPr>
-        <p:style>
-          <a:lnRef idx="1">
-            <a:schemeClr val="accent1"/>
-          </a:lnRef>
-          <a:fillRef idx="3">
-            <a:schemeClr val="accent1"/>
-          </a:fillRef>
-          <a:effectRef idx="2">
-            <a:schemeClr val="accent1"/>
-          </a:effectRef>
-          <a:fontRef idx="minor">
-            <a:schemeClr val="lt1"/>
-          </a:fontRef>
-        </p:style>
-        <p:txBody>
-          <a:bodyPr rtlCol="0" anchor="ctr"/>
-          <a:lstStyle/>
-          <a:p>
-            <a:pPr algn="ctr"/>
-          </a:p>
-        </p:txBody>
-      </p:sp>
-      <p:sp>
-        <p:nvSpPr>
-          <p:cNvPr id="4" name="TextBox 3"/>
-          <p:cNvSpPr txBox="1"/>
-          <p:nvPr/>
-        </p:nvSpPr>
-        <p:spPr>
-          <a:xfrm>
-            <a:off x="457200" y="164592"/>
-            <a:ext cx="11277295" cy="502920"/>
-          </a:xfrm>
-          <a:prstGeom prst="rect">
-            <a:avLst/>
-          </a:prstGeom>
-          <a:noFill/>
-        </p:spPr>
-        <p:txBody>
-          <a:bodyPr wrap="square">
-            <a:spAutoFit/>
-          </a:bodyPr>
-          <a:lstStyle/>
-          <a:p>
-            <a:r>
-              <a:rPr sz="2600" b="1" i="0">
-                <a:solidFill>
-                  <a:srgbClr val="FFFFFF"/>
-                </a:solidFill>
-                <a:latin typeface="Calibri"/>
-              </a:rPr>
-              <a:t>Taller PI — punto de partida</a:t>
-            </a:r>
-          </a:p>
-        </p:txBody>
-      </p:sp>
-      <p:sp>
-        <p:nvSpPr>
-          <p:cNvPr id="5" name="TextBox 4"/>
-          <p:cNvSpPr txBox="1"/>
-          <p:nvPr/>
-        </p:nvSpPr>
-        <p:spPr>
-          <a:xfrm>
-            <a:off x="457200" y="1170432"/>
-            <a:ext cx="11277295" cy="5230368"/>
-          </a:xfrm>
-          <a:prstGeom prst="rect">
-            <a:avLst/>
-          </a:prstGeom>
-          <a:noFill/>
-        </p:spPr>
-        <p:txBody>
-          <a:bodyPr wrap="square">
-            <a:spAutoFit/>
-          </a:bodyPr>
-          <a:lstStyle/>
-          <a:p>
-            <a:pPr>
-              <a:spcAft>
-                <a:spcPts val="800"/>
-              </a:spcAft>
-            </a:pPr>
-            <a:r>
-              <a:rPr sz="2000" b="0" i="0">
-                <a:solidFill>
-                  <a:srgbClr val="333333"/>
-                </a:solidFill>
-                <a:latin typeface="Calibri"/>
-              </a:rPr>
-              <a:t>–   Huellitas guarda hoy 5.000 fichas en carpetas de carton dentro de un archivador metalico, y las citas del dia se anotan a mano en una libreta que se lleva la auxiliar.</a:t>
-            </a:r>
-          </a:p>
-          <a:p>
-            <a:pPr>
-              <a:spcAft>
-                <a:spcPts val="800"/>
-              </a:spcAft>
-            </a:pPr>
-            <a:r>
-              <a:rPr sz="2000" b="0" i="0">
-                <a:solidFill>
-                  <a:srgbClr val="333333"/>
-                </a:solidFill>
-                <a:latin typeface="Calibri"/>
-              </a:rPr>
-              <a:t>–   El equipo tiene una lista cruda de necesidades salida de la entrevista, pero nadie ha definido que documento sale de cada etapa ni quien lo firma como aprobado.</a:t>
-            </a:r>
-          </a:p>
-          <a:p>
-            <a:pPr>
-              <a:spcAft>
-                <a:spcPts val="800"/>
-              </a:spcAft>
-            </a:pPr>
-            <a:r>
-              <a:rPr sz="2000" b="0" i="0">
-                <a:solidFill>
-                  <a:srgbClr val="333333"/>
-                </a:solidFill>
-                <a:latin typeface="Calibri"/>
-              </a:rPr>
-              <a:t>–   No existe ni una linea de codigo ni un diagrama formal: se parte de cero y el unico insumo real es lo que dijo la clinica.</a:t>
-            </a:r>
-          </a:p>
-        </p:txBody>
-      </p:sp>
-      <p:sp>
-        <p:nvSpPr>
-          <p:cNvPr id="6" name="TextBox 5"/>
-          <p:cNvSpPr txBox="1"/>
-          <p:nvPr/>
-        </p:nvSpPr>
-        <p:spPr>
-          <a:xfrm>
-            <a:off x="11185855" y="6473952"/>
-            <a:ext cx="640080" cy="274320"/>
-          </a:xfrm>
-          <a:prstGeom prst="rect">
-            <a:avLst/>
-          </a:prstGeom>
-          <a:noFill/>
-        </p:spPr>
-        <p:txBody>
-          <a:bodyPr wrap="square">
-            <a:spAutoFit/>
-          </a:bodyPr>
-          <a:lstStyle/>
-          <a:p>
-            <a:pPr algn="r"/>
-            <a:r>
-              <a:rPr sz="1100" b="0" i="0">
-                <a:solidFill>
-                  <a:srgbClr val="666666"/>
-                </a:solidFill>
-                <a:latin typeface="Calibri"/>
-              </a:rPr>
-              <a:t>17</a:t>
-            </a:r>
-          </a:p>
-        </p:txBody>
-      </p:sp>
-    </p:spTree>
-  </p:cSld>
-  <p:clrMapOvr>
-    <a:masterClrMapping/>
-  </p:clrMapOvr>
-</p:sld>
-</file>
-
-<file path=ppt/slides/slide18.xml><?xml version="1.0" encoding="utf-8"?>
-<p:sld xmlns:a="http://schemas.openxmlformats.org/drawingml/2006/main" xmlns:p="http://schemas.openxmlformats.org/presentationml/2006/main" xmlns:r="http://schemas.openxmlformats.org/officeDocument/2006/relationships">
-  <p:cSld>
-    <p:bg>
-      <p:bgPr>
-        <a:solidFill>
-          <a:srgbClr val="FFFFFF"/>
-        </a:solidFill>
-        <a:effectLst/>
-      </p:bgPr>
-    </p:bg>
-    <p:spTree>
-      <p:nvGrpSpPr>
-        <p:cNvPr id="1" name=""/>
-        <p:cNvGrpSpPr/>
-        <p:nvPr/>
-      </p:nvGrpSpPr>
-      <p:grpSpPr/>
-      <p:sp>
-        <p:nvSpPr>
-          <p:cNvPr id="2" name="Rectangle 1"/>
-          <p:cNvSpPr/>
-          <p:nvPr/>
-        </p:nvSpPr>
-        <p:spPr>
-          <a:xfrm>
-            <a:off x="0" y="0"/>
-            <a:ext cx="12191695" cy="960120"/>
-          </a:xfrm>
-          <a:prstGeom prst="rect">
-            <a:avLst/>
-          </a:prstGeom>
-          <a:solidFill>
-            <a:srgbClr val="095292"/>
-          </a:solidFill>
-          <a:ln>
-            <a:noFill/>
-          </a:ln>
-        </p:spPr>
-        <p:style>
-          <a:lnRef idx="1">
-            <a:schemeClr val="accent1"/>
-          </a:lnRef>
-          <a:fillRef idx="3">
-            <a:schemeClr val="accent1"/>
-          </a:fillRef>
-          <a:effectRef idx="2">
-            <a:schemeClr val="accent1"/>
-          </a:effectRef>
-          <a:fontRef idx="minor">
-            <a:schemeClr val="lt1"/>
-          </a:fontRef>
-        </p:style>
-        <p:txBody>
-          <a:bodyPr rtlCol="0" anchor="ctr"/>
-          <a:lstStyle/>
-          <a:p>
-            <a:pPr algn="ctr"/>
-          </a:p>
-        </p:txBody>
-      </p:sp>
-      <p:sp>
-        <p:nvSpPr>
-          <p:cNvPr id="3" name="Rectangle 2"/>
-          <p:cNvSpPr/>
-          <p:nvPr/>
-        </p:nvSpPr>
-        <p:spPr>
-          <a:xfrm>
-            <a:off x="0" y="960120"/>
-            <a:ext cx="12191695" cy="41148"/>
-          </a:xfrm>
-          <a:prstGeom prst="rect">
-            <a:avLst/>
-          </a:prstGeom>
-          <a:solidFill>
-            <a:srgbClr val="FFD000"/>
-          </a:solidFill>
-          <a:ln>
-            <a:noFill/>
-          </a:ln>
-        </p:spPr>
-        <p:style>
-          <a:lnRef idx="1">
-            <a:schemeClr val="accent1"/>
-          </a:lnRef>
-          <a:fillRef idx="3">
-            <a:schemeClr val="accent1"/>
-          </a:fillRef>
-          <a:effectRef idx="2">
-            <a:schemeClr val="accent1"/>
-          </a:effectRef>
-          <a:fontRef idx="minor">
-            <a:schemeClr val="lt1"/>
-          </a:fontRef>
-        </p:style>
-        <p:txBody>
-          <a:bodyPr rtlCol="0" anchor="ctr"/>
-          <a:lstStyle/>
-          <a:p>
-            <a:pPr algn="ctr"/>
-          </a:p>
-        </p:txBody>
-      </p:sp>
-      <p:sp>
-        <p:nvSpPr>
-          <p:cNvPr id="4" name="TextBox 3"/>
-          <p:cNvSpPr txBox="1"/>
-          <p:nvPr/>
-        </p:nvSpPr>
-        <p:spPr>
-          <a:xfrm>
-            <a:off x="457200" y="164592"/>
-            <a:ext cx="11277295" cy="502920"/>
-          </a:xfrm>
-          <a:prstGeom prst="rect">
-            <a:avLst/>
-          </a:prstGeom>
-          <a:noFill/>
-        </p:spPr>
-        <p:txBody>
-          <a:bodyPr wrap="square">
-            <a:spAutoFit/>
-          </a:bodyPr>
-          <a:lstStyle/>
-          <a:p>
-            <a:r>
-              <a:rPr sz="2600" b="1" i="0">
-                <a:solidFill>
-                  <a:srgbClr val="FFFFFF"/>
-                </a:solidFill>
-                <a:latin typeface="Calibri"/>
-              </a:rPr>
-              <a:t>Taller PI — pasos guiados</a:t>
-            </a:r>
-          </a:p>
-        </p:txBody>
-      </p:sp>
-      <p:sp>
-        <p:nvSpPr>
-          <p:cNvPr id="5" name="Rounded Rectangle 4"/>
-          <p:cNvSpPr/>
-          <p:nvPr/>
-        </p:nvSpPr>
-        <p:spPr>
-          <a:xfrm>
-            <a:off x="457200" y="1234440"/>
-            <a:ext cx="11277295" cy="950976"/>
-          </a:xfrm>
-          <a:prstGeom prst="roundRect">
-            <a:avLst>
-              <a:gd name="adj" fmla="val 12000"/>
-            </a:avLst>
-          </a:prstGeom>
-          <a:solidFill>
-            <a:srgbClr val="F2F2F2"/>
-          </a:solidFill>
-          <a:ln>
-            <a:noFill/>
-          </a:ln>
-        </p:spPr>
-        <p:style>
-          <a:lnRef idx="1">
-            <a:schemeClr val="accent1"/>
-          </a:lnRef>
-          <a:fillRef idx="3">
-            <a:schemeClr val="accent1"/>
-          </a:fillRef>
-          <a:effectRef idx="2">
-            <a:schemeClr val="accent1"/>
-          </a:effectRef>
-          <a:fontRef idx="minor">
-            <a:schemeClr val="lt1"/>
-          </a:fontRef>
-        </p:style>
-        <p:txBody>
-          <a:bodyPr rtlCol="0" anchor="ctr"/>
-          <a:lstStyle/>
-          <a:p>
-            <a:pPr algn="ctr"/>
-          </a:p>
-        </p:txBody>
-      </p:sp>
-      <p:sp>
-        <p:nvSpPr>
-          <p:cNvPr id="6" name="Rounded Rectangle 5"/>
-          <p:cNvSpPr/>
-          <p:nvPr/>
-        </p:nvSpPr>
-        <p:spPr>
-          <a:xfrm>
-            <a:off x="594360" y="1490472"/>
-            <a:ext cx="438912" cy="438912"/>
-          </a:xfrm>
-          <a:prstGeom prst="roundRect">
-            <a:avLst>
-              <a:gd name="adj" fmla="val 12000"/>
-            </a:avLst>
-          </a:prstGeom>
-          <a:solidFill>
-            <a:srgbClr val="095292"/>
-          </a:solidFill>
-          <a:ln>
-            <a:noFill/>
-          </a:ln>
-        </p:spPr>
-        <p:style>
-          <a:lnRef idx="1">
-            <a:schemeClr val="accent1"/>
-          </a:lnRef>
-          <a:fillRef idx="3">
-            <a:schemeClr val="accent1"/>
-          </a:fillRef>
-          <a:effectRef idx="2">
-            <a:schemeClr val="accent1"/>
-          </a:effectRef>
-          <a:fontRef idx="minor">
-            <a:schemeClr val="lt1"/>
-          </a:fontRef>
-        </p:style>
-        <p:txBody>
-          <a:bodyPr rtlCol="0" anchor="ctr"/>
-          <a:lstStyle/>
-          <a:p>
-            <a:pPr algn="ctr"/>
-          </a:p>
-        </p:txBody>
-      </p:sp>
-      <p:sp>
-        <p:nvSpPr>
-          <p:cNvPr id="7" name="TextBox 6"/>
-          <p:cNvSpPr txBox="1"/>
-          <p:nvPr/>
-        </p:nvSpPr>
-        <p:spPr>
-          <a:xfrm>
-            <a:off x="594360" y="1490472"/>
-            <a:ext cx="438912" cy="438912"/>
-          </a:xfrm>
-          <a:prstGeom prst="rect">
-            <a:avLst/>
-          </a:prstGeom>
-          <a:noFill/>
-        </p:spPr>
-        <p:txBody>
-          <a:bodyPr wrap="square" anchor="ctr"/>
-          <a:lstStyle/>
-          <a:p>
-            <a:pPr algn="ctr"/>
-            <a:r>
-              <a:rPr sz="1600" b="1" i="0">
-                <a:solidFill>
-                  <a:srgbClr val="FFFFFF"/>
-                </a:solidFill>
-                <a:latin typeface="Calibri"/>
-              </a:rPr>
-              <a:t>1</a:t>
-            </a:r>
-          </a:p>
-        </p:txBody>
-      </p:sp>
-      <p:sp>
-        <p:nvSpPr>
-          <p:cNvPr id="8" name="TextBox 7"/>
-          <p:cNvSpPr txBox="1"/>
-          <p:nvPr/>
-        </p:nvSpPr>
-        <p:spPr>
-          <a:xfrm>
-            <a:off x="1188720" y="1325880"/>
-            <a:ext cx="10271455" cy="786384"/>
-          </a:xfrm>
-          <a:prstGeom prst="rect">
-            <a:avLst/>
-          </a:prstGeom>
-          <a:noFill/>
-        </p:spPr>
-        <p:txBody>
-          <a:bodyPr wrap="square" anchor="ctr"/>
-          <a:lstStyle/>
-          <a:p>
-            <a:r>
-              <a:rPr sz="1400" b="1" i="0">
-                <a:solidFill>
-                  <a:srgbClr val="095292"/>
-                </a:solidFill>
-                <a:latin typeface="Calibri"/>
-              </a:rPr>
-              <a:t>En Google Docs cree la tabla de cuatro columnas (Fase / Pregunta que responde / Artefacto concreto de VetCare / Quien lo aprueba) y llenela con las cinco fases; en la columna del artefacto esta prohibido escribir generalidades: debe decir cosas como 'Lista RF-01 a RF-12 de Huellitas' o 'Mockup de la ficha del paciente'.</a:t>
-            </a:r>
-          </a:p>
-        </p:txBody>
-      </p:sp>
-      <p:sp>
-        <p:nvSpPr>
-          <p:cNvPr id="9" name="Rounded Rectangle 8"/>
-          <p:cNvSpPr/>
-          <p:nvPr/>
-        </p:nvSpPr>
-        <p:spPr>
-          <a:xfrm>
-            <a:off x="457200" y="2276856"/>
-            <a:ext cx="11277295" cy="950976"/>
-          </a:xfrm>
-          <a:prstGeom prst="roundRect">
-            <a:avLst>
-              <a:gd name="adj" fmla="val 12000"/>
-            </a:avLst>
-          </a:prstGeom>
-          <a:solidFill>
-            <a:srgbClr val="E8F4FA"/>
-          </a:solidFill>
-          <a:ln>
-            <a:noFill/>
-          </a:ln>
-        </p:spPr>
-        <p:style>
-          <a:lnRef idx="1">
-            <a:schemeClr val="accent1"/>
-          </a:lnRef>
-          <a:fillRef idx="3">
-            <a:schemeClr val="accent1"/>
-          </a:fillRef>
-          <a:effectRef idx="2">
-            <a:schemeClr val="accent1"/>
-          </a:effectRef>
-          <a:fontRef idx="minor">
-            <a:schemeClr val="lt1"/>
-          </a:fontRef>
-        </p:style>
-        <p:txBody>
-          <a:bodyPr rtlCol="0" anchor="ctr"/>
-          <a:lstStyle/>
-          <a:p>
-            <a:pPr algn="ctr"/>
-          </a:p>
-        </p:txBody>
-      </p:sp>
-      <p:sp>
-        <p:nvSpPr>
-          <p:cNvPr id="10" name="Rounded Rectangle 9"/>
-          <p:cNvSpPr/>
-          <p:nvPr/>
-        </p:nvSpPr>
-        <p:spPr>
-          <a:xfrm>
-            <a:off x="594360" y="2532888"/>
-            <a:ext cx="438912" cy="438912"/>
-          </a:xfrm>
-          <a:prstGeom prst="roundRect">
-            <a:avLst>
-              <a:gd name="adj" fmla="val 12000"/>
-            </a:avLst>
-          </a:prstGeom>
-          <a:solidFill>
-            <a:srgbClr val="095292"/>
-          </a:solidFill>
-          <a:ln>
-            <a:noFill/>
-          </a:ln>
-        </p:spPr>
-        <p:style>
-          <a:lnRef idx="1">
-            <a:schemeClr val="accent1"/>
-          </a:lnRef>
-          <a:fillRef idx="3">
-            <a:schemeClr val="accent1"/>
-          </a:fillRef>
-          <a:effectRef idx="2">
-            <a:schemeClr val="accent1"/>
-          </a:effectRef>
-          <a:fontRef idx="minor">
-            <a:schemeClr val="lt1"/>
-          </a:fontRef>
-        </p:style>
-        <p:txBody>
-          <a:bodyPr rtlCol="0" anchor="ctr"/>
-          <a:lstStyle/>
-          <a:p>
-            <a:pPr algn="ctr"/>
-          </a:p>
-        </p:txBody>
-      </p:sp>
-      <p:sp>
-        <p:nvSpPr>
-          <p:cNvPr id="11" name="TextBox 10"/>
-          <p:cNvSpPr txBox="1"/>
-          <p:nvPr/>
-        </p:nvSpPr>
-        <p:spPr>
-          <a:xfrm>
-            <a:off x="594360" y="2532888"/>
-            <a:ext cx="438912" cy="438912"/>
-          </a:xfrm>
-          <a:prstGeom prst="rect">
-            <a:avLst/>
-          </a:prstGeom>
-          <a:noFill/>
-        </p:spPr>
-        <p:txBody>
-          <a:bodyPr wrap="square" anchor="ctr"/>
-          <a:lstStyle/>
-          <a:p>
-            <a:pPr algn="ctr"/>
-            <a:r>
-              <a:rPr sz="1600" b="1" i="0">
-                <a:solidFill>
-                  <a:srgbClr val="FFFFFF"/>
-                </a:solidFill>
-                <a:latin typeface="Calibri"/>
-              </a:rPr>
-              <a:t>2</a:t>
-            </a:r>
-          </a:p>
-        </p:txBody>
-      </p:sp>
-      <p:sp>
-        <p:nvSpPr>
-          <p:cNvPr id="12" name="TextBox 11"/>
-          <p:cNvSpPr txBox="1"/>
-          <p:nvPr/>
-        </p:nvSpPr>
-        <p:spPr>
-          <a:xfrm>
-            <a:off x="1188720" y="2368296"/>
-            <a:ext cx="10271455" cy="786384"/>
-          </a:xfrm>
-          <a:prstGeom prst="rect">
-            <a:avLst/>
-          </a:prstGeom>
-          <a:noFill/>
-        </p:spPr>
-        <p:txBody>
-          <a:bodyPr wrap="square" anchor="ctr"/>
-          <a:lstStyle/>
-          <a:p>
-            <a:r>
-              <a:rPr sz="1500" b="1" i="0">
-                <a:solidFill>
-                  <a:srgbClr val="095292"/>
-                </a:solidFill>
-                <a:latin typeface="Calibri"/>
-              </a:rPr>
-              <a:t>Marque con relleno amarillo la fila de la fase donde esta el equipo hoy y escriba debajo dos evidencias verificables que lo demuestren (por ejemplo: 'existe la entrevista transcrita' y 'no existe ningun diagrama aprobado').</a:t>
-            </a:r>
-          </a:p>
-        </p:txBody>
-      </p:sp>
-      <p:sp>
-        <p:nvSpPr>
-          <p:cNvPr id="13" name="Rounded Rectangle 12"/>
-          <p:cNvSpPr/>
-          <p:nvPr/>
-        </p:nvSpPr>
-        <p:spPr>
-          <a:xfrm>
-            <a:off x="457200" y="3319272"/>
-            <a:ext cx="11277295" cy="950976"/>
-          </a:xfrm>
-          <a:prstGeom prst="roundRect">
-            <a:avLst>
-              <a:gd name="adj" fmla="val 12000"/>
-            </a:avLst>
-          </a:prstGeom>
-          <a:solidFill>
-            <a:srgbClr val="F2F2F2"/>
-          </a:solidFill>
-          <a:ln>
-            <a:noFill/>
-          </a:ln>
-        </p:spPr>
-        <p:style>
-          <a:lnRef idx="1">
-            <a:schemeClr val="accent1"/>
-          </a:lnRef>
-          <a:fillRef idx="3">
-            <a:schemeClr val="accent1"/>
-          </a:fillRef>
-          <a:effectRef idx="2">
-            <a:schemeClr val="accent1"/>
-          </a:effectRef>
-          <a:fontRef idx="minor">
-            <a:schemeClr val="lt1"/>
-          </a:fontRef>
-        </p:style>
-        <p:txBody>
-          <a:bodyPr rtlCol="0" anchor="ctr"/>
-          <a:lstStyle/>
-          <a:p>
-            <a:pPr algn="ctr"/>
-          </a:p>
-        </p:txBody>
-      </p:sp>
-      <p:sp>
-        <p:nvSpPr>
-          <p:cNvPr id="14" name="Rounded Rectangle 13"/>
-          <p:cNvSpPr/>
-          <p:nvPr/>
-        </p:nvSpPr>
-        <p:spPr>
-          <a:xfrm>
-            <a:off x="594360" y="3575304"/>
-            <a:ext cx="438912" cy="438912"/>
-          </a:xfrm>
-          <a:prstGeom prst="roundRect">
-            <a:avLst>
-              <a:gd name="adj" fmla="val 12000"/>
-            </a:avLst>
-          </a:prstGeom>
-          <a:solidFill>
-            <a:srgbClr val="095292"/>
-          </a:solidFill>
-          <a:ln>
-            <a:noFill/>
-          </a:ln>
-        </p:spPr>
-        <p:style>
-          <a:lnRef idx="1">
-            <a:schemeClr val="accent1"/>
-          </a:lnRef>
-          <a:fillRef idx="3">
-            <a:schemeClr val="accent1"/>
-          </a:fillRef>
-          <a:effectRef idx="2">
-            <a:schemeClr val="accent1"/>
-          </a:effectRef>
-          <a:fontRef idx="minor">
-            <a:schemeClr val="lt1"/>
-          </a:fontRef>
-        </p:style>
-        <p:txBody>
-          <a:bodyPr rtlCol="0" anchor="ctr"/>
-          <a:lstStyle/>
-          <a:p>
-            <a:pPr algn="ctr"/>
-          </a:p>
-        </p:txBody>
-      </p:sp>
-      <p:sp>
-        <p:nvSpPr>
-          <p:cNvPr id="15" name="TextBox 14"/>
-          <p:cNvSpPr txBox="1"/>
-          <p:nvPr/>
-        </p:nvSpPr>
-        <p:spPr>
-          <a:xfrm>
-            <a:off x="594360" y="3575304"/>
-            <a:ext cx="438912" cy="438912"/>
-          </a:xfrm>
-          <a:prstGeom prst="rect">
-            <a:avLst/>
-          </a:prstGeom>
-          <a:noFill/>
-        </p:spPr>
-        <p:txBody>
-          <a:bodyPr wrap="square" anchor="ctr"/>
-          <a:lstStyle/>
-          <a:p>
-            <a:pPr algn="ctr"/>
-            <a:r>
-              <a:rPr sz="1600" b="1" i="0">
-                <a:solidFill>
-                  <a:srgbClr val="FFFFFF"/>
-                </a:solidFill>
-                <a:latin typeface="Calibri"/>
-              </a:rPr>
-              <a:t>3</a:t>
-            </a:r>
-          </a:p>
-        </p:txBody>
-      </p:sp>
-      <p:sp>
-        <p:nvSpPr>
-          <p:cNvPr id="16" name="TextBox 15"/>
-          <p:cNvSpPr txBox="1"/>
-          <p:nvPr/>
-        </p:nvSpPr>
-        <p:spPr>
-          <a:xfrm>
-            <a:off x="1188720" y="3410712"/>
-            <a:ext cx="10271455" cy="786384"/>
-          </a:xfrm>
-          <a:prstGeom prst="rect">
-            <a:avLst/>
-          </a:prstGeom>
-          <a:noFill/>
-        </p:spPr>
-        <p:txBody>
-          <a:bodyPr wrap="square" anchor="ctr"/>
-          <a:lstStyle/>
-          <a:p>
-            <a:r>
-              <a:rPr sz="1500" b="1" i="0">
-                <a:solidFill>
-                  <a:srgbClr val="095292"/>
-                </a:solidFill>
-                <a:latin typeface="Calibri"/>
-              </a:rPr>
-              <a:t>En draw.io dibuje el recorrido lineal de VetCare: cinco cajas en fila, y sobre cada flecha escriba el artefacto que se entrega para poder pasar a la siguiente fase.</a:t>
-            </a:r>
-          </a:p>
-        </p:txBody>
-      </p:sp>
-      <p:sp>
-        <p:nvSpPr>
-          <p:cNvPr id="17" name="Rounded Rectangle 16"/>
-          <p:cNvSpPr/>
-          <p:nvPr/>
-        </p:nvSpPr>
-        <p:spPr>
-          <a:xfrm>
-            <a:off x="457200" y="4361688"/>
-            <a:ext cx="11277295" cy="950976"/>
-          </a:xfrm>
-          <a:prstGeom prst="roundRect">
-            <a:avLst>
-              <a:gd name="adj" fmla="val 12000"/>
-            </a:avLst>
-          </a:prstGeom>
-          <a:solidFill>
-            <a:srgbClr val="E8F4FA"/>
-          </a:solidFill>
-          <a:ln>
-            <a:noFill/>
-          </a:ln>
-        </p:spPr>
-        <p:style>
-          <a:lnRef idx="1">
-            <a:schemeClr val="accent1"/>
-          </a:lnRef>
-          <a:fillRef idx="3">
-            <a:schemeClr val="accent1"/>
-          </a:fillRef>
-          <a:effectRef idx="2">
-            <a:schemeClr val="accent1"/>
-          </a:effectRef>
-          <a:fontRef idx="minor">
-            <a:schemeClr val="lt1"/>
-          </a:fontRef>
-        </p:style>
-        <p:txBody>
-          <a:bodyPr rtlCol="0" anchor="ctr"/>
-          <a:lstStyle/>
-          <a:p>
-            <a:pPr algn="ctr"/>
-          </a:p>
-        </p:txBody>
-      </p:sp>
-      <p:sp>
-        <p:nvSpPr>
-          <p:cNvPr id="18" name="Rounded Rectangle 17"/>
-          <p:cNvSpPr/>
-          <p:nvPr/>
-        </p:nvSpPr>
-        <p:spPr>
-          <a:xfrm>
-            <a:off x="594360" y="4617720"/>
-            <a:ext cx="438912" cy="438912"/>
-          </a:xfrm>
-          <a:prstGeom prst="roundRect">
-            <a:avLst>
-              <a:gd name="adj" fmla="val 12000"/>
-            </a:avLst>
-          </a:prstGeom>
-          <a:solidFill>
-            <a:srgbClr val="095292"/>
-          </a:solidFill>
-          <a:ln>
-            <a:noFill/>
-          </a:ln>
-        </p:spPr>
-        <p:style>
-          <a:lnRef idx="1">
-            <a:schemeClr val="accent1"/>
-          </a:lnRef>
-          <a:fillRef idx="3">
-            <a:schemeClr val="accent1"/>
-          </a:fillRef>
-          <a:effectRef idx="2">
-            <a:schemeClr val="accent1"/>
-          </a:effectRef>
-          <a:fontRef idx="minor">
-            <a:schemeClr val="lt1"/>
-          </a:fontRef>
-        </p:style>
-        <p:txBody>
-          <a:bodyPr rtlCol="0" anchor="ctr"/>
-          <a:lstStyle/>
-          <a:p>
-            <a:pPr algn="ctr"/>
-          </a:p>
-        </p:txBody>
-      </p:sp>
-      <p:sp>
-        <p:nvSpPr>
-          <p:cNvPr id="19" name="TextBox 18"/>
-          <p:cNvSpPr txBox="1"/>
-          <p:nvPr/>
-        </p:nvSpPr>
-        <p:spPr>
-          <a:xfrm>
-            <a:off x="594360" y="4617720"/>
-            <a:ext cx="438912" cy="438912"/>
-          </a:xfrm>
-          <a:prstGeom prst="rect">
-            <a:avLst/>
-          </a:prstGeom>
-          <a:noFill/>
-        </p:spPr>
-        <p:txBody>
-          <a:bodyPr wrap="square" anchor="ctr"/>
-          <a:lstStyle/>
-          <a:p>
-            <a:pPr algn="ctr"/>
-            <a:r>
-              <a:rPr sz="1600" b="1" i="0">
-                <a:solidFill>
-                  <a:srgbClr val="FFFFFF"/>
-                </a:solidFill>
-                <a:latin typeface="Calibri"/>
-              </a:rPr>
-              <a:t>4</a:t>
-            </a:r>
-          </a:p>
-        </p:txBody>
-      </p:sp>
-      <p:sp>
-        <p:nvSpPr>
-          <p:cNvPr id="20" name="TextBox 19"/>
-          <p:cNvSpPr txBox="1"/>
-          <p:nvPr/>
-        </p:nvSpPr>
-        <p:spPr>
-          <a:xfrm>
-            <a:off x="1188720" y="4453128"/>
-            <a:ext cx="10271455" cy="786384"/>
-          </a:xfrm>
-          <a:prstGeom prst="rect">
-            <a:avLst/>
-          </a:prstGeom>
-          <a:noFill/>
-        </p:spPr>
-        <p:txBody>
-          <a:bodyPr wrap="square" anchor="ctr"/>
-          <a:lstStyle/>
-          <a:p>
-            <a:r>
-              <a:rPr sz="1400" b="1" i="0">
-                <a:solidFill>
-                  <a:srgbClr val="095292"/>
-                </a:solidFill>
-                <a:latin typeface="Calibri"/>
-              </a:rPr>
-              <a:t>Duplique la pagina en draw.io y dibuje el recorrido en tres vueltas: las mismas cinco cajas, pero con las vueltas rotuladas Incremento 1 (ficha del paciente), Incremento 2 (historia clinica y busqueda) e Incremento 3 (reportes y metricas), y una flecha de retroalimentacion desde la clinica hacia requisitos.</a:t>
-            </a:r>
-          </a:p>
-        </p:txBody>
-      </p:sp>
-      <p:sp>
-        <p:nvSpPr>
-          <p:cNvPr id="21" name="Rounded Rectangle 20"/>
-          <p:cNvSpPr/>
-          <p:nvPr/>
-        </p:nvSpPr>
-        <p:spPr>
-          <a:xfrm>
-            <a:off x="457200" y="5404104"/>
-            <a:ext cx="11277295" cy="950976"/>
-          </a:xfrm>
-          <a:prstGeom prst="roundRect">
-            <a:avLst>
-              <a:gd name="adj" fmla="val 12000"/>
-            </a:avLst>
-          </a:prstGeom>
-          <a:solidFill>
-            <a:srgbClr val="F2F2F2"/>
-          </a:solidFill>
-          <a:ln>
-            <a:noFill/>
-          </a:ln>
-        </p:spPr>
-        <p:style>
-          <a:lnRef idx="1">
-            <a:schemeClr val="accent1"/>
-          </a:lnRef>
-          <a:fillRef idx="3">
-            <a:schemeClr val="accent1"/>
-          </a:fillRef>
-          <a:effectRef idx="2">
-            <a:schemeClr val="accent1"/>
-          </a:effectRef>
-          <a:fontRef idx="minor">
-            <a:schemeClr val="lt1"/>
-          </a:fontRef>
-        </p:style>
-        <p:txBody>
-          <a:bodyPr rtlCol="0" anchor="ctr"/>
-          <a:lstStyle/>
-          <a:p>
-            <a:pPr algn="ctr"/>
-          </a:p>
-        </p:txBody>
-      </p:sp>
-      <p:sp>
-        <p:nvSpPr>
-          <p:cNvPr id="22" name="Rounded Rectangle 21"/>
-          <p:cNvSpPr/>
-          <p:nvPr/>
-        </p:nvSpPr>
-        <p:spPr>
-          <a:xfrm>
-            <a:off x="594360" y="5660136"/>
-            <a:ext cx="438912" cy="438912"/>
-          </a:xfrm>
-          <a:prstGeom prst="roundRect">
-            <a:avLst>
-              <a:gd name="adj" fmla="val 12000"/>
-            </a:avLst>
-          </a:prstGeom>
-          <a:solidFill>
-            <a:srgbClr val="095292"/>
-          </a:solidFill>
-          <a:ln>
-            <a:noFill/>
-          </a:ln>
-        </p:spPr>
-        <p:style>
-          <a:lnRef idx="1">
-            <a:schemeClr val="accent1"/>
-          </a:lnRef>
-          <a:fillRef idx="3">
-            <a:schemeClr val="accent1"/>
-          </a:fillRef>
-          <a:effectRef idx="2">
-            <a:schemeClr val="accent1"/>
-          </a:effectRef>
-          <a:fontRef idx="minor">
-            <a:schemeClr val="lt1"/>
-          </a:fontRef>
-        </p:style>
-        <p:txBody>
-          <a:bodyPr rtlCol="0" anchor="ctr"/>
-          <a:lstStyle/>
-          <a:p>
-            <a:pPr algn="ctr"/>
-          </a:p>
-        </p:txBody>
-      </p:sp>
-      <p:sp>
-        <p:nvSpPr>
-          <p:cNvPr id="23" name="TextBox 22"/>
-          <p:cNvSpPr txBox="1"/>
-          <p:nvPr/>
-        </p:nvSpPr>
-        <p:spPr>
-          <a:xfrm>
-            <a:off x="594360" y="5660136"/>
-            <a:ext cx="438912" cy="438912"/>
-          </a:xfrm>
-          <a:prstGeom prst="rect">
-            <a:avLst/>
-          </a:prstGeom>
-          <a:noFill/>
-        </p:spPr>
-        <p:txBody>
-          <a:bodyPr wrap="square" anchor="ctr"/>
-          <a:lstStyle/>
-          <a:p>
-            <a:pPr algn="ctr"/>
-            <a:r>
-              <a:rPr sz="1600" b="1" i="0">
-                <a:solidFill>
-                  <a:srgbClr val="FFFFFF"/>
-                </a:solidFill>
-                <a:latin typeface="Calibri"/>
-              </a:rPr>
-              <a:t>5</a:t>
-            </a:r>
-          </a:p>
-        </p:txBody>
-      </p:sp>
-      <p:sp>
-        <p:nvSpPr>
-          <p:cNvPr id="24" name="TextBox 23"/>
-          <p:cNvSpPr txBox="1"/>
-          <p:nvPr/>
-        </p:nvSpPr>
-        <p:spPr>
-          <a:xfrm>
-            <a:off x="1188720" y="5495544"/>
-            <a:ext cx="10271455" cy="786384"/>
-          </a:xfrm>
-          <a:prstGeom prst="rect">
-            <a:avLst/>
-          </a:prstGeom>
-          <a:noFill/>
-        </p:spPr>
-        <p:txBody>
-          <a:bodyPr wrap="square" anchor="ctr"/>
-          <a:lstStyle/>
-          <a:p>
-            <a:r>
-              <a:rPr sz="1400" b="1" i="0">
-                <a:solidFill>
-                  <a:srgbClr val="095292"/>
-                </a:solidFill>
-                <a:latin typeface="Calibri"/>
-              </a:rPr>
-              <a:t>Escriba al final del documento un parrafo de tres renglones titulado 'Producto vs proyecto en VetCare' que responda: cuando termina el proyecto, cuando terminaria el producto y un ejemplo concreto de una solicitud de mantenimiento; exporte a PDF y suba el archivo a la plataforma del curso.</a:t>
-            </a:r>
-          </a:p>
-        </p:txBody>
-      </p:sp>
-      <p:sp>
-        <p:nvSpPr>
-          <p:cNvPr id="25" name="TextBox 24"/>
-          <p:cNvSpPr txBox="1"/>
-          <p:nvPr/>
-        </p:nvSpPr>
-        <p:spPr>
-          <a:xfrm>
-            <a:off x="11185855" y="6473952"/>
-            <a:ext cx="640080" cy="274320"/>
-          </a:xfrm>
-          <a:prstGeom prst="rect">
-            <a:avLst/>
-          </a:prstGeom>
-          <a:noFill/>
-        </p:spPr>
-        <p:txBody>
-          <a:bodyPr wrap="square">
-            <a:spAutoFit/>
-          </a:bodyPr>
-          <a:lstStyle/>
-          <a:p>
-            <a:pPr algn="r"/>
-            <a:r>
-              <a:rPr sz="1100" b="0" i="0">
-                <a:solidFill>
-                  <a:srgbClr val="666666"/>
-                </a:solidFill>
-                <a:latin typeface="Calibri"/>
-              </a:rPr>
-              <a:t>18</a:t>
-            </a:r>
-          </a:p>
-        </p:txBody>
-      </p:sp>
-    </p:spTree>
-  </p:cSld>
-  <p:clrMapOvr>
-    <a:masterClrMapping/>
-  </p:clrMapOvr>
-</p:sld>
-</file>
-
-<file path=ppt/slides/slide19.xml><?xml version="1.0" encoding="utf-8"?>
-<p:sld xmlns:a="http://schemas.openxmlformats.org/drawingml/2006/main" xmlns:p="http://schemas.openxmlformats.org/presentationml/2006/main" xmlns:r="http://schemas.openxmlformats.org/officeDocument/2006/relationships">
-  <p:cSld>
-    <p:bg>
-      <p:bgPr>
-        <a:solidFill>
-          <a:srgbClr val="FFFFFF"/>
-        </a:solidFill>
-        <a:effectLst/>
-      </p:bgPr>
-    </p:bg>
-    <p:spTree>
-      <p:nvGrpSpPr>
-        <p:cNvPr id="1" name=""/>
-        <p:cNvGrpSpPr/>
-        <p:nvPr/>
-      </p:nvGrpSpPr>
-      <p:grpSpPr/>
-      <p:sp>
-        <p:nvSpPr>
-          <p:cNvPr id="2" name="Rectangle 1"/>
-          <p:cNvSpPr/>
-          <p:nvPr/>
-        </p:nvSpPr>
-        <p:spPr>
-          <a:xfrm>
-            <a:off x="0" y="0"/>
-            <a:ext cx="12191695" cy="960120"/>
-          </a:xfrm>
-          <a:prstGeom prst="rect">
-            <a:avLst/>
-          </a:prstGeom>
-          <a:solidFill>
-            <a:srgbClr val="095292"/>
-          </a:solidFill>
-          <a:ln>
-            <a:noFill/>
-          </a:ln>
-        </p:spPr>
-        <p:style>
-          <a:lnRef idx="1">
-            <a:schemeClr val="accent1"/>
-          </a:lnRef>
-          <a:fillRef idx="3">
-            <a:schemeClr val="accent1"/>
-          </a:fillRef>
-          <a:effectRef idx="2">
-            <a:schemeClr val="accent1"/>
-          </a:effectRef>
-          <a:fontRef idx="minor">
-            <a:schemeClr val="lt1"/>
-          </a:fontRef>
-        </p:style>
-        <p:txBody>
-          <a:bodyPr rtlCol="0" anchor="ctr"/>
-          <a:lstStyle/>
-          <a:p>
-            <a:pPr algn="ctr"/>
-          </a:p>
-        </p:txBody>
-      </p:sp>
-      <p:sp>
-        <p:nvSpPr>
-          <p:cNvPr id="3" name="Rectangle 2"/>
-          <p:cNvSpPr/>
-          <p:nvPr/>
-        </p:nvSpPr>
-        <p:spPr>
-          <a:xfrm>
-            <a:off x="0" y="960120"/>
-            <a:ext cx="12191695" cy="41148"/>
-          </a:xfrm>
-          <a:prstGeom prst="rect">
-            <a:avLst/>
-          </a:prstGeom>
-          <a:solidFill>
-            <a:srgbClr val="FFD000"/>
-          </a:solidFill>
-          <a:ln>
-            <a:noFill/>
-          </a:ln>
-        </p:spPr>
-        <p:style>
-          <a:lnRef idx="1">
-            <a:schemeClr val="accent1"/>
-          </a:lnRef>
-          <a:fillRef idx="3">
-            <a:schemeClr val="accent1"/>
-          </a:fillRef>
-          <a:effectRef idx="2">
-            <a:schemeClr val="accent1"/>
-          </a:effectRef>
-          <a:fontRef idx="minor">
-            <a:schemeClr val="lt1"/>
-          </a:fontRef>
-        </p:style>
-        <p:txBody>
-          <a:bodyPr rtlCol="0" anchor="ctr"/>
-          <a:lstStyle/>
-          <a:p>
-            <a:pPr algn="ctr"/>
-          </a:p>
-        </p:txBody>
-      </p:sp>
-      <p:sp>
-        <p:nvSpPr>
-          <p:cNvPr id="4" name="TextBox 3"/>
-          <p:cNvSpPr txBox="1"/>
-          <p:nvPr/>
-        </p:nvSpPr>
-        <p:spPr>
-          <a:xfrm>
-            <a:off x="457200" y="164592"/>
-            <a:ext cx="11277295" cy="502920"/>
-          </a:xfrm>
-          <a:prstGeom prst="rect">
-            <a:avLst/>
-          </a:prstGeom>
-          <a:noFill/>
-        </p:spPr>
-        <p:txBody>
-          <a:bodyPr wrap="square">
-            <a:spAutoFit/>
-          </a:bodyPr>
-          <a:lstStyle/>
-          <a:p>
-            <a:r>
-              <a:rPr sz="2600" b="1" i="0">
-                <a:solidFill>
-                  <a:srgbClr val="FFFFFF"/>
-                </a:solidFill>
-                <a:latin typeface="Calibri"/>
-              </a:rPr>
-              <a:t>Antes de entregar — autochequeo</a:t>
-            </a:r>
-          </a:p>
-        </p:txBody>
-      </p:sp>
-      <p:sp>
-        <p:nvSpPr>
-          <p:cNvPr id="5" name="Rounded Rectangle 4"/>
-          <p:cNvSpPr/>
-          <p:nvPr/>
-        </p:nvSpPr>
-        <p:spPr>
-          <a:xfrm>
-            <a:off x="457200" y="1261872"/>
-            <a:ext cx="11277295" cy="566928"/>
-          </a:xfrm>
-          <a:prstGeom prst="roundRect">
-            <a:avLst>
-              <a:gd name="adj" fmla="val 12000"/>
-            </a:avLst>
-          </a:prstGeom>
-          <a:solidFill>
-            <a:srgbClr val="F2F2F2"/>
-          </a:solidFill>
-          <a:ln>
-            <a:noFill/>
-          </a:ln>
-        </p:spPr>
-        <p:style>
-          <a:lnRef idx="1">
-            <a:schemeClr val="accent1"/>
-          </a:lnRef>
-          <a:fillRef idx="3">
-            <a:schemeClr val="accent1"/>
-          </a:fillRef>
-          <a:effectRef idx="2">
-            <a:schemeClr val="accent1"/>
-          </a:effectRef>
-          <a:fontRef idx="minor">
-            <a:schemeClr val="lt1"/>
-          </a:fontRef>
-        </p:style>
-        <p:txBody>
-          <a:bodyPr rtlCol="0" anchor="ctr"/>
-          <a:lstStyle/>
-          <a:p>
-            <a:pPr algn="ctr"/>
-          </a:p>
-        </p:txBody>
-      </p:sp>
-      <p:sp>
-        <p:nvSpPr>
-          <p:cNvPr id="6" name="Rectangle 5"/>
-          <p:cNvSpPr/>
-          <p:nvPr/>
-        </p:nvSpPr>
-        <p:spPr>
-          <a:xfrm>
-            <a:off x="640080" y="1408175"/>
-            <a:ext cx="274320" cy="274320"/>
-          </a:xfrm>
-          <a:prstGeom prst="rect">
-            <a:avLst/>
-          </a:prstGeom>
-          <a:solidFill>
-            <a:srgbClr val="FFFFFF"/>
-          </a:solidFill>
-          <a:ln>
-            <a:solidFill>
-              <a:srgbClr val="333333"/>
-            </a:solidFill>
-          </a:ln>
-        </p:spPr>
-        <p:style>
-          <a:lnRef idx="1">
-            <a:schemeClr val="accent1"/>
-          </a:lnRef>
-          <a:fillRef idx="3">
-            <a:schemeClr val="accent1"/>
-          </a:fillRef>
-          <a:effectRef idx="2">
-            <a:schemeClr val="accent1"/>
-          </a:effectRef>
-          <a:fontRef idx="minor">
-            <a:schemeClr val="lt1"/>
-          </a:fontRef>
-        </p:style>
-        <p:txBody>
-          <a:bodyPr rtlCol="0" anchor="ctr"/>
-          <a:lstStyle/>
-          <a:p>
-            <a:pPr algn="ctr"/>
-          </a:p>
-        </p:txBody>
-      </p:sp>
-      <p:sp>
-        <p:nvSpPr>
-          <p:cNvPr id="7" name="Rectangle 6"/>
-          <p:cNvSpPr/>
-          <p:nvPr/>
-        </p:nvSpPr>
-        <p:spPr>
-          <a:xfrm>
-            <a:off x="640080" y="1408175"/>
-            <a:ext cx="73152" cy="274320"/>
-          </a:xfrm>
-          <a:prstGeom prst="rect">
-            <a:avLst/>
-          </a:prstGeom>
-          <a:solidFill>
-            <a:srgbClr val="269CCB"/>
-          </a:solidFill>
-          <a:ln>
-            <a:noFill/>
-          </a:ln>
-        </p:spPr>
-        <p:style>
-          <a:lnRef idx="1">
-            <a:schemeClr val="accent1"/>
-          </a:lnRef>
-          <a:fillRef idx="3">
-            <a:schemeClr val="accent1"/>
-          </a:fillRef>
-          <a:effectRef idx="2">
-            <a:schemeClr val="accent1"/>
-          </a:effectRef>
-          <a:fontRef idx="minor">
-            <a:schemeClr val="lt1"/>
-          </a:fontRef>
-        </p:style>
-        <p:txBody>
-          <a:bodyPr rtlCol="0" anchor="ctr"/>
-          <a:lstStyle/>
-          <a:p>
-            <a:pPr algn="ctr"/>
-          </a:p>
-        </p:txBody>
-      </p:sp>
-      <p:sp>
-        <p:nvSpPr>
-          <p:cNvPr id="8" name="TextBox 7"/>
-          <p:cNvSpPr txBox="1"/>
-          <p:nvPr/>
-        </p:nvSpPr>
-        <p:spPr>
-          <a:xfrm>
-            <a:off x="1097280" y="1353312"/>
-            <a:ext cx="10362895" cy="402336"/>
-          </a:xfrm>
-          <a:prstGeom prst="rect">
-            <a:avLst/>
-          </a:prstGeom>
-          <a:noFill/>
-        </p:spPr>
-        <p:txBody>
-          <a:bodyPr wrap="square" anchor="ctr"/>
-          <a:lstStyle/>
-          <a:p>
-            <a:r>
-              <a:rPr sz="1500" b="0" i="0">
-                <a:solidFill>
-                  <a:srgbClr val="333333"/>
-                </a:solidFill>
-                <a:latin typeface="Calibri"/>
-              </a:rPr>
-              <a:t>Si borro la palabra VetCare de su tabla, esa tabla serviria igual para un cajero automatico o para una tienda de ropa? Si la respuesta es si, todavia no aterrizo nada.</a:t>
-            </a:r>
-          </a:p>
-        </p:txBody>
-      </p:sp>
-      <p:sp>
-        <p:nvSpPr>
-          <p:cNvPr id="9" name="Rounded Rectangle 8"/>
-          <p:cNvSpPr/>
-          <p:nvPr/>
-        </p:nvSpPr>
-        <p:spPr>
-          <a:xfrm>
-            <a:off x="457200" y="1938528"/>
-            <a:ext cx="11277295" cy="566928"/>
-          </a:xfrm>
-          <a:prstGeom prst="roundRect">
-            <a:avLst>
-              <a:gd name="adj" fmla="val 12000"/>
-            </a:avLst>
-          </a:prstGeom>
-          <a:solidFill>
-            <a:srgbClr val="F2F2F2"/>
-          </a:solidFill>
-          <a:ln>
-            <a:noFill/>
-          </a:ln>
-        </p:spPr>
-        <p:style>
-          <a:lnRef idx="1">
-            <a:schemeClr val="accent1"/>
-          </a:lnRef>
-          <a:fillRef idx="3">
-            <a:schemeClr val="accent1"/>
-          </a:fillRef>
-          <a:effectRef idx="2">
-            <a:schemeClr val="accent1"/>
-          </a:effectRef>
-          <a:fontRef idx="minor">
-            <a:schemeClr val="lt1"/>
-          </a:fontRef>
-        </p:style>
-        <p:txBody>
-          <a:bodyPr rtlCol="0" anchor="ctr"/>
-          <a:lstStyle/>
-          <a:p>
-            <a:pPr algn="ctr"/>
-          </a:p>
-        </p:txBody>
-      </p:sp>
-      <p:sp>
-        <p:nvSpPr>
-          <p:cNvPr id="10" name="Rectangle 9"/>
-          <p:cNvSpPr/>
-          <p:nvPr/>
-        </p:nvSpPr>
-        <p:spPr>
-          <a:xfrm>
-            <a:off x="640080" y="2084832"/>
-            <a:ext cx="274320" cy="274320"/>
-          </a:xfrm>
-          <a:prstGeom prst="rect">
-            <a:avLst/>
-          </a:prstGeom>
-          <a:solidFill>
-            <a:srgbClr val="FFFFFF"/>
-          </a:solidFill>
-          <a:ln>
-            <a:solidFill>
-              <a:srgbClr val="333333"/>
-            </a:solidFill>
-          </a:ln>
-        </p:spPr>
-        <p:style>
-          <a:lnRef idx="1">
-            <a:schemeClr val="accent1"/>
-          </a:lnRef>
-          <a:fillRef idx="3">
-            <a:schemeClr val="accent1"/>
-          </a:fillRef>
-          <a:effectRef idx="2">
-            <a:schemeClr val="accent1"/>
-          </a:effectRef>
-          <a:fontRef idx="minor">
-            <a:schemeClr val="lt1"/>
-          </a:fontRef>
-        </p:style>
-        <p:txBody>
-          <a:bodyPr rtlCol="0" anchor="ctr"/>
-          <a:lstStyle/>
-          <a:p>
-            <a:pPr algn="ctr"/>
-          </a:p>
-        </p:txBody>
-      </p:sp>
-      <p:sp>
-        <p:nvSpPr>
-          <p:cNvPr id="11" name="Rectangle 10"/>
-          <p:cNvSpPr/>
-          <p:nvPr/>
-        </p:nvSpPr>
-        <p:spPr>
-          <a:xfrm>
-            <a:off x="640080" y="2084832"/>
-            <a:ext cx="73152" cy="274320"/>
-          </a:xfrm>
-          <a:prstGeom prst="rect">
-            <a:avLst/>
-          </a:prstGeom>
-          <a:solidFill>
-            <a:srgbClr val="269CCB"/>
-          </a:solidFill>
-          <a:ln>
-            <a:noFill/>
-          </a:ln>
-        </p:spPr>
-        <p:style>
-          <a:lnRef idx="1">
-            <a:schemeClr val="accent1"/>
-          </a:lnRef>
-          <a:fillRef idx="3">
-            <a:schemeClr val="accent1"/>
-          </a:fillRef>
-          <a:effectRef idx="2">
-            <a:schemeClr val="accent1"/>
-          </a:effectRef>
-          <a:fontRef idx="minor">
-            <a:schemeClr val="lt1"/>
-          </a:fontRef>
-        </p:style>
-        <p:txBody>
-          <a:bodyPr rtlCol="0" anchor="ctr"/>
-          <a:lstStyle/>
-          <a:p>
-            <a:pPr algn="ctr"/>
-          </a:p>
-        </p:txBody>
-      </p:sp>
-      <p:sp>
-        <p:nvSpPr>
-          <p:cNvPr id="12" name="TextBox 11"/>
-          <p:cNvSpPr txBox="1"/>
-          <p:nvPr/>
-        </p:nvSpPr>
-        <p:spPr>
-          <a:xfrm>
-            <a:off x="1097280" y="2029968"/>
-            <a:ext cx="10362895" cy="402336"/>
-          </a:xfrm>
-          <a:prstGeom prst="rect">
-            <a:avLst/>
-          </a:prstGeom>
-          <a:noFill/>
-        </p:spPr>
-        <p:txBody>
-          <a:bodyPr wrap="square" anchor="ctr"/>
-          <a:lstStyle/>
-          <a:p>
-            <a:r>
-              <a:rPr sz="1500" b="0" i="0">
-                <a:solidFill>
-                  <a:srgbClr val="333333"/>
-                </a:solidFill>
-                <a:latin typeface="Calibri"/>
-              </a:rPr>
-              <a:t>En su diagrama de vueltas, cada vuelta termina en algo que la veterinaria podria mirar y opinar, o termina en trabajo interno que solo entiende el equipo?</a:t>
-            </a:r>
-          </a:p>
-        </p:txBody>
-      </p:sp>
-      <p:sp>
-        <p:nvSpPr>
-          <p:cNvPr id="13" name="Rounded Rectangle 12"/>
-          <p:cNvSpPr/>
-          <p:nvPr/>
-        </p:nvSpPr>
-        <p:spPr>
-          <a:xfrm>
-            <a:off x="457200" y="2615184"/>
-            <a:ext cx="11277295" cy="566928"/>
-          </a:xfrm>
-          <a:prstGeom prst="roundRect">
-            <a:avLst>
-              <a:gd name="adj" fmla="val 12000"/>
-            </a:avLst>
-          </a:prstGeom>
-          <a:solidFill>
-            <a:srgbClr val="F2F2F2"/>
-          </a:solidFill>
-          <a:ln>
-            <a:noFill/>
-          </a:ln>
-        </p:spPr>
-        <p:style>
-          <a:lnRef idx="1">
-            <a:schemeClr val="accent1"/>
-          </a:lnRef>
-          <a:fillRef idx="3">
-            <a:schemeClr val="accent1"/>
-          </a:fillRef>
-          <a:effectRef idx="2">
-            <a:schemeClr val="accent1"/>
-          </a:effectRef>
-          <a:fontRef idx="minor">
-            <a:schemeClr val="lt1"/>
-          </a:fontRef>
-        </p:style>
-        <p:txBody>
-          <a:bodyPr rtlCol="0" anchor="ctr"/>
-          <a:lstStyle/>
-          <a:p>
-            <a:pPr algn="ctr"/>
-          </a:p>
-        </p:txBody>
-      </p:sp>
-      <p:sp>
-        <p:nvSpPr>
-          <p:cNvPr id="14" name="Rectangle 13"/>
-          <p:cNvSpPr/>
-          <p:nvPr/>
-        </p:nvSpPr>
-        <p:spPr>
-          <a:xfrm>
-            <a:off x="640080" y="2761488"/>
-            <a:ext cx="274320" cy="274320"/>
-          </a:xfrm>
-          <a:prstGeom prst="rect">
-            <a:avLst/>
-          </a:prstGeom>
-          <a:solidFill>
-            <a:srgbClr val="FFFFFF"/>
-          </a:solidFill>
-          <a:ln>
-            <a:solidFill>
-              <a:srgbClr val="333333"/>
-            </a:solidFill>
-          </a:ln>
-        </p:spPr>
-        <p:style>
-          <a:lnRef idx="1">
-            <a:schemeClr val="accent1"/>
-          </a:lnRef>
-          <a:fillRef idx="3">
-            <a:schemeClr val="accent1"/>
-          </a:fillRef>
-          <a:effectRef idx="2">
-            <a:schemeClr val="accent1"/>
-          </a:effectRef>
-          <a:fontRef idx="minor">
-            <a:schemeClr val="lt1"/>
-          </a:fontRef>
-        </p:style>
-        <p:txBody>
-          <a:bodyPr rtlCol="0" anchor="ctr"/>
-          <a:lstStyle/>
-          <a:p>
-            <a:pPr algn="ctr"/>
-          </a:p>
-        </p:txBody>
-      </p:sp>
-      <p:sp>
-        <p:nvSpPr>
-          <p:cNvPr id="15" name="Rectangle 14"/>
-          <p:cNvSpPr/>
-          <p:nvPr/>
-        </p:nvSpPr>
-        <p:spPr>
-          <a:xfrm>
-            <a:off x="640080" y="2761488"/>
-            <a:ext cx="73152" cy="274320"/>
-          </a:xfrm>
-          <a:prstGeom prst="rect">
-            <a:avLst/>
-          </a:prstGeom>
-          <a:solidFill>
-            <a:srgbClr val="269CCB"/>
-          </a:solidFill>
-          <a:ln>
-            <a:noFill/>
-          </a:ln>
-        </p:spPr>
-        <p:style>
-          <a:lnRef idx="1">
-            <a:schemeClr val="accent1"/>
-          </a:lnRef>
-          <a:fillRef idx="3">
-            <a:schemeClr val="accent1"/>
-          </a:fillRef>
-          <a:effectRef idx="2">
-            <a:schemeClr val="accent1"/>
-          </a:effectRef>
-          <a:fontRef idx="minor">
-            <a:schemeClr val="lt1"/>
-          </a:fontRef>
-        </p:style>
-        <p:txBody>
-          <a:bodyPr rtlCol="0" anchor="ctr"/>
-          <a:lstStyle/>
-          <a:p>
-            <a:pPr algn="ctr"/>
-          </a:p>
-        </p:txBody>
-      </p:sp>
-      <p:sp>
-        <p:nvSpPr>
-          <p:cNvPr id="16" name="TextBox 15"/>
-          <p:cNvSpPr txBox="1"/>
-          <p:nvPr/>
-        </p:nvSpPr>
-        <p:spPr>
-          <a:xfrm>
-            <a:off x="1097280" y="2706624"/>
-            <a:ext cx="10362895" cy="402336"/>
-          </a:xfrm>
-          <a:prstGeom prst="rect">
-            <a:avLst/>
-          </a:prstGeom>
-          <a:noFill/>
-        </p:spPr>
-        <p:txBody>
-          <a:bodyPr wrap="square" anchor="ctr"/>
-          <a:lstStyle/>
-          <a:p>
-            <a:r>
-              <a:rPr sz="1500" b="0" i="0">
-                <a:solidFill>
-                  <a:srgbClr val="333333"/>
-                </a:solidFill>
-                <a:latin typeface="Calibri"/>
-              </a:rPr>
-              <a:t>Que documento exacto tendria que mostrar hoy, en pantalla, para demostrarle a la clinica que la fase de requisitos ya quedo cerrada?</a:t>
-            </a:r>
-          </a:p>
-        </p:txBody>
-      </p:sp>
-      <p:sp>
-        <p:nvSpPr>
-          <p:cNvPr id="17" name="TextBox 16"/>
-          <p:cNvSpPr txBox="1"/>
-          <p:nvPr/>
-        </p:nvSpPr>
-        <p:spPr>
-          <a:xfrm>
-            <a:off x="11185855" y="6473952"/>
-            <a:ext cx="640080" cy="274320"/>
-          </a:xfrm>
-          <a:prstGeom prst="rect">
-            <a:avLst/>
-          </a:prstGeom>
-          <a:noFill/>
-        </p:spPr>
-        <p:txBody>
-          <a:bodyPr wrap="square">
-            <a:spAutoFit/>
-          </a:bodyPr>
-          <a:lstStyle/>
-          <a:p>
-            <a:pPr algn="r"/>
-            <a:r>
-              <a:rPr sz="1100" b="0" i="0">
-                <a:solidFill>
-                  <a:srgbClr val="666666"/>
-                </a:solidFill>
-                <a:latin typeface="Calibri"/>
-              </a:rPr>
-              <a:t>19</a:t>
+                  <a:srgbClr val="269CCB"/>
+                </a:solidFill>
+                <a:latin typeface="Calibri"/>
+              </a:rPr>
+              <a:t>Teoria al servicio del diseño</a:t>
             </a:r>
           </a:p>
         </p:txBody>
@@ -8667,7 +6583,7 @@
                 </a:solidFill>
                 <a:latin typeface="Calibri"/>
               </a:rPr>
-              <a:t>Encuadre de hoy · Objetivo del PI</a:t>
+              <a:t>Encuadre de hoy</a:t>
             </a:r>
           </a:p>
         </p:txBody>
@@ -8715,7 +6631,7 @@
                 </a:solidFill>
                 <a:latin typeface="Calibri"/>
               </a:rPr>
-              <a:t>Hoy avanzamos VetCare en:</a:t>
+              <a:t>Tema:</a:t>
             </a:r>
             <a:r>
               <a:rPr sz="2000" b="0" i="0">
@@ -8724,7 +6640,7 @@
                 </a:solidFill>
                 <a:latin typeface="Calibri"/>
               </a:rPr>
-              <a:t> Queda listo el mapa de fases de VetCare con el artefacto concreto que produce cada fase y la marca de en cual esta parado el equipo hoy.</a:t>
+              <a:t> Ciclos de vida del software</a:t>
             </a:r>
           </a:p>
           <a:p>
@@ -8740,34 +6656,7 @@
                 </a:solidFill>
                 <a:latin typeface="Calibri"/>
               </a:rPr>
-              <a:t>–   Herramienta: </a:t>
-            </a:r>
-            <a:r>
-              <a:rPr sz="2000" b="1" i="0">
-                <a:solidFill>
-                  <a:srgbClr val="333333"/>
-                </a:solidFill>
-                <a:latin typeface="Calibri"/>
-              </a:rPr>
-              <a:t>draw.io · Google Docs</a:t>
-            </a:r>
-            <a:r>
-              <a:rPr sz="2000" b="0" i="0">
-                <a:solidFill>
-                  <a:srgbClr val="333333"/>
-                </a:solidFill>
-                <a:latin typeface="Calibri"/>
-              </a:rPr>
-              <a:t> · Bloque </a:t>
-            </a:r>
-            <a:r>
-              <a:rPr sz="2000" b="1" i="0">
-                <a:solidFill>
-                  <a:srgbClr val="333333"/>
-                </a:solidFill>
-                <a:latin typeface="Calibri"/>
-              </a:rPr>
-              <a:t>120 min</a:t>
+              <a:t>–   Las mismas fases, recorridas de distinta forma</a:t>
             </a:r>
           </a:p>
           <a:p>
@@ -8783,7 +6672,7 @@
                 </a:solidFill>
                 <a:latin typeface="Calibri"/>
               </a:rPr>
-              <a:t>–   </a:t>
+              <a:t>–   Herramienta del tema: </a:t>
             </a:r>
             <a:r>
               <a:rPr sz="2000" b="1" i="0">
@@ -8792,7 +6681,7 @@
                 </a:solidFill>
                 <a:latin typeface="Calibri"/>
               </a:rPr>
-              <a:t>Entregable de hoy:</a:t>
+              <a:t>draw.io · Google Docs</a:t>
             </a:r>
             <a:r>
               <a:rPr sz="2000" b="0" i="0">
@@ -8801,7 +6690,16 @@
                 </a:solidFill>
                 <a:latin typeface="Calibri"/>
               </a:rPr>
-              <a:t> Un documento de una pagina en Google Docs con la tabla Fase / Pregunta que responde / Artefacto de VetCare / Quien lo aprueba, mas dos diagramas en draw.io (recorrido lineal y recorrido en tres vueltas) exportados a PDF y subidos a la plataforma del curso.</a:t>
+              <a:t> · Bloque </a:t>
+            </a:r>
+            <a:r>
+              <a:rPr sz="2000" b="1" i="0">
+                <a:solidFill>
+                  <a:srgbClr val="333333"/>
+                </a:solidFill>
+                <a:latin typeface="Calibri"/>
+              </a:rPr>
+              <a:t>120 min</a:t>
             </a:r>
           </a:p>
           <a:p>
@@ -8817,7 +6715,7 @@
                 </a:solidFill>
                 <a:latin typeface="Calibri"/>
               </a:rPr>
-              <a:t>–   La teoria esta al servicio del producto: al salir, VetCare avanzo.</a:t>
+              <a:t>–   Ejemplo de toda la clase: VetCare, el sistema de la clinica «Huellitas».</a:t>
             </a:r>
           </a:p>
         </p:txBody>
@@ -8853,1241 +6751,6 @@
                 <a:latin typeface="Calibri"/>
               </a:rPr>
               <a:t>2</a:t>
-            </a:r>
-          </a:p>
-        </p:txBody>
-      </p:sp>
-    </p:spTree>
-  </p:cSld>
-  <p:clrMapOvr>
-    <a:masterClrMapping/>
-  </p:clrMapOvr>
-</p:sld>
-</file>
-
-<file path=ppt/slides/slide20.xml><?xml version="1.0" encoding="utf-8"?>
-<p:sld xmlns:a="http://schemas.openxmlformats.org/drawingml/2006/main" xmlns:p="http://schemas.openxmlformats.org/presentationml/2006/main" xmlns:r="http://schemas.openxmlformats.org/officeDocument/2006/relationships">
-  <p:cSld>
-    <p:bg>
-      <p:bgPr>
-        <a:solidFill>
-          <a:srgbClr val="FFFFFF"/>
-        </a:solidFill>
-        <a:effectLst/>
-      </p:bgPr>
-    </p:bg>
-    <p:spTree>
-      <p:nvGrpSpPr>
-        <p:cNvPr id="1" name=""/>
-        <p:cNvGrpSpPr/>
-        <p:nvPr/>
-      </p:nvGrpSpPr>
-      <p:grpSpPr/>
-      <p:sp>
-        <p:nvSpPr>
-          <p:cNvPr id="2" name="Rectangle 1"/>
-          <p:cNvSpPr/>
-          <p:nvPr/>
-        </p:nvSpPr>
-        <p:spPr>
-          <a:xfrm>
-            <a:off x="0" y="0"/>
-            <a:ext cx="12191695" cy="960120"/>
-          </a:xfrm>
-          <a:prstGeom prst="rect">
-            <a:avLst/>
-          </a:prstGeom>
-          <a:solidFill>
-            <a:srgbClr val="095292"/>
-          </a:solidFill>
-          <a:ln>
-            <a:noFill/>
-          </a:ln>
-        </p:spPr>
-        <p:style>
-          <a:lnRef idx="1">
-            <a:schemeClr val="accent1"/>
-          </a:lnRef>
-          <a:fillRef idx="3">
-            <a:schemeClr val="accent1"/>
-          </a:fillRef>
-          <a:effectRef idx="2">
-            <a:schemeClr val="accent1"/>
-          </a:effectRef>
-          <a:fontRef idx="minor">
-            <a:schemeClr val="lt1"/>
-          </a:fontRef>
-        </p:style>
-        <p:txBody>
-          <a:bodyPr rtlCol="0" anchor="ctr"/>
-          <a:lstStyle/>
-          <a:p>
-            <a:pPr algn="ctr"/>
-          </a:p>
-        </p:txBody>
-      </p:sp>
-      <p:sp>
-        <p:nvSpPr>
-          <p:cNvPr id="3" name="Rectangle 2"/>
-          <p:cNvSpPr/>
-          <p:nvPr/>
-        </p:nvSpPr>
-        <p:spPr>
-          <a:xfrm>
-            <a:off x="0" y="960120"/>
-            <a:ext cx="12191695" cy="41148"/>
-          </a:xfrm>
-          <a:prstGeom prst="rect">
-            <a:avLst/>
-          </a:prstGeom>
-          <a:solidFill>
-            <a:srgbClr val="FFD000"/>
-          </a:solidFill>
-          <a:ln>
-            <a:noFill/>
-          </a:ln>
-        </p:spPr>
-        <p:style>
-          <a:lnRef idx="1">
-            <a:schemeClr val="accent1"/>
-          </a:lnRef>
-          <a:fillRef idx="3">
-            <a:schemeClr val="accent1"/>
-          </a:fillRef>
-          <a:effectRef idx="2">
-            <a:schemeClr val="accent1"/>
-          </a:effectRef>
-          <a:fontRef idx="minor">
-            <a:schemeClr val="lt1"/>
-          </a:fontRef>
-        </p:style>
-        <p:txBody>
-          <a:bodyPr rtlCol="0" anchor="ctr"/>
-          <a:lstStyle/>
-          <a:p>
-            <a:pPr algn="ctr"/>
-          </a:p>
-        </p:txBody>
-      </p:sp>
-      <p:sp>
-        <p:nvSpPr>
-          <p:cNvPr id="4" name="TextBox 3"/>
-          <p:cNvSpPr txBox="1"/>
-          <p:nvPr/>
-        </p:nvSpPr>
-        <p:spPr>
-          <a:xfrm>
-            <a:off x="457200" y="164592"/>
-            <a:ext cx="11277295" cy="502920"/>
-          </a:xfrm>
-          <a:prstGeom prst="rect">
-            <a:avLst/>
-          </a:prstGeom>
-          <a:noFill/>
-        </p:spPr>
-        <p:txBody>
-          <a:bodyPr wrap="square">
-            <a:spAutoFit/>
-          </a:bodyPr>
-          <a:lstStyle/>
-          <a:p>
-            <a:r>
-              <a:rPr sz="2600" b="1" i="0">
-                <a:solidFill>
-                  <a:srgbClr val="FFFFFF"/>
-                </a:solidFill>
-                <a:latin typeface="Calibri"/>
-              </a:rPr>
-              <a:t>Criterios de exito / entregable</a:t>
-            </a:r>
-          </a:p>
-        </p:txBody>
-      </p:sp>
-      <p:sp>
-        <p:nvSpPr>
-          <p:cNvPr id="5" name="TextBox 4"/>
-          <p:cNvSpPr txBox="1"/>
-          <p:nvPr/>
-        </p:nvSpPr>
-        <p:spPr>
-          <a:xfrm>
-            <a:off x="457200" y="1170432"/>
-            <a:ext cx="11277295" cy="5230368"/>
-          </a:xfrm>
-          <a:prstGeom prst="rect">
-            <a:avLst/>
-          </a:prstGeom>
-          <a:noFill/>
-        </p:spPr>
-        <p:txBody>
-          <a:bodyPr wrap="square">
-            <a:spAutoFit/>
-          </a:bodyPr>
-          <a:lstStyle/>
-          <a:p>
-            <a:pPr>
-              <a:spcAft>
-                <a:spcPts val="800"/>
-              </a:spcAft>
-            </a:pPr>
-            <a:r>
-              <a:rPr sz="2000" b="0" i="0">
-                <a:solidFill>
-                  <a:srgbClr val="333333"/>
-                </a:solidFill>
-                <a:latin typeface="Calibri"/>
-              </a:rPr>
-              <a:t>–   </a:t>
-            </a:r>
-            <a:r>
-              <a:rPr sz="2000" b="1" i="0">
-                <a:solidFill>
-                  <a:srgbClr val="333333"/>
-                </a:solidFill>
-                <a:latin typeface="Calibri"/>
-              </a:rPr>
-              <a:t>Entregable:</a:t>
-            </a:r>
-            <a:r>
-              <a:rPr sz="2000" b="0" i="0">
-                <a:solidFill>
-                  <a:srgbClr val="333333"/>
-                </a:solidFill>
-                <a:latin typeface="Calibri"/>
-              </a:rPr>
-              <a:t> Un documento de una pagina en Google Docs con la tabla Fase / Pregunta que responde / Artefacto de VetCare / Quien lo aprueba, mas dos diagramas en draw.io (recorrido lineal y recorrido en tres vueltas) exportados a PDF y subidos a la plataforma del curso.</a:t>
-            </a:r>
-          </a:p>
-          <a:p>
-            <a:pPr>
-              <a:spcAft>
-                <a:spcPts val="800"/>
-              </a:spcAft>
-            </a:pPr>
-            <a:r>
-              <a:rPr sz="2000" b="0" i="0">
-                <a:solidFill>
-                  <a:srgbClr val="333333"/>
-                </a:solidFill>
-                <a:latin typeface="Calibri"/>
-              </a:rPr>
-              <a:t>–   </a:t>
-            </a:r>
-            <a:r>
-              <a:rPr sz="2000" b="1" i="0">
-                <a:solidFill>
-                  <a:srgbClr val="333333"/>
-                </a:solidFill>
-                <a:latin typeface="Calibri"/>
-              </a:rPr>
-              <a:t>Exito:</a:t>
-            </a:r>
-            <a:r>
-              <a:rPr sz="2000" b="0" i="0">
-                <a:solidFill>
-                  <a:srgbClr val="333333"/>
-                </a:solidFill>
-                <a:latin typeface="Calibri"/>
-              </a:rPr>
-              <a:t> La tabla tiene las cinco fases y en cada una un artefacto concreto de VetCare escrito con nombre propio, no una definicion generica de libro.</a:t>
-            </a:r>
-          </a:p>
-          <a:p>
-            <a:pPr>
-              <a:spcAft>
-                <a:spcPts val="800"/>
-              </a:spcAft>
-            </a:pPr>
-            <a:r>
-              <a:rPr sz="2000" b="0" i="0">
-                <a:solidFill>
-                  <a:srgbClr val="333333"/>
-                </a:solidFill>
-                <a:latin typeface="Calibri"/>
-              </a:rPr>
-              <a:t>–   </a:t>
-            </a:r>
-            <a:r>
-              <a:rPr sz="2000" b="1" i="0">
-                <a:solidFill>
-                  <a:srgbClr val="333333"/>
-                </a:solidFill>
-                <a:latin typeface="Calibri"/>
-              </a:rPr>
-              <a:t>Exito:</a:t>
-            </a:r>
-            <a:r>
-              <a:rPr sz="2000" b="0" i="0">
-                <a:solidFill>
-                  <a:srgbClr val="333333"/>
-                </a:solidFill>
-                <a:latin typeface="Calibri"/>
-              </a:rPr>
-              <a:t> El diagrama lineal y el diagrama en vueltas usan exactamente las mismas cinco cajas; lo unico distinto entre ellos es el recorrido.</a:t>
-            </a:r>
-          </a:p>
-          <a:p>
-            <a:pPr>
-              <a:spcAft>
-                <a:spcPts val="800"/>
-              </a:spcAft>
-            </a:pPr>
-            <a:r>
-              <a:rPr sz="2000" b="0" i="0">
-                <a:solidFill>
-                  <a:srgbClr val="333333"/>
-                </a:solidFill>
-                <a:latin typeface="Calibri"/>
-              </a:rPr>
-              <a:t>–   </a:t>
-            </a:r>
-            <a:r>
-              <a:rPr sz="2000" b="1" i="0">
-                <a:solidFill>
-                  <a:srgbClr val="333333"/>
-                </a:solidFill>
-                <a:latin typeface="Calibri"/>
-              </a:rPr>
-              <a:t>Exito:</a:t>
-            </a:r>
-            <a:r>
-              <a:rPr sz="2000" b="0" i="0">
-                <a:solidFill>
-                  <a:srgbClr val="333333"/>
-                </a:solidFill>
-                <a:latin typeface="Calibri"/>
-              </a:rPr>
-              <a:t> La fase actual del equipo esta marcada y sustentada con dos evidencias verificables del estado real de VetCare.</a:t>
-            </a:r>
-          </a:p>
-          <a:p>
-            <a:pPr>
-              <a:spcAft>
-                <a:spcPts val="800"/>
-              </a:spcAft>
-            </a:pPr>
-            <a:r>
-              <a:rPr sz="2000" b="0" i="0">
-                <a:solidFill>
-                  <a:srgbClr val="333333"/>
-                </a:solidFill>
-                <a:latin typeface="Calibri"/>
-              </a:rPr>
-              <a:t>–   </a:t>
-            </a:r>
-            <a:r>
-              <a:rPr sz="2000" b="1" i="0">
-                <a:solidFill>
-                  <a:srgbClr val="333333"/>
-                </a:solidFill>
-                <a:latin typeface="Calibri"/>
-              </a:rPr>
-              <a:t>Exito:</a:t>
-            </a:r>
-            <a:r>
-              <a:rPr sz="2000" b="0" i="0">
-                <a:solidFill>
-                  <a:srgbClr val="333333"/>
-                </a:solidFill>
-                <a:latin typeface="Calibri"/>
-              </a:rPr>
-              <a:t> El parrafo final distingue con hechos concretos cuando termina el proyecto y cuando terminaria el producto, e incluye un ejemplo de mantenimiento.</a:t>
-            </a:r>
-          </a:p>
-          <a:p>
-            <a:pPr>
-              <a:spcAft>
-                <a:spcPts val="800"/>
-              </a:spcAft>
-            </a:pPr>
-            <a:r>
-              <a:rPr sz="2000" b="0" i="0">
-                <a:solidFill>
-                  <a:srgbClr val="333333"/>
-                </a:solidFill>
-                <a:latin typeface="Calibri"/>
-              </a:rPr>
-              <a:t>–   </a:t>
-            </a:r>
-            <a:r>
-              <a:rPr sz="2000" b="1" i="0">
-                <a:solidFill>
-                  <a:srgbClr val="333333"/>
-                </a:solidFill>
-                <a:latin typeface="Calibri"/>
-              </a:rPr>
-              <a:t>Entrega en la plataforma del curso</a:t>
-            </a:r>
-            <a:r>
-              <a:rPr sz="2000" b="0" i="0">
-                <a:solidFill>
-                  <a:srgbClr val="333333"/>
-                </a:solidFill>
-                <a:latin typeface="Calibri"/>
-              </a:rPr>
-              <a:t> — en la fecha que indique el docente.</a:t>
-            </a:r>
-          </a:p>
-        </p:txBody>
-      </p:sp>
-      <p:sp>
-        <p:nvSpPr>
-          <p:cNvPr id="6" name="TextBox 5"/>
-          <p:cNvSpPr txBox="1"/>
-          <p:nvPr/>
-        </p:nvSpPr>
-        <p:spPr>
-          <a:xfrm>
-            <a:off x="11185855" y="6473952"/>
-            <a:ext cx="640080" cy="274320"/>
-          </a:xfrm>
-          <a:prstGeom prst="rect">
-            <a:avLst/>
-          </a:prstGeom>
-          <a:noFill/>
-        </p:spPr>
-        <p:txBody>
-          <a:bodyPr wrap="square">
-            <a:spAutoFit/>
-          </a:bodyPr>
-          <a:lstStyle/>
-          <a:p>
-            <a:pPr algn="r"/>
-            <a:r>
-              <a:rPr sz="1100" b="0" i="0">
-                <a:solidFill>
-                  <a:srgbClr val="666666"/>
-                </a:solidFill>
-                <a:latin typeface="Calibri"/>
-              </a:rPr>
-              <a:t>20</a:t>
-            </a:r>
-          </a:p>
-        </p:txBody>
-      </p:sp>
-    </p:spTree>
-  </p:cSld>
-  <p:clrMapOvr>
-    <a:masterClrMapping/>
-  </p:clrMapOvr>
-</p:sld>
-</file>
-
-<file path=ppt/slides/slide21.xml><?xml version="1.0" encoding="utf-8"?>
-<p:sld xmlns:a="http://schemas.openxmlformats.org/drawingml/2006/main" xmlns:p="http://schemas.openxmlformats.org/presentationml/2006/main" xmlns:r="http://schemas.openxmlformats.org/officeDocument/2006/relationships">
-  <p:cSld>
-    <p:bg>
-      <p:bgPr>
-        <a:solidFill>
-          <a:srgbClr val="FFFFFF"/>
-        </a:solidFill>
-        <a:effectLst/>
-      </p:bgPr>
-    </p:bg>
-    <p:spTree>
-      <p:nvGrpSpPr>
-        <p:cNvPr id="1" name=""/>
-        <p:cNvGrpSpPr/>
-        <p:nvPr/>
-      </p:nvGrpSpPr>
-      <p:grpSpPr/>
-      <p:sp>
-        <p:nvSpPr>
-          <p:cNvPr id="2" name="Rectangle 1"/>
-          <p:cNvSpPr/>
-          <p:nvPr/>
-        </p:nvSpPr>
-        <p:spPr>
-          <a:xfrm>
-            <a:off x="0" y="0"/>
-            <a:ext cx="12191695" cy="960120"/>
-          </a:xfrm>
-          <a:prstGeom prst="rect">
-            <a:avLst/>
-          </a:prstGeom>
-          <a:solidFill>
-            <a:srgbClr val="095292"/>
-          </a:solidFill>
-          <a:ln>
-            <a:noFill/>
-          </a:ln>
-        </p:spPr>
-        <p:style>
-          <a:lnRef idx="1">
-            <a:schemeClr val="accent1"/>
-          </a:lnRef>
-          <a:fillRef idx="3">
-            <a:schemeClr val="accent1"/>
-          </a:fillRef>
-          <a:effectRef idx="2">
-            <a:schemeClr val="accent1"/>
-          </a:effectRef>
-          <a:fontRef idx="minor">
-            <a:schemeClr val="lt1"/>
-          </a:fontRef>
-        </p:style>
-        <p:txBody>
-          <a:bodyPr rtlCol="0" anchor="ctr"/>
-          <a:lstStyle/>
-          <a:p>
-            <a:pPr algn="ctr"/>
-          </a:p>
-        </p:txBody>
-      </p:sp>
-      <p:sp>
-        <p:nvSpPr>
-          <p:cNvPr id="3" name="Rectangle 2"/>
-          <p:cNvSpPr/>
-          <p:nvPr/>
-        </p:nvSpPr>
-        <p:spPr>
-          <a:xfrm>
-            <a:off x="0" y="960120"/>
-            <a:ext cx="12191695" cy="41148"/>
-          </a:xfrm>
-          <a:prstGeom prst="rect">
-            <a:avLst/>
-          </a:prstGeom>
-          <a:solidFill>
-            <a:srgbClr val="FFD000"/>
-          </a:solidFill>
-          <a:ln>
-            <a:noFill/>
-          </a:ln>
-        </p:spPr>
-        <p:style>
-          <a:lnRef idx="1">
-            <a:schemeClr val="accent1"/>
-          </a:lnRef>
-          <a:fillRef idx="3">
-            <a:schemeClr val="accent1"/>
-          </a:fillRef>
-          <a:effectRef idx="2">
-            <a:schemeClr val="accent1"/>
-          </a:effectRef>
-          <a:fontRef idx="minor">
-            <a:schemeClr val="lt1"/>
-          </a:fontRef>
-        </p:style>
-        <p:txBody>
-          <a:bodyPr rtlCol="0" anchor="ctr"/>
-          <a:lstStyle/>
-          <a:p>
-            <a:pPr algn="ctr"/>
-          </a:p>
-        </p:txBody>
-      </p:sp>
-      <p:sp>
-        <p:nvSpPr>
-          <p:cNvPr id="4" name="TextBox 3"/>
-          <p:cNvSpPr txBox="1"/>
-          <p:nvPr/>
-        </p:nvSpPr>
-        <p:spPr>
-          <a:xfrm>
-            <a:off x="457200" y="164592"/>
-            <a:ext cx="11277295" cy="502920"/>
-          </a:xfrm>
-          <a:prstGeom prst="rect">
-            <a:avLst/>
-          </a:prstGeom>
-          <a:noFill/>
-        </p:spPr>
-        <p:txBody>
-          <a:bodyPr wrap="square">
-            <a:spAutoFit/>
-          </a:bodyPr>
-          <a:lstStyle/>
-          <a:p>
-            <a:r>
-              <a:rPr sz="2600" b="1" i="0">
-                <a:solidFill>
-                  <a:srgbClr val="FFFFFF"/>
-                </a:solidFill>
-                <a:latin typeface="Calibri"/>
-              </a:rPr>
-              <a:t>Para el PI esta semana</a:t>
-            </a:r>
-          </a:p>
-        </p:txBody>
-      </p:sp>
-      <p:sp>
-        <p:nvSpPr>
-          <p:cNvPr id="5" name="Rounded Rectangle 4"/>
-          <p:cNvSpPr/>
-          <p:nvPr/>
-        </p:nvSpPr>
-        <p:spPr>
-          <a:xfrm>
-            <a:off x="457200" y="1261872"/>
-            <a:ext cx="11277295" cy="1051560"/>
-          </a:xfrm>
-          <a:prstGeom prst="roundRect">
-            <a:avLst>
-              <a:gd name="adj" fmla="val 12000"/>
-            </a:avLst>
-          </a:prstGeom>
-          <a:solidFill>
-            <a:srgbClr val="E8F4FA"/>
-          </a:solidFill>
-          <a:ln>
-            <a:noFill/>
-          </a:ln>
-        </p:spPr>
-        <p:style>
-          <a:lnRef idx="1">
-            <a:schemeClr val="accent1"/>
-          </a:lnRef>
-          <a:fillRef idx="3">
-            <a:schemeClr val="accent1"/>
-          </a:fillRef>
-          <a:effectRef idx="2">
-            <a:schemeClr val="accent1"/>
-          </a:effectRef>
-          <a:fontRef idx="minor">
-            <a:schemeClr val="lt1"/>
-          </a:fontRef>
-        </p:style>
-        <p:txBody>
-          <a:bodyPr rtlCol="0" anchor="ctr"/>
-          <a:lstStyle/>
-          <a:p>
-            <a:pPr algn="ctr"/>
-          </a:p>
-        </p:txBody>
-      </p:sp>
-      <p:sp>
-        <p:nvSpPr>
-          <p:cNvPr id="6" name="Rectangle 5"/>
-          <p:cNvSpPr/>
-          <p:nvPr/>
-        </p:nvSpPr>
-        <p:spPr>
-          <a:xfrm>
-            <a:off x="457200" y="1261872"/>
-            <a:ext cx="128016" cy="1051560"/>
-          </a:xfrm>
-          <a:prstGeom prst="rect">
-            <a:avLst/>
-          </a:prstGeom>
-          <a:solidFill>
-            <a:srgbClr val="269CCB"/>
-          </a:solidFill>
-          <a:ln>
-            <a:noFill/>
-          </a:ln>
-        </p:spPr>
-        <p:style>
-          <a:lnRef idx="1">
-            <a:schemeClr val="accent1"/>
-          </a:lnRef>
-          <a:fillRef idx="3">
-            <a:schemeClr val="accent1"/>
-          </a:fillRef>
-          <a:effectRef idx="2">
-            <a:schemeClr val="accent1"/>
-          </a:effectRef>
-          <a:fontRef idx="minor">
-            <a:schemeClr val="lt1"/>
-          </a:fontRef>
-        </p:style>
-        <p:txBody>
-          <a:bodyPr rtlCol="0" anchor="ctr"/>
-          <a:lstStyle/>
-          <a:p>
-            <a:pPr algn="ctr"/>
-          </a:p>
-        </p:txBody>
-      </p:sp>
-      <p:sp>
-        <p:nvSpPr>
-          <p:cNvPr id="7" name="TextBox 6"/>
-          <p:cNvSpPr txBox="1"/>
-          <p:nvPr/>
-        </p:nvSpPr>
-        <p:spPr>
-          <a:xfrm>
-            <a:off x="777240" y="1399031"/>
-            <a:ext cx="10774375" cy="822959"/>
-          </a:xfrm>
-          <a:prstGeom prst="rect">
-            <a:avLst/>
-          </a:prstGeom>
-          <a:noFill/>
-        </p:spPr>
-        <p:txBody>
-          <a:bodyPr wrap="square">
-            <a:spAutoFit/>
-          </a:bodyPr>
-          <a:lstStyle/>
-          <a:p>
-            <a:r>
-              <a:rPr sz="1200" b="1" i="0">
-                <a:solidFill>
-                  <a:srgbClr val="269CCB"/>
-                </a:solidFill>
-                <a:latin typeface="Calibri"/>
-              </a:rPr>
-              <a:t>Info</a:t>
-            </a:r>
-          </a:p>
-          <a:p>
-            <a:pPr>
-              <a:spcBef>
-                <a:spcPts val="400"/>
-              </a:spcBef>
-            </a:pPr>
-            <a:r>
-              <a:rPr sz="1400" b="0" i="0">
-                <a:solidFill>
-                  <a:srgbClr val="333333"/>
-                </a:solidFill>
-                <a:latin typeface="Calibri"/>
-              </a:rPr>
-              <a:t>Hito: Queda listo el mapa de fases de VetCare con el artefacto concreto que produce cada fase y la marca de en cual esta parado el equipo hoy.</a:t>
-            </a:r>
-          </a:p>
-        </p:txBody>
-      </p:sp>
-      <p:sp>
-        <p:nvSpPr>
-          <p:cNvPr id="8" name="Rounded Rectangle 7"/>
-          <p:cNvSpPr/>
-          <p:nvPr/>
-        </p:nvSpPr>
-        <p:spPr>
-          <a:xfrm>
-            <a:off x="457200" y="2478024"/>
-            <a:ext cx="11277295" cy="1051560"/>
-          </a:xfrm>
-          <a:prstGeom prst="roundRect">
-            <a:avLst>
-              <a:gd name="adj" fmla="val 12000"/>
-            </a:avLst>
-          </a:prstGeom>
-          <a:solidFill>
-            <a:srgbClr val="FFF8E1"/>
-          </a:solidFill>
-          <a:ln>
-            <a:noFill/>
-          </a:ln>
-        </p:spPr>
-        <p:style>
-          <a:lnRef idx="1">
-            <a:schemeClr val="accent1"/>
-          </a:lnRef>
-          <a:fillRef idx="3">
-            <a:schemeClr val="accent1"/>
-          </a:fillRef>
-          <a:effectRef idx="2">
-            <a:schemeClr val="accent1"/>
-          </a:effectRef>
-          <a:fontRef idx="minor">
-            <a:schemeClr val="lt1"/>
-          </a:fontRef>
-        </p:style>
-        <p:txBody>
-          <a:bodyPr rtlCol="0" anchor="ctr"/>
-          <a:lstStyle/>
-          <a:p>
-            <a:pPr algn="ctr"/>
-          </a:p>
-        </p:txBody>
-      </p:sp>
-      <p:sp>
-        <p:nvSpPr>
-          <p:cNvPr id="9" name="Rectangle 8"/>
-          <p:cNvSpPr/>
-          <p:nvPr/>
-        </p:nvSpPr>
-        <p:spPr>
-          <a:xfrm>
-            <a:off x="457200" y="2478024"/>
-            <a:ext cx="128016" cy="1051560"/>
-          </a:xfrm>
-          <a:prstGeom prst="rect">
-            <a:avLst/>
-          </a:prstGeom>
-          <a:solidFill>
-            <a:srgbClr val="FFD000"/>
-          </a:solidFill>
-          <a:ln>
-            <a:noFill/>
-          </a:ln>
-        </p:spPr>
-        <p:style>
-          <a:lnRef idx="1">
-            <a:schemeClr val="accent1"/>
-          </a:lnRef>
-          <a:fillRef idx="3">
-            <a:schemeClr val="accent1"/>
-          </a:fillRef>
-          <a:effectRef idx="2">
-            <a:schemeClr val="accent1"/>
-          </a:effectRef>
-          <a:fontRef idx="minor">
-            <a:schemeClr val="lt1"/>
-          </a:fontRef>
-        </p:style>
-        <p:txBody>
-          <a:bodyPr rtlCol="0" anchor="ctr"/>
-          <a:lstStyle/>
-          <a:p>
-            <a:pPr algn="ctr"/>
-          </a:p>
-        </p:txBody>
-      </p:sp>
-      <p:sp>
-        <p:nvSpPr>
-          <p:cNvPr id="10" name="TextBox 9"/>
-          <p:cNvSpPr txBox="1"/>
-          <p:nvPr/>
-        </p:nvSpPr>
-        <p:spPr>
-          <a:xfrm>
-            <a:off x="777240" y="2615184"/>
-            <a:ext cx="10774375" cy="822959"/>
-          </a:xfrm>
-          <a:prstGeom prst="rect">
-            <a:avLst/>
-          </a:prstGeom>
-          <a:noFill/>
-        </p:spPr>
-        <p:txBody>
-          <a:bodyPr wrap="square">
-            <a:spAutoFit/>
-          </a:bodyPr>
-          <a:lstStyle/>
-          <a:p>
-            <a:r>
-              <a:rPr sz="1200" b="1" i="0">
-                <a:solidFill>
-                  <a:srgbClr val="FFD000"/>
-                </a:solidFill>
-                <a:latin typeface="Calibri"/>
-              </a:rPr>
-              <a:t>Aclaración</a:t>
-            </a:r>
-          </a:p>
-          <a:p>
-            <a:pPr>
-              <a:spcBef>
-                <a:spcPts val="400"/>
-              </a:spcBef>
-            </a:pPr>
-            <a:r>
-              <a:rPr sz="1400" b="0" i="0">
-                <a:solidFill>
-                  <a:srgbClr val="333333"/>
-                </a:solidFill>
-                <a:latin typeface="Calibri"/>
-              </a:rPr>
-              <a:t>Enunciado completo: Clases/Proyecto Integrador/ (VetCare).</a:t>
-            </a:r>
-          </a:p>
-        </p:txBody>
-      </p:sp>
-      <p:sp>
-        <p:nvSpPr>
-          <p:cNvPr id="11" name="Rounded Rectangle 10"/>
-          <p:cNvSpPr/>
-          <p:nvPr/>
-        </p:nvSpPr>
-        <p:spPr>
-          <a:xfrm>
-            <a:off x="457200" y="3694176"/>
-            <a:ext cx="11277295" cy="1051560"/>
-          </a:xfrm>
-          <a:prstGeom prst="roundRect">
-            <a:avLst>
-              <a:gd name="adj" fmla="val 12000"/>
-            </a:avLst>
-          </a:prstGeom>
-          <a:solidFill>
-            <a:srgbClr val="FBE4E4"/>
-          </a:solidFill>
-          <a:ln>
-            <a:noFill/>
-          </a:ln>
-        </p:spPr>
-        <p:style>
-          <a:lnRef idx="1">
-            <a:schemeClr val="accent1"/>
-          </a:lnRef>
-          <a:fillRef idx="3">
-            <a:schemeClr val="accent1"/>
-          </a:fillRef>
-          <a:effectRef idx="2">
-            <a:schemeClr val="accent1"/>
-          </a:effectRef>
-          <a:fontRef idx="minor">
-            <a:schemeClr val="lt1"/>
-          </a:fontRef>
-        </p:style>
-        <p:txBody>
-          <a:bodyPr rtlCol="0" anchor="ctr"/>
-          <a:lstStyle/>
-          <a:p>
-            <a:pPr algn="ctr"/>
-          </a:p>
-        </p:txBody>
-      </p:sp>
-      <p:sp>
-        <p:nvSpPr>
-          <p:cNvPr id="12" name="Rectangle 11"/>
-          <p:cNvSpPr/>
-          <p:nvPr/>
-        </p:nvSpPr>
-        <p:spPr>
-          <a:xfrm>
-            <a:off x="457200" y="3694176"/>
-            <a:ext cx="128016" cy="1051560"/>
-          </a:xfrm>
-          <a:prstGeom prst="rect">
-            <a:avLst/>
-          </a:prstGeom>
-          <a:solidFill>
-            <a:srgbClr val="A02030"/>
-          </a:solidFill>
-          <a:ln>
-            <a:noFill/>
-          </a:ln>
-        </p:spPr>
-        <p:style>
-          <a:lnRef idx="1">
-            <a:schemeClr val="accent1"/>
-          </a:lnRef>
-          <a:fillRef idx="3">
-            <a:schemeClr val="accent1"/>
-          </a:fillRef>
-          <a:effectRef idx="2">
-            <a:schemeClr val="accent1"/>
-          </a:effectRef>
-          <a:fontRef idx="minor">
-            <a:schemeClr val="lt1"/>
-          </a:fontRef>
-        </p:style>
-        <p:txBody>
-          <a:bodyPr rtlCol="0" anchor="ctr"/>
-          <a:lstStyle/>
-          <a:p>
-            <a:pPr algn="ctr"/>
-          </a:p>
-        </p:txBody>
-      </p:sp>
-      <p:sp>
-        <p:nvSpPr>
-          <p:cNvPr id="13" name="TextBox 12"/>
-          <p:cNvSpPr txBox="1"/>
-          <p:nvPr/>
-        </p:nvSpPr>
-        <p:spPr>
-          <a:xfrm>
-            <a:off x="777240" y="3831336"/>
-            <a:ext cx="10774375" cy="822959"/>
-          </a:xfrm>
-          <a:prstGeom prst="rect">
-            <a:avLst/>
-          </a:prstGeom>
-          <a:noFill/>
-        </p:spPr>
-        <p:txBody>
-          <a:bodyPr wrap="square">
-            <a:spAutoFit/>
-          </a:bodyPr>
-          <a:lstStyle/>
-          <a:p>
-            <a:r>
-              <a:rPr sz="1200" b="1" i="0">
-                <a:solidFill>
-                  <a:srgbClr val="A02030"/>
-                </a:solidFill>
-                <a:latin typeface="Calibri"/>
-              </a:rPr>
-              <a:t>Atención</a:t>
-            </a:r>
-          </a:p>
-          <a:p>
-            <a:pPr>
-              <a:spcBef>
-                <a:spcPts val="400"/>
-              </a:spcBef>
-            </a:pPr>
-            <a:r>
-              <a:rPr sz="1400" b="0" i="0">
-                <a:solidFill>
-                  <a:srgbClr val="333333"/>
-                </a:solidFill>
-                <a:latin typeface="Calibri"/>
-              </a:rPr>
-              <a:t>Entrega del taller, si el docente lo asigna · en la fecha que indique el docente.</a:t>
-            </a:r>
-          </a:p>
-        </p:txBody>
-      </p:sp>
-      <p:sp>
-        <p:nvSpPr>
-          <p:cNvPr id="14" name="TextBox 13"/>
-          <p:cNvSpPr txBox="1"/>
-          <p:nvPr/>
-        </p:nvSpPr>
-        <p:spPr>
-          <a:xfrm>
-            <a:off x="11185855" y="6473952"/>
-            <a:ext cx="640080" cy="274320"/>
-          </a:xfrm>
-          <a:prstGeom prst="rect">
-            <a:avLst/>
-          </a:prstGeom>
-          <a:noFill/>
-        </p:spPr>
-        <p:txBody>
-          <a:bodyPr wrap="square">
-            <a:spAutoFit/>
-          </a:bodyPr>
-          <a:lstStyle/>
-          <a:p>
-            <a:pPr algn="r"/>
-            <a:r>
-              <a:rPr sz="1100" b="0" i="0">
-                <a:solidFill>
-                  <a:srgbClr val="666666"/>
-                </a:solidFill>
-                <a:latin typeface="Calibri"/>
-              </a:rPr>
-              <a:t>21</a:t>
-            </a:r>
-          </a:p>
-        </p:txBody>
-      </p:sp>
-    </p:spTree>
-  </p:cSld>
-  <p:clrMapOvr>
-    <a:masterClrMapping/>
-  </p:clrMapOvr>
-</p:sld>
-</file>
-
-<file path=ppt/slides/slide22.xml><?xml version="1.0" encoding="utf-8"?>
-<p:sld xmlns:a="http://schemas.openxmlformats.org/drawingml/2006/main" xmlns:p="http://schemas.openxmlformats.org/presentationml/2006/main" xmlns:r="http://schemas.openxmlformats.org/officeDocument/2006/relationships">
-  <p:cSld>
-    <p:bg>
-      <p:bgPr>
-        <a:solidFill>
-          <a:srgbClr val="FFFFFF"/>
-        </a:solidFill>
-        <a:effectLst/>
-      </p:bgPr>
-    </p:bg>
-    <p:spTree>
-      <p:nvGrpSpPr>
-        <p:cNvPr id="1" name=""/>
-        <p:cNvGrpSpPr/>
-        <p:nvPr/>
-      </p:nvGrpSpPr>
-      <p:grpSpPr/>
-      <p:sp>
-        <p:nvSpPr>
-          <p:cNvPr id="2" name="Rectangle 1"/>
-          <p:cNvSpPr/>
-          <p:nvPr/>
-        </p:nvSpPr>
-        <p:spPr>
-          <a:xfrm>
-            <a:off x="0" y="0"/>
-            <a:ext cx="12191695" cy="164592"/>
-          </a:xfrm>
-          <a:prstGeom prst="rect">
-            <a:avLst/>
-          </a:prstGeom>
-          <a:solidFill>
-            <a:srgbClr val="269CCB"/>
-          </a:solidFill>
-          <a:ln>
-            <a:noFill/>
-          </a:ln>
-        </p:spPr>
-        <p:style>
-          <a:lnRef idx="1">
-            <a:schemeClr val="accent1"/>
-          </a:lnRef>
-          <a:fillRef idx="3">
-            <a:schemeClr val="accent1"/>
-          </a:fillRef>
-          <a:effectRef idx="2">
-            <a:schemeClr val="accent1"/>
-          </a:effectRef>
-          <a:fontRef idx="minor">
-            <a:schemeClr val="lt1"/>
-          </a:fontRef>
-        </p:style>
-        <p:txBody>
-          <a:bodyPr rtlCol="0" anchor="ctr"/>
-          <a:lstStyle/>
-          <a:p>
-            <a:pPr algn="ctr"/>
-          </a:p>
-        </p:txBody>
-      </p:sp>
-      <p:pic>
-        <p:nvPicPr>
-          <p:cNvPr id="3" name="Picture 2" descr="logo_uniajc_color.png"/>
-          <p:cNvPicPr>
-            <a:picLocks noChangeAspect="1"/>
-          </p:cNvPicPr>
-          <p:nvPr/>
-        </p:nvPicPr>
-        <p:blipFill>
-          <a:blip r:embed="rId2"/>
-          <a:stretch>
-            <a:fillRect/>
-          </a:stretch>
-        </p:blipFill>
-        <p:spPr>
-          <a:xfrm>
-            <a:off x="10271455" y="5998464"/>
-            <a:ext cx="1463040" cy="643233"/>
-          </a:xfrm>
-          <a:prstGeom prst="rect">
-            <a:avLst/>
-          </a:prstGeom>
-        </p:spPr>
-      </p:pic>
-      <p:sp>
-        <p:nvSpPr>
-          <p:cNvPr id="4" name="TextBox 3"/>
-          <p:cNvSpPr txBox="1"/>
-          <p:nvPr/>
-        </p:nvSpPr>
-        <p:spPr>
-          <a:xfrm>
-            <a:off x="457200" y="1737360"/>
-            <a:ext cx="11277295" cy="1097280"/>
-          </a:xfrm>
-          <a:prstGeom prst="rect">
-            <a:avLst/>
-          </a:prstGeom>
-          <a:noFill/>
-        </p:spPr>
-        <p:txBody>
-          <a:bodyPr wrap="square" anchor="ctr"/>
-          <a:lstStyle/>
-          <a:p>
-            <a:pPr algn="ctr"/>
-            <a:r>
-              <a:rPr sz="3400" b="1" i="0">
-                <a:solidFill>
-                  <a:srgbClr val="095292"/>
-                </a:solidFill>
-                <a:latin typeface="Calibri"/>
-              </a:rPr>
-              <a:t>Clase 2 · VetCare avanza</a:t>
-            </a:r>
-          </a:p>
-        </p:txBody>
-      </p:sp>
-      <p:sp>
-        <p:nvSpPr>
-          <p:cNvPr id="5" name="TextBox 4"/>
-          <p:cNvSpPr txBox="1"/>
-          <p:nvPr/>
-        </p:nvSpPr>
-        <p:spPr>
-          <a:xfrm>
-            <a:off x="457200" y="3017520"/>
-            <a:ext cx="11277295" cy="1645920"/>
-          </a:xfrm>
-          <a:prstGeom prst="rect">
-            <a:avLst/>
-          </a:prstGeom>
-          <a:noFill/>
-        </p:spPr>
-        <p:txBody>
-          <a:bodyPr wrap="square">
-            <a:spAutoFit/>
-          </a:bodyPr>
-          <a:lstStyle/>
-          <a:p>
-            <a:pPr algn="ctr">
-              <a:spcAft>
-                <a:spcPts val="600"/>
-              </a:spcAft>
-            </a:pPr>
-            <a:r>
-              <a:rPr sz="1600" b="0" i="0">
-                <a:solidFill>
-                  <a:srgbClr val="333333"/>
-                </a:solidFill>
-                <a:latin typeface="Calibri"/>
-              </a:rPr>
-              <a:t>Queda listo el mapa de fases de VetCare con el artefacto concreto que produce cada fase y la marca de en cual esta parado el equipo hoy.</a:t>
-            </a:r>
-          </a:p>
-          <a:p>
-            <a:pPr algn="ctr">
-              <a:spcAft>
-                <a:spcPts val="600"/>
-              </a:spcAft>
-            </a:pPr>
-            <a:r>
-              <a:rPr sz="1600" b="0" i="0">
-                <a:solidFill>
-                  <a:srgbClr val="333333"/>
-                </a:solidFill>
-                <a:latin typeface="Calibri"/>
-              </a:rPr>
-              <a:t>Entregable: Un documento de una pagina en Google Docs con la tabla Fase / Pregunta que responde / Artefacto de VetCare / Quien lo aprueba, mas dos diagramas en draw.io (recorrido lineal y recorrido en tres vueltas) exportados a PDF y subidos a la plataforma del curso.</a:t>
-            </a:r>
-          </a:p>
-          <a:p>
-            <a:pPr algn="ctr">
-              <a:spcAft>
-                <a:spcPts val="600"/>
-              </a:spcAft>
-            </a:pPr>
-            <a:r>
-              <a:rPr sz="1600" b="0" i="0">
-                <a:solidFill>
-                  <a:srgbClr val="333333"/>
-                </a:solidFill>
-                <a:latin typeface="Calibri"/>
-              </a:rPr>
-              <a:t>Siguiente clase: continuamos el hilo del PI</a:t>
-            </a:r>
-          </a:p>
-        </p:txBody>
-      </p:sp>
-      <p:sp>
-        <p:nvSpPr>
-          <p:cNvPr id="6" name="TextBox 5"/>
-          <p:cNvSpPr txBox="1"/>
-          <p:nvPr/>
-        </p:nvSpPr>
-        <p:spPr>
-          <a:xfrm>
-            <a:off x="457200" y="4754880"/>
-            <a:ext cx="11277295" cy="640080"/>
-          </a:xfrm>
-          <a:prstGeom prst="rect">
-            <a:avLst/>
-          </a:prstGeom>
-          <a:noFill/>
-        </p:spPr>
-        <p:txBody>
-          <a:bodyPr wrap="square">
-            <a:spAutoFit/>
-          </a:bodyPr>
-          <a:lstStyle/>
-          <a:p>
-            <a:pPr algn="ctr"/>
-            <a:r>
-              <a:rPr sz="2000" b="1" i="0">
-                <a:solidFill>
-                  <a:srgbClr val="269CCB"/>
-                </a:solidFill>
-                <a:latin typeface="Calibri"/>
-              </a:rPr>
-              <a:t>Teoria al servicio del proyecto</a:t>
             </a:r>
           </a:p>
         </p:txBody>
@@ -10391,7 +7054,7 @@
                 </a:solidFill>
                 <a:latin typeface="Calibri"/>
               </a:rPr>
-              <a:t>Encuadre y repaso del avance</a:t>
+              <a:t>Encuadre y repaso</a:t>
             </a:r>
           </a:p>
         </p:txBody>
@@ -10736,7 +7399,7 @@
                 </a:solidFill>
                 <a:latin typeface="Calibri"/>
               </a:rPr>
-              <a:t>Taller guiado = avance del PI</a:t>
+              <a:t>Practica (opcional, guia en la carpeta)</a:t>
             </a:r>
           </a:p>
         </p:txBody>
@@ -10851,7 +7514,7 @@
                 </a:solidFill>
                 <a:latin typeface="Calibri"/>
               </a:rPr>
-              <a:t>Criterios de exito y cierre</a:t>
+              <a:t>Sintesis y cierre</a:t>
             </a:r>
           </a:p>
         </p:txBody>
@@ -12814,4 +9477,324 @@
   </a:objectDefaults>
   <a:extraClrSchemeLst/>
 </a:theme>
+</file>
+
+<file path=ppt/theme/theme2.xml><?xml version="1.0" encoding="utf-8"?>
+<a:theme xmlns:a="http://schemas.openxmlformats.org/drawingml/2006/main" name="Office Theme">
+  <a:themeElements>
+    <a:clrScheme name="Office">
+      <a:dk1>
+        <a:sysClr val="windowText" lastClr="000000"/>
+      </a:dk1>
+      <a:lt1>
+        <a:sysClr val="window" lastClr="FFFFFF"/>
+      </a:lt1>
+      <a:dk2>
+        <a:srgbClr val="1F497D"/>
+      </a:dk2>
+      <a:lt2>
+        <a:srgbClr val="EEECE1"/>
+      </a:lt2>
+      <a:accent1>
+        <a:srgbClr val="4F81BD"/>
+      </a:accent1>
+      <a:accent2>
+        <a:srgbClr val="C0504D"/>
+      </a:accent2>
+      <a:accent3>
+        <a:srgbClr val="9BBB59"/>
+      </a:accent3>
+      <a:accent4>
+        <a:srgbClr val="8064A2"/>
+      </a:accent4>
+      <a:accent5>
+        <a:srgbClr val="4BACC6"/>
+      </a:accent5>
+      <a:accent6>
+        <a:srgbClr val="F79646"/>
+      </a:accent6>
+      <a:hlink>
+        <a:srgbClr val="0000FF"/>
+      </a:hlink>
+      <a:folHlink>
+        <a:srgbClr val="800080"/>
+      </a:folHlink>
+    </a:clrScheme>
+    <a:fontScheme name="Office">
+      <a:majorFont>
+        <a:latin typeface="Calibri"/>
+        <a:ea typeface=""/>
+        <a:cs typeface=""/>
+        <a:font script="Jpan" typeface="ＭＳ Ｐゴシック"/>
+        <a:font script="Hang" typeface="맑은 고딕"/>
+        <a:font script="Hans" typeface="宋体"/>
+        <a:font script="Hant" typeface="新細明體"/>
+        <a:font script="Arab" typeface="Times New Roman"/>
+        <a:font script="Hebr" typeface="Times New Roman"/>
+        <a:font script="Thai" typeface="Angsana New"/>
+        <a:font script="Ethi" typeface="Nyala"/>
+        <a:font script="Beng" typeface="Vrinda"/>
+        <a:font script="Gujr" typeface="Shruti"/>
+        <a:font script="Khmr" typeface="MoolBoran"/>
+        <a:font script="Knda" typeface="Tunga"/>
+        <a:font script="Guru" typeface="Raavi"/>
+        <a:font script="Cans" typeface="Euphemia"/>
+        <a:font script="Cher" typeface="Plantagenet Cherokee"/>
+        <a:font script="Yiii" typeface="Microsoft Yi Baiti"/>
+        <a:font script="Tibt" typeface="Microsoft Himalaya"/>
+        <a:font script="Thaa" typeface="MV Boli"/>
+        <a:font script="Deva" typeface="Mangal"/>
+        <a:font script="Telu" typeface="Gautami"/>
+        <a:font script="Taml" typeface="Latha"/>
+        <a:font script="Syrc" typeface="Estrangelo Edessa"/>
+        <a:font script="Orya" typeface="Kalinga"/>
+        <a:font script="Mlym" typeface="Kartika"/>
+        <a:font script="Laoo" typeface="DokChampa"/>
+        <a:font script="Sinh" typeface="Iskoola Pota"/>
+        <a:font script="Mong" typeface="Mongolian Baiti"/>
+        <a:font script="Viet" typeface="Times New Roman"/>
+        <a:font script="Uigh" typeface="Microsoft Uighur"/>
+        <a:font script="Geor" typeface="Sylfaen"/>
+      </a:majorFont>
+      <a:minorFont>
+        <a:latin typeface="Calibri"/>
+        <a:ea typeface=""/>
+        <a:cs typeface=""/>
+        <a:font script="Jpan" typeface="ＭＳ Ｐゴシック"/>
+        <a:font script="Hang" typeface="맑은 고딕"/>
+        <a:font script="Hans" typeface="宋体"/>
+        <a:font script="Hant" typeface="新細明體"/>
+        <a:font script="Arab" typeface="Arial"/>
+        <a:font script="Hebr" typeface="Arial"/>
+        <a:font script="Thai" typeface="Cordia New"/>
+        <a:font script="Ethi" typeface="Nyala"/>
+        <a:font script="Beng" typeface="Vrinda"/>
+        <a:font script="Gujr" typeface="Shruti"/>
+        <a:font script="Khmr" typeface="DaunPenh"/>
+        <a:font script="Knda" typeface="Tunga"/>
+        <a:font script="Guru" typeface="Raavi"/>
+        <a:font script="Cans" typeface="Euphemia"/>
+        <a:font script="Cher" typeface="Plantagenet Cherokee"/>
+        <a:font script="Yiii" typeface="Microsoft Yi Baiti"/>
+        <a:font script="Tibt" typeface="Microsoft Himalaya"/>
+        <a:font script="Thaa" typeface="MV Boli"/>
+        <a:font script="Deva" typeface="Mangal"/>
+        <a:font script="Telu" typeface="Gautami"/>
+        <a:font script="Taml" typeface="Latha"/>
+        <a:font script="Syrc" typeface="Estrangelo Edessa"/>
+        <a:font script="Orya" typeface="Kalinga"/>
+        <a:font script="Mlym" typeface="Kartika"/>
+        <a:font script="Laoo" typeface="DokChampa"/>
+        <a:font script="Sinh" typeface="Iskoola Pota"/>
+        <a:font script="Mong" typeface="Mongolian Baiti"/>
+        <a:font script="Viet" typeface="Arial"/>
+        <a:font script="Uigh" typeface="Microsoft Uighur"/>
+        <a:font script="Geor" typeface="Sylfaen"/>
+      </a:minorFont>
+    </a:fontScheme>
+    <a:fmtScheme name="Office">
+      <a:fillStyleLst>
+        <a:solidFill>
+          <a:schemeClr val="phClr"/>
+        </a:solidFill>
+        <a:gradFill rotWithShape="1">
+          <a:gsLst>
+            <a:gs pos="0">
+              <a:schemeClr val="phClr">
+                <a:tint val="50000"/>
+                <a:satMod val="300000"/>
+              </a:schemeClr>
+            </a:gs>
+            <a:gs pos="35000">
+              <a:schemeClr val="phClr">
+                <a:tint val="37000"/>
+                <a:satMod val="300000"/>
+              </a:schemeClr>
+            </a:gs>
+            <a:gs pos="100000">
+              <a:schemeClr val="phClr">
+                <a:tint val="15000"/>
+                <a:satMod val="350000"/>
+              </a:schemeClr>
+            </a:gs>
+          </a:gsLst>
+          <a:lin ang="16200000" scaled="1"/>
+        </a:gradFill>
+        <a:gradFill rotWithShape="1">
+          <a:gsLst>
+            <a:gs pos="0">
+              <a:schemeClr val="phClr">
+                <a:tint val="100000"/>
+                <a:shade val="100000"/>
+                <a:satMod val="130000"/>
+              </a:schemeClr>
+            </a:gs>
+            <a:gs pos="100000">
+              <a:schemeClr val="phClr">
+                <a:tint val="50000"/>
+                <a:shade val="100000"/>
+                <a:satMod val="350000"/>
+              </a:schemeClr>
+            </a:gs>
+          </a:gsLst>
+          <a:lin ang="16200000" scaled="0"/>
+        </a:gradFill>
+      </a:fillStyleLst>
+      <a:lnStyleLst>
+        <a:ln w="9525" cap="flat" cmpd="sng" algn="ctr">
+          <a:solidFill>
+            <a:schemeClr val="phClr">
+              <a:shade val="95000"/>
+              <a:satMod val="105000"/>
+            </a:schemeClr>
+          </a:solidFill>
+          <a:prstDash val="solid"/>
+        </a:ln>
+        <a:ln w="25400" cap="flat" cmpd="sng" algn="ctr">
+          <a:solidFill>
+            <a:schemeClr val="phClr"/>
+          </a:solidFill>
+          <a:prstDash val="solid"/>
+        </a:ln>
+        <a:ln w="38100" cap="flat" cmpd="sng" algn="ctr">
+          <a:solidFill>
+            <a:schemeClr val="phClr"/>
+          </a:solidFill>
+          <a:prstDash val="solid"/>
+        </a:ln>
+      </a:lnStyleLst>
+      <a:effectStyleLst>
+        <a:effectStyle>
+          <a:effectLst>
+            <a:outerShdw blurRad="40000" dist="20000" dir="5400000" rotWithShape="0">
+              <a:srgbClr val="000000">
+                <a:alpha val="38000"/>
+              </a:srgbClr>
+            </a:outerShdw>
+          </a:effectLst>
+        </a:effectStyle>
+        <a:effectStyle>
+          <a:effectLst>
+            <a:outerShdw blurRad="40000" dist="23000" dir="5400000" rotWithShape="0">
+              <a:srgbClr val="000000">
+                <a:alpha val="35000"/>
+              </a:srgbClr>
+            </a:outerShdw>
+          </a:effectLst>
+        </a:effectStyle>
+        <a:effectStyle>
+          <a:effectLst>
+            <a:outerShdw blurRad="40000" dist="23000" dir="5400000" rotWithShape="0">
+              <a:srgbClr val="000000">
+                <a:alpha val="35000"/>
+              </a:srgbClr>
+            </a:outerShdw>
+          </a:effectLst>
+          <a:scene3d>
+            <a:camera prst="orthographicFront">
+              <a:rot lat="0" lon="0" rev="0"/>
+            </a:camera>
+            <a:lightRig rig="threePt" dir="t">
+              <a:rot lat="0" lon="0" rev="1200000"/>
+            </a:lightRig>
+          </a:scene3d>
+          <a:sp3d>
+            <a:bevelT w="63500" h="25400"/>
+          </a:sp3d>
+        </a:effectStyle>
+      </a:effectStyleLst>
+      <a:bgFillStyleLst>
+        <a:solidFill>
+          <a:schemeClr val="phClr"/>
+        </a:solidFill>
+        <a:gradFill rotWithShape="1">
+          <a:gsLst>
+            <a:gs pos="0">
+              <a:schemeClr val="phClr">
+                <a:tint val="40000"/>
+                <a:satMod val="350000"/>
+              </a:schemeClr>
+            </a:gs>
+            <a:gs pos="40000">
+              <a:schemeClr val="phClr">
+                <a:tint val="45000"/>
+                <a:shade val="99000"/>
+                <a:satMod val="350000"/>
+              </a:schemeClr>
+            </a:gs>
+            <a:gs pos="100000">
+              <a:schemeClr val="phClr">
+                <a:shade val="20000"/>
+                <a:satMod val="255000"/>
+              </a:schemeClr>
+            </a:gs>
+          </a:gsLst>
+          <a:path path="circle">
+            <a:fillToRect l="50000" t="-80000" r="50000" b="180000"/>
+          </a:path>
+        </a:gradFill>
+        <a:gradFill rotWithShape="1">
+          <a:gsLst>
+            <a:gs pos="0">
+              <a:schemeClr val="phClr">
+                <a:tint val="80000"/>
+                <a:satMod val="300000"/>
+              </a:schemeClr>
+            </a:gs>
+            <a:gs pos="100000">
+              <a:schemeClr val="phClr">
+                <a:shade val="30000"/>
+                <a:satMod val="200000"/>
+              </a:schemeClr>
+            </a:gs>
+          </a:gsLst>
+          <a:path path="circle">
+            <a:fillToRect l="50000" t="50000" r="50000" b="50000"/>
+          </a:path>
+        </a:gradFill>
+      </a:bgFillStyleLst>
+    </a:fmtScheme>
+  </a:themeElements>
+  <a:objectDefaults>
+    <a:spDef>
+      <a:spPr/>
+      <a:bodyPr/>
+      <a:lstStyle/>
+      <a:style>
+        <a:lnRef idx="1">
+          <a:schemeClr val="accent1"/>
+        </a:lnRef>
+        <a:fillRef idx="3">
+          <a:schemeClr val="accent1"/>
+        </a:fillRef>
+        <a:effectRef idx="2">
+          <a:schemeClr val="accent1"/>
+        </a:effectRef>
+        <a:fontRef idx="minor">
+          <a:schemeClr val="lt1"/>
+        </a:fontRef>
+      </a:style>
+    </a:spDef>
+    <a:lnDef>
+      <a:spPr/>
+      <a:bodyPr/>
+      <a:lstStyle/>
+      <a:style>
+        <a:lnRef idx="2">
+          <a:schemeClr val="accent1"/>
+        </a:lnRef>
+        <a:fillRef idx="0">
+          <a:schemeClr val="accent1"/>
+        </a:fillRef>
+        <a:effectRef idx="1">
+          <a:schemeClr val="accent1"/>
+        </a:effectRef>
+        <a:fontRef idx="minor">
+          <a:schemeClr val="tx1"/>
+        </a:fontRef>
+      </a:style>
+    </a:lnDef>
+  </a:objectDefaults>
+  <a:extraClrSchemeLst/>
+</a:theme>
 </file>
--- a/Seminario de Sistemas/Clases/Clase 2 - Ciclos de vida del software/Presentacion.pptx
+++ b/Seminario de Sistemas/Clases/Clase 2 - Ciclos de vida del software/Presentacion.pptx
@@ -616,7 +616,7 @@
           <a:p/>
           <a:p>
             <a:r>
-              <a:t>Por eso aqui nunca se califica codigo: se califica que los planos esten completos, coherentes y sean construibles.</a:t>
+              <a:t>Por eso aqui nunca se revisa codigo: se revisa que los planos esten completos, coherentes y sean construibles.</a:t>
             </a:r>
           </a:p>
         </p:txBody>
@@ -686,7 +686,7 @@
           <a:lstStyle/>
           <a:p>
             <a:r>
-              <a:t>Recorrerlas una sola vez y en orden significa cerrar requisitos de TODO VetCare, luego diseñar TODO VetCare, luego construir TODO.</a:t>
+              <a:t>Recorrerlas una sola vez y en orden significa cerrar requisitos de TODO el sistema de la clinica, luego diseñar TODO el sistema de la clinica, luego construir TODO.</a:t>
             </a:r>
           </a:p>
           <a:p/>
@@ -4331,6 +4331,22 @@
                 </a:solidFill>
                 <a:latin typeface="Calibri"/>
               </a:rPr>
+              <a:t>–   El tablero de metricas es incierto porque la clinica nunca ha visto uno y va a cambiar de opinion apenas lo vea.</a:t>
+            </a:r>
+          </a:p>
+          <a:p>
+            <a:pPr>
+              <a:spcAft>
+                <a:spcPts val="800"/>
+              </a:spcAft>
+            </a:pPr>
+            <a:r>
+              <a:rPr sz="2000" b="0" i="0">
+                <a:solidFill>
+                  <a:srgbClr val="333333"/>
+                </a:solidFill>
+                <a:latin typeface="Calibri"/>
+              </a:rPr>
               <a:t>–   Ademas, el ciclo elegido debe caber en la realidad del curso: el estudiante que solo cursa Seminario cierra con documento de diseño y prototipo navegable</a:t>
             </a:r>
           </a:p>
@@ -4751,7 +4767,7 @@
                 </a:solidFill>
                 <a:latin typeface="Calibri"/>
               </a:rPr>
-              <a:t>%% Lineal significa: no se vuelve. Cada fase cierra con un entregable</a:t>
+              <a:t>%% Lineal significa: no se vuelve. Cada fase cierra con un artefacto</a:t>
             </a:r>
           </a:p>
           <a:p>
@@ -5512,7 +5528,7 @@
                 </a:solidFill>
                 <a:latin typeface="Calibri"/>
               </a:rPr>
-              <a:t>El ciclo de vida de VetCare en Mermaid: mismas cajas, dos recorridos</a:t>
+              <a:t>El ciclo de vida del sistema de la clinica en Mermaid: mismas cajas, dos recorridos</a:t>
             </a:r>
           </a:p>
         </p:txBody>
@@ -6154,7 +6170,7 @@
                 </a:solidFill>
                 <a:latin typeface="Calibri"/>
               </a:rPr>
-              <a:t> El docente arma en vivo en draw.io el ciclo de VetCare en dos versiones, una sola pasada y tres vueltas, y muestra que las cajas son identicas y lo unico que cambia es el recorrido.</a:t>
+              <a:t> El docente arma en vivo en draw.io el ciclo del sistema de la clinica en dos versiones, una sola pasada y tres vueltas, y muestra que las cajas son identicas y lo unico que cambia es el recorrido.</a:t>
             </a:r>
           </a:p>
           <a:p>
@@ -6170,7 +6186,7 @@
                 </a:solidFill>
                 <a:latin typeface="Calibri"/>
               </a:rPr>
-              <a:t>–   Mismo dominio VetCare — no otro ejemplo. Aqui se diseña, no se programa.</a:t>
+              <a:t>–   Mismo dominio: la clinica veterinaria — no otro ejemplo. Aqui se diseña, no se programa.</a:t>
             </a:r>
           </a:p>
         </p:txBody>
@@ -6715,7 +6731,7 @@
                 </a:solidFill>
                 <a:latin typeface="Calibri"/>
               </a:rPr>
-              <a:t>–   Ejemplo de toda la clase: VetCare, el sistema de la clinica «Huellitas».</a:t>
+              <a:t>–   Ejemplo de toda la clase: el sistema de una clinica veterinaria.</a:t>
             </a:r>
           </a:p>
         </p:txBody>
@@ -7284,7 +7300,7 @@
                 </a:solidFill>
                 <a:latin typeface="Calibri"/>
               </a:rPr>
-              <a:t>Demo en vivo sobre VetCare</a:t>
+              <a:t>Demo en vivo sobre la clinica</a:t>
             </a:r>
           </a:p>
         </p:txBody>
@@ -7819,7 +7835,7 @@
                 </a:solidFill>
                 <a:latin typeface="Calibri"/>
               </a:rPr>
-              <a:t>–   En VetCare la fase de requisitos no termina cuando el equipo 'ya entendio' el problema de Huellitas: termina cuando existe una lista numerada de requisitos funcionales y no funcionales que la clinica leyo y aprobo.</a:t>
+              <a:t>–   En el sistema de la clinica la fase de requisitos no termina cuando el equipo 'ya entendio' el problema de la clinica: termina cuando existe una lista numerada de requisitos funcionales y no funcionales que la clinica leyo y aprobo.</a:t>
             </a:r>
           </a:p>
         </p:txBody>
@@ -8071,7 +8087,7 @@
                 </a:solidFill>
                 <a:latin typeface="Calibri"/>
               </a:rPr>
-              <a:t>–   En nuestro Proyecto Integrador esto se reparte: Seminario de Sistemas vive en requisitos y diseño (los planos), y Programacion II vive en construccion y pruebas (la obra).</a:t>
+              <a:t>–   En un proyecto de software esto se reparte: Seminario de Sistemas vive en requisitos y diseño (los planos), y Programacion II vive en construccion y pruebas (la obra).</a:t>
             </a:r>
           </a:p>
         </p:txBody>
@@ -8307,7 +8323,7 @@
                 </a:solidFill>
                 <a:latin typeface="Calibri"/>
               </a:rPr>
-              <a:t>–   En VetCare la vuelta 1 podria ser solo la ficha del paciente (requisitos de la ficha, diseño de la ficha, mockup de la ficha, revision con la clinica); la vuelta 2, la historia clinica y la busqueda; la vuelta 3, los reportes y metricas.</a:t>
+              <a:t>–   En el sistema de la clinica la vuelta 1 podria ser solo la ficha del paciente (requisitos de la ficha, diseño de la ficha, mockup de la ficha, revision con la clinica); la vuelta 2, la historia clinica y la busqueda; la vuelta 3, los reportes y metricas.</a:t>
             </a:r>
           </a:p>
           <a:p>
@@ -8607,7 +8623,7 @@
                 </a:solidFill>
                 <a:latin typeface="Calibri"/>
               </a:rPr>
-              <a:t>–   En VetCare el proyecto es 'entregar los planos y el prototipo de VetCare en este semestre'</a:t>
+              <a:t>–   En el sistema de la clinica el proyecto es 'entregar los planos y el prototipo del sistema de la clinica en este semestre'</a:t>
             </a:r>
           </a:p>
           <a:p>
@@ -8623,7 +8639,7 @@
                 </a:solidFill>
                 <a:latin typeface="Calibri"/>
               </a:rPr>
-              <a:t>–   El producto es el sistema que Huellitas usaria durante los proximos años, con su version 1.0, su 1.1 cuando pidan vacunacion a domicilio y su 2.0 cuando quieran facturacion electronica.</a:t>
+              <a:t>–   El producto es el sistema que la clinica usaria durante los proximos años, con su version 1.0, su 1.1 cuando pidan vacunacion a domicilio y su 2.0 cuando quieran facturacion electronica.</a:t>
             </a:r>
           </a:p>
         </p:txBody>
@@ -9111,7 +9127,7 @@
                 </a:solidFill>
                 <a:latin typeface="Calibri"/>
               </a:rPr>
-              <a:t>–   En VetCare aplican los dos matices: los datos basicos de un paciente (nombre, especie, raza, propietario) son estables y se pueden cerrar temprano; el tablero de metricas es incierto porque la clinica nunca ha visto uno y va a cambiar de opinion apenas lo vea.</a:t>
+              <a:t>–   En el sistema de la clinica aplican los dos matices: los datos basicos de un paciente (nombre, especie, raza, propietario) son estables y se pueden cerrar temprano</a:t>
             </a:r>
           </a:p>
         </p:txBody>

--- a/Seminario de Sistemas/Clases/Clase 2 - Ciclos de vida del software/Presentacion.pptx
+++ b/Seminario de Sistemas/Clases/Clase 2 - Ciclos de vida del software/Presentacion.pptx
@@ -686,7 +686,7 @@
           <a:lstStyle/>
           <a:p>
             <a:r>
-              <a:t>Recorrerlas una sola vez y en orden significa cerrar requisitos de TODO el sistema de la clinica, luego diseñar TODO el sistema de la clinica, luego construir TODO.</a:t>
+              <a:t>Recorrerlas una sola vez y en orden significa cerrar requisitos de TODO el sistema, luego diseñar TODO el sistema, luego construir TODO.</a:t>
             </a:r>
           </a:p>
           <a:p/>
@@ -769,6 +769,12 @@
           <a:p>
             <a:r>
               <a:t>Con criterios, no con moda.</a:t>
+            </a:r>
+          </a:p>
+          <a:p/>
+          <a:p>
+            <a:r>
+              <a:t>En la clinica, un recorrido en ciclos permitiria mostrar primero la ficha del paciente y ajustar la agenda despues de escuchar a la recepcionista.</a:t>
             </a:r>
           </a:p>
         </p:txBody>
@@ -4331,7 +4337,7 @@
                 </a:solidFill>
                 <a:latin typeface="Calibri"/>
               </a:rPr>
-              <a:t>–   El tablero de metricas es incierto porque la clinica nunca ha visto uno y va a cambiar de opinion apenas lo vea.</a:t>
+              <a:t>–   Y esa es una ruta completa, porque el ciclo de vida del software incluye fases donde no se escribe una sola linea de codigo y aun asi se produce valor.</a:t>
             </a:r>
           </a:p>
           <a:p>
@@ -4347,7 +4353,7 @@
                 </a:solidFill>
                 <a:latin typeface="Calibri"/>
               </a:rPr>
-              <a:t>–   Ademas, el ciclo elegido debe caber en la realidad del curso: el estudiante que solo cursa Seminario cierra con documento de diseño y prototipo navegable</a:t>
+              <a:t>–   Un ciclo de vida es, por definicion, la secuencia de fases que recorre un sistema desde la idea hasta su retiro, y elegir el recorrido es decidir cuantas veces y en que orden se pasa por ellas.</a:t>
             </a:r>
           </a:p>
           <a:p>
@@ -4363,7 +4369,7 @@
                 </a:solidFill>
                 <a:latin typeface="Calibri"/>
               </a:rPr>
-              <a:t>–   Y esa es una ruta completa, porque el ciclo de vida del software incluye fases donde no se escribe una sola linea de codigo y aun asi se produce valor.</a:t>
+              <a:t>–   El error comun es elegir el ciclo por costumbre del equipo y no por la estabilidad de los requisitos.</a:t>
             </a:r>
           </a:p>
         </p:txBody>
@@ -5528,7 +5534,7 @@
                 </a:solidFill>
                 <a:latin typeface="Calibri"/>
               </a:rPr>
-              <a:t>El ciclo de vida del sistema de la clinica en Mermaid: mismas cajas, dos recorridos</a:t>
+              <a:t>El ciclo de vida de la clinica en Mermaid: mismas cajas, dos recorridos</a:t>
             </a:r>
           </a:p>
         </p:txBody>
@@ -6170,7 +6176,7 @@
                 </a:solidFill>
                 <a:latin typeface="Calibri"/>
               </a:rPr>
-              <a:t> El docente arma en vivo en draw.io el ciclo del sistema de la clinica en dos versiones, una sola pasada y tres vueltas, y muestra que las cajas son identicas y lo unico que cambia es el recorrido.</a:t>
+              <a:t> Se arma en vivo en draw.io el ciclo de la clinica en dos versiones, una sola pasada y tres vueltas, y muestra que las cajas son identicas y lo unico que cambia es el recorrido.</a:t>
             </a:r>
           </a:p>
           <a:p>
@@ -7835,7 +7841,7 @@
                 </a:solidFill>
                 <a:latin typeface="Calibri"/>
               </a:rPr>
-              <a:t>–   En el sistema de la clinica la fase de requisitos no termina cuando el equipo 'ya entendio' el problema de la clinica: termina cuando existe una lista numerada de requisitos funcionales y no funcionales que la clinica leyo y aprobo.</a:t>
+              <a:t>–   En la clinica la fase de requisitos no termina cuando el equipo 'ya entendio' el problema de la clinica: termina cuando existe una lista numerada de requisitos funcionales y no funcionales que la clinica leyo y aprobo.</a:t>
             </a:r>
           </a:p>
         </p:txBody>
@@ -8323,7 +8329,7 @@
                 </a:solidFill>
                 <a:latin typeface="Calibri"/>
               </a:rPr>
-              <a:t>–   En el sistema de la clinica la vuelta 1 podria ser solo la ficha del paciente (requisitos de la ficha, diseño de la ficha, mockup de la ficha, revision con la clinica); la vuelta 2, la historia clinica y la busqueda; la vuelta 3, los reportes y metricas.</a:t>
+              <a:t>–   En la clinica la vuelta 1 podria ser solo la ficha del paciente (requisitos de la ficha, diseño de la ficha, mockup de la ficha, revision con la clinica); la vuelta 2, la historia clinica y la busqueda; la vuelta 3, los reportes y metricas.</a:t>
             </a:r>
           </a:p>
           <a:p>
@@ -8623,7 +8629,7 @@
                 </a:solidFill>
                 <a:latin typeface="Calibri"/>
               </a:rPr>
-              <a:t>–   En el sistema de la clinica el proyecto es 'entregar los planos y el prototipo del sistema de la clinica en este semestre'</a:t>
+              <a:t>–   En la clinica el proyecto es 'entregar los planos y el prototipo del sistema en este semestre'</a:t>
             </a:r>
           </a:p>
           <a:p>
@@ -8640,6 +8646,22 @@
                 <a:latin typeface="Calibri"/>
               </a:rPr>
               <a:t>–   El producto es el sistema que la clinica usaria durante los proximos años, con su version 1.0, su 1.1 cuando pidan vacunacion a domicilio y su 2.0 cuando quieran facturacion electronica.</a:t>
+            </a:r>
+          </a:p>
+          <a:p>
+            <a:pPr>
+              <a:spcAft>
+                <a:spcPts val="800"/>
+              </a:spcAft>
+            </a:pPr>
+            <a:r>
+              <a:rPr sz="2000" b="0" i="0">
+                <a:solidFill>
+                  <a:srgbClr val="333333"/>
+                </a:solidFill>
+                <a:latin typeface="Calibri"/>
+              </a:rPr>
+              <a:t>–   Esta distincion tiene una consecuencia dura: la fase mas larga y mas costosa de la vida de un sistema no es construirlo, es mantenerlo</a:t>
             </a:r>
           </a:p>
         </p:txBody>
@@ -8859,7 +8881,7 @@
                 </a:solidFill>
                 <a:latin typeface="Calibri"/>
               </a:rPr>
-              <a:t>–   Esta distincion tiene una consecuencia dura: la fase mas larga y mas costosa de la vida de un sistema no es construirlo, es mantenerlo</a:t>
+              <a:t>–   Y por eso el diseño y la documentacion que hacemos aqui no son un tramite, son lo que permite que otro entienda el sistema dentro de dos años.</a:t>
             </a:r>
           </a:p>
           <a:p>
@@ -8875,7 +8897,39 @@
                 </a:solidFill>
                 <a:latin typeface="Calibri"/>
               </a:rPr>
-              <a:t>–   Y por eso el diseño y la documentacion que hacemos aqui no son un tramite, son lo que permite que otro entienda el sistema dentro de dos años.</a:t>
+              <a:t>–   En la industria se estima que el mantenimiento se lleva entre el 60 y el 80 por ciento del costo total de un sistema a lo largo de su vida.</a:t>
+            </a:r>
+          </a:p>
+          <a:p>
+            <a:pPr>
+              <a:spcAft>
+                <a:spcPts val="800"/>
+              </a:spcAft>
+            </a:pPr>
+            <a:r>
+              <a:rPr sz="2000" b="0" i="0">
+                <a:solidFill>
+                  <a:srgbClr val="333333"/>
+                </a:solidFill>
+                <a:latin typeface="Calibri"/>
+              </a:rPr>
+              <a:t>–   En la clinica, agregar dentro de un año los recordatorios de vacunas es mantenimiento: quien lo haga necesitara saber como se relacionan mascota, dueño y cita sin leer todo el codigo.</a:t>
+            </a:r>
+          </a:p>
+          <a:p>
+            <a:pPr>
+              <a:spcAft>
+                <a:spcPts val="800"/>
+              </a:spcAft>
+            </a:pPr>
+            <a:r>
+              <a:rPr sz="2000" b="0" i="0">
+                <a:solidFill>
+                  <a:srgbClr val="333333"/>
+                </a:solidFill>
+                <a:latin typeface="Calibri"/>
+              </a:rPr>
+              <a:t>–   El error comun es dar el proyecto por cerrado cuando se entrega la version 1.0 y no dejar escrito nada para esa segunda vida del producto.</a:t>
             </a:r>
           </a:p>
         </p:txBody>
@@ -9127,7 +9181,39 @@
                 </a:solidFill>
                 <a:latin typeface="Calibri"/>
               </a:rPr>
-              <a:t>–   En el sistema de la clinica aplican los dos matices: los datos basicos de un paciente (nombre, especie, raza, propietario) son estables y se pueden cerrar temprano</a:t>
+              <a:t>–   En la clinica aplican los dos matices: los datos basicos de un paciente (nombre, especie, raza, propietario) son estables y se pueden cerrar temprano</a:t>
+            </a:r>
+          </a:p>
+          <a:p>
+            <a:pPr>
+              <a:spcAft>
+                <a:spcPts val="800"/>
+              </a:spcAft>
+            </a:pPr>
+            <a:r>
+              <a:rPr sz="2000" b="0" i="0">
+                <a:solidFill>
+                  <a:srgbClr val="333333"/>
+                </a:solidFill>
+                <a:latin typeface="Calibri"/>
+              </a:rPr>
+              <a:t>–   El tablero de metricas es incierto porque la clinica nunca ha visto uno y va a cambiar de opinion apenas lo vea.</a:t>
+            </a:r>
+          </a:p>
+          <a:p>
+            <a:pPr>
+              <a:spcAft>
+                <a:spcPts val="800"/>
+              </a:spcAft>
+            </a:pPr>
+            <a:r>
+              <a:rPr sz="2000" b="0" i="0">
+                <a:solidFill>
+                  <a:srgbClr val="333333"/>
+                </a:solidFill>
+                <a:latin typeface="Calibri"/>
+              </a:rPr>
+              <a:t>–   Ademas, el ciclo elegido debe caber en la realidad del curso: el estudiante que solo cursa Seminario cierra con documento de diseño y prototipo navegable</a:t>
             </a:r>
           </a:p>
         </p:txBody>

--- a/Seminario de Sistemas/Clases/Clase 2 - Ciclos de vida del software/Presentacion.pptx
+++ b/Seminario de Sistemas/Clases/Clase 2 - Ciclos de vida del software/Presentacion.pptx
@@ -18,8 +18,6 @@
     <p:sldId id="266" r:id="rId18"/>
     <p:sldId id="267" r:id="rId19"/>
     <p:sldId id="268" r:id="rId20"/>
-    <p:sldId id="269" r:id="rId21"/>
-    <p:sldId id="270" r:id="rId22"/>
   </p:sldIdLst>
   <p:sldSz cx="12191695" cy="6858000" type="screen4x3"/>
   <p:notesSz cx="6858000" cy="9144000"/>
@@ -516,6 +514,36 @@
           <a:lstStyle/>
           <a:p>
             <a:r>
+              <a:t>DESARROLLO (para explicarlo, no se proyecta):</a:t>
+            </a:r>
+          </a:p>
+          <a:p/>
+          <a:p>
+            <a:r>
+              <a:t>Un ciclo de vida del software es el orden en que se recorren las etapas que van desde que alguien dice 'necesito un sistema' hasta que ese sistema se apaga definitivamente.</a:t>
+            </a:r>
+          </a:p>
+          <a:p/>
+          <a:p>
+            <a:r>
+              <a:t>Las etapas clasicas son cinco: requisitos, diseño, construccion, pruebas y mantenimiento.</a:t>
+            </a:r>
+          </a:p>
+          <a:p/>
+          <a:p>
+            <a:r>
+              <a:t>En la clinica la fase de requisitos no termina cuando el equipo 'ya entendio' el problema de la clinica: termina cuando existe una lista numerada de requisitos funcionales y no funcionales que la clinica leyo y aprobo.</a:t>
+            </a:r>
+          </a:p>
+          <a:p/>
+          <a:p>
+            <a:r>
+              <a:t>NOTAS:</a:t>
+            </a:r>
+          </a:p>
+          <a:p/>
+          <a:p>
+            <a:r>
               <a:t>Lo importante no es memorizar los nombres sino entender que cada fase tiene tres cosas: una entrada (lo que recibe de la fase anterior), una salida tangible llamada artefacto (un documento, un diagrama, un programa) y un criterio para decir 'esto ya quedo'.</a:t>
             </a:r>
           </a:p>
@@ -592,6 +620,36 @@
           <a:lstStyle/>
           <a:p>
             <a:r>
+              <a:t>DESARROLLO (para explicarlo, no se proyecta):</a:t>
+            </a:r>
+          </a:p>
+          <a:p/>
+          <a:p>
+            <a:r>
+              <a:t>Requisitos responde la pregunta QUE debe hacer el sistema y produce la lista de RF y RNF, el glosario y las reglas de negocio.</a:t>
+            </a:r>
+          </a:p>
+          <a:p/>
+          <a:p>
+            <a:r>
+              <a:t>Construccion es escribir el codigo y produce el ejecutable.</a:t>
+            </a:r>
+          </a:p>
+          <a:p/>
+          <a:p>
+            <a:r>
+              <a:t>En un proyecto de software esto se reparte: Seminario de Sistemas vive en requisitos y diseño (los planos), y Programacion II vive en construccion y pruebas (la obra).</a:t>
+            </a:r>
+          </a:p>
+          <a:p/>
+          <a:p>
+            <a:r>
+              <a:t>NOTAS:</a:t>
+            </a:r>
+          </a:p>
+          <a:p/>
+          <a:p>
+            <a:r>
               <a:t>Vale la pena decir con precision que produce cada fase, porque ahi se cae la mitad de los equipos.</a:t>
             </a:r>
           </a:p>
@@ -686,6 +744,42 @@
           <a:lstStyle/>
           <a:p>
             <a:r>
+              <a:t>DESARROLLO (para explicarlo, no se proyecta):</a:t>
+            </a:r>
+          </a:p>
+          <a:p/>
+          <a:p>
+            <a:r>
+              <a:t>La gran decision no es cuales fases hacer, sino cuantas veces recorrerlas y con cuanto sistema a la vez.</a:t>
+            </a:r>
+          </a:p>
+          <a:p/>
+          <a:p>
+            <a:r>
+              <a:t>En la clinica la vuelta 1 podria ser solo la ficha del paciente (requisitos de la ficha, diseño de la ficha, mockup de la ficha, revision con la clinica); la vuelta 2, la historia clinica y la busqueda; la vuelta 3, los reportes y metricas.</a:t>
+            </a:r>
+          </a:p>
+          <a:p/>
+          <a:p>
+            <a:r>
+              <a:t>La diferencia practica es brutal: en el recorrido unico la clinica ve algo hasta el final y un malentendido de la semana 2 se descubre en la semana 15</a:t>
+            </a:r>
+          </a:p>
+          <a:p/>
+          <a:p>
+            <a:r>
+              <a:t>En el recorrido en ciclos la clinica opina cada dos o tres semanas y el error se corrige cuando todavia es barato corregirlo.</a:t>
+            </a:r>
+          </a:p>
+          <a:p/>
+          <a:p>
+            <a:r>
+              <a:t>NOTAS:</a:t>
+            </a:r>
+          </a:p>
+          <a:p/>
+          <a:p>
+            <a:r>
               <a:t>Recorrerlas una sola vez y en orden significa cerrar requisitos de TODO el sistema, luego diseñar TODO el sistema, luego construir TODO.</a:t>
             </a:r>
           </a:p>
@@ -762,6 +856,196 @@
           <a:lstStyle/>
           <a:p>
             <a:r>
+              <a:t>DESARROLLO (para explicarlo, no se proyecta):</a:t>
+            </a:r>
+          </a:p>
+          <a:p/>
+          <a:p>
+            <a:r>
+              <a:t>Hay que separar dos palabras que los equipos usan como sinonimos y no lo son: proyecto y producto.</a:t>
+            </a:r>
+          </a:p>
+          <a:p/>
+          <a:p>
+            <a:r>
+              <a:t>Un proyecto es un esfuerzo temporal, con inicio, fin, alcance, presupuesto y responsables; se acaba y se cierra.</a:t>
+            </a:r>
+          </a:p>
+          <a:p/>
+          <a:p>
+            <a:r>
+              <a:t>Un producto es el sistema vivo, que la gente usa, que tiene versiones y que sigue existiendo cuando el proyecto ya se cerro.</a:t>
+            </a:r>
+          </a:p>
+          <a:p/>
+          <a:p>
+            <a:r>
+              <a:t>En la clinica el proyecto es 'entregar los planos y el prototipo del sistema en este semestre'</a:t>
+            </a:r>
+          </a:p>
+          <a:p/>
+          <a:p>
+            <a:r>
+              <a:t>El producto es el sistema que la clinica usaria durante los proximos años, con su version 1.0, su 1.1 cuando pidan vacunacion a domicilio y su 2.0 cuando quieran facturacion electronica.</a:t>
+            </a:r>
+          </a:p>
+          <a:p/>
+          <a:p>
+            <a:r>
+              <a:t>Esta distincion tiene una consecuencia dura: la fase mas larga y mas costosa de la vida de un sistema no es construirlo, es mantenerlo</a:t>
+            </a:r>
+          </a:p>
+          <a:p/>
+          <a:p>
+            <a:r>
+              <a:t>Y por eso el diseño y la documentacion que hacemos aqui no son un tramite, son lo que permite que otro entienda el sistema dentro de dos años.</a:t>
+            </a:r>
+          </a:p>
+          <a:p/>
+          <a:p>
+            <a:r>
+              <a:t>En la industria se estima que el mantenimiento se lleva entre el 60 y el 80 por ciento del costo total de un sistema a lo largo de su vida.</a:t>
+            </a:r>
+          </a:p>
+          <a:p/>
+          <a:p>
+            <a:r>
+              <a:t>En la clinica, agregar dentro de un año los recordatorios de vacunas es mantenimiento: quien lo haga necesitara saber como se relacionan mascota, dueño y cita sin leer todo el codigo.</a:t>
+            </a:r>
+          </a:p>
+          <a:p/>
+          <a:p>
+            <a:r>
+              <a:t>El error comun es dar el proyecto por cerrado cuando se entrega la version 1.0 y no dejar escrito nada para esa segunda vida del producto.</a:t>
+            </a:r>
+          </a:p>
+        </p:txBody>
+      </p:sp>
+      <p:sp>
+        <p:nvSpPr>
+          <p:cNvPr id="4" name="Slide Number Placeholder 3"/>
+          <p:cNvSpPr>
+            <a:spLocks noGrp="1"/>
+          </p:cNvSpPr>
+          <p:nvPr>
+            <p:ph type="sldNum" idx="5" sz="quarter"/>
+          </p:nvPr>
+        </p:nvSpPr>
+        <p:spPr/>
+      </p:sp>
+    </p:spTree>
+  </p:cSld>
+  <p:clrMapOvr>
+    <a:masterClrMapping/>
+  </p:clrMapOvr>
+</p:notes>
+</file>
+
+<file path=ppt/notesSlides/notesSlide5.xml><?xml version="1.0" encoding="utf-8"?>
+<p:notes xmlns:a="http://schemas.openxmlformats.org/drawingml/2006/main" xmlns:p="http://schemas.openxmlformats.org/presentationml/2006/main" xmlns:r="http://schemas.openxmlformats.org/officeDocument/2006/relationships">
+  <p:cSld>
+    <p:spTree>
+      <p:nvGrpSpPr>
+        <p:cNvPr id="1" name=""/>
+        <p:cNvGrpSpPr/>
+        <p:nvPr/>
+      </p:nvGrpSpPr>
+      <p:grpSpPr>
+        <a:xfrm>
+          <a:off x="0" y="0"/>
+          <a:ext cx="0" cy="0"/>
+          <a:chOff x="0" y="0"/>
+          <a:chExt cx="0" cy="0"/>
+        </a:xfrm>
+      </p:grpSpPr>
+      <p:sp>
+        <p:nvSpPr>
+          <p:cNvPr id="2" name="Slide Image Placeholder 1"/>
+          <p:cNvSpPr>
+            <a:spLocks noGrp="1"/>
+          </p:cNvSpPr>
+          <p:nvPr>
+            <p:ph type="sldImg" idx="2"/>
+          </p:nvPr>
+        </p:nvSpPr>
+        <p:spPr/>
+      </p:sp>
+      <p:sp>
+        <p:nvSpPr>
+          <p:cNvPr id="3" name="Notes Placeholder 2"/>
+          <p:cNvSpPr>
+            <a:spLocks noGrp="1"/>
+          </p:cNvSpPr>
+          <p:nvPr>
+            <p:ph type="body" idx="3" sz="quarter"/>
+          </p:nvPr>
+        </p:nvSpPr>
+        <p:spPr/>
+        <p:txBody>
+          <a:bodyPr/>
+          <a:lstStyle/>
+          <a:p>
+            <a:r>
+              <a:t>DESARROLLO (para explicarlo, no se proyecta):</a:t>
+            </a:r>
+          </a:p>
+          <a:p/>
+          <a:p>
+            <a:r>
+              <a:t>Si los requisitos son estables, el contrato es cerrado y el sistema es critico, conviene un recorrido lineal con aprobaciones formales.</a:t>
+            </a:r>
+          </a:p>
+          <a:p/>
+          <a:p>
+            <a:r>
+              <a:t>Si el dominio es nuevo, el cliente descubre lo que quiere cuando lo ve, y hay margen para ajustar, conviene un recorrido en ciclos.</a:t>
+            </a:r>
+          </a:p>
+          <a:p/>
+          <a:p>
+            <a:r>
+              <a:t>En la clinica aplican los dos matices: los datos basicos de un paciente (nombre, especie, raza, propietario) son estables y se pueden cerrar temprano</a:t>
+            </a:r>
+          </a:p>
+          <a:p/>
+          <a:p>
+            <a:r>
+              <a:t>El tablero de metricas es incierto porque la clinica nunca ha visto uno y va a cambiar de opinion apenas lo vea.</a:t>
+            </a:r>
+          </a:p>
+          <a:p/>
+          <a:p>
+            <a:r>
+              <a:t>Ademas, el ciclo elegido debe caber en la realidad del curso: el estudiante que solo cursa Seminario cierra con documento de diseño y prototipo navegable</a:t>
+            </a:r>
+          </a:p>
+          <a:p/>
+          <a:p>
+            <a:r>
+              <a:t>Y esa es una ruta completa, porque el ciclo de vida del software incluye fases donde no se escribe una sola linea de codigo y aun asi se produce valor.</a:t>
+            </a:r>
+          </a:p>
+          <a:p/>
+          <a:p>
+            <a:r>
+              <a:t>Un ciclo de vida es, por definicion, la secuencia de fases que recorre un sistema desde la idea hasta su retiro, y elegir el recorrido es decidir cuantas veces y en que orden se pasa por ellas.</a:t>
+            </a:r>
+          </a:p>
+          <a:p/>
+          <a:p>
+            <a:r>
+              <a:t>El error comun es elegir el ciclo por costumbre del equipo y no por la estabilidad de los requisitos.</a:t>
+            </a:r>
+          </a:p>
+          <a:p/>
+          <a:p>
+            <a:r>
+              <a:t>NOTAS:</a:t>
+            </a:r>
+          </a:p>
+          <a:p/>
+          <a:p>
+            <a:r>
               <a:t>Como se elige el recorrido?</a:t>
             </a:r>
           </a:p>
@@ -775,6 +1059,94 @@
           <a:p>
             <a:r>
               <a:t>En la clinica, un recorrido en ciclos permitiria mostrar primero la ficha del paciente y ajustar la agenda despues de escuchar a la recepcionista.</a:t>
+            </a:r>
+          </a:p>
+        </p:txBody>
+      </p:sp>
+      <p:sp>
+        <p:nvSpPr>
+          <p:cNvPr id="4" name="Slide Number Placeholder 3"/>
+          <p:cNvSpPr>
+            <a:spLocks noGrp="1"/>
+          </p:cNvSpPr>
+          <p:nvPr>
+            <p:ph type="sldNum" idx="5" sz="quarter"/>
+          </p:nvPr>
+        </p:nvSpPr>
+        <p:spPr/>
+      </p:sp>
+    </p:spTree>
+  </p:cSld>
+  <p:clrMapOvr>
+    <a:masterClrMapping/>
+  </p:clrMapOvr>
+</p:notes>
+</file>
+
+<file path=ppt/notesSlides/notesSlide6.xml><?xml version="1.0" encoding="utf-8"?>
+<p:notes xmlns:a="http://schemas.openxmlformats.org/drawingml/2006/main" xmlns:p="http://schemas.openxmlformats.org/presentationml/2006/main" xmlns:r="http://schemas.openxmlformats.org/officeDocument/2006/relationships">
+  <p:cSld>
+    <p:spTree>
+      <p:nvGrpSpPr>
+        <p:cNvPr id="1" name=""/>
+        <p:cNvGrpSpPr/>
+        <p:nvPr/>
+      </p:nvGrpSpPr>
+      <p:grpSpPr>
+        <a:xfrm>
+          <a:off x="0" y="0"/>
+          <a:ext cx="0" cy="0"/>
+          <a:chOff x="0" y="0"/>
+          <a:chExt cx="0" cy="0"/>
+        </a:xfrm>
+      </p:grpSpPr>
+      <p:sp>
+        <p:nvSpPr>
+          <p:cNvPr id="2" name="Slide Image Placeholder 1"/>
+          <p:cNvSpPr>
+            <a:spLocks noGrp="1"/>
+          </p:cNvSpPr>
+          <p:nvPr>
+            <p:ph type="sldImg" idx="2"/>
+          </p:nvPr>
+        </p:nvSpPr>
+        <p:spPr/>
+      </p:sp>
+      <p:sp>
+        <p:nvSpPr>
+          <p:cNvPr id="3" name="Notes Placeholder 2"/>
+          <p:cNvSpPr>
+            <a:spLocks noGrp="1"/>
+          </p:cNvSpPr>
+          <p:nvPr>
+            <p:ph type="body" idx="3" sz="quarter"/>
+          </p:nvPr>
+        </p:nvSpPr>
+        <p:spPr/>
+        <p:txBody>
+          <a:bodyPr/>
+          <a:lstStyle/>
+          <a:p>
+            <a:r>
+              <a:t>TEXTO COMPLETO DE LA LÁMINA (se proyecta resumido):</a:t>
+            </a:r>
+          </a:p>
+          <a:p/>
+          <a:p>
+            <a:r>
+              <a:t>Herramienta: draw.io · Google Docs</a:t>
+            </a:r>
+          </a:p>
+          <a:p/>
+          <a:p>
+            <a:r>
+              <a:t>Demo: Se arma en vivo en draw.io el ciclo de la clinica en dos versiones, una sola pasada y tres vueltas, y muestra que las cajas son identicas y lo unico que cambia es el recorrido.</a:t>
+            </a:r>
+          </a:p>
+          <a:p/>
+          <a:p>
+            <a:r>
+              <a:t>Mismo dominio: la clinica veterinaria — no otro ejemplo. Aqui se diseña, no se programa.</a:t>
             </a:r>
           </a:p>
         </p:txBody>
@@ -4298,21 +4670,173 @@
                 </a:solidFill>
                 <a:latin typeface="Calibri"/>
               </a:rPr>
-              <a:t>Como se elige el recorrido? (2/2)</a:t>
-            </a:r>
-          </a:p>
-        </p:txBody>
-      </p:sp>
-      <p:sp>
-        <p:nvSpPr>
-          <p:cNvPr id="5" name="TextBox 4"/>
+              <a:t>Proyecto, producto y la segunda vida del sistema</a:t>
+            </a:r>
+          </a:p>
+        </p:txBody>
+      </p:sp>
+      <p:sp>
+        <p:nvSpPr>
+          <p:cNvPr id="5" name="Rounded Rectangle 4"/>
+          <p:cNvSpPr/>
+          <p:nvPr/>
+        </p:nvSpPr>
+        <p:spPr>
+          <a:xfrm>
+            <a:off x="5803166" y="1188719"/>
+            <a:ext cx="5998464" cy="4828032"/>
+          </a:xfrm>
+          <a:prstGeom prst="roundRect">
+            <a:avLst>
+              <a:gd name="adj" fmla="val 4000"/>
+            </a:avLst>
+          </a:prstGeom>
+          <a:solidFill>
+            <a:srgbClr val="E8EEF4"/>
+          </a:solidFill>
+          <a:ln>
+            <a:noFill/>
+          </a:ln>
+        </p:spPr>
+        <p:style>
+          <a:lnRef idx="1">
+            <a:schemeClr val="accent1"/>
+          </a:lnRef>
+          <a:fillRef idx="3">
+            <a:schemeClr val="accent1"/>
+          </a:fillRef>
+          <a:effectRef idx="2">
+            <a:schemeClr val="accent1"/>
+          </a:effectRef>
+          <a:fontRef idx="minor">
+            <a:schemeClr val="lt1"/>
+          </a:fontRef>
+        </p:style>
+        <p:txBody>
+          <a:bodyPr rtlCol="0" anchor="ctr"/>
+          <a:lstStyle/>
+          <a:p>
+            <a:pPr algn="ctr"/>
+          </a:p>
+        </p:txBody>
+      </p:sp>
+      <p:pic>
+        <p:nvPicPr>
+          <p:cNvPr id="6" name="Picture 5" descr="costo-mantenimiento-paso1.png"/>
+          <p:cNvPicPr>
+            <a:picLocks noChangeAspect="1"/>
+          </p:cNvPicPr>
+          <p:nvPr/>
+        </p:nvPicPr>
+        <p:blipFill>
+          <a:blip r:embed="rId2"/>
+          <a:stretch>
+            <a:fillRect/>
+          </a:stretch>
+        </p:blipFill>
+        <p:spPr>
+          <a:xfrm>
+            <a:off x="5876318" y="1261872"/>
+            <a:ext cx="5852160" cy="4681728"/>
+          </a:xfrm>
+          <a:prstGeom prst="rect">
+            <a:avLst/>
+          </a:prstGeom>
+        </p:spPr>
+      </p:pic>
+      <p:pic>
+        <p:nvPicPr>
+          <p:cNvPr id="7" name="Picture 6" descr="costo-mantenimiento-paso2.png"/>
+          <p:cNvPicPr>
+            <a:picLocks noChangeAspect="1"/>
+          </p:cNvPicPr>
+          <p:nvPr/>
+        </p:nvPicPr>
+        <p:blipFill>
+          <a:blip r:embed="rId3"/>
+          <a:stretch>
+            <a:fillRect/>
+          </a:stretch>
+        </p:blipFill>
+        <p:spPr>
+          <a:xfrm>
+            <a:off x="5876318" y="1261872"/>
+            <a:ext cx="5852160" cy="4681728"/>
+          </a:xfrm>
+          <a:prstGeom prst="rect">
+            <a:avLst/>
+          </a:prstGeom>
+        </p:spPr>
+      </p:pic>
+      <p:pic>
+        <p:nvPicPr>
+          <p:cNvPr id="8" name="Picture 7" descr="costo-mantenimiento-paso3.png"/>
+          <p:cNvPicPr>
+            <a:picLocks noChangeAspect="1"/>
+          </p:cNvPicPr>
+          <p:nvPr/>
+        </p:nvPicPr>
+        <p:blipFill>
+          <a:blip r:embed="rId4"/>
+          <a:stretch>
+            <a:fillRect/>
+          </a:stretch>
+        </p:blipFill>
+        <p:spPr>
+          <a:xfrm>
+            <a:off x="5876318" y="1261872"/>
+            <a:ext cx="5852160" cy="4681728"/>
+          </a:xfrm>
+          <a:prstGeom prst="rect">
+            <a:avLst/>
+          </a:prstGeom>
+        </p:spPr>
+      </p:pic>
+      <p:sp>
+        <p:nvSpPr>
+          <p:cNvPr id="13" name="TextBox 12"/>
           <p:cNvSpPr txBox="1"/>
           <p:nvPr/>
         </p:nvSpPr>
         <p:spPr>
           <a:xfrm>
-            <a:off x="457200" y="1170432"/>
-            <a:ext cx="11277295" cy="5230368"/>
+            <a:off x="5870301" y="5961888"/>
+            <a:ext cx="5864193" cy="320040"/>
+          </a:xfrm>
+          <a:prstGeom prst="rect">
+            <a:avLst/>
+          </a:prstGeom>
+          <a:noFill/>
+        </p:spPr>
+        <p:txBody>
+          <a:bodyPr wrap="square">
+            <a:spAutoFit/>
+          </a:bodyPr>
+          <a:lstStyle/>
+          <a:p>
+            <a:pPr algn="ctr"/>
+            <a:r>
+              <a:rPr sz="1100" b="0" i="1">
+                <a:solidFill>
+                  <a:srgbClr val="666666"/>
+                </a:solidFill>
+                <a:latin typeface="Calibri"/>
+              </a:rPr>
+              <a:t>Clic para avanzar la animación</a:t>
+            </a:r>
+          </a:p>
+        </p:txBody>
+      </p:sp>
+      <p:sp>
+        <p:nvSpPr>
+          <p:cNvPr id="14" name="TextBox 13"/>
+          <p:cNvSpPr txBox="1"/>
+          <p:nvPr/>
+        </p:nvSpPr>
+        <p:spPr>
+          <a:xfrm>
+            <a:off x="457200" y="1353312"/>
+            <a:ext cx="5093061" cy="5047488"/>
           </a:xfrm>
           <a:prstGeom prst="rect">
             <a:avLst/>
@@ -4337,7 +4861,7 @@
                 </a:solidFill>
                 <a:latin typeface="Calibri"/>
               </a:rPr>
-              <a:t>–   Y esa es una ruta completa, porque el ciclo de vida del software incluye fases donde no se escribe una sola linea de codigo y aun asi se produce valor.</a:t>
+              <a:t>–   Proyecto: esfuerzo temporal, con inicio, fin, alcance y presupuesto; se cierra.</a:t>
             </a:r>
           </a:p>
           <a:p>
@@ -4353,7 +4877,7 @@
                 </a:solidFill>
                 <a:latin typeface="Calibri"/>
               </a:rPr>
-              <a:t>–   Un ciclo de vida es, por definicion, la secuencia de fases que recorre un sistema desde la idea hasta su retiro, y elegir el recorrido es decidir cuantas veces y en que orden se pasa por ellas.</a:t>
+              <a:t>–   Producto: el sistema vivo, con versiones (1.0, 1.1, 2.0), que sigue cuando el proyecto cerró.</a:t>
             </a:r>
           </a:p>
           <a:p>
@@ -4369,14 +4893,30 @@
                 </a:solidFill>
                 <a:latin typeface="Calibri"/>
               </a:rPr>
-              <a:t>–   El error comun es elegir el ciclo por costumbre del equipo y no por la estabilidad de los requisitos.</a:t>
-            </a:r>
-          </a:p>
-        </p:txBody>
-      </p:sp>
-      <p:sp>
-        <p:nvSpPr>
-          <p:cNvPr id="6" name="TextBox 5"/>
+              <a:t>–   El mantenimiento se lleva entre el 60 y el 80 % del costo total de un sistema.</a:t>
+            </a:r>
+          </a:p>
+          <a:p>
+            <a:pPr>
+              <a:spcAft>
+                <a:spcPts val="800"/>
+              </a:spcAft>
+            </a:pPr>
+            <a:r>
+              <a:rPr sz="2000" b="0" i="0">
+                <a:solidFill>
+                  <a:srgbClr val="333333"/>
+                </a:solidFill>
+                <a:latin typeface="Calibri"/>
+              </a:rPr>
+              <a:t>–   Error común: dar todo por cerrado con la versión 1.0 y no dejar nada escrito para la segunda vida.</a:t>
+            </a:r>
+          </a:p>
+        </p:txBody>
+      </p:sp>
+      <p:sp>
+        <p:nvSpPr>
+          <p:cNvPr id="15" name="TextBox 14"/>
           <p:cNvSpPr txBox="1"/>
           <p:nvPr/>
         </p:nvSpPr>
@@ -4414,6 +4954,142 @@
   <p:clrMapOvr>
     <a:masterClrMapping/>
   </p:clrMapOvr>
+  <p:timing>
+    <p:tnLst>
+      <p:par>
+        <p:cTn id="1" dur="indefinite" restart="never" nodeType="tmRoot">
+          <p:childTnLst>
+            <p:seq concurrent="1" nextAc="seek">
+              <p:cTn id="2" dur="indefinite" nodeType="mainSeq">
+                <p:childTnLst>
+                  <p:par>
+                    <p:cTn id="3" fill="hold">
+                      <p:stCondLst>
+                        <p:cond delay="indefinite"/>
+                      </p:stCondLst>
+                      <p:childTnLst>
+                        <p:par>
+                          <p:cTn id="4" fill="hold">
+                            <p:stCondLst>
+                              <p:cond delay="0"/>
+                            </p:stCondLst>
+                            <p:childTnLst>
+                              <p:par>
+                                <p:cTn id="5" presetID="10" presetClass="entr" presetSubtype="0" fill="hold" nodeType="clickEffect">
+                                  <p:stCondLst>
+                                    <p:cond delay="0"/>
+                                  </p:stCondLst>
+                                  <p:childTnLst>
+                                    <p:set>
+                                      <p:cBhvr>
+                                        <p:cTn id="6" dur="1" fill="hold">
+                                          <p:stCondLst>
+                                            <p:cond delay="0"/>
+                                          </p:stCondLst>
+                                        </p:cTn>
+                                        <p:tgtEl>
+                                          <p:spTgt spid="7"/>
+                                        </p:tgtEl>
+                                        <p:attrNameLst>
+                                          <p:attrName>style.visibility</p:attrName>
+                                        </p:attrNameLst>
+                                      </p:cBhvr>
+                                      <p:to>
+                                        <p:strVal val="visible"/>
+                                      </p:to>
+                                    </p:set>
+                                    <p:animEffect transition="in" filter="fade">
+                                      <p:cBhvr>
+                                        <p:cTn id="7" dur="450"/>
+                                        <p:tgtEl>
+                                          <p:spTgt spid="7"/>
+                                        </p:tgtEl>
+                                      </p:cBhvr>
+                                    </p:animEffect>
+                                  </p:childTnLst>
+                                </p:cTn>
+                              </p:par>
+                            </p:childTnLst>
+                          </p:cTn>
+                        </p:par>
+                      </p:childTnLst>
+                    </p:cTn>
+                  </p:par>
+                  <p:par>
+                    <p:cTn id="8" fill="hold">
+                      <p:stCondLst>
+                        <p:cond delay="indefinite"/>
+                      </p:stCondLst>
+                      <p:childTnLst>
+                        <p:par>
+                          <p:cTn id="9" fill="hold">
+                            <p:stCondLst>
+                              <p:cond delay="0"/>
+                            </p:stCondLst>
+                            <p:childTnLst>
+                              <p:par>
+                                <p:cTn id="10" presetID="10" presetClass="entr" presetSubtype="0" fill="hold" nodeType="clickEffect">
+                                  <p:stCondLst>
+                                    <p:cond delay="0"/>
+                                  </p:stCondLst>
+                                  <p:childTnLst>
+                                    <p:set>
+                                      <p:cBhvr>
+                                        <p:cTn id="11" dur="1" fill="hold">
+                                          <p:stCondLst>
+                                            <p:cond delay="0"/>
+                                          </p:stCondLst>
+                                        </p:cTn>
+                                        <p:tgtEl>
+                                          <p:spTgt spid="8"/>
+                                        </p:tgtEl>
+                                        <p:attrNameLst>
+                                          <p:attrName>style.visibility</p:attrName>
+                                        </p:attrNameLst>
+                                      </p:cBhvr>
+                                      <p:to>
+                                        <p:strVal val="visible"/>
+                                      </p:to>
+                                    </p:set>
+                                    <p:animEffect transition="in" filter="fade">
+                                      <p:cBhvr>
+                                        <p:cTn id="12" dur="450"/>
+                                        <p:tgtEl>
+                                          <p:spTgt spid="8"/>
+                                        </p:tgtEl>
+                                      </p:cBhvr>
+                                    </p:animEffect>
+                                  </p:childTnLst>
+                                </p:cTn>
+                              </p:par>
+                            </p:childTnLst>
+                          </p:cTn>
+                        </p:par>
+                      </p:childTnLst>
+                    </p:cTn>
+                  </p:par>
+                </p:childTnLst>
+              </p:cTn>
+              <p:prevCondLst>
+                <p:cond evt="onPrev" delay="0">
+                  <p:tgtEl>
+                    <p:sldTgt/>
+                  </p:tgtEl>
+                </p:cond>
+              </p:prevCondLst>
+              <p:nextCondLst>
+                <p:cond evt="onNext" delay="0">
+                  <p:tgtEl>
+                    <p:sldTgt/>
+                  </p:tgtEl>
+                </p:cond>
+              </p:nextCondLst>
+            </p:seq>
+          </p:childTnLst>
+        </p:cTn>
+      </p:par>
+    </p:tnLst>
+  </p:timing>
 </p:sld>
 </file>
 
@@ -4550,7 +5226,7 @@
                 </a:solidFill>
                 <a:latin typeface="Calibri"/>
               </a:rPr>
-              <a:t>El recorrido lineal del ciclo de vida</a:t>
+              <a:t>Cómo se elige el recorrido</a:t>
             </a:r>
           </a:p>
         </p:txBody>
@@ -4563,16 +5239,16 @@
         </p:nvSpPr>
         <p:spPr>
           <a:xfrm>
-            <a:off x="457200" y="1261872"/>
-            <a:ext cx="11277295" cy="5093208"/>
+            <a:off x="5803166" y="1188719"/>
+            <a:ext cx="5998464" cy="4828032"/>
           </a:xfrm>
           <a:prstGeom prst="roundRect">
             <a:avLst>
-              <a:gd name="adj" fmla="val 12000"/>
+              <a:gd name="adj" fmla="val 4000"/>
             </a:avLst>
           </a:prstGeom>
           <a:solidFill>
-            <a:srgbClr val="1E2A38"/>
+            <a:srgbClr val="E8EEF4"/>
           </a:solidFill>
           <a:ln>
             <a:noFill/>
@@ -4600,91 +5276,88 @@
           </a:p>
         </p:txBody>
       </p:sp>
-      <p:sp>
-        <p:nvSpPr>
-          <p:cNvPr id="6" name="Rectangle 5"/>
-          <p:cNvSpPr/>
+      <p:pic>
+        <p:nvPicPr>
+          <p:cNvPr id="6" name="Picture 5" descr="elegir-recorrido-paso1.png"/>
+          <p:cNvPicPr>
+            <a:picLocks noChangeAspect="1"/>
+          </p:cNvPicPr>
           <p:nvPr/>
-        </p:nvSpPr>
-        <p:spPr>
-          <a:xfrm>
-            <a:off x="457200" y="1261872"/>
-            <a:ext cx="11277295" cy="320040"/>
+        </p:nvPicPr>
+        <p:blipFill>
+          <a:blip r:embed="rId2"/>
+          <a:stretch>
+            <a:fillRect/>
+          </a:stretch>
+        </p:blipFill>
+        <p:spPr>
+          <a:xfrm>
+            <a:off x="5876318" y="1261872"/>
+            <a:ext cx="5852160" cy="4681728"/>
           </a:xfrm>
           <a:prstGeom prst="rect">
             <a:avLst/>
           </a:prstGeom>
-          <a:solidFill>
-            <a:srgbClr val="095292"/>
-          </a:solidFill>
-          <a:ln>
-            <a:noFill/>
-          </a:ln>
-        </p:spPr>
-        <p:style>
-          <a:lnRef idx="1">
-            <a:schemeClr val="accent1"/>
-          </a:lnRef>
-          <a:fillRef idx="3">
-            <a:schemeClr val="accent1"/>
-          </a:fillRef>
-          <a:effectRef idx="2">
-            <a:schemeClr val="accent1"/>
-          </a:effectRef>
-          <a:fontRef idx="minor">
-            <a:schemeClr val="lt1"/>
-          </a:fontRef>
-        </p:style>
-        <p:txBody>
-          <a:bodyPr rtlCol="0" anchor="ctr"/>
-          <a:lstStyle/>
-          <a:p>
-            <a:pPr algn="ctr"/>
-          </a:p>
-        </p:txBody>
-      </p:sp>
-      <p:sp>
-        <p:nvSpPr>
-          <p:cNvPr id="7" name="TextBox 6"/>
+        </p:spPr>
+      </p:pic>
+      <p:pic>
+        <p:nvPicPr>
+          <p:cNvPr id="7" name="Picture 6" descr="elegir-recorrido-paso2.png"/>
+          <p:cNvPicPr>
+            <a:picLocks noChangeAspect="1"/>
+          </p:cNvPicPr>
+          <p:nvPr/>
+        </p:nvPicPr>
+        <p:blipFill>
+          <a:blip r:embed="rId3"/>
+          <a:stretch>
+            <a:fillRect/>
+          </a:stretch>
+        </p:blipFill>
+        <p:spPr>
+          <a:xfrm>
+            <a:off x="5876318" y="1261872"/>
+            <a:ext cx="5852160" cy="4681728"/>
+          </a:xfrm>
+          <a:prstGeom prst="rect">
+            <a:avLst/>
+          </a:prstGeom>
+        </p:spPr>
+      </p:pic>
+      <p:pic>
+        <p:nvPicPr>
+          <p:cNvPr id="8" name="Picture 7" descr="elegir-recorrido-paso3.png"/>
+          <p:cNvPicPr>
+            <a:picLocks noChangeAspect="1"/>
+          </p:cNvPicPr>
+          <p:nvPr/>
+        </p:nvPicPr>
+        <p:blipFill>
+          <a:blip r:embed="rId4"/>
+          <a:stretch>
+            <a:fillRect/>
+          </a:stretch>
+        </p:blipFill>
+        <p:spPr>
+          <a:xfrm>
+            <a:off x="5876318" y="1261872"/>
+            <a:ext cx="5852160" cy="4681728"/>
+          </a:xfrm>
+          <a:prstGeom prst="rect">
+            <a:avLst/>
+          </a:prstGeom>
+        </p:spPr>
+      </p:pic>
+      <p:sp>
+        <p:nvSpPr>
+          <p:cNvPr id="13" name="TextBox 12"/>
           <p:cNvSpPr txBox="1"/>
           <p:nvPr/>
         </p:nvSpPr>
         <p:spPr>
           <a:xfrm>
-            <a:off x="685800" y="1307592"/>
-            <a:ext cx="10820095" cy="256032"/>
-          </a:xfrm>
-          <a:prstGeom prst="rect">
-            <a:avLst/>
-          </a:prstGeom>
-          <a:noFill/>
-        </p:spPr>
-        <p:txBody>
-          <a:bodyPr wrap="square" anchor="ctr"/>
-          <a:lstStyle/>
-          <a:p>
-            <a:r>
-              <a:rPr sz="1000" b="1" i="0">
-                <a:solidFill>
-                  <a:srgbClr val="269CCB"/>
-                </a:solidFill>
-                <a:latin typeface="Calibri"/>
-              </a:rPr>
-              <a:t>● ● ●</a:t>
-            </a:r>
-          </a:p>
-        </p:txBody>
-      </p:sp>
-      <p:sp>
-        <p:nvSpPr>
-          <p:cNvPr id="8" name="TextBox 7"/>
-          <p:cNvSpPr txBox="1"/>
-          <p:nvPr/>
-        </p:nvSpPr>
-        <p:spPr>
-          <a:xfrm>
-            <a:off x="777240" y="1719072"/>
-            <a:ext cx="10637215" cy="4453128"/>
+            <a:off x="5870301" y="5961888"/>
+            <a:ext cx="5864193" cy="320040"/>
           </a:xfrm>
           <a:prstGeom prst="rect">
             <a:avLst/>
@@ -4697,106 +5370,109 @@
           </a:bodyPr>
           <a:lstStyle/>
           <a:p>
+            <a:pPr algn="ctr"/>
+            <a:r>
+              <a:rPr sz="1100" b="0" i="1">
+                <a:solidFill>
+                  <a:srgbClr val="666666"/>
+                </a:solidFill>
+                <a:latin typeface="Calibri"/>
+              </a:rPr>
+              <a:t>Clic para avanzar la animación</a:t>
+            </a:r>
+          </a:p>
+        </p:txBody>
+      </p:sp>
+      <p:sp>
+        <p:nvSpPr>
+          <p:cNvPr id="14" name="TextBox 13"/>
+          <p:cNvSpPr txBox="1"/>
+          <p:nvPr/>
+        </p:nvSpPr>
+        <p:spPr>
+          <a:xfrm>
+            <a:off x="457200" y="1353312"/>
+            <a:ext cx="5093061" cy="5047488"/>
+          </a:xfrm>
+          <a:prstGeom prst="rect">
+            <a:avLst/>
+          </a:prstGeom>
+          <a:noFill/>
+        </p:spPr>
+        <p:txBody>
+          <a:bodyPr wrap="square">
+            <a:spAutoFit/>
+          </a:bodyPr>
+          <a:lstStyle/>
+          <a:p>
             <a:pPr>
               <a:spcAft>
-                <a:spcPts val="400"/>
+                <a:spcPts val="800"/>
               </a:spcAft>
             </a:pPr>
             <a:r>
-              <a:rPr sz="1400" b="0" i="0">
-                <a:solidFill>
-                  <a:srgbClr val="FFFFFF"/>
+              <a:rPr sz="2000" b="0" i="0">
+                <a:solidFill>
+                  <a:srgbClr val="333333"/>
                 </a:solidFill>
                 <a:latin typeface="Calibri"/>
               </a:rPr>
-              <a:t>flowchart LR</a:t>
+              <a:t>–   Requisitos estables, contrato cerrado y sistema crítico: recorrido lineal con aprobaciones formales.</a:t>
             </a:r>
           </a:p>
           <a:p>
             <a:pPr>
               <a:spcAft>
-                <a:spcPts val="400"/>
+                <a:spcPts val="800"/>
               </a:spcAft>
             </a:pPr>
             <a:r>
-              <a:rPr sz="1400" b="0" i="0">
-                <a:solidFill>
-                  <a:srgbClr val="FFFFFF"/>
+              <a:rPr sz="2000" b="0" i="0">
+                <a:solidFill>
+                  <a:srgbClr val="333333"/>
                 </a:solidFill>
                 <a:latin typeface="Calibri"/>
               </a:rPr>
-              <a:t>  A[Analisis] --&gt; D[Diseno] --&gt; I[Implementacion]</a:t>
+              <a:t>–   Dominio nuevo y un cliente que descubre lo que quiere al verlo: recorrido en ciclos.</a:t>
             </a:r>
           </a:p>
           <a:p>
             <a:pPr>
               <a:spcAft>
-                <a:spcPts val="400"/>
+                <a:spcPts val="800"/>
               </a:spcAft>
             </a:pPr>
             <a:r>
-              <a:rPr sz="1400" b="0" i="0">
-                <a:solidFill>
-                  <a:srgbClr val="FFFFFF"/>
+              <a:rPr sz="2000" b="0" i="0">
+                <a:solidFill>
+                  <a:srgbClr val="333333"/>
                 </a:solidFill>
                 <a:latin typeface="Calibri"/>
               </a:rPr>
-              <a:t>  I --&gt; P[Pruebas] --&gt; M[Mantenimiento]</a:t>
+              <a:t>–   En la clínica conviven los dos: los datos del paciente son estables; el tablero de métricas es incierto.</a:t>
             </a:r>
           </a:p>
           <a:p>
             <a:pPr>
               <a:spcAft>
-                <a:spcPts val="400"/>
+                <a:spcPts val="800"/>
               </a:spcAft>
             </a:pPr>
             <a:r>
-              <a:rPr sz="1400" b="0" i="0">
-                <a:solidFill>
-                  <a:srgbClr val="FFFFFF"/>
+              <a:rPr sz="2000" b="0" i="0">
+                <a:solidFill>
+                  <a:srgbClr val="333333"/>
                 </a:solidFill>
                 <a:latin typeface="Calibri"/>
               </a:rPr>
-              <a:t/>
-            </a:r>
-          </a:p>
-          <a:p>
-            <a:pPr>
-              <a:spcAft>
-                <a:spcPts val="400"/>
-              </a:spcAft>
-            </a:pPr>
-            <a:r>
-              <a:rPr sz="1400" b="0" i="0">
-                <a:solidFill>
-                  <a:srgbClr val="FFFFFF"/>
-                </a:solidFill>
-                <a:latin typeface="Calibri"/>
-              </a:rPr>
-              <a:t>%% Lineal significa: no se vuelve. Cada fase cierra con un artefacto</a:t>
-            </a:r>
-          </a:p>
-          <a:p>
-            <a:pPr>
-              <a:spcAft>
-                <a:spcPts val="400"/>
-              </a:spcAft>
-            </a:pPr>
-            <a:r>
-              <a:rPr sz="1400" b="0" i="0">
-                <a:solidFill>
-                  <a:srgbClr val="FFFFFF"/>
-                </a:solidFill>
-                <a:latin typeface="Calibri"/>
-              </a:rPr>
-              <a:t>%% aprobado y la siguiente empieza sobre el.</a:t>
-            </a:r>
-          </a:p>
-        </p:txBody>
-      </p:sp>
-      <p:sp>
-        <p:nvSpPr>
-          <p:cNvPr id="9" name="TextBox 8"/>
+              <a:t>–   Se elige por la estabilidad de los requisitos, no por costumbre del equipo.</a:t>
+            </a:r>
+          </a:p>
+        </p:txBody>
+      </p:sp>
+      <p:sp>
+        <p:nvSpPr>
+          <p:cNvPr id="15" name="TextBox 14"/>
           <p:cNvSpPr txBox="1"/>
           <p:nvPr/>
         </p:nvSpPr>
@@ -4834,6 +5510,142 @@
   <p:clrMapOvr>
     <a:masterClrMapping/>
   </p:clrMapOvr>
+  <p:timing>
+    <p:tnLst>
+      <p:par>
+        <p:cTn id="1" dur="indefinite" restart="never" nodeType="tmRoot">
+          <p:childTnLst>
+            <p:seq concurrent="1" nextAc="seek">
+              <p:cTn id="2" dur="indefinite" nodeType="mainSeq">
+                <p:childTnLst>
+                  <p:par>
+                    <p:cTn id="3" fill="hold">
+                      <p:stCondLst>
+                        <p:cond delay="indefinite"/>
+                      </p:stCondLst>
+                      <p:childTnLst>
+                        <p:par>
+                          <p:cTn id="4" fill="hold">
+                            <p:stCondLst>
+                              <p:cond delay="0"/>
+                            </p:stCondLst>
+                            <p:childTnLst>
+                              <p:par>
+                                <p:cTn id="5" presetID="10" presetClass="entr" presetSubtype="0" fill="hold" nodeType="clickEffect">
+                                  <p:stCondLst>
+                                    <p:cond delay="0"/>
+                                  </p:stCondLst>
+                                  <p:childTnLst>
+                                    <p:set>
+                                      <p:cBhvr>
+                                        <p:cTn id="6" dur="1" fill="hold">
+                                          <p:stCondLst>
+                                            <p:cond delay="0"/>
+                                          </p:stCondLst>
+                                        </p:cTn>
+                                        <p:tgtEl>
+                                          <p:spTgt spid="7"/>
+                                        </p:tgtEl>
+                                        <p:attrNameLst>
+                                          <p:attrName>style.visibility</p:attrName>
+                                        </p:attrNameLst>
+                                      </p:cBhvr>
+                                      <p:to>
+                                        <p:strVal val="visible"/>
+                                      </p:to>
+                                    </p:set>
+                                    <p:animEffect transition="in" filter="fade">
+                                      <p:cBhvr>
+                                        <p:cTn id="7" dur="450"/>
+                                        <p:tgtEl>
+                                          <p:spTgt spid="7"/>
+                                        </p:tgtEl>
+                                      </p:cBhvr>
+                                    </p:animEffect>
+                                  </p:childTnLst>
+                                </p:cTn>
+                              </p:par>
+                            </p:childTnLst>
+                          </p:cTn>
+                        </p:par>
+                      </p:childTnLst>
+                    </p:cTn>
+                  </p:par>
+                  <p:par>
+                    <p:cTn id="8" fill="hold">
+                      <p:stCondLst>
+                        <p:cond delay="indefinite"/>
+                      </p:stCondLst>
+                      <p:childTnLst>
+                        <p:par>
+                          <p:cTn id="9" fill="hold">
+                            <p:stCondLst>
+                              <p:cond delay="0"/>
+                            </p:stCondLst>
+                            <p:childTnLst>
+                              <p:par>
+                                <p:cTn id="10" presetID="10" presetClass="entr" presetSubtype="0" fill="hold" nodeType="clickEffect">
+                                  <p:stCondLst>
+                                    <p:cond delay="0"/>
+                                  </p:stCondLst>
+                                  <p:childTnLst>
+                                    <p:set>
+                                      <p:cBhvr>
+                                        <p:cTn id="11" dur="1" fill="hold">
+                                          <p:stCondLst>
+                                            <p:cond delay="0"/>
+                                          </p:stCondLst>
+                                        </p:cTn>
+                                        <p:tgtEl>
+                                          <p:spTgt spid="8"/>
+                                        </p:tgtEl>
+                                        <p:attrNameLst>
+                                          <p:attrName>style.visibility</p:attrName>
+                                        </p:attrNameLst>
+                                      </p:cBhvr>
+                                      <p:to>
+                                        <p:strVal val="visible"/>
+                                      </p:to>
+                                    </p:set>
+                                    <p:animEffect transition="in" filter="fade">
+                                      <p:cBhvr>
+                                        <p:cTn id="12" dur="450"/>
+                                        <p:tgtEl>
+                                          <p:spTgt spid="8"/>
+                                        </p:tgtEl>
+                                      </p:cBhvr>
+                                    </p:animEffect>
+                                  </p:childTnLst>
+                                </p:cTn>
+                              </p:par>
+                            </p:childTnLst>
+                          </p:cTn>
+                        </p:par>
+                      </p:childTnLst>
+                    </p:cTn>
+                  </p:par>
+                </p:childTnLst>
+              </p:cTn>
+              <p:prevCondLst>
+                <p:cond evt="onPrev" delay="0">
+                  <p:tgtEl>
+                    <p:sldTgt/>
+                  </p:tgtEl>
+                </p:cond>
+              </p:prevCondLst>
+              <p:nextCondLst>
+                <p:cond evt="onNext" delay="0">
+                  <p:tgtEl>
+                    <p:sldTgt/>
+                  </p:tgtEl>
+                </p:cond>
+              </p:nextCondLst>
+            </p:seq>
+          </p:childTnLst>
+        </p:cTn>
+      </p:par>
+    </p:tnLst>
+  </p:timing>
 </p:sld>
 </file>
 
@@ -4970,7 +5782,7 @@
                 </a:solidFill>
                 <a:latin typeface="Calibri"/>
               </a:rPr>
-              <a:t>El mismo ciclo en tres vueltas</a:t>
+              <a:t>Demo del dia</a:t>
             </a:r>
           </a:p>
         </p:txBody>
@@ -4983,16 +5795,16 @@
         </p:nvSpPr>
         <p:spPr>
           <a:xfrm>
-            <a:off x="457200" y="1261872"/>
-            <a:ext cx="11277295" cy="5093208"/>
+            <a:off x="5797149" y="1573813"/>
+            <a:ext cx="6010497" cy="4057845"/>
           </a:xfrm>
           <a:prstGeom prst="roundRect">
             <a:avLst>
-              <a:gd name="adj" fmla="val 12000"/>
+              <a:gd name="adj" fmla="val 4000"/>
             </a:avLst>
           </a:prstGeom>
           <a:solidFill>
-            <a:srgbClr val="1E2A38"/>
+            <a:srgbClr val="E8EEF4"/>
           </a:solidFill>
           <a:ln>
             <a:noFill/>
@@ -5020,49 +5832,30 @@
           </a:p>
         </p:txBody>
       </p:sp>
-      <p:sp>
-        <p:nvSpPr>
-          <p:cNvPr id="6" name="Rectangle 5"/>
-          <p:cNvSpPr/>
+      <p:pic>
+        <p:nvPicPr>
+          <p:cNvPr id="6" name="Picture 5" descr="laptop-code-live-demo.jpg"/>
+          <p:cNvPicPr>
+            <a:picLocks noChangeAspect="1"/>
+          </p:cNvPicPr>
           <p:nvPr/>
-        </p:nvSpPr>
-        <p:spPr>
-          <a:xfrm>
-            <a:off x="457200" y="1261872"/>
-            <a:ext cx="11277295" cy="320040"/>
+        </p:nvPicPr>
+        <p:blipFill>
+          <a:blip r:embed="rId2"/>
+          <a:stretch>
+            <a:fillRect/>
+          </a:stretch>
+        </p:blipFill>
+        <p:spPr>
+          <a:xfrm>
+            <a:off x="5870301" y="1646965"/>
+            <a:ext cx="5864193" cy="3911541"/>
           </a:xfrm>
           <a:prstGeom prst="rect">
             <a:avLst/>
           </a:prstGeom>
-          <a:solidFill>
-            <a:srgbClr val="095292"/>
-          </a:solidFill>
-          <a:ln>
-            <a:noFill/>
-          </a:ln>
-        </p:spPr>
-        <p:style>
-          <a:lnRef idx="1">
-            <a:schemeClr val="accent1"/>
-          </a:lnRef>
-          <a:fillRef idx="3">
-            <a:schemeClr val="accent1"/>
-          </a:fillRef>
-          <a:effectRef idx="2">
-            <a:schemeClr val="accent1"/>
-          </a:effectRef>
-          <a:fontRef idx="minor">
-            <a:schemeClr val="lt1"/>
-          </a:fontRef>
-        </p:style>
-        <p:txBody>
-          <a:bodyPr rtlCol="0" anchor="ctr"/>
-          <a:lstStyle/>
-          <a:p>
-            <a:pPr algn="ctr"/>
-          </a:p>
-        </p:txBody>
-      </p:sp>
+        </p:spPr>
+      </p:pic>
       <p:sp>
         <p:nvSpPr>
           <p:cNvPr id="7" name="TextBox 6"/>
@@ -5071,8 +5864,8 @@
         </p:nvSpPr>
         <p:spPr>
           <a:xfrm>
-            <a:off x="685800" y="1307592"/>
-            <a:ext cx="10820095" cy="256032"/>
+            <a:off x="5870301" y="5961888"/>
+            <a:ext cx="5864193" cy="320040"/>
           </a:xfrm>
           <a:prstGeom prst="rect">
             <a:avLst/>
@@ -5080,17 +5873,20 @@
           <a:noFill/>
         </p:spPr>
         <p:txBody>
-          <a:bodyPr wrap="square" anchor="ctr"/>
-          <a:lstStyle/>
-          <a:p>
-            <a:r>
-              <a:rPr sz="1000" b="1" i="0">
-                <a:solidFill>
-                  <a:srgbClr val="269CCB"/>
+          <a:bodyPr wrap="square">
+            <a:spAutoFit/>
+          </a:bodyPr>
+          <a:lstStyle/>
+          <a:p>
+            <a:pPr algn="ctr"/>
+            <a:r>
+              <a:rPr sz="1100" b="0" i="1">
+                <a:solidFill>
+                  <a:srgbClr val="666666"/>
                 </a:solidFill>
                 <a:latin typeface="Calibri"/>
               </a:rPr>
-              <a:t>● ● ●</a:t>
+              <a:t>Foto: olia danilevich · Pexels</a:t>
             </a:r>
           </a:p>
         </p:txBody>
@@ -5103,8 +5899,8 @@
         </p:nvSpPr>
         <p:spPr>
           <a:xfrm>
-            <a:off x="777240" y="1719072"/>
-            <a:ext cx="10637215" cy="4453128"/>
+            <a:off x="457200" y="1353312"/>
+            <a:ext cx="5093061" cy="5047488"/>
           </a:xfrm>
           <a:prstGeom prst="rect">
             <a:avLst/>
@@ -5119,241 +5915,76 @@
           <a:p>
             <a:pPr>
               <a:spcAft>
-                <a:spcPts val="400"/>
+                <a:spcPts val="800"/>
               </a:spcAft>
             </a:pPr>
             <a:r>
-              <a:rPr sz="1400" b="0" i="0">
-                <a:solidFill>
-                  <a:srgbClr val="FFFFFF"/>
+              <a:rPr sz="2000" b="0" i="0">
+                <a:solidFill>
+                  <a:srgbClr val="333333"/>
                 </a:solidFill>
                 <a:latin typeface="Calibri"/>
               </a:rPr>
-              <a:t>flowchart TB</a:t>
+              <a:t>–   </a:t>
+            </a:r>
+            <a:r>
+              <a:rPr sz="2000" b="1" i="0">
+                <a:solidFill>
+                  <a:srgbClr val="333333"/>
+                </a:solidFill>
+                <a:latin typeface="Calibri"/>
+              </a:rPr>
+              <a:t>Herramienta:</a:t>
+            </a:r>
+            <a:r>
+              <a:rPr sz="2000" b="0" i="0">
+                <a:solidFill>
+                  <a:srgbClr val="333333"/>
+                </a:solidFill>
+                <a:latin typeface="Calibri"/>
+              </a:rPr>
+              <a:t> draw.io · Google Docs</a:t>
             </a:r>
           </a:p>
           <a:p>
             <a:pPr>
               <a:spcAft>
-                <a:spcPts val="400"/>
+                <a:spcPts val="800"/>
               </a:spcAft>
             </a:pPr>
             <a:r>
-              <a:rPr sz="1400" b="0" i="0">
-                <a:solidFill>
-                  <a:srgbClr val="FFFFFF"/>
+              <a:rPr sz="2000" b="0" i="0">
+                <a:solidFill>
+                  <a:srgbClr val="333333"/>
                 </a:solidFill>
                 <a:latin typeface="Calibri"/>
               </a:rPr>
-              <a:t>  subgraph v1[Vuelta 1 - agendamiento]</a:t>
+              <a:t>–   </a:t>
+            </a:r>
+            <a:r>
+              <a:rPr sz="2000" b="1" i="0">
+                <a:solidFill>
+                  <a:srgbClr val="333333"/>
+                </a:solidFill>
+                <a:latin typeface="Calibri"/>
+              </a:rPr>
+              <a:t>Demo:</a:t>
             </a:r>
           </a:p>
           <a:p>
             <a:pPr>
               <a:spcAft>
-                <a:spcPts val="400"/>
+                <a:spcPts val="800"/>
               </a:spcAft>
             </a:pPr>
             <a:r>
-              <a:rPr sz="1400" b="0" i="0">
-                <a:solidFill>
-                  <a:srgbClr val="FFFFFF"/>
+              <a:rPr sz="2000" b="0" i="0">
+                <a:solidFill>
+                  <a:srgbClr val="333333"/>
                 </a:solidFill>
                 <a:latin typeface="Calibri"/>
               </a:rPr>
-              <a:t>    a1[Analisis] --&gt; d1[Diseno] --&gt; i1[Implementacion] --&gt; p1[Pruebas]</a:t>
-            </a:r>
-          </a:p>
-          <a:p>
-            <a:pPr>
-              <a:spcAft>
-                <a:spcPts val="400"/>
-              </a:spcAft>
-            </a:pPr>
-            <a:r>
-              <a:rPr sz="1400" b="0" i="0">
-                <a:solidFill>
-                  <a:srgbClr val="FFFFFF"/>
-                </a:solidFill>
-                <a:latin typeface="Calibri"/>
-              </a:rPr>
-              <a:t>  end</a:t>
-            </a:r>
-          </a:p>
-          <a:p>
-            <a:pPr>
-              <a:spcAft>
-                <a:spcPts val="400"/>
-              </a:spcAft>
-            </a:pPr>
-            <a:r>
-              <a:rPr sz="1400" b="0" i="0">
-                <a:solidFill>
-                  <a:srgbClr val="FFFFFF"/>
-                </a:solidFill>
-                <a:latin typeface="Calibri"/>
-              </a:rPr>
-              <a:t>  subgraph v2[Vuelta 2 - expediente]</a:t>
-            </a:r>
-          </a:p>
-          <a:p>
-            <a:pPr>
-              <a:spcAft>
-                <a:spcPts val="400"/>
-              </a:spcAft>
-            </a:pPr>
-            <a:r>
-              <a:rPr sz="1400" b="0" i="0">
-                <a:solidFill>
-                  <a:srgbClr val="FFFFFF"/>
-                </a:solidFill>
-                <a:latin typeface="Calibri"/>
-              </a:rPr>
-              <a:t>    a2[Analisis] --&gt; d2[Diseno] --&gt; i2[Implementacion] --&gt; p2[Pruebas]</a:t>
-            </a:r>
-          </a:p>
-          <a:p>
-            <a:pPr>
-              <a:spcAft>
-                <a:spcPts val="400"/>
-              </a:spcAft>
-            </a:pPr>
-            <a:r>
-              <a:rPr sz="1400" b="0" i="0">
-                <a:solidFill>
-                  <a:srgbClr val="FFFFFF"/>
-                </a:solidFill>
-                <a:latin typeface="Calibri"/>
-              </a:rPr>
-              <a:t>  end</a:t>
-            </a:r>
-          </a:p>
-          <a:p>
-            <a:pPr>
-              <a:spcAft>
-                <a:spcPts val="400"/>
-              </a:spcAft>
-            </a:pPr>
-            <a:r>
-              <a:rPr sz="1400" b="0" i="0">
-                <a:solidFill>
-                  <a:srgbClr val="FFFFFF"/>
-                </a:solidFill>
-                <a:latin typeface="Calibri"/>
-              </a:rPr>
-              <a:t>  subgraph v3[Vuelta 3 - facturacion]</a:t>
-            </a:r>
-          </a:p>
-          <a:p>
-            <a:pPr>
-              <a:spcAft>
-                <a:spcPts val="400"/>
-              </a:spcAft>
-            </a:pPr>
-            <a:r>
-              <a:rPr sz="1400" b="0" i="0">
-                <a:solidFill>
-                  <a:srgbClr val="FFFFFF"/>
-                </a:solidFill>
-                <a:latin typeface="Calibri"/>
-              </a:rPr>
-              <a:t>    a3[Analisis] --&gt; d3[Diseno] --&gt; i3[Implementacion] --&gt; p3[Pruebas]</a:t>
-            </a:r>
-          </a:p>
-          <a:p>
-            <a:pPr>
-              <a:spcAft>
-                <a:spcPts val="400"/>
-              </a:spcAft>
-            </a:pPr>
-            <a:r>
-              <a:rPr sz="1400" b="0" i="0">
-                <a:solidFill>
-                  <a:srgbClr val="FFFFFF"/>
-                </a:solidFill>
-                <a:latin typeface="Calibri"/>
-              </a:rPr>
-              <a:t>  end</a:t>
-            </a:r>
-          </a:p>
-          <a:p>
-            <a:pPr>
-              <a:spcAft>
-                <a:spcPts val="400"/>
-              </a:spcAft>
-            </a:pPr>
-            <a:r>
-              <a:rPr sz="1400" b="0" i="0">
-                <a:solidFill>
-                  <a:srgbClr val="FFFFFF"/>
-                </a:solidFill>
-                <a:latin typeface="Calibri"/>
-              </a:rPr>
-              <a:t>  p1 --&gt; a2</a:t>
-            </a:r>
-          </a:p>
-          <a:p>
-            <a:pPr>
-              <a:spcAft>
-                <a:spcPts val="400"/>
-              </a:spcAft>
-            </a:pPr>
-            <a:r>
-              <a:rPr sz="1400" b="0" i="0">
-                <a:solidFill>
-                  <a:srgbClr val="FFFFFF"/>
-                </a:solidFill>
-                <a:latin typeface="Calibri"/>
-              </a:rPr>
-              <a:t>  p2 --&gt; a3</a:t>
-            </a:r>
-          </a:p>
-          <a:p>
-            <a:pPr>
-              <a:spcAft>
-                <a:spcPts val="400"/>
-              </a:spcAft>
-            </a:pPr>
-            <a:r>
-              <a:rPr sz="1400" b="0" i="0">
-                <a:solidFill>
-                  <a:srgbClr val="FFFFFF"/>
-                </a:solidFill>
-                <a:latin typeface="Calibri"/>
-              </a:rPr>
-              <a:t/>
-            </a:r>
-          </a:p>
-          <a:p>
-            <a:pPr>
-              <a:spcAft>
-                <a:spcPts val="400"/>
-              </a:spcAft>
-            </a:pPr>
-            <a:r>
-              <a:rPr sz="1400" b="0" i="0">
-                <a:solidFill>
-                  <a:srgbClr val="FFFFFF"/>
-                </a:solidFill>
-                <a:latin typeface="Calibri"/>
-              </a:rPr>
-              <a:t>%% Iterativo no es «hacerlo mal y repetir»: cada vuelta entrega algo</a:t>
-            </a:r>
-          </a:p>
-          <a:p>
-            <a:pPr>
-              <a:spcAft>
-                <a:spcPts val="400"/>
-              </a:spcAft>
-            </a:pPr>
-            <a:r>
-              <a:rPr sz="1400" b="0" i="0">
-                <a:solidFill>
-                  <a:srgbClr val="FFFFFF"/>
-                </a:solidFill>
-                <a:latin typeface="Calibri"/>
-              </a:rPr>
-              <a:t>%% que funciona, sobre un subconjunto del alcance.</a:t>
+              <a:t>–   Mismo dominio: la clinica veterinaria — no otro ejemplo. Aqui se diseña, no se programa.</a:t>
             </a:r>
           </a:p>
         </p:txBody>
@@ -5428,845 +6059,6 @@
         <p:spPr>
           <a:xfrm>
             <a:off x="0" y="0"/>
-            <a:ext cx="12191695" cy="960120"/>
-          </a:xfrm>
-          <a:prstGeom prst="rect">
-            <a:avLst/>
-          </a:prstGeom>
-          <a:solidFill>
-            <a:srgbClr val="095292"/>
-          </a:solidFill>
-          <a:ln>
-            <a:noFill/>
-          </a:ln>
-        </p:spPr>
-        <p:style>
-          <a:lnRef idx="1">
-            <a:schemeClr val="accent1"/>
-          </a:lnRef>
-          <a:fillRef idx="3">
-            <a:schemeClr val="accent1"/>
-          </a:fillRef>
-          <a:effectRef idx="2">
-            <a:schemeClr val="accent1"/>
-          </a:effectRef>
-          <a:fontRef idx="minor">
-            <a:schemeClr val="lt1"/>
-          </a:fontRef>
-        </p:style>
-        <p:txBody>
-          <a:bodyPr rtlCol="0" anchor="ctr"/>
-          <a:lstStyle/>
-          <a:p>
-            <a:pPr algn="ctr"/>
-          </a:p>
-        </p:txBody>
-      </p:sp>
-      <p:sp>
-        <p:nvSpPr>
-          <p:cNvPr id="3" name="Rectangle 2"/>
-          <p:cNvSpPr/>
-          <p:nvPr/>
-        </p:nvSpPr>
-        <p:spPr>
-          <a:xfrm>
-            <a:off x="0" y="960120"/>
-            <a:ext cx="12191695" cy="41148"/>
-          </a:xfrm>
-          <a:prstGeom prst="rect">
-            <a:avLst/>
-          </a:prstGeom>
-          <a:solidFill>
-            <a:srgbClr val="FFD000"/>
-          </a:solidFill>
-          <a:ln>
-            <a:noFill/>
-          </a:ln>
-        </p:spPr>
-        <p:style>
-          <a:lnRef idx="1">
-            <a:schemeClr val="accent1"/>
-          </a:lnRef>
-          <a:fillRef idx="3">
-            <a:schemeClr val="accent1"/>
-          </a:fillRef>
-          <a:effectRef idx="2">
-            <a:schemeClr val="accent1"/>
-          </a:effectRef>
-          <a:fontRef idx="minor">
-            <a:schemeClr val="lt1"/>
-          </a:fontRef>
-        </p:style>
-        <p:txBody>
-          <a:bodyPr rtlCol="0" anchor="ctr"/>
-          <a:lstStyle/>
-          <a:p>
-            <a:pPr algn="ctr"/>
-          </a:p>
-        </p:txBody>
-      </p:sp>
-      <p:sp>
-        <p:nvSpPr>
-          <p:cNvPr id="4" name="TextBox 3"/>
-          <p:cNvSpPr txBox="1"/>
-          <p:nvPr/>
-        </p:nvSpPr>
-        <p:spPr>
-          <a:xfrm>
-            <a:off x="457200" y="164592"/>
-            <a:ext cx="11277295" cy="502920"/>
-          </a:xfrm>
-          <a:prstGeom prst="rect">
-            <a:avLst/>
-          </a:prstGeom>
-          <a:noFill/>
-        </p:spPr>
-        <p:txBody>
-          <a:bodyPr wrap="square">
-            <a:spAutoFit/>
-          </a:bodyPr>
-          <a:lstStyle/>
-          <a:p>
-            <a:r>
-              <a:rPr sz="2600" b="1" i="0">
-                <a:solidFill>
-                  <a:srgbClr val="FFFFFF"/>
-                </a:solidFill>
-                <a:latin typeface="Calibri"/>
-              </a:rPr>
-              <a:t>El ciclo de vida de la clinica en Mermaid: mismas cajas, dos recorridos</a:t>
-            </a:r>
-          </a:p>
-        </p:txBody>
-      </p:sp>
-      <p:sp>
-        <p:nvSpPr>
-          <p:cNvPr id="5" name="Rounded Rectangle 4"/>
-          <p:cNvSpPr/>
-          <p:nvPr/>
-        </p:nvSpPr>
-        <p:spPr>
-          <a:xfrm>
-            <a:off x="457200" y="1261872"/>
-            <a:ext cx="11277295" cy="4773168"/>
-          </a:xfrm>
-          <a:prstGeom prst="roundRect">
-            <a:avLst>
-              <a:gd name="adj" fmla="val 12000"/>
-            </a:avLst>
-          </a:prstGeom>
-          <a:solidFill>
-            <a:srgbClr val="1E2A38"/>
-          </a:solidFill>
-          <a:ln>
-            <a:noFill/>
-          </a:ln>
-        </p:spPr>
-        <p:style>
-          <a:lnRef idx="1">
-            <a:schemeClr val="accent1"/>
-          </a:lnRef>
-          <a:fillRef idx="3">
-            <a:schemeClr val="accent1"/>
-          </a:fillRef>
-          <a:effectRef idx="2">
-            <a:schemeClr val="accent1"/>
-          </a:effectRef>
-          <a:fontRef idx="minor">
-            <a:schemeClr val="lt1"/>
-          </a:fontRef>
-        </p:style>
-        <p:txBody>
-          <a:bodyPr rtlCol="0" anchor="ctr"/>
-          <a:lstStyle/>
-          <a:p>
-            <a:pPr algn="ctr"/>
-          </a:p>
-        </p:txBody>
-      </p:sp>
-      <p:sp>
-        <p:nvSpPr>
-          <p:cNvPr id="6" name="Rectangle 5"/>
-          <p:cNvSpPr/>
-          <p:nvPr/>
-        </p:nvSpPr>
-        <p:spPr>
-          <a:xfrm>
-            <a:off x="457200" y="1261872"/>
-            <a:ext cx="11277295" cy="320040"/>
-          </a:xfrm>
-          <a:prstGeom prst="rect">
-            <a:avLst/>
-          </a:prstGeom>
-          <a:solidFill>
-            <a:srgbClr val="095292"/>
-          </a:solidFill>
-          <a:ln>
-            <a:noFill/>
-          </a:ln>
-        </p:spPr>
-        <p:style>
-          <a:lnRef idx="1">
-            <a:schemeClr val="accent1"/>
-          </a:lnRef>
-          <a:fillRef idx="3">
-            <a:schemeClr val="accent1"/>
-          </a:fillRef>
-          <a:effectRef idx="2">
-            <a:schemeClr val="accent1"/>
-          </a:effectRef>
-          <a:fontRef idx="minor">
-            <a:schemeClr val="lt1"/>
-          </a:fontRef>
-        </p:style>
-        <p:txBody>
-          <a:bodyPr rtlCol="0" anchor="ctr"/>
-          <a:lstStyle/>
-          <a:p>
-            <a:pPr algn="ctr"/>
-          </a:p>
-        </p:txBody>
-      </p:sp>
-      <p:sp>
-        <p:nvSpPr>
-          <p:cNvPr id="7" name="TextBox 6"/>
-          <p:cNvSpPr txBox="1"/>
-          <p:nvPr/>
-        </p:nvSpPr>
-        <p:spPr>
-          <a:xfrm>
-            <a:off x="685800" y="1307592"/>
-            <a:ext cx="10820095" cy="256032"/>
-          </a:xfrm>
-          <a:prstGeom prst="rect">
-            <a:avLst/>
-          </a:prstGeom>
-          <a:noFill/>
-        </p:spPr>
-        <p:txBody>
-          <a:bodyPr wrap="square" anchor="ctr"/>
-          <a:lstStyle/>
-          <a:p>
-            <a:r>
-              <a:rPr sz="1000" b="1" i="0">
-                <a:solidFill>
-                  <a:srgbClr val="269CCB"/>
-                </a:solidFill>
-                <a:latin typeface="Calibri"/>
-              </a:rPr>
-              <a:t>● ● ●</a:t>
-            </a:r>
-          </a:p>
-        </p:txBody>
-      </p:sp>
-      <p:sp>
-        <p:nvSpPr>
-          <p:cNvPr id="8" name="TextBox 7"/>
-          <p:cNvSpPr txBox="1"/>
-          <p:nvPr/>
-        </p:nvSpPr>
-        <p:spPr>
-          <a:xfrm>
-            <a:off x="777240" y="1719072"/>
-            <a:ext cx="10637215" cy="4133087"/>
-          </a:xfrm>
-          <a:prstGeom prst="rect">
-            <a:avLst/>
-          </a:prstGeom>
-          <a:noFill/>
-        </p:spPr>
-        <p:txBody>
-          <a:bodyPr wrap="square">
-            <a:spAutoFit/>
-          </a:bodyPr>
-          <a:lstStyle/>
-          <a:p>
-            <a:pPr>
-              <a:spcAft>
-                <a:spcPts val="400"/>
-              </a:spcAft>
-            </a:pPr>
-            <a:r>
-              <a:rPr sz="1400" b="0" i="0">
-                <a:solidFill>
-                  <a:srgbClr val="FFFFFF"/>
-                </a:solidFill>
-                <a:latin typeface="Calibri"/>
-              </a:rPr>
-              <a:t>flowchart LR</a:t>
-            </a:r>
-          </a:p>
-          <a:p>
-            <a:pPr>
-              <a:spcAft>
-                <a:spcPts val="400"/>
-              </a:spcAft>
-            </a:pPr>
-            <a:r>
-              <a:rPr sz="1400" b="0" i="0">
-                <a:solidFill>
-                  <a:srgbClr val="FFFFFF"/>
-                </a:solidFill>
-                <a:latin typeface="Calibri"/>
-              </a:rPr>
-              <a:t>  A[Requisitos] --&gt;|RF-01 a RF-12 aprobados| B[Diseno]</a:t>
-            </a:r>
-          </a:p>
-          <a:p>
-            <a:pPr>
-              <a:spcAft>
-                <a:spcPts val="400"/>
-              </a:spcAft>
-            </a:pPr>
-            <a:r>
-              <a:rPr sz="1400" b="0" i="0">
-                <a:solidFill>
-                  <a:srgbClr val="FFFFFF"/>
-                </a:solidFill>
-                <a:latin typeface="Calibri"/>
-              </a:rPr>
-              <a:t>  B --&gt;|Casos de uso + clases + mockups| C[Construccion]</a:t>
-            </a:r>
-          </a:p>
-          <a:p>
-            <a:pPr>
-              <a:spcAft>
-                <a:spcPts val="400"/>
-              </a:spcAft>
-            </a:pPr>
-            <a:r>
-              <a:rPr sz="1400" b="0" i="0">
-                <a:solidFill>
-                  <a:srgbClr val="FFFFFF"/>
-                </a:solidFill>
-                <a:latin typeface="Calibri"/>
-              </a:rPr>
-              <a:t>  C --&gt;|Modulo ficha del paciente| D[Pruebas]</a:t>
-            </a:r>
-          </a:p>
-          <a:p>
-            <a:pPr>
-              <a:spcAft>
-                <a:spcPts val="400"/>
-              </a:spcAft>
-            </a:pPr>
-            <a:r>
-              <a:rPr sz="1400" b="0" i="0">
-                <a:solidFill>
-                  <a:srgbClr val="FFFFFF"/>
-                </a:solidFill>
-                <a:latin typeface="Calibri"/>
-              </a:rPr>
-              <a:t>  D --&gt;|Acta de aceptacion| E[Operacion y mantenimiento]</a:t>
-            </a:r>
-          </a:p>
-          <a:p>
-            <a:pPr>
-              <a:spcAft>
-                <a:spcPts val="400"/>
-              </a:spcAft>
-            </a:pPr>
-            <a:r>
-              <a:rPr sz="1400" b="0" i="0">
-                <a:solidFill>
-                  <a:srgbClr val="FFFFFF"/>
-                </a:solidFill>
-                <a:latin typeface="Calibri"/>
-              </a:rPr>
-              <a:t>  E -.-&gt;|Solicitud: vacunacion a domicilio| A</a:t>
-            </a:r>
-          </a:p>
-          <a:p>
-            <a:pPr>
-              <a:spcAft>
-                <a:spcPts val="400"/>
-              </a:spcAft>
-            </a:pPr>
-            <a:r>
-              <a:rPr sz="1400" b="0" i="0">
-                <a:solidFill>
-                  <a:srgbClr val="FFFFFF"/>
-                </a:solidFill>
-                <a:latin typeface="Calibri"/>
-              </a:rPr>
-              <a:t>%% Recorrido lineal  = UNA sola pasada por A..E</a:t>
-            </a:r>
-          </a:p>
-          <a:p>
-            <a:pPr>
-              <a:spcAft>
-                <a:spcPts val="400"/>
-              </a:spcAft>
-            </a:pPr>
-            <a:r>
-              <a:rPr sz="1400" b="0" i="0">
-                <a:solidFill>
-                  <a:srgbClr val="FFFFFF"/>
-                </a:solidFill>
-                <a:latin typeface="Calibri"/>
-              </a:rPr>
-              <a:t>%% Recorrido en ciclos = TRES pasadas por A..E</a:t>
-            </a:r>
-          </a:p>
-          <a:p>
-            <a:pPr>
-              <a:spcAft>
-                <a:spcPts val="400"/>
-              </a:spcAft>
-            </a:pPr>
-            <a:r>
-              <a:rPr sz="1400" b="0" i="0">
-                <a:solidFill>
-                  <a:srgbClr val="FFFFFF"/>
-                </a:solidFill>
-                <a:latin typeface="Calibri"/>
-              </a:rPr>
-              <a:t>%%   Vuelta 1: ficha del paciente</a:t>
-            </a:r>
-          </a:p>
-          <a:p>
-            <a:pPr>
-              <a:spcAft>
-                <a:spcPts val="400"/>
-              </a:spcAft>
-            </a:pPr>
-            <a:r>
-              <a:rPr sz="1400" b="0" i="0">
-                <a:solidFill>
-                  <a:srgbClr val="FFFFFF"/>
-                </a:solidFill>
-                <a:latin typeface="Calibri"/>
-              </a:rPr>
-              <a:t>%%   Vuelta 2: historia clinica y busqueda</a:t>
-            </a:r>
-          </a:p>
-          <a:p>
-            <a:pPr>
-              <a:spcAft>
-                <a:spcPts val="400"/>
-              </a:spcAft>
-            </a:pPr>
-            <a:r>
-              <a:rPr sz="1400" b="0" i="0">
-                <a:solidFill>
-                  <a:srgbClr val="FFFFFF"/>
-                </a:solidFill>
-                <a:latin typeface="Calibri"/>
-              </a:rPr>
-              <a:t>%%   Vuelta 3: reportes y metricas</a:t>
-            </a:r>
-          </a:p>
-          <a:p>
-            <a:pPr>
-              <a:spcAft>
-                <a:spcPts val="400"/>
-              </a:spcAft>
-            </a:pPr>
-            <a:r>
-              <a:rPr sz="1400" b="0" i="0">
-                <a:solidFill>
-                  <a:srgbClr val="FFFFFF"/>
-                </a:solidFill>
-                <a:latin typeface="Calibri"/>
-              </a:rPr>
-              <a:t>%% Las cajas nunca cambian; lo que cambia es cuantas veces se recorren</a:t>
-            </a:r>
-          </a:p>
-        </p:txBody>
-      </p:sp>
-      <p:sp>
-        <p:nvSpPr>
-          <p:cNvPr id="9" name="TextBox 8"/>
-          <p:cNvSpPr txBox="1"/>
-          <p:nvPr/>
-        </p:nvSpPr>
-        <p:spPr>
-          <a:xfrm>
-            <a:off x="457200" y="6080760"/>
-            <a:ext cx="11277295" cy="320040"/>
-          </a:xfrm>
-          <a:prstGeom prst="rect">
-            <a:avLst/>
-          </a:prstGeom>
-          <a:noFill/>
-        </p:spPr>
-        <p:txBody>
-          <a:bodyPr wrap="square">
-            <a:spAutoFit/>
-          </a:bodyPr>
-          <a:lstStyle/>
-          <a:p>
-            <a:pPr algn="ctr"/>
-            <a:r>
-              <a:rPr sz="1200" b="0" i="1">
-                <a:solidFill>
-                  <a:srgbClr val="666666"/>
-                </a:solidFill>
-                <a:latin typeface="Calibri"/>
-              </a:rPr>
-              <a:t>Las fases son las mismas en cualquier metodologia; lo unico que se negocia es cuantas vueltas se dan y cuanto sistema entra en cada vuelta.</a:t>
-            </a:r>
-          </a:p>
-        </p:txBody>
-      </p:sp>
-      <p:sp>
-        <p:nvSpPr>
-          <p:cNvPr id="10" name="TextBox 9"/>
-          <p:cNvSpPr txBox="1"/>
-          <p:nvPr/>
-        </p:nvSpPr>
-        <p:spPr>
-          <a:xfrm>
-            <a:off x="11185855" y="6473952"/>
-            <a:ext cx="640080" cy="274320"/>
-          </a:xfrm>
-          <a:prstGeom prst="rect">
-            <a:avLst/>
-          </a:prstGeom>
-          <a:noFill/>
-        </p:spPr>
-        <p:txBody>
-          <a:bodyPr wrap="square">
-            <a:spAutoFit/>
-          </a:bodyPr>
-          <a:lstStyle/>
-          <a:p>
-            <a:pPr algn="r"/>
-            <a:r>
-              <a:rPr sz="1100" b="0" i="0">
-                <a:solidFill>
-                  <a:srgbClr val="666666"/>
-                </a:solidFill>
-                <a:latin typeface="Calibri"/>
-              </a:rPr>
-              <a:t>13</a:t>
-            </a:r>
-          </a:p>
-        </p:txBody>
-      </p:sp>
-    </p:spTree>
-  </p:cSld>
-  <p:clrMapOvr>
-    <a:masterClrMapping/>
-  </p:clrMapOvr>
-</p:sld>
-</file>
-
-<file path=ppt/slides/slide14.xml><?xml version="1.0" encoding="utf-8"?>
-<p:sld xmlns:a="http://schemas.openxmlformats.org/drawingml/2006/main" xmlns:p="http://schemas.openxmlformats.org/presentationml/2006/main" xmlns:r="http://schemas.openxmlformats.org/officeDocument/2006/relationships">
-  <p:cSld>
-    <p:bg>
-      <p:bgPr>
-        <a:solidFill>
-          <a:srgbClr val="FFFFFF"/>
-        </a:solidFill>
-        <a:effectLst/>
-      </p:bgPr>
-    </p:bg>
-    <p:spTree>
-      <p:nvGrpSpPr>
-        <p:cNvPr id="1" name=""/>
-        <p:cNvGrpSpPr/>
-        <p:nvPr/>
-      </p:nvGrpSpPr>
-      <p:grpSpPr/>
-      <p:sp>
-        <p:nvSpPr>
-          <p:cNvPr id="2" name="Rectangle 1"/>
-          <p:cNvSpPr/>
-          <p:nvPr/>
-        </p:nvSpPr>
-        <p:spPr>
-          <a:xfrm>
-            <a:off x="0" y="0"/>
-            <a:ext cx="12191695" cy="960120"/>
-          </a:xfrm>
-          <a:prstGeom prst="rect">
-            <a:avLst/>
-          </a:prstGeom>
-          <a:solidFill>
-            <a:srgbClr val="095292"/>
-          </a:solidFill>
-          <a:ln>
-            <a:noFill/>
-          </a:ln>
-        </p:spPr>
-        <p:style>
-          <a:lnRef idx="1">
-            <a:schemeClr val="accent1"/>
-          </a:lnRef>
-          <a:fillRef idx="3">
-            <a:schemeClr val="accent1"/>
-          </a:fillRef>
-          <a:effectRef idx="2">
-            <a:schemeClr val="accent1"/>
-          </a:effectRef>
-          <a:fontRef idx="minor">
-            <a:schemeClr val="lt1"/>
-          </a:fontRef>
-        </p:style>
-        <p:txBody>
-          <a:bodyPr rtlCol="0" anchor="ctr"/>
-          <a:lstStyle/>
-          <a:p>
-            <a:pPr algn="ctr"/>
-          </a:p>
-        </p:txBody>
-      </p:sp>
-      <p:sp>
-        <p:nvSpPr>
-          <p:cNvPr id="3" name="Rectangle 2"/>
-          <p:cNvSpPr/>
-          <p:nvPr/>
-        </p:nvSpPr>
-        <p:spPr>
-          <a:xfrm>
-            <a:off x="0" y="960120"/>
-            <a:ext cx="12191695" cy="41148"/>
-          </a:xfrm>
-          <a:prstGeom prst="rect">
-            <a:avLst/>
-          </a:prstGeom>
-          <a:solidFill>
-            <a:srgbClr val="FFD000"/>
-          </a:solidFill>
-          <a:ln>
-            <a:noFill/>
-          </a:ln>
-        </p:spPr>
-        <p:style>
-          <a:lnRef idx="1">
-            <a:schemeClr val="accent1"/>
-          </a:lnRef>
-          <a:fillRef idx="3">
-            <a:schemeClr val="accent1"/>
-          </a:fillRef>
-          <a:effectRef idx="2">
-            <a:schemeClr val="accent1"/>
-          </a:effectRef>
-          <a:fontRef idx="minor">
-            <a:schemeClr val="lt1"/>
-          </a:fontRef>
-        </p:style>
-        <p:txBody>
-          <a:bodyPr rtlCol="0" anchor="ctr"/>
-          <a:lstStyle/>
-          <a:p>
-            <a:pPr algn="ctr"/>
-          </a:p>
-        </p:txBody>
-      </p:sp>
-      <p:sp>
-        <p:nvSpPr>
-          <p:cNvPr id="4" name="TextBox 3"/>
-          <p:cNvSpPr txBox="1"/>
-          <p:nvPr/>
-        </p:nvSpPr>
-        <p:spPr>
-          <a:xfrm>
-            <a:off x="457200" y="164592"/>
-            <a:ext cx="11277295" cy="502920"/>
-          </a:xfrm>
-          <a:prstGeom prst="rect">
-            <a:avLst/>
-          </a:prstGeom>
-          <a:noFill/>
-        </p:spPr>
-        <p:txBody>
-          <a:bodyPr wrap="square">
-            <a:spAutoFit/>
-          </a:bodyPr>
-          <a:lstStyle/>
-          <a:p>
-            <a:r>
-              <a:rPr sz="2600" b="1" i="0">
-                <a:solidFill>
-                  <a:srgbClr val="FFFFFF"/>
-                </a:solidFill>
-                <a:latin typeface="Calibri"/>
-              </a:rPr>
-              <a:t>Demo del dia</a:t>
-            </a:r>
-          </a:p>
-        </p:txBody>
-      </p:sp>
-      <p:sp>
-        <p:nvSpPr>
-          <p:cNvPr id="5" name="TextBox 4"/>
-          <p:cNvSpPr txBox="1"/>
-          <p:nvPr/>
-        </p:nvSpPr>
-        <p:spPr>
-          <a:xfrm>
-            <a:off x="457200" y="1170432"/>
-            <a:ext cx="11277295" cy="5230368"/>
-          </a:xfrm>
-          <a:prstGeom prst="rect">
-            <a:avLst/>
-          </a:prstGeom>
-          <a:noFill/>
-        </p:spPr>
-        <p:txBody>
-          <a:bodyPr wrap="square">
-            <a:spAutoFit/>
-          </a:bodyPr>
-          <a:lstStyle/>
-          <a:p>
-            <a:pPr>
-              <a:spcAft>
-                <a:spcPts val="800"/>
-              </a:spcAft>
-            </a:pPr>
-            <a:r>
-              <a:rPr sz="2000" b="0" i="0">
-                <a:solidFill>
-                  <a:srgbClr val="333333"/>
-                </a:solidFill>
-                <a:latin typeface="Calibri"/>
-              </a:rPr>
-              <a:t>–   </a:t>
-            </a:r>
-            <a:r>
-              <a:rPr sz="2000" b="1" i="0">
-                <a:solidFill>
-                  <a:srgbClr val="333333"/>
-                </a:solidFill>
-                <a:latin typeface="Calibri"/>
-              </a:rPr>
-              <a:t>Herramienta:</a:t>
-            </a:r>
-            <a:r>
-              <a:rPr sz="2000" b="0" i="0">
-                <a:solidFill>
-                  <a:srgbClr val="333333"/>
-                </a:solidFill>
-                <a:latin typeface="Calibri"/>
-              </a:rPr>
-              <a:t> draw.io · Google Docs</a:t>
-            </a:r>
-          </a:p>
-          <a:p>
-            <a:pPr>
-              <a:spcAft>
-                <a:spcPts val="800"/>
-              </a:spcAft>
-            </a:pPr>
-            <a:r>
-              <a:rPr sz="2000" b="0" i="0">
-                <a:solidFill>
-                  <a:srgbClr val="333333"/>
-                </a:solidFill>
-                <a:latin typeface="Calibri"/>
-              </a:rPr>
-              <a:t>–   </a:t>
-            </a:r>
-            <a:r>
-              <a:rPr sz="2000" b="1" i="0">
-                <a:solidFill>
-                  <a:srgbClr val="333333"/>
-                </a:solidFill>
-                <a:latin typeface="Calibri"/>
-              </a:rPr>
-              <a:t>Demo:</a:t>
-            </a:r>
-            <a:r>
-              <a:rPr sz="2000" b="0" i="0">
-                <a:solidFill>
-                  <a:srgbClr val="333333"/>
-                </a:solidFill>
-                <a:latin typeface="Calibri"/>
-              </a:rPr>
-              <a:t> Se arma en vivo en draw.io el ciclo de la clinica en dos versiones, una sola pasada y tres vueltas, y muestra que las cajas son identicas y lo unico que cambia es el recorrido.</a:t>
-            </a:r>
-          </a:p>
-          <a:p>
-            <a:pPr>
-              <a:spcAft>
-                <a:spcPts val="800"/>
-              </a:spcAft>
-            </a:pPr>
-            <a:r>
-              <a:rPr sz="2000" b="0" i="0">
-                <a:solidFill>
-                  <a:srgbClr val="333333"/>
-                </a:solidFill>
-                <a:latin typeface="Calibri"/>
-              </a:rPr>
-              <a:t>–   Mismo dominio: la clinica veterinaria — no otro ejemplo. Aqui se diseña, no se programa.</a:t>
-            </a:r>
-          </a:p>
-        </p:txBody>
-      </p:sp>
-      <p:sp>
-        <p:nvSpPr>
-          <p:cNvPr id="6" name="TextBox 5"/>
-          <p:cNvSpPr txBox="1"/>
-          <p:nvPr/>
-        </p:nvSpPr>
-        <p:spPr>
-          <a:xfrm>
-            <a:off x="11185855" y="6473952"/>
-            <a:ext cx="640080" cy="274320"/>
-          </a:xfrm>
-          <a:prstGeom prst="rect">
-            <a:avLst/>
-          </a:prstGeom>
-          <a:noFill/>
-        </p:spPr>
-        <p:txBody>
-          <a:bodyPr wrap="square">
-            <a:spAutoFit/>
-          </a:bodyPr>
-          <a:lstStyle/>
-          <a:p>
-            <a:pPr algn="r"/>
-            <a:r>
-              <a:rPr sz="1100" b="0" i="0">
-                <a:solidFill>
-                  <a:srgbClr val="666666"/>
-                </a:solidFill>
-                <a:latin typeface="Calibri"/>
-              </a:rPr>
-              <a:t>14</a:t>
-            </a:r>
-          </a:p>
-        </p:txBody>
-      </p:sp>
-    </p:spTree>
-  </p:cSld>
-  <p:clrMapOvr>
-    <a:masterClrMapping/>
-  </p:clrMapOvr>
-</p:sld>
-</file>
-
-<file path=ppt/slides/slide15.xml><?xml version="1.0" encoding="utf-8"?>
-<p:sld xmlns:a="http://schemas.openxmlformats.org/drawingml/2006/main" xmlns:p="http://schemas.openxmlformats.org/presentationml/2006/main" xmlns:r="http://schemas.openxmlformats.org/officeDocument/2006/relationships">
-  <p:cSld>
-    <p:bg>
-      <p:bgPr>
-        <a:solidFill>
-          <a:srgbClr val="FFFFFF"/>
-        </a:solidFill>
-        <a:effectLst/>
-      </p:bgPr>
-    </p:bg>
-    <p:spTree>
-      <p:nvGrpSpPr>
-        <p:cNvPr id="1" name=""/>
-        <p:cNvGrpSpPr/>
-        <p:nvPr/>
-      </p:nvGrpSpPr>
-      <p:grpSpPr/>
-      <p:sp>
-        <p:nvSpPr>
-          <p:cNvPr id="2" name="Rectangle 1"/>
-          <p:cNvSpPr/>
-          <p:nvPr/>
-        </p:nvSpPr>
-        <p:spPr>
-          <a:xfrm>
-            <a:off x="0" y="0"/>
             <a:ext cx="12191695" cy="164592"/>
           </a:xfrm>
           <a:prstGeom prst="rect">
@@ -6612,14 +6404,118 @@
       </p:sp>
       <p:sp>
         <p:nvSpPr>
-          <p:cNvPr id="5" name="TextBox 4"/>
+          <p:cNvPr id="5" name="Rounded Rectangle 4"/>
+          <p:cNvSpPr/>
+          <p:nvPr/>
+        </p:nvSpPr>
+        <p:spPr>
+          <a:xfrm>
+            <a:off x="5797149" y="1573813"/>
+            <a:ext cx="6010497" cy="4057845"/>
+          </a:xfrm>
+          <a:prstGeom prst="roundRect">
+            <a:avLst>
+              <a:gd name="adj" fmla="val 4000"/>
+            </a:avLst>
+          </a:prstGeom>
+          <a:solidFill>
+            <a:srgbClr val="E8EEF4"/>
+          </a:solidFill>
+          <a:ln>
+            <a:noFill/>
+          </a:ln>
+        </p:spPr>
+        <p:style>
+          <a:lnRef idx="1">
+            <a:schemeClr val="accent1"/>
+          </a:lnRef>
+          <a:fillRef idx="3">
+            <a:schemeClr val="accent1"/>
+          </a:fillRef>
+          <a:effectRef idx="2">
+            <a:schemeClr val="accent1"/>
+          </a:effectRef>
+          <a:fontRef idx="minor">
+            <a:schemeClr val="lt1"/>
+          </a:fontRef>
+        </p:style>
+        <p:txBody>
+          <a:bodyPr rtlCol="0" anchor="ctr"/>
+          <a:lstStyle/>
+          <a:p>
+            <a:pPr algn="ctr"/>
+          </a:p>
+        </p:txBody>
+      </p:sp>
+      <p:pic>
+        <p:nvPicPr>
+          <p:cNvPr id="6" name="Picture 5" descr="notebook-planning-desk-coffee.jpg"/>
+          <p:cNvPicPr>
+            <a:picLocks noChangeAspect="1"/>
+          </p:cNvPicPr>
+          <p:nvPr/>
+        </p:nvPicPr>
+        <p:blipFill>
+          <a:blip r:embed="rId2"/>
+          <a:stretch>
+            <a:fillRect/>
+          </a:stretch>
+        </p:blipFill>
+        <p:spPr>
+          <a:xfrm>
+            <a:off x="5870301" y="1646965"/>
+            <a:ext cx="5864193" cy="3911541"/>
+          </a:xfrm>
+          <a:prstGeom prst="rect">
+            <a:avLst/>
+          </a:prstGeom>
+        </p:spPr>
+      </p:pic>
+      <p:sp>
+        <p:nvSpPr>
+          <p:cNvPr id="7" name="TextBox 6"/>
           <p:cNvSpPr txBox="1"/>
           <p:nvPr/>
         </p:nvSpPr>
         <p:spPr>
           <a:xfrm>
-            <a:off x="457200" y="1170432"/>
-            <a:ext cx="11277295" cy="5230368"/>
+            <a:off x="5870301" y="5961888"/>
+            <a:ext cx="5864193" cy="320040"/>
+          </a:xfrm>
+          <a:prstGeom prst="rect">
+            <a:avLst/>
+          </a:prstGeom>
+          <a:noFill/>
+        </p:spPr>
+        <p:txBody>
+          <a:bodyPr wrap="square">
+            <a:spAutoFit/>
+          </a:bodyPr>
+          <a:lstStyle/>
+          <a:p>
+            <a:pPr algn="ctr"/>
+            <a:r>
+              <a:rPr sz="1100" b="0" i="1">
+                <a:solidFill>
+                  <a:srgbClr val="666666"/>
+                </a:solidFill>
+                <a:latin typeface="Calibri"/>
+              </a:rPr>
+              <a:t>Foto: Cup of  Couple · Pexels</a:t>
+            </a:r>
+          </a:p>
+        </p:txBody>
+      </p:sp>
+      <p:sp>
+        <p:nvSpPr>
+          <p:cNvPr id="8" name="TextBox 7"/>
+          <p:cNvSpPr txBox="1"/>
+          <p:nvPr/>
+        </p:nvSpPr>
+        <p:spPr>
+          <a:xfrm>
+            <a:off x="457200" y="1353312"/>
+            <a:ext cx="5093061" cy="5047488"/>
           </a:xfrm>
           <a:prstGeom prst="rect">
             <a:avLst/>
@@ -6744,7 +6640,7 @@
       </p:sp>
       <p:sp>
         <p:nvSpPr>
-          <p:cNvPr id="6" name="TextBox 5"/>
+          <p:cNvPr id="9" name="TextBox 8"/>
           <p:cNvSpPr txBox="1"/>
           <p:nvPr/>
         </p:nvSpPr>
@@ -7770,21 +7666,173 @@
                 </a:solidFill>
                 <a:latin typeface="Calibri"/>
               </a:rPr>
-              <a:t>Un ciclo de vida del software es el orden en que se recorren las etapas...</a:t>
-            </a:r>
-          </a:p>
-        </p:txBody>
-      </p:sp>
-      <p:sp>
-        <p:nvSpPr>
-          <p:cNvPr id="5" name="TextBox 4"/>
+              <a:t>Qué es un ciclo de vida</a:t>
+            </a:r>
+          </a:p>
+        </p:txBody>
+      </p:sp>
+      <p:sp>
+        <p:nvSpPr>
+          <p:cNvPr id="5" name="Rounded Rectangle 4"/>
+          <p:cNvSpPr/>
+          <p:nvPr/>
+        </p:nvSpPr>
+        <p:spPr>
+          <a:xfrm>
+            <a:off x="5803166" y="1188719"/>
+            <a:ext cx="5998464" cy="4828032"/>
+          </a:xfrm>
+          <a:prstGeom prst="roundRect">
+            <a:avLst>
+              <a:gd name="adj" fmla="val 4000"/>
+            </a:avLst>
+          </a:prstGeom>
+          <a:solidFill>
+            <a:srgbClr val="E8EEF4"/>
+          </a:solidFill>
+          <a:ln>
+            <a:noFill/>
+          </a:ln>
+        </p:spPr>
+        <p:style>
+          <a:lnRef idx="1">
+            <a:schemeClr val="accent1"/>
+          </a:lnRef>
+          <a:fillRef idx="3">
+            <a:schemeClr val="accent1"/>
+          </a:fillRef>
+          <a:effectRef idx="2">
+            <a:schemeClr val="accent1"/>
+          </a:effectRef>
+          <a:fontRef idx="minor">
+            <a:schemeClr val="lt1"/>
+          </a:fontRef>
+        </p:style>
+        <p:txBody>
+          <a:bodyPr rtlCol="0" anchor="ctr"/>
+          <a:lstStyle/>
+          <a:p>
+            <a:pPr algn="ctr"/>
+          </a:p>
+        </p:txBody>
+      </p:sp>
+      <p:pic>
+        <p:nvPicPr>
+          <p:cNvPr id="6" name="Picture 5" descr="fase-entrada-salida-paso1.png"/>
+          <p:cNvPicPr>
+            <a:picLocks noChangeAspect="1"/>
+          </p:cNvPicPr>
+          <p:nvPr/>
+        </p:nvPicPr>
+        <p:blipFill>
+          <a:blip r:embed="rId2"/>
+          <a:stretch>
+            <a:fillRect/>
+          </a:stretch>
+        </p:blipFill>
+        <p:spPr>
+          <a:xfrm>
+            <a:off x="5876318" y="1261872"/>
+            <a:ext cx="5852160" cy="4681728"/>
+          </a:xfrm>
+          <a:prstGeom prst="rect">
+            <a:avLst/>
+          </a:prstGeom>
+        </p:spPr>
+      </p:pic>
+      <p:pic>
+        <p:nvPicPr>
+          <p:cNvPr id="7" name="Picture 6" descr="fase-entrada-salida-paso2.png"/>
+          <p:cNvPicPr>
+            <a:picLocks noChangeAspect="1"/>
+          </p:cNvPicPr>
+          <p:nvPr/>
+        </p:nvPicPr>
+        <p:blipFill>
+          <a:blip r:embed="rId3"/>
+          <a:stretch>
+            <a:fillRect/>
+          </a:stretch>
+        </p:blipFill>
+        <p:spPr>
+          <a:xfrm>
+            <a:off x="5876318" y="1261872"/>
+            <a:ext cx="5852160" cy="4681728"/>
+          </a:xfrm>
+          <a:prstGeom prst="rect">
+            <a:avLst/>
+          </a:prstGeom>
+        </p:spPr>
+      </p:pic>
+      <p:pic>
+        <p:nvPicPr>
+          <p:cNvPr id="8" name="Picture 7" descr="fase-entrada-salida-paso3.png"/>
+          <p:cNvPicPr>
+            <a:picLocks noChangeAspect="1"/>
+          </p:cNvPicPr>
+          <p:nvPr/>
+        </p:nvPicPr>
+        <p:blipFill>
+          <a:blip r:embed="rId4"/>
+          <a:stretch>
+            <a:fillRect/>
+          </a:stretch>
+        </p:blipFill>
+        <p:spPr>
+          <a:xfrm>
+            <a:off x="5876318" y="1261872"/>
+            <a:ext cx="5852160" cy="4681728"/>
+          </a:xfrm>
+          <a:prstGeom prst="rect">
+            <a:avLst/>
+          </a:prstGeom>
+        </p:spPr>
+      </p:pic>
+      <p:sp>
+        <p:nvSpPr>
+          <p:cNvPr id="13" name="TextBox 12"/>
           <p:cNvSpPr txBox="1"/>
           <p:nvPr/>
         </p:nvSpPr>
         <p:spPr>
           <a:xfrm>
-            <a:off x="457200" y="1170432"/>
-            <a:ext cx="11277295" cy="5230368"/>
+            <a:off x="5870301" y="5961888"/>
+            <a:ext cx="5864193" cy="320040"/>
+          </a:xfrm>
+          <a:prstGeom prst="rect">
+            <a:avLst/>
+          </a:prstGeom>
+          <a:noFill/>
+        </p:spPr>
+        <p:txBody>
+          <a:bodyPr wrap="square">
+            <a:spAutoFit/>
+          </a:bodyPr>
+          <a:lstStyle/>
+          <a:p>
+            <a:pPr algn="ctr"/>
+            <a:r>
+              <a:rPr sz="1100" b="0" i="1">
+                <a:solidFill>
+                  <a:srgbClr val="666666"/>
+                </a:solidFill>
+                <a:latin typeface="Calibri"/>
+              </a:rPr>
+              <a:t>Clic para avanzar la animación</a:t>
+            </a:r>
+          </a:p>
+        </p:txBody>
+      </p:sp>
+      <p:sp>
+        <p:nvSpPr>
+          <p:cNvPr id="14" name="TextBox 13"/>
+          <p:cNvSpPr txBox="1"/>
+          <p:nvPr/>
+        </p:nvSpPr>
+        <p:spPr>
+          <a:xfrm>
+            <a:off x="457200" y="1353312"/>
+            <a:ext cx="5093061" cy="5047488"/>
           </a:xfrm>
           <a:prstGeom prst="rect">
             <a:avLst/>
@@ -7809,7 +7857,7 @@
                 </a:solidFill>
                 <a:latin typeface="Calibri"/>
               </a:rPr>
-              <a:t>–   Un ciclo de vida del software es el orden en que se recorren las etapas que van desde que alguien dice 'necesito un sistema' hasta que ese sistema se apaga definitivamente.</a:t>
+              <a:t>–   El orden en que se recorren las etapas, desde «necesito un sistema» hasta que el sistema se apaga.</a:t>
             </a:r>
           </a:p>
           <a:p>
@@ -7825,7 +7873,7 @@
                 </a:solidFill>
                 <a:latin typeface="Calibri"/>
               </a:rPr>
-              <a:t>–   Las etapas clasicas son cinco: requisitos, diseño, construccion, pruebas y mantenimiento.</a:t>
+              <a:t>–   Cinco etapas clásicas: requisitos, diseño, construcción, pruebas y mantenimiento.</a:t>
             </a:r>
           </a:p>
           <a:p>
@@ -7841,14 +7889,30 @@
                 </a:solidFill>
                 <a:latin typeface="Calibri"/>
               </a:rPr>
-              <a:t>–   En la clinica la fase de requisitos no termina cuando el equipo 'ya entendio' el problema de la clinica: termina cuando existe una lista numerada de requisitos funcionales y no funcionales que la clinica leyo y aprobo.</a:t>
-            </a:r>
-          </a:p>
-        </p:txBody>
-      </p:sp>
-      <p:sp>
-        <p:nvSpPr>
-          <p:cNvPr id="6" name="TextBox 5"/>
+              <a:t>–   Cada fase tiene una entrada, un artefacto de salida y un criterio para decir «esto ya quedó».</a:t>
+            </a:r>
+          </a:p>
+          <a:p>
+            <a:pPr>
+              <a:spcAft>
+                <a:spcPts val="800"/>
+              </a:spcAft>
+            </a:pPr>
+            <a:r>
+              <a:rPr sz="2000" b="0" i="0">
+                <a:solidFill>
+                  <a:srgbClr val="333333"/>
+                </a:solidFill>
+                <a:latin typeface="Calibri"/>
+              </a:rPr>
+              <a:t>–   Si una fase no produce un artefacto verificable, no existe: existe una conversación.</a:t>
+            </a:r>
+          </a:p>
+        </p:txBody>
+      </p:sp>
+      <p:sp>
+        <p:nvSpPr>
+          <p:cNvPr id="15" name="TextBox 14"/>
           <p:cNvSpPr txBox="1"/>
           <p:nvPr/>
         </p:nvSpPr>
@@ -7886,6 +7950,142 @@
   <p:clrMapOvr>
     <a:masterClrMapping/>
   </p:clrMapOvr>
+  <p:timing>
+    <p:tnLst>
+      <p:par>
+        <p:cTn id="1" dur="indefinite" restart="never" nodeType="tmRoot">
+          <p:childTnLst>
+            <p:seq concurrent="1" nextAc="seek">
+              <p:cTn id="2" dur="indefinite" nodeType="mainSeq">
+                <p:childTnLst>
+                  <p:par>
+                    <p:cTn id="3" fill="hold">
+                      <p:stCondLst>
+                        <p:cond delay="indefinite"/>
+                      </p:stCondLst>
+                      <p:childTnLst>
+                        <p:par>
+                          <p:cTn id="4" fill="hold">
+                            <p:stCondLst>
+                              <p:cond delay="0"/>
+                            </p:stCondLst>
+                            <p:childTnLst>
+                              <p:par>
+                                <p:cTn id="5" presetID="10" presetClass="entr" presetSubtype="0" fill="hold" nodeType="clickEffect">
+                                  <p:stCondLst>
+                                    <p:cond delay="0"/>
+                                  </p:stCondLst>
+                                  <p:childTnLst>
+                                    <p:set>
+                                      <p:cBhvr>
+                                        <p:cTn id="6" dur="1" fill="hold">
+                                          <p:stCondLst>
+                                            <p:cond delay="0"/>
+                                          </p:stCondLst>
+                                        </p:cTn>
+                                        <p:tgtEl>
+                                          <p:spTgt spid="7"/>
+                                        </p:tgtEl>
+                                        <p:attrNameLst>
+                                          <p:attrName>style.visibility</p:attrName>
+                                        </p:attrNameLst>
+                                      </p:cBhvr>
+                                      <p:to>
+                                        <p:strVal val="visible"/>
+                                      </p:to>
+                                    </p:set>
+                                    <p:animEffect transition="in" filter="fade">
+                                      <p:cBhvr>
+                                        <p:cTn id="7" dur="450"/>
+                                        <p:tgtEl>
+                                          <p:spTgt spid="7"/>
+                                        </p:tgtEl>
+                                      </p:cBhvr>
+                                    </p:animEffect>
+                                  </p:childTnLst>
+                                </p:cTn>
+                              </p:par>
+                            </p:childTnLst>
+                          </p:cTn>
+                        </p:par>
+                      </p:childTnLst>
+                    </p:cTn>
+                  </p:par>
+                  <p:par>
+                    <p:cTn id="8" fill="hold">
+                      <p:stCondLst>
+                        <p:cond delay="indefinite"/>
+                      </p:stCondLst>
+                      <p:childTnLst>
+                        <p:par>
+                          <p:cTn id="9" fill="hold">
+                            <p:stCondLst>
+                              <p:cond delay="0"/>
+                            </p:stCondLst>
+                            <p:childTnLst>
+                              <p:par>
+                                <p:cTn id="10" presetID="10" presetClass="entr" presetSubtype="0" fill="hold" nodeType="clickEffect">
+                                  <p:stCondLst>
+                                    <p:cond delay="0"/>
+                                  </p:stCondLst>
+                                  <p:childTnLst>
+                                    <p:set>
+                                      <p:cBhvr>
+                                        <p:cTn id="11" dur="1" fill="hold">
+                                          <p:stCondLst>
+                                            <p:cond delay="0"/>
+                                          </p:stCondLst>
+                                        </p:cTn>
+                                        <p:tgtEl>
+                                          <p:spTgt spid="8"/>
+                                        </p:tgtEl>
+                                        <p:attrNameLst>
+                                          <p:attrName>style.visibility</p:attrName>
+                                        </p:attrNameLst>
+                                      </p:cBhvr>
+                                      <p:to>
+                                        <p:strVal val="visible"/>
+                                      </p:to>
+                                    </p:set>
+                                    <p:animEffect transition="in" filter="fade">
+                                      <p:cBhvr>
+                                        <p:cTn id="12" dur="450"/>
+                                        <p:tgtEl>
+                                          <p:spTgt spid="8"/>
+                                        </p:tgtEl>
+                                      </p:cBhvr>
+                                    </p:animEffect>
+                                  </p:childTnLst>
+                                </p:cTn>
+                              </p:par>
+                            </p:childTnLst>
+                          </p:cTn>
+                        </p:par>
+                      </p:childTnLst>
+                    </p:cTn>
+                  </p:par>
+                </p:childTnLst>
+              </p:cTn>
+              <p:prevCondLst>
+                <p:cond evt="onPrev" delay="0">
+                  <p:tgtEl>
+                    <p:sldTgt/>
+                  </p:tgtEl>
+                </p:cond>
+              </p:prevCondLst>
+              <p:nextCondLst>
+                <p:cond evt="onNext" delay="0">
+                  <p:tgtEl>
+                    <p:sldTgt/>
+                  </p:tgtEl>
+                </p:cond>
+              </p:nextCondLst>
+            </p:seq>
+          </p:childTnLst>
+        </p:cTn>
+      </p:par>
+    </p:tnLst>
+  </p:timing>
 </p:sld>
 </file>
 
@@ -8022,21 +8222,271 @@
                 </a:solidFill>
                 <a:latin typeface="Calibri"/>
               </a:rPr>
-              <a:t>Vale la pena decir con precision que produce cada fase, porque ahi se...</a:t>
-            </a:r>
-          </a:p>
-        </p:txBody>
-      </p:sp>
-      <p:sp>
-        <p:nvSpPr>
-          <p:cNvPr id="5" name="TextBox 4"/>
+              <a:t>El recorrido lineal del ciclo de vida</a:t>
+            </a:r>
+          </a:p>
+        </p:txBody>
+      </p:sp>
+      <p:sp>
+        <p:nvSpPr>
+          <p:cNvPr id="5" name="Rounded Rectangle 4"/>
+          <p:cNvSpPr/>
+          <p:nvPr/>
+        </p:nvSpPr>
+        <p:spPr>
+          <a:xfrm>
+            <a:off x="457200" y="1261872"/>
+            <a:ext cx="11277295" cy="2828091"/>
+          </a:xfrm>
+          <a:prstGeom prst="roundRect">
+            <a:avLst>
+              <a:gd name="adj" fmla="val 4000"/>
+            </a:avLst>
+          </a:prstGeom>
+          <a:solidFill>
+            <a:srgbClr val="1E1E1E"/>
+          </a:solidFill>
+          <a:ln>
+            <a:noFill/>
+          </a:ln>
+        </p:spPr>
+        <p:style>
+          <a:lnRef idx="1">
+            <a:schemeClr val="accent1"/>
+          </a:lnRef>
+          <a:fillRef idx="3">
+            <a:schemeClr val="accent1"/>
+          </a:fillRef>
+          <a:effectRef idx="2">
+            <a:schemeClr val="accent1"/>
+          </a:effectRef>
+          <a:fontRef idx="minor">
+            <a:schemeClr val="lt1"/>
+          </a:fontRef>
+        </p:style>
+        <p:txBody>
+          <a:bodyPr rtlCol="0" anchor="ctr"/>
+          <a:lstStyle/>
+          <a:p>
+            <a:pPr algn="ctr"/>
+          </a:p>
+        </p:txBody>
+      </p:sp>
+      <p:sp>
+        <p:nvSpPr>
+          <p:cNvPr id="6" name="Rectangle 5"/>
+          <p:cNvSpPr/>
+          <p:nvPr/>
+        </p:nvSpPr>
+        <p:spPr>
+          <a:xfrm>
+            <a:off x="457200" y="1261872"/>
+            <a:ext cx="11277295" cy="365760"/>
+          </a:xfrm>
+          <a:prstGeom prst="rect">
+            <a:avLst/>
+          </a:prstGeom>
+          <a:solidFill>
+            <a:srgbClr val="2D2D30"/>
+          </a:solidFill>
+          <a:ln>
+            <a:noFill/>
+          </a:ln>
+        </p:spPr>
+        <p:style>
+          <a:lnRef idx="1">
+            <a:schemeClr val="accent1"/>
+          </a:lnRef>
+          <a:fillRef idx="3">
+            <a:schemeClr val="accent1"/>
+          </a:fillRef>
+          <a:effectRef idx="2">
+            <a:schemeClr val="accent1"/>
+          </a:effectRef>
+          <a:fontRef idx="minor">
+            <a:schemeClr val="lt1"/>
+          </a:fontRef>
+        </p:style>
+        <p:txBody>
+          <a:bodyPr rtlCol="0" anchor="ctr"/>
+          <a:lstStyle/>
+          <a:p>
+            <a:pPr algn="ctr"/>
+          </a:p>
+        </p:txBody>
+      </p:sp>
+      <p:sp>
+        <p:nvSpPr>
+          <p:cNvPr id="7" name="Oval 6"/>
+          <p:cNvSpPr/>
+          <p:nvPr/>
+        </p:nvSpPr>
+        <p:spPr>
+          <a:xfrm>
+            <a:off x="658368" y="1380743"/>
+            <a:ext cx="128016" cy="128016"/>
+          </a:xfrm>
+          <a:prstGeom prst="ellipse">
+            <a:avLst/>
+          </a:prstGeom>
+          <a:solidFill>
+            <a:srgbClr val="FF5F56"/>
+          </a:solidFill>
+          <a:ln>
+            <a:noFill/>
+          </a:ln>
+        </p:spPr>
+        <p:style>
+          <a:lnRef idx="1">
+            <a:schemeClr val="accent1"/>
+          </a:lnRef>
+          <a:fillRef idx="3">
+            <a:schemeClr val="accent1"/>
+          </a:fillRef>
+          <a:effectRef idx="2">
+            <a:schemeClr val="accent1"/>
+          </a:effectRef>
+          <a:fontRef idx="minor">
+            <a:schemeClr val="lt1"/>
+          </a:fontRef>
+        </p:style>
+        <p:txBody>
+          <a:bodyPr rtlCol="0" anchor="ctr"/>
+          <a:lstStyle/>
+          <a:p>
+            <a:pPr algn="ctr"/>
+          </a:p>
+        </p:txBody>
+      </p:sp>
+      <p:sp>
+        <p:nvSpPr>
+          <p:cNvPr id="8" name="Oval 7"/>
+          <p:cNvSpPr/>
+          <p:nvPr/>
+        </p:nvSpPr>
+        <p:spPr>
+          <a:xfrm>
+            <a:off x="877824" y="1380743"/>
+            <a:ext cx="128016" cy="128016"/>
+          </a:xfrm>
+          <a:prstGeom prst="ellipse">
+            <a:avLst/>
+          </a:prstGeom>
+          <a:solidFill>
+            <a:srgbClr val="FFBD2E"/>
+          </a:solidFill>
+          <a:ln>
+            <a:noFill/>
+          </a:ln>
+        </p:spPr>
+        <p:style>
+          <a:lnRef idx="1">
+            <a:schemeClr val="accent1"/>
+          </a:lnRef>
+          <a:fillRef idx="3">
+            <a:schemeClr val="accent1"/>
+          </a:fillRef>
+          <a:effectRef idx="2">
+            <a:schemeClr val="accent1"/>
+          </a:effectRef>
+          <a:fontRef idx="minor">
+            <a:schemeClr val="lt1"/>
+          </a:fontRef>
+        </p:style>
+        <p:txBody>
+          <a:bodyPr rtlCol="0" anchor="ctr"/>
+          <a:lstStyle/>
+          <a:p>
+            <a:pPr algn="ctr"/>
+          </a:p>
+        </p:txBody>
+      </p:sp>
+      <p:sp>
+        <p:nvSpPr>
+          <p:cNvPr id="9" name="Oval 8"/>
+          <p:cNvSpPr/>
+          <p:nvPr/>
+        </p:nvSpPr>
+        <p:spPr>
+          <a:xfrm>
+            <a:off x="1097280" y="1380743"/>
+            <a:ext cx="128016" cy="128016"/>
+          </a:xfrm>
+          <a:prstGeom prst="ellipse">
+            <a:avLst/>
+          </a:prstGeom>
+          <a:solidFill>
+            <a:srgbClr val="27C93F"/>
+          </a:solidFill>
+          <a:ln>
+            <a:noFill/>
+          </a:ln>
+        </p:spPr>
+        <p:style>
+          <a:lnRef idx="1">
+            <a:schemeClr val="accent1"/>
+          </a:lnRef>
+          <a:fillRef idx="3">
+            <a:schemeClr val="accent1"/>
+          </a:fillRef>
+          <a:effectRef idx="2">
+            <a:schemeClr val="accent1"/>
+          </a:effectRef>
+          <a:fontRef idx="minor">
+            <a:schemeClr val="lt1"/>
+          </a:fontRef>
+        </p:style>
+        <p:txBody>
+          <a:bodyPr rtlCol="0" anchor="ctr"/>
+          <a:lstStyle/>
+          <a:p>
+            <a:pPr algn="ctr"/>
+          </a:p>
+        </p:txBody>
+      </p:sp>
+      <p:sp>
+        <p:nvSpPr>
+          <p:cNvPr id="10" name="TextBox 9"/>
           <p:cNvSpPr txBox="1"/>
           <p:nvPr/>
         </p:nvSpPr>
         <p:spPr>
           <a:xfrm>
-            <a:off x="457200" y="1170432"/>
-            <a:ext cx="11277295" cy="5230368"/>
+            <a:off x="1371600" y="1298448"/>
+            <a:ext cx="10180015" cy="292608"/>
+          </a:xfrm>
+          <a:prstGeom prst="rect">
+            <a:avLst/>
+          </a:prstGeom>
+          <a:noFill/>
+        </p:spPr>
+        <p:txBody>
+          <a:bodyPr wrap="square" anchor="ctr"/>
+          <a:lstStyle/>
+          <a:p>
+            <a:pPr algn="r"/>
+            <a:r>
+              <a:rPr sz="1100" b="1" i="0">
+                <a:solidFill>
+                  <a:srgbClr val="BBBBBB"/>
+                </a:solidFill>
+                <a:latin typeface="Calibri"/>
+              </a:rPr>
+              <a:t>Mermaid</a:t>
+            </a:r>
+          </a:p>
+        </p:txBody>
+      </p:sp>
+      <p:sp>
+        <p:nvSpPr>
+          <p:cNvPr id="11" name="TextBox 10"/>
+          <p:cNvSpPr txBox="1"/>
+          <p:nvPr/>
+        </p:nvSpPr>
+        <p:spPr>
+          <a:xfrm>
+            <a:off x="685800" y="1719072"/>
+            <a:ext cx="502920" cy="2233731"/>
           </a:xfrm>
           <a:prstGeom prst="rect">
             <a:avLst/>
@@ -8049,58 +8499,441 @@
           </a:bodyPr>
           <a:lstStyle/>
           <a:p>
+            <a:pPr algn="r">
+              <a:spcAft>
+                <a:spcPts val="428"/>
+              </a:spcAft>
+            </a:pPr>
+            <a:r>
+              <a:rPr sz="2000" i="0" b="0">
+                <a:solidFill>
+                  <a:srgbClr val="858585"/>
+                </a:solidFill>
+                <a:latin typeface="Consolas"/>
+              </a:rPr>
+              <a:t>1</a:t>
+            </a:r>
+          </a:p>
+          <a:p>
+            <a:pPr algn="r">
+              <a:spcAft>
+                <a:spcPts val="428"/>
+              </a:spcAft>
+            </a:pPr>
+            <a:r>
+              <a:rPr sz="2000" i="0" b="0">
+                <a:solidFill>
+                  <a:srgbClr val="858585"/>
+                </a:solidFill>
+                <a:latin typeface="Consolas"/>
+              </a:rPr>
+              <a:t>2</a:t>
+            </a:r>
+          </a:p>
+          <a:p>
+            <a:pPr algn="r">
+              <a:spcAft>
+                <a:spcPts val="428"/>
+              </a:spcAft>
+            </a:pPr>
+            <a:r>
+              <a:rPr sz="2000" i="0" b="0">
+                <a:solidFill>
+                  <a:srgbClr val="858585"/>
+                </a:solidFill>
+                <a:latin typeface="Consolas"/>
+              </a:rPr>
+              <a:t>3</a:t>
+            </a:r>
+          </a:p>
+          <a:p>
+            <a:pPr algn="r">
+              <a:spcAft>
+                <a:spcPts val="428"/>
+              </a:spcAft>
+            </a:pPr>
+            <a:r>
+              <a:rPr sz="2000" i="0" b="0">
+                <a:solidFill>
+                  <a:srgbClr val="858585"/>
+                </a:solidFill>
+                <a:latin typeface="Consolas"/>
+              </a:rPr>
+              <a:t>4</a:t>
+            </a:r>
+          </a:p>
+          <a:p>
+            <a:pPr algn="r">
+              <a:spcAft>
+                <a:spcPts val="428"/>
+              </a:spcAft>
+            </a:pPr>
+            <a:r>
+              <a:rPr sz="2000" i="0" b="0">
+                <a:solidFill>
+                  <a:srgbClr val="858585"/>
+                </a:solidFill>
+                <a:latin typeface="Consolas"/>
+              </a:rPr>
+              <a:t>5</a:t>
+            </a:r>
+          </a:p>
+          <a:p>
+            <a:pPr algn="r">
+              <a:spcAft>
+                <a:spcPts val="428"/>
+              </a:spcAft>
+            </a:pPr>
+            <a:r>
+              <a:rPr sz="2000" i="0" b="0">
+                <a:solidFill>
+                  <a:srgbClr val="858585"/>
+                </a:solidFill>
+                <a:latin typeface="Consolas"/>
+              </a:rPr>
+              <a:t>6</a:t>
+            </a:r>
+          </a:p>
+        </p:txBody>
+      </p:sp>
+      <p:sp>
+        <p:nvSpPr>
+          <p:cNvPr id="12" name="TextBox 11"/>
+          <p:cNvSpPr txBox="1"/>
+          <p:nvPr/>
+        </p:nvSpPr>
+        <p:spPr>
+          <a:xfrm>
+            <a:off x="1188720" y="1719072"/>
+            <a:ext cx="10271455" cy="2233731"/>
+          </a:xfrm>
+          <a:prstGeom prst="rect">
+            <a:avLst/>
+          </a:prstGeom>
+          <a:noFill/>
+        </p:spPr>
+        <p:txBody>
+          <a:bodyPr wrap="square">
+            <a:spAutoFit/>
+          </a:bodyPr>
+          <a:lstStyle/>
+          <a:p>
             <a:pPr>
               <a:spcAft>
-                <a:spcPts val="800"/>
+                <a:spcPts val="428"/>
               </a:spcAft>
             </a:pPr>
             <a:r>
-              <a:rPr sz="2000" b="0" i="0">
-                <a:solidFill>
-                  <a:srgbClr val="333333"/>
-                </a:solidFill>
-                <a:latin typeface="Calibri"/>
-              </a:rPr>
-              <a:t>–   Requisitos responde la pregunta QUE debe hacer el sistema y produce la lista de RF y RNF, el glosario y las reglas de negocio.</a:t>
+              <a:rPr sz="2000" i="0" b="0">
+                <a:solidFill>
+                  <a:srgbClr val="D4D4D4"/>
+                </a:solidFill>
+                <a:latin typeface="Consolas"/>
+              </a:rPr>
+              <a:t>flowchart</a:t>
+            </a:r>
+            <a:r>
+              <a:rPr sz="2000" i="0" b="0">
+                <a:solidFill>
+                  <a:srgbClr val="D4D4D4"/>
+                </a:solidFill>
+                <a:latin typeface="Consolas"/>
+              </a:rPr>
+              <a:t> </a:t>
+            </a:r>
+            <a:r>
+              <a:rPr sz="2000" i="0" b="0">
+                <a:solidFill>
+                  <a:srgbClr val="D4D4D4"/>
+                </a:solidFill>
+                <a:latin typeface="Consolas"/>
+              </a:rPr>
+              <a:t>LR</a:t>
             </a:r>
           </a:p>
           <a:p>
             <a:pPr>
               <a:spcAft>
-                <a:spcPts val="800"/>
+                <a:spcPts val="428"/>
               </a:spcAft>
             </a:pPr>
             <a:r>
-              <a:rPr sz="2000" b="0" i="0">
-                <a:solidFill>
-                  <a:srgbClr val="333333"/>
-                </a:solidFill>
-                <a:latin typeface="Calibri"/>
-              </a:rPr>
-              <a:t>–   Construccion es escribir el codigo y produce el ejecutable.</a:t>
+              <a:rPr sz="2000" i="0" b="0">
+                <a:solidFill>
+                  <a:srgbClr val="D4D4D4"/>
+                </a:solidFill>
+                <a:latin typeface="Consolas"/>
+              </a:rPr>
+              <a:t>  </a:t>
+            </a:r>
+            <a:r>
+              <a:rPr sz="2000" i="0" b="0">
+                <a:solidFill>
+                  <a:srgbClr val="D4D4D4"/>
+                </a:solidFill>
+                <a:latin typeface="Consolas"/>
+              </a:rPr>
+              <a:t>R</a:t>
+            </a:r>
+            <a:r>
+              <a:rPr sz="2000" i="0" b="0">
+                <a:solidFill>
+                  <a:srgbClr val="D4D4D4"/>
+                </a:solidFill>
+                <a:latin typeface="Consolas"/>
+              </a:rPr>
+              <a:t>[</a:t>
+            </a:r>
+            <a:r>
+              <a:rPr sz="2000" i="0" b="0">
+                <a:solidFill>
+                  <a:srgbClr val="D4D4D4"/>
+                </a:solidFill>
+                <a:latin typeface="Consolas"/>
+              </a:rPr>
+              <a:t>Requisitos</a:t>
+            </a:r>
+            <a:r>
+              <a:rPr sz="2000" i="0" b="0">
+                <a:solidFill>
+                  <a:srgbClr val="D4D4D4"/>
+                </a:solidFill>
+                <a:latin typeface="Consolas"/>
+              </a:rPr>
+              <a:t>] --&gt; </a:t>
+            </a:r>
+            <a:r>
+              <a:rPr sz="2000" i="0" b="0">
+                <a:solidFill>
+                  <a:srgbClr val="D4D4D4"/>
+                </a:solidFill>
+                <a:latin typeface="Consolas"/>
+              </a:rPr>
+              <a:t>D</a:t>
+            </a:r>
+            <a:r>
+              <a:rPr sz="2000" i="0" b="0">
+                <a:solidFill>
+                  <a:srgbClr val="D4D4D4"/>
+                </a:solidFill>
+                <a:latin typeface="Consolas"/>
+              </a:rPr>
+              <a:t>[</a:t>
+            </a:r>
+            <a:r>
+              <a:rPr sz="2000" i="0" b="0">
+                <a:solidFill>
+                  <a:srgbClr val="D4D4D4"/>
+                </a:solidFill>
+                <a:latin typeface="Consolas"/>
+              </a:rPr>
+              <a:t>Diseno</a:t>
+            </a:r>
+            <a:r>
+              <a:rPr sz="2000" i="0" b="0">
+                <a:solidFill>
+                  <a:srgbClr val="D4D4D4"/>
+                </a:solidFill>
+                <a:latin typeface="Consolas"/>
+              </a:rPr>
+              <a:t>] --&gt; </a:t>
+            </a:r>
+            <a:r>
+              <a:rPr sz="2000" i="0" b="0">
+                <a:solidFill>
+                  <a:srgbClr val="D4D4D4"/>
+                </a:solidFill>
+                <a:latin typeface="Consolas"/>
+              </a:rPr>
+              <a:t>C</a:t>
+            </a:r>
+            <a:r>
+              <a:rPr sz="2000" i="0" b="0">
+                <a:solidFill>
+                  <a:srgbClr val="D4D4D4"/>
+                </a:solidFill>
+                <a:latin typeface="Consolas"/>
+              </a:rPr>
+              <a:t>[</a:t>
+            </a:r>
+            <a:r>
+              <a:rPr sz="2000" i="0" b="0">
+                <a:solidFill>
+                  <a:srgbClr val="D4D4D4"/>
+                </a:solidFill>
+                <a:latin typeface="Consolas"/>
+              </a:rPr>
+              <a:t>Construccion</a:t>
+            </a:r>
+            <a:r>
+              <a:rPr sz="2000" i="0" b="0">
+                <a:solidFill>
+                  <a:srgbClr val="D4D4D4"/>
+                </a:solidFill>
+                <a:latin typeface="Consolas"/>
+              </a:rPr>
+              <a:t>]</a:t>
             </a:r>
           </a:p>
           <a:p>
             <a:pPr>
               <a:spcAft>
-                <a:spcPts val="800"/>
+                <a:spcPts val="428"/>
               </a:spcAft>
             </a:pPr>
             <a:r>
-              <a:rPr sz="2000" b="0" i="0">
-                <a:solidFill>
-                  <a:srgbClr val="333333"/>
-                </a:solidFill>
-                <a:latin typeface="Calibri"/>
-              </a:rPr>
-              <a:t>–   En un proyecto de software esto se reparte: Seminario de Sistemas vive en requisitos y diseño (los planos), y Programacion II vive en construccion y pruebas (la obra).</a:t>
-            </a:r>
-          </a:p>
-        </p:txBody>
-      </p:sp>
-      <p:sp>
-        <p:nvSpPr>
-          <p:cNvPr id="6" name="TextBox 5"/>
+              <a:rPr sz="2000" i="0" b="0">
+                <a:solidFill>
+                  <a:srgbClr val="D4D4D4"/>
+                </a:solidFill>
+                <a:latin typeface="Consolas"/>
+              </a:rPr>
+              <a:t>  </a:t>
+            </a:r>
+            <a:r>
+              <a:rPr sz="2000" i="0" b="0">
+                <a:solidFill>
+                  <a:srgbClr val="D4D4D4"/>
+                </a:solidFill>
+                <a:latin typeface="Consolas"/>
+              </a:rPr>
+              <a:t>C</a:t>
+            </a:r>
+            <a:r>
+              <a:rPr sz="2000" i="0" b="0">
+                <a:solidFill>
+                  <a:srgbClr val="D4D4D4"/>
+                </a:solidFill>
+                <a:latin typeface="Consolas"/>
+              </a:rPr>
+              <a:t> --&gt; </a:t>
+            </a:r>
+            <a:r>
+              <a:rPr sz="2000" i="0" b="0">
+                <a:solidFill>
+                  <a:srgbClr val="D4D4D4"/>
+                </a:solidFill>
+                <a:latin typeface="Consolas"/>
+              </a:rPr>
+              <a:t>P</a:t>
+            </a:r>
+            <a:r>
+              <a:rPr sz="2000" i="0" b="0">
+                <a:solidFill>
+                  <a:srgbClr val="D4D4D4"/>
+                </a:solidFill>
+                <a:latin typeface="Consolas"/>
+              </a:rPr>
+              <a:t>[</a:t>
+            </a:r>
+            <a:r>
+              <a:rPr sz="2000" i="0" b="0">
+                <a:solidFill>
+                  <a:srgbClr val="D4D4D4"/>
+                </a:solidFill>
+                <a:latin typeface="Consolas"/>
+              </a:rPr>
+              <a:t>Pruebas</a:t>
+            </a:r>
+            <a:r>
+              <a:rPr sz="2000" i="0" b="0">
+                <a:solidFill>
+                  <a:srgbClr val="D4D4D4"/>
+                </a:solidFill>
+                <a:latin typeface="Consolas"/>
+              </a:rPr>
+              <a:t>] --&gt; </a:t>
+            </a:r>
+            <a:r>
+              <a:rPr sz="2000" i="0" b="0">
+                <a:solidFill>
+                  <a:srgbClr val="D4D4D4"/>
+                </a:solidFill>
+                <a:latin typeface="Consolas"/>
+              </a:rPr>
+              <a:t>M</a:t>
+            </a:r>
+            <a:r>
+              <a:rPr sz="2000" i="0" b="0">
+                <a:solidFill>
+                  <a:srgbClr val="D4D4D4"/>
+                </a:solidFill>
+                <a:latin typeface="Consolas"/>
+              </a:rPr>
+              <a:t>[</a:t>
+            </a:r>
+            <a:r>
+              <a:rPr sz="2000" i="0" b="0">
+                <a:solidFill>
+                  <a:srgbClr val="D4D4D4"/>
+                </a:solidFill>
+                <a:latin typeface="Consolas"/>
+              </a:rPr>
+              <a:t>Mantenimiento</a:t>
+            </a:r>
+            <a:r>
+              <a:rPr sz="2000" i="0" b="0">
+                <a:solidFill>
+                  <a:srgbClr val="D4D4D4"/>
+                </a:solidFill>
+                <a:latin typeface="Consolas"/>
+              </a:rPr>
+              <a:t>]</a:t>
+            </a:r>
+          </a:p>
+          <a:p>
+            <a:pPr>
+              <a:spcAft>
+                <a:spcPts val="428"/>
+              </a:spcAft>
+            </a:pPr>
+            <a:r>
+              <a:rPr sz="2000" i="0" b="0">
+                <a:solidFill>
+                  <a:srgbClr val="D4D4D4"/>
+                </a:solidFill>
+                <a:latin typeface="Consolas"/>
+              </a:rPr>
+              <a:t/>
+            </a:r>
+          </a:p>
+          <a:p>
+            <a:pPr>
+              <a:spcAft>
+                <a:spcPts val="428"/>
+              </a:spcAft>
+            </a:pPr>
+            <a:r>
+              <a:rPr sz="2000" i="1" b="0">
+                <a:solidFill>
+                  <a:srgbClr val="6A9955"/>
+                </a:solidFill>
+                <a:latin typeface="Consolas"/>
+              </a:rPr>
+              <a:t>%% Lineal significa: no se vuelve. Cada fase cierra con un artefacto</a:t>
+            </a:r>
+          </a:p>
+          <a:p>
+            <a:pPr>
+              <a:spcAft>
+                <a:spcPts val="428"/>
+              </a:spcAft>
+            </a:pPr>
+            <a:r>
+              <a:rPr sz="2000" i="1" b="0">
+                <a:solidFill>
+                  <a:srgbClr val="6A9955"/>
+                </a:solidFill>
+                <a:latin typeface="Consolas"/>
+              </a:rPr>
+              <a:t>%% aprobado y la siguiente empieza sobre el.</a:t>
+            </a:r>
+          </a:p>
+        </p:txBody>
+      </p:sp>
+      <p:sp>
+        <p:nvSpPr>
+          <p:cNvPr id="13" name="TextBox 12"/>
           <p:cNvSpPr txBox="1"/>
           <p:nvPr/>
         </p:nvSpPr>
@@ -8274,21 +9107,271 @@
                 </a:solidFill>
                 <a:latin typeface="Calibri"/>
               </a:rPr>
-              <a:t>La gran decision no es cuales fases hacer, sino cuantas veces...</a:t>
-            </a:r>
-          </a:p>
-        </p:txBody>
-      </p:sp>
-      <p:sp>
-        <p:nvSpPr>
-          <p:cNvPr id="5" name="TextBox 4"/>
+              <a:t>El ciclo de vida en Mermaid: mismas cajas, dos recorridos</a:t>
+            </a:r>
+          </a:p>
+        </p:txBody>
+      </p:sp>
+      <p:sp>
+        <p:nvSpPr>
+          <p:cNvPr id="5" name="Rounded Rectangle 4"/>
+          <p:cNvSpPr/>
+          <p:nvPr/>
+        </p:nvSpPr>
+        <p:spPr>
+          <a:xfrm>
+            <a:off x="457200" y="1261872"/>
+            <a:ext cx="11277295" cy="4731007"/>
+          </a:xfrm>
+          <a:prstGeom prst="roundRect">
+            <a:avLst>
+              <a:gd name="adj" fmla="val 4000"/>
+            </a:avLst>
+          </a:prstGeom>
+          <a:solidFill>
+            <a:srgbClr val="1E1E1E"/>
+          </a:solidFill>
+          <a:ln>
+            <a:noFill/>
+          </a:ln>
+        </p:spPr>
+        <p:style>
+          <a:lnRef idx="1">
+            <a:schemeClr val="accent1"/>
+          </a:lnRef>
+          <a:fillRef idx="3">
+            <a:schemeClr val="accent1"/>
+          </a:fillRef>
+          <a:effectRef idx="2">
+            <a:schemeClr val="accent1"/>
+          </a:effectRef>
+          <a:fontRef idx="minor">
+            <a:schemeClr val="lt1"/>
+          </a:fontRef>
+        </p:style>
+        <p:txBody>
+          <a:bodyPr rtlCol="0" anchor="ctr"/>
+          <a:lstStyle/>
+          <a:p>
+            <a:pPr algn="ctr"/>
+          </a:p>
+        </p:txBody>
+      </p:sp>
+      <p:sp>
+        <p:nvSpPr>
+          <p:cNvPr id="6" name="Rectangle 5"/>
+          <p:cNvSpPr/>
+          <p:nvPr/>
+        </p:nvSpPr>
+        <p:spPr>
+          <a:xfrm>
+            <a:off x="457200" y="1261872"/>
+            <a:ext cx="11277295" cy="365760"/>
+          </a:xfrm>
+          <a:prstGeom prst="rect">
+            <a:avLst/>
+          </a:prstGeom>
+          <a:solidFill>
+            <a:srgbClr val="2D2D30"/>
+          </a:solidFill>
+          <a:ln>
+            <a:noFill/>
+          </a:ln>
+        </p:spPr>
+        <p:style>
+          <a:lnRef idx="1">
+            <a:schemeClr val="accent1"/>
+          </a:lnRef>
+          <a:fillRef idx="3">
+            <a:schemeClr val="accent1"/>
+          </a:fillRef>
+          <a:effectRef idx="2">
+            <a:schemeClr val="accent1"/>
+          </a:effectRef>
+          <a:fontRef idx="minor">
+            <a:schemeClr val="lt1"/>
+          </a:fontRef>
+        </p:style>
+        <p:txBody>
+          <a:bodyPr rtlCol="0" anchor="ctr"/>
+          <a:lstStyle/>
+          <a:p>
+            <a:pPr algn="ctr"/>
+          </a:p>
+        </p:txBody>
+      </p:sp>
+      <p:sp>
+        <p:nvSpPr>
+          <p:cNvPr id="7" name="Oval 6"/>
+          <p:cNvSpPr/>
+          <p:nvPr/>
+        </p:nvSpPr>
+        <p:spPr>
+          <a:xfrm>
+            <a:off x="658368" y="1380743"/>
+            <a:ext cx="128016" cy="128016"/>
+          </a:xfrm>
+          <a:prstGeom prst="ellipse">
+            <a:avLst/>
+          </a:prstGeom>
+          <a:solidFill>
+            <a:srgbClr val="FF5F56"/>
+          </a:solidFill>
+          <a:ln>
+            <a:noFill/>
+          </a:ln>
+        </p:spPr>
+        <p:style>
+          <a:lnRef idx="1">
+            <a:schemeClr val="accent1"/>
+          </a:lnRef>
+          <a:fillRef idx="3">
+            <a:schemeClr val="accent1"/>
+          </a:fillRef>
+          <a:effectRef idx="2">
+            <a:schemeClr val="accent1"/>
+          </a:effectRef>
+          <a:fontRef idx="minor">
+            <a:schemeClr val="lt1"/>
+          </a:fontRef>
+        </p:style>
+        <p:txBody>
+          <a:bodyPr rtlCol="0" anchor="ctr"/>
+          <a:lstStyle/>
+          <a:p>
+            <a:pPr algn="ctr"/>
+          </a:p>
+        </p:txBody>
+      </p:sp>
+      <p:sp>
+        <p:nvSpPr>
+          <p:cNvPr id="8" name="Oval 7"/>
+          <p:cNvSpPr/>
+          <p:nvPr/>
+        </p:nvSpPr>
+        <p:spPr>
+          <a:xfrm>
+            <a:off x="877824" y="1380743"/>
+            <a:ext cx="128016" cy="128016"/>
+          </a:xfrm>
+          <a:prstGeom prst="ellipse">
+            <a:avLst/>
+          </a:prstGeom>
+          <a:solidFill>
+            <a:srgbClr val="FFBD2E"/>
+          </a:solidFill>
+          <a:ln>
+            <a:noFill/>
+          </a:ln>
+        </p:spPr>
+        <p:style>
+          <a:lnRef idx="1">
+            <a:schemeClr val="accent1"/>
+          </a:lnRef>
+          <a:fillRef idx="3">
+            <a:schemeClr val="accent1"/>
+          </a:fillRef>
+          <a:effectRef idx="2">
+            <a:schemeClr val="accent1"/>
+          </a:effectRef>
+          <a:fontRef idx="minor">
+            <a:schemeClr val="lt1"/>
+          </a:fontRef>
+        </p:style>
+        <p:txBody>
+          <a:bodyPr rtlCol="0" anchor="ctr"/>
+          <a:lstStyle/>
+          <a:p>
+            <a:pPr algn="ctr"/>
+          </a:p>
+        </p:txBody>
+      </p:sp>
+      <p:sp>
+        <p:nvSpPr>
+          <p:cNvPr id="9" name="Oval 8"/>
+          <p:cNvSpPr/>
+          <p:nvPr/>
+        </p:nvSpPr>
+        <p:spPr>
+          <a:xfrm>
+            <a:off x="1097280" y="1380743"/>
+            <a:ext cx="128016" cy="128016"/>
+          </a:xfrm>
+          <a:prstGeom prst="ellipse">
+            <a:avLst/>
+          </a:prstGeom>
+          <a:solidFill>
+            <a:srgbClr val="27C93F"/>
+          </a:solidFill>
+          <a:ln>
+            <a:noFill/>
+          </a:ln>
+        </p:spPr>
+        <p:style>
+          <a:lnRef idx="1">
+            <a:schemeClr val="accent1"/>
+          </a:lnRef>
+          <a:fillRef idx="3">
+            <a:schemeClr val="accent1"/>
+          </a:fillRef>
+          <a:effectRef idx="2">
+            <a:schemeClr val="accent1"/>
+          </a:effectRef>
+          <a:fontRef idx="minor">
+            <a:schemeClr val="lt1"/>
+          </a:fontRef>
+        </p:style>
+        <p:txBody>
+          <a:bodyPr rtlCol="0" anchor="ctr"/>
+          <a:lstStyle/>
+          <a:p>
+            <a:pPr algn="ctr"/>
+          </a:p>
+        </p:txBody>
+      </p:sp>
+      <p:sp>
+        <p:nvSpPr>
+          <p:cNvPr id="10" name="TextBox 9"/>
           <p:cNvSpPr txBox="1"/>
           <p:nvPr/>
         </p:nvSpPr>
         <p:spPr>
           <a:xfrm>
-            <a:off x="457200" y="1170432"/>
-            <a:ext cx="11277295" cy="5230368"/>
+            <a:off x="1371600" y="1298448"/>
+            <a:ext cx="10180015" cy="292608"/>
+          </a:xfrm>
+          <a:prstGeom prst="rect">
+            <a:avLst/>
+          </a:prstGeom>
+          <a:noFill/>
+        </p:spPr>
+        <p:txBody>
+          <a:bodyPr wrap="square" anchor="ctr"/>
+          <a:lstStyle/>
+          <a:p>
+            <a:pPr algn="r"/>
+            <a:r>
+              <a:rPr sz="1100" b="1" i="0">
+                <a:solidFill>
+                  <a:srgbClr val="BBBBBB"/>
+                </a:solidFill>
+                <a:latin typeface="Calibri"/>
+              </a:rPr>
+              <a:t>Mermaid</a:t>
+            </a:r>
+          </a:p>
+        </p:txBody>
+      </p:sp>
+      <p:sp>
+        <p:nvSpPr>
+          <p:cNvPr id="11" name="TextBox 10"/>
+          <p:cNvSpPr txBox="1"/>
+          <p:nvPr/>
+        </p:nvSpPr>
+        <p:spPr>
+          <a:xfrm>
+            <a:off x="685800" y="1719072"/>
+            <a:ext cx="502920" cy="4136647"/>
           </a:xfrm>
           <a:prstGeom prst="rect">
             <a:avLst/>
@@ -8301,74 +9384,1163 @@
           </a:bodyPr>
           <a:lstStyle/>
           <a:p>
+            <a:pPr algn="r">
+              <a:spcAft>
+                <a:spcPts val="407"/>
+              </a:spcAft>
+            </a:pPr>
+            <a:r>
+              <a:rPr sz="1900" i="0" b="0">
+                <a:solidFill>
+                  <a:srgbClr val="858585"/>
+                </a:solidFill>
+                <a:latin typeface="Consolas"/>
+              </a:rPr>
+              <a:t>1</a:t>
+            </a:r>
+          </a:p>
+          <a:p>
+            <a:pPr algn="r">
+              <a:spcAft>
+                <a:spcPts val="407"/>
+              </a:spcAft>
+            </a:pPr>
+            <a:r>
+              <a:rPr sz="1900" i="0" b="0">
+                <a:solidFill>
+                  <a:srgbClr val="858585"/>
+                </a:solidFill>
+                <a:latin typeface="Consolas"/>
+              </a:rPr>
+              <a:t>2</a:t>
+            </a:r>
+          </a:p>
+          <a:p>
+            <a:pPr algn="r">
+              <a:spcAft>
+                <a:spcPts val="407"/>
+              </a:spcAft>
+            </a:pPr>
+            <a:r>
+              <a:rPr sz="1900" i="0" b="0">
+                <a:solidFill>
+                  <a:srgbClr val="858585"/>
+                </a:solidFill>
+                <a:latin typeface="Consolas"/>
+              </a:rPr>
+              <a:t>3</a:t>
+            </a:r>
+          </a:p>
+          <a:p>
+            <a:pPr algn="r">
+              <a:spcAft>
+                <a:spcPts val="407"/>
+              </a:spcAft>
+            </a:pPr>
+            <a:r>
+              <a:rPr sz="1900" i="0" b="0">
+                <a:solidFill>
+                  <a:srgbClr val="858585"/>
+                </a:solidFill>
+                <a:latin typeface="Consolas"/>
+              </a:rPr>
+              <a:t>4</a:t>
+            </a:r>
+          </a:p>
+          <a:p>
+            <a:pPr algn="r">
+              <a:spcAft>
+                <a:spcPts val="407"/>
+              </a:spcAft>
+            </a:pPr>
+            <a:r>
+              <a:rPr sz="1900" i="0" b="0">
+                <a:solidFill>
+                  <a:srgbClr val="858585"/>
+                </a:solidFill>
+                <a:latin typeface="Consolas"/>
+              </a:rPr>
+              <a:t>5</a:t>
+            </a:r>
+          </a:p>
+          <a:p>
+            <a:pPr algn="r">
+              <a:spcAft>
+                <a:spcPts val="407"/>
+              </a:spcAft>
+            </a:pPr>
+            <a:r>
+              <a:rPr sz="1900" i="0" b="0">
+                <a:solidFill>
+                  <a:srgbClr val="858585"/>
+                </a:solidFill>
+                <a:latin typeface="Consolas"/>
+              </a:rPr>
+              <a:t>6</a:t>
+            </a:r>
+          </a:p>
+          <a:p>
+            <a:pPr algn="r">
+              <a:spcAft>
+                <a:spcPts val="407"/>
+              </a:spcAft>
+            </a:pPr>
+            <a:r>
+              <a:rPr sz="1900" i="0" b="0">
+                <a:solidFill>
+                  <a:srgbClr val="858585"/>
+                </a:solidFill>
+                <a:latin typeface="Consolas"/>
+              </a:rPr>
+              <a:t>7</a:t>
+            </a:r>
+          </a:p>
+          <a:p>
+            <a:pPr algn="r">
+              <a:spcAft>
+                <a:spcPts val="407"/>
+              </a:spcAft>
+            </a:pPr>
+            <a:r>
+              <a:rPr sz="1900" i="0" b="0">
+                <a:solidFill>
+                  <a:srgbClr val="858585"/>
+                </a:solidFill>
+                <a:latin typeface="Consolas"/>
+              </a:rPr>
+              <a:t>8</a:t>
+            </a:r>
+          </a:p>
+          <a:p>
+            <a:pPr algn="r">
+              <a:spcAft>
+                <a:spcPts val="407"/>
+              </a:spcAft>
+            </a:pPr>
+            <a:r>
+              <a:rPr sz="1900" i="0" b="0">
+                <a:solidFill>
+                  <a:srgbClr val="858585"/>
+                </a:solidFill>
+                <a:latin typeface="Consolas"/>
+              </a:rPr>
+              <a:t>9</a:t>
+            </a:r>
+          </a:p>
+          <a:p>
+            <a:pPr algn="r">
+              <a:spcAft>
+                <a:spcPts val="407"/>
+              </a:spcAft>
+            </a:pPr>
+            <a:r>
+              <a:rPr sz="1900" i="0" b="0">
+                <a:solidFill>
+                  <a:srgbClr val="858585"/>
+                </a:solidFill>
+                <a:latin typeface="Consolas"/>
+              </a:rPr>
+              <a:t>10</a:t>
+            </a:r>
+          </a:p>
+          <a:p>
+            <a:pPr algn="r">
+              <a:spcAft>
+                <a:spcPts val="407"/>
+              </a:spcAft>
+            </a:pPr>
+            <a:r>
+              <a:rPr sz="1900" i="0" b="0">
+                <a:solidFill>
+                  <a:srgbClr val="858585"/>
+                </a:solidFill>
+                <a:latin typeface="Consolas"/>
+              </a:rPr>
+              <a:t>11</a:t>
+            </a:r>
+          </a:p>
+          <a:p>
+            <a:pPr algn="r">
+              <a:spcAft>
+                <a:spcPts val="407"/>
+              </a:spcAft>
+            </a:pPr>
+            <a:r>
+              <a:rPr sz="1900" i="0" b="0">
+                <a:solidFill>
+                  <a:srgbClr val="858585"/>
+                </a:solidFill>
+                <a:latin typeface="Consolas"/>
+              </a:rPr>
+              <a:t>12</a:t>
+            </a:r>
+          </a:p>
+        </p:txBody>
+      </p:sp>
+      <p:sp>
+        <p:nvSpPr>
+          <p:cNvPr id="12" name="TextBox 11"/>
+          <p:cNvSpPr txBox="1"/>
+          <p:nvPr/>
+        </p:nvSpPr>
+        <p:spPr>
+          <a:xfrm>
+            <a:off x="1188720" y="1719072"/>
+            <a:ext cx="10271455" cy="4136647"/>
+          </a:xfrm>
+          <a:prstGeom prst="rect">
+            <a:avLst/>
+          </a:prstGeom>
+          <a:noFill/>
+        </p:spPr>
+        <p:txBody>
+          <a:bodyPr wrap="square">
+            <a:spAutoFit/>
+          </a:bodyPr>
+          <a:lstStyle/>
+          <a:p>
             <a:pPr>
               <a:spcAft>
-                <a:spcPts val="800"/>
+                <a:spcPts val="407"/>
               </a:spcAft>
             </a:pPr>
             <a:r>
-              <a:rPr sz="2000" b="0" i="0">
-                <a:solidFill>
-                  <a:srgbClr val="333333"/>
-                </a:solidFill>
-                <a:latin typeface="Calibri"/>
-              </a:rPr>
-              <a:t>–   La gran decision no es cuales fases hacer, sino cuantas veces recorrerlas y con cuanto sistema a la vez.</a:t>
+              <a:rPr sz="1900" i="0" b="0">
+                <a:solidFill>
+                  <a:srgbClr val="D4D4D4"/>
+                </a:solidFill>
+                <a:latin typeface="Consolas"/>
+              </a:rPr>
+              <a:t>flowchart</a:t>
+            </a:r>
+            <a:r>
+              <a:rPr sz="1900" i="0" b="0">
+                <a:solidFill>
+                  <a:srgbClr val="D4D4D4"/>
+                </a:solidFill>
+                <a:latin typeface="Consolas"/>
+              </a:rPr>
+              <a:t> </a:t>
+            </a:r>
+            <a:r>
+              <a:rPr sz="1900" i="0" b="0">
+                <a:solidFill>
+                  <a:srgbClr val="D4D4D4"/>
+                </a:solidFill>
+                <a:latin typeface="Consolas"/>
+              </a:rPr>
+              <a:t>LR</a:t>
             </a:r>
           </a:p>
           <a:p>
             <a:pPr>
               <a:spcAft>
-                <a:spcPts val="800"/>
+                <a:spcPts val="407"/>
               </a:spcAft>
             </a:pPr>
             <a:r>
-              <a:rPr sz="2000" b="0" i="0">
-                <a:solidFill>
-                  <a:srgbClr val="333333"/>
-                </a:solidFill>
-                <a:latin typeface="Calibri"/>
-              </a:rPr>
-              <a:t>–   En la clinica la vuelta 1 podria ser solo la ficha del paciente (requisitos de la ficha, diseño de la ficha, mockup de la ficha, revision con la clinica); la vuelta 2, la historia clinica y la busqueda; la vuelta 3, los reportes y metricas.</a:t>
+              <a:rPr sz="1900" i="0" b="0">
+                <a:solidFill>
+                  <a:srgbClr val="D4D4D4"/>
+                </a:solidFill>
+                <a:latin typeface="Consolas"/>
+              </a:rPr>
+              <a:t>  </a:t>
+            </a:r>
+            <a:r>
+              <a:rPr sz="1900" i="0" b="0">
+                <a:solidFill>
+                  <a:srgbClr val="D4D4D4"/>
+                </a:solidFill>
+                <a:latin typeface="Consolas"/>
+              </a:rPr>
+              <a:t>A</a:t>
+            </a:r>
+            <a:r>
+              <a:rPr sz="1900" i="0" b="0">
+                <a:solidFill>
+                  <a:srgbClr val="D4D4D4"/>
+                </a:solidFill>
+                <a:latin typeface="Consolas"/>
+              </a:rPr>
+              <a:t>[</a:t>
+            </a:r>
+            <a:r>
+              <a:rPr sz="1900" i="0" b="0">
+                <a:solidFill>
+                  <a:srgbClr val="D4D4D4"/>
+                </a:solidFill>
+                <a:latin typeface="Consolas"/>
+              </a:rPr>
+              <a:t>Requisitos</a:t>
+            </a:r>
+            <a:r>
+              <a:rPr sz="1900" i="0" b="0">
+                <a:solidFill>
+                  <a:srgbClr val="D4D4D4"/>
+                </a:solidFill>
+                <a:latin typeface="Consolas"/>
+              </a:rPr>
+              <a:t>] --&gt;|</a:t>
+            </a:r>
+            <a:r>
+              <a:rPr sz="1900" i="0" b="0">
+                <a:solidFill>
+                  <a:srgbClr val="D4D4D4"/>
+                </a:solidFill>
+                <a:latin typeface="Consolas"/>
+              </a:rPr>
+              <a:t>RF</a:t>
+            </a:r>
+            <a:r>
+              <a:rPr sz="1900" i="0" b="0">
+                <a:solidFill>
+                  <a:srgbClr val="D4D4D4"/>
+                </a:solidFill>
+                <a:latin typeface="Consolas"/>
+              </a:rPr>
+              <a:t>-</a:t>
+            </a:r>
+            <a:r>
+              <a:rPr sz="1900" i="0" b="0">
+                <a:solidFill>
+                  <a:srgbClr val="B5CEA8"/>
+                </a:solidFill>
+                <a:latin typeface="Consolas"/>
+              </a:rPr>
+              <a:t>01</a:t>
+            </a:r>
+            <a:r>
+              <a:rPr sz="1900" i="0" b="0">
+                <a:solidFill>
+                  <a:srgbClr val="D4D4D4"/>
+                </a:solidFill>
+                <a:latin typeface="Consolas"/>
+              </a:rPr>
+              <a:t> </a:t>
+            </a:r>
+            <a:r>
+              <a:rPr sz="1900" i="0" b="0">
+                <a:solidFill>
+                  <a:srgbClr val="D4D4D4"/>
+                </a:solidFill>
+                <a:latin typeface="Consolas"/>
+              </a:rPr>
+              <a:t>a</a:t>
+            </a:r>
+            <a:r>
+              <a:rPr sz="1900" i="0" b="0">
+                <a:solidFill>
+                  <a:srgbClr val="D4D4D4"/>
+                </a:solidFill>
+                <a:latin typeface="Consolas"/>
+              </a:rPr>
+              <a:t> </a:t>
+            </a:r>
+            <a:r>
+              <a:rPr sz="1900" i="0" b="0">
+                <a:solidFill>
+                  <a:srgbClr val="D4D4D4"/>
+                </a:solidFill>
+                <a:latin typeface="Consolas"/>
+              </a:rPr>
+              <a:t>RF</a:t>
+            </a:r>
+            <a:r>
+              <a:rPr sz="1900" i="0" b="0">
+                <a:solidFill>
+                  <a:srgbClr val="D4D4D4"/>
+                </a:solidFill>
+                <a:latin typeface="Consolas"/>
+              </a:rPr>
+              <a:t>-</a:t>
+            </a:r>
+            <a:r>
+              <a:rPr sz="1900" i="0" b="0">
+                <a:solidFill>
+                  <a:srgbClr val="B5CEA8"/>
+                </a:solidFill>
+                <a:latin typeface="Consolas"/>
+              </a:rPr>
+              <a:t>12</a:t>
+            </a:r>
+            <a:r>
+              <a:rPr sz="1900" i="0" b="0">
+                <a:solidFill>
+                  <a:srgbClr val="D4D4D4"/>
+                </a:solidFill>
+                <a:latin typeface="Consolas"/>
+              </a:rPr>
+              <a:t> </a:t>
+            </a:r>
+            <a:r>
+              <a:rPr sz="1900" i="0" b="0">
+                <a:solidFill>
+                  <a:srgbClr val="D4D4D4"/>
+                </a:solidFill>
+                <a:latin typeface="Consolas"/>
+              </a:rPr>
+              <a:t>aprobados</a:t>
+            </a:r>
+            <a:r>
+              <a:rPr sz="1900" i="0" b="0">
+                <a:solidFill>
+                  <a:srgbClr val="D4D4D4"/>
+                </a:solidFill>
+                <a:latin typeface="Consolas"/>
+              </a:rPr>
+              <a:t>| </a:t>
+            </a:r>
+            <a:r>
+              <a:rPr sz="1900" i="0" b="0">
+                <a:solidFill>
+                  <a:srgbClr val="D4D4D4"/>
+                </a:solidFill>
+                <a:latin typeface="Consolas"/>
+              </a:rPr>
+              <a:t>B</a:t>
+            </a:r>
+            <a:r>
+              <a:rPr sz="1900" i="0" b="0">
+                <a:solidFill>
+                  <a:srgbClr val="D4D4D4"/>
+                </a:solidFill>
+                <a:latin typeface="Consolas"/>
+              </a:rPr>
+              <a:t>[</a:t>
+            </a:r>
+            <a:r>
+              <a:rPr sz="1900" i="0" b="0">
+                <a:solidFill>
+                  <a:srgbClr val="D4D4D4"/>
+                </a:solidFill>
+                <a:latin typeface="Consolas"/>
+              </a:rPr>
+              <a:t>Diseno</a:t>
+            </a:r>
+            <a:r>
+              <a:rPr sz="1900" i="0" b="0">
+                <a:solidFill>
+                  <a:srgbClr val="D4D4D4"/>
+                </a:solidFill>
+                <a:latin typeface="Consolas"/>
+              </a:rPr>
+              <a:t>]</a:t>
             </a:r>
           </a:p>
           <a:p>
             <a:pPr>
               <a:spcAft>
-                <a:spcPts val="800"/>
+                <a:spcPts val="407"/>
               </a:spcAft>
             </a:pPr>
             <a:r>
-              <a:rPr sz="2000" b="0" i="0">
-                <a:solidFill>
-                  <a:srgbClr val="333333"/>
-                </a:solidFill>
-                <a:latin typeface="Calibri"/>
-              </a:rPr>
-              <a:t>–   La diferencia practica es brutal: en el recorrido unico la clinica ve algo hasta el final y un malentendido de la semana 2 se descubre en la semana 15</a:t>
+              <a:rPr sz="1900" i="0" b="0">
+                <a:solidFill>
+                  <a:srgbClr val="D4D4D4"/>
+                </a:solidFill>
+                <a:latin typeface="Consolas"/>
+              </a:rPr>
+              <a:t>  </a:t>
+            </a:r>
+            <a:r>
+              <a:rPr sz="1900" i="0" b="0">
+                <a:solidFill>
+                  <a:srgbClr val="D4D4D4"/>
+                </a:solidFill>
+                <a:latin typeface="Consolas"/>
+              </a:rPr>
+              <a:t>B</a:t>
+            </a:r>
+            <a:r>
+              <a:rPr sz="1900" i="0" b="0">
+                <a:solidFill>
+                  <a:srgbClr val="D4D4D4"/>
+                </a:solidFill>
+                <a:latin typeface="Consolas"/>
+              </a:rPr>
+              <a:t> --&gt;|</a:t>
+            </a:r>
+            <a:r>
+              <a:rPr sz="1900" i="0" b="0">
+                <a:solidFill>
+                  <a:srgbClr val="D4D4D4"/>
+                </a:solidFill>
+                <a:latin typeface="Consolas"/>
+              </a:rPr>
+              <a:t>Casos</a:t>
+            </a:r>
+            <a:r>
+              <a:rPr sz="1900" i="0" b="0">
+                <a:solidFill>
+                  <a:srgbClr val="D4D4D4"/>
+                </a:solidFill>
+                <a:latin typeface="Consolas"/>
+              </a:rPr>
+              <a:t> </a:t>
+            </a:r>
+            <a:r>
+              <a:rPr sz="1900" i="0" b="0">
+                <a:solidFill>
+                  <a:srgbClr val="D4D4D4"/>
+                </a:solidFill>
+                <a:latin typeface="Consolas"/>
+              </a:rPr>
+              <a:t>de</a:t>
+            </a:r>
+            <a:r>
+              <a:rPr sz="1900" i="0" b="0">
+                <a:solidFill>
+                  <a:srgbClr val="D4D4D4"/>
+                </a:solidFill>
+                <a:latin typeface="Consolas"/>
+              </a:rPr>
+              <a:t> </a:t>
+            </a:r>
+            <a:r>
+              <a:rPr sz="1900" i="0" b="0">
+                <a:solidFill>
+                  <a:srgbClr val="D4D4D4"/>
+                </a:solidFill>
+                <a:latin typeface="Consolas"/>
+              </a:rPr>
+              <a:t>uso</a:t>
+            </a:r>
+            <a:r>
+              <a:rPr sz="1900" i="0" b="0">
+                <a:solidFill>
+                  <a:srgbClr val="D4D4D4"/>
+                </a:solidFill>
+                <a:latin typeface="Consolas"/>
+              </a:rPr>
+              <a:t> + </a:t>
+            </a:r>
+            <a:r>
+              <a:rPr sz="1900" i="0" b="0">
+                <a:solidFill>
+                  <a:srgbClr val="D4D4D4"/>
+                </a:solidFill>
+                <a:latin typeface="Consolas"/>
+              </a:rPr>
+              <a:t>clases</a:t>
+            </a:r>
+            <a:r>
+              <a:rPr sz="1900" i="0" b="0">
+                <a:solidFill>
+                  <a:srgbClr val="D4D4D4"/>
+                </a:solidFill>
+                <a:latin typeface="Consolas"/>
+              </a:rPr>
+              <a:t> + </a:t>
+            </a:r>
+            <a:r>
+              <a:rPr sz="1900" i="0" b="0">
+                <a:solidFill>
+                  <a:srgbClr val="D4D4D4"/>
+                </a:solidFill>
+                <a:latin typeface="Consolas"/>
+              </a:rPr>
+              <a:t>mockups</a:t>
+            </a:r>
+            <a:r>
+              <a:rPr sz="1900" i="0" b="0">
+                <a:solidFill>
+                  <a:srgbClr val="D4D4D4"/>
+                </a:solidFill>
+                <a:latin typeface="Consolas"/>
+              </a:rPr>
+              <a:t>| </a:t>
+            </a:r>
+            <a:r>
+              <a:rPr sz="1900" i="0" b="0">
+                <a:solidFill>
+                  <a:srgbClr val="D4D4D4"/>
+                </a:solidFill>
+                <a:latin typeface="Consolas"/>
+              </a:rPr>
+              <a:t>C</a:t>
+            </a:r>
+            <a:r>
+              <a:rPr sz="1900" i="0" b="0">
+                <a:solidFill>
+                  <a:srgbClr val="D4D4D4"/>
+                </a:solidFill>
+                <a:latin typeface="Consolas"/>
+              </a:rPr>
+              <a:t>[</a:t>
+            </a:r>
+            <a:r>
+              <a:rPr sz="1900" i="0" b="0">
+                <a:solidFill>
+                  <a:srgbClr val="D4D4D4"/>
+                </a:solidFill>
+                <a:latin typeface="Consolas"/>
+              </a:rPr>
+              <a:t>Construccion</a:t>
+            </a:r>
+            <a:r>
+              <a:rPr sz="1900" i="0" b="0">
+                <a:solidFill>
+                  <a:srgbClr val="D4D4D4"/>
+                </a:solidFill>
+                <a:latin typeface="Consolas"/>
+              </a:rPr>
+              <a:t>]</a:t>
             </a:r>
           </a:p>
           <a:p>
             <a:pPr>
               <a:spcAft>
-                <a:spcPts val="800"/>
+                <a:spcPts val="407"/>
               </a:spcAft>
             </a:pPr>
             <a:r>
-              <a:rPr sz="2000" b="0" i="0">
-                <a:solidFill>
-                  <a:srgbClr val="333333"/>
+              <a:rPr sz="1900" i="0" b="0">
+                <a:solidFill>
+                  <a:srgbClr val="D4D4D4"/>
+                </a:solidFill>
+                <a:latin typeface="Consolas"/>
+              </a:rPr>
+              <a:t>  </a:t>
+            </a:r>
+            <a:r>
+              <a:rPr sz="1900" i="0" b="0">
+                <a:solidFill>
+                  <a:srgbClr val="D4D4D4"/>
+                </a:solidFill>
+                <a:latin typeface="Consolas"/>
+              </a:rPr>
+              <a:t>C</a:t>
+            </a:r>
+            <a:r>
+              <a:rPr sz="1900" i="0" b="0">
+                <a:solidFill>
+                  <a:srgbClr val="D4D4D4"/>
+                </a:solidFill>
+                <a:latin typeface="Consolas"/>
+              </a:rPr>
+              <a:t> --&gt;|</a:t>
+            </a:r>
+            <a:r>
+              <a:rPr sz="1900" i="0" b="0">
+                <a:solidFill>
+                  <a:srgbClr val="D4D4D4"/>
+                </a:solidFill>
+                <a:latin typeface="Consolas"/>
+              </a:rPr>
+              <a:t>Modulo</a:t>
+            </a:r>
+            <a:r>
+              <a:rPr sz="1900" i="0" b="0">
+                <a:solidFill>
+                  <a:srgbClr val="D4D4D4"/>
+                </a:solidFill>
+                <a:latin typeface="Consolas"/>
+              </a:rPr>
+              <a:t> </a:t>
+            </a:r>
+            <a:r>
+              <a:rPr sz="1900" i="0" b="0">
+                <a:solidFill>
+                  <a:srgbClr val="D4D4D4"/>
+                </a:solidFill>
+                <a:latin typeface="Consolas"/>
+              </a:rPr>
+              <a:t>ficha</a:t>
+            </a:r>
+            <a:r>
+              <a:rPr sz="1900" i="0" b="0">
+                <a:solidFill>
+                  <a:srgbClr val="D4D4D4"/>
+                </a:solidFill>
+                <a:latin typeface="Consolas"/>
+              </a:rPr>
+              <a:t> </a:t>
+            </a:r>
+            <a:r>
+              <a:rPr sz="1900" i="0" b="0">
+                <a:solidFill>
+                  <a:srgbClr val="D4D4D4"/>
+                </a:solidFill>
+                <a:latin typeface="Consolas"/>
+              </a:rPr>
+              <a:t>del</a:t>
+            </a:r>
+            <a:r>
+              <a:rPr sz="1900" i="0" b="0">
+                <a:solidFill>
+                  <a:srgbClr val="D4D4D4"/>
+                </a:solidFill>
+                <a:latin typeface="Consolas"/>
+              </a:rPr>
+              <a:t> </a:t>
+            </a:r>
+            <a:r>
+              <a:rPr sz="1900" i="0" b="0">
+                <a:solidFill>
+                  <a:srgbClr val="D4D4D4"/>
+                </a:solidFill>
+                <a:latin typeface="Consolas"/>
+              </a:rPr>
+              <a:t>paciente</a:t>
+            </a:r>
+            <a:r>
+              <a:rPr sz="1900" i="0" b="0">
+                <a:solidFill>
+                  <a:srgbClr val="D4D4D4"/>
+                </a:solidFill>
+                <a:latin typeface="Consolas"/>
+              </a:rPr>
+              <a:t>| </a:t>
+            </a:r>
+            <a:r>
+              <a:rPr sz="1900" i="0" b="0">
+                <a:solidFill>
+                  <a:srgbClr val="D4D4D4"/>
+                </a:solidFill>
+                <a:latin typeface="Consolas"/>
+              </a:rPr>
+              <a:t>D</a:t>
+            </a:r>
+            <a:r>
+              <a:rPr sz="1900" i="0" b="0">
+                <a:solidFill>
+                  <a:srgbClr val="D4D4D4"/>
+                </a:solidFill>
+                <a:latin typeface="Consolas"/>
+              </a:rPr>
+              <a:t>[</a:t>
+            </a:r>
+            <a:r>
+              <a:rPr sz="1900" i="0" b="0">
+                <a:solidFill>
+                  <a:srgbClr val="D4D4D4"/>
+                </a:solidFill>
+                <a:latin typeface="Consolas"/>
+              </a:rPr>
+              <a:t>Pruebas</a:t>
+            </a:r>
+            <a:r>
+              <a:rPr sz="1900" i="0" b="0">
+                <a:solidFill>
+                  <a:srgbClr val="D4D4D4"/>
+                </a:solidFill>
+                <a:latin typeface="Consolas"/>
+              </a:rPr>
+              <a:t>]</a:t>
+            </a:r>
+          </a:p>
+          <a:p>
+            <a:pPr>
+              <a:spcAft>
+                <a:spcPts val="407"/>
+              </a:spcAft>
+            </a:pPr>
+            <a:r>
+              <a:rPr sz="1900" i="0" b="0">
+                <a:solidFill>
+                  <a:srgbClr val="D4D4D4"/>
+                </a:solidFill>
+                <a:latin typeface="Consolas"/>
+              </a:rPr>
+              <a:t>  </a:t>
+            </a:r>
+            <a:r>
+              <a:rPr sz="1900" i="0" b="0">
+                <a:solidFill>
+                  <a:srgbClr val="D4D4D4"/>
+                </a:solidFill>
+                <a:latin typeface="Consolas"/>
+              </a:rPr>
+              <a:t>D</a:t>
+            </a:r>
+            <a:r>
+              <a:rPr sz="1900" i="0" b="0">
+                <a:solidFill>
+                  <a:srgbClr val="D4D4D4"/>
+                </a:solidFill>
+                <a:latin typeface="Consolas"/>
+              </a:rPr>
+              <a:t> --&gt;|</a:t>
+            </a:r>
+            <a:r>
+              <a:rPr sz="1900" i="0" b="0">
+                <a:solidFill>
+                  <a:srgbClr val="D4D4D4"/>
+                </a:solidFill>
+                <a:latin typeface="Consolas"/>
+              </a:rPr>
+              <a:t>Acta</a:t>
+            </a:r>
+            <a:r>
+              <a:rPr sz="1900" i="0" b="0">
+                <a:solidFill>
+                  <a:srgbClr val="D4D4D4"/>
+                </a:solidFill>
+                <a:latin typeface="Consolas"/>
+              </a:rPr>
+              <a:t> </a:t>
+            </a:r>
+            <a:r>
+              <a:rPr sz="1900" i="0" b="0">
+                <a:solidFill>
+                  <a:srgbClr val="D4D4D4"/>
+                </a:solidFill>
+                <a:latin typeface="Consolas"/>
+              </a:rPr>
+              <a:t>de</a:t>
+            </a:r>
+            <a:r>
+              <a:rPr sz="1900" i="0" b="0">
+                <a:solidFill>
+                  <a:srgbClr val="D4D4D4"/>
+                </a:solidFill>
+                <a:latin typeface="Consolas"/>
+              </a:rPr>
+              <a:t> </a:t>
+            </a:r>
+            <a:r>
+              <a:rPr sz="1900" i="0" b="0">
+                <a:solidFill>
+                  <a:srgbClr val="D4D4D4"/>
+                </a:solidFill>
+                <a:latin typeface="Consolas"/>
+              </a:rPr>
+              <a:t>aceptacion</a:t>
+            </a:r>
+            <a:r>
+              <a:rPr sz="1900" i="0" b="0">
+                <a:solidFill>
+                  <a:srgbClr val="D4D4D4"/>
+                </a:solidFill>
+                <a:latin typeface="Consolas"/>
+              </a:rPr>
+              <a:t>| </a:t>
+            </a:r>
+            <a:r>
+              <a:rPr sz="1900" i="0" b="0">
+                <a:solidFill>
+                  <a:srgbClr val="D4D4D4"/>
+                </a:solidFill>
+                <a:latin typeface="Consolas"/>
+              </a:rPr>
+              <a:t>E</a:t>
+            </a:r>
+            <a:r>
+              <a:rPr sz="1900" i="0" b="0">
+                <a:solidFill>
+                  <a:srgbClr val="D4D4D4"/>
+                </a:solidFill>
+                <a:latin typeface="Consolas"/>
+              </a:rPr>
+              <a:t>[</a:t>
+            </a:r>
+            <a:r>
+              <a:rPr sz="1900" i="0" b="0">
+                <a:solidFill>
+                  <a:srgbClr val="D4D4D4"/>
+                </a:solidFill>
+                <a:latin typeface="Consolas"/>
+              </a:rPr>
+              <a:t>Operacion</a:t>
+            </a:r>
+            <a:r>
+              <a:rPr sz="1900" i="0" b="0">
+                <a:solidFill>
+                  <a:srgbClr val="D4D4D4"/>
+                </a:solidFill>
+                <a:latin typeface="Consolas"/>
+              </a:rPr>
+              <a:t> </a:t>
+            </a:r>
+            <a:r>
+              <a:rPr sz="1900" i="0" b="0">
+                <a:solidFill>
+                  <a:srgbClr val="D4D4D4"/>
+                </a:solidFill>
+                <a:latin typeface="Consolas"/>
+              </a:rPr>
+              <a:t>y</a:t>
+            </a:r>
+            <a:r>
+              <a:rPr sz="1900" i="0" b="0">
+                <a:solidFill>
+                  <a:srgbClr val="D4D4D4"/>
+                </a:solidFill>
+                <a:latin typeface="Consolas"/>
+              </a:rPr>
+              <a:t> </a:t>
+            </a:r>
+            <a:r>
+              <a:rPr sz="1900" i="0" b="0">
+                <a:solidFill>
+                  <a:srgbClr val="D4D4D4"/>
+                </a:solidFill>
+                <a:latin typeface="Consolas"/>
+              </a:rPr>
+              <a:t>mantenimiento</a:t>
+            </a:r>
+            <a:r>
+              <a:rPr sz="1900" i="0" b="0">
+                <a:solidFill>
+                  <a:srgbClr val="D4D4D4"/>
+                </a:solidFill>
+                <a:latin typeface="Consolas"/>
+              </a:rPr>
+              <a:t>]</a:t>
+            </a:r>
+          </a:p>
+          <a:p>
+            <a:pPr>
+              <a:spcAft>
+                <a:spcPts val="407"/>
+              </a:spcAft>
+            </a:pPr>
+            <a:r>
+              <a:rPr sz="1900" i="0" b="0">
+                <a:solidFill>
+                  <a:srgbClr val="D4D4D4"/>
+                </a:solidFill>
+                <a:latin typeface="Consolas"/>
+              </a:rPr>
+              <a:t>  </a:t>
+            </a:r>
+            <a:r>
+              <a:rPr sz="1900" i="0" b="0">
+                <a:solidFill>
+                  <a:srgbClr val="D4D4D4"/>
+                </a:solidFill>
+                <a:latin typeface="Consolas"/>
+              </a:rPr>
+              <a:t>E</a:t>
+            </a:r>
+            <a:r>
+              <a:rPr sz="1900" i="0" b="0">
+                <a:solidFill>
+                  <a:srgbClr val="D4D4D4"/>
+                </a:solidFill>
+                <a:latin typeface="Consolas"/>
+              </a:rPr>
+              <a:t> -.-&gt;|</a:t>
+            </a:r>
+            <a:r>
+              <a:rPr sz="1900" i="0" b="0">
+                <a:solidFill>
+                  <a:srgbClr val="D4D4D4"/>
+                </a:solidFill>
+                <a:latin typeface="Consolas"/>
+              </a:rPr>
+              <a:t>Solicitud</a:t>
+            </a:r>
+            <a:r>
+              <a:rPr sz="1900" i="0" b="0">
+                <a:solidFill>
+                  <a:srgbClr val="D4D4D4"/>
+                </a:solidFill>
+                <a:latin typeface="Consolas"/>
+              </a:rPr>
+              <a:t>: </a:t>
+            </a:r>
+            <a:r>
+              <a:rPr sz="1900" i="0" b="0">
+                <a:solidFill>
+                  <a:srgbClr val="D4D4D4"/>
+                </a:solidFill>
+                <a:latin typeface="Consolas"/>
+              </a:rPr>
+              <a:t>vacunacion</a:t>
+            </a:r>
+            <a:r>
+              <a:rPr sz="1900" i="0" b="0">
+                <a:solidFill>
+                  <a:srgbClr val="D4D4D4"/>
+                </a:solidFill>
+                <a:latin typeface="Consolas"/>
+              </a:rPr>
+              <a:t> </a:t>
+            </a:r>
+            <a:r>
+              <a:rPr sz="1900" i="0" b="0">
+                <a:solidFill>
+                  <a:srgbClr val="D4D4D4"/>
+                </a:solidFill>
+                <a:latin typeface="Consolas"/>
+              </a:rPr>
+              <a:t>a</a:t>
+            </a:r>
+            <a:r>
+              <a:rPr sz="1900" i="0" b="0">
+                <a:solidFill>
+                  <a:srgbClr val="D4D4D4"/>
+                </a:solidFill>
+                <a:latin typeface="Consolas"/>
+              </a:rPr>
+              <a:t> </a:t>
+            </a:r>
+            <a:r>
+              <a:rPr sz="1900" i="0" b="0">
+                <a:solidFill>
+                  <a:srgbClr val="D4D4D4"/>
+                </a:solidFill>
+                <a:latin typeface="Consolas"/>
+              </a:rPr>
+              <a:t>domicilio</a:t>
+            </a:r>
+            <a:r>
+              <a:rPr sz="1900" i="0" b="0">
+                <a:solidFill>
+                  <a:srgbClr val="D4D4D4"/>
+                </a:solidFill>
+                <a:latin typeface="Consolas"/>
+              </a:rPr>
+              <a:t>| </a:t>
+            </a:r>
+            <a:r>
+              <a:rPr sz="1900" i="0" b="0">
+                <a:solidFill>
+                  <a:srgbClr val="D4D4D4"/>
+                </a:solidFill>
+                <a:latin typeface="Consolas"/>
+              </a:rPr>
+              <a:t>A</a:t>
+            </a:r>
+          </a:p>
+          <a:p>
+            <a:pPr>
+              <a:spcAft>
+                <a:spcPts val="407"/>
+              </a:spcAft>
+            </a:pPr>
+            <a:r>
+              <a:rPr sz="1900" i="1" b="0">
+                <a:solidFill>
+                  <a:srgbClr val="6A9955"/>
+                </a:solidFill>
+                <a:latin typeface="Consolas"/>
+              </a:rPr>
+              <a:t>%% Recorrido lineal  = UNA sola pasada por A..E</a:t>
+            </a:r>
+          </a:p>
+          <a:p>
+            <a:pPr>
+              <a:spcAft>
+                <a:spcPts val="407"/>
+              </a:spcAft>
+            </a:pPr>
+            <a:r>
+              <a:rPr sz="1900" i="1" b="0">
+                <a:solidFill>
+                  <a:srgbClr val="6A9955"/>
+                </a:solidFill>
+                <a:latin typeface="Consolas"/>
+              </a:rPr>
+              <a:t>%% Recorrido en ciclos = TRES pasadas por A..E</a:t>
+            </a:r>
+          </a:p>
+          <a:p>
+            <a:pPr>
+              <a:spcAft>
+                <a:spcPts val="407"/>
+              </a:spcAft>
+            </a:pPr>
+            <a:r>
+              <a:rPr sz="1900" i="1" b="0">
+                <a:solidFill>
+                  <a:srgbClr val="6A9955"/>
+                </a:solidFill>
+                <a:latin typeface="Consolas"/>
+              </a:rPr>
+              <a:t>%%   Vuelta 1: ficha del paciente</a:t>
+            </a:r>
+          </a:p>
+          <a:p>
+            <a:pPr>
+              <a:spcAft>
+                <a:spcPts val="407"/>
+              </a:spcAft>
+            </a:pPr>
+            <a:r>
+              <a:rPr sz="1900" i="1" b="0">
+                <a:solidFill>
+                  <a:srgbClr val="6A9955"/>
+                </a:solidFill>
+                <a:latin typeface="Consolas"/>
+              </a:rPr>
+              <a:t>%%   Vuelta 2: historia clinica y busqueda</a:t>
+            </a:r>
+          </a:p>
+          <a:p>
+            <a:pPr>
+              <a:spcAft>
+                <a:spcPts val="407"/>
+              </a:spcAft>
+            </a:pPr>
+            <a:r>
+              <a:rPr sz="1900" i="1" b="0">
+                <a:solidFill>
+                  <a:srgbClr val="6A9955"/>
+                </a:solidFill>
+                <a:latin typeface="Consolas"/>
+              </a:rPr>
+              <a:t>%%   Vuelta 3: reportes y metricas</a:t>
+            </a:r>
+          </a:p>
+          <a:p>
+            <a:pPr>
+              <a:spcAft>
+                <a:spcPts val="407"/>
+              </a:spcAft>
+            </a:pPr>
+            <a:r>
+              <a:rPr sz="1900" i="1" b="0">
+                <a:solidFill>
+                  <a:srgbClr val="6A9955"/>
+                </a:solidFill>
+                <a:latin typeface="Consolas"/>
+              </a:rPr>
+              <a:t>%% Las cajas nunca cambian; lo que cambia es cuantas veces se recorren</a:t>
+            </a:r>
+          </a:p>
+        </p:txBody>
+      </p:sp>
+      <p:sp>
+        <p:nvSpPr>
+          <p:cNvPr id="13" name="TextBox 12"/>
+          <p:cNvSpPr txBox="1"/>
+          <p:nvPr/>
+        </p:nvSpPr>
+        <p:spPr>
+          <a:xfrm>
+            <a:off x="457200" y="6035040"/>
+            <a:ext cx="11277295" cy="365760"/>
+          </a:xfrm>
+          <a:prstGeom prst="rect">
+            <a:avLst/>
+          </a:prstGeom>
+          <a:noFill/>
+        </p:spPr>
+        <p:txBody>
+          <a:bodyPr wrap="square">
+            <a:spAutoFit/>
+          </a:bodyPr>
+          <a:lstStyle/>
+          <a:p>
+            <a:pPr algn="ctr"/>
+            <a:r>
+              <a:rPr sz="1300" b="0" i="1">
+                <a:solidFill>
+                  <a:srgbClr val="666666"/>
                 </a:solidFill>
                 <a:latin typeface="Calibri"/>
               </a:rPr>
-              <a:t>–   En el recorrido en ciclos la clinica opina cada dos o tres semanas y el error se corrige cuando todavia es barato corregirlo.</a:t>
-            </a:r>
-          </a:p>
-        </p:txBody>
-      </p:sp>
-      <p:sp>
-        <p:nvSpPr>
-          <p:cNvPr id="6" name="TextBox 5"/>
+              <a:t>Las fases son las mismas en cualquier metodologia; lo unico que se negocia es cuantas vueltas se dan y cuanto sistema entra en cada vuelta.</a:t>
+            </a:r>
+          </a:p>
+        </p:txBody>
+      </p:sp>
+      <p:sp>
+        <p:nvSpPr>
+          <p:cNvPr id="14" name="TextBox 13"/>
           <p:cNvSpPr txBox="1"/>
           <p:nvPr/>
         </p:nvSpPr>
@@ -8542,21 +10714,173 @@
                 </a:solidFill>
                 <a:latin typeface="Calibri"/>
               </a:rPr>
-              <a:t>Hay que separar dos palabras que los equipos usan como sinonimos y no... (1/2)</a:t>
-            </a:r>
-          </a:p>
-        </p:txBody>
-      </p:sp>
-      <p:sp>
-        <p:nvSpPr>
-          <p:cNvPr id="5" name="TextBox 4"/>
+              <a:t>Qué produce cada fase</a:t>
+            </a:r>
+          </a:p>
+        </p:txBody>
+      </p:sp>
+      <p:sp>
+        <p:nvSpPr>
+          <p:cNvPr id="5" name="Rounded Rectangle 4"/>
+          <p:cNvSpPr/>
+          <p:nvPr/>
+        </p:nvSpPr>
+        <p:spPr>
+          <a:xfrm>
+            <a:off x="5803166" y="1188719"/>
+            <a:ext cx="5998464" cy="4828032"/>
+          </a:xfrm>
+          <a:prstGeom prst="roundRect">
+            <a:avLst>
+              <a:gd name="adj" fmla="val 4000"/>
+            </a:avLst>
+          </a:prstGeom>
+          <a:solidFill>
+            <a:srgbClr val="E8EEF4"/>
+          </a:solidFill>
+          <a:ln>
+            <a:noFill/>
+          </a:ln>
+        </p:spPr>
+        <p:style>
+          <a:lnRef idx="1">
+            <a:schemeClr val="accent1"/>
+          </a:lnRef>
+          <a:fillRef idx="3">
+            <a:schemeClr val="accent1"/>
+          </a:fillRef>
+          <a:effectRef idx="2">
+            <a:schemeClr val="accent1"/>
+          </a:effectRef>
+          <a:fontRef idx="minor">
+            <a:schemeClr val="lt1"/>
+          </a:fontRef>
+        </p:style>
+        <p:txBody>
+          <a:bodyPr rtlCol="0" anchor="ctr"/>
+          <a:lstStyle/>
+          <a:p>
+            <a:pPr algn="ctr"/>
+          </a:p>
+        </p:txBody>
+      </p:sp>
+      <p:pic>
+        <p:nvPicPr>
+          <p:cNvPr id="6" name="Picture 5" descr="artefactos-por-fase-paso1.png"/>
+          <p:cNvPicPr>
+            <a:picLocks noChangeAspect="1"/>
+          </p:cNvPicPr>
+          <p:nvPr/>
+        </p:nvPicPr>
+        <p:blipFill>
+          <a:blip r:embed="rId2"/>
+          <a:stretch>
+            <a:fillRect/>
+          </a:stretch>
+        </p:blipFill>
+        <p:spPr>
+          <a:xfrm>
+            <a:off x="5876318" y="1261872"/>
+            <a:ext cx="5852160" cy="4681728"/>
+          </a:xfrm>
+          <a:prstGeom prst="rect">
+            <a:avLst/>
+          </a:prstGeom>
+        </p:spPr>
+      </p:pic>
+      <p:pic>
+        <p:nvPicPr>
+          <p:cNvPr id="7" name="Picture 6" descr="artefactos-por-fase-paso2.png"/>
+          <p:cNvPicPr>
+            <a:picLocks noChangeAspect="1"/>
+          </p:cNvPicPr>
+          <p:nvPr/>
+        </p:nvPicPr>
+        <p:blipFill>
+          <a:blip r:embed="rId3"/>
+          <a:stretch>
+            <a:fillRect/>
+          </a:stretch>
+        </p:blipFill>
+        <p:spPr>
+          <a:xfrm>
+            <a:off x="5876318" y="1261872"/>
+            <a:ext cx="5852160" cy="4681728"/>
+          </a:xfrm>
+          <a:prstGeom prst="rect">
+            <a:avLst/>
+          </a:prstGeom>
+        </p:spPr>
+      </p:pic>
+      <p:pic>
+        <p:nvPicPr>
+          <p:cNvPr id="8" name="Picture 7" descr="artefactos-por-fase-paso3.png"/>
+          <p:cNvPicPr>
+            <a:picLocks noChangeAspect="1"/>
+          </p:cNvPicPr>
+          <p:nvPr/>
+        </p:nvPicPr>
+        <p:blipFill>
+          <a:blip r:embed="rId4"/>
+          <a:stretch>
+            <a:fillRect/>
+          </a:stretch>
+        </p:blipFill>
+        <p:spPr>
+          <a:xfrm>
+            <a:off x="5876318" y="1261872"/>
+            <a:ext cx="5852160" cy="4681728"/>
+          </a:xfrm>
+          <a:prstGeom prst="rect">
+            <a:avLst/>
+          </a:prstGeom>
+        </p:spPr>
+      </p:pic>
+      <p:sp>
+        <p:nvSpPr>
+          <p:cNvPr id="13" name="TextBox 12"/>
           <p:cNvSpPr txBox="1"/>
           <p:nvPr/>
         </p:nvSpPr>
         <p:spPr>
           <a:xfrm>
-            <a:off x="457200" y="1170432"/>
-            <a:ext cx="11277295" cy="5230368"/>
+            <a:off x="5870301" y="5961888"/>
+            <a:ext cx="5864193" cy="320040"/>
+          </a:xfrm>
+          <a:prstGeom prst="rect">
+            <a:avLst/>
+          </a:prstGeom>
+          <a:noFill/>
+        </p:spPr>
+        <p:txBody>
+          <a:bodyPr wrap="square">
+            <a:spAutoFit/>
+          </a:bodyPr>
+          <a:lstStyle/>
+          <a:p>
+            <a:pPr algn="ctr"/>
+            <a:r>
+              <a:rPr sz="1100" b="0" i="1">
+                <a:solidFill>
+                  <a:srgbClr val="666666"/>
+                </a:solidFill>
+                <a:latin typeface="Calibri"/>
+              </a:rPr>
+              <a:t>Clic para avanzar la animación</a:t>
+            </a:r>
+          </a:p>
+        </p:txBody>
+      </p:sp>
+      <p:sp>
+        <p:nvSpPr>
+          <p:cNvPr id="14" name="TextBox 13"/>
+          <p:cNvSpPr txBox="1"/>
+          <p:nvPr/>
+        </p:nvSpPr>
+        <p:spPr>
+          <a:xfrm>
+            <a:off x="457200" y="1353312"/>
+            <a:ext cx="5093061" cy="5047488"/>
           </a:xfrm>
           <a:prstGeom prst="rect">
             <a:avLst/>
@@ -8581,7 +10905,7 @@
                 </a:solidFill>
                 <a:latin typeface="Calibri"/>
               </a:rPr>
-              <a:t>–   Hay que separar dos palabras que los equipos usan como sinonimos y no lo son: proyecto y producto.</a:t>
+              <a:t>–   Requisitos (QUÉ): RF y RNF, glosario y reglas de negocio.</a:t>
             </a:r>
           </a:p>
           <a:p>
@@ -8597,7 +10921,7 @@
                 </a:solidFill>
                 <a:latin typeface="Calibri"/>
               </a:rPr>
-              <a:t>–   Un proyecto es un esfuerzo temporal, con inicio, fin, alcance, presupuesto y responsables; se acaba y se cierra.</a:t>
+              <a:t>–   Diseño (CÓMO): casos de uso, clases, modelo de datos, wireframes y mockups.</a:t>
             </a:r>
           </a:p>
           <a:p>
@@ -8613,7 +10937,7 @@
                 </a:solidFill>
                 <a:latin typeface="Calibri"/>
               </a:rPr>
-              <a:t>–   Un producto es el sistema vivo, que la gente usa, que tiene versiones y que sigue existiendo cuando el proyecto ya se cerro.</a:t>
+              <a:t>–   Construcción: el ejecutable. Pruebas: casos de prueba y evidencias. Mantenimiento: el sistema en uso, que se ajusta y evoluciona.</a:t>
             </a:r>
           </a:p>
           <a:p>
@@ -8629,46 +10953,14 @@
                 </a:solidFill>
                 <a:latin typeface="Calibri"/>
               </a:rPr>
-              <a:t>–   En la clinica el proyecto es 'entregar los planos y el prototipo del sistema en este semestre'</a:t>
-            </a:r>
-          </a:p>
-          <a:p>
-            <a:pPr>
-              <a:spcAft>
-                <a:spcPts val="800"/>
-              </a:spcAft>
-            </a:pPr>
-            <a:r>
-              <a:rPr sz="2000" b="0" i="0">
-                <a:solidFill>
-                  <a:srgbClr val="333333"/>
-                </a:solidFill>
-                <a:latin typeface="Calibri"/>
-              </a:rPr>
-              <a:t>–   El producto es el sistema que la clinica usaria durante los proximos años, con su version 1.0, su 1.1 cuando pidan vacunacion a domicilio y su 2.0 cuando quieran facturacion electronica.</a:t>
-            </a:r>
-          </a:p>
-          <a:p>
-            <a:pPr>
-              <a:spcAft>
-                <a:spcPts val="800"/>
-              </a:spcAft>
-            </a:pPr>
-            <a:r>
-              <a:rPr sz="2000" b="0" i="0">
-                <a:solidFill>
-                  <a:srgbClr val="333333"/>
-                </a:solidFill>
-                <a:latin typeface="Calibri"/>
-              </a:rPr>
-              <a:t>–   Esta distincion tiene una consecuencia dura: la fase mas larga y mas costosa de la vida de un sistema no es construirlo, es mantenerlo</a:t>
-            </a:r>
-          </a:p>
-        </p:txBody>
-      </p:sp>
-      <p:sp>
-        <p:nvSpPr>
-          <p:cNvPr id="6" name="TextBox 5"/>
+              <a:t>–   Esta asignatura vive en requisitos y diseño: los planos, no la obra.</a:t>
+            </a:r>
+          </a:p>
+        </p:txBody>
+      </p:sp>
+      <p:sp>
+        <p:nvSpPr>
+          <p:cNvPr id="15" name="TextBox 14"/>
           <p:cNvSpPr txBox="1"/>
           <p:nvPr/>
         </p:nvSpPr>
@@ -8706,6 +10998,142 @@
   <p:clrMapOvr>
     <a:masterClrMapping/>
   </p:clrMapOvr>
+  <p:timing>
+    <p:tnLst>
+      <p:par>
+        <p:cTn id="1" dur="indefinite" restart="never" nodeType="tmRoot">
+          <p:childTnLst>
+            <p:seq concurrent="1" nextAc="seek">
+              <p:cTn id="2" dur="indefinite" nodeType="mainSeq">
+                <p:childTnLst>
+                  <p:par>
+                    <p:cTn id="3" fill="hold">
+                      <p:stCondLst>
+                        <p:cond delay="indefinite"/>
+                      </p:stCondLst>
+                      <p:childTnLst>
+                        <p:par>
+                          <p:cTn id="4" fill="hold">
+                            <p:stCondLst>
+                              <p:cond delay="0"/>
+                            </p:stCondLst>
+                            <p:childTnLst>
+                              <p:par>
+                                <p:cTn id="5" presetID="10" presetClass="entr" presetSubtype="0" fill="hold" nodeType="clickEffect">
+                                  <p:stCondLst>
+                                    <p:cond delay="0"/>
+                                  </p:stCondLst>
+                                  <p:childTnLst>
+                                    <p:set>
+                                      <p:cBhvr>
+                                        <p:cTn id="6" dur="1" fill="hold">
+                                          <p:stCondLst>
+                                            <p:cond delay="0"/>
+                                          </p:stCondLst>
+                                        </p:cTn>
+                                        <p:tgtEl>
+                                          <p:spTgt spid="7"/>
+                                        </p:tgtEl>
+                                        <p:attrNameLst>
+                                          <p:attrName>style.visibility</p:attrName>
+                                        </p:attrNameLst>
+                                      </p:cBhvr>
+                                      <p:to>
+                                        <p:strVal val="visible"/>
+                                      </p:to>
+                                    </p:set>
+                                    <p:animEffect transition="in" filter="fade">
+                                      <p:cBhvr>
+                                        <p:cTn id="7" dur="450"/>
+                                        <p:tgtEl>
+                                          <p:spTgt spid="7"/>
+                                        </p:tgtEl>
+                                      </p:cBhvr>
+                                    </p:animEffect>
+                                  </p:childTnLst>
+                                </p:cTn>
+                              </p:par>
+                            </p:childTnLst>
+                          </p:cTn>
+                        </p:par>
+                      </p:childTnLst>
+                    </p:cTn>
+                  </p:par>
+                  <p:par>
+                    <p:cTn id="8" fill="hold">
+                      <p:stCondLst>
+                        <p:cond delay="indefinite"/>
+                      </p:stCondLst>
+                      <p:childTnLst>
+                        <p:par>
+                          <p:cTn id="9" fill="hold">
+                            <p:stCondLst>
+                              <p:cond delay="0"/>
+                            </p:stCondLst>
+                            <p:childTnLst>
+                              <p:par>
+                                <p:cTn id="10" presetID="10" presetClass="entr" presetSubtype="0" fill="hold" nodeType="clickEffect">
+                                  <p:stCondLst>
+                                    <p:cond delay="0"/>
+                                  </p:stCondLst>
+                                  <p:childTnLst>
+                                    <p:set>
+                                      <p:cBhvr>
+                                        <p:cTn id="11" dur="1" fill="hold">
+                                          <p:stCondLst>
+                                            <p:cond delay="0"/>
+                                          </p:stCondLst>
+                                        </p:cTn>
+                                        <p:tgtEl>
+                                          <p:spTgt spid="8"/>
+                                        </p:tgtEl>
+                                        <p:attrNameLst>
+                                          <p:attrName>style.visibility</p:attrName>
+                                        </p:attrNameLst>
+                                      </p:cBhvr>
+                                      <p:to>
+                                        <p:strVal val="visible"/>
+                                      </p:to>
+                                    </p:set>
+                                    <p:animEffect transition="in" filter="fade">
+                                      <p:cBhvr>
+                                        <p:cTn id="12" dur="450"/>
+                                        <p:tgtEl>
+                                          <p:spTgt spid="8"/>
+                                        </p:tgtEl>
+                                      </p:cBhvr>
+                                    </p:animEffect>
+                                  </p:childTnLst>
+                                </p:cTn>
+                              </p:par>
+                            </p:childTnLst>
+                          </p:cTn>
+                        </p:par>
+                      </p:childTnLst>
+                    </p:cTn>
+                  </p:par>
+                </p:childTnLst>
+              </p:cTn>
+              <p:prevCondLst>
+                <p:cond evt="onPrev" delay="0">
+                  <p:tgtEl>
+                    <p:sldTgt/>
+                  </p:tgtEl>
+                </p:cond>
+              </p:prevCondLst>
+              <p:nextCondLst>
+                <p:cond evt="onNext" delay="0">
+                  <p:tgtEl>
+                    <p:sldTgt/>
+                  </p:tgtEl>
+                </p:cond>
+              </p:nextCondLst>
+            </p:seq>
+          </p:childTnLst>
+        </p:cTn>
+      </p:par>
+    </p:tnLst>
+  </p:timing>
 </p:sld>
 </file>
 
@@ -8842,21 +11270,173 @@
                 </a:solidFill>
                 <a:latin typeface="Calibri"/>
               </a:rPr>
-              <a:t>Hay que separar dos palabras que los equipos usan como sinonimos y no... (2/2)</a:t>
-            </a:r>
-          </a:p>
-        </p:txBody>
-      </p:sp>
-      <p:sp>
-        <p:nvSpPr>
-          <p:cNvPr id="5" name="TextBox 4"/>
+              <a:t>Una vuelta o varias vueltas</a:t>
+            </a:r>
+          </a:p>
+        </p:txBody>
+      </p:sp>
+      <p:sp>
+        <p:nvSpPr>
+          <p:cNvPr id="5" name="Rounded Rectangle 4"/>
+          <p:cNvSpPr/>
+          <p:nvPr/>
+        </p:nvSpPr>
+        <p:spPr>
+          <a:xfrm>
+            <a:off x="5803166" y="1188719"/>
+            <a:ext cx="5998464" cy="4828032"/>
+          </a:xfrm>
+          <a:prstGeom prst="roundRect">
+            <a:avLst>
+              <a:gd name="adj" fmla="val 4000"/>
+            </a:avLst>
+          </a:prstGeom>
+          <a:solidFill>
+            <a:srgbClr val="E8EEF4"/>
+          </a:solidFill>
+          <a:ln>
+            <a:noFill/>
+          </a:ln>
+        </p:spPr>
+        <p:style>
+          <a:lnRef idx="1">
+            <a:schemeClr val="accent1"/>
+          </a:lnRef>
+          <a:fillRef idx="3">
+            <a:schemeClr val="accent1"/>
+          </a:fillRef>
+          <a:effectRef idx="2">
+            <a:schemeClr val="accent1"/>
+          </a:effectRef>
+          <a:fontRef idx="minor">
+            <a:schemeClr val="lt1"/>
+          </a:fontRef>
+        </p:style>
+        <p:txBody>
+          <a:bodyPr rtlCol="0" anchor="ctr"/>
+          <a:lstStyle/>
+          <a:p>
+            <a:pPr algn="ctr"/>
+          </a:p>
+        </p:txBody>
+      </p:sp>
+      <p:pic>
+        <p:nvPicPr>
+          <p:cNvPr id="6" name="Picture 5" descr="una-o-tres-vueltas-paso1.png"/>
+          <p:cNvPicPr>
+            <a:picLocks noChangeAspect="1"/>
+          </p:cNvPicPr>
+          <p:nvPr/>
+        </p:nvPicPr>
+        <p:blipFill>
+          <a:blip r:embed="rId2"/>
+          <a:stretch>
+            <a:fillRect/>
+          </a:stretch>
+        </p:blipFill>
+        <p:spPr>
+          <a:xfrm>
+            <a:off x="5876318" y="1261872"/>
+            <a:ext cx="5852160" cy="4681728"/>
+          </a:xfrm>
+          <a:prstGeom prst="rect">
+            <a:avLst/>
+          </a:prstGeom>
+        </p:spPr>
+      </p:pic>
+      <p:pic>
+        <p:nvPicPr>
+          <p:cNvPr id="7" name="Picture 6" descr="una-o-tres-vueltas-paso2.png"/>
+          <p:cNvPicPr>
+            <a:picLocks noChangeAspect="1"/>
+          </p:cNvPicPr>
+          <p:nvPr/>
+        </p:nvPicPr>
+        <p:blipFill>
+          <a:blip r:embed="rId3"/>
+          <a:stretch>
+            <a:fillRect/>
+          </a:stretch>
+        </p:blipFill>
+        <p:spPr>
+          <a:xfrm>
+            <a:off x="5876318" y="1261872"/>
+            <a:ext cx="5852160" cy="4681728"/>
+          </a:xfrm>
+          <a:prstGeom prst="rect">
+            <a:avLst/>
+          </a:prstGeom>
+        </p:spPr>
+      </p:pic>
+      <p:pic>
+        <p:nvPicPr>
+          <p:cNvPr id="8" name="Picture 7" descr="una-o-tres-vueltas-paso3.png"/>
+          <p:cNvPicPr>
+            <a:picLocks noChangeAspect="1"/>
+          </p:cNvPicPr>
+          <p:nvPr/>
+        </p:nvPicPr>
+        <p:blipFill>
+          <a:blip r:embed="rId4"/>
+          <a:stretch>
+            <a:fillRect/>
+          </a:stretch>
+        </p:blipFill>
+        <p:spPr>
+          <a:xfrm>
+            <a:off x="5876318" y="1261872"/>
+            <a:ext cx="5852160" cy="4681728"/>
+          </a:xfrm>
+          <a:prstGeom prst="rect">
+            <a:avLst/>
+          </a:prstGeom>
+        </p:spPr>
+      </p:pic>
+      <p:sp>
+        <p:nvSpPr>
+          <p:cNvPr id="13" name="TextBox 12"/>
           <p:cNvSpPr txBox="1"/>
           <p:nvPr/>
         </p:nvSpPr>
         <p:spPr>
           <a:xfrm>
-            <a:off x="457200" y="1170432"/>
-            <a:ext cx="11277295" cy="5230368"/>
+            <a:off x="5870301" y="5961888"/>
+            <a:ext cx="5864193" cy="320040"/>
+          </a:xfrm>
+          <a:prstGeom prst="rect">
+            <a:avLst/>
+          </a:prstGeom>
+          <a:noFill/>
+        </p:spPr>
+        <p:txBody>
+          <a:bodyPr wrap="square">
+            <a:spAutoFit/>
+          </a:bodyPr>
+          <a:lstStyle/>
+          <a:p>
+            <a:pPr algn="ctr"/>
+            <a:r>
+              <a:rPr sz="1100" b="0" i="1">
+                <a:solidFill>
+                  <a:srgbClr val="666666"/>
+                </a:solidFill>
+                <a:latin typeface="Calibri"/>
+              </a:rPr>
+              <a:t>Clic para avanzar la animación</a:t>
+            </a:r>
+          </a:p>
+        </p:txBody>
+      </p:sp>
+      <p:sp>
+        <p:nvSpPr>
+          <p:cNvPr id="14" name="TextBox 13"/>
+          <p:cNvSpPr txBox="1"/>
+          <p:nvPr/>
+        </p:nvSpPr>
+        <p:spPr>
+          <a:xfrm>
+            <a:off x="457200" y="1353312"/>
+            <a:ext cx="5093061" cy="5047488"/>
           </a:xfrm>
           <a:prstGeom prst="rect">
             <a:avLst/>
@@ -8881,7 +11461,7 @@
                 </a:solidFill>
                 <a:latin typeface="Calibri"/>
               </a:rPr>
-              <a:t>–   Y por eso el diseño y la documentacion que hacemos aqui no son un tramite, son lo que permite que otro entienda el sistema dentro de dos años.</a:t>
+              <a:t>–   La decisión no es qué fases hacer, sino cuántas veces recorrerlas y con cuánto sistema.</a:t>
             </a:r>
           </a:p>
           <a:p>
@@ -8897,7 +11477,7 @@
                 </a:solidFill>
                 <a:latin typeface="Calibri"/>
               </a:rPr>
-              <a:t>–   En la industria se estima que el mantenimiento se lleva entre el 60 y el 80 por ciento del costo total de un sistema a lo largo de su vida.</a:t>
+              <a:t>–   Una vuelta: requisitos de TODO, diseño de TODO, construcción de TODO.</a:t>
             </a:r>
           </a:p>
           <a:p>
@@ -8913,7 +11493,7 @@
                 </a:solidFill>
                 <a:latin typeface="Calibri"/>
               </a:rPr>
-              <a:t>–   En la clinica, agregar dentro de un año los recordatorios de vacunas es mantenimiento: quien lo haga necesitara saber como se relacionan mascota, dueño y cita sin leer todo el codigo.</a:t>
+              <a:t>–   En ciclos: un pedazo útil pasa por las cinco fases; vuelta 1 la ficha del paciente, vuelta 2 el historial, vuelta 3 los reportes.</a:t>
             </a:r>
           </a:p>
           <a:p>
@@ -8929,14 +11509,14 @@
                 </a:solidFill>
                 <a:latin typeface="Calibri"/>
               </a:rPr>
-              <a:t>–   El error comun es dar el proyecto por cerrado cuando se entrega la version 1.0 y no dejar escrito nada para esa segunda vida del producto.</a:t>
-            </a:r>
-          </a:p>
-        </p:txBody>
-      </p:sp>
-      <p:sp>
-        <p:nvSpPr>
-          <p:cNvPr id="6" name="TextBox 5"/>
+              <a:t>–   En una vuelta, un malentendido de la semana 2 aparece en la 15; en ciclos se corrige barato.</a:t>
+            </a:r>
+          </a:p>
+        </p:txBody>
+      </p:sp>
+      <p:sp>
+        <p:nvSpPr>
+          <p:cNvPr id="15" name="TextBox 14"/>
           <p:cNvSpPr txBox="1"/>
           <p:nvPr/>
         </p:nvSpPr>
@@ -8974,6 +11554,142 @@
   <p:clrMapOvr>
     <a:masterClrMapping/>
   </p:clrMapOvr>
+  <p:timing>
+    <p:tnLst>
+      <p:par>
+        <p:cTn id="1" dur="indefinite" restart="never" nodeType="tmRoot">
+          <p:childTnLst>
+            <p:seq concurrent="1" nextAc="seek">
+              <p:cTn id="2" dur="indefinite" nodeType="mainSeq">
+                <p:childTnLst>
+                  <p:par>
+                    <p:cTn id="3" fill="hold">
+                      <p:stCondLst>
+                        <p:cond delay="indefinite"/>
+                      </p:stCondLst>
+                      <p:childTnLst>
+                        <p:par>
+                          <p:cTn id="4" fill="hold">
+                            <p:stCondLst>
+                              <p:cond delay="0"/>
+                            </p:stCondLst>
+                            <p:childTnLst>
+                              <p:par>
+                                <p:cTn id="5" presetID="10" presetClass="entr" presetSubtype="0" fill="hold" nodeType="clickEffect">
+                                  <p:stCondLst>
+                                    <p:cond delay="0"/>
+                                  </p:stCondLst>
+                                  <p:childTnLst>
+                                    <p:set>
+                                      <p:cBhvr>
+                                        <p:cTn id="6" dur="1" fill="hold">
+                                          <p:stCondLst>
+                                            <p:cond delay="0"/>
+                                          </p:stCondLst>
+                                        </p:cTn>
+                                        <p:tgtEl>
+                                          <p:spTgt spid="7"/>
+                                        </p:tgtEl>
+                                        <p:attrNameLst>
+                                          <p:attrName>style.visibility</p:attrName>
+                                        </p:attrNameLst>
+                                      </p:cBhvr>
+                                      <p:to>
+                                        <p:strVal val="visible"/>
+                                      </p:to>
+                                    </p:set>
+                                    <p:animEffect transition="in" filter="fade">
+                                      <p:cBhvr>
+                                        <p:cTn id="7" dur="450"/>
+                                        <p:tgtEl>
+                                          <p:spTgt spid="7"/>
+                                        </p:tgtEl>
+                                      </p:cBhvr>
+                                    </p:animEffect>
+                                  </p:childTnLst>
+                                </p:cTn>
+                              </p:par>
+                            </p:childTnLst>
+                          </p:cTn>
+                        </p:par>
+                      </p:childTnLst>
+                    </p:cTn>
+                  </p:par>
+                  <p:par>
+                    <p:cTn id="8" fill="hold">
+                      <p:stCondLst>
+                        <p:cond delay="indefinite"/>
+                      </p:stCondLst>
+                      <p:childTnLst>
+                        <p:par>
+                          <p:cTn id="9" fill="hold">
+                            <p:stCondLst>
+                              <p:cond delay="0"/>
+                            </p:stCondLst>
+                            <p:childTnLst>
+                              <p:par>
+                                <p:cTn id="10" presetID="10" presetClass="entr" presetSubtype="0" fill="hold" nodeType="clickEffect">
+                                  <p:stCondLst>
+                                    <p:cond delay="0"/>
+                                  </p:stCondLst>
+                                  <p:childTnLst>
+                                    <p:set>
+                                      <p:cBhvr>
+                                        <p:cTn id="11" dur="1" fill="hold">
+                                          <p:stCondLst>
+                                            <p:cond delay="0"/>
+                                          </p:stCondLst>
+                                        </p:cTn>
+                                        <p:tgtEl>
+                                          <p:spTgt spid="8"/>
+                                        </p:tgtEl>
+                                        <p:attrNameLst>
+                                          <p:attrName>style.visibility</p:attrName>
+                                        </p:attrNameLst>
+                                      </p:cBhvr>
+                                      <p:to>
+                                        <p:strVal val="visible"/>
+                                      </p:to>
+                                    </p:set>
+                                    <p:animEffect transition="in" filter="fade">
+                                      <p:cBhvr>
+                                        <p:cTn id="12" dur="450"/>
+                                        <p:tgtEl>
+                                          <p:spTgt spid="8"/>
+                                        </p:tgtEl>
+                                      </p:cBhvr>
+                                    </p:animEffect>
+                                  </p:childTnLst>
+                                </p:cTn>
+                              </p:par>
+                            </p:childTnLst>
+                          </p:cTn>
+                        </p:par>
+                      </p:childTnLst>
+                    </p:cTn>
+                  </p:par>
+                </p:childTnLst>
+              </p:cTn>
+              <p:prevCondLst>
+                <p:cond evt="onPrev" delay="0">
+                  <p:tgtEl>
+                    <p:sldTgt/>
+                  </p:tgtEl>
+                </p:cond>
+              </p:prevCondLst>
+              <p:nextCondLst>
+                <p:cond evt="onNext" delay="0">
+                  <p:tgtEl>
+                    <p:sldTgt/>
+                  </p:tgtEl>
+                </p:cond>
+              </p:nextCondLst>
+            </p:seq>
+          </p:childTnLst>
+        </p:cTn>
+      </p:par>
+    </p:tnLst>
+  </p:timing>
 </p:sld>
 </file>
 
@@ -9110,21 +11826,271 @@
                 </a:solidFill>
                 <a:latin typeface="Calibri"/>
               </a:rPr>
-              <a:t>Como se elige el recorrido? (1/2)</a:t>
-            </a:r>
-          </a:p>
-        </p:txBody>
-      </p:sp>
-      <p:sp>
-        <p:nvSpPr>
-          <p:cNvPr id="5" name="TextBox 4"/>
+              <a:t>El mismo ciclo en tres vueltas</a:t>
+            </a:r>
+          </a:p>
+        </p:txBody>
+      </p:sp>
+      <p:sp>
+        <p:nvSpPr>
+          <p:cNvPr id="5" name="Rounded Rectangle 4"/>
+          <p:cNvSpPr/>
+          <p:nvPr/>
+        </p:nvSpPr>
+        <p:spPr>
+          <a:xfrm>
+            <a:off x="457200" y="1261872"/>
+            <a:ext cx="11277295" cy="5031343"/>
+          </a:xfrm>
+          <a:prstGeom prst="roundRect">
+            <a:avLst>
+              <a:gd name="adj" fmla="val 4000"/>
+            </a:avLst>
+          </a:prstGeom>
+          <a:solidFill>
+            <a:srgbClr val="1E1E1E"/>
+          </a:solidFill>
+          <a:ln>
+            <a:noFill/>
+          </a:ln>
+        </p:spPr>
+        <p:style>
+          <a:lnRef idx="1">
+            <a:schemeClr val="accent1"/>
+          </a:lnRef>
+          <a:fillRef idx="3">
+            <a:schemeClr val="accent1"/>
+          </a:fillRef>
+          <a:effectRef idx="2">
+            <a:schemeClr val="accent1"/>
+          </a:effectRef>
+          <a:fontRef idx="minor">
+            <a:schemeClr val="lt1"/>
+          </a:fontRef>
+        </p:style>
+        <p:txBody>
+          <a:bodyPr rtlCol="0" anchor="ctr"/>
+          <a:lstStyle/>
+          <a:p>
+            <a:pPr algn="ctr"/>
+          </a:p>
+        </p:txBody>
+      </p:sp>
+      <p:sp>
+        <p:nvSpPr>
+          <p:cNvPr id="6" name="Rectangle 5"/>
+          <p:cNvSpPr/>
+          <p:nvPr/>
+        </p:nvSpPr>
+        <p:spPr>
+          <a:xfrm>
+            <a:off x="457200" y="1261872"/>
+            <a:ext cx="11277295" cy="365760"/>
+          </a:xfrm>
+          <a:prstGeom prst="rect">
+            <a:avLst/>
+          </a:prstGeom>
+          <a:solidFill>
+            <a:srgbClr val="2D2D30"/>
+          </a:solidFill>
+          <a:ln>
+            <a:noFill/>
+          </a:ln>
+        </p:spPr>
+        <p:style>
+          <a:lnRef idx="1">
+            <a:schemeClr val="accent1"/>
+          </a:lnRef>
+          <a:fillRef idx="3">
+            <a:schemeClr val="accent1"/>
+          </a:fillRef>
+          <a:effectRef idx="2">
+            <a:schemeClr val="accent1"/>
+          </a:effectRef>
+          <a:fontRef idx="minor">
+            <a:schemeClr val="lt1"/>
+          </a:fontRef>
+        </p:style>
+        <p:txBody>
+          <a:bodyPr rtlCol="0" anchor="ctr"/>
+          <a:lstStyle/>
+          <a:p>
+            <a:pPr algn="ctr"/>
+          </a:p>
+        </p:txBody>
+      </p:sp>
+      <p:sp>
+        <p:nvSpPr>
+          <p:cNvPr id="7" name="Oval 6"/>
+          <p:cNvSpPr/>
+          <p:nvPr/>
+        </p:nvSpPr>
+        <p:spPr>
+          <a:xfrm>
+            <a:off x="658368" y="1380743"/>
+            <a:ext cx="128016" cy="128016"/>
+          </a:xfrm>
+          <a:prstGeom prst="ellipse">
+            <a:avLst/>
+          </a:prstGeom>
+          <a:solidFill>
+            <a:srgbClr val="FF5F56"/>
+          </a:solidFill>
+          <a:ln>
+            <a:noFill/>
+          </a:ln>
+        </p:spPr>
+        <p:style>
+          <a:lnRef idx="1">
+            <a:schemeClr val="accent1"/>
+          </a:lnRef>
+          <a:fillRef idx="3">
+            <a:schemeClr val="accent1"/>
+          </a:fillRef>
+          <a:effectRef idx="2">
+            <a:schemeClr val="accent1"/>
+          </a:effectRef>
+          <a:fontRef idx="minor">
+            <a:schemeClr val="lt1"/>
+          </a:fontRef>
+        </p:style>
+        <p:txBody>
+          <a:bodyPr rtlCol="0" anchor="ctr"/>
+          <a:lstStyle/>
+          <a:p>
+            <a:pPr algn="ctr"/>
+          </a:p>
+        </p:txBody>
+      </p:sp>
+      <p:sp>
+        <p:nvSpPr>
+          <p:cNvPr id="8" name="Oval 7"/>
+          <p:cNvSpPr/>
+          <p:nvPr/>
+        </p:nvSpPr>
+        <p:spPr>
+          <a:xfrm>
+            <a:off x="877824" y="1380743"/>
+            <a:ext cx="128016" cy="128016"/>
+          </a:xfrm>
+          <a:prstGeom prst="ellipse">
+            <a:avLst/>
+          </a:prstGeom>
+          <a:solidFill>
+            <a:srgbClr val="FFBD2E"/>
+          </a:solidFill>
+          <a:ln>
+            <a:noFill/>
+          </a:ln>
+        </p:spPr>
+        <p:style>
+          <a:lnRef idx="1">
+            <a:schemeClr val="accent1"/>
+          </a:lnRef>
+          <a:fillRef idx="3">
+            <a:schemeClr val="accent1"/>
+          </a:fillRef>
+          <a:effectRef idx="2">
+            <a:schemeClr val="accent1"/>
+          </a:effectRef>
+          <a:fontRef idx="minor">
+            <a:schemeClr val="lt1"/>
+          </a:fontRef>
+        </p:style>
+        <p:txBody>
+          <a:bodyPr rtlCol="0" anchor="ctr"/>
+          <a:lstStyle/>
+          <a:p>
+            <a:pPr algn="ctr"/>
+          </a:p>
+        </p:txBody>
+      </p:sp>
+      <p:sp>
+        <p:nvSpPr>
+          <p:cNvPr id="9" name="Oval 8"/>
+          <p:cNvSpPr/>
+          <p:nvPr/>
+        </p:nvSpPr>
+        <p:spPr>
+          <a:xfrm>
+            <a:off x="1097280" y="1380743"/>
+            <a:ext cx="128016" cy="128016"/>
+          </a:xfrm>
+          <a:prstGeom prst="ellipse">
+            <a:avLst/>
+          </a:prstGeom>
+          <a:solidFill>
+            <a:srgbClr val="27C93F"/>
+          </a:solidFill>
+          <a:ln>
+            <a:noFill/>
+          </a:ln>
+        </p:spPr>
+        <p:style>
+          <a:lnRef idx="1">
+            <a:schemeClr val="accent1"/>
+          </a:lnRef>
+          <a:fillRef idx="3">
+            <a:schemeClr val="accent1"/>
+          </a:fillRef>
+          <a:effectRef idx="2">
+            <a:schemeClr val="accent1"/>
+          </a:effectRef>
+          <a:fontRef idx="minor">
+            <a:schemeClr val="lt1"/>
+          </a:fontRef>
+        </p:style>
+        <p:txBody>
+          <a:bodyPr rtlCol="0" anchor="ctr"/>
+          <a:lstStyle/>
+          <a:p>
+            <a:pPr algn="ctr"/>
+          </a:p>
+        </p:txBody>
+      </p:sp>
+      <p:sp>
+        <p:nvSpPr>
+          <p:cNvPr id="10" name="TextBox 9"/>
           <p:cNvSpPr txBox="1"/>
           <p:nvPr/>
         </p:nvSpPr>
         <p:spPr>
           <a:xfrm>
-            <a:off x="457200" y="1170432"/>
-            <a:ext cx="11277295" cy="5230368"/>
+            <a:off x="1371600" y="1298448"/>
+            <a:ext cx="10180015" cy="292608"/>
+          </a:xfrm>
+          <a:prstGeom prst="rect">
+            <a:avLst/>
+          </a:prstGeom>
+          <a:noFill/>
+        </p:spPr>
+        <p:txBody>
+          <a:bodyPr wrap="square" anchor="ctr"/>
+          <a:lstStyle/>
+          <a:p>
+            <a:pPr algn="r"/>
+            <a:r>
+              <a:rPr sz="1100" b="1" i="0">
+                <a:solidFill>
+                  <a:srgbClr val="BBBBBB"/>
+                </a:solidFill>
+                <a:latin typeface="Calibri"/>
+              </a:rPr>
+              <a:t>Mermaid</a:t>
+            </a:r>
+          </a:p>
+        </p:txBody>
+      </p:sp>
+      <p:sp>
+        <p:nvSpPr>
+          <p:cNvPr id="11" name="TextBox 10"/>
+          <p:cNvSpPr txBox="1"/>
+          <p:nvPr/>
+        </p:nvSpPr>
+        <p:spPr>
+          <a:xfrm>
+            <a:off x="685800" y="1719072"/>
+            <a:ext cx="502920" cy="4436983"/>
           </a:xfrm>
           <a:prstGeom prst="rect">
             <a:avLst/>
@@ -9137,90 +12103,1440 @@
           </a:bodyPr>
           <a:lstStyle/>
           <a:p>
+            <a:pPr algn="r">
+              <a:spcAft>
+                <a:spcPts val="342"/>
+              </a:spcAft>
+            </a:pPr>
+            <a:r>
+              <a:rPr sz="1600" i="0" b="0">
+                <a:solidFill>
+                  <a:srgbClr val="858585"/>
+                </a:solidFill>
+                <a:latin typeface="Consolas"/>
+              </a:rPr>
+              <a:t>1</a:t>
+            </a:r>
+          </a:p>
+          <a:p>
+            <a:pPr algn="r">
+              <a:spcAft>
+                <a:spcPts val="342"/>
+              </a:spcAft>
+            </a:pPr>
+            <a:r>
+              <a:rPr sz="1600" i="0" b="0">
+                <a:solidFill>
+                  <a:srgbClr val="858585"/>
+                </a:solidFill>
+                <a:latin typeface="Consolas"/>
+              </a:rPr>
+              <a:t>2</a:t>
+            </a:r>
+          </a:p>
+          <a:p>
+            <a:pPr algn="r">
+              <a:spcAft>
+                <a:spcPts val="342"/>
+              </a:spcAft>
+            </a:pPr>
+            <a:r>
+              <a:rPr sz="1600" i="0" b="0">
+                <a:solidFill>
+                  <a:srgbClr val="858585"/>
+                </a:solidFill>
+                <a:latin typeface="Consolas"/>
+              </a:rPr>
+              <a:t>3</a:t>
+            </a:r>
+          </a:p>
+          <a:p>
+            <a:pPr algn="r">
+              <a:spcAft>
+                <a:spcPts val="342"/>
+              </a:spcAft>
+            </a:pPr>
+            <a:r>
+              <a:rPr sz="1600" i="0" b="0">
+                <a:solidFill>
+                  <a:srgbClr val="858585"/>
+                </a:solidFill>
+                <a:latin typeface="Consolas"/>
+              </a:rPr>
+              <a:t>4</a:t>
+            </a:r>
+          </a:p>
+          <a:p>
+            <a:pPr algn="r">
+              <a:spcAft>
+                <a:spcPts val="342"/>
+              </a:spcAft>
+            </a:pPr>
+            <a:r>
+              <a:rPr sz="1600" i="0" b="0">
+                <a:solidFill>
+                  <a:srgbClr val="858585"/>
+                </a:solidFill>
+                <a:latin typeface="Consolas"/>
+              </a:rPr>
+              <a:t>5</a:t>
+            </a:r>
+          </a:p>
+          <a:p>
+            <a:pPr algn="r">
+              <a:spcAft>
+                <a:spcPts val="342"/>
+              </a:spcAft>
+            </a:pPr>
+            <a:r>
+              <a:rPr sz="1600" i="0" b="0">
+                <a:solidFill>
+                  <a:srgbClr val="858585"/>
+                </a:solidFill>
+                <a:latin typeface="Consolas"/>
+              </a:rPr>
+              <a:t>6</a:t>
+            </a:r>
+          </a:p>
+          <a:p>
+            <a:pPr algn="r">
+              <a:spcAft>
+                <a:spcPts val="342"/>
+              </a:spcAft>
+            </a:pPr>
+            <a:r>
+              <a:rPr sz="1600" i="0" b="0">
+                <a:solidFill>
+                  <a:srgbClr val="858585"/>
+                </a:solidFill>
+                <a:latin typeface="Consolas"/>
+              </a:rPr>
+              <a:t>7</a:t>
+            </a:r>
+          </a:p>
+          <a:p>
+            <a:pPr algn="r">
+              <a:spcAft>
+                <a:spcPts val="342"/>
+              </a:spcAft>
+            </a:pPr>
+            <a:r>
+              <a:rPr sz="1600" i="0" b="0">
+                <a:solidFill>
+                  <a:srgbClr val="858585"/>
+                </a:solidFill>
+                <a:latin typeface="Consolas"/>
+              </a:rPr>
+              <a:t>8</a:t>
+            </a:r>
+          </a:p>
+          <a:p>
+            <a:pPr algn="r">
+              <a:spcAft>
+                <a:spcPts val="342"/>
+              </a:spcAft>
+            </a:pPr>
+            <a:r>
+              <a:rPr sz="1600" i="0" b="0">
+                <a:solidFill>
+                  <a:srgbClr val="858585"/>
+                </a:solidFill>
+                <a:latin typeface="Consolas"/>
+              </a:rPr>
+              <a:t>9</a:t>
+            </a:r>
+          </a:p>
+          <a:p>
+            <a:pPr algn="r">
+              <a:spcAft>
+                <a:spcPts val="342"/>
+              </a:spcAft>
+            </a:pPr>
+            <a:r>
+              <a:rPr sz="1600" i="0" b="0">
+                <a:solidFill>
+                  <a:srgbClr val="858585"/>
+                </a:solidFill>
+                <a:latin typeface="Consolas"/>
+              </a:rPr>
+              <a:t>10</a:t>
+            </a:r>
+          </a:p>
+          <a:p>
+            <a:pPr algn="r">
+              <a:spcAft>
+                <a:spcPts val="342"/>
+              </a:spcAft>
+            </a:pPr>
+            <a:r>
+              <a:rPr sz="1600" i="0" b="0">
+                <a:solidFill>
+                  <a:srgbClr val="858585"/>
+                </a:solidFill>
+                <a:latin typeface="Consolas"/>
+              </a:rPr>
+              <a:t>11</a:t>
+            </a:r>
+          </a:p>
+          <a:p>
+            <a:pPr algn="r">
+              <a:spcAft>
+                <a:spcPts val="342"/>
+              </a:spcAft>
+            </a:pPr>
+            <a:r>
+              <a:rPr sz="1600" i="0" b="0">
+                <a:solidFill>
+                  <a:srgbClr val="858585"/>
+                </a:solidFill>
+                <a:latin typeface="Consolas"/>
+              </a:rPr>
+              <a:t>12</a:t>
+            </a:r>
+          </a:p>
+          <a:p>
+            <a:pPr algn="r">
+              <a:spcAft>
+                <a:spcPts val="342"/>
+              </a:spcAft>
+            </a:pPr>
+            <a:r>
+              <a:rPr sz="1600" i="0" b="0">
+                <a:solidFill>
+                  <a:srgbClr val="858585"/>
+                </a:solidFill>
+                <a:latin typeface="Consolas"/>
+              </a:rPr>
+              <a:t>13</a:t>
+            </a:r>
+          </a:p>
+          <a:p>
+            <a:pPr algn="r">
+              <a:spcAft>
+                <a:spcPts val="342"/>
+              </a:spcAft>
+            </a:pPr>
+            <a:r>
+              <a:rPr sz="1600" i="0" b="0">
+                <a:solidFill>
+                  <a:srgbClr val="858585"/>
+                </a:solidFill>
+                <a:latin typeface="Consolas"/>
+              </a:rPr>
+              <a:t>14</a:t>
+            </a:r>
+          </a:p>
+          <a:p>
+            <a:pPr algn="r">
+              <a:spcAft>
+                <a:spcPts val="342"/>
+              </a:spcAft>
+            </a:pPr>
+            <a:r>
+              <a:rPr sz="1600" i="0" b="0">
+                <a:solidFill>
+                  <a:srgbClr val="858585"/>
+                </a:solidFill>
+                <a:latin typeface="Consolas"/>
+              </a:rPr>
+              <a:t>15</a:t>
+            </a:r>
+          </a:p>
+        </p:txBody>
+      </p:sp>
+      <p:sp>
+        <p:nvSpPr>
+          <p:cNvPr id="12" name="TextBox 11"/>
+          <p:cNvSpPr txBox="1"/>
+          <p:nvPr/>
+        </p:nvSpPr>
+        <p:spPr>
+          <a:xfrm>
+            <a:off x="1188720" y="1719072"/>
+            <a:ext cx="10271455" cy="4436983"/>
+          </a:xfrm>
+          <a:prstGeom prst="rect">
+            <a:avLst/>
+          </a:prstGeom>
+          <a:noFill/>
+        </p:spPr>
+        <p:txBody>
+          <a:bodyPr wrap="square">
+            <a:spAutoFit/>
+          </a:bodyPr>
+          <a:lstStyle/>
+          <a:p>
             <a:pPr>
               <a:spcAft>
-                <a:spcPts val="800"/>
+                <a:spcPts val="342"/>
               </a:spcAft>
             </a:pPr>
             <a:r>
-              <a:rPr sz="2000" b="0" i="0">
-                <a:solidFill>
-                  <a:srgbClr val="333333"/>
-                </a:solidFill>
-                <a:latin typeface="Calibri"/>
-              </a:rPr>
-              <a:t>–   Si los requisitos son estables, el contrato es cerrado y el sistema es critico, conviene un recorrido lineal con aprobaciones formales.</a:t>
+              <a:rPr sz="1600" i="0" b="0">
+                <a:solidFill>
+                  <a:srgbClr val="D4D4D4"/>
+                </a:solidFill>
+                <a:latin typeface="Consolas"/>
+              </a:rPr>
+              <a:t>flowchart</a:t>
+            </a:r>
+            <a:r>
+              <a:rPr sz="1600" i="0" b="0">
+                <a:solidFill>
+                  <a:srgbClr val="D4D4D4"/>
+                </a:solidFill>
+                <a:latin typeface="Consolas"/>
+              </a:rPr>
+              <a:t> </a:t>
+            </a:r>
+            <a:r>
+              <a:rPr sz="1600" i="0" b="0">
+                <a:solidFill>
+                  <a:srgbClr val="D4D4D4"/>
+                </a:solidFill>
+                <a:latin typeface="Consolas"/>
+              </a:rPr>
+              <a:t>TB</a:t>
             </a:r>
           </a:p>
           <a:p>
             <a:pPr>
               <a:spcAft>
-                <a:spcPts val="800"/>
+                <a:spcPts val="342"/>
               </a:spcAft>
             </a:pPr>
             <a:r>
-              <a:rPr sz="2000" b="0" i="0">
-                <a:solidFill>
-                  <a:srgbClr val="333333"/>
-                </a:solidFill>
-                <a:latin typeface="Calibri"/>
-              </a:rPr>
-              <a:t>–   Si el dominio es nuevo, el cliente descubre lo que quiere cuando lo ve, y hay margen para ajustar, conviene un recorrido en ciclos.</a:t>
+              <a:rPr sz="1600" i="0" b="0">
+                <a:solidFill>
+                  <a:srgbClr val="D4D4D4"/>
+                </a:solidFill>
+                <a:latin typeface="Consolas"/>
+              </a:rPr>
+              <a:t>  </a:t>
+            </a:r>
+            <a:r>
+              <a:rPr sz="1600" i="0" b="0">
+                <a:solidFill>
+                  <a:srgbClr val="D4D4D4"/>
+                </a:solidFill>
+                <a:latin typeface="Consolas"/>
+              </a:rPr>
+              <a:t>subgraph</a:t>
+            </a:r>
+            <a:r>
+              <a:rPr sz="1600" i="0" b="0">
+                <a:solidFill>
+                  <a:srgbClr val="D4D4D4"/>
+                </a:solidFill>
+                <a:latin typeface="Consolas"/>
+              </a:rPr>
+              <a:t> </a:t>
+            </a:r>
+            <a:r>
+              <a:rPr sz="1600" i="0" b="0">
+                <a:solidFill>
+                  <a:srgbClr val="D4D4D4"/>
+                </a:solidFill>
+                <a:latin typeface="Consolas"/>
+              </a:rPr>
+              <a:t>v1</a:t>
+            </a:r>
+            <a:r>
+              <a:rPr sz="1600" i="0" b="0">
+                <a:solidFill>
+                  <a:srgbClr val="D4D4D4"/>
+                </a:solidFill>
+                <a:latin typeface="Consolas"/>
+              </a:rPr>
+              <a:t>[</a:t>
+            </a:r>
+            <a:r>
+              <a:rPr sz="1600" i="0" b="0">
+                <a:solidFill>
+                  <a:srgbClr val="D4D4D4"/>
+                </a:solidFill>
+                <a:latin typeface="Consolas"/>
+              </a:rPr>
+              <a:t>Vuelta</a:t>
+            </a:r>
+            <a:r>
+              <a:rPr sz="1600" i="0" b="0">
+                <a:solidFill>
+                  <a:srgbClr val="D4D4D4"/>
+                </a:solidFill>
+                <a:latin typeface="Consolas"/>
+              </a:rPr>
+              <a:t> </a:t>
+            </a:r>
+            <a:r>
+              <a:rPr sz="1600" i="0" b="0">
+                <a:solidFill>
+                  <a:srgbClr val="B5CEA8"/>
+                </a:solidFill>
+                <a:latin typeface="Consolas"/>
+              </a:rPr>
+              <a:t>1</a:t>
+            </a:r>
+            <a:r>
+              <a:rPr sz="1600" i="0" b="0">
+                <a:solidFill>
+                  <a:srgbClr val="D4D4D4"/>
+                </a:solidFill>
+                <a:latin typeface="Consolas"/>
+              </a:rPr>
+              <a:t> - </a:t>
+            </a:r>
+            <a:r>
+              <a:rPr sz="1600" i="0" b="0">
+                <a:solidFill>
+                  <a:srgbClr val="D4D4D4"/>
+                </a:solidFill>
+                <a:latin typeface="Consolas"/>
+              </a:rPr>
+              <a:t>ficha</a:t>
+            </a:r>
+            <a:r>
+              <a:rPr sz="1600" i="0" b="0">
+                <a:solidFill>
+                  <a:srgbClr val="D4D4D4"/>
+                </a:solidFill>
+                <a:latin typeface="Consolas"/>
+              </a:rPr>
+              <a:t> </a:t>
+            </a:r>
+            <a:r>
+              <a:rPr sz="1600" i="0" b="0">
+                <a:solidFill>
+                  <a:srgbClr val="D4D4D4"/>
+                </a:solidFill>
+                <a:latin typeface="Consolas"/>
+              </a:rPr>
+              <a:t>del</a:t>
+            </a:r>
+            <a:r>
+              <a:rPr sz="1600" i="0" b="0">
+                <a:solidFill>
+                  <a:srgbClr val="D4D4D4"/>
+                </a:solidFill>
+                <a:latin typeface="Consolas"/>
+              </a:rPr>
+              <a:t> </a:t>
+            </a:r>
+            <a:r>
+              <a:rPr sz="1600" i="0" b="0">
+                <a:solidFill>
+                  <a:srgbClr val="D4D4D4"/>
+                </a:solidFill>
+                <a:latin typeface="Consolas"/>
+              </a:rPr>
+              <a:t>paciente</a:t>
+            </a:r>
+            <a:r>
+              <a:rPr sz="1600" i="0" b="0">
+                <a:solidFill>
+                  <a:srgbClr val="D4D4D4"/>
+                </a:solidFill>
+                <a:latin typeface="Consolas"/>
+              </a:rPr>
+              <a:t>]</a:t>
             </a:r>
           </a:p>
           <a:p>
             <a:pPr>
               <a:spcAft>
-                <a:spcPts val="800"/>
+                <a:spcPts val="342"/>
               </a:spcAft>
             </a:pPr>
             <a:r>
-              <a:rPr sz="2000" b="0" i="0">
-                <a:solidFill>
-                  <a:srgbClr val="333333"/>
-                </a:solidFill>
-                <a:latin typeface="Calibri"/>
-              </a:rPr>
-              <a:t>–   En la clinica aplican los dos matices: los datos basicos de un paciente (nombre, especie, raza, propietario) son estables y se pueden cerrar temprano</a:t>
+              <a:rPr sz="1600" i="0" b="0">
+                <a:solidFill>
+                  <a:srgbClr val="D4D4D4"/>
+                </a:solidFill>
+                <a:latin typeface="Consolas"/>
+              </a:rPr>
+              <a:t>    </a:t>
+            </a:r>
+            <a:r>
+              <a:rPr sz="1600" i="0" b="0">
+                <a:solidFill>
+                  <a:srgbClr val="D4D4D4"/>
+                </a:solidFill>
+                <a:latin typeface="Consolas"/>
+              </a:rPr>
+              <a:t>r1</a:t>
+            </a:r>
+            <a:r>
+              <a:rPr sz="1600" i="0" b="0">
+                <a:solidFill>
+                  <a:srgbClr val="D4D4D4"/>
+                </a:solidFill>
+                <a:latin typeface="Consolas"/>
+              </a:rPr>
+              <a:t>[</a:t>
+            </a:r>
+            <a:r>
+              <a:rPr sz="1600" i="0" b="0">
+                <a:solidFill>
+                  <a:srgbClr val="D4D4D4"/>
+                </a:solidFill>
+                <a:latin typeface="Consolas"/>
+              </a:rPr>
+              <a:t>Requisitos</a:t>
+            </a:r>
+            <a:r>
+              <a:rPr sz="1600" i="0" b="0">
+                <a:solidFill>
+                  <a:srgbClr val="D4D4D4"/>
+                </a:solidFill>
+                <a:latin typeface="Consolas"/>
+              </a:rPr>
+              <a:t>] --&gt; </a:t>
+            </a:r>
+            <a:r>
+              <a:rPr sz="1600" i="0" b="0">
+                <a:solidFill>
+                  <a:srgbClr val="D4D4D4"/>
+                </a:solidFill>
+                <a:latin typeface="Consolas"/>
+              </a:rPr>
+              <a:t>d1</a:t>
+            </a:r>
+            <a:r>
+              <a:rPr sz="1600" i="0" b="0">
+                <a:solidFill>
+                  <a:srgbClr val="D4D4D4"/>
+                </a:solidFill>
+                <a:latin typeface="Consolas"/>
+              </a:rPr>
+              <a:t>[</a:t>
+            </a:r>
+            <a:r>
+              <a:rPr sz="1600" i="0" b="0">
+                <a:solidFill>
+                  <a:srgbClr val="D4D4D4"/>
+                </a:solidFill>
+                <a:latin typeface="Consolas"/>
+              </a:rPr>
+              <a:t>Diseno</a:t>
+            </a:r>
+            <a:r>
+              <a:rPr sz="1600" i="0" b="0">
+                <a:solidFill>
+                  <a:srgbClr val="D4D4D4"/>
+                </a:solidFill>
+                <a:latin typeface="Consolas"/>
+              </a:rPr>
+              <a:t>] --&gt; </a:t>
+            </a:r>
+            <a:r>
+              <a:rPr sz="1600" i="0" b="0">
+                <a:solidFill>
+                  <a:srgbClr val="D4D4D4"/>
+                </a:solidFill>
+                <a:latin typeface="Consolas"/>
+              </a:rPr>
+              <a:t>c1</a:t>
+            </a:r>
+            <a:r>
+              <a:rPr sz="1600" i="0" b="0">
+                <a:solidFill>
+                  <a:srgbClr val="D4D4D4"/>
+                </a:solidFill>
+                <a:latin typeface="Consolas"/>
+              </a:rPr>
+              <a:t>[</a:t>
+            </a:r>
+            <a:r>
+              <a:rPr sz="1600" i="0" b="0">
+                <a:solidFill>
+                  <a:srgbClr val="D4D4D4"/>
+                </a:solidFill>
+                <a:latin typeface="Consolas"/>
+              </a:rPr>
+              <a:t>Construccion</a:t>
+            </a:r>
+            <a:r>
+              <a:rPr sz="1600" i="0" b="0">
+                <a:solidFill>
+                  <a:srgbClr val="D4D4D4"/>
+                </a:solidFill>
+                <a:latin typeface="Consolas"/>
+              </a:rPr>
+              <a:t>] --&gt; </a:t>
+            </a:r>
+            <a:r>
+              <a:rPr sz="1600" i="0" b="0">
+                <a:solidFill>
+                  <a:srgbClr val="D4D4D4"/>
+                </a:solidFill>
+                <a:latin typeface="Consolas"/>
+              </a:rPr>
+              <a:t>p1</a:t>
+            </a:r>
+            <a:r>
+              <a:rPr sz="1600" i="0" b="0">
+                <a:solidFill>
+                  <a:srgbClr val="D4D4D4"/>
+                </a:solidFill>
+                <a:latin typeface="Consolas"/>
+              </a:rPr>
+              <a:t>[</a:t>
+            </a:r>
+            <a:r>
+              <a:rPr sz="1600" i="0" b="0">
+                <a:solidFill>
+                  <a:srgbClr val="D4D4D4"/>
+                </a:solidFill>
+                <a:latin typeface="Consolas"/>
+              </a:rPr>
+              <a:t>Pruebas</a:t>
+            </a:r>
+            <a:r>
+              <a:rPr sz="1600" i="0" b="0">
+                <a:solidFill>
+                  <a:srgbClr val="D4D4D4"/>
+                </a:solidFill>
+                <a:latin typeface="Consolas"/>
+              </a:rPr>
+              <a:t>]</a:t>
             </a:r>
           </a:p>
           <a:p>
             <a:pPr>
               <a:spcAft>
-                <a:spcPts val="800"/>
+                <a:spcPts val="342"/>
               </a:spcAft>
             </a:pPr>
             <a:r>
-              <a:rPr sz="2000" b="0" i="0">
-                <a:solidFill>
-                  <a:srgbClr val="333333"/>
-                </a:solidFill>
-                <a:latin typeface="Calibri"/>
-              </a:rPr>
-              <a:t>–   El tablero de metricas es incierto porque la clinica nunca ha visto uno y va a cambiar de opinion apenas lo vea.</a:t>
+              <a:rPr sz="1600" i="0" b="0">
+                <a:solidFill>
+                  <a:srgbClr val="D4D4D4"/>
+                </a:solidFill>
+                <a:latin typeface="Consolas"/>
+              </a:rPr>
+              <a:t>  </a:t>
+            </a:r>
+            <a:r>
+              <a:rPr sz="1600" i="0" b="0">
+                <a:solidFill>
+                  <a:srgbClr val="D4D4D4"/>
+                </a:solidFill>
+                <a:latin typeface="Consolas"/>
+              </a:rPr>
+              <a:t>end</a:t>
             </a:r>
           </a:p>
           <a:p>
             <a:pPr>
               <a:spcAft>
-                <a:spcPts val="800"/>
+                <a:spcPts val="342"/>
               </a:spcAft>
             </a:pPr>
             <a:r>
-              <a:rPr sz="2000" b="0" i="0">
-                <a:solidFill>
-                  <a:srgbClr val="333333"/>
-                </a:solidFill>
-                <a:latin typeface="Calibri"/>
-              </a:rPr>
-              <a:t>–   Ademas, el ciclo elegido debe caber en la realidad del curso: el estudiante que solo cursa Seminario cierra con documento de diseño y prototipo navegable</a:t>
-            </a:r>
-          </a:p>
-        </p:txBody>
-      </p:sp>
-      <p:sp>
-        <p:nvSpPr>
-          <p:cNvPr id="6" name="TextBox 5"/>
+              <a:rPr sz="1600" i="0" b="0">
+                <a:solidFill>
+                  <a:srgbClr val="D4D4D4"/>
+                </a:solidFill>
+                <a:latin typeface="Consolas"/>
+              </a:rPr>
+              <a:t>  </a:t>
+            </a:r>
+            <a:r>
+              <a:rPr sz="1600" i="0" b="0">
+                <a:solidFill>
+                  <a:srgbClr val="D4D4D4"/>
+                </a:solidFill>
+                <a:latin typeface="Consolas"/>
+              </a:rPr>
+              <a:t>subgraph</a:t>
+            </a:r>
+            <a:r>
+              <a:rPr sz="1600" i="0" b="0">
+                <a:solidFill>
+                  <a:srgbClr val="D4D4D4"/>
+                </a:solidFill>
+                <a:latin typeface="Consolas"/>
+              </a:rPr>
+              <a:t> </a:t>
+            </a:r>
+            <a:r>
+              <a:rPr sz="1600" i="0" b="0">
+                <a:solidFill>
+                  <a:srgbClr val="D4D4D4"/>
+                </a:solidFill>
+                <a:latin typeface="Consolas"/>
+              </a:rPr>
+              <a:t>v2</a:t>
+            </a:r>
+            <a:r>
+              <a:rPr sz="1600" i="0" b="0">
+                <a:solidFill>
+                  <a:srgbClr val="D4D4D4"/>
+                </a:solidFill>
+                <a:latin typeface="Consolas"/>
+              </a:rPr>
+              <a:t>[</a:t>
+            </a:r>
+            <a:r>
+              <a:rPr sz="1600" i="0" b="0">
+                <a:solidFill>
+                  <a:srgbClr val="D4D4D4"/>
+                </a:solidFill>
+                <a:latin typeface="Consolas"/>
+              </a:rPr>
+              <a:t>Vuelta</a:t>
+            </a:r>
+            <a:r>
+              <a:rPr sz="1600" i="0" b="0">
+                <a:solidFill>
+                  <a:srgbClr val="D4D4D4"/>
+                </a:solidFill>
+                <a:latin typeface="Consolas"/>
+              </a:rPr>
+              <a:t> </a:t>
+            </a:r>
+            <a:r>
+              <a:rPr sz="1600" i="0" b="0">
+                <a:solidFill>
+                  <a:srgbClr val="B5CEA8"/>
+                </a:solidFill>
+                <a:latin typeface="Consolas"/>
+              </a:rPr>
+              <a:t>2</a:t>
+            </a:r>
+            <a:r>
+              <a:rPr sz="1600" i="0" b="0">
+                <a:solidFill>
+                  <a:srgbClr val="D4D4D4"/>
+                </a:solidFill>
+                <a:latin typeface="Consolas"/>
+              </a:rPr>
+              <a:t> - </a:t>
+            </a:r>
+            <a:r>
+              <a:rPr sz="1600" i="0" b="0">
+                <a:solidFill>
+                  <a:srgbClr val="D4D4D4"/>
+                </a:solidFill>
+                <a:latin typeface="Consolas"/>
+              </a:rPr>
+              <a:t>historia</a:t>
+            </a:r>
+            <a:r>
+              <a:rPr sz="1600" i="0" b="0">
+                <a:solidFill>
+                  <a:srgbClr val="D4D4D4"/>
+                </a:solidFill>
+                <a:latin typeface="Consolas"/>
+              </a:rPr>
+              <a:t> </a:t>
+            </a:r>
+            <a:r>
+              <a:rPr sz="1600" i="0" b="0">
+                <a:solidFill>
+                  <a:srgbClr val="D4D4D4"/>
+                </a:solidFill>
+                <a:latin typeface="Consolas"/>
+              </a:rPr>
+              <a:t>clinica</a:t>
+            </a:r>
+            <a:r>
+              <a:rPr sz="1600" i="0" b="0">
+                <a:solidFill>
+                  <a:srgbClr val="D4D4D4"/>
+                </a:solidFill>
+                <a:latin typeface="Consolas"/>
+              </a:rPr>
+              <a:t> </a:t>
+            </a:r>
+            <a:r>
+              <a:rPr sz="1600" i="0" b="0">
+                <a:solidFill>
+                  <a:srgbClr val="D4D4D4"/>
+                </a:solidFill>
+                <a:latin typeface="Consolas"/>
+              </a:rPr>
+              <a:t>y</a:t>
+            </a:r>
+            <a:r>
+              <a:rPr sz="1600" i="0" b="0">
+                <a:solidFill>
+                  <a:srgbClr val="D4D4D4"/>
+                </a:solidFill>
+                <a:latin typeface="Consolas"/>
+              </a:rPr>
+              <a:t> </a:t>
+            </a:r>
+            <a:r>
+              <a:rPr sz="1600" i="0" b="0">
+                <a:solidFill>
+                  <a:srgbClr val="D4D4D4"/>
+                </a:solidFill>
+                <a:latin typeface="Consolas"/>
+              </a:rPr>
+              <a:t>busqueda</a:t>
+            </a:r>
+            <a:r>
+              <a:rPr sz="1600" i="0" b="0">
+                <a:solidFill>
+                  <a:srgbClr val="D4D4D4"/>
+                </a:solidFill>
+                <a:latin typeface="Consolas"/>
+              </a:rPr>
+              <a:t>]</a:t>
+            </a:r>
+          </a:p>
+          <a:p>
+            <a:pPr>
+              <a:spcAft>
+                <a:spcPts val="342"/>
+              </a:spcAft>
+            </a:pPr>
+            <a:r>
+              <a:rPr sz="1600" i="0" b="0">
+                <a:solidFill>
+                  <a:srgbClr val="D4D4D4"/>
+                </a:solidFill>
+                <a:latin typeface="Consolas"/>
+              </a:rPr>
+              <a:t>    </a:t>
+            </a:r>
+            <a:r>
+              <a:rPr sz="1600" i="0" b="0">
+                <a:solidFill>
+                  <a:srgbClr val="D4D4D4"/>
+                </a:solidFill>
+                <a:latin typeface="Consolas"/>
+              </a:rPr>
+              <a:t>r2</a:t>
+            </a:r>
+            <a:r>
+              <a:rPr sz="1600" i="0" b="0">
+                <a:solidFill>
+                  <a:srgbClr val="D4D4D4"/>
+                </a:solidFill>
+                <a:latin typeface="Consolas"/>
+              </a:rPr>
+              <a:t>[</a:t>
+            </a:r>
+            <a:r>
+              <a:rPr sz="1600" i="0" b="0">
+                <a:solidFill>
+                  <a:srgbClr val="D4D4D4"/>
+                </a:solidFill>
+                <a:latin typeface="Consolas"/>
+              </a:rPr>
+              <a:t>Requisitos</a:t>
+            </a:r>
+            <a:r>
+              <a:rPr sz="1600" i="0" b="0">
+                <a:solidFill>
+                  <a:srgbClr val="D4D4D4"/>
+                </a:solidFill>
+                <a:latin typeface="Consolas"/>
+              </a:rPr>
+              <a:t>] --&gt; </a:t>
+            </a:r>
+            <a:r>
+              <a:rPr sz="1600" i="0" b="0">
+                <a:solidFill>
+                  <a:srgbClr val="D4D4D4"/>
+                </a:solidFill>
+                <a:latin typeface="Consolas"/>
+              </a:rPr>
+              <a:t>d2</a:t>
+            </a:r>
+            <a:r>
+              <a:rPr sz="1600" i="0" b="0">
+                <a:solidFill>
+                  <a:srgbClr val="D4D4D4"/>
+                </a:solidFill>
+                <a:latin typeface="Consolas"/>
+              </a:rPr>
+              <a:t>[</a:t>
+            </a:r>
+            <a:r>
+              <a:rPr sz="1600" i="0" b="0">
+                <a:solidFill>
+                  <a:srgbClr val="D4D4D4"/>
+                </a:solidFill>
+                <a:latin typeface="Consolas"/>
+              </a:rPr>
+              <a:t>Diseno</a:t>
+            </a:r>
+            <a:r>
+              <a:rPr sz="1600" i="0" b="0">
+                <a:solidFill>
+                  <a:srgbClr val="D4D4D4"/>
+                </a:solidFill>
+                <a:latin typeface="Consolas"/>
+              </a:rPr>
+              <a:t>] --&gt; </a:t>
+            </a:r>
+            <a:r>
+              <a:rPr sz="1600" i="0" b="0">
+                <a:solidFill>
+                  <a:srgbClr val="D4D4D4"/>
+                </a:solidFill>
+                <a:latin typeface="Consolas"/>
+              </a:rPr>
+              <a:t>c2</a:t>
+            </a:r>
+            <a:r>
+              <a:rPr sz="1600" i="0" b="0">
+                <a:solidFill>
+                  <a:srgbClr val="D4D4D4"/>
+                </a:solidFill>
+                <a:latin typeface="Consolas"/>
+              </a:rPr>
+              <a:t>[</a:t>
+            </a:r>
+            <a:r>
+              <a:rPr sz="1600" i="0" b="0">
+                <a:solidFill>
+                  <a:srgbClr val="D4D4D4"/>
+                </a:solidFill>
+                <a:latin typeface="Consolas"/>
+              </a:rPr>
+              <a:t>Construccion</a:t>
+            </a:r>
+            <a:r>
+              <a:rPr sz="1600" i="0" b="0">
+                <a:solidFill>
+                  <a:srgbClr val="D4D4D4"/>
+                </a:solidFill>
+                <a:latin typeface="Consolas"/>
+              </a:rPr>
+              <a:t>] --&gt; </a:t>
+            </a:r>
+            <a:r>
+              <a:rPr sz="1600" i="0" b="0">
+                <a:solidFill>
+                  <a:srgbClr val="D4D4D4"/>
+                </a:solidFill>
+                <a:latin typeface="Consolas"/>
+              </a:rPr>
+              <a:t>p2</a:t>
+            </a:r>
+            <a:r>
+              <a:rPr sz="1600" i="0" b="0">
+                <a:solidFill>
+                  <a:srgbClr val="D4D4D4"/>
+                </a:solidFill>
+                <a:latin typeface="Consolas"/>
+              </a:rPr>
+              <a:t>[</a:t>
+            </a:r>
+            <a:r>
+              <a:rPr sz="1600" i="0" b="0">
+                <a:solidFill>
+                  <a:srgbClr val="D4D4D4"/>
+                </a:solidFill>
+                <a:latin typeface="Consolas"/>
+              </a:rPr>
+              <a:t>Pruebas</a:t>
+            </a:r>
+            <a:r>
+              <a:rPr sz="1600" i="0" b="0">
+                <a:solidFill>
+                  <a:srgbClr val="D4D4D4"/>
+                </a:solidFill>
+                <a:latin typeface="Consolas"/>
+              </a:rPr>
+              <a:t>]</a:t>
+            </a:r>
+          </a:p>
+          <a:p>
+            <a:pPr>
+              <a:spcAft>
+                <a:spcPts val="342"/>
+              </a:spcAft>
+            </a:pPr>
+            <a:r>
+              <a:rPr sz="1600" i="0" b="0">
+                <a:solidFill>
+                  <a:srgbClr val="D4D4D4"/>
+                </a:solidFill>
+                <a:latin typeface="Consolas"/>
+              </a:rPr>
+              <a:t>  </a:t>
+            </a:r>
+            <a:r>
+              <a:rPr sz="1600" i="0" b="0">
+                <a:solidFill>
+                  <a:srgbClr val="D4D4D4"/>
+                </a:solidFill>
+                <a:latin typeface="Consolas"/>
+              </a:rPr>
+              <a:t>end</a:t>
+            </a:r>
+          </a:p>
+          <a:p>
+            <a:pPr>
+              <a:spcAft>
+                <a:spcPts val="342"/>
+              </a:spcAft>
+            </a:pPr>
+            <a:r>
+              <a:rPr sz="1600" i="0" b="0">
+                <a:solidFill>
+                  <a:srgbClr val="D4D4D4"/>
+                </a:solidFill>
+                <a:latin typeface="Consolas"/>
+              </a:rPr>
+              <a:t>  </a:t>
+            </a:r>
+            <a:r>
+              <a:rPr sz="1600" i="0" b="0">
+                <a:solidFill>
+                  <a:srgbClr val="D4D4D4"/>
+                </a:solidFill>
+                <a:latin typeface="Consolas"/>
+              </a:rPr>
+              <a:t>subgraph</a:t>
+            </a:r>
+            <a:r>
+              <a:rPr sz="1600" i="0" b="0">
+                <a:solidFill>
+                  <a:srgbClr val="D4D4D4"/>
+                </a:solidFill>
+                <a:latin typeface="Consolas"/>
+              </a:rPr>
+              <a:t> </a:t>
+            </a:r>
+            <a:r>
+              <a:rPr sz="1600" i="0" b="0">
+                <a:solidFill>
+                  <a:srgbClr val="D4D4D4"/>
+                </a:solidFill>
+                <a:latin typeface="Consolas"/>
+              </a:rPr>
+              <a:t>v3</a:t>
+            </a:r>
+            <a:r>
+              <a:rPr sz="1600" i="0" b="0">
+                <a:solidFill>
+                  <a:srgbClr val="D4D4D4"/>
+                </a:solidFill>
+                <a:latin typeface="Consolas"/>
+              </a:rPr>
+              <a:t>[</a:t>
+            </a:r>
+            <a:r>
+              <a:rPr sz="1600" i="0" b="0">
+                <a:solidFill>
+                  <a:srgbClr val="D4D4D4"/>
+                </a:solidFill>
+                <a:latin typeface="Consolas"/>
+              </a:rPr>
+              <a:t>Vuelta</a:t>
+            </a:r>
+            <a:r>
+              <a:rPr sz="1600" i="0" b="0">
+                <a:solidFill>
+                  <a:srgbClr val="D4D4D4"/>
+                </a:solidFill>
+                <a:latin typeface="Consolas"/>
+              </a:rPr>
+              <a:t> </a:t>
+            </a:r>
+            <a:r>
+              <a:rPr sz="1600" i="0" b="0">
+                <a:solidFill>
+                  <a:srgbClr val="B5CEA8"/>
+                </a:solidFill>
+                <a:latin typeface="Consolas"/>
+              </a:rPr>
+              <a:t>3</a:t>
+            </a:r>
+            <a:r>
+              <a:rPr sz="1600" i="0" b="0">
+                <a:solidFill>
+                  <a:srgbClr val="D4D4D4"/>
+                </a:solidFill>
+                <a:latin typeface="Consolas"/>
+              </a:rPr>
+              <a:t> - </a:t>
+            </a:r>
+            <a:r>
+              <a:rPr sz="1600" i="0" b="0">
+                <a:solidFill>
+                  <a:srgbClr val="D4D4D4"/>
+                </a:solidFill>
+                <a:latin typeface="Consolas"/>
+              </a:rPr>
+              <a:t>reportes</a:t>
+            </a:r>
+            <a:r>
+              <a:rPr sz="1600" i="0" b="0">
+                <a:solidFill>
+                  <a:srgbClr val="D4D4D4"/>
+                </a:solidFill>
+                <a:latin typeface="Consolas"/>
+              </a:rPr>
+              <a:t> </a:t>
+            </a:r>
+            <a:r>
+              <a:rPr sz="1600" i="0" b="0">
+                <a:solidFill>
+                  <a:srgbClr val="D4D4D4"/>
+                </a:solidFill>
+                <a:latin typeface="Consolas"/>
+              </a:rPr>
+              <a:t>y</a:t>
+            </a:r>
+            <a:r>
+              <a:rPr sz="1600" i="0" b="0">
+                <a:solidFill>
+                  <a:srgbClr val="D4D4D4"/>
+                </a:solidFill>
+                <a:latin typeface="Consolas"/>
+              </a:rPr>
+              <a:t> </a:t>
+            </a:r>
+            <a:r>
+              <a:rPr sz="1600" i="0" b="0">
+                <a:solidFill>
+                  <a:srgbClr val="D4D4D4"/>
+                </a:solidFill>
+                <a:latin typeface="Consolas"/>
+              </a:rPr>
+              <a:t>metricas</a:t>
+            </a:r>
+            <a:r>
+              <a:rPr sz="1600" i="0" b="0">
+                <a:solidFill>
+                  <a:srgbClr val="D4D4D4"/>
+                </a:solidFill>
+                <a:latin typeface="Consolas"/>
+              </a:rPr>
+              <a:t>]</a:t>
+            </a:r>
+          </a:p>
+          <a:p>
+            <a:pPr>
+              <a:spcAft>
+                <a:spcPts val="342"/>
+              </a:spcAft>
+            </a:pPr>
+            <a:r>
+              <a:rPr sz="1600" i="0" b="0">
+                <a:solidFill>
+                  <a:srgbClr val="D4D4D4"/>
+                </a:solidFill>
+                <a:latin typeface="Consolas"/>
+              </a:rPr>
+              <a:t>    </a:t>
+            </a:r>
+            <a:r>
+              <a:rPr sz="1600" i="0" b="0">
+                <a:solidFill>
+                  <a:srgbClr val="D4D4D4"/>
+                </a:solidFill>
+                <a:latin typeface="Consolas"/>
+              </a:rPr>
+              <a:t>r3</a:t>
+            </a:r>
+            <a:r>
+              <a:rPr sz="1600" i="0" b="0">
+                <a:solidFill>
+                  <a:srgbClr val="D4D4D4"/>
+                </a:solidFill>
+                <a:latin typeface="Consolas"/>
+              </a:rPr>
+              <a:t>[</a:t>
+            </a:r>
+            <a:r>
+              <a:rPr sz="1600" i="0" b="0">
+                <a:solidFill>
+                  <a:srgbClr val="D4D4D4"/>
+                </a:solidFill>
+                <a:latin typeface="Consolas"/>
+              </a:rPr>
+              <a:t>Requisitos</a:t>
+            </a:r>
+            <a:r>
+              <a:rPr sz="1600" i="0" b="0">
+                <a:solidFill>
+                  <a:srgbClr val="D4D4D4"/>
+                </a:solidFill>
+                <a:latin typeface="Consolas"/>
+              </a:rPr>
+              <a:t>] --&gt; </a:t>
+            </a:r>
+            <a:r>
+              <a:rPr sz="1600" i="0" b="0">
+                <a:solidFill>
+                  <a:srgbClr val="D4D4D4"/>
+                </a:solidFill>
+                <a:latin typeface="Consolas"/>
+              </a:rPr>
+              <a:t>d3</a:t>
+            </a:r>
+            <a:r>
+              <a:rPr sz="1600" i="0" b="0">
+                <a:solidFill>
+                  <a:srgbClr val="D4D4D4"/>
+                </a:solidFill>
+                <a:latin typeface="Consolas"/>
+              </a:rPr>
+              <a:t>[</a:t>
+            </a:r>
+            <a:r>
+              <a:rPr sz="1600" i="0" b="0">
+                <a:solidFill>
+                  <a:srgbClr val="D4D4D4"/>
+                </a:solidFill>
+                <a:latin typeface="Consolas"/>
+              </a:rPr>
+              <a:t>Diseno</a:t>
+            </a:r>
+            <a:r>
+              <a:rPr sz="1600" i="0" b="0">
+                <a:solidFill>
+                  <a:srgbClr val="D4D4D4"/>
+                </a:solidFill>
+                <a:latin typeface="Consolas"/>
+              </a:rPr>
+              <a:t>] --&gt; </a:t>
+            </a:r>
+            <a:r>
+              <a:rPr sz="1600" i="0" b="0">
+                <a:solidFill>
+                  <a:srgbClr val="D4D4D4"/>
+                </a:solidFill>
+                <a:latin typeface="Consolas"/>
+              </a:rPr>
+              <a:t>c3</a:t>
+            </a:r>
+            <a:r>
+              <a:rPr sz="1600" i="0" b="0">
+                <a:solidFill>
+                  <a:srgbClr val="D4D4D4"/>
+                </a:solidFill>
+                <a:latin typeface="Consolas"/>
+              </a:rPr>
+              <a:t>[</a:t>
+            </a:r>
+            <a:r>
+              <a:rPr sz="1600" i="0" b="0">
+                <a:solidFill>
+                  <a:srgbClr val="D4D4D4"/>
+                </a:solidFill>
+                <a:latin typeface="Consolas"/>
+              </a:rPr>
+              <a:t>Construccion</a:t>
+            </a:r>
+            <a:r>
+              <a:rPr sz="1600" i="0" b="0">
+                <a:solidFill>
+                  <a:srgbClr val="D4D4D4"/>
+                </a:solidFill>
+                <a:latin typeface="Consolas"/>
+              </a:rPr>
+              <a:t>] --&gt; </a:t>
+            </a:r>
+            <a:r>
+              <a:rPr sz="1600" i="0" b="0">
+                <a:solidFill>
+                  <a:srgbClr val="D4D4D4"/>
+                </a:solidFill>
+                <a:latin typeface="Consolas"/>
+              </a:rPr>
+              <a:t>p3</a:t>
+            </a:r>
+            <a:r>
+              <a:rPr sz="1600" i="0" b="0">
+                <a:solidFill>
+                  <a:srgbClr val="D4D4D4"/>
+                </a:solidFill>
+                <a:latin typeface="Consolas"/>
+              </a:rPr>
+              <a:t>[</a:t>
+            </a:r>
+            <a:r>
+              <a:rPr sz="1600" i="0" b="0">
+                <a:solidFill>
+                  <a:srgbClr val="D4D4D4"/>
+                </a:solidFill>
+                <a:latin typeface="Consolas"/>
+              </a:rPr>
+              <a:t>Pruebas</a:t>
+            </a:r>
+            <a:r>
+              <a:rPr sz="1600" i="0" b="0">
+                <a:solidFill>
+                  <a:srgbClr val="D4D4D4"/>
+                </a:solidFill>
+                <a:latin typeface="Consolas"/>
+              </a:rPr>
+              <a:t>]</a:t>
+            </a:r>
+          </a:p>
+          <a:p>
+            <a:pPr>
+              <a:spcAft>
+                <a:spcPts val="342"/>
+              </a:spcAft>
+            </a:pPr>
+            <a:r>
+              <a:rPr sz="1600" i="0" b="0">
+                <a:solidFill>
+                  <a:srgbClr val="D4D4D4"/>
+                </a:solidFill>
+                <a:latin typeface="Consolas"/>
+              </a:rPr>
+              <a:t>  </a:t>
+            </a:r>
+            <a:r>
+              <a:rPr sz="1600" i="0" b="0">
+                <a:solidFill>
+                  <a:srgbClr val="D4D4D4"/>
+                </a:solidFill>
+                <a:latin typeface="Consolas"/>
+              </a:rPr>
+              <a:t>end</a:t>
+            </a:r>
+          </a:p>
+          <a:p>
+            <a:pPr>
+              <a:spcAft>
+                <a:spcPts val="342"/>
+              </a:spcAft>
+            </a:pPr>
+            <a:r>
+              <a:rPr sz="1600" i="0" b="0">
+                <a:solidFill>
+                  <a:srgbClr val="D4D4D4"/>
+                </a:solidFill>
+                <a:latin typeface="Consolas"/>
+              </a:rPr>
+              <a:t>  </a:t>
+            </a:r>
+            <a:r>
+              <a:rPr sz="1600" i="0" b="0">
+                <a:solidFill>
+                  <a:srgbClr val="D4D4D4"/>
+                </a:solidFill>
+                <a:latin typeface="Consolas"/>
+              </a:rPr>
+              <a:t>p1</a:t>
+            </a:r>
+            <a:r>
+              <a:rPr sz="1600" i="0" b="0">
+                <a:solidFill>
+                  <a:srgbClr val="D4D4D4"/>
+                </a:solidFill>
+                <a:latin typeface="Consolas"/>
+              </a:rPr>
+              <a:t> --&gt; </a:t>
+            </a:r>
+            <a:r>
+              <a:rPr sz="1600" i="0" b="0">
+                <a:solidFill>
+                  <a:srgbClr val="D4D4D4"/>
+                </a:solidFill>
+                <a:latin typeface="Consolas"/>
+              </a:rPr>
+              <a:t>r2</a:t>
+            </a:r>
+          </a:p>
+          <a:p>
+            <a:pPr>
+              <a:spcAft>
+                <a:spcPts val="342"/>
+              </a:spcAft>
+            </a:pPr>
+            <a:r>
+              <a:rPr sz="1600" i="0" b="0">
+                <a:solidFill>
+                  <a:srgbClr val="D4D4D4"/>
+                </a:solidFill>
+                <a:latin typeface="Consolas"/>
+              </a:rPr>
+              <a:t>  </a:t>
+            </a:r>
+            <a:r>
+              <a:rPr sz="1600" i="0" b="0">
+                <a:solidFill>
+                  <a:srgbClr val="D4D4D4"/>
+                </a:solidFill>
+                <a:latin typeface="Consolas"/>
+              </a:rPr>
+              <a:t>p2</a:t>
+            </a:r>
+            <a:r>
+              <a:rPr sz="1600" i="0" b="0">
+                <a:solidFill>
+                  <a:srgbClr val="D4D4D4"/>
+                </a:solidFill>
+                <a:latin typeface="Consolas"/>
+              </a:rPr>
+              <a:t> --&gt; </a:t>
+            </a:r>
+            <a:r>
+              <a:rPr sz="1600" i="0" b="0">
+                <a:solidFill>
+                  <a:srgbClr val="D4D4D4"/>
+                </a:solidFill>
+                <a:latin typeface="Consolas"/>
+              </a:rPr>
+              <a:t>r3</a:t>
+            </a:r>
+          </a:p>
+          <a:p>
+            <a:pPr>
+              <a:spcAft>
+                <a:spcPts val="342"/>
+              </a:spcAft>
+            </a:pPr>
+            <a:r>
+              <a:rPr sz="1600" i="0" b="0">
+                <a:solidFill>
+                  <a:srgbClr val="D4D4D4"/>
+                </a:solidFill>
+                <a:latin typeface="Consolas"/>
+              </a:rPr>
+              <a:t/>
+            </a:r>
+          </a:p>
+          <a:p>
+            <a:pPr>
+              <a:spcAft>
+                <a:spcPts val="342"/>
+              </a:spcAft>
+            </a:pPr>
+            <a:r>
+              <a:rPr sz="1600" i="1" b="0">
+                <a:solidFill>
+                  <a:srgbClr val="6A9955"/>
+                </a:solidFill>
+                <a:latin typeface="Consolas"/>
+              </a:rPr>
+              <a:t>%% Iterativo no es «hacerlo mal y repetir»: cada vuelta entrega algo</a:t>
+            </a:r>
+          </a:p>
+          <a:p>
+            <a:pPr>
+              <a:spcAft>
+                <a:spcPts val="342"/>
+              </a:spcAft>
+            </a:pPr>
+            <a:r>
+              <a:rPr sz="1600" i="1" b="0">
+                <a:solidFill>
+                  <a:srgbClr val="6A9955"/>
+                </a:solidFill>
+                <a:latin typeface="Consolas"/>
+              </a:rPr>
+              <a:t>%% que funciona, sobre un subconjunto del alcance.</a:t>
+            </a:r>
+          </a:p>
+        </p:txBody>
+      </p:sp>
+      <p:sp>
+        <p:nvSpPr>
+          <p:cNvPr id="13" name="TextBox 12"/>
           <p:cNvSpPr txBox="1"/>
           <p:nvPr/>
         </p:nvSpPr>

--- a/Seminario de Sistemas/Clases/Clase 2 - Ciclos de vida del software/Presentacion.pptx
+++ b/Seminario de Sistemas/Clases/Clase 2 - Ciclos de vida del software/Presentacion.pptx
@@ -1059,94 +1059,6 @@
           <a:p>
             <a:r>
               <a:t>En la clinica, un recorrido en ciclos permitiria mostrar primero la ficha del paciente y ajustar la agenda despues de escuchar a la recepcionista.</a:t>
-            </a:r>
-          </a:p>
-        </p:txBody>
-      </p:sp>
-      <p:sp>
-        <p:nvSpPr>
-          <p:cNvPr id="4" name="Slide Number Placeholder 3"/>
-          <p:cNvSpPr>
-            <a:spLocks noGrp="1"/>
-          </p:cNvSpPr>
-          <p:nvPr>
-            <p:ph type="sldNum" idx="5" sz="quarter"/>
-          </p:nvPr>
-        </p:nvSpPr>
-        <p:spPr/>
-      </p:sp>
-    </p:spTree>
-  </p:cSld>
-  <p:clrMapOvr>
-    <a:masterClrMapping/>
-  </p:clrMapOvr>
-</p:notes>
-</file>
-
-<file path=ppt/notesSlides/notesSlide6.xml><?xml version="1.0" encoding="utf-8"?>
-<p:notes xmlns:a="http://schemas.openxmlformats.org/drawingml/2006/main" xmlns:p="http://schemas.openxmlformats.org/presentationml/2006/main" xmlns:r="http://schemas.openxmlformats.org/officeDocument/2006/relationships">
-  <p:cSld>
-    <p:spTree>
-      <p:nvGrpSpPr>
-        <p:cNvPr id="1" name=""/>
-        <p:cNvGrpSpPr/>
-        <p:nvPr/>
-      </p:nvGrpSpPr>
-      <p:grpSpPr>
-        <a:xfrm>
-          <a:off x="0" y="0"/>
-          <a:ext cx="0" cy="0"/>
-          <a:chOff x="0" y="0"/>
-          <a:chExt cx="0" cy="0"/>
-        </a:xfrm>
-      </p:grpSpPr>
-      <p:sp>
-        <p:nvSpPr>
-          <p:cNvPr id="2" name="Slide Image Placeholder 1"/>
-          <p:cNvSpPr>
-            <a:spLocks noGrp="1"/>
-          </p:cNvSpPr>
-          <p:nvPr>
-            <p:ph type="sldImg" idx="2"/>
-          </p:nvPr>
-        </p:nvSpPr>
-        <p:spPr/>
-      </p:sp>
-      <p:sp>
-        <p:nvSpPr>
-          <p:cNvPr id="3" name="Notes Placeholder 2"/>
-          <p:cNvSpPr>
-            <a:spLocks noGrp="1"/>
-          </p:cNvSpPr>
-          <p:nvPr>
-            <p:ph type="body" idx="3" sz="quarter"/>
-          </p:nvPr>
-        </p:nvSpPr>
-        <p:spPr/>
-        <p:txBody>
-          <a:bodyPr/>
-          <a:lstStyle/>
-          <a:p>
-            <a:r>
-              <a:t>TEXTO COMPLETO DE LA LÁMINA (se proyecta resumido):</a:t>
-            </a:r>
-          </a:p>
-          <a:p/>
-          <a:p>
-            <a:r>
-              <a:t>Herramienta: draw.io · Google Docs</a:t>
-            </a:r>
-          </a:p>
-          <a:p/>
-          <a:p>
-            <a:r>
-              <a:t>Demo: Se arma en vivo en draw.io el ciclo de la clinica en dos versiones, una sola pasada y tres vueltas, y muestra que las cajas son identicas y lo unico que cambia es el recorrido.</a:t>
-            </a:r>
-          </a:p>
-          <a:p/>
-          <a:p>
-            <a:r>
-              <a:t>Mismo dominio: la clinica veterinaria — no otro ejemplo. Aqui se diseña, no se programa.</a:t>
             </a:r>
           </a:p>
         </p:txBody>
@@ -5789,118 +5701,14 @@
       </p:sp>
       <p:sp>
         <p:nvSpPr>
-          <p:cNvPr id="5" name="Rounded Rectangle 4"/>
-          <p:cNvSpPr/>
-          <p:nvPr/>
-        </p:nvSpPr>
-        <p:spPr>
-          <a:xfrm>
-            <a:off x="5797149" y="1573813"/>
-            <a:ext cx="6010497" cy="4057845"/>
-          </a:xfrm>
-          <a:prstGeom prst="roundRect">
-            <a:avLst>
-              <a:gd name="adj" fmla="val 4000"/>
-            </a:avLst>
-          </a:prstGeom>
-          <a:solidFill>
-            <a:srgbClr val="E8EEF4"/>
-          </a:solidFill>
-          <a:ln>
-            <a:noFill/>
-          </a:ln>
-        </p:spPr>
-        <p:style>
-          <a:lnRef idx="1">
-            <a:schemeClr val="accent1"/>
-          </a:lnRef>
-          <a:fillRef idx="3">
-            <a:schemeClr val="accent1"/>
-          </a:fillRef>
-          <a:effectRef idx="2">
-            <a:schemeClr val="accent1"/>
-          </a:effectRef>
-          <a:fontRef idx="minor">
-            <a:schemeClr val="lt1"/>
-          </a:fontRef>
-        </p:style>
-        <p:txBody>
-          <a:bodyPr rtlCol="0" anchor="ctr"/>
-          <a:lstStyle/>
-          <a:p>
-            <a:pPr algn="ctr"/>
-          </a:p>
-        </p:txBody>
-      </p:sp>
-      <p:pic>
-        <p:nvPicPr>
-          <p:cNvPr id="6" name="Picture 5" descr="laptop-code-live-demo.jpg"/>
-          <p:cNvPicPr>
-            <a:picLocks noChangeAspect="1"/>
-          </p:cNvPicPr>
-          <p:nvPr/>
-        </p:nvPicPr>
-        <p:blipFill>
-          <a:blip r:embed="rId2"/>
-          <a:stretch>
-            <a:fillRect/>
-          </a:stretch>
-        </p:blipFill>
-        <p:spPr>
-          <a:xfrm>
-            <a:off x="5870301" y="1646965"/>
-            <a:ext cx="5864193" cy="3911541"/>
-          </a:xfrm>
-          <a:prstGeom prst="rect">
-            <a:avLst/>
-          </a:prstGeom>
-        </p:spPr>
-      </p:pic>
-      <p:sp>
-        <p:nvSpPr>
-          <p:cNvPr id="7" name="TextBox 6"/>
+          <p:cNvPr id="5" name="TextBox 4"/>
           <p:cNvSpPr txBox="1"/>
           <p:nvPr/>
         </p:nvSpPr>
         <p:spPr>
           <a:xfrm>
-            <a:off x="5870301" y="5961888"/>
-            <a:ext cx="5864193" cy="320040"/>
-          </a:xfrm>
-          <a:prstGeom prst="rect">
-            <a:avLst/>
-          </a:prstGeom>
-          <a:noFill/>
-        </p:spPr>
-        <p:txBody>
-          <a:bodyPr wrap="square">
-            <a:spAutoFit/>
-          </a:bodyPr>
-          <a:lstStyle/>
-          <a:p>
-            <a:pPr algn="ctr"/>
-            <a:r>
-              <a:rPr sz="1100" b="0" i="1">
-                <a:solidFill>
-                  <a:srgbClr val="666666"/>
-                </a:solidFill>
-                <a:latin typeface="Calibri"/>
-              </a:rPr>
-              <a:t>Foto: olia danilevich · Pexels</a:t>
-            </a:r>
-          </a:p>
-        </p:txBody>
-      </p:sp>
-      <p:sp>
-        <p:nvSpPr>
-          <p:cNvPr id="8" name="TextBox 7"/>
-          <p:cNvSpPr txBox="1"/>
-          <p:nvPr/>
-        </p:nvSpPr>
-        <p:spPr>
-          <a:xfrm>
-            <a:off x="457200" y="1353312"/>
-            <a:ext cx="5093061" cy="5047488"/>
+            <a:off x="457200" y="1170432"/>
+            <a:ext cx="11277295" cy="5230368"/>
           </a:xfrm>
           <a:prstGeom prst="rect">
             <a:avLst/>
@@ -5970,6 +5778,15 @@
               </a:rPr>
               <a:t>Demo:</a:t>
             </a:r>
+            <a:r>
+              <a:rPr sz="2000" b="0" i="0">
+                <a:solidFill>
+                  <a:srgbClr val="333333"/>
+                </a:solidFill>
+                <a:latin typeface="Calibri"/>
+              </a:rPr>
+              <a:t> Se arma en vivo en draw.io el ciclo de la clinica en dos versiones, una sola pasada y tres vueltas, y muestra que las cajas son identicas y lo unico que cambia es el recorrido.</a:t>
+            </a:r>
           </a:p>
           <a:p>
             <a:pPr>
@@ -5991,7 +5808,7 @@
       </p:sp>
       <p:sp>
         <p:nvSpPr>
-          <p:cNvPr id="9" name="TextBox 8"/>
+          <p:cNvPr id="6" name="TextBox 5"/>
           <p:cNvSpPr txBox="1"/>
           <p:nvPr/>
         </p:nvSpPr>
@@ -6404,118 +6221,14 @@
       </p:sp>
       <p:sp>
         <p:nvSpPr>
-          <p:cNvPr id="5" name="Rounded Rectangle 4"/>
-          <p:cNvSpPr/>
-          <p:nvPr/>
-        </p:nvSpPr>
-        <p:spPr>
-          <a:xfrm>
-            <a:off x="5797149" y="1573813"/>
-            <a:ext cx="6010497" cy="4057845"/>
-          </a:xfrm>
-          <a:prstGeom prst="roundRect">
-            <a:avLst>
-              <a:gd name="adj" fmla="val 4000"/>
-            </a:avLst>
-          </a:prstGeom>
-          <a:solidFill>
-            <a:srgbClr val="E8EEF4"/>
-          </a:solidFill>
-          <a:ln>
-            <a:noFill/>
-          </a:ln>
-        </p:spPr>
-        <p:style>
-          <a:lnRef idx="1">
-            <a:schemeClr val="accent1"/>
-          </a:lnRef>
-          <a:fillRef idx="3">
-            <a:schemeClr val="accent1"/>
-          </a:fillRef>
-          <a:effectRef idx="2">
-            <a:schemeClr val="accent1"/>
-          </a:effectRef>
-          <a:fontRef idx="minor">
-            <a:schemeClr val="lt1"/>
-          </a:fontRef>
-        </p:style>
-        <p:txBody>
-          <a:bodyPr rtlCol="0" anchor="ctr"/>
-          <a:lstStyle/>
-          <a:p>
-            <a:pPr algn="ctr"/>
-          </a:p>
-        </p:txBody>
-      </p:sp>
-      <p:pic>
-        <p:nvPicPr>
-          <p:cNvPr id="6" name="Picture 5" descr="notebook-planning-desk-coffee.jpg"/>
-          <p:cNvPicPr>
-            <a:picLocks noChangeAspect="1"/>
-          </p:cNvPicPr>
-          <p:nvPr/>
-        </p:nvPicPr>
-        <p:blipFill>
-          <a:blip r:embed="rId2"/>
-          <a:stretch>
-            <a:fillRect/>
-          </a:stretch>
-        </p:blipFill>
-        <p:spPr>
-          <a:xfrm>
-            <a:off x="5870301" y="1646965"/>
-            <a:ext cx="5864193" cy="3911541"/>
-          </a:xfrm>
-          <a:prstGeom prst="rect">
-            <a:avLst/>
-          </a:prstGeom>
-        </p:spPr>
-      </p:pic>
-      <p:sp>
-        <p:nvSpPr>
-          <p:cNvPr id="7" name="TextBox 6"/>
+          <p:cNvPr id="5" name="TextBox 4"/>
           <p:cNvSpPr txBox="1"/>
           <p:nvPr/>
         </p:nvSpPr>
         <p:spPr>
           <a:xfrm>
-            <a:off x="5870301" y="5961888"/>
-            <a:ext cx="5864193" cy="320040"/>
-          </a:xfrm>
-          <a:prstGeom prst="rect">
-            <a:avLst/>
-          </a:prstGeom>
-          <a:noFill/>
-        </p:spPr>
-        <p:txBody>
-          <a:bodyPr wrap="square">
-            <a:spAutoFit/>
-          </a:bodyPr>
-          <a:lstStyle/>
-          <a:p>
-            <a:pPr algn="ctr"/>
-            <a:r>
-              <a:rPr sz="1100" b="0" i="1">
-                <a:solidFill>
-                  <a:srgbClr val="666666"/>
-                </a:solidFill>
-                <a:latin typeface="Calibri"/>
-              </a:rPr>
-              <a:t>Foto: Cup of  Couple · Pexels</a:t>
-            </a:r>
-          </a:p>
-        </p:txBody>
-      </p:sp>
-      <p:sp>
-        <p:nvSpPr>
-          <p:cNvPr id="8" name="TextBox 7"/>
-          <p:cNvSpPr txBox="1"/>
-          <p:nvPr/>
-        </p:nvSpPr>
-        <p:spPr>
-          <a:xfrm>
-            <a:off x="457200" y="1353312"/>
-            <a:ext cx="5093061" cy="5047488"/>
+            <a:off x="457200" y="1170432"/>
+            <a:ext cx="11277295" cy="5230368"/>
           </a:xfrm>
           <a:prstGeom prst="rect">
             <a:avLst/>
@@ -6640,7 +6353,7 @@
       </p:sp>
       <p:sp>
         <p:nvSpPr>
-          <p:cNvPr id="9" name="TextBox 8"/>
+          <p:cNvPr id="6" name="TextBox 5"/>
           <p:cNvSpPr txBox="1"/>
           <p:nvPr/>
         </p:nvSpPr>

--- a/Seminario de Sistemas/Clases/Clase 2 - Ciclos de vida del software/Presentacion.pptx
+++ b/Seminario de Sistemas/Clases/Clase 2 - Ciclos de vida del software/Presentacion.pptx
@@ -1059,6 +1059,94 @@
           <a:p>
             <a:r>
               <a:t>En la clinica, un recorrido en ciclos permitiria mostrar primero la ficha del paciente y ajustar la agenda despues de escuchar a la recepcionista.</a:t>
+            </a:r>
+          </a:p>
+        </p:txBody>
+      </p:sp>
+      <p:sp>
+        <p:nvSpPr>
+          <p:cNvPr id="4" name="Slide Number Placeholder 3"/>
+          <p:cNvSpPr>
+            <a:spLocks noGrp="1"/>
+          </p:cNvSpPr>
+          <p:nvPr>
+            <p:ph type="sldNum" idx="5" sz="quarter"/>
+          </p:nvPr>
+        </p:nvSpPr>
+        <p:spPr/>
+      </p:sp>
+    </p:spTree>
+  </p:cSld>
+  <p:clrMapOvr>
+    <a:masterClrMapping/>
+  </p:clrMapOvr>
+</p:notes>
+</file>
+
+<file path=ppt/notesSlides/notesSlide6.xml><?xml version="1.0" encoding="utf-8"?>
+<p:notes xmlns:a="http://schemas.openxmlformats.org/drawingml/2006/main" xmlns:p="http://schemas.openxmlformats.org/presentationml/2006/main" xmlns:r="http://schemas.openxmlformats.org/officeDocument/2006/relationships">
+  <p:cSld>
+    <p:spTree>
+      <p:nvGrpSpPr>
+        <p:cNvPr id="1" name=""/>
+        <p:cNvGrpSpPr/>
+        <p:nvPr/>
+      </p:nvGrpSpPr>
+      <p:grpSpPr>
+        <a:xfrm>
+          <a:off x="0" y="0"/>
+          <a:ext cx="0" cy="0"/>
+          <a:chOff x="0" y="0"/>
+          <a:chExt cx="0" cy="0"/>
+        </a:xfrm>
+      </p:grpSpPr>
+      <p:sp>
+        <p:nvSpPr>
+          <p:cNvPr id="2" name="Slide Image Placeholder 1"/>
+          <p:cNvSpPr>
+            <a:spLocks noGrp="1"/>
+          </p:cNvSpPr>
+          <p:nvPr>
+            <p:ph type="sldImg" idx="2"/>
+          </p:nvPr>
+        </p:nvSpPr>
+        <p:spPr/>
+      </p:sp>
+      <p:sp>
+        <p:nvSpPr>
+          <p:cNvPr id="3" name="Notes Placeholder 2"/>
+          <p:cNvSpPr>
+            <a:spLocks noGrp="1"/>
+          </p:cNvSpPr>
+          <p:nvPr>
+            <p:ph type="body" idx="3" sz="quarter"/>
+          </p:nvPr>
+        </p:nvSpPr>
+        <p:spPr/>
+        <p:txBody>
+          <a:bodyPr/>
+          <a:lstStyle/>
+          <a:p>
+            <a:r>
+              <a:t>TEXTO COMPLETO DE LA LÁMINA (se proyecta resumido):</a:t>
+            </a:r>
+          </a:p>
+          <a:p/>
+          <a:p>
+            <a:r>
+              <a:t>Herramienta: draw.io · Google Docs</a:t>
+            </a:r>
+          </a:p>
+          <a:p/>
+          <a:p>
+            <a:r>
+              <a:t>Demo: Se arma en vivo en draw.io el ciclo de la clinica en dos versiones, una sola pasada y tres vueltas, y muestra que las cajas son identicas y lo unico que cambia es el recorrido.</a:t>
+            </a:r>
+          </a:p>
+          <a:p/>
+          <a:p>
+            <a:r>
+              <a:t>Mismo dominio: la clinica veterinaria — no otro ejemplo. Aqui se diseña, no se programa.</a:t>
             </a:r>
           </a:p>
         </p:txBody>
@@ -5701,14 +5789,83 @@
       </p:sp>
       <p:sp>
         <p:nvSpPr>
-          <p:cNvPr id="5" name="TextBox 4"/>
+          <p:cNvPr id="5" name="Rounded Rectangle 4"/>
+          <p:cNvSpPr/>
+          <p:nvPr/>
+        </p:nvSpPr>
+        <p:spPr>
+          <a:xfrm>
+            <a:off x="5797149" y="1343926"/>
+            <a:ext cx="6010497" cy="4837658"/>
+          </a:xfrm>
+          <a:prstGeom prst="roundRect">
+            <a:avLst>
+              <a:gd name="adj" fmla="val 4000"/>
+            </a:avLst>
+          </a:prstGeom>
+          <a:solidFill>
+            <a:srgbClr val="E8EEF4"/>
+          </a:solidFill>
+          <a:ln>
+            <a:noFill/>
+          </a:ln>
+        </p:spPr>
+        <p:style>
+          <a:lnRef idx="1">
+            <a:schemeClr val="accent1"/>
+          </a:lnRef>
+          <a:fillRef idx="3">
+            <a:schemeClr val="accent1"/>
+          </a:fillRef>
+          <a:effectRef idx="2">
+            <a:schemeClr val="accent1"/>
+          </a:effectRef>
+          <a:fontRef idx="minor">
+            <a:schemeClr val="lt1"/>
+          </a:fontRef>
+        </p:style>
+        <p:txBody>
+          <a:bodyPr rtlCol="0" anchor="ctr"/>
+          <a:lstStyle/>
+          <a:p>
+            <a:pPr algn="ctr"/>
+          </a:p>
+        </p:txBody>
+      </p:sp>
+      <p:pic>
+        <p:nvPicPr>
+          <p:cNvPr id="6" name="Picture 5" descr="ilus-demo-paso1.png"/>
+          <p:cNvPicPr>
+            <a:picLocks noChangeAspect="1"/>
+          </p:cNvPicPr>
+          <p:nvPr/>
+        </p:nvPicPr>
+        <p:blipFill>
+          <a:blip r:embed="rId2"/>
+          <a:stretch>
+            <a:fillRect/>
+          </a:stretch>
+        </p:blipFill>
+        <p:spPr>
+          <a:xfrm>
+            <a:off x="5870301" y="1417078"/>
+            <a:ext cx="5864193" cy="4691354"/>
+          </a:xfrm>
+          <a:prstGeom prst="rect">
+            <a:avLst/>
+          </a:prstGeom>
+        </p:spPr>
+      </p:pic>
+      <p:sp>
+        <p:nvSpPr>
+          <p:cNvPr id="7" name="TextBox 6"/>
           <p:cNvSpPr txBox="1"/>
           <p:nvPr/>
         </p:nvSpPr>
         <p:spPr>
           <a:xfrm>
-            <a:off x="457200" y="1170432"/>
-            <a:ext cx="11277295" cy="5230368"/>
+            <a:off x="457200" y="1353312"/>
+            <a:ext cx="5093061" cy="5047488"/>
           </a:xfrm>
           <a:prstGeom prst="rect">
             <a:avLst/>
@@ -5785,7 +5942,7 @@
                 </a:solidFill>
                 <a:latin typeface="Calibri"/>
               </a:rPr>
-              <a:t> Se arma en vivo en draw.io el ciclo de la clinica en dos versiones, una sola pasada y tres vueltas, y muestra que las cajas son identicas y lo unico que cambia es el recorrido.</a:t>
+              <a:t> Se arma en vivo en draw.io el ciclo de la clinica en dos versiones, una sola pasada y tres vueltas, y muestra que las cajas son identicas y…</a:t>
             </a:r>
           </a:p>
           <a:p>
@@ -5808,7 +5965,7 @@
       </p:sp>
       <p:sp>
         <p:nvSpPr>
-          <p:cNvPr id="6" name="TextBox 5"/>
+          <p:cNvPr id="8" name="TextBox 7"/>
           <p:cNvSpPr txBox="1"/>
           <p:nvPr/>
         </p:nvSpPr>

--- a/Seminario de Sistemas/Clases/Clase 2 - Ciclos de vida del software/Presentacion.pptx
+++ b/Seminario de Sistemas/Clases/Clase 2 - Ciclos de vida del software/Presentacion.pptx
@@ -8106,7 +8106,7 @@
         <p:spPr>
           <a:xfrm>
             <a:off x="457200" y="1261872"/>
-            <a:ext cx="11277295" cy="2828091"/>
+            <a:ext cx="6991923" cy="2011680"/>
           </a:xfrm>
           <a:prstGeom prst="roundRect">
             <a:avLst>
@@ -8151,7 +8151,7 @@
         <p:spPr>
           <a:xfrm>
             <a:off x="457200" y="1261872"/>
-            <a:ext cx="11277295" cy="365760"/>
+            <a:ext cx="6991923" cy="365760"/>
           </a:xfrm>
           <a:prstGeom prst="rect">
             <a:avLst/>
@@ -8323,7 +8323,7 @@
         <p:spPr>
           <a:xfrm>
             <a:off x="1371600" y="1298448"/>
-            <a:ext cx="10180015" cy="292608"/>
+            <a:ext cx="5894643" cy="292608"/>
           </a:xfrm>
           <a:prstGeom prst="rect">
             <a:avLst/>
@@ -8356,7 +8356,7 @@
         <p:spPr>
           <a:xfrm>
             <a:off x="685800" y="1719072"/>
-            <a:ext cx="502920" cy="2233731"/>
+            <a:ext cx="502920" cy="1417320"/>
           </a:xfrm>
           <a:prstGeom prst="rect">
             <a:avLst/>
@@ -8371,11 +8371,11 @@
           <a:p>
             <a:pPr algn="r">
               <a:spcAft>
-                <a:spcPts val="428"/>
+                <a:spcPts val="342"/>
               </a:spcAft>
             </a:pPr>
             <a:r>
-              <a:rPr sz="2000" i="0" b="0">
+              <a:rPr sz="1600" i="0" b="0">
                 <a:solidFill>
                   <a:srgbClr val="858585"/>
                 </a:solidFill>
@@ -8387,11 +8387,11 @@
           <a:p>
             <a:pPr algn="r">
               <a:spcAft>
-                <a:spcPts val="428"/>
+                <a:spcPts val="342"/>
               </a:spcAft>
             </a:pPr>
             <a:r>
-              <a:rPr sz="2000" i="0" b="0">
+              <a:rPr sz="1600" i="0" b="0">
                 <a:solidFill>
                   <a:srgbClr val="858585"/>
                 </a:solidFill>
@@ -8403,65 +8403,17 @@
           <a:p>
             <a:pPr algn="r">
               <a:spcAft>
-                <a:spcPts val="428"/>
+                <a:spcPts val="342"/>
               </a:spcAft>
             </a:pPr>
             <a:r>
-              <a:rPr sz="2000" i="0" b="0">
+              <a:rPr sz="1600" i="0" b="0">
                 <a:solidFill>
                   <a:srgbClr val="858585"/>
                 </a:solidFill>
                 <a:latin typeface="Consolas"/>
               </a:rPr>
               <a:t>3</a:t>
-            </a:r>
-          </a:p>
-          <a:p>
-            <a:pPr algn="r">
-              <a:spcAft>
-                <a:spcPts val="428"/>
-              </a:spcAft>
-            </a:pPr>
-            <a:r>
-              <a:rPr sz="2000" i="0" b="0">
-                <a:solidFill>
-                  <a:srgbClr val="858585"/>
-                </a:solidFill>
-                <a:latin typeface="Consolas"/>
-              </a:rPr>
-              <a:t>4</a:t>
-            </a:r>
-          </a:p>
-          <a:p>
-            <a:pPr algn="r">
-              <a:spcAft>
-                <a:spcPts val="428"/>
-              </a:spcAft>
-            </a:pPr>
-            <a:r>
-              <a:rPr sz="2000" i="0" b="0">
-                <a:solidFill>
-                  <a:srgbClr val="858585"/>
-                </a:solidFill>
-                <a:latin typeface="Consolas"/>
-              </a:rPr>
-              <a:t>5</a:t>
-            </a:r>
-          </a:p>
-          <a:p>
-            <a:pPr algn="r">
-              <a:spcAft>
-                <a:spcPts val="428"/>
-              </a:spcAft>
-            </a:pPr>
-            <a:r>
-              <a:rPr sz="2000" i="0" b="0">
-                <a:solidFill>
-                  <a:srgbClr val="858585"/>
-                </a:solidFill>
-                <a:latin typeface="Consolas"/>
-              </a:rPr>
-              <a:t>6</a:t>
             </a:r>
           </a:p>
         </p:txBody>
@@ -8475,7 +8427,7 @@
         <p:spPr>
           <a:xfrm>
             <a:off x="1188720" y="1719072"/>
-            <a:ext cx="10271455" cy="2233731"/>
+            <a:ext cx="5986083" cy="1417320"/>
           </a:xfrm>
           <a:prstGeom prst="rect">
             <a:avLst/>
@@ -8490,11 +8442,11 @@
           <a:p>
             <a:pPr>
               <a:spcAft>
-                <a:spcPts val="428"/>
+                <a:spcPts val="342"/>
               </a:spcAft>
             </a:pPr>
             <a:r>
-              <a:rPr sz="2000" i="0" b="0">
+              <a:rPr sz="1600" i="0" b="0">
                 <a:solidFill>
                   <a:srgbClr val="D4D4D4"/>
                 </a:solidFill>
@@ -8503,7 +8455,7 @@
               <a:t>flowchart</a:t>
             </a:r>
             <a:r>
-              <a:rPr sz="2000" i="0" b="0">
+              <a:rPr sz="1600" i="0" b="0">
                 <a:solidFill>
                   <a:srgbClr val="D4D4D4"/>
                 </a:solidFill>
@@ -8512,7 +8464,7 @@
               <a:t> </a:t>
             </a:r>
             <a:r>
-              <a:rPr sz="2000" i="0" b="0">
+              <a:rPr sz="1600" i="0" b="0">
                 <a:solidFill>
                   <a:srgbClr val="D4D4D4"/>
                 </a:solidFill>
@@ -8524,11 +8476,11 @@
           <a:p>
             <a:pPr>
               <a:spcAft>
-                <a:spcPts val="428"/>
+                <a:spcPts val="342"/>
               </a:spcAft>
             </a:pPr>
             <a:r>
-              <a:rPr sz="2000" i="0" b="0">
+              <a:rPr sz="1600" i="0" b="0">
                 <a:solidFill>
                   <a:srgbClr val="D4D4D4"/>
                 </a:solidFill>
@@ -8537,7 +8489,7 @@
               <a:t>  </a:t>
             </a:r>
             <a:r>
-              <a:rPr sz="2000" i="0" b="0">
+              <a:rPr sz="1600" i="0" b="0">
                 <a:solidFill>
                   <a:srgbClr val="D4D4D4"/>
                 </a:solidFill>
@@ -8546,7 +8498,7 @@
               <a:t>R</a:t>
             </a:r>
             <a:r>
-              <a:rPr sz="2000" i="0" b="0">
+              <a:rPr sz="1600" i="0" b="0">
                 <a:solidFill>
                   <a:srgbClr val="D4D4D4"/>
                 </a:solidFill>
@@ -8555,7 +8507,7 @@
               <a:t>[</a:t>
             </a:r>
             <a:r>
-              <a:rPr sz="2000" i="0" b="0">
+              <a:rPr sz="1600" i="0" b="0">
                 <a:solidFill>
                   <a:srgbClr val="D4D4D4"/>
                 </a:solidFill>
@@ -8564,7 +8516,7 @@
               <a:t>Requisitos</a:t>
             </a:r>
             <a:r>
-              <a:rPr sz="2000" i="0" b="0">
+              <a:rPr sz="1600" i="0" b="0">
                 <a:solidFill>
                   <a:srgbClr val="D4D4D4"/>
                 </a:solidFill>
@@ -8573,7 +8525,7 @@
               <a:t>] --&gt; </a:t>
             </a:r>
             <a:r>
-              <a:rPr sz="2000" i="0" b="0">
+              <a:rPr sz="1600" i="0" b="0">
                 <a:solidFill>
                   <a:srgbClr val="D4D4D4"/>
                 </a:solidFill>
@@ -8582,7 +8534,7 @@
               <a:t>D</a:t>
             </a:r>
             <a:r>
-              <a:rPr sz="2000" i="0" b="0">
+              <a:rPr sz="1600" i="0" b="0">
                 <a:solidFill>
                   <a:srgbClr val="D4D4D4"/>
                 </a:solidFill>
@@ -8591,7 +8543,7 @@
               <a:t>[</a:t>
             </a:r>
             <a:r>
-              <a:rPr sz="2000" i="0" b="0">
+              <a:rPr sz="1600" i="0" b="0">
                 <a:solidFill>
                   <a:srgbClr val="D4D4D4"/>
                 </a:solidFill>
@@ -8600,7 +8552,7 @@
               <a:t>Diseno</a:t>
             </a:r>
             <a:r>
-              <a:rPr sz="2000" i="0" b="0">
+              <a:rPr sz="1600" i="0" b="0">
                 <a:solidFill>
                   <a:srgbClr val="D4D4D4"/>
                 </a:solidFill>
@@ -8609,7 +8561,7 @@
               <a:t>] --&gt; </a:t>
             </a:r>
             <a:r>
-              <a:rPr sz="2000" i="0" b="0">
+              <a:rPr sz="1600" i="0" b="0">
                 <a:solidFill>
                   <a:srgbClr val="D4D4D4"/>
                 </a:solidFill>
@@ -8618,7 +8570,7 @@
               <a:t>C</a:t>
             </a:r>
             <a:r>
-              <a:rPr sz="2000" i="0" b="0">
+              <a:rPr sz="1600" i="0" b="0">
                 <a:solidFill>
                   <a:srgbClr val="D4D4D4"/>
                 </a:solidFill>
@@ -8627,7 +8579,7 @@
               <a:t>[</a:t>
             </a:r>
             <a:r>
-              <a:rPr sz="2000" i="0" b="0">
+              <a:rPr sz="1600" i="0" b="0">
                 <a:solidFill>
                   <a:srgbClr val="D4D4D4"/>
                 </a:solidFill>
@@ -8636,7 +8588,7 @@
               <a:t>Construccion</a:t>
             </a:r>
             <a:r>
-              <a:rPr sz="2000" i="0" b="0">
+              <a:rPr sz="1600" i="0" b="0">
                 <a:solidFill>
                   <a:srgbClr val="D4D4D4"/>
                 </a:solidFill>
@@ -8648,11 +8600,11 @@
           <a:p>
             <a:pPr>
               <a:spcAft>
-                <a:spcPts val="428"/>
+                <a:spcPts val="342"/>
               </a:spcAft>
             </a:pPr>
             <a:r>
-              <a:rPr sz="2000" i="0" b="0">
+              <a:rPr sz="1600" i="0" b="0">
                 <a:solidFill>
                   <a:srgbClr val="D4D4D4"/>
                 </a:solidFill>
@@ -8661,7 +8613,7 @@
               <a:t>  </a:t>
             </a:r>
             <a:r>
-              <a:rPr sz="2000" i="0" b="0">
+              <a:rPr sz="1600" i="0" b="0">
                 <a:solidFill>
                   <a:srgbClr val="D4D4D4"/>
                 </a:solidFill>
@@ -8670,7 +8622,7 @@
               <a:t>C</a:t>
             </a:r>
             <a:r>
-              <a:rPr sz="2000" i="0" b="0">
+              <a:rPr sz="1600" i="0" b="0">
                 <a:solidFill>
                   <a:srgbClr val="D4D4D4"/>
                 </a:solidFill>
@@ -8679,7 +8631,7 @@
               <a:t> --&gt; </a:t>
             </a:r>
             <a:r>
-              <a:rPr sz="2000" i="0" b="0">
+              <a:rPr sz="1600" i="0" b="0">
                 <a:solidFill>
                   <a:srgbClr val="D4D4D4"/>
                 </a:solidFill>
@@ -8688,7 +8640,7 @@
               <a:t>P</a:t>
             </a:r>
             <a:r>
-              <a:rPr sz="2000" i="0" b="0">
+              <a:rPr sz="1600" i="0" b="0">
                 <a:solidFill>
                   <a:srgbClr val="D4D4D4"/>
                 </a:solidFill>
@@ -8697,7 +8649,7 @@
               <a:t>[</a:t>
             </a:r>
             <a:r>
-              <a:rPr sz="2000" i="0" b="0">
+              <a:rPr sz="1600" i="0" b="0">
                 <a:solidFill>
                   <a:srgbClr val="D4D4D4"/>
                 </a:solidFill>
@@ -8706,7 +8658,7 @@
               <a:t>Pruebas</a:t>
             </a:r>
             <a:r>
-              <a:rPr sz="2000" i="0" b="0">
+              <a:rPr sz="1600" i="0" b="0">
                 <a:solidFill>
                   <a:srgbClr val="D4D4D4"/>
                 </a:solidFill>
@@ -8715,7 +8667,7 @@
               <a:t>] --&gt; </a:t>
             </a:r>
             <a:r>
-              <a:rPr sz="2000" i="0" b="0">
+              <a:rPr sz="1600" i="0" b="0">
                 <a:solidFill>
                   <a:srgbClr val="D4D4D4"/>
                 </a:solidFill>
@@ -8724,7 +8676,7 @@
               <a:t>M</a:t>
             </a:r>
             <a:r>
-              <a:rPr sz="2000" i="0" b="0">
+              <a:rPr sz="1600" i="0" b="0">
                 <a:solidFill>
                   <a:srgbClr val="D4D4D4"/>
                 </a:solidFill>
@@ -8733,7 +8685,7 @@
               <a:t>[</a:t>
             </a:r>
             <a:r>
-              <a:rPr sz="2000" i="0" b="0">
+              <a:rPr sz="1600" i="0" b="0">
                 <a:solidFill>
                   <a:srgbClr val="D4D4D4"/>
                 </a:solidFill>
@@ -8742,7 +8694,7 @@
               <a:t>Mantenimiento</a:t>
             </a:r>
             <a:r>
-              <a:rPr sz="2000" i="0" b="0">
+              <a:rPr sz="1600" i="0" b="0">
                 <a:solidFill>
                   <a:srgbClr val="D4D4D4"/>
                 </a:solidFill>
@@ -8751,59 +8703,150 @@
               <a:t>]</a:t>
             </a:r>
           </a:p>
-          <a:p>
-            <a:pPr>
-              <a:spcAft>
-                <a:spcPts val="428"/>
-              </a:spcAft>
-            </a:pPr>
-            <a:r>
-              <a:rPr sz="2000" i="0" b="0">
-                <a:solidFill>
-                  <a:srgbClr val="D4D4D4"/>
-                </a:solidFill>
-                <a:latin typeface="Consolas"/>
-              </a:rPr>
-              <a:t/>
-            </a:r>
-          </a:p>
-          <a:p>
-            <a:pPr>
-              <a:spcAft>
-                <a:spcPts val="428"/>
-              </a:spcAft>
-            </a:pPr>
-            <a:r>
-              <a:rPr sz="2000" i="1" b="0">
-                <a:solidFill>
-                  <a:srgbClr val="6A9955"/>
-                </a:solidFill>
-                <a:latin typeface="Consolas"/>
-              </a:rPr>
-              <a:t>%% Lineal significa: no se vuelve. Cada fase cierra con un artefacto</a:t>
-            </a:r>
-          </a:p>
-          <a:p>
-            <a:pPr>
-              <a:spcAft>
-                <a:spcPts val="428"/>
-              </a:spcAft>
-            </a:pPr>
-            <a:r>
-              <a:rPr sz="2000" i="1" b="0">
-                <a:solidFill>
-                  <a:srgbClr val="6A9955"/>
-                </a:solidFill>
-                <a:latin typeface="Consolas"/>
-              </a:rPr>
-              <a:t>%% aprobado y la siguiente empieza sobre el.</a:t>
-            </a:r>
-          </a:p>
-        </p:txBody>
-      </p:sp>
-      <p:sp>
-        <p:nvSpPr>
-          <p:cNvPr id="13" name="TextBox 12"/>
+        </p:txBody>
+      </p:sp>
+      <p:sp>
+        <p:nvSpPr>
+          <p:cNvPr id="13" name="Rounded Rectangle 12"/>
+          <p:cNvSpPr/>
+          <p:nvPr/>
+        </p:nvSpPr>
+        <p:spPr>
+          <a:xfrm>
+            <a:off x="7668579" y="1261872"/>
+            <a:ext cx="4120780" cy="3318569"/>
+          </a:xfrm>
+          <a:prstGeom prst="roundRect">
+            <a:avLst>
+              <a:gd name="adj" fmla="val 4000"/>
+            </a:avLst>
+          </a:prstGeom>
+          <a:solidFill>
+            <a:srgbClr val="E8EEF4"/>
+          </a:solidFill>
+          <a:ln>
+            <a:noFill/>
+          </a:ln>
+        </p:spPr>
+        <p:style>
+          <a:lnRef idx="1">
+            <a:schemeClr val="accent1"/>
+          </a:lnRef>
+          <a:fillRef idx="3">
+            <a:schemeClr val="accent1"/>
+          </a:fillRef>
+          <a:effectRef idx="2">
+            <a:schemeClr val="accent1"/>
+          </a:effectRef>
+          <a:fontRef idx="minor">
+            <a:schemeClr val="lt1"/>
+          </a:fontRef>
+        </p:style>
+        <p:txBody>
+          <a:bodyPr rtlCol="0" anchor="ctr"/>
+          <a:lstStyle/>
+          <a:p>
+            <a:pPr algn="ctr"/>
+          </a:p>
+        </p:txBody>
+      </p:sp>
+      <p:pic>
+        <p:nvPicPr>
+          <p:cNvPr id="14" name="Picture 13" descr="dg-lineal-paso1.png"/>
+          <p:cNvPicPr>
+            <a:picLocks noChangeAspect="1"/>
+          </p:cNvPicPr>
+          <p:nvPr/>
+        </p:nvPicPr>
+        <p:blipFill>
+          <a:blip r:embed="rId2"/>
+          <a:stretch>
+            <a:fillRect/>
+          </a:stretch>
+        </p:blipFill>
+        <p:spPr>
+          <a:xfrm>
+            <a:off x="7723443" y="1316736"/>
+            <a:ext cx="4011052" cy="3208841"/>
+          </a:xfrm>
+          <a:prstGeom prst="rect">
+            <a:avLst/>
+          </a:prstGeom>
+        </p:spPr>
+      </p:pic>
+      <p:sp>
+        <p:nvSpPr>
+          <p:cNvPr id="15" name="TextBox 14"/>
+          <p:cNvSpPr txBox="1"/>
+          <p:nvPr/>
+        </p:nvSpPr>
+        <p:spPr>
+          <a:xfrm>
+            <a:off x="7723443" y="4580441"/>
+            <a:ext cx="4011052" cy="320040"/>
+          </a:xfrm>
+          <a:prstGeom prst="rect">
+            <a:avLst/>
+          </a:prstGeom>
+          <a:noFill/>
+        </p:spPr>
+        <p:txBody>
+          <a:bodyPr wrap="square">
+            <a:spAutoFit/>
+          </a:bodyPr>
+          <a:lstStyle/>
+          <a:p>
+            <a:pPr algn="ctr"/>
+            <a:r>
+              <a:rPr sz="1200" b="0" i="1">
+                <a:solidFill>
+                  <a:srgbClr val="666666"/>
+                </a:solidFill>
+                <a:latin typeface="Calibri"/>
+              </a:rPr>
+              <a:t>Lo que dibuja este código</a:t>
+            </a:r>
+          </a:p>
+        </p:txBody>
+      </p:sp>
+      <p:sp>
+        <p:nvSpPr>
+          <p:cNvPr id="16" name="TextBox 15"/>
+          <p:cNvSpPr txBox="1"/>
+          <p:nvPr/>
+        </p:nvSpPr>
+        <p:spPr>
+          <a:xfrm>
+            <a:off x="457200" y="6035040"/>
+            <a:ext cx="11277295" cy="365760"/>
+          </a:xfrm>
+          <a:prstGeom prst="rect">
+            <a:avLst/>
+          </a:prstGeom>
+          <a:noFill/>
+        </p:spPr>
+        <p:txBody>
+          <a:bodyPr wrap="square">
+            <a:spAutoFit/>
+          </a:bodyPr>
+          <a:lstStyle/>
+          <a:p>
+            <a:pPr algn="ctr"/>
+            <a:r>
+              <a:rPr sz="1300" b="0" i="1">
+                <a:solidFill>
+                  <a:srgbClr val="666666"/>
+                </a:solidFill>
+                <a:latin typeface="Calibri"/>
+              </a:rPr>
+              <a:t>Lineal significa que no se vuelve: cada fase cierra con un artefacto aprobado y la siguiente empieza sobre el.</a:t>
+            </a:r>
+          </a:p>
+        </p:txBody>
+      </p:sp>
+      <p:sp>
+        <p:nvSpPr>
+          <p:cNvPr id="17" name="TextBox 16"/>
           <p:cNvSpPr txBox="1"/>
           <p:nvPr/>
         </p:nvSpPr>
@@ -8991,7 +9034,7 @@
         <p:spPr>
           <a:xfrm>
             <a:off x="457200" y="1261872"/>
-            <a:ext cx="11277295" cy="4731007"/>
+            <a:ext cx="6991923" cy="2269986"/>
           </a:xfrm>
           <a:prstGeom prst="roundRect">
             <a:avLst>
@@ -9036,7 +9079,7 @@
         <p:spPr>
           <a:xfrm>
             <a:off x="457200" y="1261872"/>
-            <a:ext cx="11277295" cy="365760"/>
+            <a:ext cx="6991923" cy="365760"/>
           </a:xfrm>
           <a:prstGeom prst="rect">
             <a:avLst/>
@@ -9208,7 +9251,7 @@
         <p:spPr>
           <a:xfrm>
             <a:off x="1371600" y="1298448"/>
-            <a:ext cx="10180015" cy="292608"/>
+            <a:ext cx="5894643" cy="292608"/>
           </a:xfrm>
           <a:prstGeom prst="rect">
             <a:avLst/>
@@ -9241,7 +9284,7 @@
         <p:spPr>
           <a:xfrm>
             <a:off x="685800" y="1719072"/>
-            <a:ext cx="502920" cy="4136647"/>
+            <a:ext cx="502920" cy="1675626"/>
           </a:xfrm>
           <a:prstGeom prst="rect">
             <a:avLst/>
@@ -9256,11 +9299,11 @@
           <a:p>
             <a:pPr algn="r">
               <a:spcAft>
-                <a:spcPts val="407"/>
+                <a:spcPts val="300"/>
               </a:spcAft>
             </a:pPr>
             <a:r>
-              <a:rPr sz="1900" i="0" b="0">
+              <a:rPr sz="1400" i="0" b="0">
                 <a:solidFill>
                   <a:srgbClr val="858585"/>
                 </a:solidFill>
@@ -9272,11 +9315,11 @@
           <a:p>
             <a:pPr algn="r">
               <a:spcAft>
-                <a:spcPts val="407"/>
+                <a:spcPts val="300"/>
               </a:spcAft>
             </a:pPr>
             <a:r>
-              <a:rPr sz="1900" i="0" b="0">
+              <a:rPr sz="1400" i="0" b="0">
                 <a:solidFill>
                   <a:srgbClr val="858585"/>
                 </a:solidFill>
@@ -9288,11 +9331,11 @@
           <a:p>
             <a:pPr algn="r">
               <a:spcAft>
-                <a:spcPts val="407"/>
+                <a:spcPts val="300"/>
               </a:spcAft>
             </a:pPr>
             <a:r>
-              <a:rPr sz="1900" i="0" b="0">
+              <a:rPr sz="1400" i="0" b="0">
                 <a:solidFill>
                   <a:srgbClr val="858585"/>
                 </a:solidFill>
@@ -9304,11 +9347,11 @@
           <a:p>
             <a:pPr algn="r">
               <a:spcAft>
-                <a:spcPts val="407"/>
+                <a:spcPts val="300"/>
               </a:spcAft>
             </a:pPr>
             <a:r>
-              <a:rPr sz="1900" i="0" b="0">
+              <a:rPr sz="1400" i="0" b="0">
                 <a:solidFill>
                   <a:srgbClr val="858585"/>
                 </a:solidFill>
@@ -9320,11 +9363,11 @@
           <a:p>
             <a:pPr algn="r">
               <a:spcAft>
-                <a:spcPts val="407"/>
+                <a:spcPts val="300"/>
               </a:spcAft>
             </a:pPr>
             <a:r>
-              <a:rPr sz="1900" i="0" b="0">
+              <a:rPr sz="1400" i="0" b="0">
                 <a:solidFill>
                   <a:srgbClr val="858585"/>
                 </a:solidFill>
@@ -9336,113 +9379,17 @@
           <a:p>
             <a:pPr algn="r">
               <a:spcAft>
-                <a:spcPts val="407"/>
+                <a:spcPts val="300"/>
               </a:spcAft>
             </a:pPr>
             <a:r>
-              <a:rPr sz="1900" i="0" b="0">
+              <a:rPr sz="1400" i="0" b="0">
                 <a:solidFill>
                   <a:srgbClr val="858585"/>
                 </a:solidFill>
                 <a:latin typeface="Consolas"/>
               </a:rPr>
               <a:t>6</a:t>
-            </a:r>
-          </a:p>
-          <a:p>
-            <a:pPr algn="r">
-              <a:spcAft>
-                <a:spcPts val="407"/>
-              </a:spcAft>
-            </a:pPr>
-            <a:r>
-              <a:rPr sz="1900" i="0" b="0">
-                <a:solidFill>
-                  <a:srgbClr val="858585"/>
-                </a:solidFill>
-                <a:latin typeface="Consolas"/>
-              </a:rPr>
-              <a:t>7</a:t>
-            </a:r>
-          </a:p>
-          <a:p>
-            <a:pPr algn="r">
-              <a:spcAft>
-                <a:spcPts val="407"/>
-              </a:spcAft>
-            </a:pPr>
-            <a:r>
-              <a:rPr sz="1900" i="0" b="0">
-                <a:solidFill>
-                  <a:srgbClr val="858585"/>
-                </a:solidFill>
-                <a:latin typeface="Consolas"/>
-              </a:rPr>
-              <a:t>8</a:t>
-            </a:r>
-          </a:p>
-          <a:p>
-            <a:pPr algn="r">
-              <a:spcAft>
-                <a:spcPts val="407"/>
-              </a:spcAft>
-            </a:pPr>
-            <a:r>
-              <a:rPr sz="1900" i="0" b="0">
-                <a:solidFill>
-                  <a:srgbClr val="858585"/>
-                </a:solidFill>
-                <a:latin typeface="Consolas"/>
-              </a:rPr>
-              <a:t>9</a:t>
-            </a:r>
-          </a:p>
-          <a:p>
-            <a:pPr algn="r">
-              <a:spcAft>
-                <a:spcPts val="407"/>
-              </a:spcAft>
-            </a:pPr>
-            <a:r>
-              <a:rPr sz="1900" i="0" b="0">
-                <a:solidFill>
-                  <a:srgbClr val="858585"/>
-                </a:solidFill>
-                <a:latin typeface="Consolas"/>
-              </a:rPr>
-              <a:t>10</a:t>
-            </a:r>
-          </a:p>
-          <a:p>
-            <a:pPr algn="r">
-              <a:spcAft>
-                <a:spcPts val="407"/>
-              </a:spcAft>
-            </a:pPr>
-            <a:r>
-              <a:rPr sz="1900" i="0" b="0">
-                <a:solidFill>
-                  <a:srgbClr val="858585"/>
-                </a:solidFill>
-                <a:latin typeface="Consolas"/>
-              </a:rPr>
-              <a:t>11</a:t>
-            </a:r>
-          </a:p>
-          <a:p>
-            <a:pPr algn="r">
-              <a:spcAft>
-                <a:spcPts val="407"/>
-              </a:spcAft>
-            </a:pPr>
-            <a:r>
-              <a:rPr sz="1900" i="0" b="0">
-                <a:solidFill>
-                  <a:srgbClr val="858585"/>
-                </a:solidFill>
-                <a:latin typeface="Consolas"/>
-              </a:rPr>
-              <a:t>12</a:t>
             </a:r>
           </a:p>
         </p:txBody>
@@ -9456,7 +9403,7 @@
         <p:spPr>
           <a:xfrm>
             <a:off x="1188720" y="1719072"/>
-            <a:ext cx="10271455" cy="4136647"/>
+            <a:ext cx="5986083" cy="1675626"/>
           </a:xfrm>
           <a:prstGeom prst="rect">
             <a:avLst/>
@@ -9471,11 +9418,11 @@
           <a:p>
             <a:pPr>
               <a:spcAft>
-                <a:spcPts val="407"/>
+                <a:spcPts val="300"/>
               </a:spcAft>
             </a:pPr>
             <a:r>
-              <a:rPr sz="1900" i="0" b="0">
+              <a:rPr sz="1400" i="0" b="0">
                 <a:solidFill>
                   <a:srgbClr val="D4D4D4"/>
                 </a:solidFill>
@@ -9484,7 +9431,7 @@
               <a:t>flowchart</a:t>
             </a:r>
             <a:r>
-              <a:rPr sz="1900" i="0" b="0">
+              <a:rPr sz="1400" i="0" b="0">
                 <a:solidFill>
                   <a:srgbClr val="D4D4D4"/>
                 </a:solidFill>
@@ -9493,23 +9440,23 @@
               <a:t> </a:t>
             </a:r>
             <a:r>
-              <a:rPr sz="1900" i="0" b="0">
-                <a:solidFill>
-                  <a:srgbClr val="D4D4D4"/>
-                </a:solidFill>
-                <a:latin typeface="Consolas"/>
-              </a:rPr>
-              <a:t>LR</a:t>
+              <a:rPr sz="1400" i="0" b="0">
+                <a:solidFill>
+                  <a:srgbClr val="D4D4D4"/>
+                </a:solidFill>
+                <a:latin typeface="Consolas"/>
+              </a:rPr>
+              <a:t>TB</a:t>
             </a:r>
           </a:p>
           <a:p>
             <a:pPr>
               <a:spcAft>
-                <a:spcPts val="407"/>
+                <a:spcPts val="300"/>
               </a:spcAft>
             </a:pPr>
             <a:r>
-              <a:rPr sz="1900" i="0" b="0">
+              <a:rPr sz="1400" i="0" b="0">
                 <a:solidFill>
                   <a:srgbClr val="D4D4D4"/>
                 </a:solidFill>
@@ -9518,7 +9465,7 @@
               <a:t>  </a:t>
             </a:r>
             <a:r>
-              <a:rPr sz="1900" i="0" b="0">
+              <a:rPr sz="1400" i="0" b="0">
                 <a:solidFill>
                   <a:srgbClr val="D4D4D4"/>
                 </a:solidFill>
@@ -9527,7 +9474,7 @@
               <a:t>A</a:t>
             </a:r>
             <a:r>
-              <a:rPr sz="1900" i="0" b="0">
+              <a:rPr sz="1400" i="0" b="0">
                 <a:solidFill>
                   <a:srgbClr val="D4D4D4"/>
                 </a:solidFill>
@@ -9536,7 +9483,7 @@
               <a:t>[</a:t>
             </a:r>
             <a:r>
-              <a:rPr sz="1900" i="0" b="0">
+              <a:rPr sz="1400" i="0" b="0">
                 <a:solidFill>
                   <a:srgbClr val="D4D4D4"/>
                 </a:solidFill>
@@ -9545,7 +9492,7 @@
               <a:t>Requisitos</a:t>
             </a:r>
             <a:r>
-              <a:rPr sz="1900" i="0" b="0">
+              <a:rPr sz="1400" i="0" b="0">
                 <a:solidFill>
                   <a:srgbClr val="D4D4D4"/>
                 </a:solidFill>
@@ -9554,7 +9501,7 @@
               <a:t>] --&gt;|</a:t>
             </a:r>
             <a:r>
-              <a:rPr sz="1900" i="0" b="0">
+              <a:rPr sz="1400" i="0" b="0">
                 <a:solidFill>
                   <a:srgbClr val="D4D4D4"/>
                 </a:solidFill>
@@ -9563,7 +9510,7 @@
               <a:t>RF</a:t>
             </a:r>
             <a:r>
-              <a:rPr sz="1900" i="0" b="0">
+              <a:rPr sz="1400" i="0" b="0">
                 <a:solidFill>
                   <a:srgbClr val="D4D4D4"/>
                 </a:solidFill>
@@ -9572,7 +9519,7 @@
               <a:t>-</a:t>
             </a:r>
             <a:r>
-              <a:rPr sz="1900" i="0" b="0">
+              <a:rPr sz="1400" i="0" b="0">
                 <a:solidFill>
                   <a:srgbClr val="B5CEA8"/>
                 </a:solidFill>
@@ -9581,7 +9528,7 @@
               <a:t>01</a:t>
             </a:r>
             <a:r>
-              <a:rPr sz="1900" i="0" b="0">
+              <a:rPr sz="1400" i="0" b="0">
                 <a:solidFill>
                   <a:srgbClr val="D4D4D4"/>
                 </a:solidFill>
@@ -9590,7 +9537,7 @@
               <a:t> </a:t>
             </a:r>
             <a:r>
-              <a:rPr sz="1900" i="0" b="0">
+              <a:rPr sz="1400" i="0" b="0">
                 <a:solidFill>
                   <a:srgbClr val="D4D4D4"/>
                 </a:solidFill>
@@ -9599,7 +9546,7 @@
               <a:t>a</a:t>
             </a:r>
             <a:r>
-              <a:rPr sz="1900" i="0" b="0">
+              <a:rPr sz="1400" i="0" b="0">
                 <a:solidFill>
                   <a:srgbClr val="D4D4D4"/>
                 </a:solidFill>
@@ -9608,7 +9555,7 @@
               <a:t> </a:t>
             </a:r>
             <a:r>
-              <a:rPr sz="1900" i="0" b="0">
+              <a:rPr sz="1400" i="0" b="0">
                 <a:solidFill>
                   <a:srgbClr val="D4D4D4"/>
                 </a:solidFill>
@@ -9617,7 +9564,7 @@
               <a:t>RF</a:t>
             </a:r>
             <a:r>
-              <a:rPr sz="1900" i="0" b="0">
+              <a:rPr sz="1400" i="0" b="0">
                 <a:solidFill>
                   <a:srgbClr val="D4D4D4"/>
                 </a:solidFill>
@@ -9626,7 +9573,7 @@
               <a:t>-</a:t>
             </a:r>
             <a:r>
-              <a:rPr sz="1900" i="0" b="0">
+              <a:rPr sz="1400" i="0" b="0">
                 <a:solidFill>
                   <a:srgbClr val="B5CEA8"/>
                 </a:solidFill>
@@ -9635,7 +9582,7 @@
               <a:t>12</a:t>
             </a:r>
             <a:r>
-              <a:rPr sz="1900" i="0" b="0">
+              <a:rPr sz="1400" i="0" b="0">
                 <a:solidFill>
                   <a:srgbClr val="D4D4D4"/>
                 </a:solidFill>
@@ -9644,7 +9591,7 @@
               <a:t> </a:t>
             </a:r>
             <a:r>
-              <a:rPr sz="1900" i="0" b="0">
+              <a:rPr sz="1400" i="0" b="0">
                 <a:solidFill>
                   <a:srgbClr val="D4D4D4"/>
                 </a:solidFill>
@@ -9653,7 +9600,7 @@
               <a:t>aprobados</a:t>
             </a:r>
             <a:r>
-              <a:rPr sz="1900" i="0" b="0">
+              <a:rPr sz="1400" i="0" b="0">
                 <a:solidFill>
                   <a:srgbClr val="D4D4D4"/>
                 </a:solidFill>
@@ -9662,7 +9609,7 @@
               <a:t>| </a:t>
             </a:r>
             <a:r>
-              <a:rPr sz="1900" i="0" b="0">
+              <a:rPr sz="1400" i="0" b="0">
                 <a:solidFill>
                   <a:srgbClr val="D4D4D4"/>
                 </a:solidFill>
@@ -9671,7 +9618,7 @@
               <a:t>B</a:t>
             </a:r>
             <a:r>
-              <a:rPr sz="1900" i="0" b="0">
+              <a:rPr sz="1400" i="0" b="0">
                 <a:solidFill>
                   <a:srgbClr val="D4D4D4"/>
                 </a:solidFill>
@@ -9680,7 +9627,7 @@
               <a:t>[</a:t>
             </a:r>
             <a:r>
-              <a:rPr sz="1900" i="0" b="0">
+              <a:rPr sz="1400" i="0" b="0">
                 <a:solidFill>
                   <a:srgbClr val="D4D4D4"/>
                 </a:solidFill>
@@ -9689,7 +9636,7 @@
               <a:t>Diseno</a:t>
             </a:r>
             <a:r>
-              <a:rPr sz="1900" i="0" b="0">
+              <a:rPr sz="1400" i="0" b="0">
                 <a:solidFill>
                   <a:srgbClr val="D4D4D4"/>
                 </a:solidFill>
@@ -9701,11 +9648,11 @@
           <a:p>
             <a:pPr>
               <a:spcAft>
-                <a:spcPts val="407"/>
+                <a:spcPts val="300"/>
               </a:spcAft>
             </a:pPr>
             <a:r>
-              <a:rPr sz="1900" i="0" b="0">
+              <a:rPr sz="1400" i="0" b="0">
                 <a:solidFill>
                   <a:srgbClr val="D4D4D4"/>
                 </a:solidFill>
@@ -9714,7 +9661,7 @@
               <a:t>  </a:t>
             </a:r>
             <a:r>
-              <a:rPr sz="1900" i="0" b="0">
+              <a:rPr sz="1400" i="0" b="0">
                 <a:solidFill>
                   <a:srgbClr val="D4D4D4"/>
                 </a:solidFill>
@@ -9723,7 +9670,7 @@
               <a:t>B</a:t>
             </a:r>
             <a:r>
-              <a:rPr sz="1900" i="0" b="0">
+              <a:rPr sz="1400" i="0" b="0">
                 <a:solidFill>
                   <a:srgbClr val="D4D4D4"/>
                 </a:solidFill>
@@ -9732,7 +9679,7 @@
               <a:t> --&gt;|</a:t>
             </a:r>
             <a:r>
-              <a:rPr sz="1900" i="0" b="0">
+              <a:rPr sz="1400" i="0" b="0">
                 <a:solidFill>
                   <a:srgbClr val="D4D4D4"/>
                 </a:solidFill>
@@ -9741,7 +9688,7 @@
               <a:t>Casos</a:t>
             </a:r>
             <a:r>
-              <a:rPr sz="1900" i="0" b="0">
+              <a:rPr sz="1400" i="0" b="0">
                 <a:solidFill>
                   <a:srgbClr val="D4D4D4"/>
                 </a:solidFill>
@@ -9750,7 +9697,7 @@
               <a:t> </a:t>
             </a:r>
             <a:r>
-              <a:rPr sz="1900" i="0" b="0">
+              <a:rPr sz="1400" i="0" b="0">
                 <a:solidFill>
                   <a:srgbClr val="D4D4D4"/>
                 </a:solidFill>
@@ -9759,7 +9706,7 @@
               <a:t>de</a:t>
             </a:r>
             <a:r>
-              <a:rPr sz="1900" i="0" b="0">
+              <a:rPr sz="1400" i="0" b="0">
                 <a:solidFill>
                   <a:srgbClr val="D4D4D4"/>
                 </a:solidFill>
@@ -9768,7 +9715,7 @@
               <a:t> </a:t>
             </a:r>
             <a:r>
-              <a:rPr sz="1900" i="0" b="0">
+              <a:rPr sz="1400" i="0" b="0">
                 <a:solidFill>
                   <a:srgbClr val="D4D4D4"/>
                 </a:solidFill>
@@ -9777,7 +9724,7 @@
               <a:t>uso</a:t>
             </a:r>
             <a:r>
-              <a:rPr sz="1900" i="0" b="0">
+              <a:rPr sz="1400" i="0" b="0">
                 <a:solidFill>
                   <a:srgbClr val="D4D4D4"/>
                 </a:solidFill>
@@ -9786,7 +9733,7 @@
               <a:t> + </a:t>
             </a:r>
             <a:r>
-              <a:rPr sz="1900" i="0" b="0">
+              <a:rPr sz="1400" i="0" b="0">
                 <a:solidFill>
                   <a:srgbClr val="D4D4D4"/>
                 </a:solidFill>
@@ -9795,7 +9742,7 @@
               <a:t>clases</a:t>
             </a:r>
             <a:r>
-              <a:rPr sz="1900" i="0" b="0">
+              <a:rPr sz="1400" i="0" b="0">
                 <a:solidFill>
                   <a:srgbClr val="D4D4D4"/>
                 </a:solidFill>
@@ -9804,7 +9751,7 @@
               <a:t> + </a:t>
             </a:r>
             <a:r>
-              <a:rPr sz="1900" i="0" b="0">
+              <a:rPr sz="1400" i="0" b="0">
                 <a:solidFill>
                   <a:srgbClr val="D4D4D4"/>
                 </a:solidFill>
@@ -9813,7 +9760,7 @@
               <a:t>mockups</a:t>
             </a:r>
             <a:r>
-              <a:rPr sz="1900" i="0" b="0">
+              <a:rPr sz="1400" i="0" b="0">
                 <a:solidFill>
                   <a:srgbClr val="D4D4D4"/>
                 </a:solidFill>
@@ -9822,7 +9769,7 @@
               <a:t>| </a:t>
             </a:r>
             <a:r>
-              <a:rPr sz="1900" i="0" b="0">
+              <a:rPr sz="1400" i="0" b="0">
                 <a:solidFill>
                   <a:srgbClr val="D4D4D4"/>
                 </a:solidFill>
@@ -9831,7 +9778,7 @@
               <a:t>C</a:t>
             </a:r>
             <a:r>
-              <a:rPr sz="1900" i="0" b="0">
+              <a:rPr sz="1400" i="0" b="0">
                 <a:solidFill>
                   <a:srgbClr val="D4D4D4"/>
                 </a:solidFill>
@@ -9840,7 +9787,7 @@
               <a:t>[</a:t>
             </a:r>
             <a:r>
-              <a:rPr sz="1900" i="0" b="0">
+              <a:rPr sz="1400" i="0" b="0">
                 <a:solidFill>
                   <a:srgbClr val="D4D4D4"/>
                 </a:solidFill>
@@ -9849,7 +9796,7 @@
               <a:t>Construccion</a:t>
             </a:r>
             <a:r>
-              <a:rPr sz="1900" i="0" b="0">
+              <a:rPr sz="1400" i="0" b="0">
                 <a:solidFill>
                   <a:srgbClr val="D4D4D4"/>
                 </a:solidFill>
@@ -9861,11 +9808,11 @@
           <a:p>
             <a:pPr>
               <a:spcAft>
-                <a:spcPts val="407"/>
+                <a:spcPts val="300"/>
               </a:spcAft>
             </a:pPr>
             <a:r>
-              <a:rPr sz="1900" i="0" b="0">
+              <a:rPr sz="1400" i="0" b="0">
                 <a:solidFill>
                   <a:srgbClr val="D4D4D4"/>
                 </a:solidFill>
@@ -9874,7 +9821,7 @@
               <a:t>  </a:t>
             </a:r>
             <a:r>
-              <a:rPr sz="1900" i="0" b="0">
+              <a:rPr sz="1400" i="0" b="0">
                 <a:solidFill>
                   <a:srgbClr val="D4D4D4"/>
                 </a:solidFill>
@@ -9883,7 +9830,7 @@
               <a:t>C</a:t>
             </a:r>
             <a:r>
-              <a:rPr sz="1900" i="0" b="0">
+              <a:rPr sz="1400" i="0" b="0">
                 <a:solidFill>
                   <a:srgbClr val="D4D4D4"/>
                 </a:solidFill>
@@ -9892,7 +9839,7 @@
               <a:t> --&gt;|</a:t>
             </a:r>
             <a:r>
-              <a:rPr sz="1900" i="0" b="0">
+              <a:rPr sz="1400" i="0" b="0">
                 <a:solidFill>
                   <a:srgbClr val="D4D4D4"/>
                 </a:solidFill>
@@ -9901,7 +9848,7 @@
               <a:t>Modulo</a:t>
             </a:r>
             <a:r>
-              <a:rPr sz="1900" i="0" b="0">
+              <a:rPr sz="1400" i="0" b="0">
                 <a:solidFill>
                   <a:srgbClr val="D4D4D4"/>
                 </a:solidFill>
@@ -9910,7 +9857,7 @@
               <a:t> </a:t>
             </a:r>
             <a:r>
-              <a:rPr sz="1900" i="0" b="0">
+              <a:rPr sz="1400" i="0" b="0">
                 <a:solidFill>
                   <a:srgbClr val="D4D4D4"/>
                 </a:solidFill>
@@ -9919,7 +9866,7 @@
               <a:t>ficha</a:t>
             </a:r>
             <a:r>
-              <a:rPr sz="1900" i="0" b="0">
+              <a:rPr sz="1400" i="0" b="0">
                 <a:solidFill>
                   <a:srgbClr val="D4D4D4"/>
                 </a:solidFill>
@@ -9928,7 +9875,7 @@
               <a:t> </a:t>
             </a:r>
             <a:r>
-              <a:rPr sz="1900" i="0" b="0">
+              <a:rPr sz="1400" i="0" b="0">
                 <a:solidFill>
                   <a:srgbClr val="D4D4D4"/>
                 </a:solidFill>
@@ -9937,7 +9884,7 @@
               <a:t>del</a:t>
             </a:r>
             <a:r>
-              <a:rPr sz="1900" i="0" b="0">
+              <a:rPr sz="1400" i="0" b="0">
                 <a:solidFill>
                   <a:srgbClr val="D4D4D4"/>
                 </a:solidFill>
@@ -9946,7 +9893,7 @@
               <a:t> </a:t>
             </a:r>
             <a:r>
-              <a:rPr sz="1900" i="0" b="0">
+              <a:rPr sz="1400" i="0" b="0">
                 <a:solidFill>
                   <a:srgbClr val="D4D4D4"/>
                 </a:solidFill>
@@ -9955,7 +9902,7 @@
               <a:t>paciente</a:t>
             </a:r>
             <a:r>
-              <a:rPr sz="1900" i="0" b="0">
+              <a:rPr sz="1400" i="0" b="0">
                 <a:solidFill>
                   <a:srgbClr val="D4D4D4"/>
                 </a:solidFill>
@@ -9964,7 +9911,7 @@
               <a:t>| </a:t>
             </a:r>
             <a:r>
-              <a:rPr sz="1900" i="0" b="0">
+              <a:rPr sz="1400" i="0" b="0">
                 <a:solidFill>
                   <a:srgbClr val="D4D4D4"/>
                 </a:solidFill>
@@ -9973,7 +9920,7 @@
               <a:t>D</a:t>
             </a:r>
             <a:r>
-              <a:rPr sz="1900" i="0" b="0">
+              <a:rPr sz="1400" i="0" b="0">
                 <a:solidFill>
                   <a:srgbClr val="D4D4D4"/>
                 </a:solidFill>
@@ -9982,7 +9929,7 @@
               <a:t>[</a:t>
             </a:r>
             <a:r>
-              <a:rPr sz="1900" i="0" b="0">
+              <a:rPr sz="1400" i="0" b="0">
                 <a:solidFill>
                   <a:srgbClr val="D4D4D4"/>
                 </a:solidFill>
@@ -9991,7 +9938,7 @@
               <a:t>Pruebas</a:t>
             </a:r>
             <a:r>
-              <a:rPr sz="1900" i="0" b="0">
+              <a:rPr sz="1400" i="0" b="0">
                 <a:solidFill>
                   <a:srgbClr val="D4D4D4"/>
                 </a:solidFill>
@@ -10003,11 +9950,11 @@
           <a:p>
             <a:pPr>
               <a:spcAft>
-                <a:spcPts val="407"/>
+                <a:spcPts val="300"/>
               </a:spcAft>
             </a:pPr>
             <a:r>
-              <a:rPr sz="1900" i="0" b="0">
+              <a:rPr sz="1400" i="0" b="0">
                 <a:solidFill>
                   <a:srgbClr val="D4D4D4"/>
                 </a:solidFill>
@@ -10016,7 +9963,7 @@
               <a:t>  </a:t>
             </a:r>
             <a:r>
-              <a:rPr sz="1900" i="0" b="0">
+              <a:rPr sz="1400" i="0" b="0">
                 <a:solidFill>
                   <a:srgbClr val="D4D4D4"/>
                 </a:solidFill>
@@ -10025,7 +9972,7 @@
               <a:t>D</a:t>
             </a:r>
             <a:r>
-              <a:rPr sz="1900" i="0" b="0">
+              <a:rPr sz="1400" i="0" b="0">
                 <a:solidFill>
                   <a:srgbClr val="D4D4D4"/>
                 </a:solidFill>
@@ -10034,7 +9981,7 @@
               <a:t> --&gt;|</a:t>
             </a:r>
             <a:r>
-              <a:rPr sz="1900" i="0" b="0">
+              <a:rPr sz="1400" i="0" b="0">
                 <a:solidFill>
                   <a:srgbClr val="D4D4D4"/>
                 </a:solidFill>
@@ -10043,7 +9990,7 @@
               <a:t>Acta</a:t>
             </a:r>
             <a:r>
-              <a:rPr sz="1900" i="0" b="0">
+              <a:rPr sz="1400" i="0" b="0">
                 <a:solidFill>
                   <a:srgbClr val="D4D4D4"/>
                 </a:solidFill>
@@ -10052,7 +9999,7 @@
               <a:t> </a:t>
             </a:r>
             <a:r>
-              <a:rPr sz="1900" i="0" b="0">
+              <a:rPr sz="1400" i="0" b="0">
                 <a:solidFill>
                   <a:srgbClr val="D4D4D4"/>
                 </a:solidFill>
@@ -10061,7 +10008,7 @@
               <a:t>de</a:t>
             </a:r>
             <a:r>
-              <a:rPr sz="1900" i="0" b="0">
+              <a:rPr sz="1400" i="0" b="0">
                 <a:solidFill>
                   <a:srgbClr val="D4D4D4"/>
                 </a:solidFill>
@@ -10070,7 +10017,7 @@
               <a:t> </a:t>
             </a:r>
             <a:r>
-              <a:rPr sz="1900" i="0" b="0">
+              <a:rPr sz="1400" i="0" b="0">
                 <a:solidFill>
                   <a:srgbClr val="D4D4D4"/>
                 </a:solidFill>
@@ -10079,7 +10026,7 @@
               <a:t>aceptacion</a:t>
             </a:r>
             <a:r>
-              <a:rPr sz="1900" i="0" b="0">
+              <a:rPr sz="1400" i="0" b="0">
                 <a:solidFill>
                   <a:srgbClr val="D4D4D4"/>
                 </a:solidFill>
@@ -10088,7 +10035,7 @@
               <a:t>| </a:t>
             </a:r>
             <a:r>
-              <a:rPr sz="1900" i="0" b="0">
+              <a:rPr sz="1400" i="0" b="0">
                 <a:solidFill>
                   <a:srgbClr val="D4D4D4"/>
                 </a:solidFill>
@@ -10097,7 +10044,7 @@
               <a:t>E</a:t>
             </a:r>
             <a:r>
-              <a:rPr sz="1900" i="0" b="0">
+              <a:rPr sz="1400" i="0" b="0">
                 <a:solidFill>
                   <a:srgbClr val="D4D4D4"/>
                 </a:solidFill>
@@ -10106,7 +10053,7 @@
               <a:t>[</a:t>
             </a:r>
             <a:r>
-              <a:rPr sz="1900" i="0" b="0">
+              <a:rPr sz="1400" i="0" b="0">
                 <a:solidFill>
                   <a:srgbClr val="D4D4D4"/>
                 </a:solidFill>
@@ -10115,7 +10062,7 @@
               <a:t>Operacion</a:t>
             </a:r>
             <a:r>
-              <a:rPr sz="1900" i="0" b="0">
+              <a:rPr sz="1400" i="0" b="0">
                 <a:solidFill>
                   <a:srgbClr val="D4D4D4"/>
                 </a:solidFill>
@@ -10124,7 +10071,7 @@
               <a:t> </a:t>
             </a:r>
             <a:r>
-              <a:rPr sz="1900" i="0" b="0">
+              <a:rPr sz="1400" i="0" b="0">
                 <a:solidFill>
                   <a:srgbClr val="D4D4D4"/>
                 </a:solidFill>
@@ -10133,7 +10080,7 @@
               <a:t>y</a:t>
             </a:r>
             <a:r>
-              <a:rPr sz="1900" i="0" b="0">
+              <a:rPr sz="1400" i="0" b="0">
                 <a:solidFill>
                   <a:srgbClr val="D4D4D4"/>
                 </a:solidFill>
@@ -10142,7 +10089,7 @@
               <a:t> </a:t>
             </a:r>
             <a:r>
-              <a:rPr sz="1900" i="0" b="0">
+              <a:rPr sz="1400" i="0" b="0">
                 <a:solidFill>
                   <a:srgbClr val="D4D4D4"/>
                 </a:solidFill>
@@ -10151,7 +10098,7 @@
               <a:t>mantenimiento</a:t>
             </a:r>
             <a:r>
-              <a:rPr sz="1900" i="0" b="0">
+              <a:rPr sz="1400" i="0" b="0">
                 <a:solidFill>
                   <a:srgbClr val="D4D4D4"/>
                 </a:solidFill>
@@ -10163,11 +10110,11 @@
           <a:p>
             <a:pPr>
               <a:spcAft>
-                <a:spcPts val="407"/>
+                <a:spcPts val="300"/>
               </a:spcAft>
             </a:pPr>
             <a:r>
-              <a:rPr sz="1900" i="0" b="0">
+              <a:rPr sz="1400" i="0" b="0">
                 <a:solidFill>
                   <a:srgbClr val="D4D4D4"/>
                 </a:solidFill>
@@ -10176,7 +10123,7 @@
               <a:t>  </a:t>
             </a:r>
             <a:r>
-              <a:rPr sz="1900" i="0" b="0">
+              <a:rPr sz="1400" i="0" b="0">
                 <a:solidFill>
                   <a:srgbClr val="D4D4D4"/>
                 </a:solidFill>
@@ -10185,7 +10132,7 @@
               <a:t>E</a:t>
             </a:r>
             <a:r>
-              <a:rPr sz="1900" i="0" b="0">
+              <a:rPr sz="1400" i="0" b="0">
                 <a:solidFill>
                   <a:srgbClr val="D4D4D4"/>
                 </a:solidFill>
@@ -10194,7 +10141,7 @@
               <a:t> -.-&gt;|</a:t>
             </a:r>
             <a:r>
-              <a:rPr sz="1900" i="0" b="0">
+              <a:rPr sz="1400" i="0" b="0">
                 <a:solidFill>
                   <a:srgbClr val="D4D4D4"/>
                 </a:solidFill>
@@ -10203,7 +10150,7 @@
               <a:t>Solicitud</a:t>
             </a:r>
             <a:r>
-              <a:rPr sz="1900" i="0" b="0">
+              <a:rPr sz="1400" i="0" b="0">
                 <a:solidFill>
                   <a:srgbClr val="D4D4D4"/>
                 </a:solidFill>
@@ -10212,7 +10159,7 @@
               <a:t>: </a:t>
             </a:r>
             <a:r>
-              <a:rPr sz="1900" i="0" b="0">
+              <a:rPr sz="1400" i="0" b="0">
                 <a:solidFill>
                   <a:srgbClr val="D4D4D4"/>
                 </a:solidFill>
@@ -10221,7 +10168,7 @@
               <a:t>vacunacion</a:t>
             </a:r>
             <a:r>
-              <a:rPr sz="1900" i="0" b="0">
+              <a:rPr sz="1400" i="0" b="0">
                 <a:solidFill>
                   <a:srgbClr val="D4D4D4"/>
                 </a:solidFill>
@@ -10230,7 +10177,7 @@
               <a:t> </a:t>
             </a:r>
             <a:r>
-              <a:rPr sz="1900" i="0" b="0">
+              <a:rPr sz="1400" i="0" b="0">
                 <a:solidFill>
                   <a:srgbClr val="D4D4D4"/>
                 </a:solidFill>
@@ -10239,7 +10186,7 @@
               <a:t>a</a:t>
             </a:r>
             <a:r>
-              <a:rPr sz="1900" i="0" b="0">
+              <a:rPr sz="1400" i="0" b="0">
                 <a:solidFill>
                   <a:srgbClr val="D4D4D4"/>
                 </a:solidFill>
@@ -10248,7 +10195,7 @@
               <a:t> </a:t>
             </a:r>
             <a:r>
-              <a:rPr sz="1900" i="0" b="0">
+              <a:rPr sz="1400" i="0" b="0">
                 <a:solidFill>
                   <a:srgbClr val="D4D4D4"/>
                 </a:solidFill>
@@ -10257,7 +10204,7 @@
               <a:t>domicilio</a:t>
             </a:r>
             <a:r>
-              <a:rPr sz="1900" i="0" b="0">
+              <a:rPr sz="1400" i="0" b="0">
                 <a:solidFill>
                   <a:srgbClr val="D4D4D4"/>
                 </a:solidFill>
@@ -10266,7 +10213,7 @@
               <a:t>| </a:t>
             </a:r>
             <a:r>
-              <a:rPr sz="1900" i="0" b="0">
+              <a:rPr sz="1400" i="0" b="0">
                 <a:solidFill>
                   <a:srgbClr val="D4D4D4"/>
                 </a:solidFill>
@@ -10275,114 +10222,87 @@
               <a:t>A</a:t>
             </a:r>
           </a:p>
-          <a:p>
-            <a:pPr>
-              <a:spcAft>
-                <a:spcPts val="407"/>
-              </a:spcAft>
-            </a:pPr>
-            <a:r>
-              <a:rPr sz="1900" i="1" b="0">
-                <a:solidFill>
-                  <a:srgbClr val="6A9955"/>
-                </a:solidFill>
-                <a:latin typeface="Consolas"/>
-              </a:rPr>
-              <a:t>%% Recorrido lineal  = UNA sola pasada por A..E</a:t>
-            </a:r>
-          </a:p>
-          <a:p>
-            <a:pPr>
-              <a:spcAft>
-                <a:spcPts val="407"/>
-              </a:spcAft>
-            </a:pPr>
-            <a:r>
-              <a:rPr sz="1900" i="1" b="0">
-                <a:solidFill>
-                  <a:srgbClr val="6A9955"/>
-                </a:solidFill>
-                <a:latin typeface="Consolas"/>
-              </a:rPr>
-              <a:t>%% Recorrido en ciclos = TRES pasadas por A..E</a:t>
-            </a:r>
-          </a:p>
-          <a:p>
-            <a:pPr>
-              <a:spcAft>
-                <a:spcPts val="407"/>
-              </a:spcAft>
-            </a:pPr>
-            <a:r>
-              <a:rPr sz="1900" i="1" b="0">
-                <a:solidFill>
-                  <a:srgbClr val="6A9955"/>
-                </a:solidFill>
-                <a:latin typeface="Consolas"/>
-              </a:rPr>
-              <a:t>%%   Vuelta 1: ficha del paciente</a:t>
-            </a:r>
-          </a:p>
-          <a:p>
-            <a:pPr>
-              <a:spcAft>
-                <a:spcPts val="407"/>
-              </a:spcAft>
-            </a:pPr>
-            <a:r>
-              <a:rPr sz="1900" i="1" b="0">
-                <a:solidFill>
-                  <a:srgbClr val="6A9955"/>
-                </a:solidFill>
-                <a:latin typeface="Consolas"/>
-              </a:rPr>
-              <a:t>%%   Vuelta 2: historia clinica y busqueda</a:t>
-            </a:r>
-          </a:p>
-          <a:p>
-            <a:pPr>
-              <a:spcAft>
-                <a:spcPts val="407"/>
-              </a:spcAft>
-            </a:pPr>
-            <a:r>
-              <a:rPr sz="1900" i="1" b="0">
-                <a:solidFill>
-                  <a:srgbClr val="6A9955"/>
-                </a:solidFill>
-                <a:latin typeface="Consolas"/>
-              </a:rPr>
-              <a:t>%%   Vuelta 3: reportes y metricas</a:t>
-            </a:r>
-          </a:p>
-          <a:p>
-            <a:pPr>
-              <a:spcAft>
-                <a:spcPts val="407"/>
-              </a:spcAft>
-            </a:pPr>
-            <a:r>
-              <a:rPr sz="1900" i="1" b="0">
-                <a:solidFill>
-                  <a:srgbClr val="6A9955"/>
-                </a:solidFill>
-                <a:latin typeface="Consolas"/>
-              </a:rPr>
-              <a:t>%% Las cajas nunca cambian; lo que cambia es cuantas veces se recorren</a:t>
-            </a:r>
-          </a:p>
-        </p:txBody>
-      </p:sp>
-      <p:sp>
-        <p:nvSpPr>
-          <p:cNvPr id="13" name="TextBox 12"/>
+        </p:txBody>
+      </p:sp>
+      <p:sp>
+        <p:nvSpPr>
+          <p:cNvPr id="13" name="Rounded Rectangle 12"/>
+          <p:cNvSpPr/>
+          <p:nvPr/>
+        </p:nvSpPr>
+        <p:spPr>
+          <a:xfrm>
+            <a:off x="7668579" y="1261872"/>
+            <a:ext cx="4120780" cy="3318569"/>
+          </a:xfrm>
+          <a:prstGeom prst="roundRect">
+            <a:avLst>
+              <a:gd name="adj" fmla="val 4000"/>
+            </a:avLst>
+          </a:prstGeom>
+          <a:solidFill>
+            <a:srgbClr val="E8EEF4"/>
+          </a:solidFill>
+          <a:ln>
+            <a:noFill/>
+          </a:ln>
+        </p:spPr>
+        <p:style>
+          <a:lnRef idx="1">
+            <a:schemeClr val="accent1"/>
+          </a:lnRef>
+          <a:fillRef idx="3">
+            <a:schemeClr val="accent1"/>
+          </a:fillRef>
+          <a:effectRef idx="2">
+            <a:schemeClr val="accent1"/>
+          </a:effectRef>
+          <a:fontRef idx="minor">
+            <a:schemeClr val="lt1"/>
+          </a:fontRef>
+        </p:style>
+        <p:txBody>
+          <a:bodyPr rtlCol="0" anchor="ctr"/>
+          <a:lstStyle/>
+          <a:p>
+            <a:pPr algn="ctr"/>
+          </a:p>
+        </p:txBody>
+      </p:sp>
+      <p:pic>
+        <p:nvPicPr>
+          <p:cNvPr id="14" name="Picture 13" descr="dg-ciclo-paso1.png"/>
+          <p:cNvPicPr>
+            <a:picLocks noChangeAspect="1"/>
+          </p:cNvPicPr>
+          <p:nvPr/>
+        </p:nvPicPr>
+        <p:blipFill>
+          <a:blip r:embed="rId2"/>
+          <a:stretch>
+            <a:fillRect/>
+          </a:stretch>
+        </p:blipFill>
+        <p:spPr>
+          <a:xfrm>
+            <a:off x="7723443" y="1316736"/>
+            <a:ext cx="4011052" cy="3208841"/>
+          </a:xfrm>
+          <a:prstGeom prst="rect">
+            <a:avLst/>
+          </a:prstGeom>
+        </p:spPr>
+      </p:pic>
+      <p:sp>
+        <p:nvSpPr>
+          <p:cNvPr id="15" name="TextBox 14"/>
           <p:cNvSpPr txBox="1"/>
           <p:nvPr/>
         </p:nvSpPr>
         <p:spPr>
           <a:xfrm>
-            <a:off x="457200" y="6035040"/>
-            <a:ext cx="11277295" cy="365760"/>
+            <a:off x="7723443" y="4580441"/>
+            <a:ext cx="4011052" cy="320040"/>
           </a:xfrm>
           <a:prstGeom prst="rect">
             <a:avLst/>
@@ -10397,6 +10317,41 @@
           <a:p>
             <a:pPr algn="ctr"/>
             <a:r>
+              <a:rPr sz="1200" b="0" i="1">
+                <a:solidFill>
+                  <a:srgbClr val="666666"/>
+                </a:solidFill>
+                <a:latin typeface="Calibri"/>
+              </a:rPr>
+              <a:t>Lo que dibuja este código</a:t>
+            </a:r>
+          </a:p>
+        </p:txBody>
+      </p:sp>
+      <p:sp>
+        <p:nvSpPr>
+          <p:cNvPr id="16" name="TextBox 15"/>
+          <p:cNvSpPr txBox="1"/>
+          <p:nvPr/>
+        </p:nvSpPr>
+        <p:spPr>
+          <a:xfrm>
+            <a:off x="457200" y="6035040"/>
+            <a:ext cx="11277295" cy="365760"/>
+          </a:xfrm>
+          <a:prstGeom prst="rect">
+            <a:avLst/>
+          </a:prstGeom>
+          <a:noFill/>
+        </p:spPr>
+        <p:txBody>
+          <a:bodyPr wrap="square">
+            <a:spAutoFit/>
+          </a:bodyPr>
+          <a:lstStyle/>
+          <a:p>
+            <a:pPr algn="ctr"/>
+            <a:r>
               <a:rPr sz="1300" b="0" i="1">
                 <a:solidFill>
                   <a:srgbClr val="666666"/>
@@ -10410,7 +10365,7 @@
       </p:sp>
       <p:sp>
         <p:nvSpPr>
-          <p:cNvPr id="14" name="TextBox 13"/>
+          <p:cNvPr id="17" name="TextBox 16"/>
           <p:cNvSpPr txBox="1"/>
           <p:nvPr/>
         </p:nvSpPr>
@@ -11710,7 +11665,7 @@
         <p:spPr>
           <a:xfrm>
             <a:off x="457200" y="1261872"/>
-            <a:ext cx="11277295" cy="5031343"/>
+            <a:ext cx="6991923" cy="4812987"/>
           </a:xfrm>
           <a:prstGeom prst="roundRect">
             <a:avLst>
@@ -11755,7 +11710,7 @@
         <p:spPr>
           <a:xfrm>
             <a:off x="457200" y="1261872"/>
-            <a:ext cx="11277295" cy="365760"/>
+            <a:ext cx="6991923" cy="365760"/>
           </a:xfrm>
           <a:prstGeom prst="rect">
             <a:avLst/>
@@ -11927,7 +11882,7 @@
         <p:spPr>
           <a:xfrm>
             <a:off x="1371600" y="1298448"/>
-            <a:ext cx="10180015" cy="292608"/>
+            <a:ext cx="5894643" cy="292608"/>
           </a:xfrm>
           <a:prstGeom prst="rect">
             <a:avLst/>
@@ -11960,7 +11915,7 @@
         <p:spPr>
           <a:xfrm>
             <a:off x="685800" y="1719072"/>
-            <a:ext cx="502920" cy="4436983"/>
+            <a:ext cx="502920" cy="4218627"/>
           </a:xfrm>
           <a:prstGeom prst="rect">
             <a:avLst/>
@@ -11975,11 +11930,11 @@
           <a:p>
             <a:pPr algn="r">
               <a:spcAft>
-                <a:spcPts val="342"/>
+                <a:spcPts val="278"/>
               </a:spcAft>
             </a:pPr>
             <a:r>
-              <a:rPr sz="1600" i="0" b="0">
+              <a:rPr sz="1300" i="0" b="0">
                 <a:solidFill>
                   <a:srgbClr val="858585"/>
                 </a:solidFill>
@@ -11991,11 +11946,11 @@
           <a:p>
             <a:pPr algn="r">
               <a:spcAft>
-                <a:spcPts val="342"/>
+                <a:spcPts val="278"/>
               </a:spcAft>
             </a:pPr>
             <a:r>
-              <a:rPr sz="1600" i="0" b="0">
+              <a:rPr sz="1300" i="0" b="0">
                 <a:solidFill>
                   <a:srgbClr val="858585"/>
                 </a:solidFill>
@@ -12007,11 +11962,11 @@
           <a:p>
             <a:pPr algn="r">
               <a:spcAft>
-                <a:spcPts val="342"/>
+                <a:spcPts val="278"/>
               </a:spcAft>
             </a:pPr>
             <a:r>
-              <a:rPr sz="1600" i="0" b="0">
+              <a:rPr sz="1300" i="0" b="0">
                 <a:solidFill>
                   <a:srgbClr val="858585"/>
                 </a:solidFill>
@@ -12023,11 +11978,11 @@
           <a:p>
             <a:pPr algn="r">
               <a:spcAft>
-                <a:spcPts val="342"/>
+                <a:spcPts val="278"/>
               </a:spcAft>
             </a:pPr>
             <a:r>
-              <a:rPr sz="1600" i="0" b="0">
+              <a:rPr sz="1300" i="0" b="0">
                 <a:solidFill>
                   <a:srgbClr val="858585"/>
                 </a:solidFill>
@@ -12039,11 +11994,11 @@
           <a:p>
             <a:pPr algn="r">
               <a:spcAft>
-                <a:spcPts val="342"/>
+                <a:spcPts val="278"/>
               </a:spcAft>
             </a:pPr>
             <a:r>
-              <a:rPr sz="1600" i="0" b="0">
+              <a:rPr sz="1300" i="0" b="0">
                 <a:solidFill>
                   <a:srgbClr val="858585"/>
                 </a:solidFill>
@@ -12055,11 +12010,11 @@
           <a:p>
             <a:pPr algn="r">
               <a:spcAft>
-                <a:spcPts val="342"/>
+                <a:spcPts val="278"/>
               </a:spcAft>
             </a:pPr>
             <a:r>
-              <a:rPr sz="1600" i="0" b="0">
+              <a:rPr sz="1300" i="0" b="0">
                 <a:solidFill>
                   <a:srgbClr val="858585"/>
                 </a:solidFill>
@@ -12071,11 +12026,11 @@
           <a:p>
             <a:pPr algn="r">
               <a:spcAft>
-                <a:spcPts val="342"/>
+                <a:spcPts val="278"/>
               </a:spcAft>
             </a:pPr>
             <a:r>
-              <a:rPr sz="1600" i="0" b="0">
+              <a:rPr sz="1300" i="0" b="0">
                 <a:solidFill>
                   <a:srgbClr val="858585"/>
                 </a:solidFill>
@@ -12087,11 +12042,11 @@
           <a:p>
             <a:pPr algn="r">
               <a:spcAft>
-                <a:spcPts val="342"/>
+                <a:spcPts val="278"/>
               </a:spcAft>
             </a:pPr>
             <a:r>
-              <a:rPr sz="1600" i="0" b="0">
+              <a:rPr sz="1300" i="0" b="0">
                 <a:solidFill>
                   <a:srgbClr val="858585"/>
                 </a:solidFill>
@@ -12103,11 +12058,11 @@
           <a:p>
             <a:pPr algn="r">
               <a:spcAft>
-                <a:spcPts val="342"/>
+                <a:spcPts val="278"/>
               </a:spcAft>
             </a:pPr>
             <a:r>
-              <a:rPr sz="1600" i="0" b="0">
+              <a:rPr sz="1300" i="0" b="0">
                 <a:solidFill>
                   <a:srgbClr val="858585"/>
                 </a:solidFill>
@@ -12119,11 +12074,11 @@
           <a:p>
             <a:pPr algn="r">
               <a:spcAft>
-                <a:spcPts val="342"/>
+                <a:spcPts val="278"/>
               </a:spcAft>
             </a:pPr>
             <a:r>
-              <a:rPr sz="1600" i="0" b="0">
+              <a:rPr sz="1300" i="0" b="0">
                 <a:solidFill>
                   <a:srgbClr val="858585"/>
                 </a:solidFill>
@@ -12135,11 +12090,11 @@
           <a:p>
             <a:pPr algn="r">
               <a:spcAft>
-                <a:spcPts val="342"/>
+                <a:spcPts val="278"/>
               </a:spcAft>
             </a:pPr>
             <a:r>
-              <a:rPr sz="1600" i="0" b="0">
+              <a:rPr sz="1300" i="0" b="0">
                 <a:solidFill>
                   <a:srgbClr val="858585"/>
                 </a:solidFill>
@@ -12151,11 +12106,11 @@
           <a:p>
             <a:pPr algn="r">
               <a:spcAft>
-                <a:spcPts val="342"/>
+                <a:spcPts val="278"/>
               </a:spcAft>
             </a:pPr>
             <a:r>
-              <a:rPr sz="1600" i="0" b="0">
+              <a:rPr sz="1300" i="0" b="0">
                 <a:solidFill>
                   <a:srgbClr val="858585"/>
                 </a:solidFill>
@@ -12167,11 +12122,11 @@
           <a:p>
             <a:pPr algn="r">
               <a:spcAft>
-                <a:spcPts val="342"/>
+                <a:spcPts val="278"/>
               </a:spcAft>
             </a:pPr>
             <a:r>
-              <a:rPr sz="1600" i="0" b="0">
+              <a:rPr sz="1300" i="0" b="0">
                 <a:solidFill>
                   <a:srgbClr val="858585"/>
                 </a:solidFill>
@@ -12183,11 +12138,11 @@
           <a:p>
             <a:pPr algn="r">
               <a:spcAft>
-                <a:spcPts val="342"/>
+                <a:spcPts val="278"/>
               </a:spcAft>
             </a:pPr>
             <a:r>
-              <a:rPr sz="1600" i="0" b="0">
+              <a:rPr sz="1300" i="0" b="0">
                 <a:solidFill>
                   <a:srgbClr val="858585"/>
                 </a:solidFill>
@@ -12199,17 +12154,49 @@
           <a:p>
             <a:pPr algn="r">
               <a:spcAft>
-                <a:spcPts val="342"/>
+                <a:spcPts val="278"/>
               </a:spcAft>
             </a:pPr>
             <a:r>
-              <a:rPr sz="1600" i="0" b="0">
+              <a:rPr sz="1300" i="0" b="0">
                 <a:solidFill>
                   <a:srgbClr val="858585"/>
                 </a:solidFill>
                 <a:latin typeface="Consolas"/>
               </a:rPr>
               <a:t>15</a:t>
+            </a:r>
+          </a:p>
+          <a:p>
+            <a:pPr algn="r">
+              <a:spcAft>
+                <a:spcPts val="278"/>
+              </a:spcAft>
+            </a:pPr>
+            <a:r>
+              <a:rPr sz="1300" i="0" b="0">
+                <a:solidFill>
+                  <a:srgbClr val="858585"/>
+                </a:solidFill>
+                <a:latin typeface="Consolas"/>
+              </a:rPr>
+              <a:t>16</a:t>
+            </a:r>
+          </a:p>
+          <a:p>
+            <a:pPr algn="r">
+              <a:spcAft>
+                <a:spcPts val="278"/>
+              </a:spcAft>
+            </a:pPr>
+            <a:r>
+              <a:rPr sz="1300" i="0" b="0">
+                <a:solidFill>
+                  <a:srgbClr val="858585"/>
+                </a:solidFill>
+                <a:latin typeface="Consolas"/>
+              </a:rPr>
+              <a:t>17</a:t>
             </a:r>
           </a:p>
         </p:txBody>
@@ -12223,7 +12210,7 @@
         <p:spPr>
           <a:xfrm>
             <a:off x="1188720" y="1719072"/>
-            <a:ext cx="10271455" cy="4436983"/>
+            <a:ext cx="5986083" cy="4218627"/>
           </a:xfrm>
           <a:prstGeom prst="rect">
             <a:avLst/>
@@ -12238,11 +12225,11 @@
           <a:p>
             <a:pPr>
               <a:spcAft>
-                <a:spcPts val="342"/>
+                <a:spcPts val="278"/>
               </a:spcAft>
             </a:pPr>
             <a:r>
-              <a:rPr sz="1600" i="0" b="0">
+              <a:rPr sz="1300" i="0" b="0">
                 <a:solidFill>
                   <a:srgbClr val="D4D4D4"/>
                 </a:solidFill>
@@ -12251,7 +12238,7 @@
               <a:t>flowchart</a:t>
             </a:r>
             <a:r>
-              <a:rPr sz="1600" i="0" b="0">
+              <a:rPr sz="1300" i="0" b="0">
                 <a:solidFill>
                   <a:srgbClr val="D4D4D4"/>
                 </a:solidFill>
@@ -12260,7 +12247,7 @@
               <a:t> </a:t>
             </a:r>
             <a:r>
-              <a:rPr sz="1600" i="0" b="0">
+              <a:rPr sz="1300" i="0" b="0">
                 <a:solidFill>
                   <a:srgbClr val="D4D4D4"/>
                 </a:solidFill>
@@ -12272,11 +12259,11 @@
           <a:p>
             <a:pPr>
               <a:spcAft>
-                <a:spcPts val="342"/>
+                <a:spcPts val="278"/>
               </a:spcAft>
             </a:pPr>
             <a:r>
-              <a:rPr sz="1600" i="0" b="0">
+              <a:rPr sz="1300" i="0" b="0">
                 <a:solidFill>
                   <a:srgbClr val="D4D4D4"/>
                 </a:solidFill>
@@ -12285,7 +12272,7 @@
               <a:t>  </a:t>
             </a:r>
             <a:r>
-              <a:rPr sz="1600" i="0" b="0">
+              <a:rPr sz="1300" i="0" b="0">
                 <a:solidFill>
                   <a:srgbClr val="D4D4D4"/>
                 </a:solidFill>
@@ -12294,7 +12281,7 @@
               <a:t>subgraph</a:t>
             </a:r>
             <a:r>
-              <a:rPr sz="1600" i="0" b="0">
+              <a:rPr sz="1300" i="0" b="0">
                 <a:solidFill>
                   <a:srgbClr val="D4D4D4"/>
                 </a:solidFill>
@@ -12303,7 +12290,7 @@
               <a:t> </a:t>
             </a:r>
             <a:r>
-              <a:rPr sz="1600" i="0" b="0">
+              <a:rPr sz="1300" i="0" b="0">
                 <a:solidFill>
                   <a:srgbClr val="D4D4D4"/>
                 </a:solidFill>
@@ -12312,7 +12299,7 @@
               <a:t>v1</a:t>
             </a:r>
             <a:r>
-              <a:rPr sz="1600" i="0" b="0">
+              <a:rPr sz="1300" i="0" b="0">
                 <a:solidFill>
                   <a:srgbClr val="D4D4D4"/>
                 </a:solidFill>
@@ -12321,7 +12308,7 @@
               <a:t>[</a:t>
             </a:r>
             <a:r>
-              <a:rPr sz="1600" i="0" b="0">
+              <a:rPr sz="1300" i="0" b="0">
                 <a:solidFill>
                   <a:srgbClr val="D4D4D4"/>
                 </a:solidFill>
@@ -12330,7 +12317,7 @@
               <a:t>Vuelta</a:t>
             </a:r>
             <a:r>
-              <a:rPr sz="1600" i="0" b="0">
+              <a:rPr sz="1300" i="0" b="0">
                 <a:solidFill>
                   <a:srgbClr val="D4D4D4"/>
                 </a:solidFill>
@@ -12339,7 +12326,7 @@
               <a:t> </a:t>
             </a:r>
             <a:r>
-              <a:rPr sz="1600" i="0" b="0">
+              <a:rPr sz="1300" i="0" b="0">
                 <a:solidFill>
                   <a:srgbClr val="B5CEA8"/>
                 </a:solidFill>
@@ -12348,7 +12335,7 @@
               <a:t>1</a:t>
             </a:r>
             <a:r>
-              <a:rPr sz="1600" i="0" b="0">
+              <a:rPr sz="1300" i="0" b="0">
                 <a:solidFill>
                   <a:srgbClr val="D4D4D4"/>
                 </a:solidFill>
@@ -12357,7 +12344,7 @@
               <a:t> - </a:t>
             </a:r>
             <a:r>
-              <a:rPr sz="1600" i="0" b="0">
+              <a:rPr sz="1300" i="0" b="0">
                 <a:solidFill>
                   <a:srgbClr val="D4D4D4"/>
                 </a:solidFill>
@@ -12366,7 +12353,7 @@
               <a:t>ficha</a:t>
             </a:r>
             <a:r>
-              <a:rPr sz="1600" i="0" b="0">
+              <a:rPr sz="1300" i="0" b="0">
                 <a:solidFill>
                   <a:srgbClr val="D4D4D4"/>
                 </a:solidFill>
@@ -12375,7 +12362,7 @@
               <a:t> </a:t>
             </a:r>
             <a:r>
-              <a:rPr sz="1600" i="0" b="0">
+              <a:rPr sz="1300" i="0" b="0">
                 <a:solidFill>
                   <a:srgbClr val="D4D4D4"/>
                 </a:solidFill>
@@ -12384,7 +12371,7 @@
               <a:t>del</a:t>
             </a:r>
             <a:r>
-              <a:rPr sz="1600" i="0" b="0">
+              <a:rPr sz="1300" i="0" b="0">
                 <a:solidFill>
                   <a:srgbClr val="D4D4D4"/>
                 </a:solidFill>
@@ -12393,7 +12380,7 @@
               <a:t> </a:t>
             </a:r>
             <a:r>
-              <a:rPr sz="1600" i="0" b="0">
+              <a:rPr sz="1300" i="0" b="0">
                 <a:solidFill>
                   <a:srgbClr val="D4D4D4"/>
                 </a:solidFill>
@@ -12402,7 +12389,7 @@
               <a:t>paciente</a:t>
             </a:r>
             <a:r>
-              <a:rPr sz="1600" i="0" b="0">
+              <a:rPr sz="1300" i="0" b="0">
                 <a:solidFill>
                   <a:srgbClr val="D4D4D4"/>
                 </a:solidFill>
@@ -12414,11 +12401,11 @@
           <a:p>
             <a:pPr>
               <a:spcAft>
-                <a:spcPts val="342"/>
+                <a:spcPts val="278"/>
               </a:spcAft>
             </a:pPr>
             <a:r>
-              <a:rPr sz="1600" i="0" b="0">
+              <a:rPr sz="1300" i="0" b="0">
                 <a:solidFill>
                   <a:srgbClr val="D4D4D4"/>
                 </a:solidFill>
@@ -12427,219 +12414,165 @@
               <a:t>    </a:t>
             </a:r>
             <a:r>
-              <a:rPr sz="1600" i="0" b="0">
-                <a:solidFill>
-                  <a:srgbClr val="D4D4D4"/>
-                </a:solidFill>
-                <a:latin typeface="Consolas"/>
-              </a:rPr>
-              <a:t>r1</a:t>
-            </a:r>
-            <a:r>
-              <a:rPr sz="1600" i="0" b="0">
-                <a:solidFill>
-                  <a:srgbClr val="D4D4D4"/>
-                </a:solidFill>
-                <a:latin typeface="Consolas"/>
-              </a:rPr>
-              <a:t>[</a:t>
-            </a:r>
-            <a:r>
-              <a:rPr sz="1600" i="0" b="0">
-                <a:solidFill>
-                  <a:srgbClr val="D4D4D4"/>
-                </a:solidFill>
-                <a:latin typeface="Consolas"/>
-              </a:rPr>
-              <a:t>Requisitos</a:t>
-            </a:r>
-            <a:r>
-              <a:rPr sz="1600" i="0" b="0">
-                <a:solidFill>
-                  <a:srgbClr val="D4D4D4"/>
-                </a:solidFill>
-                <a:latin typeface="Consolas"/>
-              </a:rPr>
-              <a:t>] --&gt; </a:t>
-            </a:r>
-            <a:r>
-              <a:rPr sz="1600" i="0" b="0">
-                <a:solidFill>
-                  <a:srgbClr val="D4D4D4"/>
-                </a:solidFill>
-                <a:latin typeface="Consolas"/>
-              </a:rPr>
-              <a:t>d1</a:t>
-            </a:r>
-            <a:r>
-              <a:rPr sz="1600" i="0" b="0">
-                <a:solidFill>
-                  <a:srgbClr val="D4D4D4"/>
-                </a:solidFill>
-                <a:latin typeface="Consolas"/>
-              </a:rPr>
-              <a:t>[</a:t>
-            </a:r>
-            <a:r>
-              <a:rPr sz="1600" i="0" b="0">
-                <a:solidFill>
-                  <a:srgbClr val="D4D4D4"/>
-                </a:solidFill>
-                <a:latin typeface="Consolas"/>
-              </a:rPr>
-              <a:t>Diseno</a:t>
-            </a:r>
-            <a:r>
-              <a:rPr sz="1600" i="0" b="0">
-                <a:solidFill>
-                  <a:srgbClr val="D4D4D4"/>
-                </a:solidFill>
-                <a:latin typeface="Consolas"/>
-              </a:rPr>
-              <a:t>] --&gt; </a:t>
-            </a:r>
-            <a:r>
-              <a:rPr sz="1600" i="0" b="0">
-                <a:solidFill>
-                  <a:srgbClr val="D4D4D4"/>
-                </a:solidFill>
-                <a:latin typeface="Consolas"/>
-              </a:rPr>
-              <a:t>c1</a:t>
-            </a:r>
-            <a:r>
-              <a:rPr sz="1600" i="0" b="0">
-                <a:solidFill>
-                  <a:srgbClr val="D4D4D4"/>
-                </a:solidFill>
-                <a:latin typeface="Consolas"/>
-              </a:rPr>
-              <a:t>[</a:t>
-            </a:r>
-            <a:r>
-              <a:rPr sz="1600" i="0" b="0">
-                <a:solidFill>
-                  <a:srgbClr val="D4D4D4"/>
-                </a:solidFill>
-                <a:latin typeface="Consolas"/>
-              </a:rPr>
-              <a:t>Construccion</a:t>
-            </a:r>
-            <a:r>
-              <a:rPr sz="1600" i="0" b="0">
-                <a:solidFill>
-                  <a:srgbClr val="D4D4D4"/>
-                </a:solidFill>
-                <a:latin typeface="Consolas"/>
-              </a:rPr>
-              <a:t>] --&gt; </a:t>
-            </a:r>
-            <a:r>
-              <a:rPr sz="1600" i="0" b="0">
-                <a:solidFill>
-                  <a:srgbClr val="D4D4D4"/>
-                </a:solidFill>
-                <a:latin typeface="Consolas"/>
-              </a:rPr>
-              <a:t>p1</a:t>
-            </a:r>
-            <a:r>
-              <a:rPr sz="1600" i="0" b="0">
-                <a:solidFill>
-                  <a:srgbClr val="D4D4D4"/>
-                </a:solidFill>
-                <a:latin typeface="Consolas"/>
-              </a:rPr>
-              <a:t>[</a:t>
-            </a:r>
-            <a:r>
-              <a:rPr sz="1600" i="0" b="0">
-                <a:solidFill>
-                  <a:srgbClr val="D4D4D4"/>
-                </a:solidFill>
-                <a:latin typeface="Consolas"/>
-              </a:rPr>
-              <a:t>Pruebas</a:t>
-            </a:r>
-            <a:r>
-              <a:rPr sz="1600" i="0" b="0">
-                <a:solidFill>
-                  <a:srgbClr val="D4D4D4"/>
-                </a:solidFill>
-                <a:latin typeface="Consolas"/>
-              </a:rPr>
-              <a:t>]</a:t>
+              <a:rPr sz="1300" i="0" b="0">
+                <a:solidFill>
+                  <a:srgbClr val="D4D4D4"/>
+                </a:solidFill>
+                <a:latin typeface="Consolas"/>
+              </a:rPr>
+              <a:t>direction</a:t>
+            </a:r>
+            <a:r>
+              <a:rPr sz="1300" i="0" b="0">
+                <a:solidFill>
+                  <a:srgbClr val="D4D4D4"/>
+                </a:solidFill>
+                <a:latin typeface="Consolas"/>
+              </a:rPr>
+              <a:t> </a:t>
+            </a:r>
+            <a:r>
+              <a:rPr sz="1300" i="0" b="0">
+                <a:solidFill>
+                  <a:srgbClr val="D4D4D4"/>
+                </a:solidFill>
+                <a:latin typeface="Consolas"/>
+              </a:rPr>
+              <a:t>LR</a:t>
             </a:r>
           </a:p>
           <a:p>
             <a:pPr>
               <a:spcAft>
-                <a:spcPts val="342"/>
+                <a:spcPts val="278"/>
               </a:spcAft>
             </a:pPr>
             <a:r>
-              <a:rPr sz="1600" i="0" b="0">
-                <a:solidFill>
-                  <a:srgbClr val="D4D4D4"/>
-                </a:solidFill>
-                <a:latin typeface="Consolas"/>
-              </a:rPr>
-              <a:t>  </a:t>
-            </a:r>
-            <a:r>
-              <a:rPr sz="1600" i="0" b="0">
-                <a:solidFill>
-                  <a:srgbClr val="D4D4D4"/>
-                </a:solidFill>
-                <a:latin typeface="Consolas"/>
-              </a:rPr>
-              <a:t>end</a:t>
+              <a:rPr sz="1300" i="0" b="0">
+                <a:solidFill>
+                  <a:srgbClr val="D4D4D4"/>
+                </a:solidFill>
+                <a:latin typeface="Consolas"/>
+              </a:rPr>
+              <a:t>    </a:t>
+            </a:r>
+            <a:r>
+              <a:rPr sz="1300" i="0" b="0">
+                <a:solidFill>
+                  <a:srgbClr val="D4D4D4"/>
+                </a:solidFill>
+                <a:latin typeface="Consolas"/>
+              </a:rPr>
+              <a:t>r1</a:t>
+            </a:r>
+            <a:r>
+              <a:rPr sz="1300" i="0" b="0">
+                <a:solidFill>
+                  <a:srgbClr val="D4D4D4"/>
+                </a:solidFill>
+                <a:latin typeface="Consolas"/>
+              </a:rPr>
+              <a:t>[</a:t>
+            </a:r>
+            <a:r>
+              <a:rPr sz="1300" i="0" b="0">
+                <a:solidFill>
+                  <a:srgbClr val="D4D4D4"/>
+                </a:solidFill>
+                <a:latin typeface="Consolas"/>
+              </a:rPr>
+              <a:t>Requisitos</a:t>
+            </a:r>
+            <a:r>
+              <a:rPr sz="1300" i="0" b="0">
+                <a:solidFill>
+                  <a:srgbClr val="D4D4D4"/>
+                </a:solidFill>
+                <a:latin typeface="Consolas"/>
+              </a:rPr>
+              <a:t>] --&gt; </a:t>
+            </a:r>
+            <a:r>
+              <a:rPr sz="1300" i="0" b="0">
+                <a:solidFill>
+                  <a:srgbClr val="D4D4D4"/>
+                </a:solidFill>
+                <a:latin typeface="Consolas"/>
+              </a:rPr>
+              <a:t>d1</a:t>
+            </a:r>
+            <a:r>
+              <a:rPr sz="1300" i="0" b="0">
+                <a:solidFill>
+                  <a:srgbClr val="D4D4D4"/>
+                </a:solidFill>
+                <a:latin typeface="Consolas"/>
+              </a:rPr>
+              <a:t>[</a:t>
+            </a:r>
+            <a:r>
+              <a:rPr sz="1300" i="0" b="0">
+                <a:solidFill>
+                  <a:srgbClr val="D4D4D4"/>
+                </a:solidFill>
+                <a:latin typeface="Consolas"/>
+              </a:rPr>
+              <a:t>Diseno</a:t>
+            </a:r>
+            <a:r>
+              <a:rPr sz="1300" i="0" b="0">
+                <a:solidFill>
+                  <a:srgbClr val="D4D4D4"/>
+                </a:solidFill>
+                <a:latin typeface="Consolas"/>
+              </a:rPr>
+              <a:t>]</a:t>
             </a:r>
           </a:p>
           <a:p>
             <a:pPr>
               <a:spcAft>
-                <a:spcPts val="342"/>
+                <a:spcPts val="278"/>
               </a:spcAft>
             </a:pPr>
             <a:r>
-              <a:rPr sz="1600" i="0" b="0">
-                <a:solidFill>
-                  <a:srgbClr val="D4D4D4"/>
-                </a:solidFill>
-                <a:latin typeface="Consolas"/>
-              </a:rPr>
-              <a:t>  </a:t>
-            </a:r>
-            <a:r>
-              <a:rPr sz="1600" i="0" b="0">
-                <a:solidFill>
-                  <a:srgbClr val="D4D4D4"/>
-                </a:solidFill>
-                <a:latin typeface="Consolas"/>
-              </a:rPr>
-              <a:t>subgraph</a:t>
-            </a:r>
-            <a:r>
-              <a:rPr sz="1600" i="0" b="0">
-                <a:solidFill>
-                  <a:srgbClr val="D4D4D4"/>
-                </a:solidFill>
-                <a:latin typeface="Consolas"/>
-              </a:rPr>
-              <a:t> </a:t>
-            </a:r>
-            <a:r>
-              <a:rPr sz="1600" i="0" b="0">
-                <a:solidFill>
-                  <a:srgbClr val="D4D4D4"/>
-                </a:solidFill>
-                <a:latin typeface="Consolas"/>
-              </a:rPr>
-              <a:t>v2</a:t>
-            </a:r>
-            <a:r>
-              <a:rPr sz="1600" i="0" b="0">
+              <a:rPr sz="1300" i="0" b="0">
+                <a:solidFill>
+                  <a:srgbClr val="D4D4D4"/>
+                </a:solidFill>
+                <a:latin typeface="Consolas"/>
+              </a:rPr>
+              <a:t>    </a:t>
+            </a:r>
+            <a:r>
+              <a:rPr sz="1300" i="0" b="0">
+                <a:solidFill>
+                  <a:srgbClr val="D4D4D4"/>
+                </a:solidFill>
+                <a:latin typeface="Consolas"/>
+              </a:rPr>
+              <a:t>d1</a:t>
+            </a:r>
+            <a:r>
+              <a:rPr sz="1300" i="0" b="0">
+                <a:solidFill>
+                  <a:srgbClr val="D4D4D4"/>
+                </a:solidFill>
+                <a:latin typeface="Consolas"/>
+              </a:rPr>
+              <a:t> --&gt; </a:t>
+            </a:r>
+            <a:r>
+              <a:rPr sz="1300" i="0" b="0">
+                <a:solidFill>
+                  <a:srgbClr val="D4D4D4"/>
+                </a:solidFill>
+                <a:latin typeface="Consolas"/>
+              </a:rPr>
+              <a:t>c1</a:t>
+            </a:r>
+            <a:r>
+              <a:rPr sz="1300" i="0" b="0">
                 <a:solidFill>
                   <a:srgbClr val="D4D4D4"/>
                 </a:solidFill>
@@ -12648,106 +12581,52 @@
               <a:t>[</a:t>
             </a:r>
             <a:r>
-              <a:rPr sz="1600" i="0" b="0">
-                <a:solidFill>
-                  <a:srgbClr val="D4D4D4"/>
-                </a:solidFill>
-                <a:latin typeface="Consolas"/>
-              </a:rPr>
-              <a:t>Vuelta</a:t>
-            </a:r>
-            <a:r>
-              <a:rPr sz="1600" i="0" b="0">
-                <a:solidFill>
-                  <a:srgbClr val="D4D4D4"/>
-                </a:solidFill>
-                <a:latin typeface="Consolas"/>
-              </a:rPr>
-              <a:t> </a:t>
-            </a:r>
-            <a:r>
-              <a:rPr sz="1600" i="0" b="0">
-                <a:solidFill>
-                  <a:srgbClr val="B5CEA8"/>
-                </a:solidFill>
-                <a:latin typeface="Consolas"/>
-              </a:rPr>
-              <a:t>2</a:t>
-            </a:r>
-            <a:r>
-              <a:rPr sz="1600" i="0" b="0">
-                <a:solidFill>
-                  <a:srgbClr val="D4D4D4"/>
-                </a:solidFill>
-                <a:latin typeface="Consolas"/>
-              </a:rPr>
-              <a:t> - </a:t>
-            </a:r>
-            <a:r>
-              <a:rPr sz="1600" i="0" b="0">
-                <a:solidFill>
-                  <a:srgbClr val="D4D4D4"/>
-                </a:solidFill>
-                <a:latin typeface="Consolas"/>
-              </a:rPr>
-              <a:t>historia</a:t>
-            </a:r>
-            <a:r>
-              <a:rPr sz="1600" i="0" b="0">
-                <a:solidFill>
-                  <a:srgbClr val="D4D4D4"/>
-                </a:solidFill>
-                <a:latin typeface="Consolas"/>
-              </a:rPr>
-              <a:t> </a:t>
-            </a:r>
-            <a:r>
-              <a:rPr sz="1600" i="0" b="0">
-                <a:solidFill>
-                  <a:srgbClr val="D4D4D4"/>
-                </a:solidFill>
-                <a:latin typeface="Consolas"/>
-              </a:rPr>
-              <a:t>clinica</a:t>
-            </a:r>
-            <a:r>
-              <a:rPr sz="1600" i="0" b="0">
-                <a:solidFill>
-                  <a:srgbClr val="D4D4D4"/>
-                </a:solidFill>
-                <a:latin typeface="Consolas"/>
-              </a:rPr>
-              <a:t> </a:t>
-            </a:r>
-            <a:r>
-              <a:rPr sz="1600" i="0" b="0">
-                <a:solidFill>
-                  <a:srgbClr val="D4D4D4"/>
-                </a:solidFill>
-                <a:latin typeface="Consolas"/>
-              </a:rPr>
-              <a:t>y</a:t>
-            </a:r>
-            <a:r>
-              <a:rPr sz="1600" i="0" b="0">
-                <a:solidFill>
-                  <a:srgbClr val="D4D4D4"/>
-                </a:solidFill>
-                <a:latin typeface="Consolas"/>
-              </a:rPr>
-              <a:t> </a:t>
-            </a:r>
-            <a:r>
-              <a:rPr sz="1600" i="0" b="0">
-                <a:solidFill>
-                  <a:srgbClr val="D4D4D4"/>
-                </a:solidFill>
-                <a:latin typeface="Consolas"/>
-              </a:rPr>
-              <a:t>busqueda</a:t>
-            </a:r>
-            <a:r>
-              <a:rPr sz="1600" i="0" b="0">
+              <a:rPr sz="1300" i="0" b="0">
+                <a:solidFill>
+                  <a:srgbClr val="D4D4D4"/>
+                </a:solidFill>
+                <a:latin typeface="Consolas"/>
+              </a:rPr>
+              <a:t>Construccion</a:t>
+            </a:r>
+            <a:r>
+              <a:rPr sz="1300" i="0" b="0">
+                <a:solidFill>
+                  <a:srgbClr val="D4D4D4"/>
+                </a:solidFill>
+                <a:latin typeface="Consolas"/>
+              </a:rPr>
+              <a:t>] --&gt; </a:t>
+            </a:r>
+            <a:r>
+              <a:rPr sz="1300" i="0" b="0">
+                <a:solidFill>
+                  <a:srgbClr val="D4D4D4"/>
+                </a:solidFill>
+                <a:latin typeface="Consolas"/>
+              </a:rPr>
+              <a:t>p1</a:t>
+            </a:r>
+            <a:r>
+              <a:rPr sz="1300" i="0" b="0">
+                <a:solidFill>
+                  <a:srgbClr val="D4D4D4"/>
+                </a:solidFill>
+                <a:latin typeface="Consolas"/>
+              </a:rPr>
+              <a:t>[</a:t>
+            </a:r>
+            <a:r>
+              <a:rPr sz="1300" i="0" b="0">
+                <a:solidFill>
+                  <a:srgbClr val="D4D4D4"/>
+                </a:solidFill>
+                <a:latin typeface="Consolas"/>
+              </a:rPr>
+              <a:t>Pruebas</a:t>
+            </a:r>
+            <a:r>
+              <a:rPr sz="1300" i="0" b="0">
                 <a:solidFill>
                   <a:srgbClr val="D4D4D4"/>
                 </a:solidFill>
@@ -12759,171 +12638,36 @@
           <a:p>
             <a:pPr>
               <a:spcAft>
-                <a:spcPts val="342"/>
+                <a:spcPts val="278"/>
               </a:spcAft>
             </a:pPr>
             <a:r>
-              <a:rPr sz="1600" i="0" b="0">
-                <a:solidFill>
-                  <a:srgbClr val="D4D4D4"/>
-                </a:solidFill>
-                <a:latin typeface="Consolas"/>
-              </a:rPr>
-              <a:t>    </a:t>
-            </a:r>
-            <a:r>
-              <a:rPr sz="1600" i="0" b="0">
-                <a:solidFill>
-                  <a:srgbClr val="D4D4D4"/>
-                </a:solidFill>
-                <a:latin typeface="Consolas"/>
-              </a:rPr>
-              <a:t>r2</a:t>
-            </a:r>
-            <a:r>
-              <a:rPr sz="1600" i="0" b="0">
-                <a:solidFill>
-                  <a:srgbClr val="D4D4D4"/>
-                </a:solidFill>
-                <a:latin typeface="Consolas"/>
-              </a:rPr>
-              <a:t>[</a:t>
-            </a:r>
-            <a:r>
-              <a:rPr sz="1600" i="0" b="0">
-                <a:solidFill>
-                  <a:srgbClr val="D4D4D4"/>
-                </a:solidFill>
-                <a:latin typeface="Consolas"/>
-              </a:rPr>
-              <a:t>Requisitos</a:t>
-            </a:r>
-            <a:r>
-              <a:rPr sz="1600" i="0" b="0">
-                <a:solidFill>
-                  <a:srgbClr val="D4D4D4"/>
-                </a:solidFill>
-                <a:latin typeface="Consolas"/>
-              </a:rPr>
-              <a:t>] --&gt; </a:t>
-            </a:r>
-            <a:r>
-              <a:rPr sz="1600" i="0" b="0">
-                <a:solidFill>
-                  <a:srgbClr val="D4D4D4"/>
-                </a:solidFill>
-                <a:latin typeface="Consolas"/>
-              </a:rPr>
-              <a:t>d2</a:t>
-            </a:r>
-            <a:r>
-              <a:rPr sz="1600" i="0" b="0">
-                <a:solidFill>
-                  <a:srgbClr val="D4D4D4"/>
-                </a:solidFill>
-                <a:latin typeface="Consolas"/>
-              </a:rPr>
-              <a:t>[</a:t>
-            </a:r>
-            <a:r>
-              <a:rPr sz="1600" i="0" b="0">
-                <a:solidFill>
-                  <a:srgbClr val="D4D4D4"/>
-                </a:solidFill>
-                <a:latin typeface="Consolas"/>
-              </a:rPr>
-              <a:t>Diseno</a:t>
-            </a:r>
-            <a:r>
-              <a:rPr sz="1600" i="0" b="0">
-                <a:solidFill>
-                  <a:srgbClr val="D4D4D4"/>
-                </a:solidFill>
-                <a:latin typeface="Consolas"/>
-              </a:rPr>
-              <a:t>] --&gt; </a:t>
-            </a:r>
-            <a:r>
-              <a:rPr sz="1600" i="0" b="0">
-                <a:solidFill>
-                  <a:srgbClr val="D4D4D4"/>
-                </a:solidFill>
-                <a:latin typeface="Consolas"/>
-              </a:rPr>
-              <a:t>c2</a:t>
-            </a:r>
-            <a:r>
-              <a:rPr sz="1600" i="0" b="0">
-                <a:solidFill>
-                  <a:srgbClr val="D4D4D4"/>
-                </a:solidFill>
-                <a:latin typeface="Consolas"/>
-              </a:rPr>
-              <a:t>[</a:t>
-            </a:r>
-            <a:r>
-              <a:rPr sz="1600" i="0" b="0">
-                <a:solidFill>
-                  <a:srgbClr val="D4D4D4"/>
-                </a:solidFill>
-                <a:latin typeface="Consolas"/>
-              </a:rPr>
-              <a:t>Construccion</a:t>
-            </a:r>
-            <a:r>
-              <a:rPr sz="1600" i="0" b="0">
-                <a:solidFill>
-                  <a:srgbClr val="D4D4D4"/>
-                </a:solidFill>
-                <a:latin typeface="Consolas"/>
-              </a:rPr>
-              <a:t>] --&gt; </a:t>
-            </a:r>
-            <a:r>
-              <a:rPr sz="1600" i="0" b="0">
-                <a:solidFill>
-                  <a:srgbClr val="D4D4D4"/>
-                </a:solidFill>
-                <a:latin typeface="Consolas"/>
-              </a:rPr>
-              <a:t>p2</a:t>
-            </a:r>
-            <a:r>
-              <a:rPr sz="1600" i="0" b="0">
-                <a:solidFill>
-                  <a:srgbClr val="D4D4D4"/>
-                </a:solidFill>
-                <a:latin typeface="Consolas"/>
-              </a:rPr>
-              <a:t>[</a:t>
-            </a:r>
-            <a:r>
-              <a:rPr sz="1600" i="0" b="0">
-                <a:solidFill>
-                  <a:srgbClr val="D4D4D4"/>
-                </a:solidFill>
-                <a:latin typeface="Consolas"/>
-              </a:rPr>
-              <a:t>Pruebas</a:t>
-            </a:r>
-            <a:r>
-              <a:rPr sz="1600" i="0" b="0">
-                <a:solidFill>
-                  <a:srgbClr val="D4D4D4"/>
-                </a:solidFill>
-                <a:latin typeface="Consolas"/>
-              </a:rPr>
-              <a:t>]</a:t>
+              <a:rPr sz="1300" i="0" b="0">
+                <a:solidFill>
+                  <a:srgbClr val="D4D4D4"/>
+                </a:solidFill>
+                <a:latin typeface="Consolas"/>
+              </a:rPr>
+              <a:t>  </a:t>
+            </a:r>
+            <a:r>
+              <a:rPr sz="1300" i="0" b="0">
+                <a:solidFill>
+                  <a:srgbClr val="D4D4D4"/>
+                </a:solidFill>
+                <a:latin typeface="Consolas"/>
+              </a:rPr>
+              <a:t>end</a:t>
             </a:r>
           </a:p>
           <a:p>
             <a:pPr>
               <a:spcAft>
-                <a:spcPts val="342"/>
+                <a:spcPts val="278"/>
               </a:spcAft>
             </a:pPr>
             <a:r>
-              <a:rPr sz="1600" i="0" b="0">
+              <a:rPr sz="1300" i="0" b="0">
                 <a:solidFill>
                   <a:srgbClr val="D4D4D4"/>
                 </a:solidFill>
@@ -12932,41 +12676,176 @@
               <a:t>  </a:t>
             </a:r>
             <a:r>
-              <a:rPr sz="1600" i="0" b="0">
-                <a:solidFill>
-                  <a:srgbClr val="D4D4D4"/>
-                </a:solidFill>
-                <a:latin typeface="Consolas"/>
-              </a:rPr>
-              <a:t>end</a:t>
+              <a:rPr sz="1300" i="0" b="0">
+                <a:solidFill>
+                  <a:srgbClr val="D4D4D4"/>
+                </a:solidFill>
+                <a:latin typeface="Consolas"/>
+              </a:rPr>
+              <a:t>subgraph</a:t>
+            </a:r>
+            <a:r>
+              <a:rPr sz="1300" i="0" b="0">
+                <a:solidFill>
+                  <a:srgbClr val="D4D4D4"/>
+                </a:solidFill>
+                <a:latin typeface="Consolas"/>
+              </a:rPr>
+              <a:t> </a:t>
+            </a:r>
+            <a:r>
+              <a:rPr sz="1300" i="0" b="0">
+                <a:solidFill>
+                  <a:srgbClr val="D4D4D4"/>
+                </a:solidFill>
+                <a:latin typeface="Consolas"/>
+              </a:rPr>
+              <a:t>v2</a:t>
+            </a:r>
+            <a:r>
+              <a:rPr sz="1300" i="0" b="0">
+                <a:solidFill>
+                  <a:srgbClr val="D4D4D4"/>
+                </a:solidFill>
+                <a:latin typeface="Consolas"/>
+              </a:rPr>
+              <a:t>[</a:t>
+            </a:r>
+            <a:r>
+              <a:rPr sz="1300" i="0" b="0">
+                <a:solidFill>
+                  <a:srgbClr val="D4D4D4"/>
+                </a:solidFill>
+                <a:latin typeface="Consolas"/>
+              </a:rPr>
+              <a:t>Vuelta</a:t>
+            </a:r>
+            <a:r>
+              <a:rPr sz="1300" i="0" b="0">
+                <a:solidFill>
+                  <a:srgbClr val="D4D4D4"/>
+                </a:solidFill>
+                <a:latin typeface="Consolas"/>
+              </a:rPr>
+              <a:t> </a:t>
+            </a:r>
+            <a:r>
+              <a:rPr sz="1300" i="0" b="0">
+                <a:solidFill>
+                  <a:srgbClr val="B5CEA8"/>
+                </a:solidFill>
+                <a:latin typeface="Consolas"/>
+              </a:rPr>
+              <a:t>2</a:t>
+            </a:r>
+            <a:r>
+              <a:rPr sz="1300" i="0" b="0">
+                <a:solidFill>
+                  <a:srgbClr val="D4D4D4"/>
+                </a:solidFill>
+                <a:latin typeface="Consolas"/>
+              </a:rPr>
+              <a:t> - </a:t>
+            </a:r>
+            <a:r>
+              <a:rPr sz="1300" i="0" b="0">
+                <a:solidFill>
+                  <a:srgbClr val="D4D4D4"/>
+                </a:solidFill>
+                <a:latin typeface="Consolas"/>
+              </a:rPr>
+              <a:t>historia</a:t>
+            </a:r>
+            <a:r>
+              <a:rPr sz="1300" i="0" b="0">
+                <a:solidFill>
+                  <a:srgbClr val="D4D4D4"/>
+                </a:solidFill>
+                <a:latin typeface="Consolas"/>
+              </a:rPr>
+              <a:t> </a:t>
+            </a:r>
+            <a:r>
+              <a:rPr sz="1300" i="0" b="0">
+                <a:solidFill>
+                  <a:srgbClr val="D4D4D4"/>
+                </a:solidFill>
+                <a:latin typeface="Consolas"/>
+              </a:rPr>
+              <a:t>clinica</a:t>
+            </a:r>
+            <a:r>
+              <a:rPr sz="1300" i="0" b="0">
+                <a:solidFill>
+                  <a:srgbClr val="D4D4D4"/>
+                </a:solidFill>
+                <a:latin typeface="Consolas"/>
+              </a:rPr>
+              <a:t> </a:t>
+            </a:r>
+            <a:r>
+              <a:rPr sz="1300" i="0" b="0">
+                <a:solidFill>
+                  <a:srgbClr val="D4D4D4"/>
+                </a:solidFill>
+                <a:latin typeface="Consolas"/>
+              </a:rPr>
+              <a:t>y</a:t>
+            </a:r>
+            <a:r>
+              <a:rPr sz="1300" i="0" b="0">
+                <a:solidFill>
+                  <a:srgbClr val="D4D4D4"/>
+                </a:solidFill>
+                <a:latin typeface="Consolas"/>
+              </a:rPr>
+              <a:t> </a:t>
+            </a:r>
+            <a:r>
+              <a:rPr sz="1300" i="0" b="0">
+                <a:solidFill>
+                  <a:srgbClr val="D4D4D4"/>
+                </a:solidFill>
+                <a:latin typeface="Consolas"/>
+              </a:rPr>
+              <a:t>busqueda</a:t>
+            </a:r>
+            <a:r>
+              <a:rPr sz="1300" i="0" b="0">
+                <a:solidFill>
+                  <a:srgbClr val="D4D4D4"/>
+                </a:solidFill>
+                <a:latin typeface="Consolas"/>
+              </a:rPr>
+              <a:t>]</a:t>
             </a:r>
           </a:p>
           <a:p>
             <a:pPr>
               <a:spcAft>
-                <a:spcPts val="342"/>
+                <a:spcPts val="278"/>
               </a:spcAft>
             </a:pPr>
             <a:r>
-              <a:rPr sz="1600" i="0" b="0">
-                <a:solidFill>
-                  <a:srgbClr val="D4D4D4"/>
-                </a:solidFill>
-                <a:latin typeface="Consolas"/>
-              </a:rPr>
-              <a:t>  </a:t>
-            </a:r>
-            <a:r>
-              <a:rPr sz="1600" i="0" b="0">
-                <a:solidFill>
-                  <a:srgbClr val="D4D4D4"/>
-                </a:solidFill>
-                <a:latin typeface="Consolas"/>
-              </a:rPr>
-              <a:t>subgraph</a:t>
-            </a:r>
-            <a:r>
-              <a:rPr sz="1600" i="0" b="0">
+              <a:rPr sz="1300" i="0" b="0">
+                <a:solidFill>
+                  <a:srgbClr val="D4D4D4"/>
+                </a:solidFill>
+                <a:latin typeface="Consolas"/>
+              </a:rPr>
+              <a:t>    </a:t>
+            </a:r>
+            <a:r>
+              <a:rPr sz="1300" i="0" b="0">
+                <a:solidFill>
+                  <a:srgbClr val="D4D4D4"/>
+                </a:solidFill>
+                <a:latin typeface="Consolas"/>
+              </a:rPr>
+              <a:t>direction</a:t>
+            </a:r>
+            <a:r>
+              <a:rPr sz="1300" i="0" b="0">
                 <a:solidFill>
                   <a:srgbClr val="D4D4D4"/>
                 </a:solidFill>
@@ -12975,122 +12854,23 @@
               <a:t> </a:t>
             </a:r>
             <a:r>
-              <a:rPr sz="1600" i="0" b="0">
-                <a:solidFill>
-                  <a:srgbClr val="D4D4D4"/>
-                </a:solidFill>
-                <a:latin typeface="Consolas"/>
-              </a:rPr>
-              <a:t>v3</a:t>
-            </a:r>
-            <a:r>
-              <a:rPr sz="1600" i="0" b="0">
-                <a:solidFill>
-                  <a:srgbClr val="D4D4D4"/>
-                </a:solidFill>
-                <a:latin typeface="Consolas"/>
-              </a:rPr>
-              <a:t>[</a:t>
-            </a:r>
-            <a:r>
-              <a:rPr sz="1600" i="0" b="0">
-                <a:solidFill>
-                  <a:srgbClr val="D4D4D4"/>
-                </a:solidFill>
-                <a:latin typeface="Consolas"/>
-              </a:rPr>
-              <a:t>Vuelta</a:t>
-            </a:r>
-            <a:r>
-              <a:rPr sz="1600" i="0" b="0">
-                <a:solidFill>
-                  <a:srgbClr val="D4D4D4"/>
-                </a:solidFill>
-                <a:latin typeface="Consolas"/>
-              </a:rPr>
-              <a:t> </a:t>
-            </a:r>
-            <a:r>
-              <a:rPr sz="1600" i="0" b="0">
-                <a:solidFill>
-                  <a:srgbClr val="B5CEA8"/>
-                </a:solidFill>
-                <a:latin typeface="Consolas"/>
-              </a:rPr>
-              <a:t>3</a:t>
-            </a:r>
-            <a:r>
-              <a:rPr sz="1600" i="0" b="0">
-                <a:solidFill>
-                  <a:srgbClr val="D4D4D4"/>
-                </a:solidFill>
-                <a:latin typeface="Consolas"/>
-              </a:rPr>
-              <a:t> - </a:t>
-            </a:r>
-            <a:r>
-              <a:rPr sz="1600" i="0" b="0">
-                <a:solidFill>
-                  <a:srgbClr val="D4D4D4"/>
-                </a:solidFill>
-                <a:latin typeface="Consolas"/>
-              </a:rPr>
-              <a:t>reportes</a:t>
-            </a:r>
-            <a:r>
-              <a:rPr sz="1600" i="0" b="0">
-                <a:solidFill>
-                  <a:srgbClr val="D4D4D4"/>
-                </a:solidFill>
-                <a:latin typeface="Consolas"/>
-              </a:rPr>
-              <a:t> </a:t>
-            </a:r>
-            <a:r>
-              <a:rPr sz="1600" i="0" b="0">
-                <a:solidFill>
-                  <a:srgbClr val="D4D4D4"/>
-                </a:solidFill>
-                <a:latin typeface="Consolas"/>
-              </a:rPr>
-              <a:t>y</a:t>
-            </a:r>
-            <a:r>
-              <a:rPr sz="1600" i="0" b="0">
-                <a:solidFill>
-                  <a:srgbClr val="D4D4D4"/>
-                </a:solidFill>
-                <a:latin typeface="Consolas"/>
-              </a:rPr>
-              <a:t> </a:t>
-            </a:r>
-            <a:r>
-              <a:rPr sz="1600" i="0" b="0">
-                <a:solidFill>
-                  <a:srgbClr val="D4D4D4"/>
-                </a:solidFill>
-                <a:latin typeface="Consolas"/>
-              </a:rPr>
-              <a:t>metricas</a:t>
-            </a:r>
-            <a:r>
-              <a:rPr sz="1600" i="0" b="0">
-                <a:solidFill>
-                  <a:srgbClr val="D4D4D4"/>
-                </a:solidFill>
-                <a:latin typeface="Consolas"/>
-              </a:rPr>
-              <a:t>]</a:t>
+              <a:rPr sz="1300" i="0" b="0">
+                <a:solidFill>
+                  <a:srgbClr val="D4D4D4"/>
+                </a:solidFill>
+                <a:latin typeface="Consolas"/>
+              </a:rPr>
+              <a:t>LR</a:t>
             </a:r>
           </a:p>
           <a:p>
             <a:pPr>
               <a:spcAft>
-                <a:spcPts val="342"/>
+                <a:spcPts val="278"/>
               </a:spcAft>
             </a:pPr>
             <a:r>
-              <a:rPr sz="1600" i="0" b="0">
+              <a:rPr sz="1300" i="0" b="0">
                 <a:solidFill>
                   <a:srgbClr val="D4D4D4"/>
                 </a:solidFill>
@@ -13099,16 +12879,16 @@
               <a:t>    </a:t>
             </a:r>
             <a:r>
-              <a:rPr sz="1600" i="0" b="0">
-                <a:solidFill>
-                  <a:srgbClr val="D4D4D4"/>
-                </a:solidFill>
-                <a:latin typeface="Consolas"/>
-              </a:rPr>
-              <a:t>r3</a:t>
-            </a:r>
-            <a:r>
-              <a:rPr sz="1600" i="0" b="0">
+              <a:rPr sz="1300" i="0" b="0">
+                <a:solidFill>
+                  <a:srgbClr val="D4D4D4"/>
+                </a:solidFill>
+                <a:latin typeface="Consolas"/>
+              </a:rPr>
+              <a:t>r2</a:t>
+            </a:r>
+            <a:r>
+              <a:rPr sz="1300" i="0" b="0">
                 <a:solidFill>
                   <a:srgbClr val="D4D4D4"/>
                 </a:solidFill>
@@ -13117,7 +12897,7 @@
               <a:t>[</a:t>
             </a:r>
             <a:r>
-              <a:rPr sz="1600" i="0" b="0">
+              <a:rPr sz="1300" i="0" b="0">
                 <a:solidFill>
                   <a:srgbClr val="D4D4D4"/>
                 </a:solidFill>
@@ -13126,7 +12906,7 @@
               <a:t>Requisitos</a:t>
             </a:r>
             <a:r>
-              <a:rPr sz="1600" i="0" b="0">
+              <a:rPr sz="1300" i="0" b="0">
                 <a:solidFill>
                   <a:srgbClr val="D4D4D4"/>
                 </a:solidFill>
@@ -13135,16 +12915,16 @@
               <a:t>] --&gt; </a:t>
             </a:r>
             <a:r>
-              <a:rPr sz="1600" i="0" b="0">
-                <a:solidFill>
-                  <a:srgbClr val="D4D4D4"/>
-                </a:solidFill>
-                <a:latin typeface="Consolas"/>
-              </a:rPr>
-              <a:t>d3</a:t>
-            </a:r>
-            <a:r>
-              <a:rPr sz="1600" i="0" b="0">
+              <a:rPr sz="1300" i="0" b="0">
+                <a:solidFill>
+                  <a:srgbClr val="D4D4D4"/>
+                </a:solidFill>
+                <a:latin typeface="Consolas"/>
+              </a:rPr>
+              <a:t>d2</a:t>
+            </a:r>
+            <a:r>
+              <a:rPr sz="1300" i="0" b="0">
                 <a:solidFill>
                   <a:srgbClr val="D4D4D4"/>
                 </a:solidFill>
@@ -13153,7 +12933,7 @@
               <a:t>[</a:t>
             </a:r>
             <a:r>
-              <a:rPr sz="1600" i="0" b="0">
+              <a:rPr sz="1300" i="0" b="0">
                 <a:solidFill>
                   <a:srgbClr val="D4D4D4"/>
                 </a:solidFill>
@@ -13162,79 +12942,7 @@
               <a:t>Diseno</a:t>
             </a:r>
             <a:r>
-              <a:rPr sz="1600" i="0" b="0">
-                <a:solidFill>
-                  <a:srgbClr val="D4D4D4"/>
-                </a:solidFill>
-                <a:latin typeface="Consolas"/>
-              </a:rPr>
-              <a:t>] --&gt; </a:t>
-            </a:r>
-            <a:r>
-              <a:rPr sz="1600" i="0" b="0">
-                <a:solidFill>
-                  <a:srgbClr val="D4D4D4"/>
-                </a:solidFill>
-                <a:latin typeface="Consolas"/>
-              </a:rPr>
-              <a:t>c3</a:t>
-            </a:r>
-            <a:r>
-              <a:rPr sz="1600" i="0" b="0">
-                <a:solidFill>
-                  <a:srgbClr val="D4D4D4"/>
-                </a:solidFill>
-                <a:latin typeface="Consolas"/>
-              </a:rPr>
-              <a:t>[</a:t>
-            </a:r>
-            <a:r>
-              <a:rPr sz="1600" i="0" b="0">
-                <a:solidFill>
-                  <a:srgbClr val="D4D4D4"/>
-                </a:solidFill>
-                <a:latin typeface="Consolas"/>
-              </a:rPr>
-              <a:t>Construccion</a:t>
-            </a:r>
-            <a:r>
-              <a:rPr sz="1600" i="0" b="0">
-                <a:solidFill>
-                  <a:srgbClr val="D4D4D4"/>
-                </a:solidFill>
-                <a:latin typeface="Consolas"/>
-              </a:rPr>
-              <a:t>] --&gt; </a:t>
-            </a:r>
-            <a:r>
-              <a:rPr sz="1600" i="0" b="0">
-                <a:solidFill>
-                  <a:srgbClr val="D4D4D4"/>
-                </a:solidFill>
-                <a:latin typeface="Consolas"/>
-              </a:rPr>
-              <a:t>p3</a:t>
-            </a:r>
-            <a:r>
-              <a:rPr sz="1600" i="0" b="0">
-                <a:solidFill>
-                  <a:srgbClr val="D4D4D4"/>
-                </a:solidFill>
-                <a:latin typeface="Consolas"/>
-              </a:rPr>
-              <a:t>[</a:t>
-            </a:r>
-            <a:r>
-              <a:rPr sz="1600" i="0" b="0">
-                <a:solidFill>
-                  <a:srgbClr val="D4D4D4"/>
-                </a:solidFill>
-                <a:latin typeface="Consolas"/>
-              </a:rPr>
-              <a:t>Pruebas</a:t>
-            </a:r>
-            <a:r>
-              <a:rPr sz="1600" i="0" b="0">
+              <a:rPr sz="1300" i="0" b="0">
                 <a:solidFill>
                   <a:srgbClr val="D4D4D4"/>
                 </a:solidFill>
@@ -13246,36 +12954,117 @@
           <a:p>
             <a:pPr>
               <a:spcAft>
-                <a:spcPts val="342"/>
+                <a:spcPts val="278"/>
               </a:spcAft>
             </a:pPr>
             <a:r>
-              <a:rPr sz="1600" i="0" b="0">
-                <a:solidFill>
-                  <a:srgbClr val="D4D4D4"/>
-                </a:solidFill>
-                <a:latin typeface="Consolas"/>
-              </a:rPr>
-              <a:t>  </a:t>
-            </a:r>
-            <a:r>
-              <a:rPr sz="1600" i="0" b="0">
-                <a:solidFill>
-                  <a:srgbClr val="D4D4D4"/>
-                </a:solidFill>
-                <a:latin typeface="Consolas"/>
-              </a:rPr>
-              <a:t>end</a:t>
+              <a:rPr sz="1300" i="0" b="0">
+                <a:solidFill>
+                  <a:srgbClr val="D4D4D4"/>
+                </a:solidFill>
+                <a:latin typeface="Consolas"/>
+              </a:rPr>
+              <a:t>    </a:t>
+            </a:r>
+            <a:r>
+              <a:rPr sz="1300" i="0" b="0">
+                <a:solidFill>
+                  <a:srgbClr val="D4D4D4"/>
+                </a:solidFill>
+                <a:latin typeface="Consolas"/>
+              </a:rPr>
+              <a:t>d2</a:t>
+            </a:r>
+            <a:r>
+              <a:rPr sz="1300" i="0" b="0">
+                <a:solidFill>
+                  <a:srgbClr val="D4D4D4"/>
+                </a:solidFill>
+                <a:latin typeface="Consolas"/>
+              </a:rPr>
+              <a:t> --&gt; </a:t>
+            </a:r>
+            <a:r>
+              <a:rPr sz="1300" i="0" b="0">
+                <a:solidFill>
+                  <a:srgbClr val="D4D4D4"/>
+                </a:solidFill>
+                <a:latin typeface="Consolas"/>
+              </a:rPr>
+              <a:t>c2</a:t>
+            </a:r>
+            <a:r>
+              <a:rPr sz="1300" i="0" b="0">
+                <a:solidFill>
+                  <a:srgbClr val="D4D4D4"/>
+                </a:solidFill>
+                <a:latin typeface="Consolas"/>
+              </a:rPr>
+              <a:t>[</a:t>
+            </a:r>
+            <a:r>
+              <a:rPr sz="1300" i="0" b="0">
+                <a:solidFill>
+                  <a:srgbClr val="D4D4D4"/>
+                </a:solidFill>
+                <a:latin typeface="Consolas"/>
+              </a:rPr>
+              <a:t>Construccion</a:t>
+            </a:r>
+            <a:r>
+              <a:rPr sz="1300" i="0" b="0">
+                <a:solidFill>
+                  <a:srgbClr val="D4D4D4"/>
+                </a:solidFill>
+                <a:latin typeface="Consolas"/>
+              </a:rPr>
+              <a:t>] --&gt; </a:t>
+            </a:r>
+            <a:r>
+              <a:rPr sz="1300" i="0" b="0">
+                <a:solidFill>
+                  <a:srgbClr val="D4D4D4"/>
+                </a:solidFill>
+                <a:latin typeface="Consolas"/>
+              </a:rPr>
+              <a:t>p2</a:t>
+            </a:r>
+            <a:r>
+              <a:rPr sz="1300" i="0" b="0">
+                <a:solidFill>
+                  <a:srgbClr val="D4D4D4"/>
+                </a:solidFill>
+                <a:latin typeface="Consolas"/>
+              </a:rPr>
+              <a:t>[</a:t>
+            </a:r>
+            <a:r>
+              <a:rPr sz="1300" i="0" b="0">
+                <a:solidFill>
+                  <a:srgbClr val="D4D4D4"/>
+                </a:solidFill>
+                <a:latin typeface="Consolas"/>
+              </a:rPr>
+              <a:t>Pruebas</a:t>
+            </a:r>
+            <a:r>
+              <a:rPr sz="1300" i="0" b="0">
+                <a:solidFill>
+                  <a:srgbClr val="D4D4D4"/>
+                </a:solidFill>
+                <a:latin typeface="Consolas"/>
+              </a:rPr>
+              <a:t>]</a:t>
             </a:r>
           </a:p>
           <a:p>
             <a:pPr>
               <a:spcAft>
-                <a:spcPts val="342"/>
+                <a:spcPts val="278"/>
               </a:spcAft>
             </a:pPr>
             <a:r>
-              <a:rPr sz="1600" i="0" b="0">
+              <a:rPr sz="1300" i="0" b="0">
                 <a:solidFill>
                   <a:srgbClr val="D4D4D4"/>
                 </a:solidFill>
@@ -13284,41 +13073,23 @@
               <a:t>  </a:t>
             </a:r>
             <a:r>
-              <a:rPr sz="1600" i="0" b="0">
-                <a:solidFill>
-                  <a:srgbClr val="D4D4D4"/>
-                </a:solidFill>
-                <a:latin typeface="Consolas"/>
-              </a:rPr>
-              <a:t>p1</a:t>
-            </a:r>
-            <a:r>
-              <a:rPr sz="1600" i="0" b="0">
-                <a:solidFill>
-                  <a:srgbClr val="D4D4D4"/>
-                </a:solidFill>
-                <a:latin typeface="Consolas"/>
-              </a:rPr>
-              <a:t> --&gt; </a:t>
-            </a:r>
-            <a:r>
-              <a:rPr sz="1600" i="0" b="0">
-                <a:solidFill>
-                  <a:srgbClr val="D4D4D4"/>
-                </a:solidFill>
-                <a:latin typeface="Consolas"/>
-              </a:rPr>
-              <a:t>r2</a:t>
+              <a:rPr sz="1300" i="0" b="0">
+                <a:solidFill>
+                  <a:srgbClr val="D4D4D4"/>
+                </a:solidFill>
+                <a:latin typeface="Consolas"/>
+              </a:rPr>
+              <a:t>end</a:t>
             </a:r>
           </a:p>
           <a:p>
             <a:pPr>
               <a:spcAft>
-                <a:spcPts val="342"/>
+                <a:spcPts val="278"/>
               </a:spcAft>
             </a:pPr>
             <a:r>
-              <a:rPr sz="1600" i="0" b="0">
+              <a:rPr sz="1300" i="0" b="0">
                 <a:solidFill>
                   <a:srgbClr val="D4D4D4"/>
                 </a:solidFill>
@@ -13327,86 +13098,599 @@
               <a:t>  </a:t>
             </a:r>
             <a:r>
-              <a:rPr sz="1600" i="0" b="0">
-                <a:solidFill>
-                  <a:srgbClr val="D4D4D4"/>
-                </a:solidFill>
-                <a:latin typeface="Consolas"/>
-              </a:rPr>
-              <a:t>p2</a:t>
-            </a:r>
-            <a:r>
-              <a:rPr sz="1600" i="0" b="0">
-                <a:solidFill>
-                  <a:srgbClr val="D4D4D4"/>
-                </a:solidFill>
-                <a:latin typeface="Consolas"/>
-              </a:rPr>
-              <a:t> --&gt; </a:t>
-            </a:r>
-            <a:r>
-              <a:rPr sz="1600" i="0" b="0">
-                <a:solidFill>
-                  <a:srgbClr val="D4D4D4"/>
-                </a:solidFill>
-                <a:latin typeface="Consolas"/>
-              </a:rPr>
-              <a:t>r3</a:t>
+              <a:rPr sz="1300" i="0" b="0">
+                <a:solidFill>
+                  <a:srgbClr val="D4D4D4"/>
+                </a:solidFill>
+                <a:latin typeface="Consolas"/>
+              </a:rPr>
+              <a:t>subgraph</a:t>
+            </a:r>
+            <a:r>
+              <a:rPr sz="1300" i="0" b="0">
+                <a:solidFill>
+                  <a:srgbClr val="D4D4D4"/>
+                </a:solidFill>
+                <a:latin typeface="Consolas"/>
+              </a:rPr>
+              <a:t> </a:t>
+            </a:r>
+            <a:r>
+              <a:rPr sz="1300" i="0" b="0">
+                <a:solidFill>
+                  <a:srgbClr val="D4D4D4"/>
+                </a:solidFill>
+                <a:latin typeface="Consolas"/>
+              </a:rPr>
+              <a:t>v3</a:t>
+            </a:r>
+            <a:r>
+              <a:rPr sz="1300" i="0" b="0">
+                <a:solidFill>
+                  <a:srgbClr val="D4D4D4"/>
+                </a:solidFill>
+                <a:latin typeface="Consolas"/>
+              </a:rPr>
+              <a:t>[</a:t>
+            </a:r>
+            <a:r>
+              <a:rPr sz="1300" i="0" b="0">
+                <a:solidFill>
+                  <a:srgbClr val="D4D4D4"/>
+                </a:solidFill>
+                <a:latin typeface="Consolas"/>
+              </a:rPr>
+              <a:t>Vuelta</a:t>
+            </a:r>
+            <a:r>
+              <a:rPr sz="1300" i="0" b="0">
+                <a:solidFill>
+                  <a:srgbClr val="D4D4D4"/>
+                </a:solidFill>
+                <a:latin typeface="Consolas"/>
+              </a:rPr>
+              <a:t> </a:t>
+            </a:r>
+            <a:r>
+              <a:rPr sz="1300" i="0" b="0">
+                <a:solidFill>
+                  <a:srgbClr val="B5CEA8"/>
+                </a:solidFill>
+                <a:latin typeface="Consolas"/>
+              </a:rPr>
+              <a:t>3</a:t>
+            </a:r>
+            <a:r>
+              <a:rPr sz="1300" i="0" b="0">
+                <a:solidFill>
+                  <a:srgbClr val="D4D4D4"/>
+                </a:solidFill>
+                <a:latin typeface="Consolas"/>
+              </a:rPr>
+              <a:t> - </a:t>
+            </a:r>
+            <a:r>
+              <a:rPr sz="1300" i="0" b="0">
+                <a:solidFill>
+                  <a:srgbClr val="D4D4D4"/>
+                </a:solidFill>
+                <a:latin typeface="Consolas"/>
+              </a:rPr>
+              <a:t>reportes</a:t>
+            </a:r>
+            <a:r>
+              <a:rPr sz="1300" i="0" b="0">
+                <a:solidFill>
+                  <a:srgbClr val="D4D4D4"/>
+                </a:solidFill>
+                <a:latin typeface="Consolas"/>
+              </a:rPr>
+              <a:t> </a:t>
+            </a:r>
+            <a:r>
+              <a:rPr sz="1300" i="0" b="0">
+                <a:solidFill>
+                  <a:srgbClr val="D4D4D4"/>
+                </a:solidFill>
+                <a:latin typeface="Consolas"/>
+              </a:rPr>
+              <a:t>y</a:t>
+            </a:r>
+            <a:r>
+              <a:rPr sz="1300" i="0" b="0">
+                <a:solidFill>
+                  <a:srgbClr val="D4D4D4"/>
+                </a:solidFill>
+                <a:latin typeface="Consolas"/>
+              </a:rPr>
+              <a:t> </a:t>
+            </a:r>
+            <a:r>
+              <a:rPr sz="1300" i="0" b="0">
+                <a:solidFill>
+                  <a:srgbClr val="D4D4D4"/>
+                </a:solidFill>
+                <a:latin typeface="Consolas"/>
+              </a:rPr>
+              <a:t>metricas</a:t>
+            </a:r>
+            <a:r>
+              <a:rPr sz="1300" i="0" b="0">
+                <a:solidFill>
+                  <a:srgbClr val="D4D4D4"/>
+                </a:solidFill>
+                <a:latin typeface="Consolas"/>
+              </a:rPr>
+              <a:t>]</a:t>
             </a:r>
           </a:p>
           <a:p>
             <a:pPr>
               <a:spcAft>
-                <a:spcPts val="342"/>
+                <a:spcPts val="278"/>
               </a:spcAft>
             </a:pPr>
             <a:r>
-              <a:rPr sz="1600" i="0" b="0">
-                <a:solidFill>
-                  <a:srgbClr val="D4D4D4"/>
-                </a:solidFill>
-                <a:latin typeface="Consolas"/>
-              </a:rPr>
-              <a:t/>
+              <a:rPr sz="1300" i="0" b="0">
+                <a:solidFill>
+                  <a:srgbClr val="D4D4D4"/>
+                </a:solidFill>
+                <a:latin typeface="Consolas"/>
+              </a:rPr>
+              <a:t>    </a:t>
+            </a:r>
+            <a:r>
+              <a:rPr sz="1300" i="0" b="0">
+                <a:solidFill>
+                  <a:srgbClr val="D4D4D4"/>
+                </a:solidFill>
+                <a:latin typeface="Consolas"/>
+              </a:rPr>
+              <a:t>direction</a:t>
+            </a:r>
+            <a:r>
+              <a:rPr sz="1300" i="0" b="0">
+                <a:solidFill>
+                  <a:srgbClr val="D4D4D4"/>
+                </a:solidFill>
+                <a:latin typeface="Consolas"/>
+              </a:rPr>
+              <a:t> </a:t>
+            </a:r>
+            <a:r>
+              <a:rPr sz="1300" i="0" b="0">
+                <a:solidFill>
+                  <a:srgbClr val="D4D4D4"/>
+                </a:solidFill>
+                <a:latin typeface="Consolas"/>
+              </a:rPr>
+              <a:t>LR</a:t>
             </a:r>
           </a:p>
           <a:p>
             <a:pPr>
               <a:spcAft>
-                <a:spcPts val="342"/>
+                <a:spcPts val="278"/>
               </a:spcAft>
             </a:pPr>
             <a:r>
-              <a:rPr sz="1600" i="1" b="0">
-                <a:solidFill>
-                  <a:srgbClr val="6A9955"/>
-                </a:solidFill>
-                <a:latin typeface="Consolas"/>
-              </a:rPr>
-              <a:t>%% Iterativo no es «hacerlo mal y repetir»: cada vuelta entrega algo</a:t>
+              <a:rPr sz="1300" i="0" b="0">
+                <a:solidFill>
+                  <a:srgbClr val="D4D4D4"/>
+                </a:solidFill>
+                <a:latin typeface="Consolas"/>
+              </a:rPr>
+              <a:t>    </a:t>
+            </a:r>
+            <a:r>
+              <a:rPr sz="1300" i="0" b="0">
+                <a:solidFill>
+                  <a:srgbClr val="D4D4D4"/>
+                </a:solidFill>
+                <a:latin typeface="Consolas"/>
+              </a:rPr>
+              <a:t>r3</a:t>
+            </a:r>
+            <a:r>
+              <a:rPr sz="1300" i="0" b="0">
+                <a:solidFill>
+                  <a:srgbClr val="D4D4D4"/>
+                </a:solidFill>
+                <a:latin typeface="Consolas"/>
+              </a:rPr>
+              <a:t>[</a:t>
+            </a:r>
+            <a:r>
+              <a:rPr sz="1300" i="0" b="0">
+                <a:solidFill>
+                  <a:srgbClr val="D4D4D4"/>
+                </a:solidFill>
+                <a:latin typeface="Consolas"/>
+              </a:rPr>
+              <a:t>Requisitos</a:t>
+            </a:r>
+            <a:r>
+              <a:rPr sz="1300" i="0" b="0">
+                <a:solidFill>
+                  <a:srgbClr val="D4D4D4"/>
+                </a:solidFill>
+                <a:latin typeface="Consolas"/>
+              </a:rPr>
+              <a:t>] --&gt; </a:t>
+            </a:r>
+            <a:r>
+              <a:rPr sz="1300" i="0" b="0">
+                <a:solidFill>
+                  <a:srgbClr val="D4D4D4"/>
+                </a:solidFill>
+                <a:latin typeface="Consolas"/>
+              </a:rPr>
+              <a:t>d3</a:t>
+            </a:r>
+            <a:r>
+              <a:rPr sz="1300" i="0" b="0">
+                <a:solidFill>
+                  <a:srgbClr val="D4D4D4"/>
+                </a:solidFill>
+                <a:latin typeface="Consolas"/>
+              </a:rPr>
+              <a:t>[</a:t>
+            </a:r>
+            <a:r>
+              <a:rPr sz="1300" i="0" b="0">
+                <a:solidFill>
+                  <a:srgbClr val="D4D4D4"/>
+                </a:solidFill>
+                <a:latin typeface="Consolas"/>
+              </a:rPr>
+              <a:t>Diseno</a:t>
+            </a:r>
+            <a:r>
+              <a:rPr sz="1300" i="0" b="0">
+                <a:solidFill>
+                  <a:srgbClr val="D4D4D4"/>
+                </a:solidFill>
+                <a:latin typeface="Consolas"/>
+              </a:rPr>
+              <a:t>]</a:t>
             </a:r>
           </a:p>
           <a:p>
             <a:pPr>
               <a:spcAft>
-                <a:spcPts val="342"/>
+                <a:spcPts val="278"/>
               </a:spcAft>
             </a:pPr>
             <a:r>
-              <a:rPr sz="1600" i="1" b="0">
-                <a:solidFill>
-                  <a:srgbClr val="6A9955"/>
-                </a:solidFill>
-                <a:latin typeface="Consolas"/>
-              </a:rPr>
-              <a:t>%% que funciona, sobre un subconjunto del alcance.</a:t>
-            </a:r>
-          </a:p>
-        </p:txBody>
-      </p:sp>
-      <p:sp>
-        <p:nvSpPr>
-          <p:cNvPr id="13" name="TextBox 12"/>
+              <a:rPr sz="1300" i="0" b="0">
+                <a:solidFill>
+                  <a:srgbClr val="D4D4D4"/>
+                </a:solidFill>
+                <a:latin typeface="Consolas"/>
+              </a:rPr>
+              <a:t>    </a:t>
+            </a:r>
+            <a:r>
+              <a:rPr sz="1300" i="0" b="0">
+                <a:solidFill>
+                  <a:srgbClr val="D4D4D4"/>
+                </a:solidFill>
+                <a:latin typeface="Consolas"/>
+              </a:rPr>
+              <a:t>d3</a:t>
+            </a:r>
+            <a:r>
+              <a:rPr sz="1300" i="0" b="0">
+                <a:solidFill>
+                  <a:srgbClr val="D4D4D4"/>
+                </a:solidFill>
+                <a:latin typeface="Consolas"/>
+              </a:rPr>
+              <a:t> --&gt; </a:t>
+            </a:r>
+            <a:r>
+              <a:rPr sz="1300" i="0" b="0">
+                <a:solidFill>
+                  <a:srgbClr val="D4D4D4"/>
+                </a:solidFill>
+                <a:latin typeface="Consolas"/>
+              </a:rPr>
+              <a:t>c3</a:t>
+            </a:r>
+            <a:r>
+              <a:rPr sz="1300" i="0" b="0">
+                <a:solidFill>
+                  <a:srgbClr val="D4D4D4"/>
+                </a:solidFill>
+                <a:latin typeface="Consolas"/>
+              </a:rPr>
+              <a:t>[</a:t>
+            </a:r>
+            <a:r>
+              <a:rPr sz="1300" i="0" b="0">
+                <a:solidFill>
+                  <a:srgbClr val="D4D4D4"/>
+                </a:solidFill>
+                <a:latin typeface="Consolas"/>
+              </a:rPr>
+              <a:t>Construccion</a:t>
+            </a:r>
+            <a:r>
+              <a:rPr sz="1300" i="0" b="0">
+                <a:solidFill>
+                  <a:srgbClr val="D4D4D4"/>
+                </a:solidFill>
+                <a:latin typeface="Consolas"/>
+              </a:rPr>
+              <a:t>] --&gt; </a:t>
+            </a:r>
+            <a:r>
+              <a:rPr sz="1300" i="0" b="0">
+                <a:solidFill>
+                  <a:srgbClr val="D4D4D4"/>
+                </a:solidFill>
+                <a:latin typeface="Consolas"/>
+              </a:rPr>
+              <a:t>p3</a:t>
+            </a:r>
+            <a:r>
+              <a:rPr sz="1300" i="0" b="0">
+                <a:solidFill>
+                  <a:srgbClr val="D4D4D4"/>
+                </a:solidFill>
+                <a:latin typeface="Consolas"/>
+              </a:rPr>
+              <a:t>[</a:t>
+            </a:r>
+            <a:r>
+              <a:rPr sz="1300" i="0" b="0">
+                <a:solidFill>
+                  <a:srgbClr val="D4D4D4"/>
+                </a:solidFill>
+                <a:latin typeface="Consolas"/>
+              </a:rPr>
+              <a:t>Pruebas</a:t>
+            </a:r>
+            <a:r>
+              <a:rPr sz="1300" i="0" b="0">
+                <a:solidFill>
+                  <a:srgbClr val="D4D4D4"/>
+                </a:solidFill>
+                <a:latin typeface="Consolas"/>
+              </a:rPr>
+              <a:t>]</a:t>
+            </a:r>
+          </a:p>
+          <a:p>
+            <a:pPr>
+              <a:spcAft>
+                <a:spcPts val="278"/>
+              </a:spcAft>
+            </a:pPr>
+            <a:r>
+              <a:rPr sz="1300" i="0" b="0">
+                <a:solidFill>
+                  <a:srgbClr val="D4D4D4"/>
+                </a:solidFill>
+                <a:latin typeface="Consolas"/>
+              </a:rPr>
+              <a:t>  </a:t>
+            </a:r>
+            <a:r>
+              <a:rPr sz="1300" i="0" b="0">
+                <a:solidFill>
+                  <a:srgbClr val="D4D4D4"/>
+                </a:solidFill>
+                <a:latin typeface="Consolas"/>
+              </a:rPr>
+              <a:t>end</a:t>
+            </a:r>
+          </a:p>
+          <a:p>
+            <a:pPr>
+              <a:spcAft>
+                <a:spcPts val="278"/>
+              </a:spcAft>
+            </a:pPr>
+            <a:r>
+              <a:rPr sz="1300" i="0" b="0">
+                <a:solidFill>
+                  <a:srgbClr val="D4D4D4"/>
+                </a:solidFill>
+                <a:latin typeface="Consolas"/>
+              </a:rPr>
+              <a:t>  </a:t>
+            </a:r>
+            <a:r>
+              <a:rPr sz="1300" i="0" b="0">
+                <a:solidFill>
+                  <a:srgbClr val="D4D4D4"/>
+                </a:solidFill>
+                <a:latin typeface="Consolas"/>
+              </a:rPr>
+              <a:t>v1</a:t>
+            </a:r>
+            <a:r>
+              <a:rPr sz="1300" i="0" b="0">
+                <a:solidFill>
+                  <a:srgbClr val="D4D4D4"/>
+                </a:solidFill>
+                <a:latin typeface="Consolas"/>
+              </a:rPr>
+              <a:t> --&gt; </a:t>
+            </a:r>
+            <a:r>
+              <a:rPr sz="1300" i="0" b="0">
+                <a:solidFill>
+                  <a:srgbClr val="D4D4D4"/>
+                </a:solidFill>
+                <a:latin typeface="Consolas"/>
+              </a:rPr>
+              <a:t>v2</a:t>
+            </a:r>
+            <a:r>
+              <a:rPr sz="1300" i="0" b="0">
+                <a:solidFill>
+                  <a:srgbClr val="D4D4D4"/>
+                </a:solidFill>
+                <a:latin typeface="Consolas"/>
+              </a:rPr>
+              <a:t> --&gt; </a:t>
+            </a:r>
+            <a:r>
+              <a:rPr sz="1300" i="0" b="0">
+                <a:solidFill>
+                  <a:srgbClr val="D4D4D4"/>
+                </a:solidFill>
+                <a:latin typeface="Consolas"/>
+              </a:rPr>
+              <a:t>v3</a:t>
+            </a:r>
+          </a:p>
+        </p:txBody>
+      </p:sp>
+      <p:sp>
+        <p:nvSpPr>
+          <p:cNvPr id="13" name="Rounded Rectangle 12"/>
+          <p:cNvSpPr/>
+          <p:nvPr/>
+        </p:nvSpPr>
+        <p:spPr>
+          <a:xfrm>
+            <a:off x="7668579" y="1261872"/>
+            <a:ext cx="4120780" cy="3318569"/>
+          </a:xfrm>
+          <a:prstGeom prst="roundRect">
+            <a:avLst>
+              <a:gd name="adj" fmla="val 4000"/>
+            </a:avLst>
+          </a:prstGeom>
+          <a:solidFill>
+            <a:srgbClr val="E8EEF4"/>
+          </a:solidFill>
+          <a:ln>
+            <a:noFill/>
+          </a:ln>
+        </p:spPr>
+        <p:style>
+          <a:lnRef idx="1">
+            <a:schemeClr val="accent1"/>
+          </a:lnRef>
+          <a:fillRef idx="3">
+            <a:schemeClr val="accent1"/>
+          </a:fillRef>
+          <a:effectRef idx="2">
+            <a:schemeClr val="accent1"/>
+          </a:effectRef>
+          <a:fontRef idx="minor">
+            <a:schemeClr val="lt1"/>
+          </a:fontRef>
+        </p:style>
+        <p:txBody>
+          <a:bodyPr rtlCol="0" anchor="ctr"/>
+          <a:lstStyle/>
+          <a:p>
+            <a:pPr algn="ctr"/>
+          </a:p>
+        </p:txBody>
+      </p:sp>
+      <p:pic>
+        <p:nvPicPr>
+          <p:cNvPr id="14" name="Picture 13" descr="dg-tres-vueltas-paso1.png"/>
+          <p:cNvPicPr>
+            <a:picLocks noChangeAspect="1"/>
+          </p:cNvPicPr>
+          <p:nvPr/>
+        </p:nvPicPr>
+        <p:blipFill>
+          <a:blip r:embed="rId2"/>
+          <a:stretch>
+            <a:fillRect/>
+          </a:stretch>
+        </p:blipFill>
+        <p:spPr>
+          <a:xfrm>
+            <a:off x="7723443" y="1316736"/>
+            <a:ext cx="4011052" cy="3208841"/>
+          </a:xfrm>
+          <a:prstGeom prst="rect">
+            <a:avLst/>
+          </a:prstGeom>
+        </p:spPr>
+      </p:pic>
+      <p:sp>
+        <p:nvSpPr>
+          <p:cNvPr id="15" name="TextBox 14"/>
+          <p:cNvSpPr txBox="1"/>
+          <p:nvPr/>
+        </p:nvSpPr>
+        <p:spPr>
+          <a:xfrm>
+            <a:off x="7723443" y="4580441"/>
+            <a:ext cx="4011052" cy="320040"/>
+          </a:xfrm>
+          <a:prstGeom prst="rect">
+            <a:avLst/>
+          </a:prstGeom>
+          <a:noFill/>
+        </p:spPr>
+        <p:txBody>
+          <a:bodyPr wrap="square">
+            <a:spAutoFit/>
+          </a:bodyPr>
+          <a:lstStyle/>
+          <a:p>
+            <a:pPr algn="ctr"/>
+            <a:r>
+              <a:rPr sz="1200" b="0" i="1">
+                <a:solidFill>
+                  <a:srgbClr val="666666"/>
+                </a:solidFill>
+                <a:latin typeface="Calibri"/>
+              </a:rPr>
+              <a:t>Lo que dibuja este código</a:t>
+            </a:r>
+          </a:p>
+        </p:txBody>
+      </p:sp>
+      <p:sp>
+        <p:nvSpPr>
+          <p:cNvPr id="16" name="TextBox 15"/>
+          <p:cNvSpPr txBox="1"/>
+          <p:nvPr/>
+        </p:nvSpPr>
+        <p:spPr>
+          <a:xfrm>
+            <a:off x="457200" y="6035040"/>
+            <a:ext cx="11277295" cy="365760"/>
+          </a:xfrm>
+          <a:prstGeom prst="rect">
+            <a:avLst/>
+          </a:prstGeom>
+          <a:noFill/>
+        </p:spPr>
+        <p:txBody>
+          <a:bodyPr wrap="square">
+            <a:spAutoFit/>
+          </a:bodyPr>
+          <a:lstStyle/>
+          <a:p>
+            <a:pPr algn="ctr"/>
+            <a:r>
+              <a:rPr sz="1300" b="0" i="1">
+                <a:solidFill>
+                  <a:srgbClr val="666666"/>
+                </a:solidFill>
+                <a:latin typeface="Calibri"/>
+              </a:rPr>
+              <a:t>Iterativo no es «hacerlo mal y repetir»: cada vuelta entrega algo que funciona, sobre una parte del alcance.</a:t>
+            </a:r>
+          </a:p>
+        </p:txBody>
+      </p:sp>
+      <p:sp>
+        <p:nvSpPr>
+          <p:cNvPr id="17" name="TextBox 16"/>
           <p:cNvSpPr txBox="1"/>
           <p:nvPr/>
         </p:nvSpPr>
